--- a/02-PROFESORADO/03-PRESENTACIONES/POR-SESION/h1/S215-defensa-y-cierre-h1-presentacion.pptx
+++ b/02-PROFESORADO/03-PRESENTACIONES/POR-SESION/h1/S215-defensa-y-cierre-h1-presentacion.pptx
@@ -11,6 +11,8 @@
     <p:sldId id="259" r:id="rId10"/>
     <p:sldId id="260" r:id="rId11"/>
     <p:sldId id="261" r:id="rId12"/>
+    <p:sldId id="262" r:id="rId13"/>
+    <p:sldId id="263" r:id="rId14"/>
   </p:sldIdLst>
   <p:sldSz cx="12191695" cy="6858000" type="screen4x3"/>
   <p:notesSz cx="6858000" cy="9144000"/>
@@ -3145,7 +3147,7 @@
         <p:spPr>
           <a:xfrm>
             <a:off x="0" y="0"/>
-            <a:ext cx="228600" cy="6858000"/>
+            <a:ext cx="256032" cy="6858000"/>
           </a:xfrm>
           <a:prstGeom prst="rect">
             <a:avLst/>
@@ -3187,8 +3189,8 @@
         </p:nvSpPr>
         <p:spPr>
           <a:xfrm>
-            <a:off x="640080" y="566928"/>
-            <a:ext cx="1828800" cy="566928"/>
+            <a:off x="658368" y="566928"/>
+            <a:ext cx="1874519" cy="566928"/>
           </a:xfrm>
           <a:prstGeom prst="roundRect">
             <a:avLst/>
@@ -3197,7 +3199,9 @@
             <a:srgbClr val="2F5BA8"/>
           </a:solidFill>
           <a:ln>
-            <a:noFill/>
+            <a:solidFill>
+              <a:srgbClr val="2F5BA8"/>
+            </a:solidFill>
           </a:ln>
         </p:spPr>
         <p:style>
@@ -3230,8 +3234,8 @@
         </p:nvSpPr>
         <p:spPr>
           <a:xfrm>
-            <a:off x="713232" y="676656"/>
-            <a:ext cx="1682496" cy="256032"/>
+            <a:off x="731520" y="685800"/>
+            <a:ext cx="1719072" cy="228600"/>
           </a:xfrm>
           <a:prstGeom prst="rect">
             <a:avLst/>
@@ -3239,7 +3243,7 @@
           <a:noFill/>
         </p:spPr>
         <p:txBody>
-          <a:bodyPr wrap="square" lIns="36576" rIns="36576" tIns="27432" bIns="27432">
+          <a:bodyPr wrap="square" lIns="45720" rIns="45720" tIns="36576" bIns="36576" anchor="t">
             <a:spAutoFit/>
           </a:bodyPr>
           <a:lstStyle/>
@@ -3266,8 +3270,8 @@
         </p:nvSpPr>
         <p:spPr>
           <a:xfrm>
-            <a:off x="658368" y="1536192"/>
-            <a:ext cx="10789920" cy="1645920"/>
+            <a:off x="685800" y="1481328"/>
+            <a:ext cx="10789920" cy="1691640"/>
           </a:xfrm>
           <a:prstGeom prst="rect">
             <a:avLst/>
@@ -3275,7 +3279,7 @@
           <a:noFill/>
         </p:spPr>
         <p:txBody>
-          <a:bodyPr wrap="square" lIns="36576" rIns="36576" tIns="27432" bIns="27432">
+          <a:bodyPr wrap="square" lIns="45720" rIns="45720" tIns="36576" bIns="36576" anchor="t">
             <a:spAutoFit/>
           </a:bodyPr>
           <a:lstStyle/>
@@ -3302,8 +3306,8 @@
         </p:nvSpPr>
         <p:spPr>
           <a:xfrm>
-            <a:off x="685800" y="3822191"/>
-            <a:ext cx="6766560" cy="384048"/>
+            <a:off x="713232" y="3703320"/>
+            <a:ext cx="10424160" cy="411480"/>
           </a:xfrm>
           <a:prstGeom prst="rect">
             <a:avLst/>
@@ -3311,7 +3315,7 @@
           <a:noFill/>
         </p:spPr>
         <p:txBody>
-          <a:bodyPr wrap="square" lIns="36576" rIns="36576" tIns="27432" bIns="27432">
+          <a:bodyPr wrap="square" lIns="45720" rIns="45720" tIns="36576" bIns="36576" anchor="t">
             <a:spAutoFit/>
           </a:bodyPr>
           <a:lstStyle/>
@@ -3325,7 +3329,7 @@
               </a:defRPr>
             </a:pPr>
             <a:r>
-              <a:t>H1  ·  45 minutos</a:t>
+              <a:t>H1 · 45 minutos</a:t>
             </a:r>
           </a:p>
         </p:txBody>
@@ -3338,8 +3342,8 @@
         </p:nvSpPr>
         <p:spPr>
           <a:xfrm>
-            <a:off x="685800" y="5074920"/>
-            <a:ext cx="10241280" cy="640080"/>
+            <a:off x="713232" y="4315968"/>
+            <a:ext cx="10241280" cy="502920"/>
           </a:xfrm>
           <a:prstGeom prst="rect">
             <a:avLst/>
@@ -3347,13 +3351,13 @@
           <a:noFill/>
         </p:spPr>
         <p:txBody>
-          <a:bodyPr wrap="square" lIns="36576" rIns="36576" tIns="27432" bIns="27432">
+          <a:bodyPr wrap="square" lIns="45720" rIns="45720" tIns="36576" bIns="36576" anchor="t">
             <a:spAutoFit/>
           </a:bodyPr>
           <a:lstStyle/>
           <a:p>
             <a:pPr algn="l">
-              <a:defRPr sz="2400" b="0">
+              <a:defRPr sz="1900" b="0">
                 <a:solidFill>
                   <a:srgbClr val="FFFFFF"/>
                 </a:solidFill>
@@ -3361,7 +3365,7 @@
               </a:defRPr>
             </a:pPr>
             <a:r>
-              <a:t>Hoy construiremos una evidencia que puedas comprobar y explicar.</a:t>
+              <a:t>Fase HEXA: Comunicar — evaluar y reflexionar</a:t>
             </a:r>
           </a:p>
         </p:txBody>
@@ -3374,7 +3378,7 @@
         </p:nvSpPr>
         <p:spPr>
           <a:xfrm>
-            <a:off x="685800" y="6272784"/>
+            <a:off x="713232" y="6272784"/>
             <a:ext cx="10607040" cy="201168"/>
           </a:xfrm>
           <a:prstGeom prst="rect">
@@ -3383,7 +3387,7 @@
           <a:noFill/>
         </p:spPr>
         <p:txBody>
-          <a:bodyPr wrap="square" lIns="36576" rIns="36576" tIns="27432" bIns="27432">
+          <a:bodyPr wrap="square" lIns="45720" rIns="45720" tIns="36576" bIns="36576" anchor="t">
             <a:spAutoFit/>
           </a:bodyPr>
           <a:lstStyle/>
@@ -3514,8 +3518,8 @@
         </p:nvSpPr>
         <p:spPr>
           <a:xfrm>
-            <a:off x="502920" y="310896"/>
-            <a:ext cx="5029200" cy="256032"/>
+            <a:off x="502920" y="274320"/>
+            <a:ext cx="5486400" cy="256032"/>
           </a:xfrm>
           <a:prstGeom prst="rect">
             <a:avLst/>
@@ -3523,7 +3527,7 @@
           <a:noFill/>
         </p:spPr>
         <p:txBody>
-          <a:bodyPr wrap="square" lIns="36576" rIns="36576" tIns="27432" bIns="27432">
+          <a:bodyPr wrap="square" lIns="45720" rIns="45720" tIns="36576" bIns="36576" anchor="t">
             <a:spAutoFit/>
           </a:bodyPr>
           <a:lstStyle/>
@@ -3550,7 +3554,7 @@
         </p:nvSpPr>
         <p:spPr>
           <a:xfrm>
-            <a:off x="502920" y="621792"/>
+            <a:off x="502920" y="603504"/>
             <a:ext cx="11064240" cy="530352"/>
           </a:xfrm>
           <a:prstGeom prst="rect">
@@ -3559,7 +3563,7 @@
           <a:noFill/>
         </p:spPr>
         <p:txBody>
-          <a:bodyPr wrap="square" lIns="36576" rIns="36576" tIns="27432" bIns="27432">
+          <a:bodyPr wrap="square" lIns="45720" rIns="45720" tIns="36576" bIns="36576" anchor="t">
             <a:spAutoFit/>
           </a:bodyPr>
           <a:lstStyle/>
@@ -3573,7 +3577,7 @@
               </a:defRPr>
             </a:pPr>
             <a:r>
-              <a:t>Qué vamos a conseguir</a:t>
+              <a:t>Qué debe conseguirse</a:t>
             </a:r>
           </a:p>
         </p:txBody>
@@ -3638,7 +3642,7 @@
           <a:noFill/>
         </p:spPr>
         <p:txBody>
-          <a:bodyPr wrap="square" lIns="36576" rIns="36576" tIns="27432" bIns="27432">
+          <a:bodyPr wrap="square" lIns="45720" rIns="45720" tIns="36576" bIns="36576" anchor="t">
             <a:spAutoFit/>
           </a:bodyPr>
           <a:lstStyle/>
@@ -3665,8 +3669,8 @@
         </p:nvSpPr>
         <p:spPr>
           <a:xfrm>
-            <a:off x="594360" y="1417320"/>
-            <a:ext cx="5349240" cy="4343400"/>
+            <a:off x="594360" y="1389888"/>
+            <a:ext cx="5184648" cy="4297680"/>
           </a:xfrm>
           <a:prstGeom prst="roundRect">
             <a:avLst/>
@@ -3676,7 +3680,7 @@
           </a:solidFill>
           <a:ln>
             <a:solidFill>
-              <a:srgbClr val="EBEEF2"/>
+              <a:srgbClr val="E5E9EF"/>
             </a:solidFill>
           </a:ln>
         </p:spPr>
@@ -3711,7 +3715,7 @@
         <p:spPr>
           <a:xfrm>
             <a:off x="822960" y="1618488"/>
-            <a:ext cx="438912" cy="411480"/>
+            <a:ext cx="4727448" cy="3840480"/>
           </a:xfrm>
           <a:prstGeom prst="rect">
             <a:avLst/>
@@ -3719,107 +3723,35 @@
           <a:noFill/>
         </p:spPr>
         <p:txBody>
-          <a:bodyPr wrap="square" lIns="36576" rIns="36576" tIns="27432" bIns="27432">
+          <a:bodyPr wrap="square" lIns="45720" rIns="45720" tIns="36576" bIns="36576" anchor="t">
             <a:spAutoFit/>
           </a:bodyPr>
           <a:lstStyle/>
           <a:p>
-            <a:pPr algn="ctr">
-              <a:defRPr sz="2400" b="1">
-                <a:solidFill>
-                  <a:srgbClr val="2F5BA8"/>
+            <a:pPr algn="l">
+              <a:defRPr sz="2100" b="1">
+                <a:solidFill>
+                  <a:srgbClr val="1C2330"/>
                 </a:solidFill>
                 <a:latin typeface="Aptos"/>
               </a:defRPr>
             </a:pPr>
             <a:r>
-              <a:t>01</a:t>
-            </a:r>
-          </a:p>
-        </p:txBody>
-      </p:sp>
-      <p:sp>
-        <p:nvSpPr>
-          <p:cNvPr id="10" name="TextBox 9"/>
-          <p:cNvSpPr txBox="1"/>
-          <p:nvPr/>
-        </p:nvSpPr>
-        <p:spPr>
-          <a:xfrm>
-            <a:off x="1344168" y="1645920"/>
-            <a:ext cx="4389120" cy="365760"/>
-          </a:xfrm>
-          <a:prstGeom prst="rect">
-            <a:avLst/>
-          </a:prstGeom>
-          <a:noFill/>
-        </p:spPr>
-        <p:txBody>
-          <a:bodyPr wrap="square" lIns="36576" rIns="36576" tIns="27432" bIns="27432">
-            <a:spAutoFit/>
-          </a:bodyPr>
-          <a:lstStyle/>
-          <a:p>
-            <a:pPr algn="l">
-              <a:defRPr sz="1700" b="1">
-                <a:solidFill>
-                  <a:srgbClr val="2F5BA8"/>
-                </a:solidFill>
-                <a:latin typeface="Aptos"/>
-              </a:defRPr>
-            </a:pPr>
-            <a:r>
-              <a:t>Hoy vas a…</a:t>
-            </a:r>
-          </a:p>
-        </p:txBody>
-      </p:sp>
-      <p:sp>
-        <p:nvSpPr>
-          <p:cNvPr id="11" name="TextBox 10"/>
-          <p:cNvSpPr txBox="1"/>
-          <p:nvPr/>
-        </p:nvSpPr>
-        <p:spPr>
-          <a:xfrm>
-            <a:off x="868680" y="2286000"/>
-            <a:ext cx="4800600" cy="3246120"/>
-          </a:xfrm>
-          <a:prstGeom prst="rect">
-            <a:avLst/>
-          </a:prstGeom>
-          <a:noFill/>
-        </p:spPr>
-        <p:txBody>
-          <a:bodyPr wrap="square" lIns="36576" rIns="36576" tIns="27432" bIns="27432">
-            <a:spAutoFit/>
-          </a:bodyPr>
-          <a:lstStyle/>
-          <a:p>
-            <a:pPr algn="l">
-              <a:defRPr sz="2200" b="0">
-                <a:solidFill>
-                  <a:srgbClr val="1C2330"/>
-                </a:solidFill>
-                <a:latin typeface="Aptos"/>
-              </a:defRPr>
-            </a:pPr>
-            <a:r>
-              <a:t>Validar comprensión individual.</a:t>
-            </a:r>
-          </a:p>
-        </p:txBody>
-      </p:sp>
-      <p:sp>
-        <p:nvSpPr>
-          <p:cNvPr id="12" name="Rounded Rectangle 11"/>
+              <a:t>Objetivo: Validar comprensión individual.</a:t>
+            </a:r>
+          </a:p>
+        </p:txBody>
+      </p:sp>
+      <p:sp>
+        <p:nvSpPr>
+          <p:cNvPr id="10" name="Rounded Rectangle 9"/>
           <p:cNvSpPr/>
           <p:nvPr/>
         </p:nvSpPr>
         <p:spPr>
           <a:xfrm>
-            <a:off x="6236208" y="1417320"/>
-            <a:ext cx="5349240" cy="4343400"/>
+            <a:off x="6035040" y="1389888"/>
+            <a:ext cx="5184648" cy="4297680"/>
           </a:xfrm>
           <a:prstGeom prst="roundRect">
             <a:avLst/>
@@ -3829,7 +3761,7 @@
           </a:solidFill>
           <a:ln>
             <a:solidFill>
-              <a:srgbClr val="EBEEF2"/>
+              <a:srgbClr val="E5E9EF"/>
             </a:solidFill>
           </a:ln>
         </p:spPr>
@@ -3857,14 +3789,14 @@
       </p:sp>
       <p:sp>
         <p:nvSpPr>
-          <p:cNvPr id="13" name="TextBox 12"/>
+          <p:cNvPr id="11" name="TextBox 10"/>
           <p:cNvSpPr txBox="1"/>
           <p:nvPr/>
         </p:nvSpPr>
         <p:spPr>
           <a:xfrm>
-            <a:off x="6464808" y="1618488"/>
-            <a:ext cx="438912" cy="411480"/>
+            <a:off x="6263640" y="1618488"/>
+            <a:ext cx="4727448" cy="3840480"/>
           </a:xfrm>
           <a:prstGeom prst="rect">
             <a:avLst/>
@@ -3872,93 +3804,21 @@
           <a:noFill/>
         </p:spPr>
         <p:txBody>
-          <a:bodyPr wrap="square" lIns="36576" rIns="36576" tIns="27432" bIns="27432">
+          <a:bodyPr wrap="square" lIns="45720" rIns="45720" tIns="36576" bIns="36576" anchor="t">
             <a:spAutoFit/>
           </a:bodyPr>
           <a:lstStyle/>
           <a:p>
-            <a:pPr algn="ctr">
-              <a:defRPr sz="2400" b="1">
-                <a:solidFill>
-                  <a:srgbClr val="2F5BA8"/>
+            <a:pPr algn="l">
+              <a:defRPr sz="2100" b="1">
+                <a:solidFill>
+                  <a:srgbClr val="1C2330"/>
                 </a:solidFill>
                 <a:latin typeface="Aptos"/>
               </a:defRPr>
             </a:pPr>
             <a:r>
-              <a:t>02</a:t>
-            </a:r>
-          </a:p>
-        </p:txBody>
-      </p:sp>
-      <p:sp>
-        <p:nvSpPr>
-          <p:cNvPr id="14" name="TextBox 13"/>
-          <p:cNvSpPr txBox="1"/>
-          <p:nvPr/>
-        </p:nvSpPr>
-        <p:spPr>
-          <a:xfrm>
-            <a:off x="6986016" y="1645920"/>
-            <a:ext cx="4389120" cy="365760"/>
-          </a:xfrm>
-          <a:prstGeom prst="rect">
-            <a:avLst/>
-          </a:prstGeom>
-          <a:noFill/>
-        </p:spPr>
-        <p:txBody>
-          <a:bodyPr wrap="square" lIns="36576" rIns="36576" tIns="27432" bIns="27432">
-            <a:spAutoFit/>
-          </a:bodyPr>
-          <a:lstStyle/>
-          <a:p>
-            <a:pPr algn="l">
-              <a:defRPr sz="1700" b="1">
-                <a:solidFill>
-                  <a:srgbClr val="2F5BA8"/>
-                </a:solidFill>
-                <a:latin typeface="Aptos"/>
-              </a:defRPr>
-            </a:pPr>
-            <a:r>
-              <a:t>Debe quedar…</a:t>
-            </a:r>
-          </a:p>
-        </p:txBody>
-      </p:sp>
-      <p:sp>
-        <p:nvSpPr>
-          <p:cNvPr id="15" name="TextBox 14"/>
-          <p:cNvSpPr txBox="1"/>
-          <p:nvPr/>
-        </p:nvSpPr>
-        <p:spPr>
-          <a:xfrm>
-            <a:off x="6510528" y="2286000"/>
-            <a:ext cx="4800600" cy="3246120"/>
-          </a:xfrm>
-          <a:prstGeom prst="rect">
-            <a:avLst/>
-          </a:prstGeom>
-          <a:noFill/>
-        </p:spPr>
-        <p:txBody>
-          <a:bodyPr wrap="square" lIns="36576" rIns="36576" tIns="27432" bIns="27432">
-            <a:spAutoFit/>
-          </a:bodyPr>
-          <a:lstStyle/>
-          <a:p>
-            <a:pPr algn="l">
-              <a:defRPr sz="2200" b="0">
-                <a:solidFill>
-                  <a:srgbClr val="1C2330"/>
-                </a:solidFill>
-                <a:latin typeface="Aptos"/>
-              </a:defRPr>
-            </a:pPr>
-            <a:r>
-              <a:t>Plantilla de defensa H1 y portfolio individual.</a:t>
+              <a:t>Evidencia: Plantilla de defensa H1 y portfolio individual.</a:t>
             </a:r>
           </a:p>
         </p:txBody>
@@ -4075,8 +3935,8 @@
         </p:nvSpPr>
         <p:spPr>
           <a:xfrm>
-            <a:off x="502920" y="310896"/>
-            <a:ext cx="5029200" cy="256032"/>
+            <a:off x="502920" y="274320"/>
+            <a:ext cx="5486400" cy="256032"/>
           </a:xfrm>
           <a:prstGeom prst="rect">
             <a:avLst/>
@@ -4084,7 +3944,7 @@
           <a:noFill/>
         </p:spPr>
         <p:txBody>
-          <a:bodyPr wrap="square" lIns="36576" rIns="36576" tIns="27432" bIns="27432">
+          <a:bodyPr wrap="square" lIns="45720" rIns="45720" tIns="36576" bIns="36576" anchor="t">
             <a:spAutoFit/>
           </a:bodyPr>
           <a:lstStyle/>
@@ -4098,7 +3958,7 @@
               </a:defRPr>
             </a:pPr>
             <a:r>
-              <a:t>PASO A PASO</a:t>
+              <a:t>RITMO DE LA SESIÓN</a:t>
             </a:r>
           </a:p>
         </p:txBody>
@@ -4111,7 +3971,7 @@
         </p:nvSpPr>
         <p:spPr>
           <a:xfrm>
-            <a:off x="502920" y="621792"/>
+            <a:off x="502920" y="603504"/>
             <a:ext cx="11064240" cy="530352"/>
           </a:xfrm>
           <a:prstGeom prst="rect">
@@ -4120,7 +3980,7 @@
           <a:noFill/>
         </p:spPr>
         <p:txBody>
-          <a:bodyPr wrap="square" lIns="36576" rIns="36576" tIns="27432" bIns="27432">
+          <a:bodyPr wrap="square" lIns="45720" rIns="45720" tIns="36576" bIns="36576" anchor="t">
             <a:spAutoFit/>
           </a:bodyPr>
           <a:lstStyle/>
@@ -4134,7 +3994,7 @@
               </a:defRPr>
             </a:pPr>
             <a:r>
-              <a:t>Ruta de trabajo</a:t>
+              <a:t>Secuencia de aula</a:t>
             </a:r>
           </a:p>
         </p:txBody>
@@ -4199,7 +4059,7 @@
           <a:noFill/>
         </p:spPr>
         <p:txBody>
-          <a:bodyPr wrap="square" lIns="36576" rIns="36576" tIns="27432" bIns="27432">
+          <a:bodyPr wrap="square" lIns="45720" rIns="45720" tIns="36576" bIns="36576" anchor="t">
             <a:spAutoFit/>
           </a:bodyPr>
           <a:lstStyle/>
@@ -4226,8 +4086,8 @@
         </p:nvSpPr>
         <p:spPr>
           <a:xfrm>
-            <a:off x="685800" y="1325880"/>
-            <a:ext cx="502920" cy="502920"/>
+            <a:off x="658368" y="1280160"/>
+            <a:ext cx="475488" cy="475488"/>
           </a:xfrm>
           <a:prstGeom prst="ellipse">
             <a:avLst/>
@@ -4269,8 +4129,8 @@
         </p:nvSpPr>
         <p:spPr>
           <a:xfrm>
-            <a:off x="685800" y="1435607"/>
-            <a:ext cx="502920" cy="201168"/>
+            <a:off x="658368" y="1380744"/>
+            <a:ext cx="475488" cy="201168"/>
           </a:xfrm>
           <a:prstGeom prst="rect">
             <a:avLst/>
@@ -4278,13 +4138,13 @@
           <a:noFill/>
         </p:spPr>
         <p:txBody>
-          <a:bodyPr wrap="square" lIns="36576" rIns="36576" tIns="27432" bIns="27432">
+          <a:bodyPr wrap="square" lIns="45720" rIns="45720" tIns="36576" bIns="36576" anchor="t">
             <a:spAutoFit/>
           </a:bodyPr>
           <a:lstStyle/>
           <a:p>
             <a:pPr algn="ctr">
-              <a:defRPr sz="1400" b="1">
+              <a:defRPr sz="1300" b="1">
                 <a:solidFill>
                   <a:srgbClr val="FFFFFF"/>
                 </a:solidFill>
@@ -4305,8 +4165,8 @@
         </p:nvSpPr>
         <p:spPr>
           <a:xfrm>
-            <a:off x="1417320" y="1344168"/>
-            <a:ext cx="9875520" cy="548640"/>
+            <a:off x="1389888" y="1261872"/>
+            <a:ext cx="10058400" cy="772668"/>
           </a:xfrm>
           <a:prstGeom prst="rect">
             <a:avLst/>
@@ -4314,13 +4174,13 @@
           <a:noFill/>
         </p:spPr>
         <p:txBody>
-          <a:bodyPr wrap="square" lIns="36576" rIns="36576" tIns="27432" bIns="27432">
+          <a:bodyPr wrap="square" lIns="45720" rIns="45720" tIns="36576" bIns="36576" anchor="t">
             <a:spAutoFit/>
           </a:bodyPr>
           <a:lstStyle/>
           <a:p>
             <a:pPr algn="l">
-              <a:defRPr sz="2000" b="0">
+              <a:defRPr sz="1400" b="0">
                 <a:solidFill>
                   <a:srgbClr val="1C2330"/>
                 </a:solidFill>
@@ -4328,7 +4188,7 @@
               </a:defRPr>
             </a:pPr>
             <a:r>
-              <a:t>Lee el objetivo y escribe con tus palabras qué debe quedar terminado.</a:t>
+              <a:t>0–5 min — Presentar objetivo, producto y evidencia de hoy.</a:t>
             </a:r>
           </a:p>
         </p:txBody>
@@ -4341,8 +4201,8 @@
         </p:nvSpPr>
         <p:spPr>
           <a:xfrm>
-            <a:off x="685800" y="2258568"/>
-            <a:ext cx="502920" cy="502920"/>
+            <a:off x="658368" y="2125979"/>
+            <a:ext cx="475488" cy="475488"/>
           </a:xfrm>
           <a:prstGeom prst="ellipse">
             <a:avLst/>
@@ -4384,8 +4244,8 @@
         </p:nvSpPr>
         <p:spPr>
           <a:xfrm>
-            <a:off x="685800" y="2368296"/>
-            <a:ext cx="502920" cy="201168"/>
+            <a:off x="658368" y="2226563"/>
+            <a:ext cx="475488" cy="201168"/>
           </a:xfrm>
           <a:prstGeom prst="rect">
             <a:avLst/>
@@ -4393,13 +4253,13 @@
           <a:noFill/>
         </p:spPr>
         <p:txBody>
-          <a:bodyPr wrap="square" lIns="36576" rIns="36576" tIns="27432" bIns="27432">
+          <a:bodyPr wrap="square" lIns="45720" rIns="45720" tIns="36576" bIns="36576" anchor="t">
             <a:spAutoFit/>
           </a:bodyPr>
           <a:lstStyle/>
           <a:p>
             <a:pPr algn="ctr">
-              <a:defRPr sz="1400" b="1">
+              <a:defRPr sz="1300" b="1">
                 <a:solidFill>
                   <a:srgbClr val="FFFFFF"/>
                 </a:solidFill>
@@ -4420,8 +4280,8 @@
         </p:nvSpPr>
         <p:spPr>
           <a:xfrm>
-            <a:off x="1417320" y="2276856"/>
-            <a:ext cx="9875520" cy="548640"/>
+            <a:off x="1389888" y="2107691"/>
+            <a:ext cx="10058400" cy="772668"/>
           </a:xfrm>
           <a:prstGeom prst="rect">
             <a:avLst/>
@@ -4429,13 +4289,13 @@
           <a:noFill/>
         </p:spPr>
         <p:txBody>
-          <a:bodyPr wrap="square" lIns="36576" rIns="36576" tIns="27432" bIns="27432">
+          <a:bodyPr wrap="square" lIns="45720" rIns="45720" tIns="36576" bIns="36576" anchor="t">
             <a:spAutoFit/>
           </a:bodyPr>
           <a:lstStyle/>
           <a:p>
             <a:pPr algn="l">
-              <a:defRPr sz="2000" b="0">
+              <a:defRPr sz="1400" b="0">
                 <a:solidFill>
                   <a:srgbClr val="1C2330"/>
                 </a:solidFill>
@@ -4443,7 +4303,7 @@
               </a:defRPr>
             </a:pPr>
             <a:r>
-              <a:t>Atiende al ejemplo breve y anota una predicción, duda o decisión.</a:t>
+              <a:t>5–13 min — Explicación breve: Defender no es recitar; es explicar código propio y modificar algo simple.</a:t>
             </a:r>
           </a:p>
         </p:txBody>
@@ -4456,8 +4316,8 @@
         </p:nvSpPr>
         <p:spPr>
           <a:xfrm>
-            <a:off x="685800" y="3191256"/>
-            <a:ext cx="502920" cy="502920"/>
+            <a:off x="658368" y="2971799"/>
+            <a:ext cx="475488" cy="475488"/>
           </a:xfrm>
           <a:prstGeom prst="ellipse">
             <a:avLst/>
@@ -4499,8 +4359,8 @@
         </p:nvSpPr>
         <p:spPr>
           <a:xfrm>
-            <a:off x="685800" y="3300984"/>
-            <a:ext cx="502920" cy="201168"/>
+            <a:off x="658368" y="3072383"/>
+            <a:ext cx="475488" cy="201168"/>
           </a:xfrm>
           <a:prstGeom prst="rect">
             <a:avLst/>
@@ -4508,13 +4368,13 @@
           <a:noFill/>
         </p:spPr>
         <p:txBody>
-          <a:bodyPr wrap="square" lIns="36576" rIns="36576" tIns="27432" bIns="27432">
+          <a:bodyPr wrap="square" lIns="45720" rIns="45720" tIns="36576" bIns="36576" anchor="t">
             <a:spAutoFit/>
           </a:bodyPr>
           <a:lstStyle/>
           <a:p>
             <a:pPr algn="ctr">
-              <a:defRPr sz="1400" b="1">
+              <a:defRPr sz="1300" b="1">
                 <a:solidFill>
                   <a:srgbClr val="FFFFFF"/>
                 </a:solidFill>
@@ -4535,8 +4395,8 @@
         </p:nvSpPr>
         <p:spPr>
           <a:xfrm>
-            <a:off x="1417320" y="3209544"/>
-            <a:ext cx="9875520" cy="548640"/>
+            <a:off x="1389888" y="2953511"/>
+            <a:ext cx="10058400" cy="772668"/>
           </a:xfrm>
           <a:prstGeom prst="rect">
             <a:avLst/>
@@ -4544,13 +4404,13 @@
           <a:noFill/>
         </p:spPr>
         <p:txBody>
-          <a:bodyPr wrap="square" lIns="36576" rIns="36576" tIns="27432" bIns="27432">
+          <a:bodyPr wrap="square" lIns="45720" rIns="45720" tIns="36576" bIns="36576" anchor="t">
             <a:spAutoFit/>
           </a:bodyPr>
           <a:lstStyle/>
           <a:p>
             <a:pPr algn="l">
-              <a:defRPr sz="2000" b="0">
+              <a:defRPr sz="1400" b="0">
                 <a:solidFill>
                   <a:srgbClr val="1C2330"/>
                 </a:solidFill>
@@ -4558,7 +4418,7 @@
               </a:defRPr>
             </a:pPr>
             <a:r>
-              <a:t>Realiza esta tarea: Defensa: main, variable, constante, Scanner, ejecución y límites de H1.</a:t>
+              <a:t>13–18 min — Demostración o ejemplo: Preguntas modelo: qué es main, qué es una variable, qué hace Scanner.</a:t>
             </a:r>
           </a:p>
         </p:txBody>
@@ -4571,8 +4431,8 @@
         </p:nvSpPr>
         <p:spPr>
           <a:xfrm>
-            <a:off x="685800" y="4123944"/>
-            <a:ext cx="502920" cy="502920"/>
+            <a:off x="658368" y="3817620"/>
+            <a:ext cx="475488" cy="475488"/>
           </a:xfrm>
           <a:prstGeom prst="ellipse">
             <a:avLst/>
@@ -4614,8 +4474,8 @@
         </p:nvSpPr>
         <p:spPr>
           <a:xfrm>
-            <a:off x="685800" y="4233672"/>
-            <a:ext cx="502920" cy="201168"/>
+            <a:off x="658368" y="3918204"/>
+            <a:ext cx="475488" cy="201168"/>
           </a:xfrm>
           <a:prstGeom prst="rect">
             <a:avLst/>
@@ -4623,13 +4483,13 @@
           <a:noFill/>
         </p:spPr>
         <p:txBody>
-          <a:bodyPr wrap="square" lIns="36576" rIns="36576" tIns="27432" bIns="27432">
+          <a:bodyPr wrap="square" lIns="45720" rIns="45720" tIns="36576" bIns="36576" anchor="t">
             <a:spAutoFit/>
           </a:bodyPr>
           <a:lstStyle/>
           <a:p>
             <a:pPr algn="ctr">
-              <a:defRPr sz="1400" b="1">
+              <a:defRPr sz="1300" b="1">
                 <a:solidFill>
                   <a:srgbClr val="FFFFFF"/>
                 </a:solidFill>
@@ -4650,8 +4510,8 @@
         </p:nvSpPr>
         <p:spPr>
           <a:xfrm>
-            <a:off x="1417320" y="4142231"/>
-            <a:ext cx="9875520" cy="548640"/>
+            <a:off x="1389888" y="3799332"/>
+            <a:ext cx="10058400" cy="772668"/>
           </a:xfrm>
           <a:prstGeom prst="rect">
             <a:avLst/>
@@ -4659,13 +4519,13 @@
           <a:noFill/>
         </p:spPr>
         <p:txBody>
-          <a:bodyPr wrap="square" lIns="36576" rIns="36576" tIns="27432" bIns="27432">
+          <a:bodyPr wrap="square" lIns="45720" rIns="45720" tIns="36576" bIns="36576" anchor="t">
             <a:spAutoFit/>
           </a:bodyPr>
           <a:lstStyle/>
           <a:p>
             <a:pPr algn="l">
-              <a:defRPr sz="2000" b="0">
+              <a:defRPr sz="1400" b="0">
                 <a:solidFill>
                   <a:srgbClr val="1C2330"/>
                 </a:solidFill>
@@ -4673,7 +4533,7 @@
               </a:defRPr>
             </a:pPr>
             <a:r>
-              <a:t>Comprueba el resultado con una prueba observable; no basta con decir “funciona”.</a:t>
+              <a:t>18–35 min — Trabajo del alumnado: Defensa: main, variable, constante, Scanner, ejecución y límites de H1.</a:t>
             </a:r>
           </a:p>
         </p:txBody>
@@ -4686,8 +4546,8 @@
         </p:nvSpPr>
         <p:spPr>
           <a:xfrm>
-            <a:off x="685800" y="5056631"/>
-            <a:ext cx="502920" cy="502920"/>
+            <a:off x="658368" y="4663440"/>
+            <a:ext cx="475488" cy="475488"/>
           </a:xfrm>
           <a:prstGeom prst="ellipse">
             <a:avLst/>
@@ -4729,8 +4589,8 @@
         </p:nvSpPr>
         <p:spPr>
           <a:xfrm>
-            <a:off x="685800" y="5166359"/>
-            <a:ext cx="502920" cy="201168"/>
+            <a:off x="658368" y="4764024"/>
+            <a:ext cx="475488" cy="201168"/>
           </a:xfrm>
           <a:prstGeom prst="rect">
             <a:avLst/>
@@ -4738,13 +4598,13 @@
           <a:noFill/>
         </p:spPr>
         <p:txBody>
-          <a:bodyPr wrap="square" lIns="36576" rIns="36576" tIns="27432" bIns="27432">
+          <a:bodyPr wrap="square" lIns="45720" rIns="45720" tIns="36576" bIns="36576" anchor="t">
             <a:spAutoFit/>
           </a:bodyPr>
           <a:lstStyle/>
           <a:p>
             <a:pPr algn="ctr">
-              <a:defRPr sz="1400" b="1">
+              <a:defRPr sz="1300" b="1">
                 <a:solidFill>
                   <a:srgbClr val="FFFFFF"/>
                 </a:solidFill>
@@ -4765,8 +4625,8 @@
         </p:nvSpPr>
         <p:spPr>
           <a:xfrm>
-            <a:off x="1417320" y="5074919"/>
-            <a:ext cx="9875520" cy="548640"/>
+            <a:off x="1389888" y="4645152"/>
+            <a:ext cx="10058400" cy="772668"/>
           </a:xfrm>
           <a:prstGeom prst="rect">
             <a:avLst/>
@@ -4774,13 +4634,13 @@
           <a:noFill/>
         </p:spPr>
         <p:txBody>
-          <a:bodyPr wrap="square" lIns="36576" rIns="36576" tIns="27432" bIns="27432">
+          <a:bodyPr wrap="square" lIns="45720" rIns="45720" tIns="36576" bIns="36576" anchor="t">
             <a:spAutoFit/>
           </a:bodyPr>
           <a:lstStyle/>
           <a:p>
             <a:pPr algn="l">
-              <a:defRPr sz="2000" b="0">
+              <a:defRPr sz="1400" b="0">
                 <a:solidFill>
                   <a:srgbClr val="1C2330"/>
                 </a:solidFill>
@@ -4788,7 +4648,122 @@
               </a:defRPr>
             </a:pPr>
             <a:r>
-              <a:t>Guarda o entrega la evidencia indicada y prepárate para explicarla.</a:t>
+              <a:t>35–40 min — Comprobar la evidencia con una explicación o prueba breve.</a:t>
+            </a:r>
+          </a:p>
+        </p:txBody>
+      </p:sp>
+      <p:sp>
+        <p:nvSpPr>
+          <p:cNvPr id="23" name="Oval 22"/>
+          <p:cNvSpPr/>
+          <p:nvPr/>
+        </p:nvSpPr>
+        <p:spPr>
+          <a:xfrm>
+            <a:off x="658368" y="5509259"/>
+            <a:ext cx="475488" cy="475488"/>
+          </a:xfrm>
+          <a:prstGeom prst="ellipse">
+            <a:avLst/>
+          </a:prstGeom>
+          <a:solidFill>
+            <a:srgbClr val="2F5BA8"/>
+          </a:solidFill>
+          <a:ln>
+            <a:noFill/>
+          </a:ln>
+        </p:spPr>
+        <p:style>
+          <a:lnRef idx="1">
+            <a:schemeClr val="accent1"/>
+          </a:lnRef>
+          <a:fillRef idx="3">
+            <a:schemeClr val="accent1"/>
+          </a:fillRef>
+          <a:effectRef idx="2">
+            <a:schemeClr val="accent1"/>
+          </a:effectRef>
+          <a:fontRef idx="minor">
+            <a:schemeClr val="lt1"/>
+          </a:fontRef>
+        </p:style>
+        <p:txBody>
+          <a:bodyPr rtlCol="0" anchor="ctr"/>
+          <a:lstStyle/>
+          <a:p>
+            <a:pPr algn="ctr"/>
+          </a:p>
+        </p:txBody>
+      </p:sp>
+      <p:sp>
+        <p:nvSpPr>
+          <p:cNvPr id="24" name="TextBox 23"/>
+          <p:cNvSpPr txBox="1"/>
+          <p:nvPr/>
+        </p:nvSpPr>
+        <p:spPr>
+          <a:xfrm>
+            <a:off x="658368" y="5609844"/>
+            <a:ext cx="475488" cy="201168"/>
+          </a:xfrm>
+          <a:prstGeom prst="rect">
+            <a:avLst/>
+          </a:prstGeom>
+          <a:noFill/>
+        </p:spPr>
+        <p:txBody>
+          <a:bodyPr wrap="square" lIns="45720" rIns="45720" tIns="36576" bIns="36576" anchor="t">
+            <a:spAutoFit/>
+          </a:bodyPr>
+          <a:lstStyle/>
+          <a:p>
+            <a:pPr algn="ctr">
+              <a:defRPr sz="1300" b="1">
+                <a:solidFill>
+                  <a:srgbClr val="FFFFFF"/>
+                </a:solidFill>
+                <a:latin typeface="Aptos"/>
+              </a:defRPr>
+            </a:pPr>
+            <a:r>
+              <a:t>6</a:t>
+            </a:r>
+          </a:p>
+        </p:txBody>
+      </p:sp>
+      <p:sp>
+        <p:nvSpPr>
+          <p:cNvPr id="25" name="TextBox 24"/>
+          <p:cNvSpPr txBox="1"/>
+          <p:nvPr/>
+        </p:nvSpPr>
+        <p:spPr>
+          <a:xfrm>
+            <a:off x="1389888" y="5490972"/>
+            <a:ext cx="10058400" cy="772668"/>
+          </a:xfrm>
+          <a:prstGeom prst="rect">
+            <a:avLst/>
+          </a:prstGeom>
+          <a:noFill/>
+        </p:spPr>
+        <p:txBody>
+          <a:bodyPr wrap="square" lIns="45720" rIns="45720" tIns="36576" bIns="36576" anchor="t">
+            <a:spAutoFit/>
+          </a:bodyPr>
+          <a:lstStyle/>
+          <a:p>
+            <a:pPr algn="l">
+              <a:defRPr sz="1400" b="0">
+                <a:solidFill>
+                  <a:srgbClr val="1C2330"/>
+                </a:solidFill>
+                <a:latin typeface="Aptos"/>
+              </a:defRPr>
+            </a:pPr>
+            <a:r>
+              <a:t>40–45 min — Cierre: Decidir qué debe mejorar cada alumno antes de H2.</a:t>
             </a:r>
           </a:p>
         </p:txBody>
@@ -4905,8 +4880,8 @@
         </p:nvSpPr>
         <p:spPr>
           <a:xfrm>
-            <a:off x="502920" y="310896"/>
-            <a:ext cx="5029200" cy="256032"/>
+            <a:off x="502920" y="274320"/>
+            <a:ext cx="5486400" cy="256032"/>
           </a:xfrm>
           <a:prstGeom prst="rect">
             <a:avLst/>
@@ -4914,7 +4889,7 @@
           <a:noFill/>
         </p:spPr>
         <p:txBody>
-          <a:bodyPr wrap="square" lIns="36576" rIns="36576" tIns="27432" bIns="27432">
+          <a:bodyPr wrap="square" lIns="45720" rIns="45720" tIns="36576" bIns="36576" anchor="t">
             <a:spAutoFit/>
           </a:bodyPr>
           <a:lstStyle/>
@@ -4928,7 +4903,7 @@
               </a:defRPr>
             </a:pPr>
             <a:r>
-              <a:t>COMPRENDER Y APLICAR</a:t>
+              <a:t>COMPRENDER Y TRANSFERIR</a:t>
             </a:r>
           </a:p>
         </p:txBody>
@@ -4941,7 +4916,7 @@
         </p:nvSpPr>
         <p:spPr>
           <a:xfrm>
-            <a:off x="502920" y="621792"/>
+            <a:off x="502920" y="603504"/>
             <a:ext cx="11064240" cy="530352"/>
           </a:xfrm>
           <a:prstGeom prst="rect">
@@ -4950,7 +4925,7 @@
           <a:noFill/>
         </p:spPr>
         <p:txBody>
-          <a:bodyPr wrap="square" lIns="36576" rIns="36576" tIns="27432" bIns="27432">
+          <a:bodyPr wrap="square" lIns="45720" rIns="45720" tIns="36576" bIns="36576" anchor="t">
             <a:spAutoFit/>
           </a:bodyPr>
           <a:lstStyle/>
@@ -4964,7 +4939,7 @@
               </a:defRPr>
             </a:pPr>
             <a:r>
-              <a:t>Claves para avanzar</a:t>
+              <a:t>Idea clave y puesta en práctica</a:t>
             </a:r>
           </a:p>
         </p:txBody>
@@ -5029,7 +5004,7 @@
           <a:noFill/>
         </p:spPr>
         <p:txBody>
-          <a:bodyPr wrap="square" lIns="36576" rIns="36576" tIns="27432" bIns="27432">
+          <a:bodyPr wrap="square" lIns="45720" rIns="45720" tIns="36576" bIns="36576" anchor="t">
             <a:spAutoFit/>
           </a:bodyPr>
           <a:lstStyle/>
@@ -5056,8 +5031,8 @@
         </p:nvSpPr>
         <p:spPr>
           <a:xfrm>
-            <a:off x="594360" y="1325880"/>
-            <a:ext cx="5257800" cy="4526280"/>
+            <a:off x="621792" y="1325880"/>
+            <a:ext cx="5285232" cy="4736592"/>
           </a:xfrm>
           <a:prstGeom prst="roundRect">
             <a:avLst/>
@@ -5067,7 +5042,7 @@
           </a:solidFill>
           <a:ln>
             <a:solidFill>
-              <a:srgbClr val="EBEEF2"/>
+              <a:srgbClr val="E5E9EF"/>
             </a:solidFill>
           </a:ln>
         </p:spPr>
@@ -5095,25 +5070,98 @@
       </p:sp>
       <p:sp>
         <p:nvSpPr>
-          <p:cNvPr id="9" name="Rounded Rectangle 8"/>
+          <p:cNvPr id="9" name="TextBox 8"/>
+          <p:cNvSpPr txBox="1"/>
+          <p:nvPr/>
+        </p:nvSpPr>
+        <p:spPr>
+          <a:xfrm>
+            <a:off x="932688" y="1627632"/>
+            <a:ext cx="2011680" cy="329184"/>
+          </a:xfrm>
+          <a:prstGeom prst="rect">
+            <a:avLst/>
+          </a:prstGeom>
+          <a:noFill/>
+        </p:spPr>
+        <p:txBody>
+          <a:bodyPr wrap="square" lIns="45720" rIns="45720" tIns="36576" bIns="36576" anchor="t">
+            <a:spAutoFit/>
+          </a:bodyPr>
+          <a:lstStyle/>
+          <a:p>
+            <a:pPr algn="l">
+              <a:defRPr sz="1300" b="1">
+                <a:solidFill>
+                  <a:srgbClr val="2F5BA8"/>
+                </a:solidFill>
+                <a:latin typeface="Aptos"/>
+              </a:defRPr>
+            </a:pPr>
+            <a:r>
+              <a:t>IDEA CLAVE</a:t>
+            </a:r>
+          </a:p>
+        </p:txBody>
+      </p:sp>
+      <p:sp>
+        <p:nvSpPr>
+          <p:cNvPr id="10" name="TextBox 9"/>
+          <p:cNvSpPr txBox="1"/>
+          <p:nvPr/>
+        </p:nvSpPr>
+        <p:spPr>
+          <a:xfrm>
+            <a:off x="932688" y="2176272"/>
+            <a:ext cx="4617720" cy="3429000"/>
+          </a:xfrm>
+          <a:prstGeom prst="rect">
+            <a:avLst/>
+          </a:prstGeom>
+          <a:noFill/>
+        </p:spPr>
+        <p:txBody>
+          <a:bodyPr wrap="square" lIns="73152" rIns="45720" tIns="36576">
+            <a:spAutoFit/>
+          </a:bodyPr>
+          <a:lstStyle/>
+          <a:p>
+            <a:pPr>
+              <a:spcAft>
+                <a:spcPts val="900"/>
+              </a:spcAft>
+              <a:defRPr sz="2300">
+                <a:solidFill>
+                  <a:srgbClr val="1C2330"/>
+                </a:solidFill>
+                <a:latin typeface="Aptos"/>
+              </a:defRPr>
+            </a:pPr>
+            <a:r>
+              <a:t>•  Cómo se defiende una entrega técnica breve.</a:t>
+            </a:r>
+          </a:p>
+        </p:txBody>
+      </p:sp>
+      <p:sp>
+        <p:nvSpPr>
+          <p:cNvPr id="11" name="Rounded Rectangle 10"/>
           <p:cNvSpPr/>
           <p:nvPr/>
         </p:nvSpPr>
         <p:spPr>
           <a:xfrm>
             <a:off x="6172200" y="1325880"/>
-            <a:ext cx="5413248" cy="4526280"/>
+            <a:ext cx="5394960" cy="4736592"/>
           </a:xfrm>
           <a:prstGeom prst="roundRect">
             <a:avLst/>
           </a:prstGeom>
           <a:solidFill>
-            <a:srgbClr val="FFFFFF"/>
+            <a:srgbClr val="121824"/>
           </a:solidFill>
           <a:ln>
-            <a:solidFill>
-              <a:srgbClr val="EBEEF2"/>
-            </a:solidFill>
+            <a:noFill/>
           </a:ln>
         </p:spPr>
         <p:style>
@@ -5140,14 +5188,14 @@
       </p:sp>
       <p:sp>
         <p:nvSpPr>
-          <p:cNvPr id="10" name="TextBox 9"/>
+          <p:cNvPr id="12" name="TextBox 11"/>
           <p:cNvSpPr txBox="1"/>
           <p:nvPr/>
         </p:nvSpPr>
         <p:spPr>
           <a:xfrm>
-            <a:off x="868680" y="1600200"/>
-            <a:ext cx="4663440" cy="365760"/>
+            <a:off x="6492240" y="1627632"/>
+            <a:ext cx="2194560" cy="329184"/>
           </a:xfrm>
           <a:prstGeom prst="rect">
             <a:avLst/>
@@ -5155,13 +5203,13 @@
           <a:noFill/>
         </p:spPr>
         <p:txBody>
-          <a:bodyPr wrap="square" lIns="36576" rIns="36576" tIns="27432" bIns="27432">
+          <a:bodyPr wrap="square" lIns="45720" rIns="45720" tIns="36576" bIns="36576" anchor="t">
             <a:spAutoFit/>
           </a:bodyPr>
           <a:lstStyle/>
           <a:p>
             <a:pPr algn="l">
-              <a:defRPr sz="1600" b="1">
+              <a:defRPr sz="1300" b="1">
                 <a:solidFill>
                   <a:srgbClr val="2F5BA8"/>
                 </a:solidFill>
@@ -5169,21 +5217,21 @@
               </a:defRPr>
             </a:pPr>
             <a:r>
-              <a:t>IDEAS CLAVE</a:t>
-            </a:r>
-          </a:p>
-        </p:txBody>
-      </p:sp>
-      <p:sp>
-        <p:nvSpPr>
-          <p:cNvPr id="11" name="TextBox 10"/>
+              <a:t>EN PRÁCTICA</a:t>
+            </a:r>
+          </a:p>
+        </p:txBody>
+      </p:sp>
+      <p:sp>
+        <p:nvSpPr>
+          <p:cNvPr id="13" name="TextBox 12"/>
           <p:cNvSpPr txBox="1"/>
           <p:nvPr/>
         </p:nvSpPr>
         <p:spPr>
           <a:xfrm>
-            <a:off x="868680" y="2121408"/>
-            <a:ext cx="4572000" cy="3337560"/>
+            <a:off x="6492240" y="2176272"/>
+            <a:ext cx="4617720" cy="3429000"/>
           </a:xfrm>
           <a:prstGeom prst="rect">
             <a:avLst/>
@@ -5198,118 +5246,11 @@
           <a:p>
             <a:pPr>
               <a:spcAft>
-                <a:spcPts val="1000"/>
+                <a:spcPts val="900"/>
               </a:spcAft>
-              <a:defRPr sz="1800">
-                <a:solidFill>
-                  <a:srgbClr val="1C2330"/>
-                </a:solidFill>
-                <a:latin typeface="Aptos"/>
-              </a:defRPr>
-            </a:pPr>
-            <a:r>
-              <a:t>•  Cómo se defiende una entrega técnica breve.</a:t>
-            </a:r>
-          </a:p>
-          <a:p>
-            <a:pPr>
-              <a:spcAft>
-                <a:spcPts val="1000"/>
-              </a:spcAft>
-              <a:defRPr sz="1800">
-                <a:solidFill>
-                  <a:srgbClr val="1C2330"/>
-                </a:solidFill>
-                <a:latin typeface="Aptos"/>
-              </a:defRPr>
-            </a:pPr>
-            <a:r>
-              <a:t>•  Guion breve sugerido:</a:t>
-            </a:r>
-          </a:p>
-          <a:p>
-            <a:pPr>
-              <a:spcAft>
-                <a:spcPts val="1000"/>
-              </a:spcAft>
-              <a:defRPr sz="1800">
-                <a:solidFill>
-                  <a:srgbClr val="1C2330"/>
-                </a:solidFill>
-                <a:latin typeface="Aptos"/>
-              </a:defRPr>
-            </a:pPr>
-            <a:r>
-              <a:t>•  &gt; Hoy necesitamos comprender y practicar lo justo para producir una evidencia verificable. Primero observaremos un ejemplo, después trabajaréis y al final cada pers…</a:t>
-            </a:r>
-          </a:p>
-        </p:txBody>
-      </p:sp>
-      <p:sp>
-        <p:nvSpPr>
-          <p:cNvPr id="12" name="TextBox 11"/>
-          <p:cNvSpPr txBox="1"/>
-          <p:nvPr/>
-        </p:nvSpPr>
-        <p:spPr>
-          <a:xfrm>
-            <a:off x="6446520" y="1600200"/>
-            <a:ext cx="4572000" cy="365760"/>
-          </a:xfrm>
-          <a:prstGeom prst="rect">
-            <a:avLst/>
-          </a:prstGeom>
-          <a:noFill/>
-        </p:spPr>
-        <p:txBody>
-          <a:bodyPr wrap="square" lIns="36576" rIns="36576" tIns="27432" bIns="27432">
-            <a:spAutoFit/>
-          </a:bodyPr>
-          <a:lstStyle/>
-          <a:p>
-            <a:pPr algn="l">
-              <a:defRPr sz="1600" b="1">
-                <a:solidFill>
-                  <a:srgbClr val="2F5BA8"/>
-                </a:solidFill>
-                <a:latin typeface="Aptos"/>
-              </a:defRPr>
-            </a:pPr>
-            <a:r>
-              <a:t>ACTIVIDAD CENTRAL</a:t>
-            </a:r>
-          </a:p>
-        </p:txBody>
-      </p:sp>
-      <p:sp>
-        <p:nvSpPr>
-          <p:cNvPr id="13" name="TextBox 12"/>
-          <p:cNvSpPr txBox="1"/>
-          <p:nvPr/>
-        </p:nvSpPr>
-        <p:spPr>
-          <a:xfrm>
-            <a:off x="6446520" y="2121408"/>
-            <a:ext cx="4617720" cy="3337560"/>
-          </a:xfrm>
-          <a:prstGeom prst="rect">
-            <a:avLst/>
-          </a:prstGeom>
-          <a:noFill/>
-        </p:spPr>
-        <p:txBody>
-          <a:bodyPr wrap="square" lIns="73152" rIns="45720" tIns="36576">
-            <a:spAutoFit/>
-          </a:bodyPr>
-          <a:lstStyle/>
-          <a:p>
-            <a:pPr>
-              <a:spcAft>
-                <a:spcPts val="1000"/>
-              </a:spcAft>
-              <a:defRPr sz="1800">
-                <a:solidFill>
-                  <a:srgbClr val="1C2330"/>
+              <a:defRPr sz="2300">
+                <a:solidFill>
+                  <a:srgbClr val="FFFFFF"/>
                 </a:solidFill>
                 <a:latin typeface="Aptos"/>
               </a:defRPr>
@@ -5432,8 +5373,8 @@
         </p:nvSpPr>
         <p:spPr>
           <a:xfrm>
-            <a:off x="502920" y="310896"/>
-            <a:ext cx="5029200" cy="256032"/>
+            <a:off x="502920" y="274320"/>
+            <a:ext cx="5486400" cy="256032"/>
           </a:xfrm>
           <a:prstGeom prst="rect">
             <a:avLst/>
@@ -5441,7 +5382,7 @@
           <a:noFill/>
         </p:spPr>
         <p:txBody>
-          <a:bodyPr wrap="square" lIns="36576" rIns="36576" tIns="27432" bIns="27432">
+          <a:bodyPr wrap="square" lIns="45720" rIns="45720" tIns="36576" bIns="36576" anchor="t">
             <a:spAutoFit/>
           </a:bodyPr>
           <a:lstStyle/>
@@ -5455,7 +5396,7 @@
               </a:defRPr>
             </a:pPr>
             <a:r>
-              <a:t>EVIDENCIA MÍNIMA</a:t>
+              <a:t>APLICAR Y DECIDIR</a:t>
             </a:r>
           </a:p>
         </p:txBody>
@@ -5468,7 +5409,7 @@
         </p:nvSpPr>
         <p:spPr>
           <a:xfrm>
-            <a:off x="502920" y="621792"/>
+            <a:off x="502920" y="603504"/>
             <a:ext cx="11064240" cy="530352"/>
           </a:xfrm>
           <a:prstGeom prst="rect">
@@ -5477,7 +5418,7 @@
           <a:noFill/>
         </p:spPr>
         <p:txBody>
-          <a:bodyPr wrap="square" lIns="36576" rIns="36576" tIns="27432" bIns="27432">
+          <a:bodyPr wrap="square" lIns="45720" rIns="45720" tIns="36576" bIns="36576" anchor="t">
             <a:spAutoFit/>
           </a:bodyPr>
           <a:lstStyle/>
@@ -5491,7 +5432,7 @@
               </a:defRPr>
             </a:pPr>
             <a:r>
-              <a:t>Antes de salir, comprueba</a:t>
+              <a:t>Actividad central</a:t>
             </a:r>
           </a:p>
         </p:txBody>
@@ -5556,7 +5497,7 @@
           <a:noFill/>
         </p:spPr>
         <p:txBody>
-          <a:bodyPr wrap="square" lIns="36576" rIns="36576" tIns="27432" bIns="27432">
+          <a:bodyPr wrap="square" lIns="45720" rIns="45720" tIns="36576" bIns="36576" anchor="t">
             <a:spAutoFit/>
           </a:bodyPr>
           <a:lstStyle/>
@@ -5583,8 +5524,8 @@
         </p:nvSpPr>
         <p:spPr>
           <a:xfrm>
-            <a:off x="713232" y="1371600"/>
-            <a:ext cx="420624" cy="420624"/>
+            <a:off x="658368" y="1307592"/>
+            <a:ext cx="10835640" cy="2226564"/>
           </a:xfrm>
           <a:prstGeom prst="roundRect">
             <a:avLst/>
@@ -5594,7 +5535,7 @@
           </a:solidFill>
           <a:ln>
             <a:solidFill>
-              <a:srgbClr val="2F5BA8"/>
+              <a:srgbClr val="E5E9EF"/>
             </a:solidFill>
           </a:ln>
         </p:spPr>
@@ -5628,8 +5569,8 @@
         </p:nvSpPr>
         <p:spPr>
           <a:xfrm>
-            <a:off x="1389888" y="1362456"/>
-            <a:ext cx="9784080" cy="594360"/>
+            <a:off x="850392" y="1453895"/>
+            <a:ext cx="685800" cy="384048"/>
           </a:xfrm>
           <a:prstGeom prst="rect">
             <a:avLst/>
@@ -5637,12 +5578,48 @@
           <a:noFill/>
         </p:spPr>
         <p:txBody>
-          <a:bodyPr wrap="square" lIns="36576" rIns="36576" tIns="27432" bIns="27432">
+          <a:bodyPr wrap="square" lIns="45720" rIns="45720" tIns="36576" bIns="36576" anchor="t">
             <a:spAutoFit/>
           </a:bodyPr>
           <a:lstStyle/>
           <a:p>
             <a:pPr algn="l">
+              <a:defRPr sz="1200" b="1">
+                <a:solidFill>
+                  <a:srgbClr val="2F5BA8"/>
+                </a:solidFill>
+                <a:latin typeface="Aptos"/>
+              </a:defRPr>
+            </a:pPr>
+            <a:r>
+              <a:t>PASO 1</a:t>
+            </a:r>
+          </a:p>
+        </p:txBody>
+      </p:sp>
+      <p:sp>
+        <p:nvSpPr>
+          <p:cNvPr id="10" name="TextBox 9"/>
+          <p:cNvSpPr txBox="1"/>
+          <p:nvPr/>
+        </p:nvSpPr>
+        <p:spPr>
+          <a:xfrm>
+            <a:off x="1664208" y="1417319"/>
+            <a:ext cx="9464040" cy="2007108"/>
+          </a:xfrm>
+          <a:prstGeom prst="rect">
+            <a:avLst/>
+          </a:prstGeom>
+          <a:noFill/>
+        </p:spPr>
+        <p:txBody>
+          <a:bodyPr wrap="square" lIns="45720" rIns="45720" tIns="36576" bIns="36576" anchor="t">
+            <a:spAutoFit/>
+          </a:bodyPr>
+          <a:lstStyle/>
+          <a:p>
+            <a:pPr algn="l">
               <a:defRPr sz="2000" b="0">
                 <a:solidFill>
                   <a:srgbClr val="1C2330"/>
@@ -5651,21 +5628,21 @@
               </a:defRPr>
             </a:pPr>
             <a:r>
-              <a:t>He producido o actualizado: Plantilla de defensa H1 y portfolio individual.</a:t>
-            </a:r>
-          </a:p>
-        </p:txBody>
-      </p:sp>
-      <p:sp>
-        <p:nvSpPr>
-          <p:cNvPr id="10" name="Rounded Rectangle 9"/>
+              <a:t>Defensa por parejas antes de defensa docente.</a:t>
+            </a:r>
+          </a:p>
+        </p:txBody>
+      </p:sp>
+      <p:sp>
+        <p:nvSpPr>
+          <p:cNvPr id="11" name="Rounded Rectangle 10"/>
           <p:cNvSpPr/>
           <p:nvPr/>
         </p:nvSpPr>
         <p:spPr>
           <a:xfrm>
-            <a:off x="713232" y="2267712"/>
-            <a:ext cx="420624" cy="420624"/>
+            <a:off x="658368" y="3776472"/>
+            <a:ext cx="10835640" cy="2226564"/>
           </a:xfrm>
           <a:prstGeom prst="roundRect">
             <a:avLst/>
@@ -5675,7 +5652,7 @@
           </a:solidFill>
           <a:ln>
             <a:solidFill>
-              <a:srgbClr val="2F5BA8"/>
+              <a:srgbClr val="E5E9EF"/>
             </a:solidFill>
           </a:ln>
         </p:spPr>
@@ -5703,14 +5680,14 @@
       </p:sp>
       <p:sp>
         <p:nvSpPr>
-          <p:cNvPr id="11" name="TextBox 10"/>
+          <p:cNvPr id="12" name="TextBox 11"/>
           <p:cNvSpPr txBox="1"/>
           <p:nvPr/>
         </p:nvSpPr>
         <p:spPr>
           <a:xfrm>
-            <a:off x="1389888" y="2258568"/>
-            <a:ext cx="9784080" cy="594360"/>
+            <a:off x="850392" y="3922776"/>
+            <a:ext cx="685800" cy="384048"/>
           </a:xfrm>
           <a:prstGeom prst="rect">
             <a:avLst/>
@@ -5718,67 +5695,22 @@
           <a:noFill/>
         </p:spPr>
         <p:txBody>
-          <a:bodyPr wrap="square" lIns="36576" rIns="36576" tIns="27432" bIns="27432">
+          <a:bodyPr wrap="square" lIns="45720" rIns="45720" tIns="36576" bIns="36576" anchor="t">
             <a:spAutoFit/>
           </a:bodyPr>
           <a:lstStyle/>
           <a:p>
             <a:pPr algn="l">
-              <a:defRPr sz="2000" b="0">
-                <a:solidFill>
-                  <a:srgbClr val="1C2330"/>
+              <a:defRPr sz="1200" b="1">
+                <a:solidFill>
+                  <a:srgbClr val="2F5BA8"/>
                 </a:solidFill>
                 <a:latin typeface="Aptos"/>
               </a:defRPr>
             </a:pPr>
             <a:r>
-              <a:t>Puedo señalar dónde está.</a:t>
-            </a:r>
-          </a:p>
-        </p:txBody>
-      </p:sp>
-      <p:sp>
-        <p:nvSpPr>
-          <p:cNvPr id="12" name="Rounded Rectangle 11"/>
-          <p:cNvSpPr/>
-          <p:nvPr/>
-        </p:nvSpPr>
-        <p:spPr>
-          <a:xfrm>
-            <a:off x="713232" y="3163824"/>
-            <a:ext cx="420624" cy="420624"/>
-          </a:xfrm>
-          <a:prstGeom prst="roundRect">
-            <a:avLst/>
-          </a:prstGeom>
-          <a:solidFill>
-            <a:srgbClr val="FFFFFF"/>
-          </a:solidFill>
-          <a:ln>
-            <a:solidFill>
-              <a:srgbClr val="2F5BA8"/>
-            </a:solidFill>
-          </a:ln>
-        </p:spPr>
-        <p:style>
-          <a:lnRef idx="1">
-            <a:schemeClr val="accent1"/>
-          </a:lnRef>
-          <a:fillRef idx="3">
-            <a:schemeClr val="accent1"/>
-          </a:fillRef>
-          <a:effectRef idx="2">
-            <a:schemeClr val="accent1"/>
-          </a:effectRef>
-          <a:fontRef idx="minor">
-            <a:schemeClr val="lt1"/>
-          </a:fontRef>
-        </p:style>
-        <p:txBody>
-          <a:bodyPr rtlCol="0" anchor="ctr"/>
-          <a:lstStyle/>
-          <a:p>
-            <a:pPr algn="ctr"/>
+              <a:t>PASO 2</a:t>
+            </a:r>
           </a:p>
         </p:txBody>
       </p:sp>
@@ -5790,8 +5722,8 @@
         </p:nvSpPr>
         <p:spPr>
           <a:xfrm>
-            <a:off x="1389888" y="3154680"/>
-            <a:ext cx="9784080" cy="594360"/>
+            <a:off x="1664208" y="3886200"/>
+            <a:ext cx="9464040" cy="2007108"/>
           </a:xfrm>
           <a:prstGeom prst="rect">
             <a:avLst/>
@@ -5799,7 +5731,7 @@
           <a:noFill/>
         </p:spPr>
         <p:txBody>
-          <a:bodyPr wrap="square" lIns="36576" rIns="36576" tIns="27432" bIns="27432">
+          <a:bodyPr wrap="square" lIns="45720" rIns="45720" tIns="36576" bIns="36576" anchor="t">
             <a:spAutoFit/>
           </a:bodyPr>
           <a:lstStyle/>
@@ -5813,205 +5745,7 @@
               </a:defRPr>
             </a:pPr>
             <a:r>
-              <a:t>Puedo explicar una decisión tomada.</a:t>
-            </a:r>
-          </a:p>
-        </p:txBody>
-      </p:sp>
-      <p:sp>
-        <p:nvSpPr>
-          <p:cNvPr id="14" name="Rounded Rectangle 13"/>
-          <p:cNvSpPr/>
-          <p:nvPr/>
-        </p:nvSpPr>
-        <p:spPr>
-          <a:xfrm>
-            <a:off x="713232" y="4059935"/>
-            <a:ext cx="420624" cy="420624"/>
-          </a:xfrm>
-          <a:prstGeom prst="roundRect">
-            <a:avLst/>
-          </a:prstGeom>
-          <a:solidFill>
-            <a:srgbClr val="FFFFFF"/>
-          </a:solidFill>
-          <a:ln>
-            <a:solidFill>
-              <a:srgbClr val="2F5BA8"/>
-            </a:solidFill>
-          </a:ln>
-        </p:spPr>
-        <p:style>
-          <a:lnRef idx="1">
-            <a:schemeClr val="accent1"/>
-          </a:lnRef>
-          <a:fillRef idx="3">
-            <a:schemeClr val="accent1"/>
-          </a:fillRef>
-          <a:effectRef idx="2">
-            <a:schemeClr val="accent1"/>
-          </a:effectRef>
-          <a:fontRef idx="minor">
-            <a:schemeClr val="lt1"/>
-          </a:fontRef>
-        </p:style>
-        <p:txBody>
-          <a:bodyPr rtlCol="0" anchor="ctr"/>
-          <a:lstStyle/>
-          <a:p>
-            <a:pPr algn="ctr"/>
-          </a:p>
-        </p:txBody>
-      </p:sp>
-      <p:sp>
-        <p:nvSpPr>
-          <p:cNvPr id="15" name="TextBox 14"/>
-          <p:cNvSpPr txBox="1"/>
-          <p:nvPr/>
-        </p:nvSpPr>
-        <p:spPr>
-          <a:xfrm>
-            <a:off x="1389888" y="4050791"/>
-            <a:ext cx="9784080" cy="594360"/>
-          </a:xfrm>
-          <a:prstGeom prst="rect">
-            <a:avLst/>
-          </a:prstGeom>
-          <a:noFill/>
-        </p:spPr>
-        <p:txBody>
-          <a:bodyPr wrap="square" lIns="36576" rIns="36576" tIns="27432" bIns="27432">
-            <a:spAutoFit/>
-          </a:bodyPr>
-          <a:lstStyle/>
-          <a:p>
-            <a:pPr algn="l">
-              <a:defRPr sz="2000" b="0">
-                <a:solidFill>
-                  <a:srgbClr val="1C2330"/>
-                </a:solidFill>
-                <a:latin typeface="Aptos"/>
-              </a:defRPr>
-            </a:pPr>
-            <a:r>
-              <a:t>Puedo mostrar una prueba o comprobación.</a:t>
-            </a:r>
-          </a:p>
-        </p:txBody>
-      </p:sp>
-      <p:sp>
-        <p:nvSpPr>
-          <p:cNvPr id="16" name="Rounded Rectangle 15"/>
-          <p:cNvSpPr/>
-          <p:nvPr/>
-        </p:nvSpPr>
-        <p:spPr>
-          <a:xfrm>
-            <a:off x="713232" y="4956048"/>
-            <a:ext cx="420624" cy="420624"/>
-          </a:xfrm>
-          <a:prstGeom prst="roundRect">
-            <a:avLst/>
-          </a:prstGeom>
-          <a:solidFill>
-            <a:srgbClr val="FFFFFF"/>
-          </a:solidFill>
-          <a:ln>
-            <a:solidFill>
-              <a:srgbClr val="2F5BA8"/>
-            </a:solidFill>
-          </a:ln>
-        </p:spPr>
-        <p:style>
-          <a:lnRef idx="1">
-            <a:schemeClr val="accent1"/>
-          </a:lnRef>
-          <a:fillRef idx="3">
-            <a:schemeClr val="accent1"/>
-          </a:fillRef>
-          <a:effectRef idx="2">
-            <a:schemeClr val="accent1"/>
-          </a:effectRef>
-          <a:fontRef idx="minor">
-            <a:schemeClr val="lt1"/>
-          </a:fontRef>
-        </p:style>
-        <p:txBody>
-          <a:bodyPr rtlCol="0" anchor="ctr"/>
-          <a:lstStyle/>
-          <a:p>
-            <a:pPr algn="ctr"/>
-          </a:p>
-        </p:txBody>
-      </p:sp>
-      <p:sp>
-        <p:nvSpPr>
-          <p:cNvPr id="17" name="TextBox 16"/>
-          <p:cNvSpPr txBox="1"/>
-          <p:nvPr/>
-        </p:nvSpPr>
-        <p:spPr>
-          <a:xfrm>
-            <a:off x="1389888" y="4946904"/>
-            <a:ext cx="9784080" cy="594360"/>
-          </a:xfrm>
-          <a:prstGeom prst="rect">
-            <a:avLst/>
-          </a:prstGeom>
-          <a:noFill/>
-        </p:spPr>
-        <p:txBody>
-          <a:bodyPr wrap="square" lIns="36576" rIns="36576" tIns="27432" bIns="27432">
-            <a:spAutoFit/>
-          </a:bodyPr>
-          <a:lstStyle/>
-          <a:p>
-            <a:pPr algn="l">
-              <a:defRPr sz="2000" b="0">
-                <a:solidFill>
-                  <a:srgbClr val="1C2330"/>
-                </a:solidFill>
-                <a:latin typeface="Aptos"/>
-              </a:defRPr>
-            </a:pPr>
-            <a:r>
-              <a:t>He registrado mi aportación individual si el trabajo era de equipo.</a:t>
-            </a:r>
-          </a:p>
-        </p:txBody>
-      </p:sp>
-      <p:sp>
-        <p:nvSpPr>
-          <p:cNvPr id="18" name="TextBox 17"/>
-          <p:cNvSpPr txBox="1"/>
-          <p:nvPr/>
-        </p:nvSpPr>
-        <p:spPr>
-          <a:xfrm>
-            <a:off x="731520" y="5925312"/>
-            <a:ext cx="10789920" cy="274320"/>
-          </a:xfrm>
-          <a:prstGeom prst="rect">
-            <a:avLst/>
-          </a:prstGeom>
-          <a:noFill/>
-        </p:spPr>
-        <p:txBody>
-          <a:bodyPr wrap="square" lIns="36576" rIns="36576" tIns="27432" bIns="27432">
-            <a:spAutoFit/>
-          </a:bodyPr>
-          <a:lstStyle/>
-          <a:p>
-            <a:pPr algn="l">
-              <a:defRPr sz="1200" b="0">
-                <a:solidFill>
-                  <a:srgbClr val="586270"/>
-                </a:solidFill>
-                <a:latin typeface="Aptos"/>
-              </a:defRPr>
-            </a:pPr>
-            <a:r>
-              <a:t>Necesitas: Un ordenador por estudiante o pareja, con JDK e IntelliJ disponibles y el proyecto del hito accesible. · Proyector solo si habrá demostración colectiva; la defensa puede realizarse directamente en el equipo.</a:t>
+              <a:t>Comprueba y registra la evidencia: Plantilla de defensa H1 y portfolio individual.</a:t>
             </a:r>
           </a:p>
         </p:txBody>
@@ -6128,8 +5862,8 @@
         </p:nvSpPr>
         <p:spPr>
           <a:xfrm>
-            <a:off x="502920" y="310896"/>
-            <a:ext cx="5029200" cy="256032"/>
+            <a:off x="502920" y="274320"/>
+            <a:ext cx="5486400" cy="256032"/>
           </a:xfrm>
           <a:prstGeom prst="rect">
             <a:avLst/>
@@ -6137,7 +5871,7 @@
           <a:noFill/>
         </p:spPr>
         <p:txBody>
-          <a:bodyPr wrap="square" lIns="36576" rIns="36576" tIns="27432" bIns="27432">
+          <a:bodyPr wrap="square" lIns="45720" rIns="45720" tIns="36576" bIns="36576" anchor="t">
             <a:spAutoFit/>
           </a:bodyPr>
           <a:lstStyle/>
@@ -6151,7 +5885,7 @@
               </a:defRPr>
             </a:pPr>
             <a:r>
-              <a:t>COMPRUEBA Y EXPLICA</a:t>
+              <a:t>COMPROBAR</a:t>
             </a:r>
           </a:p>
         </p:txBody>
@@ -6164,7 +5898,7 @@
         </p:nvSpPr>
         <p:spPr>
           <a:xfrm>
-            <a:off x="502920" y="621792"/>
+            <a:off x="502920" y="603504"/>
             <a:ext cx="11064240" cy="530352"/>
           </a:xfrm>
           <a:prstGeom prst="rect">
@@ -6173,7 +5907,7 @@
           <a:noFill/>
         </p:spPr>
         <p:txBody>
-          <a:bodyPr wrap="square" lIns="36576" rIns="36576" tIns="27432" bIns="27432">
+          <a:bodyPr wrap="square" lIns="45720" rIns="45720" tIns="36576" bIns="36576" anchor="t">
             <a:spAutoFit/>
           </a:bodyPr>
           <a:lstStyle/>
@@ -6187,7 +5921,7 @@
               </a:defRPr>
             </a:pPr>
             <a:r>
-              <a:t>Cierre de la sesión</a:t>
+              <a:t>Evidencia y comprobación</a:t>
             </a:r>
           </a:p>
         </p:txBody>
@@ -6252,7 +5986,7 @@
           <a:noFill/>
         </p:spPr>
         <p:txBody>
-          <a:bodyPr wrap="square" lIns="36576" rIns="36576" tIns="27432" bIns="27432">
+          <a:bodyPr wrap="square" lIns="45720" rIns="45720" tIns="36576" bIns="36576" anchor="t">
             <a:spAutoFit/>
           </a:bodyPr>
           <a:lstStyle/>
@@ -6279,10 +6013,476 @@
         </p:nvSpPr>
         <p:spPr>
           <a:xfrm>
-            <a:off x="621792" y="1298448"/>
-            <a:ext cx="10927080" cy="1965960"/>
+            <a:off x="713232" y="1298448"/>
+            <a:ext cx="420624" cy="420624"/>
           </a:xfrm>
           <a:prstGeom prst="roundRect">
+            <a:avLst/>
+          </a:prstGeom>
+          <a:solidFill>
+            <a:srgbClr val="FFFFFF"/>
+          </a:solidFill>
+          <a:ln>
+            <a:solidFill>
+              <a:srgbClr val="2F5BA8"/>
+            </a:solidFill>
+          </a:ln>
+        </p:spPr>
+        <p:style>
+          <a:lnRef idx="1">
+            <a:schemeClr val="accent1"/>
+          </a:lnRef>
+          <a:fillRef idx="3">
+            <a:schemeClr val="accent1"/>
+          </a:fillRef>
+          <a:effectRef idx="2">
+            <a:schemeClr val="accent1"/>
+          </a:effectRef>
+          <a:fontRef idx="minor">
+            <a:schemeClr val="lt1"/>
+          </a:fontRef>
+        </p:style>
+        <p:txBody>
+          <a:bodyPr rtlCol="0" anchor="ctr"/>
+          <a:lstStyle/>
+          <a:p>
+            <a:pPr algn="ctr"/>
+          </a:p>
+        </p:txBody>
+      </p:sp>
+      <p:sp>
+        <p:nvSpPr>
+          <p:cNvPr id="9" name="TextBox 8"/>
+          <p:cNvSpPr txBox="1"/>
+          <p:nvPr/>
+        </p:nvSpPr>
+        <p:spPr>
+          <a:xfrm>
+            <a:off x="1389888" y="1280160"/>
+            <a:ext cx="9829800" cy="960120"/>
+          </a:xfrm>
+          <a:prstGeom prst="rect">
+            <a:avLst/>
+          </a:prstGeom>
+          <a:noFill/>
+        </p:spPr>
+        <p:txBody>
+          <a:bodyPr wrap="square" lIns="45720" rIns="45720" tIns="36576" bIns="36576" anchor="t">
+            <a:spAutoFit/>
+          </a:bodyPr>
+          <a:lstStyle/>
+          <a:p>
+            <a:pPr algn="l">
+              <a:defRPr sz="1900" b="0">
+                <a:solidFill>
+                  <a:srgbClr val="1C2330"/>
+                </a:solidFill>
+                <a:latin typeface="Aptos"/>
+              </a:defRPr>
+            </a:pPr>
+            <a:r>
+              <a:t>He producido o actualizado: Plantilla de defensa H1 y portfolio individual.</a:t>
+            </a:r>
+          </a:p>
+        </p:txBody>
+      </p:sp>
+      <p:sp>
+        <p:nvSpPr>
+          <p:cNvPr id="10" name="Rounded Rectangle 9"/>
+          <p:cNvSpPr/>
+          <p:nvPr/>
+        </p:nvSpPr>
+        <p:spPr>
+          <a:xfrm>
+            <a:off x="713232" y="2295144"/>
+            <a:ext cx="420624" cy="420624"/>
+          </a:xfrm>
+          <a:prstGeom prst="roundRect">
+            <a:avLst/>
+          </a:prstGeom>
+          <a:solidFill>
+            <a:srgbClr val="FFFFFF"/>
+          </a:solidFill>
+          <a:ln>
+            <a:solidFill>
+              <a:srgbClr val="2F5BA8"/>
+            </a:solidFill>
+          </a:ln>
+        </p:spPr>
+        <p:style>
+          <a:lnRef idx="1">
+            <a:schemeClr val="accent1"/>
+          </a:lnRef>
+          <a:fillRef idx="3">
+            <a:schemeClr val="accent1"/>
+          </a:fillRef>
+          <a:effectRef idx="2">
+            <a:schemeClr val="accent1"/>
+          </a:effectRef>
+          <a:fontRef idx="minor">
+            <a:schemeClr val="lt1"/>
+          </a:fontRef>
+        </p:style>
+        <p:txBody>
+          <a:bodyPr rtlCol="0" anchor="ctr"/>
+          <a:lstStyle/>
+          <a:p>
+            <a:pPr algn="ctr"/>
+          </a:p>
+        </p:txBody>
+      </p:sp>
+      <p:sp>
+        <p:nvSpPr>
+          <p:cNvPr id="11" name="TextBox 10"/>
+          <p:cNvSpPr txBox="1"/>
+          <p:nvPr/>
+        </p:nvSpPr>
+        <p:spPr>
+          <a:xfrm>
+            <a:off x="1389888" y="2276856"/>
+            <a:ext cx="9829800" cy="960120"/>
+          </a:xfrm>
+          <a:prstGeom prst="rect">
+            <a:avLst/>
+          </a:prstGeom>
+          <a:noFill/>
+        </p:spPr>
+        <p:txBody>
+          <a:bodyPr wrap="square" lIns="45720" rIns="45720" tIns="36576" bIns="36576" anchor="t">
+            <a:spAutoFit/>
+          </a:bodyPr>
+          <a:lstStyle/>
+          <a:p>
+            <a:pPr algn="l">
+              <a:defRPr sz="1900" b="0">
+                <a:solidFill>
+                  <a:srgbClr val="1C2330"/>
+                </a:solidFill>
+                <a:latin typeface="Aptos"/>
+              </a:defRPr>
+            </a:pPr>
+            <a:r>
+              <a:t>Puedo señalar dónde está.</a:t>
+            </a:r>
+          </a:p>
+        </p:txBody>
+      </p:sp>
+      <p:sp>
+        <p:nvSpPr>
+          <p:cNvPr id="12" name="Rounded Rectangle 11"/>
+          <p:cNvSpPr/>
+          <p:nvPr/>
+        </p:nvSpPr>
+        <p:spPr>
+          <a:xfrm>
+            <a:off x="713232" y="3291839"/>
+            <a:ext cx="420624" cy="420624"/>
+          </a:xfrm>
+          <a:prstGeom prst="roundRect">
+            <a:avLst/>
+          </a:prstGeom>
+          <a:solidFill>
+            <a:srgbClr val="FFFFFF"/>
+          </a:solidFill>
+          <a:ln>
+            <a:solidFill>
+              <a:srgbClr val="2F5BA8"/>
+            </a:solidFill>
+          </a:ln>
+        </p:spPr>
+        <p:style>
+          <a:lnRef idx="1">
+            <a:schemeClr val="accent1"/>
+          </a:lnRef>
+          <a:fillRef idx="3">
+            <a:schemeClr val="accent1"/>
+          </a:fillRef>
+          <a:effectRef idx="2">
+            <a:schemeClr val="accent1"/>
+          </a:effectRef>
+          <a:fontRef idx="minor">
+            <a:schemeClr val="lt1"/>
+          </a:fontRef>
+        </p:style>
+        <p:txBody>
+          <a:bodyPr rtlCol="0" anchor="ctr"/>
+          <a:lstStyle/>
+          <a:p>
+            <a:pPr algn="ctr"/>
+          </a:p>
+        </p:txBody>
+      </p:sp>
+      <p:sp>
+        <p:nvSpPr>
+          <p:cNvPr id="13" name="TextBox 12"/>
+          <p:cNvSpPr txBox="1"/>
+          <p:nvPr/>
+        </p:nvSpPr>
+        <p:spPr>
+          <a:xfrm>
+            <a:off x="1389888" y="3273551"/>
+            <a:ext cx="9829800" cy="960120"/>
+          </a:xfrm>
+          <a:prstGeom prst="rect">
+            <a:avLst/>
+          </a:prstGeom>
+          <a:noFill/>
+        </p:spPr>
+        <p:txBody>
+          <a:bodyPr wrap="square" lIns="45720" rIns="45720" tIns="36576" bIns="36576" anchor="t">
+            <a:spAutoFit/>
+          </a:bodyPr>
+          <a:lstStyle/>
+          <a:p>
+            <a:pPr algn="l">
+              <a:defRPr sz="1900" b="0">
+                <a:solidFill>
+                  <a:srgbClr val="1C2330"/>
+                </a:solidFill>
+                <a:latin typeface="Aptos"/>
+              </a:defRPr>
+            </a:pPr>
+            <a:r>
+              <a:t>Puedo explicar una decisión tomada.</a:t>
+            </a:r>
+          </a:p>
+        </p:txBody>
+      </p:sp>
+      <p:sp>
+        <p:nvSpPr>
+          <p:cNvPr id="14" name="Rounded Rectangle 13"/>
+          <p:cNvSpPr/>
+          <p:nvPr/>
+        </p:nvSpPr>
+        <p:spPr>
+          <a:xfrm>
+            <a:off x="713232" y="4288536"/>
+            <a:ext cx="420624" cy="420624"/>
+          </a:xfrm>
+          <a:prstGeom prst="roundRect">
+            <a:avLst/>
+          </a:prstGeom>
+          <a:solidFill>
+            <a:srgbClr val="FFFFFF"/>
+          </a:solidFill>
+          <a:ln>
+            <a:solidFill>
+              <a:srgbClr val="2F5BA8"/>
+            </a:solidFill>
+          </a:ln>
+        </p:spPr>
+        <p:style>
+          <a:lnRef idx="1">
+            <a:schemeClr val="accent1"/>
+          </a:lnRef>
+          <a:fillRef idx="3">
+            <a:schemeClr val="accent1"/>
+          </a:fillRef>
+          <a:effectRef idx="2">
+            <a:schemeClr val="accent1"/>
+          </a:effectRef>
+          <a:fontRef idx="minor">
+            <a:schemeClr val="lt1"/>
+          </a:fontRef>
+        </p:style>
+        <p:txBody>
+          <a:bodyPr rtlCol="0" anchor="ctr"/>
+          <a:lstStyle/>
+          <a:p>
+            <a:pPr algn="ctr"/>
+          </a:p>
+        </p:txBody>
+      </p:sp>
+      <p:sp>
+        <p:nvSpPr>
+          <p:cNvPr id="15" name="TextBox 14"/>
+          <p:cNvSpPr txBox="1"/>
+          <p:nvPr/>
+        </p:nvSpPr>
+        <p:spPr>
+          <a:xfrm>
+            <a:off x="1389888" y="4270248"/>
+            <a:ext cx="9829800" cy="960120"/>
+          </a:xfrm>
+          <a:prstGeom prst="rect">
+            <a:avLst/>
+          </a:prstGeom>
+          <a:noFill/>
+        </p:spPr>
+        <p:txBody>
+          <a:bodyPr wrap="square" lIns="45720" rIns="45720" tIns="36576" bIns="36576" anchor="t">
+            <a:spAutoFit/>
+          </a:bodyPr>
+          <a:lstStyle/>
+          <a:p>
+            <a:pPr algn="l">
+              <a:defRPr sz="1900" b="0">
+                <a:solidFill>
+                  <a:srgbClr val="1C2330"/>
+                </a:solidFill>
+                <a:latin typeface="Aptos"/>
+              </a:defRPr>
+            </a:pPr>
+            <a:r>
+              <a:t>Puedo mostrar una prueba o comprobación.</a:t>
+            </a:r>
+          </a:p>
+        </p:txBody>
+      </p:sp>
+      <p:sp>
+        <p:nvSpPr>
+          <p:cNvPr id="16" name="Rounded Rectangle 15"/>
+          <p:cNvSpPr/>
+          <p:nvPr/>
+        </p:nvSpPr>
+        <p:spPr>
+          <a:xfrm>
+            <a:off x="713232" y="5285231"/>
+            <a:ext cx="420624" cy="420624"/>
+          </a:xfrm>
+          <a:prstGeom prst="roundRect">
+            <a:avLst/>
+          </a:prstGeom>
+          <a:solidFill>
+            <a:srgbClr val="FFFFFF"/>
+          </a:solidFill>
+          <a:ln>
+            <a:solidFill>
+              <a:srgbClr val="2F5BA8"/>
+            </a:solidFill>
+          </a:ln>
+        </p:spPr>
+        <p:style>
+          <a:lnRef idx="1">
+            <a:schemeClr val="accent1"/>
+          </a:lnRef>
+          <a:fillRef idx="3">
+            <a:schemeClr val="accent1"/>
+          </a:fillRef>
+          <a:effectRef idx="2">
+            <a:schemeClr val="accent1"/>
+          </a:effectRef>
+          <a:fontRef idx="minor">
+            <a:schemeClr val="lt1"/>
+          </a:fontRef>
+        </p:style>
+        <p:txBody>
+          <a:bodyPr rtlCol="0" anchor="ctr"/>
+          <a:lstStyle/>
+          <a:p>
+            <a:pPr algn="ctr"/>
+          </a:p>
+        </p:txBody>
+      </p:sp>
+      <p:sp>
+        <p:nvSpPr>
+          <p:cNvPr id="17" name="TextBox 16"/>
+          <p:cNvSpPr txBox="1"/>
+          <p:nvPr/>
+        </p:nvSpPr>
+        <p:spPr>
+          <a:xfrm>
+            <a:off x="1389888" y="5266944"/>
+            <a:ext cx="9829800" cy="960120"/>
+          </a:xfrm>
+          <a:prstGeom prst="rect">
+            <a:avLst/>
+          </a:prstGeom>
+          <a:noFill/>
+        </p:spPr>
+        <p:txBody>
+          <a:bodyPr wrap="square" lIns="45720" rIns="45720" tIns="36576" bIns="36576" anchor="t">
+            <a:spAutoFit/>
+          </a:bodyPr>
+          <a:lstStyle/>
+          <a:p>
+            <a:pPr algn="l">
+              <a:defRPr sz="1900" b="0">
+                <a:solidFill>
+                  <a:srgbClr val="1C2330"/>
+                </a:solidFill>
+                <a:latin typeface="Aptos"/>
+              </a:defRPr>
+            </a:pPr>
+            <a:r>
+              <a:t>He registrado mi aportación individual si el trabajo era de equipo.</a:t>
+            </a:r>
+          </a:p>
+        </p:txBody>
+      </p:sp>
+    </p:spTree>
+  </p:cSld>
+  <p:clrMapOvr>
+    <a:masterClrMapping/>
+  </p:clrMapOvr>
+</p:sld>
+</file>
+
+<file path=ppt/slides/slide7.xml><?xml version="1.0" encoding="utf-8"?>
+<p:sld xmlns:a="http://schemas.openxmlformats.org/drawingml/2006/main" xmlns:p="http://schemas.openxmlformats.org/presentationml/2006/main" xmlns:r="http://schemas.openxmlformats.org/officeDocument/2006/relationships">
+  <p:cSld>
+    <p:spTree>
+      <p:nvGrpSpPr>
+        <p:cNvPr id="1" name=""/>
+        <p:cNvGrpSpPr/>
+        <p:nvPr/>
+      </p:nvGrpSpPr>
+      <p:grpSpPr/>
+      <p:sp>
+        <p:nvSpPr>
+          <p:cNvPr id="2" name="Rectangle 1"/>
+          <p:cNvSpPr/>
+          <p:nvPr/>
+        </p:nvSpPr>
+        <p:spPr>
+          <a:xfrm>
+            <a:off x="0" y="0"/>
+            <a:ext cx="12191695" cy="6858000"/>
+          </a:xfrm>
+          <a:prstGeom prst="rect">
+            <a:avLst/>
+          </a:prstGeom>
+          <a:solidFill>
+            <a:srgbClr val="F9F7F2"/>
+          </a:solidFill>
+          <a:ln>
+            <a:noFill/>
+          </a:ln>
+        </p:spPr>
+        <p:style>
+          <a:lnRef idx="1">
+            <a:schemeClr val="accent1"/>
+          </a:lnRef>
+          <a:fillRef idx="3">
+            <a:schemeClr val="accent1"/>
+          </a:fillRef>
+          <a:effectRef idx="2">
+            <a:schemeClr val="accent1"/>
+          </a:effectRef>
+          <a:fontRef idx="minor">
+            <a:schemeClr val="lt1"/>
+          </a:fontRef>
+        </p:style>
+        <p:txBody>
+          <a:bodyPr rtlCol="0" anchor="ctr"/>
+          <a:lstStyle/>
+          <a:p>
+            <a:pPr algn="ctr"/>
+          </a:p>
+        </p:txBody>
+      </p:sp>
+      <p:sp>
+        <p:nvSpPr>
+          <p:cNvPr id="3" name="Rectangle 2"/>
+          <p:cNvSpPr/>
+          <p:nvPr/>
+        </p:nvSpPr>
+        <p:spPr>
+          <a:xfrm>
+            <a:off x="0" y="0"/>
+            <a:ext cx="164592" cy="6858000"/>
+          </a:xfrm>
+          <a:prstGeom prst="rect">
             <a:avLst/>
           </a:prstGeom>
           <a:solidFill>
@@ -6316,14 +6516,14 @@
       </p:sp>
       <p:sp>
         <p:nvSpPr>
-          <p:cNvPr id="9" name="TextBox 8"/>
+          <p:cNvPr id="4" name="TextBox 3"/>
           <p:cNvSpPr txBox="1"/>
           <p:nvPr/>
         </p:nvSpPr>
         <p:spPr>
           <a:xfrm>
-            <a:off x="960120" y="1618488"/>
-            <a:ext cx="10195560" cy="320040"/>
+            <a:off x="502920" y="274320"/>
+            <a:ext cx="5486400" cy="256032"/>
           </a:xfrm>
           <a:prstGeom prst="rect">
             <a:avLst/>
@@ -6331,35 +6531,35 @@
           <a:noFill/>
         </p:spPr>
         <p:txBody>
-          <a:bodyPr wrap="square" lIns="36576" rIns="36576" tIns="27432" bIns="27432">
+          <a:bodyPr wrap="square" lIns="45720" rIns="45720" tIns="36576" bIns="36576" anchor="t">
             <a:spAutoFit/>
           </a:bodyPr>
           <a:lstStyle/>
           <a:p>
             <a:pPr algn="l">
-              <a:defRPr sz="1400" b="1">
-                <a:solidFill>
-                  <a:srgbClr val="FFFFFF"/>
+              <a:defRPr sz="1000" b="1">
+                <a:solidFill>
+                  <a:srgbClr val="2F5BA8"/>
                 </a:solidFill>
                 <a:latin typeface="Aptos"/>
               </a:defRPr>
             </a:pPr>
             <a:r>
-              <a:t>PREGUNTA DE SALIDA</a:t>
-            </a:r>
-          </a:p>
-        </p:txBody>
-      </p:sp>
-      <p:sp>
-        <p:nvSpPr>
-          <p:cNvPr id="10" name="TextBox 9"/>
+              <a:t>LÍMITES QUE PROTEGEN EL APRENDIZAJE</a:t>
+            </a:r>
+          </a:p>
+        </p:txBody>
+      </p:sp>
+      <p:sp>
+        <p:nvSpPr>
+          <p:cNvPr id="5" name="TextBox 4"/>
           <p:cNvSpPr txBox="1"/>
           <p:nvPr/>
         </p:nvSpPr>
         <p:spPr>
           <a:xfrm>
-            <a:off x="960120" y="2057400"/>
-            <a:ext cx="10058400" cy="822960"/>
+            <a:off x="502920" y="603504"/>
+            <a:ext cx="11064240" cy="530352"/>
           </a:xfrm>
           <a:prstGeom prst="rect">
             <a:avLst/>
@@ -6367,35 +6567,78 @@
           <a:noFill/>
         </p:spPr>
         <p:txBody>
-          <a:bodyPr wrap="square" lIns="36576" rIns="36576" tIns="27432" bIns="27432">
+          <a:bodyPr wrap="square" lIns="45720" rIns="45720" tIns="36576" bIns="36576" anchor="t">
             <a:spAutoFit/>
           </a:bodyPr>
           <a:lstStyle/>
           <a:p>
             <a:pPr algn="l">
-              <a:defRPr sz="2700" b="1">
-                <a:solidFill>
-                  <a:srgbClr val="FFFFFF"/>
+              <a:defRPr sz="2800" b="1">
+                <a:solidFill>
+                  <a:srgbClr val="1C2330"/>
                 </a:solidFill>
                 <a:latin typeface="Aptos"/>
               </a:defRPr>
             </a:pPr>
             <a:r>
-              <a:t>Decidir qué debe mejorar cada alumno antes de H2.</a:t>
-            </a:r>
-          </a:p>
-        </p:txBody>
-      </p:sp>
-      <p:sp>
-        <p:nvSpPr>
-          <p:cNvPr id="11" name="TextBox 10"/>
+              <a:t>Seguridad y uso responsable</a:t>
+            </a:r>
+          </a:p>
+        </p:txBody>
+      </p:sp>
+      <p:sp>
+        <p:nvSpPr>
+          <p:cNvPr id="6" name="Rectangle 5"/>
+          <p:cNvSpPr/>
+          <p:nvPr/>
+        </p:nvSpPr>
+        <p:spPr>
+          <a:xfrm>
+            <a:off x="0" y="6601968"/>
+            <a:ext cx="12191695" cy="256032"/>
+          </a:xfrm>
+          <a:prstGeom prst="rect">
+            <a:avLst/>
+          </a:prstGeom>
+          <a:solidFill>
+            <a:srgbClr val="2F5BA8"/>
+          </a:solidFill>
+          <a:ln>
+            <a:noFill/>
+          </a:ln>
+        </p:spPr>
+        <p:style>
+          <a:lnRef idx="1">
+            <a:schemeClr val="accent1"/>
+          </a:lnRef>
+          <a:fillRef idx="3">
+            <a:schemeClr val="accent1"/>
+          </a:fillRef>
+          <a:effectRef idx="2">
+            <a:schemeClr val="accent1"/>
+          </a:effectRef>
+          <a:fontRef idx="minor">
+            <a:schemeClr val="lt1"/>
+          </a:fontRef>
+        </p:style>
+        <p:txBody>
+          <a:bodyPr rtlCol="0" anchor="ctr"/>
+          <a:lstStyle/>
+          <a:p>
+            <a:pPr algn="ctr"/>
+          </a:p>
+        </p:txBody>
+      </p:sp>
+      <p:sp>
+        <p:nvSpPr>
+          <p:cNvPr id="7" name="TextBox 6"/>
           <p:cNvSpPr txBox="1"/>
           <p:nvPr/>
         </p:nvSpPr>
         <p:spPr>
           <a:xfrm>
-            <a:off x="713232" y="3703320"/>
-            <a:ext cx="3749039" cy="320040"/>
+            <a:off x="411480" y="6629400"/>
+            <a:ext cx="11247120" cy="164592"/>
           </a:xfrm>
           <a:prstGeom prst="rect">
             <a:avLst/>
@@ -6403,106 +6646,35 @@
           <a:noFill/>
         </p:spPr>
         <p:txBody>
-          <a:bodyPr wrap="square" lIns="36576" rIns="36576" tIns="27432" bIns="27432">
+          <a:bodyPr wrap="square" lIns="45720" rIns="45720" tIns="36576" bIns="36576" anchor="t">
             <a:spAutoFit/>
           </a:bodyPr>
           <a:lstStyle/>
           <a:p>
             <a:pPr algn="l">
-              <a:defRPr sz="1500" b="1">
-                <a:solidFill>
-                  <a:srgbClr val="2F5BA8"/>
+              <a:defRPr sz="900" b="0">
+                <a:solidFill>
+                  <a:srgbClr val="FFFFFF"/>
                 </a:solidFill>
                 <a:latin typeface="Aptos"/>
               </a:defRPr>
             </a:pPr>
             <a:r>
-              <a:t>RECUERDA</a:t>
-            </a:r>
-          </a:p>
-        </p:txBody>
-      </p:sp>
-      <p:sp>
-        <p:nvSpPr>
-          <p:cNvPr id="12" name="TextBox 11"/>
-          <p:cNvSpPr txBox="1"/>
-          <p:nvPr/>
-        </p:nvSpPr>
-        <p:spPr>
-          <a:xfrm>
-            <a:off x="713232" y="4114800"/>
-            <a:ext cx="6583680" cy="1691640"/>
-          </a:xfrm>
-          <a:prstGeom prst="rect">
-            <a:avLst/>
-          </a:prstGeom>
-          <a:noFill/>
-        </p:spPr>
-        <p:txBody>
-          <a:bodyPr wrap="square" lIns="73152" rIns="45720" tIns="36576">
-            <a:spAutoFit/>
-          </a:bodyPr>
-          <a:lstStyle/>
-          <a:p>
-            <a:pPr>
-              <a:spcAft>
-                <a:spcPts val="1000"/>
-              </a:spcAft>
-              <a:defRPr sz="1700">
-                <a:solidFill>
-                  <a:srgbClr val="1C2330"/>
-                </a:solidFill>
-                <a:latin typeface="Aptos"/>
-              </a:defRPr>
-            </a:pPr>
-            <a:r>
-              <a:t>•  Trabaja únicamente con datos ficticios.</a:t>
-            </a:r>
-          </a:p>
-          <a:p>
-            <a:pPr>
-              <a:spcAft>
-                <a:spcPts val="1000"/>
-              </a:spcAft>
-              <a:defRPr sz="1700">
-                <a:solidFill>
-                  <a:srgbClr val="1C2330"/>
-                </a:solidFill>
-                <a:latin typeface="Aptos"/>
-              </a:defRPr>
-            </a:pPr>
-            <a:r>
-              <a:t>•  No escribas contraseñas, tokens, claves API ni datos personales.</a:t>
-            </a:r>
-          </a:p>
-          <a:p>
-            <a:pPr>
-              <a:spcAft>
-                <a:spcPts val="1000"/>
-              </a:spcAft>
-              <a:defRPr sz="1700">
-                <a:solidFill>
-                  <a:srgbClr val="1C2330"/>
-                </a:solidFill>
-                <a:latin typeface="Aptos"/>
-              </a:defRPr>
-            </a:pPr>
-            <a:r>
-              <a:t>•  Si utilizas IA en un uso permitido, registra qué pediste, qué recibiste, qué cambiaste y cómo lo comprobaste.</a:t>
-            </a:r>
-          </a:p>
-        </p:txBody>
-      </p:sp>
-      <p:sp>
-        <p:nvSpPr>
-          <p:cNvPr id="13" name="Rounded Rectangle 12"/>
+              <a:t>MiniJarvis · 1.º DAW · Sesión 215 · H1</a:t>
+            </a:r>
+          </a:p>
+        </p:txBody>
+      </p:sp>
+      <p:sp>
+        <p:nvSpPr>
+          <p:cNvPr id="8" name="Rounded Rectangle 7"/>
           <p:cNvSpPr/>
           <p:nvPr/>
         </p:nvSpPr>
         <p:spPr>
           <a:xfrm>
-            <a:off x="7726679" y="3794760"/>
-            <a:ext cx="3703320" cy="1600200"/>
+            <a:off x="621792" y="1298448"/>
+            <a:ext cx="5230368" cy="2176272"/>
           </a:xfrm>
           <a:prstGeom prst="roundRect">
             <a:avLst/>
@@ -6512,7 +6684,7 @@
           </a:solidFill>
           <a:ln>
             <a:solidFill>
-              <a:srgbClr val="EBEEF2"/>
+              <a:srgbClr val="E5E9EF"/>
             </a:solidFill>
           </a:ln>
         </p:spPr>
@@ -6540,14 +6712,57 @@
       </p:sp>
       <p:sp>
         <p:nvSpPr>
-          <p:cNvPr id="14" name="TextBox 13"/>
+          <p:cNvPr id="9" name="Rounded Rectangle 8"/>
+          <p:cNvSpPr/>
+          <p:nvPr/>
+        </p:nvSpPr>
+        <p:spPr>
+          <a:xfrm>
+            <a:off x="841248" y="1527048"/>
+            <a:ext cx="237744" cy="1719072"/>
+          </a:xfrm>
+          <a:prstGeom prst="roundRect">
+            <a:avLst/>
+          </a:prstGeom>
+          <a:solidFill>
+            <a:srgbClr val="247E5C"/>
+          </a:solidFill>
+          <a:ln>
+            <a:noFill/>
+          </a:ln>
+        </p:spPr>
+        <p:style>
+          <a:lnRef idx="1">
+            <a:schemeClr val="accent1"/>
+          </a:lnRef>
+          <a:fillRef idx="3">
+            <a:schemeClr val="accent1"/>
+          </a:fillRef>
+          <a:effectRef idx="2">
+            <a:schemeClr val="accent1"/>
+          </a:effectRef>
+          <a:fontRef idx="minor">
+            <a:schemeClr val="lt1"/>
+          </a:fontRef>
+        </p:style>
+        <p:txBody>
+          <a:bodyPr rtlCol="0" anchor="ctr"/>
+          <a:lstStyle/>
+          <a:p>
+            <a:pPr algn="ctr"/>
+          </a:p>
+        </p:txBody>
+      </p:sp>
+      <p:sp>
+        <p:nvSpPr>
+          <p:cNvPr id="10" name="TextBox 9"/>
           <p:cNvSpPr txBox="1"/>
           <p:nvPr/>
         </p:nvSpPr>
         <p:spPr>
           <a:xfrm>
-            <a:off x="8028431" y="4087368"/>
-            <a:ext cx="3063240" cy="868680"/>
+            <a:off x="1280160" y="1527048"/>
+            <a:ext cx="4224528" cy="1783080"/>
           </a:xfrm>
           <a:prstGeom prst="rect">
             <a:avLst/>
@@ -6555,13 +6770,793 @@
           <a:noFill/>
         </p:spPr>
         <p:txBody>
-          <a:bodyPr wrap="square" lIns="36576" rIns="36576" tIns="27432" bIns="27432">
+          <a:bodyPr wrap="square" lIns="45720" rIns="45720" tIns="36576" bIns="36576" anchor="t">
             <a:spAutoFit/>
           </a:bodyPr>
           <a:lstStyle/>
           <a:p>
+            <a:pPr algn="l">
+              <a:defRPr sz="1900" b="0">
+                <a:solidFill>
+                  <a:srgbClr val="1C2330"/>
+                </a:solidFill>
+                <a:latin typeface="Aptos"/>
+              </a:defRPr>
+            </a:pPr>
+            <a:r>
+              <a:t>Trabaja únicamente con datos ficticios.</a:t>
+            </a:r>
+          </a:p>
+        </p:txBody>
+      </p:sp>
+      <p:sp>
+        <p:nvSpPr>
+          <p:cNvPr id="11" name="Rounded Rectangle 10"/>
+          <p:cNvSpPr/>
+          <p:nvPr/>
+        </p:nvSpPr>
+        <p:spPr>
+          <a:xfrm>
+            <a:off x="6126479" y="1298448"/>
+            <a:ext cx="5230368" cy="2176272"/>
+          </a:xfrm>
+          <a:prstGeom prst="roundRect">
+            <a:avLst/>
+          </a:prstGeom>
+          <a:solidFill>
+            <a:srgbClr val="FFFFFF"/>
+          </a:solidFill>
+          <a:ln>
+            <a:solidFill>
+              <a:srgbClr val="E5E9EF"/>
+            </a:solidFill>
+          </a:ln>
+        </p:spPr>
+        <p:style>
+          <a:lnRef idx="1">
+            <a:schemeClr val="accent1"/>
+          </a:lnRef>
+          <a:fillRef idx="3">
+            <a:schemeClr val="accent1"/>
+          </a:fillRef>
+          <a:effectRef idx="2">
+            <a:schemeClr val="accent1"/>
+          </a:effectRef>
+          <a:fontRef idx="minor">
+            <a:schemeClr val="lt1"/>
+          </a:fontRef>
+        </p:style>
+        <p:txBody>
+          <a:bodyPr rtlCol="0" anchor="ctr"/>
+          <a:lstStyle/>
+          <a:p>
+            <a:pPr algn="ctr"/>
+          </a:p>
+        </p:txBody>
+      </p:sp>
+      <p:sp>
+        <p:nvSpPr>
+          <p:cNvPr id="12" name="Rounded Rectangle 11"/>
+          <p:cNvSpPr/>
+          <p:nvPr/>
+        </p:nvSpPr>
+        <p:spPr>
+          <a:xfrm>
+            <a:off x="6345936" y="1527048"/>
+            <a:ext cx="237744" cy="1719072"/>
+          </a:xfrm>
+          <a:prstGeom prst="roundRect">
+            <a:avLst/>
+          </a:prstGeom>
+          <a:solidFill>
+            <a:srgbClr val="C07020"/>
+          </a:solidFill>
+          <a:ln>
+            <a:noFill/>
+          </a:ln>
+        </p:spPr>
+        <p:style>
+          <a:lnRef idx="1">
+            <a:schemeClr val="accent1"/>
+          </a:lnRef>
+          <a:fillRef idx="3">
+            <a:schemeClr val="accent1"/>
+          </a:fillRef>
+          <a:effectRef idx="2">
+            <a:schemeClr val="accent1"/>
+          </a:effectRef>
+          <a:fontRef idx="minor">
+            <a:schemeClr val="lt1"/>
+          </a:fontRef>
+        </p:style>
+        <p:txBody>
+          <a:bodyPr rtlCol="0" anchor="ctr"/>
+          <a:lstStyle/>
+          <a:p>
+            <a:pPr algn="ctr"/>
+          </a:p>
+        </p:txBody>
+      </p:sp>
+      <p:sp>
+        <p:nvSpPr>
+          <p:cNvPr id="13" name="TextBox 12"/>
+          <p:cNvSpPr txBox="1"/>
+          <p:nvPr/>
+        </p:nvSpPr>
+        <p:spPr>
+          <a:xfrm>
+            <a:off x="6784847" y="1527048"/>
+            <a:ext cx="4224528" cy="1783080"/>
+          </a:xfrm>
+          <a:prstGeom prst="rect">
+            <a:avLst/>
+          </a:prstGeom>
+          <a:noFill/>
+        </p:spPr>
+        <p:txBody>
+          <a:bodyPr wrap="square" lIns="45720" rIns="45720" tIns="36576" bIns="36576" anchor="t">
+            <a:spAutoFit/>
+          </a:bodyPr>
+          <a:lstStyle/>
+          <a:p>
+            <a:pPr algn="l">
+              <a:defRPr sz="1900" b="0">
+                <a:solidFill>
+                  <a:srgbClr val="1C2330"/>
+                </a:solidFill>
+                <a:latin typeface="Aptos"/>
+              </a:defRPr>
+            </a:pPr>
+            <a:r>
+              <a:t>No escribas contraseñas, tokens, claves API ni datos personales.</a:t>
+            </a:r>
+          </a:p>
+        </p:txBody>
+      </p:sp>
+      <p:sp>
+        <p:nvSpPr>
+          <p:cNvPr id="14" name="Rounded Rectangle 13"/>
+          <p:cNvSpPr/>
+          <p:nvPr/>
+        </p:nvSpPr>
+        <p:spPr>
+          <a:xfrm>
+            <a:off x="621792" y="3675887"/>
+            <a:ext cx="5230368" cy="2176272"/>
+          </a:xfrm>
+          <a:prstGeom prst="roundRect">
+            <a:avLst/>
+          </a:prstGeom>
+          <a:solidFill>
+            <a:srgbClr val="FFFFFF"/>
+          </a:solidFill>
+          <a:ln>
+            <a:solidFill>
+              <a:srgbClr val="E5E9EF"/>
+            </a:solidFill>
+          </a:ln>
+        </p:spPr>
+        <p:style>
+          <a:lnRef idx="1">
+            <a:schemeClr val="accent1"/>
+          </a:lnRef>
+          <a:fillRef idx="3">
+            <a:schemeClr val="accent1"/>
+          </a:fillRef>
+          <a:effectRef idx="2">
+            <a:schemeClr val="accent1"/>
+          </a:effectRef>
+          <a:fontRef idx="minor">
+            <a:schemeClr val="lt1"/>
+          </a:fontRef>
+        </p:style>
+        <p:txBody>
+          <a:bodyPr rtlCol="0" anchor="ctr"/>
+          <a:lstStyle/>
+          <a:p>
+            <a:pPr algn="ctr"/>
+          </a:p>
+        </p:txBody>
+      </p:sp>
+      <p:sp>
+        <p:nvSpPr>
+          <p:cNvPr id="15" name="Rounded Rectangle 14"/>
+          <p:cNvSpPr/>
+          <p:nvPr/>
+        </p:nvSpPr>
+        <p:spPr>
+          <a:xfrm>
+            <a:off x="841248" y="3904487"/>
+            <a:ext cx="237744" cy="1719072"/>
+          </a:xfrm>
+          <a:prstGeom prst="roundRect">
+            <a:avLst/>
+          </a:prstGeom>
+          <a:solidFill>
+            <a:srgbClr val="B13A3A"/>
+          </a:solidFill>
+          <a:ln>
+            <a:noFill/>
+          </a:ln>
+        </p:spPr>
+        <p:style>
+          <a:lnRef idx="1">
+            <a:schemeClr val="accent1"/>
+          </a:lnRef>
+          <a:fillRef idx="3">
+            <a:schemeClr val="accent1"/>
+          </a:fillRef>
+          <a:effectRef idx="2">
+            <a:schemeClr val="accent1"/>
+          </a:effectRef>
+          <a:fontRef idx="minor">
+            <a:schemeClr val="lt1"/>
+          </a:fontRef>
+        </p:style>
+        <p:txBody>
+          <a:bodyPr rtlCol="0" anchor="ctr"/>
+          <a:lstStyle/>
+          <a:p>
+            <a:pPr algn="ctr"/>
+          </a:p>
+        </p:txBody>
+      </p:sp>
+      <p:sp>
+        <p:nvSpPr>
+          <p:cNvPr id="16" name="TextBox 15"/>
+          <p:cNvSpPr txBox="1"/>
+          <p:nvPr/>
+        </p:nvSpPr>
+        <p:spPr>
+          <a:xfrm>
+            <a:off x="1280160" y="3904487"/>
+            <a:ext cx="4224528" cy="1783080"/>
+          </a:xfrm>
+          <a:prstGeom prst="rect">
+            <a:avLst/>
+          </a:prstGeom>
+          <a:noFill/>
+        </p:spPr>
+        <p:txBody>
+          <a:bodyPr wrap="square" lIns="45720" rIns="45720" tIns="36576" bIns="36576" anchor="t">
+            <a:spAutoFit/>
+          </a:bodyPr>
+          <a:lstStyle/>
+          <a:p>
+            <a:pPr algn="l">
+              <a:defRPr sz="1900" b="0">
+                <a:solidFill>
+                  <a:srgbClr val="1C2330"/>
+                </a:solidFill>
+                <a:latin typeface="Aptos"/>
+              </a:defRPr>
+            </a:pPr>
+            <a:r>
+              <a:t>Si utilizas IA en un uso permitido, registra qué pediste, qué recibiste, qué cambiaste y cómo lo comprobaste.</a:t>
+            </a:r>
+          </a:p>
+        </p:txBody>
+      </p:sp>
+      <p:sp>
+        <p:nvSpPr>
+          <p:cNvPr id="17" name="Rounded Rectangle 16"/>
+          <p:cNvSpPr/>
+          <p:nvPr/>
+        </p:nvSpPr>
+        <p:spPr>
+          <a:xfrm>
+            <a:off x="6126479" y="3675887"/>
+            <a:ext cx="5230368" cy="2176272"/>
+          </a:xfrm>
+          <a:prstGeom prst="roundRect">
+            <a:avLst/>
+          </a:prstGeom>
+          <a:solidFill>
+            <a:srgbClr val="FFFFFF"/>
+          </a:solidFill>
+          <a:ln>
+            <a:solidFill>
+              <a:srgbClr val="E5E9EF"/>
+            </a:solidFill>
+          </a:ln>
+        </p:spPr>
+        <p:style>
+          <a:lnRef idx="1">
+            <a:schemeClr val="accent1"/>
+          </a:lnRef>
+          <a:fillRef idx="3">
+            <a:schemeClr val="accent1"/>
+          </a:fillRef>
+          <a:effectRef idx="2">
+            <a:schemeClr val="accent1"/>
+          </a:effectRef>
+          <a:fontRef idx="minor">
+            <a:schemeClr val="lt1"/>
+          </a:fontRef>
+        </p:style>
+        <p:txBody>
+          <a:bodyPr rtlCol="0" anchor="ctr"/>
+          <a:lstStyle/>
+          <a:p>
+            <a:pPr algn="ctr"/>
+          </a:p>
+        </p:txBody>
+      </p:sp>
+      <p:sp>
+        <p:nvSpPr>
+          <p:cNvPr id="18" name="Rounded Rectangle 17"/>
+          <p:cNvSpPr/>
+          <p:nvPr/>
+        </p:nvSpPr>
+        <p:spPr>
+          <a:xfrm>
+            <a:off x="6345936" y="3904487"/>
+            <a:ext cx="237744" cy="1719072"/>
+          </a:xfrm>
+          <a:prstGeom prst="roundRect">
+            <a:avLst/>
+          </a:prstGeom>
+          <a:solidFill>
+            <a:srgbClr val="2F5BA8"/>
+          </a:solidFill>
+          <a:ln>
+            <a:noFill/>
+          </a:ln>
+        </p:spPr>
+        <p:style>
+          <a:lnRef idx="1">
+            <a:schemeClr val="accent1"/>
+          </a:lnRef>
+          <a:fillRef idx="3">
+            <a:schemeClr val="accent1"/>
+          </a:fillRef>
+          <a:effectRef idx="2">
+            <a:schemeClr val="accent1"/>
+          </a:effectRef>
+          <a:fontRef idx="minor">
+            <a:schemeClr val="lt1"/>
+          </a:fontRef>
+        </p:style>
+        <p:txBody>
+          <a:bodyPr rtlCol="0" anchor="ctr"/>
+          <a:lstStyle/>
+          <a:p>
+            <a:pPr algn="ctr"/>
+          </a:p>
+        </p:txBody>
+      </p:sp>
+      <p:sp>
+        <p:nvSpPr>
+          <p:cNvPr id="19" name="TextBox 18"/>
+          <p:cNvSpPr txBox="1"/>
+          <p:nvPr/>
+        </p:nvSpPr>
+        <p:spPr>
+          <a:xfrm>
+            <a:off x="6784847" y="3904487"/>
+            <a:ext cx="4224528" cy="1783080"/>
+          </a:xfrm>
+          <a:prstGeom prst="rect">
+            <a:avLst/>
+          </a:prstGeom>
+          <a:noFill/>
+        </p:spPr>
+        <p:txBody>
+          <a:bodyPr wrap="square" lIns="45720" rIns="45720" tIns="36576" bIns="36576" anchor="t">
+            <a:spAutoFit/>
+          </a:bodyPr>
+          <a:lstStyle/>
+          <a:p>
+            <a:pPr algn="l">
+              <a:defRPr sz="1900" b="0">
+                <a:solidFill>
+                  <a:srgbClr val="1C2330"/>
+                </a:solidFill>
+                <a:latin typeface="Aptos"/>
+              </a:defRPr>
+            </a:pPr>
+            <a:r>
+              <a:t>Los ejemplos de Laura solo se consultan después del intento propio.</a:t>
+            </a:r>
+          </a:p>
+        </p:txBody>
+      </p:sp>
+    </p:spTree>
+  </p:cSld>
+  <p:clrMapOvr>
+    <a:masterClrMapping/>
+  </p:clrMapOvr>
+</p:sld>
+</file>
+
+<file path=ppt/slides/slide8.xml><?xml version="1.0" encoding="utf-8"?>
+<p:sld xmlns:a="http://schemas.openxmlformats.org/drawingml/2006/main" xmlns:p="http://schemas.openxmlformats.org/presentationml/2006/main" xmlns:r="http://schemas.openxmlformats.org/officeDocument/2006/relationships">
+  <p:cSld>
+    <p:spTree>
+      <p:nvGrpSpPr>
+        <p:cNvPr id="1" name=""/>
+        <p:cNvGrpSpPr/>
+        <p:nvPr/>
+      </p:nvGrpSpPr>
+      <p:grpSpPr/>
+      <p:sp>
+        <p:nvSpPr>
+          <p:cNvPr id="2" name="Rectangle 1"/>
+          <p:cNvSpPr/>
+          <p:nvPr/>
+        </p:nvSpPr>
+        <p:spPr>
+          <a:xfrm>
+            <a:off x="0" y="0"/>
+            <a:ext cx="12191695" cy="6858000"/>
+          </a:xfrm>
+          <a:prstGeom prst="rect">
+            <a:avLst/>
+          </a:prstGeom>
+          <a:solidFill>
+            <a:srgbClr val="F9F7F2"/>
+          </a:solidFill>
+          <a:ln>
+            <a:noFill/>
+          </a:ln>
+        </p:spPr>
+        <p:style>
+          <a:lnRef idx="1">
+            <a:schemeClr val="accent1"/>
+          </a:lnRef>
+          <a:fillRef idx="3">
+            <a:schemeClr val="accent1"/>
+          </a:fillRef>
+          <a:effectRef idx="2">
+            <a:schemeClr val="accent1"/>
+          </a:effectRef>
+          <a:fontRef idx="minor">
+            <a:schemeClr val="lt1"/>
+          </a:fontRef>
+        </p:style>
+        <p:txBody>
+          <a:bodyPr rtlCol="0" anchor="ctr"/>
+          <a:lstStyle/>
+          <a:p>
+            <a:pPr algn="ctr"/>
+          </a:p>
+        </p:txBody>
+      </p:sp>
+      <p:sp>
+        <p:nvSpPr>
+          <p:cNvPr id="3" name="Rectangle 2"/>
+          <p:cNvSpPr/>
+          <p:nvPr/>
+        </p:nvSpPr>
+        <p:spPr>
+          <a:xfrm>
+            <a:off x="0" y="0"/>
+            <a:ext cx="164592" cy="6858000"/>
+          </a:xfrm>
+          <a:prstGeom prst="rect">
+            <a:avLst/>
+          </a:prstGeom>
+          <a:solidFill>
+            <a:srgbClr val="2F5BA8"/>
+          </a:solidFill>
+          <a:ln>
+            <a:noFill/>
+          </a:ln>
+        </p:spPr>
+        <p:style>
+          <a:lnRef idx="1">
+            <a:schemeClr val="accent1"/>
+          </a:lnRef>
+          <a:fillRef idx="3">
+            <a:schemeClr val="accent1"/>
+          </a:fillRef>
+          <a:effectRef idx="2">
+            <a:schemeClr val="accent1"/>
+          </a:effectRef>
+          <a:fontRef idx="minor">
+            <a:schemeClr val="lt1"/>
+          </a:fontRef>
+        </p:style>
+        <p:txBody>
+          <a:bodyPr rtlCol="0" anchor="ctr"/>
+          <a:lstStyle/>
+          <a:p>
+            <a:pPr algn="ctr"/>
+          </a:p>
+        </p:txBody>
+      </p:sp>
+      <p:sp>
+        <p:nvSpPr>
+          <p:cNvPr id="4" name="TextBox 3"/>
+          <p:cNvSpPr txBox="1"/>
+          <p:nvPr/>
+        </p:nvSpPr>
+        <p:spPr>
+          <a:xfrm>
+            <a:off x="502920" y="274320"/>
+            <a:ext cx="5486400" cy="256032"/>
+          </a:xfrm>
+          <a:prstGeom prst="rect">
+            <a:avLst/>
+          </a:prstGeom>
+          <a:noFill/>
+        </p:spPr>
+        <p:txBody>
+          <a:bodyPr wrap="square" lIns="45720" rIns="45720" tIns="36576" bIns="36576" anchor="t">
+            <a:spAutoFit/>
+          </a:bodyPr>
+          <a:lstStyle/>
+          <a:p>
+            <a:pPr algn="l">
+              <a:defRPr sz="1000" b="1">
+                <a:solidFill>
+                  <a:srgbClr val="2F5BA8"/>
+                </a:solidFill>
+                <a:latin typeface="Aptos"/>
+              </a:defRPr>
+            </a:pPr>
+            <a:r>
+              <a:t>EXPLICAR Y DEFENDER</a:t>
+            </a:r>
+          </a:p>
+        </p:txBody>
+      </p:sp>
+      <p:sp>
+        <p:nvSpPr>
+          <p:cNvPr id="5" name="TextBox 4"/>
+          <p:cNvSpPr txBox="1"/>
+          <p:nvPr/>
+        </p:nvSpPr>
+        <p:spPr>
+          <a:xfrm>
+            <a:off x="502920" y="603504"/>
+            <a:ext cx="11064240" cy="530352"/>
+          </a:xfrm>
+          <a:prstGeom prst="rect">
+            <a:avLst/>
+          </a:prstGeom>
+          <a:noFill/>
+        </p:spPr>
+        <p:txBody>
+          <a:bodyPr wrap="square" lIns="45720" rIns="45720" tIns="36576" bIns="36576" anchor="t">
+            <a:spAutoFit/>
+          </a:bodyPr>
+          <a:lstStyle/>
+          <a:p>
+            <a:pPr algn="l">
+              <a:defRPr sz="2800" b="1">
+                <a:solidFill>
+                  <a:srgbClr val="1C2330"/>
+                </a:solidFill>
+                <a:latin typeface="Aptos"/>
+              </a:defRPr>
+            </a:pPr>
+            <a:r>
+              <a:t>Cierre y defensa</a:t>
+            </a:r>
+          </a:p>
+        </p:txBody>
+      </p:sp>
+      <p:sp>
+        <p:nvSpPr>
+          <p:cNvPr id="6" name="Rectangle 5"/>
+          <p:cNvSpPr/>
+          <p:nvPr/>
+        </p:nvSpPr>
+        <p:spPr>
+          <a:xfrm>
+            <a:off x="0" y="6601968"/>
+            <a:ext cx="12191695" cy="256032"/>
+          </a:xfrm>
+          <a:prstGeom prst="rect">
+            <a:avLst/>
+          </a:prstGeom>
+          <a:solidFill>
+            <a:srgbClr val="2F5BA8"/>
+          </a:solidFill>
+          <a:ln>
+            <a:noFill/>
+          </a:ln>
+        </p:spPr>
+        <p:style>
+          <a:lnRef idx="1">
+            <a:schemeClr val="accent1"/>
+          </a:lnRef>
+          <a:fillRef idx="3">
+            <a:schemeClr val="accent1"/>
+          </a:fillRef>
+          <a:effectRef idx="2">
+            <a:schemeClr val="accent1"/>
+          </a:effectRef>
+          <a:fontRef idx="minor">
+            <a:schemeClr val="lt1"/>
+          </a:fontRef>
+        </p:style>
+        <p:txBody>
+          <a:bodyPr rtlCol="0" anchor="ctr"/>
+          <a:lstStyle/>
+          <a:p>
+            <a:pPr algn="ctr"/>
+          </a:p>
+        </p:txBody>
+      </p:sp>
+      <p:sp>
+        <p:nvSpPr>
+          <p:cNvPr id="7" name="TextBox 6"/>
+          <p:cNvSpPr txBox="1"/>
+          <p:nvPr/>
+        </p:nvSpPr>
+        <p:spPr>
+          <a:xfrm>
+            <a:off x="411480" y="6629400"/>
+            <a:ext cx="11247120" cy="164592"/>
+          </a:xfrm>
+          <a:prstGeom prst="rect">
+            <a:avLst/>
+          </a:prstGeom>
+          <a:noFill/>
+        </p:spPr>
+        <p:txBody>
+          <a:bodyPr wrap="square" lIns="45720" rIns="45720" tIns="36576" bIns="36576" anchor="t">
+            <a:spAutoFit/>
+          </a:bodyPr>
+          <a:lstStyle/>
+          <a:p>
+            <a:pPr algn="l">
+              <a:defRPr sz="900" b="0">
+                <a:solidFill>
+                  <a:srgbClr val="FFFFFF"/>
+                </a:solidFill>
+                <a:latin typeface="Aptos"/>
+              </a:defRPr>
+            </a:pPr>
+            <a:r>
+              <a:t>MiniJarvis · 1.º DAW · Sesión 215 · H1</a:t>
+            </a:r>
+          </a:p>
+        </p:txBody>
+      </p:sp>
+      <p:sp>
+        <p:nvSpPr>
+          <p:cNvPr id="8" name="Rounded Rectangle 7"/>
+          <p:cNvSpPr/>
+          <p:nvPr/>
+        </p:nvSpPr>
+        <p:spPr>
+          <a:xfrm>
+            <a:off x="621792" y="1298448"/>
+            <a:ext cx="10927080" cy="1828800"/>
+          </a:xfrm>
+          <a:prstGeom prst="roundRect">
+            <a:avLst/>
+          </a:prstGeom>
+          <a:solidFill>
+            <a:srgbClr val="2F5BA8"/>
+          </a:solidFill>
+          <a:ln>
+            <a:solidFill>
+              <a:srgbClr val="2F5BA8"/>
+            </a:solidFill>
+          </a:ln>
+        </p:spPr>
+        <p:style>
+          <a:lnRef idx="1">
+            <a:schemeClr val="accent1"/>
+          </a:lnRef>
+          <a:fillRef idx="3">
+            <a:schemeClr val="accent1"/>
+          </a:fillRef>
+          <a:effectRef idx="2">
+            <a:schemeClr val="accent1"/>
+          </a:effectRef>
+          <a:fontRef idx="minor">
+            <a:schemeClr val="lt1"/>
+          </a:fontRef>
+        </p:style>
+        <p:txBody>
+          <a:bodyPr rtlCol="0" anchor="ctr"/>
+          <a:lstStyle/>
+          <a:p>
+            <a:pPr algn="ctr"/>
+          </a:p>
+        </p:txBody>
+      </p:sp>
+      <p:sp>
+        <p:nvSpPr>
+          <p:cNvPr id="9" name="TextBox 8"/>
+          <p:cNvSpPr txBox="1"/>
+          <p:nvPr/>
+        </p:nvSpPr>
+        <p:spPr>
+          <a:xfrm>
+            <a:off x="932688" y="1591056"/>
+            <a:ext cx="10241280" cy="256032"/>
+          </a:xfrm>
+          <a:prstGeom prst="rect">
+            <a:avLst/>
+          </a:prstGeom>
+          <a:noFill/>
+        </p:spPr>
+        <p:txBody>
+          <a:bodyPr wrap="square" lIns="45720" rIns="45720" tIns="36576" bIns="36576" anchor="t">
+            <a:spAutoFit/>
+          </a:bodyPr>
+          <a:lstStyle/>
+          <a:p>
+            <a:pPr algn="l">
+              <a:defRPr sz="1300" b="1">
+                <a:solidFill>
+                  <a:srgbClr val="FFFFFF"/>
+                </a:solidFill>
+                <a:latin typeface="Aptos"/>
+              </a:defRPr>
+            </a:pPr>
+            <a:r>
+              <a:t>PREGUNTA O DECISIÓN DE SALIDA</a:t>
+            </a:r>
+          </a:p>
+        </p:txBody>
+      </p:sp>
+      <p:sp>
+        <p:nvSpPr>
+          <p:cNvPr id="10" name="TextBox 9"/>
+          <p:cNvSpPr txBox="1"/>
+          <p:nvPr/>
+        </p:nvSpPr>
+        <p:spPr>
+          <a:xfrm>
+            <a:off x="932688" y="1975104"/>
+            <a:ext cx="10058400" cy="822960"/>
+          </a:xfrm>
+          <a:prstGeom prst="rect">
+            <a:avLst/>
+          </a:prstGeom>
+          <a:noFill/>
+        </p:spPr>
+        <p:txBody>
+          <a:bodyPr wrap="square" lIns="45720" rIns="45720" tIns="36576" bIns="36576" anchor="t">
+            <a:spAutoFit/>
+          </a:bodyPr>
+          <a:lstStyle/>
+          <a:p>
+            <a:pPr algn="l">
+              <a:defRPr sz="2500" b="1">
+                <a:solidFill>
+                  <a:srgbClr val="FFFFFF"/>
+                </a:solidFill>
+                <a:latin typeface="Aptos"/>
+              </a:defRPr>
+            </a:pPr>
+            <a:r>
+              <a:t>Decidir qué debe mejorar cada alumno antes de H2.</a:t>
+            </a:r>
+          </a:p>
+        </p:txBody>
+      </p:sp>
+      <p:sp>
+        <p:nvSpPr>
+          <p:cNvPr id="11" name="TextBox 10"/>
+          <p:cNvSpPr txBox="1"/>
+          <p:nvPr/>
+        </p:nvSpPr>
+        <p:spPr>
+          <a:xfrm>
+            <a:off x="749808" y="3886200"/>
+            <a:ext cx="10607040" cy="1280160"/>
+          </a:xfrm>
+          <a:prstGeom prst="rect">
+            <a:avLst/>
+          </a:prstGeom>
+          <a:noFill/>
+        </p:spPr>
+        <p:txBody>
+          <a:bodyPr wrap="square" lIns="45720" rIns="45720" tIns="36576" bIns="36576" anchor="ctr">
+            <a:spAutoFit/>
+          </a:bodyPr>
+          <a:lstStyle/>
+          <a:p>
             <a:pPr algn="ctr">
-              <a:defRPr sz="1800" b="1">
+              <a:defRPr sz="2300" b="1">
                 <a:solidFill>
                   <a:srgbClr val="247E5C"/>
                 </a:solidFill>
@@ -6569,7 +7564,7 @@
               </a:defRPr>
             </a:pPr>
             <a:r>
-              <a:t>La sesión termina cuando la evidencia existe, está comprobada y puedes defenderla.</a:t>
+              <a:t>La sesión termina cuando la evidencia existe, está comprobada y puede defenderse.</a:t>
             </a:r>
           </a:p>
         </p:txBody>

--- a/02-PROFESORADO/03-PRESENTACIONES/POR-SESION/h1/S215-defensa-y-cierre-h1-presentacion.pptx
+++ b/02-PROFESORADO/03-PRESENTACIONES/POR-SESION/h1/S215-defensa-y-cierre-h1-presentacion.pptx
@@ -6,13 +6,14 @@
   </p:sldMasterIdLst>
   <p:sldIdLst>
     <p:sldId id="256" r:id="rId7"/>
-    <p:sldId id="257" r:id="rId8"/>
-    <p:sldId id="258" r:id="rId9"/>
-    <p:sldId id="259" r:id="rId10"/>
-    <p:sldId id="260" r:id="rId11"/>
-    <p:sldId id="261" r:id="rId12"/>
-    <p:sldId id="262" r:id="rId13"/>
-    <p:sldId id="263" r:id="rId14"/>
+    <p:sldId id="257" r:id="rId9"/>
+    <p:sldId id="258" r:id="rId10"/>
+    <p:sldId id="259" r:id="rId11"/>
+    <p:sldId id="260" r:id="rId12"/>
+    <p:sldId id="261" r:id="rId13"/>
+    <p:sldId id="262" r:id="rId14"/>
+    <p:sldId id="263" r:id="rId15"/>
+    <p:sldId id="264" r:id="rId16"/>
   </p:sldIdLst>
   <p:sldSz cx="12191695" cy="6858000" type="screen4x3"/>
   <p:notesSz cx="6858000" cy="9144000"/>
@@ -112,6 +113,1321 @@
     </a:lvl9pPr>
   </p:defaultTextStyle>
 </p:presentation>
+</file>
+
+<file path=ppt/notesMasters/notesMaster1.xml><?xml version="1.0" encoding="utf-8"?>
+<p:notesMaster xmlns:a="http://schemas.openxmlformats.org/drawingml/2006/main" xmlns:p="http://schemas.openxmlformats.org/presentationml/2006/main" xmlns:r="http://schemas.openxmlformats.org/officeDocument/2006/relationships">
+  <p:cSld>
+    <p:bg>
+      <p:bgRef idx="1001">
+        <a:schemeClr val="bg1"/>
+      </p:bgRef>
+    </p:bg>
+    <p:spTree>
+      <p:nvGrpSpPr>
+        <p:cNvPr id="1" name=""/>
+        <p:cNvGrpSpPr/>
+        <p:nvPr/>
+      </p:nvGrpSpPr>
+      <p:grpSpPr>
+        <a:xfrm>
+          <a:off x="0" y="0"/>
+          <a:ext cx="0" cy="0"/>
+          <a:chOff x="0" y="0"/>
+          <a:chExt cx="0" cy="0"/>
+        </a:xfrm>
+      </p:grpSpPr>
+      <p:sp>
+        <p:nvSpPr>
+          <p:cNvPr id="2" name="Header Placeholder 1"/>
+          <p:cNvSpPr>
+            <a:spLocks noGrp="1"/>
+          </p:cNvSpPr>
+          <p:nvPr>
+            <p:ph type="hdr" sz="quarter"/>
+          </p:nvPr>
+        </p:nvSpPr>
+        <p:spPr>
+          <a:xfrm>
+            <a:off x="0" y="0"/>
+            <a:ext cx="2971800" cy="457200"/>
+          </a:xfrm>
+          <a:prstGeom prst="rect">
+            <a:avLst/>
+          </a:prstGeom>
+        </p:spPr>
+        <p:txBody>
+          <a:bodyPr vert="horz" lIns="91440" tIns="45720" rIns="91440" bIns="45720" rtlCol="0"/>
+          <a:lstStyle>
+            <a:lvl1pPr algn="l">
+              <a:defRPr sz="1200"/>
+            </a:lvl1pPr>
+          </a:lstStyle>
+          <a:p>
+            <a:endParaRPr lang="en-US"/>
+          </a:p>
+        </p:txBody>
+      </p:sp>
+      <p:sp>
+        <p:nvSpPr>
+          <p:cNvPr id="3" name="Date Placeholder 2"/>
+          <p:cNvSpPr>
+            <a:spLocks noGrp="1"/>
+          </p:cNvSpPr>
+          <p:nvPr>
+            <p:ph type="dt" idx="1"/>
+          </p:nvPr>
+        </p:nvSpPr>
+        <p:spPr>
+          <a:xfrm>
+            <a:off x="3884613" y="0"/>
+            <a:ext cx="2971800" cy="457200"/>
+          </a:xfrm>
+          <a:prstGeom prst="rect">
+            <a:avLst/>
+          </a:prstGeom>
+        </p:spPr>
+        <p:txBody>
+          <a:bodyPr vert="horz" lIns="91440" tIns="45720" rIns="91440" bIns="45720" rtlCol="0"/>
+          <a:lstStyle>
+            <a:lvl1pPr algn="r">
+              <a:defRPr sz="1200"/>
+            </a:lvl1pPr>
+          </a:lstStyle>
+          <a:p>
+            <a:fld id="{0F89C1C7-3DCD-1040-A9CF-14679D8B5DDD}" type="datetimeFigureOut">
+              <a:rPr lang="en-US" smtClean="0"/>
+              <a:t>10/17/16</a:t>
+            </a:fld>
+            <a:endParaRPr lang="en-US"/>
+          </a:p>
+        </p:txBody>
+      </p:sp>
+      <p:sp>
+        <p:nvSpPr>
+          <p:cNvPr id="4" name="Slide Image Placeholder 3"/>
+          <p:cNvSpPr>
+            <a:spLocks noGrp="1" noRot="1" noChangeAspect="1"/>
+          </p:cNvSpPr>
+          <p:nvPr>
+            <p:ph type="sldImg" idx="2"/>
+          </p:nvPr>
+        </p:nvSpPr>
+        <p:spPr>
+          <a:xfrm>
+            <a:off x="1143000" y="685800"/>
+            <a:ext cx="4572000" cy="3429000"/>
+          </a:xfrm>
+          <a:prstGeom prst="rect">
+            <a:avLst/>
+          </a:prstGeom>
+          <a:noFill/>
+          <a:ln w="12700">
+            <a:solidFill>
+              <a:prstClr val="black"/>
+            </a:solidFill>
+          </a:ln>
+        </p:spPr>
+        <p:txBody>
+          <a:bodyPr vert="horz" lIns="91440" tIns="45720" rIns="91440" bIns="45720" rtlCol="0" anchor="ctr"/>
+          <a:lstStyle/>
+          <a:p>
+            <a:endParaRPr lang="en-US"/>
+          </a:p>
+        </p:txBody>
+      </p:sp>
+      <p:sp>
+        <p:nvSpPr>
+          <p:cNvPr id="5" name="Notes Placeholder 4"/>
+          <p:cNvSpPr>
+            <a:spLocks noGrp="1"/>
+          </p:cNvSpPr>
+          <p:nvPr>
+            <p:ph type="body" sz="quarter" idx="3"/>
+          </p:nvPr>
+        </p:nvSpPr>
+        <p:spPr>
+          <a:xfrm>
+            <a:off x="685800" y="4343400"/>
+            <a:ext cx="5486400" cy="4114800"/>
+          </a:xfrm>
+          <a:prstGeom prst="rect">
+            <a:avLst/>
+          </a:prstGeom>
+        </p:spPr>
+        <p:txBody>
+          <a:bodyPr vert="horz" lIns="91440" tIns="45720" rIns="91440" bIns="45720" rtlCol="0"/>
+          <a:lstStyle/>
+          <a:p>
+            <a:pPr lvl="0"/>
+            <a:r>
+              <a:rPr lang="en-US" smtClean="0"/>
+              <a:t>Click to edit Master text styles</a:t>
+            </a:r>
+          </a:p>
+          <a:p>
+            <a:pPr lvl="1"/>
+            <a:r>
+              <a:rPr lang="en-US" smtClean="0"/>
+              <a:t>Second level</a:t>
+            </a:r>
+          </a:p>
+          <a:p>
+            <a:pPr lvl="2"/>
+            <a:r>
+              <a:rPr lang="en-US" smtClean="0"/>
+              <a:t>Third level</a:t>
+            </a:r>
+          </a:p>
+          <a:p>
+            <a:pPr lvl="3"/>
+            <a:r>
+              <a:rPr lang="en-US" smtClean="0"/>
+              <a:t>Fourth level</a:t>
+            </a:r>
+          </a:p>
+          <a:p>
+            <a:pPr lvl="4"/>
+            <a:r>
+              <a:rPr lang="en-US" smtClean="0"/>
+              <a:t>Fifth level</a:t>
+            </a:r>
+            <a:endParaRPr lang="en-US"/>
+          </a:p>
+        </p:txBody>
+      </p:sp>
+      <p:sp>
+        <p:nvSpPr>
+          <p:cNvPr id="6" name="Footer Placeholder 5"/>
+          <p:cNvSpPr>
+            <a:spLocks noGrp="1"/>
+          </p:cNvSpPr>
+          <p:nvPr>
+            <p:ph type="ftr" sz="quarter" idx="4"/>
+          </p:nvPr>
+        </p:nvSpPr>
+        <p:spPr>
+          <a:xfrm>
+            <a:off x="0" y="8685213"/>
+            <a:ext cx="2971800" cy="457200"/>
+          </a:xfrm>
+          <a:prstGeom prst="rect">
+            <a:avLst/>
+          </a:prstGeom>
+        </p:spPr>
+        <p:txBody>
+          <a:bodyPr vert="horz" lIns="91440" tIns="45720" rIns="91440" bIns="45720" rtlCol="0" anchor="b"/>
+          <a:lstStyle>
+            <a:lvl1pPr algn="l">
+              <a:defRPr sz="1200"/>
+            </a:lvl1pPr>
+          </a:lstStyle>
+          <a:p>
+            <a:endParaRPr lang="en-US"/>
+          </a:p>
+        </p:txBody>
+      </p:sp>
+      <p:sp>
+        <p:nvSpPr>
+          <p:cNvPr id="7" name="Slide Number Placeholder 6"/>
+          <p:cNvSpPr>
+            <a:spLocks noGrp="1"/>
+          </p:cNvSpPr>
+          <p:nvPr>
+            <p:ph type="sldNum" sz="quarter" idx="5"/>
+          </p:nvPr>
+        </p:nvSpPr>
+        <p:spPr>
+          <a:xfrm>
+            <a:off x="3884613" y="8685213"/>
+            <a:ext cx="2971800" cy="457200"/>
+          </a:xfrm>
+          <a:prstGeom prst="rect">
+            <a:avLst/>
+          </a:prstGeom>
+        </p:spPr>
+        <p:txBody>
+          <a:bodyPr vert="horz" lIns="91440" tIns="45720" rIns="91440" bIns="45720" rtlCol="0" anchor="b"/>
+          <a:lstStyle>
+            <a:lvl1pPr algn="r">
+              <a:defRPr sz="1200"/>
+            </a:lvl1pPr>
+          </a:lstStyle>
+          <a:p>
+            <a:fld id="{BB5E49A5-4136-284D-997B-48E1D791AD67}" type="slidenum">
+              <a:rPr lang="en-US" smtClean="0"/>
+              <a:t>‹#›</a:t>
+            </a:fld>
+            <a:endParaRPr lang="en-US"/>
+          </a:p>
+        </p:txBody>
+      </p:sp>
+    </p:spTree>
+    <p:extLst>
+      <p:ext uri="{BB962C8B-B14F-4D97-AF65-F5344CB8AC3E}">
+        <p14:creationId xmlns:p14="http://schemas.microsoft.com/office/powerpoint/2010/main" val="2623252185"/>
+      </p:ext>
+    </p:extLst>
+  </p:cSld>
+  <p:clrMap bg1="lt1" tx1="dk1" bg2="lt2" tx2="dk2" accent1="accent1" accent2="accent2" accent3="accent3" accent4="accent4" accent5="accent5" accent6="accent6" hlink="hlink" folHlink="folHlink"/>
+  <p:notesStyle>
+    <a:lvl1pPr marL="0" algn="l" defTabSz="457200" rtl="0" eaLnBrk="1" latinLnBrk="0" hangingPunct="1">
+      <a:defRPr sz="1200" kern="1200">
+        <a:solidFill>
+          <a:schemeClr val="tx1"/>
+        </a:solidFill>
+        <a:latin typeface="+mn-lt"/>
+        <a:ea typeface="+mn-ea"/>
+        <a:cs typeface="+mn-cs"/>
+      </a:defRPr>
+    </a:lvl1pPr>
+    <a:lvl2pPr marL="457200" algn="l" defTabSz="457200" rtl="0" eaLnBrk="1" latinLnBrk="0" hangingPunct="1">
+      <a:defRPr sz="1200" kern="1200">
+        <a:solidFill>
+          <a:schemeClr val="tx1"/>
+        </a:solidFill>
+        <a:latin typeface="+mn-lt"/>
+        <a:ea typeface="+mn-ea"/>
+        <a:cs typeface="+mn-cs"/>
+      </a:defRPr>
+    </a:lvl2pPr>
+    <a:lvl3pPr marL="914400" algn="l" defTabSz="457200" rtl="0" eaLnBrk="1" latinLnBrk="0" hangingPunct="1">
+      <a:defRPr sz="1200" kern="1200">
+        <a:solidFill>
+          <a:schemeClr val="tx1"/>
+        </a:solidFill>
+        <a:latin typeface="+mn-lt"/>
+        <a:ea typeface="+mn-ea"/>
+        <a:cs typeface="+mn-cs"/>
+      </a:defRPr>
+    </a:lvl3pPr>
+    <a:lvl4pPr marL="1371600" algn="l" defTabSz="457200" rtl="0" eaLnBrk="1" latinLnBrk="0" hangingPunct="1">
+      <a:defRPr sz="1200" kern="1200">
+        <a:solidFill>
+          <a:schemeClr val="tx1"/>
+        </a:solidFill>
+        <a:latin typeface="+mn-lt"/>
+        <a:ea typeface="+mn-ea"/>
+        <a:cs typeface="+mn-cs"/>
+      </a:defRPr>
+    </a:lvl4pPr>
+    <a:lvl5pPr marL="1828800" algn="l" defTabSz="457200" rtl="0" eaLnBrk="1" latinLnBrk="0" hangingPunct="1">
+      <a:defRPr sz="1200" kern="1200">
+        <a:solidFill>
+          <a:schemeClr val="tx1"/>
+        </a:solidFill>
+        <a:latin typeface="+mn-lt"/>
+        <a:ea typeface="+mn-ea"/>
+        <a:cs typeface="+mn-cs"/>
+      </a:defRPr>
+    </a:lvl5pPr>
+    <a:lvl6pPr marL="2286000" algn="l" defTabSz="457200" rtl="0" eaLnBrk="1" latinLnBrk="0" hangingPunct="1">
+      <a:defRPr sz="1200" kern="1200">
+        <a:solidFill>
+          <a:schemeClr val="tx1"/>
+        </a:solidFill>
+        <a:latin typeface="+mn-lt"/>
+        <a:ea typeface="+mn-ea"/>
+        <a:cs typeface="+mn-cs"/>
+      </a:defRPr>
+    </a:lvl6pPr>
+    <a:lvl7pPr marL="2743200" algn="l" defTabSz="457200" rtl="0" eaLnBrk="1" latinLnBrk="0" hangingPunct="1">
+      <a:defRPr sz="1200" kern="1200">
+        <a:solidFill>
+          <a:schemeClr val="tx1"/>
+        </a:solidFill>
+        <a:latin typeface="+mn-lt"/>
+        <a:ea typeface="+mn-ea"/>
+        <a:cs typeface="+mn-cs"/>
+      </a:defRPr>
+    </a:lvl7pPr>
+    <a:lvl8pPr marL="3200400" algn="l" defTabSz="457200" rtl="0" eaLnBrk="1" latinLnBrk="0" hangingPunct="1">
+      <a:defRPr sz="1200" kern="1200">
+        <a:solidFill>
+          <a:schemeClr val="tx1"/>
+        </a:solidFill>
+        <a:latin typeface="+mn-lt"/>
+        <a:ea typeface="+mn-ea"/>
+        <a:cs typeface="+mn-cs"/>
+      </a:defRPr>
+    </a:lvl8pPr>
+    <a:lvl9pPr marL="3657600" algn="l" defTabSz="457200" rtl="0" eaLnBrk="1" latinLnBrk="0" hangingPunct="1">
+      <a:defRPr sz="1200" kern="1200">
+        <a:solidFill>
+          <a:schemeClr val="tx1"/>
+        </a:solidFill>
+        <a:latin typeface="+mn-lt"/>
+        <a:ea typeface="+mn-ea"/>
+        <a:cs typeface="+mn-cs"/>
+      </a:defRPr>
+    </a:lvl9pPr>
+  </p:notesStyle>
+</p:notesMaster>
+</file>
+
+<file path=ppt/notesSlides/notesSlide1.xml><?xml version="1.0" encoding="utf-8"?>
+<p:notes xmlns:a="http://schemas.openxmlformats.org/drawingml/2006/main" xmlns:p="http://schemas.openxmlformats.org/presentationml/2006/main" xmlns:r="http://schemas.openxmlformats.org/officeDocument/2006/relationships">
+  <p:cSld>
+    <p:spTree>
+      <p:nvGrpSpPr>
+        <p:cNvPr id="1" name=""/>
+        <p:cNvGrpSpPr/>
+        <p:nvPr/>
+      </p:nvGrpSpPr>
+      <p:grpSpPr>
+        <a:xfrm>
+          <a:off x="0" y="0"/>
+          <a:ext cx="0" cy="0"/>
+          <a:chOff x="0" y="0"/>
+          <a:chExt cx="0" cy="0"/>
+        </a:xfrm>
+      </p:grpSpPr>
+      <p:sp>
+        <p:nvSpPr>
+          <p:cNvPr id="2" name="Slide Image Placeholder 1"/>
+          <p:cNvSpPr>
+            <a:spLocks noGrp="1"/>
+          </p:cNvSpPr>
+          <p:nvPr>
+            <p:ph type="sldImg" idx="2"/>
+          </p:nvPr>
+        </p:nvSpPr>
+        <p:spPr/>
+      </p:sp>
+      <p:sp>
+        <p:nvSpPr>
+          <p:cNvPr id="3" name="Notes Placeholder 2"/>
+          <p:cNvSpPr>
+            <a:spLocks noGrp="1"/>
+          </p:cNvSpPr>
+          <p:nvPr>
+            <p:ph type="body" idx="3" sz="quarter"/>
+          </p:nvPr>
+        </p:nvSpPr>
+        <p:spPr/>
+        <p:txBody>
+          <a:bodyPr/>
+          <a:lstStyle/>
+          <a:p>
+            <a:r>
+              <a:t>Objetivo docente: Demostrar comprensión individual, modificar algo pequeño y cerrar el ciclo HEXA con reflexión y mejora.</a:t>
+            </a:r>
+          </a:p>
+          <a:p>
+            <a:r>
+              <a:t>Diapositiva 1 de 9: Defensa y cierre del hito</a:t>
+            </a:r>
+          </a:p>
+          <a:p>
+            <a:r>
+              <a:t>Fase HEXA: Comunicar — evaluar y reflexionar</a:t>
+            </a:r>
+          </a:p>
+          <a:p>
+            <a:r>
+              <a:t>Presenta el producto y anticipa la evidencia: Quede siguiente paso claro.</a:t>
+            </a:r>
+          </a:p>
+          <a:p>
+            <a:r>
+              <a:t>Secuencia docente:</a:t>
+            </a:r>
+          </a:p>
+          <a:p>
+            <a:r>
+              <a:t>- 00:00–00:05 / D1: COMUNICAR: Explica formato y reduce incertidumbre.</a:t>
+            </a:r>
+          </a:p>
+          <a:p>
+            <a:r>
+              <a:t>- 00:05–00:10 / D2: MODELO DOCENTE: Haz una mini-defensa modelo con código neutro. Muestra respuesta suficiente y vaga.</a:t>
+            </a:r>
+          </a:p>
+          <a:p>
+            <a:r>
+              <a:t>- 00:10–00:30 / D3: DEFENSAS: Realiza defensas rotativas y pide modificación/predicción.</a:t>
+            </a:r>
+          </a:p>
+          <a:p>
+            <a:r>
+              <a:t>- 00:30–00:36 / D4: MEJORA: Da oportunidad de corrección inmediata de una carencia pequeña.</a:t>
+            </a:r>
+          </a:p>
+          <a:p>
+            <a:r>
+              <a:t>- 00:36–00:40 / D5: CIERRE CONCEPTUAL: Pide reconstrucción colectiva y conecta con lo aprendido.</a:t>
+            </a:r>
+          </a:p>
+          <a:p>
+            <a:r>
+              <a:t>- 00:40–00:45 / D6: RETROSPECTIVA: Cierra el ciclo HEXA y pide registro individual.</a:t>
+            </a:r>
+          </a:p>
+          <a:p>
+            <a:r>
+              <a:t>Claves docentes:</a:t>
+            </a:r>
+          </a:p>
+          <a:p>
+            <a:r>
+              <a:t>- Enmarca defensa y cierre del hito con un ejemplo observable y una comprobación.</a:t>
+            </a:r>
+          </a:p>
+          <a:p>
+            <a:r>
+              <a:t>Fuente docente: /mnt/compartido/Programación-26-27/Minijarvis/02-PROFESORADO/02-SESIONES/h1/S215-defensa-y-cierre-h1-docente.md</a:t>
+            </a:r>
+          </a:p>
+        </p:txBody>
+      </p:sp>
+      <p:sp>
+        <p:nvSpPr>
+          <p:cNvPr id="4" name="Slide Number Placeholder 3"/>
+          <p:cNvSpPr>
+            <a:spLocks noGrp="1"/>
+          </p:cNvSpPr>
+          <p:nvPr>
+            <p:ph type="sldNum" idx="5" sz="quarter"/>
+          </p:nvPr>
+        </p:nvSpPr>
+        <p:spPr/>
+      </p:sp>
+    </p:spTree>
+  </p:cSld>
+  <p:clrMapOvr>
+    <a:masterClrMapping/>
+  </p:clrMapOvr>
+</p:notes>
+</file>
+
+<file path=ppt/notesSlides/notesSlide2.xml><?xml version="1.0" encoding="utf-8"?>
+<p:notes xmlns:a="http://schemas.openxmlformats.org/drawingml/2006/main" xmlns:p="http://schemas.openxmlformats.org/presentationml/2006/main" xmlns:r="http://schemas.openxmlformats.org/officeDocument/2006/relationships">
+  <p:cSld>
+    <p:spTree>
+      <p:nvGrpSpPr>
+        <p:cNvPr id="1" name=""/>
+        <p:cNvGrpSpPr/>
+        <p:nvPr/>
+      </p:nvGrpSpPr>
+      <p:grpSpPr>
+        <a:xfrm>
+          <a:off x="0" y="0"/>
+          <a:ext cx="0" cy="0"/>
+          <a:chOff x="0" y="0"/>
+          <a:chExt cx="0" cy="0"/>
+        </a:xfrm>
+      </p:grpSpPr>
+      <p:sp>
+        <p:nvSpPr>
+          <p:cNvPr id="2" name="Slide Image Placeholder 1"/>
+          <p:cNvSpPr>
+            <a:spLocks noGrp="1"/>
+          </p:cNvSpPr>
+          <p:nvPr>
+            <p:ph type="sldImg" idx="2"/>
+          </p:nvPr>
+        </p:nvSpPr>
+        <p:spPr/>
+      </p:sp>
+      <p:sp>
+        <p:nvSpPr>
+          <p:cNvPr id="3" name="Notes Placeholder 2"/>
+          <p:cNvSpPr>
+            <a:spLocks noGrp="1"/>
+          </p:cNvSpPr>
+          <p:nvPr>
+            <p:ph type="body" idx="3" sz="quarter"/>
+          </p:nvPr>
+        </p:nvSpPr>
+        <p:spPr/>
+        <p:txBody>
+          <a:bodyPr/>
+          <a:lstStyle/>
+          <a:p>
+            <a:r>
+              <a:t>Objetivo docente: Demostrar comprensión individual, modificar algo pequeño y cerrar el ciclo HEXA con reflexión y mejora.</a:t>
+            </a:r>
+          </a:p>
+          <a:p>
+            <a:r>
+              <a:t>Diapositiva 2 de 9: Qué debe conseguirse</a:t>
+            </a:r>
+          </a:p>
+          <a:p>
+            <a:r>
+              <a:t>Fase HEXA: Comunicar — evaluar y reflexionar</a:t>
+            </a:r>
+          </a:p>
+          <a:p>
+            <a:r>
+              <a:t>- Objetivo: Demostrar comprensión individual, modificar algo pequeño y cerrar el ciclo HEXA con reflexión y mejora.</a:t>
+            </a:r>
+          </a:p>
+          <a:p>
+            <a:r>
+              <a:t>- Al terminar: señala la evidencia, explica qué demuestra y reproduce la prueba.</a:t>
+            </a:r>
+          </a:p>
+          <a:p>
+            <a:r>
+              <a:t>Fuente docente: /mnt/compartido/Programación-26-27/Minijarvis/02-PROFESORADO/02-SESIONES/h1/S215-defensa-y-cierre-h1-docente.md</a:t>
+            </a:r>
+          </a:p>
+        </p:txBody>
+      </p:sp>
+      <p:sp>
+        <p:nvSpPr>
+          <p:cNvPr id="4" name="Slide Number Placeholder 3"/>
+          <p:cNvSpPr>
+            <a:spLocks noGrp="1"/>
+          </p:cNvSpPr>
+          <p:nvPr>
+            <p:ph type="sldNum" idx="5" sz="quarter"/>
+          </p:nvPr>
+        </p:nvSpPr>
+        <p:spPr/>
+      </p:sp>
+    </p:spTree>
+  </p:cSld>
+  <p:clrMapOvr>
+    <a:masterClrMapping/>
+  </p:clrMapOvr>
+</p:notes>
+</file>
+
+<file path=ppt/notesSlides/notesSlide3.xml><?xml version="1.0" encoding="utf-8"?>
+<p:notes xmlns:a="http://schemas.openxmlformats.org/drawingml/2006/main" xmlns:p="http://schemas.openxmlformats.org/presentationml/2006/main" xmlns:r="http://schemas.openxmlformats.org/officeDocument/2006/relationships">
+  <p:cSld>
+    <p:spTree>
+      <p:nvGrpSpPr>
+        <p:cNvPr id="1" name=""/>
+        <p:cNvGrpSpPr/>
+        <p:nvPr/>
+      </p:nvGrpSpPr>
+      <p:grpSpPr>
+        <a:xfrm>
+          <a:off x="0" y="0"/>
+          <a:ext cx="0" cy="0"/>
+          <a:chOff x="0" y="0"/>
+          <a:chExt cx="0" cy="0"/>
+        </a:xfrm>
+      </p:grpSpPr>
+      <p:sp>
+        <p:nvSpPr>
+          <p:cNvPr id="2" name="Slide Image Placeholder 1"/>
+          <p:cNvSpPr>
+            <a:spLocks noGrp="1"/>
+          </p:cNvSpPr>
+          <p:nvPr>
+            <p:ph type="sldImg" idx="2"/>
+          </p:nvPr>
+        </p:nvSpPr>
+        <p:spPr/>
+      </p:sp>
+      <p:sp>
+        <p:nvSpPr>
+          <p:cNvPr id="3" name="Notes Placeholder 2"/>
+          <p:cNvSpPr>
+            <a:spLocks noGrp="1"/>
+          </p:cNvSpPr>
+          <p:nvPr>
+            <p:ph type="body" idx="3" sz="quarter"/>
+          </p:nvPr>
+        </p:nvSpPr>
+        <p:spPr/>
+        <p:txBody>
+          <a:bodyPr/>
+          <a:lstStyle/>
+          <a:p>
+            <a:r>
+              <a:t>Objetivo docente: Demostrar comprensión individual, modificar algo pequeño y cerrar el ciclo HEXA con reflexión y mejora.</a:t>
+            </a:r>
+          </a:p>
+          <a:p>
+            <a:r>
+              <a:t>Diapositiva 3 de 9: Ejemplo o demostración · 1</a:t>
+            </a:r>
+          </a:p>
+          <a:p>
+            <a:r>
+              <a:t>Fase HEXA: Comunicar — evaluar y reflexionar</a:t>
+            </a:r>
+          </a:p>
+          <a:p>
+            <a:r>
+              <a:t>Modela el ejemplo sin resolver la actividad completa; pide una predicción antes de ejecutar.</a:t>
+            </a:r>
+          </a:p>
+          <a:p>
+            <a:r>
+              <a:t>- D1 · La defensa no es recitar — Vas a señalar, explicar, ejecutar y modificar una parte pequeña de tu propio H1.</a:t>
+            </a:r>
+          </a:p>
+          <a:p>
+            <a:r>
+              <a:t>- D2 · Así es una respuesta defendible SEÑALA: “Esta línea lee el nombre” / “Esta variable guarda la edad” \| EXPLICA: tipo, decisión y efecto \| DEMUESTRA:</a:t>
+            </a:r>
+          </a:p>
+          <a:p>
+            <a:r>
+              <a:t>- ejecuta con una entrada y predice la salida</a:t>
+            </a:r>
+          </a:p>
+          <a:p>
+            <a:r>
+              <a:t>- D3 · Ronda de defensa + ensayo por parejas — Mientras una persona defiende, el resto:</a:t>
+            </a:r>
+          </a:p>
+          <a:p>
+            <a:r>
+              <a:t>- • ensaya preguntas</a:t>
+            </a:r>
+          </a:p>
+          <a:p>
+            <a:r>
+              <a:t>Fuente docente: /mnt/compartido/Programación-26-27/Minijarvis/02-PROFESORADO/02-SESIONES/h1/S215-defensa-y-cierre-h1-docente.md</a:t>
+            </a:r>
+          </a:p>
+        </p:txBody>
+      </p:sp>
+      <p:sp>
+        <p:nvSpPr>
+          <p:cNvPr id="4" name="Slide Number Placeholder 3"/>
+          <p:cNvSpPr>
+            <a:spLocks noGrp="1"/>
+          </p:cNvSpPr>
+          <p:nvPr>
+            <p:ph type="sldNum" idx="5" sz="quarter"/>
+          </p:nvPr>
+        </p:nvSpPr>
+        <p:spPr/>
+      </p:sp>
+    </p:spTree>
+  </p:cSld>
+  <p:clrMapOvr>
+    <a:masterClrMapping/>
+  </p:clrMapOvr>
+</p:notes>
+</file>
+
+<file path=ppt/notesSlides/notesSlide4.xml><?xml version="1.0" encoding="utf-8"?>
+<p:notes xmlns:a="http://schemas.openxmlformats.org/drawingml/2006/main" xmlns:p="http://schemas.openxmlformats.org/presentationml/2006/main" xmlns:r="http://schemas.openxmlformats.org/officeDocument/2006/relationships">
+  <p:cSld>
+    <p:spTree>
+      <p:nvGrpSpPr>
+        <p:cNvPr id="1" name=""/>
+        <p:cNvGrpSpPr/>
+        <p:nvPr/>
+      </p:nvGrpSpPr>
+      <p:grpSpPr>
+        <a:xfrm>
+          <a:off x="0" y="0"/>
+          <a:ext cx="0" cy="0"/>
+          <a:chOff x="0" y="0"/>
+          <a:chExt cx="0" cy="0"/>
+        </a:xfrm>
+      </p:grpSpPr>
+      <p:sp>
+        <p:nvSpPr>
+          <p:cNvPr id="2" name="Slide Image Placeholder 1"/>
+          <p:cNvSpPr>
+            <a:spLocks noGrp="1"/>
+          </p:cNvSpPr>
+          <p:nvPr>
+            <p:ph type="sldImg" idx="2"/>
+          </p:nvPr>
+        </p:nvSpPr>
+        <p:spPr/>
+      </p:sp>
+      <p:sp>
+        <p:nvSpPr>
+          <p:cNvPr id="3" name="Notes Placeholder 2"/>
+          <p:cNvSpPr>
+            <a:spLocks noGrp="1"/>
+          </p:cNvSpPr>
+          <p:nvPr>
+            <p:ph type="body" idx="3" sz="quarter"/>
+          </p:nvPr>
+        </p:nvSpPr>
+        <p:spPr/>
+        <p:txBody>
+          <a:bodyPr/>
+          <a:lstStyle/>
+          <a:p>
+            <a:r>
+              <a:t>Objetivo docente: Demostrar comprensión individual, modificar algo pequeño y cerrar el ciclo HEXA con reflexión y mejora.</a:t>
+            </a:r>
+          </a:p>
+          <a:p>
+            <a:r>
+              <a:t>Diapositiva 4 de 9: Ejemplo o demostración · 2</a:t>
+            </a:r>
+          </a:p>
+          <a:p>
+            <a:r>
+              <a:t>Fase HEXA: Comunicar — evaluar y reflexionar</a:t>
+            </a:r>
+          </a:p>
+          <a:p>
+            <a:r>
+              <a:t>Modela el ejemplo sin resolver la actividad completa; pide una predicción antes de ejecutar.</a:t>
+            </a:r>
+          </a:p>
+          <a:p>
+            <a:r>
+              <a:t>- • revisa el diario y la selección de evidencias del Site</a:t>
+            </a:r>
+          </a:p>
+          <a:p>
+            <a:r>
+              <a:t>- • comprueba enlaces</a:t>
+            </a:r>
+          </a:p>
+          <a:p>
+            <a:r>
+              <a:t>- • prepara una modificación pequeña</a:t>
+            </a:r>
+          </a:p>
+          <a:p>
+            <a:r>
+              <a:t>- D4 · Si aparece una laguna, se recupera la evidencia concreta — No hace falta repetir todo H1.</a:t>
+            </a:r>
+          </a:p>
+          <a:p>
+            <a:r>
+              <a:t>Fuente docente: /mnt/compartido/Programación-26-27/Minijarvis/02-PROFESORADO/02-SESIONES/h1/S215-defensa-y-cierre-h1-docente.md</a:t>
+            </a:r>
+          </a:p>
+        </p:txBody>
+      </p:sp>
+      <p:sp>
+        <p:nvSpPr>
+          <p:cNvPr id="4" name="Slide Number Placeholder 3"/>
+          <p:cNvSpPr>
+            <a:spLocks noGrp="1"/>
+          </p:cNvSpPr>
+          <p:nvPr>
+            <p:ph type="sldNum" idx="5" sz="quarter"/>
+          </p:nvPr>
+        </p:nvSpPr>
+        <p:spPr/>
+      </p:sp>
+    </p:spTree>
+  </p:cSld>
+  <p:clrMapOvr>
+    <a:masterClrMapping/>
+  </p:clrMapOvr>
+</p:notes>
+</file>
+
+<file path=ppt/notesSlides/notesSlide5.xml><?xml version="1.0" encoding="utf-8"?>
+<p:notes xmlns:a="http://schemas.openxmlformats.org/drawingml/2006/main" xmlns:p="http://schemas.openxmlformats.org/presentationml/2006/main" xmlns:r="http://schemas.openxmlformats.org/officeDocument/2006/relationships">
+  <p:cSld>
+    <p:spTree>
+      <p:nvGrpSpPr>
+        <p:cNvPr id="1" name=""/>
+        <p:cNvGrpSpPr/>
+        <p:nvPr/>
+      </p:nvGrpSpPr>
+      <p:grpSpPr>
+        <a:xfrm>
+          <a:off x="0" y="0"/>
+          <a:ext cx="0" cy="0"/>
+          <a:chOff x="0" y="0"/>
+          <a:chExt cx="0" cy="0"/>
+        </a:xfrm>
+      </p:grpSpPr>
+      <p:sp>
+        <p:nvSpPr>
+          <p:cNvPr id="2" name="Slide Image Placeholder 1"/>
+          <p:cNvSpPr>
+            <a:spLocks noGrp="1"/>
+          </p:cNvSpPr>
+          <p:nvPr>
+            <p:ph type="sldImg" idx="2"/>
+          </p:nvPr>
+        </p:nvSpPr>
+        <p:spPr/>
+      </p:sp>
+      <p:sp>
+        <p:nvSpPr>
+          <p:cNvPr id="3" name="Notes Placeholder 2"/>
+          <p:cNvSpPr>
+            <a:spLocks noGrp="1"/>
+          </p:cNvSpPr>
+          <p:nvPr>
+            <p:ph type="body" idx="3" sz="quarter"/>
+          </p:nvPr>
+        </p:nvSpPr>
+        <p:spPr/>
+        <p:txBody>
+          <a:bodyPr/>
+          <a:lstStyle/>
+          <a:p>
+            <a:r>
+              <a:t>Objetivo docente: Demostrar comprensión individual, modificar algo pequeño y cerrar el ciclo HEXA con reflexión y mejora.</a:t>
+            </a:r>
+          </a:p>
+          <a:p>
+            <a:r>
+              <a:t>Diapositiva 5 de 9: Actividad central · 1</a:t>
+            </a:r>
+          </a:p>
+          <a:p>
+            <a:r>
+              <a:t>Fase HEXA: Comunicar — evaluar y reflexionar</a:t>
+            </a:r>
+          </a:p>
+          <a:p>
+            <a:r>
+              <a:t>Entrega la consigna, observa decisiones y pide una prueba reproducible.</a:t>
+            </a:r>
+          </a:p>
+          <a:p>
+            <a:r>
+              <a:t>- Predice antes de ejecutar cuando haya código.</a:t>
+            </a:r>
+          </a:p>
+          <a:p>
+            <a:r>
+              <a:t>- Realiza la micropráctica o modificación prevista.</a:t>
+            </a:r>
+          </a:p>
+          <a:p>
+            <a:r>
+              <a:t>- Prueba el caso normal y, cuando exista una decisión o conversión, también el caso alternativo o erróneo.</a:t>
+            </a:r>
+          </a:p>
+          <a:p>
+            <a:r>
+              <a:t>- Conserva el código o resultado en el repositorio o espacio indicado.</a:t>
+            </a:r>
+          </a:p>
+          <a:p>
+            <a:r>
+              <a:t>Fuente docente: /mnt/compartido/Programación-26-27/Minijarvis/02-PROFESORADO/02-SESIONES/h1/S215-defensa-y-cierre-h1-docente.md</a:t>
+            </a:r>
+          </a:p>
+        </p:txBody>
+      </p:sp>
+      <p:sp>
+        <p:nvSpPr>
+          <p:cNvPr id="4" name="Slide Number Placeholder 3"/>
+          <p:cNvSpPr>
+            <a:spLocks noGrp="1"/>
+          </p:cNvSpPr>
+          <p:nvPr>
+            <p:ph type="sldNum" idx="5" sz="quarter"/>
+          </p:nvPr>
+        </p:nvSpPr>
+        <p:spPr/>
+      </p:sp>
+    </p:spTree>
+  </p:cSld>
+  <p:clrMapOvr>
+    <a:masterClrMapping/>
+  </p:clrMapOvr>
+</p:notes>
+</file>
+
+<file path=ppt/notesSlides/notesSlide6.xml><?xml version="1.0" encoding="utf-8"?>
+<p:notes xmlns:a="http://schemas.openxmlformats.org/drawingml/2006/main" xmlns:p="http://schemas.openxmlformats.org/presentationml/2006/main" xmlns:r="http://schemas.openxmlformats.org/officeDocument/2006/relationships">
+  <p:cSld>
+    <p:spTree>
+      <p:nvGrpSpPr>
+        <p:cNvPr id="1" name=""/>
+        <p:cNvGrpSpPr/>
+        <p:nvPr/>
+      </p:nvGrpSpPr>
+      <p:grpSpPr>
+        <a:xfrm>
+          <a:off x="0" y="0"/>
+          <a:ext cx="0" cy="0"/>
+          <a:chOff x="0" y="0"/>
+          <a:chExt cx="0" cy="0"/>
+        </a:xfrm>
+      </p:grpSpPr>
+      <p:sp>
+        <p:nvSpPr>
+          <p:cNvPr id="2" name="Slide Image Placeholder 1"/>
+          <p:cNvSpPr>
+            <a:spLocks noGrp="1"/>
+          </p:cNvSpPr>
+          <p:nvPr>
+            <p:ph type="sldImg" idx="2"/>
+          </p:nvPr>
+        </p:nvSpPr>
+        <p:spPr/>
+      </p:sp>
+      <p:sp>
+        <p:nvSpPr>
+          <p:cNvPr id="3" name="Notes Placeholder 2"/>
+          <p:cNvSpPr>
+            <a:spLocks noGrp="1"/>
+          </p:cNvSpPr>
+          <p:nvPr>
+            <p:ph type="body" idx="3" sz="quarter"/>
+          </p:nvPr>
+        </p:nvSpPr>
+        <p:spPr/>
+        <p:txBody>
+          <a:bodyPr/>
+          <a:lstStyle/>
+          <a:p>
+            <a:r>
+              <a:t>Objetivo docente: Demostrar comprensión individual, modificar algo pequeño y cerrar el ciclo HEXA con reflexión y mejora.</a:t>
+            </a:r>
+          </a:p>
+          <a:p>
+            <a:r>
+              <a:t>Diapositiva 6 de 9: Actividad central · 2</a:t>
+            </a:r>
+          </a:p>
+          <a:p>
+            <a:r>
+              <a:t>Fase HEXA: Comunicar — evaluar y reflexionar</a:t>
+            </a:r>
+          </a:p>
+          <a:p>
+            <a:r>
+              <a:t>Entrega la consigna, observa decisiones y pide una prueba reproducible.</a:t>
+            </a:r>
+          </a:p>
+          <a:p>
+            <a:r>
+              <a:t>- Registra una sola entrada en el diario individual; no crees un informe paralelo.</a:t>
+            </a:r>
+          </a:p>
+          <a:p>
+            <a:r>
+              <a:t>- ¿Qué puedes señalar, explicar y probar al terminar este checkpoint?</a:t>
+            </a:r>
+          </a:p>
+          <a:p>
+            <a:r>
+              <a:t>Fuente docente: /mnt/compartido/Programación-26-27/Minijarvis/02-PROFESORADO/02-SESIONES/h1/S215-defensa-y-cierre-h1-docente.md</a:t>
+            </a:r>
+          </a:p>
+        </p:txBody>
+      </p:sp>
+      <p:sp>
+        <p:nvSpPr>
+          <p:cNvPr id="4" name="Slide Number Placeholder 3"/>
+          <p:cNvSpPr>
+            <a:spLocks noGrp="1"/>
+          </p:cNvSpPr>
+          <p:nvPr>
+            <p:ph type="sldNum" idx="5" sz="quarter"/>
+          </p:nvPr>
+        </p:nvSpPr>
+        <p:spPr/>
+      </p:sp>
+    </p:spTree>
+  </p:cSld>
+  <p:clrMapOvr>
+    <a:masterClrMapping/>
+  </p:clrMapOvr>
+</p:notes>
+</file>
+
+<file path=ppt/notesSlides/notesSlide7.xml><?xml version="1.0" encoding="utf-8"?>
+<p:notes xmlns:a="http://schemas.openxmlformats.org/drawingml/2006/main" xmlns:p="http://schemas.openxmlformats.org/presentationml/2006/main" xmlns:r="http://schemas.openxmlformats.org/officeDocument/2006/relationships">
+  <p:cSld>
+    <p:spTree>
+      <p:nvGrpSpPr>
+        <p:cNvPr id="1" name=""/>
+        <p:cNvGrpSpPr/>
+        <p:nvPr/>
+      </p:nvGrpSpPr>
+      <p:grpSpPr>
+        <a:xfrm>
+          <a:off x="0" y="0"/>
+          <a:ext cx="0" cy="0"/>
+          <a:chOff x="0" y="0"/>
+          <a:chExt cx="0" cy="0"/>
+        </a:xfrm>
+      </p:grpSpPr>
+      <p:sp>
+        <p:nvSpPr>
+          <p:cNvPr id="2" name="Slide Image Placeholder 1"/>
+          <p:cNvSpPr>
+            <a:spLocks noGrp="1"/>
+          </p:cNvSpPr>
+          <p:nvPr>
+            <p:ph type="sldImg" idx="2"/>
+          </p:nvPr>
+        </p:nvSpPr>
+        <p:spPr/>
+      </p:sp>
+      <p:sp>
+        <p:nvSpPr>
+          <p:cNvPr id="3" name="Notes Placeholder 2"/>
+          <p:cNvSpPr>
+            <a:spLocks noGrp="1"/>
+          </p:cNvSpPr>
+          <p:nvPr>
+            <p:ph type="body" idx="3" sz="quarter"/>
+          </p:nvPr>
+        </p:nvSpPr>
+        <p:spPr/>
+        <p:txBody>
+          <a:bodyPr/>
+          <a:lstStyle/>
+          <a:p>
+            <a:r>
+              <a:t>Objetivo docente: Demostrar comprensión individual, modificar algo pequeño y cerrar el ciclo HEXA con reflexión y mejora.</a:t>
+            </a:r>
+          </a:p>
+          <a:p>
+            <a:r>
+              <a:t>Diapositiva 7 de 9: Evidencia y comprobación</a:t>
+            </a:r>
+          </a:p>
+          <a:p>
+            <a:r>
+              <a:t>Fase HEXA: Comunicar — evaluar y reflexionar</a:t>
+            </a:r>
+          </a:p>
+          <a:p>
+            <a:r>
+              <a:t>Comprueba la evidencia en su fuente canónica: Quede siguiente paso claro.</a:t>
+            </a:r>
+          </a:p>
+          <a:p>
+            <a:r>
+              <a:t>- conserva el código o la prueba en el lugar indicado por la sesión;</a:t>
+            </a:r>
+          </a:p>
+          <a:p>
+            <a:r>
+              <a:t>- añade una sola entrada al diario individual con prueba, bloqueo y siguiente paso;</a:t>
+            </a:r>
+          </a:p>
+          <a:p>
+            <a:r>
+              <a:t>- no copies la misma reflexión en otro documento; el Site personal seleccionará evidencias al cerrar H1.</a:t>
+            </a:r>
+          </a:p>
+          <a:p>
+            <a:r>
+              <a:t>Fuente docente: /mnt/compartido/Programación-26-27/Minijarvis/02-PROFESORADO/02-SESIONES/h1/S215-defensa-y-cierre-h1-docente.md</a:t>
+            </a:r>
+          </a:p>
+        </p:txBody>
+      </p:sp>
+      <p:sp>
+        <p:nvSpPr>
+          <p:cNvPr id="4" name="Slide Number Placeholder 3"/>
+          <p:cNvSpPr>
+            <a:spLocks noGrp="1"/>
+          </p:cNvSpPr>
+          <p:nvPr>
+            <p:ph type="sldNum" idx="5" sz="quarter"/>
+          </p:nvPr>
+        </p:nvSpPr>
+        <p:spPr/>
+      </p:sp>
+    </p:spTree>
+  </p:cSld>
+  <p:clrMapOvr>
+    <a:masterClrMapping/>
+  </p:clrMapOvr>
+</p:notes>
+</file>
+
+<file path=ppt/notesSlides/notesSlide8.xml><?xml version="1.0" encoding="utf-8"?>
+<p:notes xmlns:a="http://schemas.openxmlformats.org/drawingml/2006/main" xmlns:p="http://schemas.openxmlformats.org/presentationml/2006/main" xmlns:r="http://schemas.openxmlformats.org/officeDocument/2006/relationships">
+  <p:cSld>
+    <p:spTree>
+      <p:nvGrpSpPr>
+        <p:cNvPr id="1" name=""/>
+        <p:cNvGrpSpPr/>
+        <p:nvPr/>
+      </p:nvGrpSpPr>
+      <p:grpSpPr>
+        <a:xfrm>
+          <a:off x="0" y="0"/>
+          <a:ext cx="0" cy="0"/>
+          <a:chOff x="0" y="0"/>
+          <a:chExt cx="0" cy="0"/>
+        </a:xfrm>
+      </p:grpSpPr>
+      <p:sp>
+        <p:nvSpPr>
+          <p:cNvPr id="2" name="Slide Image Placeholder 1"/>
+          <p:cNvSpPr>
+            <a:spLocks noGrp="1"/>
+          </p:cNvSpPr>
+          <p:nvPr>
+            <p:ph type="sldImg" idx="2"/>
+          </p:nvPr>
+        </p:nvSpPr>
+        <p:spPr/>
+      </p:sp>
+      <p:sp>
+        <p:nvSpPr>
+          <p:cNvPr id="3" name="Notes Placeholder 2"/>
+          <p:cNvSpPr>
+            <a:spLocks noGrp="1"/>
+          </p:cNvSpPr>
+          <p:nvPr>
+            <p:ph type="body" idx="3" sz="quarter"/>
+          </p:nvPr>
+        </p:nvSpPr>
+        <p:spPr/>
+        <p:txBody>
+          <a:bodyPr/>
+          <a:lstStyle/>
+          <a:p>
+            <a:r>
+              <a:t>Objetivo docente: Demostrar comprensión individual, modificar algo pequeño y cerrar el ciclo HEXA con reflexión y mejora.</a:t>
+            </a:r>
+          </a:p>
+          <a:p>
+            <a:r>
+              <a:t>Diapositiva 8 de 9: Seguridad y uso responsable</a:t>
+            </a:r>
+          </a:p>
+          <a:p>
+            <a:r>
+              <a:t>Fase HEXA: Comunicar — evaluar y reflexionar</a:t>
+            </a:r>
+          </a:p>
+          <a:p>
+            <a:r>
+              <a:t>Recuerda estos límites antes de que el alumnado comparta o publique:</a:t>
+            </a:r>
+          </a:p>
+          <a:p>
+            <a:r>
+              <a:t>- Usa datos ficticios y no publiques credenciales ni información personal.</a:t>
+            </a:r>
+          </a:p>
+          <a:p>
+            <a:r>
+              <a:t>- Si utilizas IA de forma sustantiva, registra propósito, propuesta, cambios propios y validación en el registro de IA del hito.</a:t>
+            </a:r>
+          </a:p>
+          <a:p>
+            <a:r>
+              <a:t>Fuente docente: /mnt/compartido/Programación-26-27/Minijarvis/02-PROFESORADO/02-SESIONES/h1/S215-defensa-y-cierre-h1-docente.md</a:t>
+            </a:r>
+          </a:p>
+        </p:txBody>
+      </p:sp>
+      <p:sp>
+        <p:nvSpPr>
+          <p:cNvPr id="4" name="Slide Number Placeholder 3"/>
+          <p:cNvSpPr>
+            <a:spLocks noGrp="1"/>
+          </p:cNvSpPr>
+          <p:nvPr>
+            <p:ph type="sldNum" idx="5" sz="quarter"/>
+          </p:nvPr>
+        </p:nvSpPr>
+        <p:spPr/>
+      </p:sp>
+    </p:spTree>
+  </p:cSld>
+  <p:clrMapOvr>
+    <a:masterClrMapping/>
+  </p:clrMapOvr>
+</p:notes>
+</file>
+
+<file path=ppt/notesSlides/notesSlide9.xml><?xml version="1.0" encoding="utf-8"?>
+<p:notes xmlns:a="http://schemas.openxmlformats.org/drawingml/2006/main" xmlns:p="http://schemas.openxmlformats.org/presentationml/2006/main" xmlns:r="http://schemas.openxmlformats.org/officeDocument/2006/relationships">
+  <p:cSld>
+    <p:spTree>
+      <p:nvGrpSpPr>
+        <p:cNvPr id="1" name=""/>
+        <p:cNvGrpSpPr/>
+        <p:nvPr/>
+      </p:nvGrpSpPr>
+      <p:grpSpPr>
+        <a:xfrm>
+          <a:off x="0" y="0"/>
+          <a:ext cx="0" cy="0"/>
+          <a:chOff x="0" y="0"/>
+          <a:chExt cx="0" cy="0"/>
+        </a:xfrm>
+      </p:grpSpPr>
+      <p:sp>
+        <p:nvSpPr>
+          <p:cNvPr id="2" name="Slide Image Placeholder 1"/>
+          <p:cNvSpPr>
+            <a:spLocks noGrp="1"/>
+          </p:cNvSpPr>
+          <p:nvPr>
+            <p:ph type="sldImg" idx="2"/>
+          </p:nvPr>
+        </p:nvSpPr>
+        <p:spPr/>
+      </p:sp>
+      <p:sp>
+        <p:nvSpPr>
+          <p:cNvPr id="3" name="Notes Placeholder 2"/>
+          <p:cNvSpPr>
+            <a:spLocks noGrp="1"/>
+          </p:cNvSpPr>
+          <p:nvPr>
+            <p:ph type="body" idx="3" sz="quarter"/>
+          </p:nvPr>
+        </p:nvSpPr>
+        <p:spPr/>
+        <p:txBody>
+          <a:bodyPr/>
+          <a:lstStyle/>
+          <a:p>
+            <a:r>
+              <a:t>Objetivo docente: Demostrar comprensión individual, modificar algo pequeño y cerrar el ciclo HEXA con reflexión y mejora.</a:t>
+            </a:r>
+          </a:p>
+          <a:p>
+            <a:r>
+              <a:t>Diapositiva 9 de 9: Cierre y defensa</a:t>
+            </a:r>
+          </a:p>
+          <a:p>
+            <a:r>
+              <a:t>Fase HEXA: Comunicar — evaluar y reflexionar</a:t>
+            </a:r>
+          </a:p>
+          <a:p>
+            <a:r>
+              <a:t>Cierra con explicación individual, prueba observable y siguiente paso concreto.</a:t>
+            </a:r>
+          </a:p>
+          <a:p>
+            <a:r>
+              <a:t>- ¿Qué puedes señalar, explicar y probar al terminar este checkpoint?</a:t>
+            </a:r>
+          </a:p>
+          <a:p>
+            <a:r>
+              <a:t>Fuente docente: /mnt/compartido/Programación-26-27/Minijarvis/02-PROFESORADO/02-SESIONES/h1/S215-defensa-y-cierre-h1-docente.md</a:t>
+            </a:r>
+          </a:p>
+        </p:txBody>
+      </p:sp>
+      <p:sp>
+        <p:nvSpPr>
+          <p:cNvPr id="4" name="Slide Number Placeholder 3"/>
+          <p:cNvSpPr>
+            <a:spLocks noGrp="1"/>
+          </p:cNvSpPr>
+          <p:nvPr>
+            <p:ph type="sldNum" idx="5" sz="quarter"/>
+          </p:nvPr>
+        </p:nvSpPr>
+        <p:spPr/>
+      </p:sp>
+    </p:spTree>
+  </p:cSld>
+  <p:clrMapOvr>
+    <a:masterClrMapping/>
+  </p:clrMapOvr>
+</p:notes>
 </file>
 
 <file path=ppt/slideLayouts/slideLayout1.xml><?xml version="1.0" encoding="utf-8"?>
@@ -3293,7 +4609,7 @@
               </a:defRPr>
             </a:pPr>
             <a:r>
-              <a:t>Defensa y cierre H1</a:t>
+              <a:t>Defensa y cierre del hito</a:t>
             </a:r>
           </a:p>
         </p:txBody>
@@ -3329,7 +4645,7 @@
               </a:defRPr>
             </a:pPr>
             <a:r>
-              <a:t>H1 · 45 minutos</a:t>
+              <a:t>H1 — Primer MiniJarvis · Fase HEXA: Comunicar — evaluar y reflexionar</a:t>
             </a:r>
           </a:p>
         </p:txBody>
@@ -3378,6 +4694,42 @@
         </p:nvSpPr>
         <p:spPr>
           <a:xfrm>
+            <a:off x="713232" y="4965192"/>
+            <a:ext cx="10241280" cy="594360"/>
+          </a:xfrm>
+          <a:prstGeom prst="rect">
+            <a:avLst/>
+          </a:prstGeom>
+          <a:noFill/>
+        </p:spPr>
+        <p:txBody>
+          <a:bodyPr wrap="square" lIns="45720" rIns="45720" tIns="36576" bIns="36576" anchor="t">
+            <a:spAutoFit/>
+          </a:bodyPr>
+          <a:lstStyle/>
+          <a:p>
+            <a:pPr algn="l">
+              <a:defRPr sz="1700" b="0">
+                <a:solidFill>
+                  <a:srgbClr val="D2D9E4"/>
+                </a:solidFill>
+                <a:latin typeface="Aptos"/>
+              </a:defRPr>
+            </a:pPr>
+            <a:r>
+              <a:t>Individual con contraste por parejas o equipo cuando la práctica lo requiera</a:t>
+            </a:r>
+          </a:p>
+        </p:txBody>
+      </p:sp>
+      <p:sp>
+        <p:nvSpPr>
+          <p:cNvPr id="10" name="TextBox 9"/>
+          <p:cNvSpPr txBox="1"/>
+          <p:nvPr/>
+        </p:nvSpPr>
+        <p:spPr>
+          <a:xfrm>
             <a:off x="713232" y="6272784"/>
             <a:ext cx="10607040" cy="201168"/>
           </a:xfrm>
@@ -3401,7 +4753,7 @@
               </a:defRPr>
             </a:pPr>
             <a:r>
-              <a:t>MINIJARVIS · PROGRAMACIÓN + ENTORNOS DE DESARROLLO</a:t>
+              <a:t>MINIJARVIS · PROGRAMACIÓN</a:t>
             </a:r>
           </a:p>
         </p:txBody>
@@ -3656,7 +5008,7 @@
               </a:defRPr>
             </a:pPr>
             <a:r>
-              <a:t>MiniJarvis · 1.º DAW · Sesión 215 · H1</a:t>
+              <a:t>MiniJarvis · 1.º DAW · Sesión 215 · H1 — Primer MiniJarvis</a:t>
             </a:r>
           </a:p>
         </p:txBody>
@@ -3737,7 +5089,7 @@
               </a:defRPr>
             </a:pPr>
             <a:r>
-              <a:t>Objetivo: Validar comprensión individual.</a:t>
+              <a:t>Objetivo: Demostrar comprensión individual, modificar algo pequeño y cerrar el ciclo HEXA con reflexión y mejora.</a:t>
             </a:r>
           </a:p>
         </p:txBody>
@@ -3818,7 +5170,7 @@
               </a:defRPr>
             </a:pPr>
             <a:r>
-              <a:t>Evidencia: Plantilla de defensa H1 y portfolio individual.</a:t>
+              <a:t>Al terminar: señala la evidencia, explica qué demuestra y reproduce la prueba.</a:t>
             </a:r>
           </a:p>
         </p:txBody>
@@ -3958,7 +5310,7 @@
               </a:defRPr>
             </a:pPr>
             <a:r>
-              <a:t>RITMO DE LA SESIÓN</a:t>
+              <a:t>OBSERVAR ANTES DE ACTUAR</a:t>
             </a:r>
           </a:p>
         </p:txBody>
@@ -3994,7 +5346,7 @@
               </a:defRPr>
             </a:pPr>
             <a:r>
-              <a:t>Secuencia de aula</a:t>
+              <a:t>Ejemplo o demostración · 1</a:t>
             </a:r>
           </a:p>
         </p:txBody>
@@ -4073,27 +5425,27 @@
               </a:defRPr>
             </a:pPr>
             <a:r>
-              <a:t>MiniJarvis · 1.º DAW · Sesión 215 · H1</a:t>
-            </a:r>
-          </a:p>
-        </p:txBody>
-      </p:sp>
-      <p:sp>
-        <p:nvSpPr>
-          <p:cNvPr id="8" name="Oval 7"/>
+              <a:t>MiniJarvis · 1.º DAW · Sesión 215 · H1 — Primer MiniJarvis</a:t>
+            </a:r>
+          </a:p>
+        </p:txBody>
+      </p:sp>
+      <p:sp>
+        <p:nvSpPr>
+          <p:cNvPr id="8" name="Rounded Rectangle 7"/>
           <p:cNvSpPr/>
           <p:nvPr/>
         </p:nvSpPr>
         <p:spPr>
           <a:xfrm>
-            <a:off x="658368" y="1280160"/>
-            <a:ext cx="475488" cy="475488"/>
-          </a:xfrm>
-          <a:prstGeom prst="ellipse">
+            <a:off x="621792" y="1353312"/>
+            <a:ext cx="10927080" cy="4526280"/>
+          </a:xfrm>
+          <a:prstGeom prst="roundRect">
             <a:avLst/>
           </a:prstGeom>
           <a:solidFill>
-            <a:srgbClr val="2F5BA8"/>
+            <a:srgbClr val="121824"/>
           </a:solidFill>
           <a:ln>
             <a:noFill/>
@@ -4129,8 +5481,8 @@
         </p:nvSpPr>
         <p:spPr>
           <a:xfrm>
-            <a:off x="658368" y="1380744"/>
-            <a:ext cx="475488" cy="201168"/>
+            <a:off x="932688" y="1627632"/>
+            <a:ext cx="2057400" cy="411480"/>
           </a:xfrm>
           <a:prstGeom prst="rect">
             <a:avLst/>
@@ -4143,8 +5495,47 @@
           </a:bodyPr>
           <a:lstStyle/>
           <a:p>
-            <a:pPr algn="ctr">
+            <a:pPr algn="l">
               <a:defRPr sz="1300" b="1">
+                <a:solidFill>
+                  <a:srgbClr val="2F5BA8"/>
+                </a:solidFill>
+                <a:latin typeface="Aptos"/>
+              </a:defRPr>
+            </a:pPr>
+            <a:r>
+              <a:t>DEMOSTRACIÓN</a:t>
+            </a:r>
+          </a:p>
+        </p:txBody>
+      </p:sp>
+      <p:sp>
+        <p:nvSpPr>
+          <p:cNvPr id="10" name="TextBox 9"/>
+          <p:cNvSpPr txBox="1"/>
+          <p:nvPr/>
+        </p:nvSpPr>
+        <p:spPr>
+          <a:xfrm>
+            <a:off x="932688" y="2212848"/>
+            <a:ext cx="9966960" cy="3246120"/>
+          </a:xfrm>
+          <a:prstGeom prst="rect">
+            <a:avLst/>
+          </a:prstGeom>
+          <a:noFill/>
+        </p:spPr>
+        <p:txBody>
+          <a:bodyPr wrap="square" lIns="73152" rIns="45720" tIns="36576">
+            <a:spAutoFit/>
+          </a:bodyPr>
+          <a:lstStyle/>
+          <a:p>
+            <a:pPr>
+              <a:spcAft>
+                <a:spcPts val="900"/>
+              </a:spcAft>
+              <a:defRPr sz="1900">
                 <a:solidFill>
                   <a:srgbClr val="FFFFFF"/>
                 </a:solidFill>
@@ -4152,114 +5543,15 @@
               </a:defRPr>
             </a:pPr>
             <a:r>
-              <a:t>1</a:t>
-            </a:r>
-          </a:p>
-        </p:txBody>
-      </p:sp>
-      <p:sp>
-        <p:nvSpPr>
-          <p:cNvPr id="10" name="TextBox 9"/>
-          <p:cNvSpPr txBox="1"/>
-          <p:nvPr/>
-        </p:nvSpPr>
-        <p:spPr>
-          <a:xfrm>
-            <a:off x="1389888" y="1261872"/>
-            <a:ext cx="10058400" cy="772668"/>
-          </a:xfrm>
-          <a:prstGeom prst="rect">
-            <a:avLst/>
-          </a:prstGeom>
-          <a:noFill/>
-        </p:spPr>
-        <p:txBody>
-          <a:bodyPr wrap="square" lIns="45720" rIns="45720" tIns="36576" bIns="36576" anchor="t">
-            <a:spAutoFit/>
-          </a:bodyPr>
-          <a:lstStyle/>
-          <a:p>
-            <a:pPr algn="l">
-              <a:defRPr sz="1400" b="0">
-                <a:solidFill>
-                  <a:srgbClr val="1C2330"/>
-                </a:solidFill>
-                <a:latin typeface="Aptos"/>
-              </a:defRPr>
-            </a:pPr>
-            <a:r>
-              <a:t>0–5 min — Presentar objetivo, producto y evidencia de hoy.</a:t>
-            </a:r>
-          </a:p>
-        </p:txBody>
-      </p:sp>
-      <p:sp>
-        <p:nvSpPr>
-          <p:cNvPr id="11" name="Oval 10"/>
-          <p:cNvSpPr/>
-          <p:nvPr/>
-        </p:nvSpPr>
-        <p:spPr>
-          <a:xfrm>
-            <a:off x="658368" y="2125979"/>
-            <a:ext cx="475488" cy="475488"/>
-          </a:xfrm>
-          <a:prstGeom prst="ellipse">
-            <a:avLst/>
-          </a:prstGeom>
-          <a:solidFill>
-            <a:srgbClr val="2F5BA8"/>
-          </a:solidFill>
-          <a:ln>
-            <a:noFill/>
-          </a:ln>
-        </p:spPr>
-        <p:style>
-          <a:lnRef idx="1">
-            <a:schemeClr val="accent1"/>
-          </a:lnRef>
-          <a:fillRef idx="3">
-            <a:schemeClr val="accent1"/>
-          </a:fillRef>
-          <a:effectRef idx="2">
-            <a:schemeClr val="accent1"/>
-          </a:effectRef>
-          <a:fontRef idx="minor">
-            <a:schemeClr val="lt1"/>
-          </a:fontRef>
-        </p:style>
-        <p:txBody>
-          <a:bodyPr rtlCol="0" anchor="ctr"/>
-          <a:lstStyle/>
-          <a:p>
-            <a:pPr algn="ctr"/>
-          </a:p>
-        </p:txBody>
-      </p:sp>
-      <p:sp>
-        <p:nvSpPr>
-          <p:cNvPr id="12" name="TextBox 11"/>
-          <p:cNvSpPr txBox="1"/>
-          <p:nvPr/>
-        </p:nvSpPr>
-        <p:spPr>
-          <a:xfrm>
-            <a:off x="658368" y="2226563"/>
-            <a:ext cx="475488" cy="201168"/>
-          </a:xfrm>
-          <a:prstGeom prst="rect">
-            <a:avLst/>
-          </a:prstGeom>
-          <a:noFill/>
-        </p:spPr>
-        <p:txBody>
-          <a:bodyPr wrap="square" lIns="45720" rIns="45720" tIns="36576" bIns="36576" anchor="t">
-            <a:spAutoFit/>
-          </a:bodyPr>
-          <a:lstStyle/>
-          <a:p>
-            <a:pPr algn="ctr">
-              <a:defRPr sz="1300" b="1">
+              <a:t>•  D1 · La defensa no es recitar — Vas a señalar, explicar, ejecutar y modificar una parte pequeña de tu propio H1.</a:t>
+            </a:r>
+          </a:p>
+          <a:p>
+            <a:pPr>
+              <a:spcAft>
+                <a:spcPts val="900"/>
+              </a:spcAft>
+              <a:defRPr sz="1900">
                 <a:solidFill>
                   <a:srgbClr val="FFFFFF"/>
                 </a:solidFill>
@@ -4267,114 +5559,15 @@
               </a:defRPr>
             </a:pPr>
             <a:r>
-              <a:t>2</a:t>
-            </a:r>
-          </a:p>
-        </p:txBody>
-      </p:sp>
-      <p:sp>
-        <p:nvSpPr>
-          <p:cNvPr id="13" name="TextBox 12"/>
-          <p:cNvSpPr txBox="1"/>
-          <p:nvPr/>
-        </p:nvSpPr>
-        <p:spPr>
-          <a:xfrm>
-            <a:off x="1389888" y="2107691"/>
-            <a:ext cx="10058400" cy="772668"/>
-          </a:xfrm>
-          <a:prstGeom prst="rect">
-            <a:avLst/>
-          </a:prstGeom>
-          <a:noFill/>
-        </p:spPr>
-        <p:txBody>
-          <a:bodyPr wrap="square" lIns="45720" rIns="45720" tIns="36576" bIns="36576" anchor="t">
-            <a:spAutoFit/>
-          </a:bodyPr>
-          <a:lstStyle/>
-          <a:p>
-            <a:pPr algn="l">
-              <a:defRPr sz="1400" b="0">
-                <a:solidFill>
-                  <a:srgbClr val="1C2330"/>
-                </a:solidFill>
-                <a:latin typeface="Aptos"/>
-              </a:defRPr>
-            </a:pPr>
-            <a:r>
-              <a:t>5–13 min — Explicación breve: Defender no es recitar; es explicar código propio y modificar algo simple.</a:t>
-            </a:r>
-          </a:p>
-        </p:txBody>
-      </p:sp>
-      <p:sp>
-        <p:nvSpPr>
-          <p:cNvPr id="14" name="Oval 13"/>
-          <p:cNvSpPr/>
-          <p:nvPr/>
-        </p:nvSpPr>
-        <p:spPr>
-          <a:xfrm>
-            <a:off x="658368" y="2971799"/>
-            <a:ext cx="475488" cy="475488"/>
-          </a:xfrm>
-          <a:prstGeom prst="ellipse">
-            <a:avLst/>
-          </a:prstGeom>
-          <a:solidFill>
-            <a:srgbClr val="2F5BA8"/>
-          </a:solidFill>
-          <a:ln>
-            <a:noFill/>
-          </a:ln>
-        </p:spPr>
-        <p:style>
-          <a:lnRef idx="1">
-            <a:schemeClr val="accent1"/>
-          </a:lnRef>
-          <a:fillRef idx="3">
-            <a:schemeClr val="accent1"/>
-          </a:fillRef>
-          <a:effectRef idx="2">
-            <a:schemeClr val="accent1"/>
-          </a:effectRef>
-          <a:fontRef idx="minor">
-            <a:schemeClr val="lt1"/>
-          </a:fontRef>
-        </p:style>
-        <p:txBody>
-          <a:bodyPr rtlCol="0" anchor="ctr"/>
-          <a:lstStyle/>
-          <a:p>
-            <a:pPr algn="ctr"/>
-          </a:p>
-        </p:txBody>
-      </p:sp>
-      <p:sp>
-        <p:nvSpPr>
-          <p:cNvPr id="15" name="TextBox 14"/>
-          <p:cNvSpPr txBox="1"/>
-          <p:nvPr/>
-        </p:nvSpPr>
-        <p:spPr>
-          <a:xfrm>
-            <a:off x="658368" y="3072383"/>
-            <a:ext cx="475488" cy="201168"/>
-          </a:xfrm>
-          <a:prstGeom prst="rect">
-            <a:avLst/>
-          </a:prstGeom>
-          <a:noFill/>
-        </p:spPr>
-        <p:txBody>
-          <a:bodyPr wrap="square" lIns="45720" rIns="45720" tIns="36576" bIns="36576" anchor="t">
-            <a:spAutoFit/>
-          </a:bodyPr>
-          <a:lstStyle/>
-          <a:p>
-            <a:pPr algn="ctr">
-              <a:defRPr sz="1300" b="1">
+              <a:t>•  D2 · Así es una respuesta defendible SEÑALA: “Esta línea lee el nombre” / “Esta variable guarda la edad” \| EXPLICA: tipo, decisión y efecto \| DEMUESTRA:</a:t>
+            </a:r>
+          </a:p>
+          <a:p>
+            <a:pPr>
+              <a:spcAft>
+                <a:spcPts val="900"/>
+              </a:spcAft>
+              <a:defRPr sz="1900">
                 <a:solidFill>
                   <a:srgbClr val="FFFFFF"/>
                 </a:solidFill>
@@ -4382,114 +5575,15 @@
               </a:defRPr>
             </a:pPr>
             <a:r>
-              <a:t>3</a:t>
-            </a:r>
-          </a:p>
-        </p:txBody>
-      </p:sp>
-      <p:sp>
-        <p:nvSpPr>
-          <p:cNvPr id="16" name="TextBox 15"/>
-          <p:cNvSpPr txBox="1"/>
-          <p:nvPr/>
-        </p:nvSpPr>
-        <p:spPr>
-          <a:xfrm>
-            <a:off x="1389888" y="2953511"/>
-            <a:ext cx="10058400" cy="772668"/>
-          </a:xfrm>
-          <a:prstGeom prst="rect">
-            <a:avLst/>
-          </a:prstGeom>
-          <a:noFill/>
-        </p:spPr>
-        <p:txBody>
-          <a:bodyPr wrap="square" lIns="45720" rIns="45720" tIns="36576" bIns="36576" anchor="t">
-            <a:spAutoFit/>
-          </a:bodyPr>
-          <a:lstStyle/>
-          <a:p>
-            <a:pPr algn="l">
-              <a:defRPr sz="1400" b="0">
-                <a:solidFill>
-                  <a:srgbClr val="1C2330"/>
-                </a:solidFill>
-                <a:latin typeface="Aptos"/>
-              </a:defRPr>
-            </a:pPr>
-            <a:r>
-              <a:t>13–18 min — Demostración o ejemplo: Preguntas modelo: qué es main, qué es una variable, qué hace Scanner.</a:t>
-            </a:r>
-          </a:p>
-        </p:txBody>
-      </p:sp>
-      <p:sp>
-        <p:nvSpPr>
-          <p:cNvPr id="17" name="Oval 16"/>
-          <p:cNvSpPr/>
-          <p:nvPr/>
-        </p:nvSpPr>
-        <p:spPr>
-          <a:xfrm>
-            <a:off x="658368" y="3817620"/>
-            <a:ext cx="475488" cy="475488"/>
-          </a:xfrm>
-          <a:prstGeom prst="ellipse">
-            <a:avLst/>
-          </a:prstGeom>
-          <a:solidFill>
-            <a:srgbClr val="2F5BA8"/>
-          </a:solidFill>
-          <a:ln>
-            <a:noFill/>
-          </a:ln>
-        </p:spPr>
-        <p:style>
-          <a:lnRef idx="1">
-            <a:schemeClr val="accent1"/>
-          </a:lnRef>
-          <a:fillRef idx="3">
-            <a:schemeClr val="accent1"/>
-          </a:fillRef>
-          <a:effectRef idx="2">
-            <a:schemeClr val="accent1"/>
-          </a:effectRef>
-          <a:fontRef idx="minor">
-            <a:schemeClr val="lt1"/>
-          </a:fontRef>
-        </p:style>
-        <p:txBody>
-          <a:bodyPr rtlCol="0" anchor="ctr"/>
-          <a:lstStyle/>
-          <a:p>
-            <a:pPr algn="ctr"/>
-          </a:p>
-        </p:txBody>
-      </p:sp>
-      <p:sp>
-        <p:nvSpPr>
-          <p:cNvPr id="18" name="TextBox 17"/>
-          <p:cNvSpPr txBox="1"/>
-          <p:nvPr/>
-        </p:nvSpPr>
-        <p:spPr>
-          <a:xfrm>
-            <a:off x="658368" y="3918204"/>
-            <a:ext cx="475488" cy="201168"/>
-          </a:xfrm>
-          <a:prstGeom prst="rect">
-            <a:avLst/>
-          </a:prstGeom>
-          <a:noFill/>
-        </p:spPr>
-        <p:txBody>
-          <a:bodyPr wrap="square" lIns="45720" rIns="45720" tIns="36576" bIns="36576" anchor="t">
-            <a:spAutoFit/>
-          </a:bodyPr>
-          <a:lstStyle/>
-          <a:p>
-            <a:pPr algn="ctr">
-              <a:defRPr sz="1300" b="1">
+              <a:t>•  ejecuta con una entrada y predice la salida</a:t>
+            </a:r>
+          </a:p>
+          <a:p>
+            <a:pPr>
+              <a:spcAft>
+                <a:spcPts val="900"/>
+              </a:spcAft>
+              <a:defRPr sz="1900">
                 <a:solidFill>
                   <a:srgbClr val="FFFFFF"/>
                 </a:solidFill>
@@ -4497,114 +5591,15 @@
               </a:defRPr>
             </a:pPr>
             <a:r>
-              <a:t>4</a:t>
-            </a:r>
-          </a:p>
-        </p:txBody>
-      </p:sp>
-      <p:sp>
-        <p:nvSpPr>
-          <p:cNvPr id="19" name="TextBox 18"/>
-          <p:cNvSpPr txBox="1"/>
-          <p:nvPr/>
-        </p:nvSpPr>
-        <p:spPr>
-          <a:xfrm>
-            <a:off x="1389888" y="3799332"/>
-            <a:ext cx="10058400" cy="772668"/>
-          </a:xfrm>
-          <a:prstGeom prst="rect">
-            <a:avLst/>
-          </a:prstGeom>
-          <a:noFill/>
-        </p:spPr>
-        <p:txBody>
-          <a:bodyPr wrap="square" lIns="45720" rIns="45720" tIns="36576" bIns="36576" anchor="t">
-            <a:spAutoFit/>
-          </a:bodyPr>
-          <a:lstStyle/>
-          <a:p>
-            <a:pPr algn="l">
-              <a:defRPr sz="1400" b="0">
-                <a:solidFill>
-                  <a:srgbClr val="1C2330"/>
-                </a:solidFill>
-                <a:latin typeface="Aptos"/>
-              </a:defRPr>
-            </a:pPr>
-            <a:r>
-              <a:t>18–35 min — Trabajo del alumnado: Defensa: main, variable, constante, Scanner, ejecución y límites de H1.</a:t>
-            </a:r>
-          </a:p>
-        </p:txBody>
-      </p:sp>
-      <p:sp>
-        <p:nvSpPr>
-          <p:cNvPr id="20" name="Oval 19"/>
-          <p:cNvSpPr/>
-          <p:nvPr/>
-        </p:nvSpPr>
-        <p:spPr>
-          <a:xfrm>
-            <a:off x="658368" y="4663440"/>
-            <a:ext cx="475488" cy="475488"/>
-          </a:xfrm>
-          <a:prstGeom prst="ellipse">
-            <a:avLst/>
-          </a:prstGeom>
-          <a:solidFill>
-            <a:srgbClr val="2F5BA8"/>
-          </a:solidFill>
-          <a:ln>
-            <a:noFill/>
-          </a:ln>
-        </p:spPr>
-        <p:style>
-          <a:lnRef idx="1">
-            <a:schemeClr val="accent1"/>
-          </a:lnRef>
-          <a:fillRef idx="3">
-            <a:schemeClr val="accent1"/>
-          </a:fillRef>
-          <a:effectRef idx="2">
-            <a:schemeClr val="accent1"/>
-          </a:effectRef>
-          <a:fontRef idx="minor">
-            <a:schemeClr val="lt1"/>
-          </a:fontRef>
-        </p:style>
-        <p:txBody>
-          <a:bodyPr rtlCol="0" anchor="ctr"/>
-          <a:lstStyle/>
-          <a:p>
-            <a:pPr algn="ctr"/>
-          </a:p>
-        </p:txBody>
-      </p:sp>
-      <p:sp>
-        <p:nvSpPr>
-          <p:cNvPr id="21" name="TextBox 20"/>
-          <p:cNvSpPr txBox="1"/>
-          <p:nvPr/>
-        </p:nvSpPr>
-        <p:spPr>
-          <a:xfrm>
-            <a:off x="658368" y="4764024"/>
-            <a:ext cx="475488" cy="201168"/>
-          </a:xfrm>
-          <a:prstGeom prst="rect">
-            <a:avLst/>
-          </a:prstGeom>
-          <a:noFill/>
-        </p:spPr>
-        <p:txBody>
-          <a:bodyPr wrap="square" lIns="45720" rIns="45720" tIns="36576" bIns="36576" anchor="t">
-            <a:spAutoFit/>
-          </a:bodyPr>
-          <a:lstStyle/>
-          <a:p>
-            <a:pPr algn="ctr">
-              <a:defRPr sz="1300" b="1">
+              <a:t>•  D3 · Ronda de defensa + ensayo por parejas — Mientras una persona defiende, el resto:</a:t>
+            </a:r>
+          </a:p>
+          <a:p>
+            <a:pPr>
+              <a:spcAft>
+                <a:spcPts val="900"/>
+              </a:spcAft>
+              <a:defRPr sz="1900">
                 <a:solidFill>
                   <a:srgbClr val="FFFFFF"/>
                 </a:solidFill>
@@ -4612,158 +5607,7 @@
               </a:defRPr>
             </a:pPr>
             <a:r>
-              <a:t>5</a:t>
-            </a:r>
-          </a:p>
-        </p:txBody>
-      </p:sp>
-      <p:sp>
-        <p:nvSpPr>
-          <p:cNvPr id="22" name="TextBox 21"/>
-          <p:cNvSpPr txBox="1"/>
-          <p:nvPr/>
-        </p:nvSpPr>
-        <p:spPr>
-          <a:xfrm>
-            <a:off x="1389888" y="4645152"/>
-            <a:ext cx="10058400" cy="772668"/>
-          </a:xfrm>
-          <a:prstGeom prst="rect">
-            <a:avLst/>
-          </a:prstGeom>
-          <a:noFill/>
-        </p:spPr>
-        <p:txBody>
-          <a:bodyPr wrap="square" lIns="45720" rIns="45720" tIns="36576" bIns="36576" anchor="t">
-            <a:spAutoFit/>
-          </a:bodyPr>
-          <a:lstStyle/>
-          <a:p>
-            <a:pPr algn="l">
-              <a:defRPr sz="1400" b="0">
-                <a:solidFill>
-                  <a:srgbClr val="1C2330"/>
-                </a:solidFill>
-                <a:latin typeface="Aptos"/>
-              </a:defRPr>
-            </a:pPr>
-            <a:r>
-              <a:t>35–40 min — Comprobar la evidencia con una explicación o prueba breve.</a:t>
-            </a:r>
-          </a:p>
-        </p:txBody>
-      </p:sp>
-      <p:sp>
-        <p:nvSpPr>
-          <p:cNvPr id="23" name="Oval 22"/>
-          <p:cNvSpPr/>
-          <p:nvPr/>
-        </p:nvSpPr>
-        <p:spPr>
-          <a:xfrm>
-            <a:off x="658368" y="5509259"/>
-            <a:ext cx="475488" cy="475488"/>
-          </a:xfrm>
-          <a:prstGeom prst="ellipse">
-            <a:avLst/>
-          </a:prstGeom>
-          <a:solidFill>
-            <a:srgbClr val="2F5BA8"/>
-          </a:solidFill>
-          <a:ln>
-            <a:noFill/>
-          </a:ln>
-        </p:spPr>
-        <p:style>
-          <a:lnRef idx="1">
-            <a:schemeClr val="accent1"/>
-          </a:lnRef>
-          <a:fillRef idx="3">
-            <a:schemeClr val="accent1"/>
-          </a:fillRef>
-          <a:effectRef idx="2">
-            <a:schemeClr val="accent1"/>
-          </a:effectRef>
-          <a:fontRef idx="minor">
-            <a:schemeClr val="lt1"/>
-          </a:fontRef>
-        </p:style>
-        <p:txBody>
-          <a:bodyPr rtlCol="0" anchor="ctr"/>
-          <a:lstStyle/>
-          <a:p>
-            <a:pPr algn="ctr"/>
-          </a:p>
-        </p:txBody>
-      </p:sp>
-      <p:sp>
-        <p:nvSpPr>
-          <p:cNvPr id="24" name="TextBox 23"/>
-          <p:cNvSpPr txBox="1"/>
-          <p:nvPr/>
-        </p:nvSpPr>
-        <p:spPr>
-          <a:xfrm>
-            <a:off x="658368" y="5609844"/>
-            <a:ext cx="475488" cy="201168"/>
-          </a:xfrm>
-          <a:prstGeom prst="rect">
-            <a:avLst/>
-          </a:prstGeom>
-          <a:noFill/>
-        </p:spPr>
-        <p:txBody>
-          <a:bodyPr wrap="square" lIns="45720" rIns="45720" tIns="36576" bIns="36576" anchor="t">
-            <a:spAutoFit/>
-          </a:bodyPr>
-          <a:lstStyle/>
-          <a:p>
-            <a:pPr algn="ctr">
-              <a:defRPr sz="1300" b="1">
-                <a:solidFill>
-                  <a:srgbClr val="FFFFFF"/>
-                </a:solidFill>
-                <a:latin typeface="Aptos"/>
-              </a:defRPr>
-            </a:pPr>
-            <a:r>
-              <a:t>6</a:t>
-            </a:r>
-          </a:p>
-        </p:txBody>
-      </p:sp>
-      <p:sp>
-        <p:nvSpPr>
-          <p:cNvPr id="25" name="TextBox 24"/>
-          <p:cNvSpPr txBox="1"/>
-          <p:nvPr/>
-        </p:nvSpPr>
-        <p:spPr>
-          <a:xfrm>
-            <a:off x="1389888" y="5490972"/>
-            <a:ext cx="10058400" cy="772668"/>
-          </a:xfrm>
-          <a:prstGeom prst="rect">
-            <a:avLst/>
-          </a:prstGeom>
-          <a:noFill/>
-        </p:spPr>
-        <p:txBody>
-          <a:bodyPr wrap="square" lIns="45720" rIns="45720" tIns="36576" bIns="36576" anchor="t">
-            <a:spAutoFit/>
-          </a:bodyPr>
-          <a:lstStyle/>
-          <a:p>
-            <a:pPr algn="l">
-              <a:defRPr sz="1400" b="0">
-                <a:solidFill>
-                  <a:srgbClr val="1C2330"/>
-                </a:solidFill>
-                <a:latin typeface="Aptos"/>
-              </a:defRPr>
-            </a:pPr>
-            <a:r>
-              <a:t>40–45 min — Cierre: Decidir qué debe mejorar cada alumno antes de H2.</a:t>
+              <a:t>•  • ensaya preguntas</a:t>
             </a:r>
           </a:p>
         </p:txBody>
@@ -4903,7 +5747,7 @@
               </a:defRPr>
             </a:pPr>
             <a:r>
-              <a:t>COMPRENDER Y TRANSFERIR</a:t>
+              <a:t>OBSERVAR ANTES DE ACTUAR</a:t>
             </a:r>
           </a:p>
         </p:txBody>
@@ -4939,7 +5783,7 @@
               </a:defRPr>
             </a:pPr>
             <a:r>
-              <a:t>Idea clave y puesta en práctica</a:t>
+              <a:t>Ejemplo o demostración · 2</a:t>
             </a:r>
           </a:p>
         </p:txBody>
@@ -5018,7 +5862,7 @@
               </a:defRPr>
             </a:pPr>
             <a:r>
-              <a:t>MiniJarvis · 1.º DAW · Sesión 215 · H1</a:t>
+              <a:t>MiniJarvis · 1.º DAW · Sesión 215 · H1 — Primer MiniJarvis</a:t>
             </a:r>
           </a:p>
         </p:txBody>
@@ -5031,19 +5875,17 @@
         </p:nvSpPr>
         <p:spPr>
           <a:xfrm>
-            <a:off x="621792" y="1325880"/>
-            <a:ext cx="5285232" cy="4736592"/>
+            <a:off x="621792" y="1353312"/>
+            <a:ext cx="10927080" cy="4526280"/>
           </a:xfrm>
           <a:prstGeom prst="roundRect">
             <a:avLst/>
           </a:prstGeom>
           <a:solidFill>
-            <a:srgbClr val="FFFFFF"/>
+            <a:srgbClr val="121824"/>
           </a:solidFill>
           <a:ln>
-            <a:solidFill>
-              <a:srgbClr val="E5E9EF"/>
-            </a:solidFill>
+            <a:noFill/>
           </a:ln>
         </p:spPr>
         <p:style>
@@ -5077,7 +5919,7 @@
         <p:spPr>
           <a:xfrm>
             <a:off x="932688" y="1627632"/>
-            <a:ext cx="2011680" cy="329184"/>
+            <a:ext cx="2057400" cy="411480"/>
           </a:xfrm>
           <a:prstGeom prst="rect">
             <a:avLst/>
@@ -5099,7 +5941,7 @@
               </a:defRPr>
             </a:pPr>
             <a:r>
-              <a:t>IDEA CLAVE</a:t>
+              <a:t>DEMOSTRACIÓN</a:t>
             </a:r>
           </a:p>
         </p:txBody>
@@ -5112,8 +5954,8 @@
         </p:nvSpPr>
         <p:spPr>
           <a:xfrm>
-            <a:off x="932688" y="2176272"/>
-            <a:ext cx="4617720" cy="3429000"/>
+            <a:off x="932688" y="2212848"/>
+            <a:ext cx="9966960" cy="3246120"/>
           </a:xfrm>
           <a:prstGeom prst="rect">
             <a:avLst/>
@@ -5130,125 +5972,7 @@
               <a:spcAft>
                 <a:spcPts val="900"/>
               </a:spcAft>
-              <a:defRPr sz="2300">
-                <a:solidFill>
-                  <a:srgbClr val="1C2330"/>
-                </a:solidFill>
-                <a:latin typeface="Aptos"/>
-              </a:defRPr>
-            </a:pPr>
-            <a:r>
-              <a:t>•  Cómo se defiende una entrega técnica breve.</a:t>
-            </a:r>
-          </a:p>
-        </p:txBody>
-      </p:sp>
-      <p:sp>
-        <p:nvSpPr>
-          <p:cNvPr id="11" name="Rounded Rectangle 10"/>
-          <p:cNvSpPr/>
-          <p:nvPr/>
-        </p:nvSpPr>
-        <p:spPr>
-          <a:xfrm>
-            <a:off x="6172200" y="1325880"/>
-            <a:ext cx="5394960" cy="4736592"/>
-          </a:xfrm>
-          <a:prstGeom prst="roundRect">
-            <a:avLst/>
-          </a:prstGeom>
-          <a:solidFill>
-            <a:srgbClr val="121824"/>
-          </a:solidFill>
-          <a:ln>
-            <a:noFill/>
-          </a:ln>
-        </p:spPr>
-        <p:style>
-          <a:lnRef idx="1">
-            <a:schemeClr val="accent1"/>
-          </a:lnRef>
-          <a:fillRef idx="3">
-            <a:schemeClr val="accent1"/>
-          </a:fillRef>
-          <a:effectRef idx="2">
-            <a:schemeClr val="accent1"/>
-          </a:effectRef>
-          <a:fontRef idx="minor">
-            <a:schemeClr val="lt1"/>
-          </a:fontRef>
-        </p:style>
-        <p:txBody>
-          <a:bodyPr rtlCol="0" anchor="ctr"/>
-          <a:lstStyle/>
-          <a:p>
-            <a:pPr algn="ctr"/>
-          </a:p>
-        </p:txBody>
-      </p:sp>
-      <p:sp>
-        <p:nvSpPr>
-          <p:cNvPr id="12" name="TextBox 11"/>
-          <p:cNvSpPr txBox="1"/>
-          <p:nvPr/>
-        </p:nvSpPr>
-        <p:spPr>
-          <a:xfrm>
-            <a:off x="6492240" y="1627632"/>
-            <a:ext cx="2194560" cy="329184"/>
-          </a:xfrm>
-          <a:prstGeom prst="rect">
-            <a:avLst/>
-          </a:prstGeom>
-          <a:noFill/>
-        </p:spPr>
-        <p:txBody>
-          <a:bodyPr wrap="square" lIns="45720" rIns="45720" tIns="36576" bIns="36576" anchor="t">
-            <a:spAutoFit/>
-          </a:bodyPr>
-          <a:lstStyle/>
-          <a:p>
-            <a:pPr algn="l">
-              <a:defRPr sz="1300" b="1">
-                <a:solidFill>
-                  <a:srgbClr val="2F5BA8"/>
-                </a:solidFill>
-                <a:latin typeface="Aptos"/>
-              </a:defRPr>
-            </a:pPr>
-            <a:r>
-              <a:t>EN PRÁCTICA</a:t>
-            </a:r>
-          </a:p>
-        </p:txBody>
-      </p:sp>
-      <p:sp>
-        <p:nvSpPr>
-          <p:cNvPr id="13" name="TextBox 12"/>
-          <p:cNvSpPr txBox="1"/>
-          <p:nvPr/>
-        </p:nvSpPr>
-        <p:spPr>
-          <a:xfrm>
-            <a:off x="6492240" y="2176272"/>
-            <a:ext cx="4617720" cy="3429000"/>
-          </a:xfrm>
-          <a:prstGeom prst="rect">
-            <a:avLst/>
-          </a:prstGeom>
-          <a:noFill/>
-        </p:spPr>
-        <p:txBody>
-          <a:bodyPr wrap="square" lIns="73152" rIns="45720" tIns="36576">
-            <a:spAutoFit/>
-          </a:bodyPr>
-          <a:lstStyle/>
-          <a:p>
-            <a:pPr>
-              <a:spcAft>
-                <a:spcPts val="900"/>
-              </a:spcAft>
-              <a:defRPr sz="2300">
+              <a:defRPr sz="2200">
                 <a:solidFill>
                   <a:srgbClr val="FFFFFF"/>
                 </a:solidFill>
@@ -5256,7 +5980,55 @@
               </a:defRPr>
             </a:pPr>
             <a:r>
-              <a:t>•  Preguntas modelo: qué es main, qué es una variable, qué hace Scanner.</a:t>
+              <a:t>•  • revisa el diario y la selección de evidencias del Site</a:t>
+            </a:r>
+          </a:p>
+          <a:p>
+            <a:pPr>
+              <a:spcAft>
+                <a:spcPts val="900"/>
+              </a:spcAft>
+              <a:defRPr sz="2200">
+                <a:solidFill>
+                  <a:srgbClr val="FFFFFF"/>
+                </a:solidFill>
+                <a:latin typeface="Aptos"/>
+              </a:defRPr>
+            </a:pPr>
+            <a:r>
+              <a:t>•  • comprueba enlaces</a:t>
+            </a:r>
+          </a:p>
+          <a:p>
+            <a:pPr>
+              <a:spcAft>
+                <a:spcPts val="900"/>
+              </a:spcAft>
+              <a:defRPr sz="2200">
+                <a:solidFill>
+                  <a:srgbClr val="FFFFFF"/>
+                </a:solidFill>
+                <a:latin typeface="Aptos"/>
+              </a:defRPr>
+            </a:pPr>
+            <a:r>
+              <a:t>•  • prepara una modificación pequeña</a:t>
+            </a:r>
+          </a:p>
+          <a:p>
+            <a:pPr>
+              <a:spcAft>
+                <a:spcPts val="900"/>
+              </a:spcAft>
+              <a:defRPr sz="2200">
+                <a:solidFill>
+                  <a:srgbClr val="FFFFFF"/>
+                </a:solidFill>
+                <a:latin typeface="Aptos"/>
+              </a:defRPr>
+            </a:pPr>
+            <a:r>
+              <a:t>•  D4 · Si aparece una laguna, se recupera la evidencia concreta — No hace falta repetir todo H1.</a:t>
             </a:r>
           </a:p>
         </p:txBody>
@@ -5432,7 +6204,7 @@
               </a:defRPr>
             </a:pPr>
             <a:r>
-              <a:t>Actividad central</a:t>
+              <a:t>Actividad central · 1</a:t>
             </a:r>
           </a:p>
         </p:txBody>
@@ -5511,7 +6283,7 @@
               </a:defRPr>
             </a:pPr>
             <a:r>
-              <a:t>MiniJarvis · 1.º DAW · Sesión 215 · H1</a:t>
+              <a:t>MiniJarvis · 1.º DAW · Sesión 215 · H1 — Primer MiniJarvis</a:t>
             </a:r>
           </a:p>
         </p:txBody>
@@ -5525,7 +6297,7 @@
         <p:spPr>
           <a:xfrm>
             <a:off x="658368" y="1307592"/>
-            <a:ext cx="10835640" cy="2226564"/>
+            <a:ext cx="10835640" cy="1049274"/>
           </a:xfrm>
           <a:prstGeom prst="roundRect">
             <a:avLst/>
@@ -5606,7 +6378,7 @@
         <p:spPr>
           <a:xfrm>
             <a:off x="1664208" y="1417319"/>
-            <a:ext cx="9464040" cy="2007108"/>
+            <a:ext cx="9464040" cy="829818"/>
           </a:xfrm>
           <a:prstGeom prst="rect">
             <a:avLst/>
@@ -5628,7 +6400,7 @@
               </a:defRPr>
             </a:pPr>
             <a:r>
-              <a:t>Defensa por parejas antes de defensa docente.</a:t>
+              <a:t>Predice antes de ejecutar cuando haya código.</a:t>
             </a:r>
           </a:p>
         </p:txBody>
@@ -5641,8 +6413,8 @@
         </p:nvSpPr>
         <p:spPr>
           <a:xfrm>
-            <a:off x="658368" y="3776472"/>
-            <a:ext cx="10835640" cy="2226564"/>
+            <a:off x="658368" y="2542032"/>
+            <a:ext cx="10835640" cy="1049274"/>
           </a:xfrm>
           <a:prstGeom prst="roundRect">
             <a:avLst/>
@@ -5686,7 +6458,7 @@
         </p:nvSpPr>
         <p:spPr>
           <a:xfrm>
-            <a:off x="850392" y="3922776"/>
+            <a:off x="850392" y="2688336"/>
             <a:ext cx="685800" cy="384048"/>
           </a:xfrm>
           <a:prstGeom prst="rect">
@@ -5722,8 +6494,8 @@
         </p:nvSpPr>
         <p:spPr>
           <a:xfrm>
-            <a:off x="1664208" y="3886200"/>
-            <a:ext cx="9464040" cy="2007108"/>
+            <a:off x="1664208" y="2651760"/>
+            <a:ext cx="9464040" cy="829818"/>
           </a:xfrm>
           <a:prstGeom prst="rect">
             <a:avLst/>
@@ -5745,7 +6517,241 @@
               </a:defRPr>
             </a:pPr>
             <a:r>
-              <a:t>Comprueba y registra la evidencia: Plantilla de defensa H1 y portfolio individual.</a:t>
+              <a:t>Realiza la micropráctica o modificación prevista.</a:t>
+            </a:r>
+          </a:p>
+        </p:txBody>
+      </p:sp>
+      <p:sp>
+        <p:nvSpPr>
+          <p:cNvPr id="14" name="Rounded Rectangle 13"/>
+          <p:cNvSpPr/>
+          <p:nvPr/>
+        </p:nvSpPr>
+        <p:spPr>
+          <a:xfrm>
+            <a:off x="658368" y="3776472"/>
+            <a:ext cx="10835640" cy="1049274"/>
+          </a:xfrm>
+          <a:prstGeom prst="roundRect">
+            <a:avLst/>
+          </a:prstGeom>
+          <a:solidFill>
+            <a:srgbClr val="FFFFFF"/>
+          </a:solidFill>
+          <a:ln>
+            <a:solidFill>
+              <a:srgbClr val="E5E9EF"/>
+            </a:solidFill>
+          </a:ln>
+        </p:spPr>
+        <p:style>
+          <a:lnRef idx="1">
+            <a:schemeClr val="accent1"/>
+          </a:lnRef>
+          <a:fillRef idx="3">
+            <a:schemeClr val="accent1"/>
+          </a:fillRef>
+          <a:effectRef idx="2">
+            <a:schemeClr val="accent1"/>
+          </a:effectRef>
+          <a:fontRef idx="minor">
+            <a:schemeClr val="lt1"/>
+          </a:fontRef>
+        </p:style>
+        <p:txBody>
+          <a:bodyPr rtlCol="0" anchor="ctr"/>
+          <a:lstStyle/>
+          <a:p>
+            <a:pPr algn="ctr"/>
+          </a:p>
+        </p:txBody>
+      </p:sp>
+      <p:sp>
+        <p:nvSpPr>
+          <p:cNvPr id="15" name="TextBox 14"/>
+          <p:cNvSpPr txBox="1"/>
+          <p:nvPr/>
+        </p:nvSpPr>
+        <p:spPr>
+          <a:xfrm>
+            <a:off x="850392" y="3922776"/>
+            <a:ext cx="685800" cy="384048"/>
+          </a:xfrm>
+          <a:prstGeom prst="rect">
+            <a:avLst/>
+          </a:prstGeom>
+          <a:noFill/>
+        </p:spPr>
+        <p:txBody>
+          <a:bodyPr wrap="square" lIns="45720" rIns="45720" tIns="36576" bIns="36576" anchor="t">
+            <a:spAutoFit/>
+          </a:bodyPr>
+          <a:lstStyle/>
+          <a:p>
+            <a:pPr algn="l">
+              <a:defRPr sz="1200" b="1">
+                <a:solidFill>
+                  <a:srgbClr val="2F5BA8"/>
+                </a:solidFill>
+                <a:latin typeface="Aptos"/>
+              </a:defRPr>
+            </a:pPr>
+            <a:r>
+              <a:t>PASO 3</a:t>
+            </a:r>
+          </a:p>
+        </p:txBody>
+      </p:sp>
+      <p:sp>
+        <p:nvSpPr>
+          <p:cNvPr id="16" name="TextBox 15"/>
+          <p:cNvSpPr txBox="1"/>
+          <p:nvPr/>
+        </p:nvSpPr>
+        <p:spPr>
+          <a:xfrm>
+            <a:off x="1664208" y="3886200"/>
+            <a:ext cx="9464040" cy="829818"/>
+          </a:xfrm>
+          <a:prstGeom prst="rect">
+            <a:avLst/>
+          </a:prstGeom>
+          <a:noFill/>
+        </p:spPr>
+        <p:txBody>
+          <a:bodyPr wrap="square" lIns="45720" rIns="45720" tIns="36576" bIns="36576" anchor="t">
+            <a:spAutoFit/>
+          </a:bodyPr>
+          <a:lstStyle/>
+          <a:p>
+            <a:pPr algn="l">
+              <a:defRPr sz="2000" b="0">
+                <a:solidFill>
+                  <a:srgbClr val="1C2330"/>
+                </a:solidFill>
+                <a:latin typeface="Aptos"/>
+              </a:defRPr>
+            </a:pPr>
+            <a:r>
+              <a:t>Prueba el caso normal y, cuando exista una decisión o conversión, también el caso alternativo o erróneo.</a:t>
+            </a:r>
+          </a:p>
+        </p:txBody>
+      </p:sp>
+      <p:sp>
+        <p:nvSpPr>
+          <p:cNvPr id="17" name="Rounded Rectangle 16"/>
+          <p:cNvSpPr/>
+          <p:nvPr/>
+        </p:nvSpPr>
+        <p:spPr>
+          <a:xfrm>
+            <a:off x="658368" y="5010912"/>
+            <a:ext cx="10835640" cy="1049274"/>
+          </a:xfrm>
+          <a:prstGeom prst="roundRect">
+            <a:avLst/>
+          </a:prstGeom>
+          <a:solidFill>
+            <a:srgbClr val="FFFFFF"/>
+          </a:solidFill>
+          <a:ln>
+            <a:solidFill>
+              <a:srgbClr val="E5E9EF"/>
+            </a:solidFill>
+          </a:ln>
+        </p:spPr>
+        <p:style>
+          <a:lnRef idx="1">
+            <a:schemeClr val="accent1"/>
+          </a:lnRef>
+          <a:fillRef idx="3">
+            <a:schemeClr val="accent1"/>
+          </a:fillRef>
+          <a:effectRef idx="2">
+            <a:schemeClr val="accent1"/>
+          </a:effectRef>
+          <a:fontRef idx="minor">
+            <a:schemeClr val="lt1"/>
+          </a:fontRef>
+        </p:style>
+        <p:txBody>
+          <a:bodyPr rtlCol="0" anchor="ctr"/>
+          <a:lstStyle/>
+          <a:p>
+            <a:pPr algn="ctr"/>
+          </a:p>
+        </p:txBody>
+      </p:sp>
+      <p:sp>
+        <p:nvSpPr>
+          <p:cNvPr id="18" name="TextBox 17"/>
+          <p:cNvSpPr txBox="1"/>
+          <p:nvPr/>
+        </p:nvSpPr>
+        <p:spPr>
+          <a:xfrm>
+            <a:off x="850392" y="5157216"/>
+            <a:ext cx="685800" cy="384048"/>
+          </a:xfrm>
+          <a:prstGeom prst="rect">
+            <a:avLst/>
+          </a:prstGeom>
+          <a:noFill/>
+        </p:spPr>
+        <p:txBody>
+          <a:bodyPr wrap="square" lIns="45720" rIns="45720" tIns="36576" bIns="36576" anchor="t">
+            <a:spAutoFit/>
+          </a:bodyPr>
+          <a:lstStyle/>
+          <a:p>
+            <a:pPr algn="l">
+              <a:defRPr sz="1200" b="1">
+                <a:solidFill>
+                  <a:srgbClr val="2F5BA8"/>
+                </a:solidFill>
+                <a:latin typeface="Aptos"/>
+              </a:defRPr>
+            </a:pPr>
+            <a:r>
+              <a:t>PASO 4</a:t>
+            </a:r>
+          </a:p>
+        </p:txBody>
+      </p:sp>
+      <p:sp>
+        <p:nvSpPr>
+          <p:cNvPr id="19" name="TextBox 18"/>
+          <p:cNvSpPr txBox="1"/>
+          <p:nvPr/>
+        </p:nvSpPr>
+        <p:spPr>
+          <a:xfrm>
+            <a:off x="1664208" y="5120640"/>
+            <a:ext cx="9464040" cy="829818"/>
+          </a:xfrm>
+          <a:prstGeom prst="rect">
+            <a:avLst/>
+          </a:prstGeom>
+          <a:noFill/>
+        </p:spPr>
+        <p:txBody>
+          <a:bodyPr wrap="square" lIns="45720" rIns="45720" tIns="36576" bIns="36576" anchor="t">
+            <a:spAutoFit/>
+          </a:bodyPr>
+          <a:lstStyle/>
+          <a:p>
+            <a:pPr algn="l">
+              <a:defRPr sz="2000" b="0">
+                <a:solidFill>
+                  <a:srgbClr val="1C2330"/>
+                </a:solidFill>
+                <a:latin typeface="Aptos"/>
+              </a:defRPr>
+            </a:pPr>
+            <a:r>
+              <a:t>Conserva el código o resultado en el repositorio o espacio indicado.</a:t>
             </a:r>
           </a:p>
         </p:txBody>
@@ -5885,7 +6891,7 @@
               </a:defRPr>
             </a:pPr>
             <a:r>
-              <a:t>COMPROBAR</a:t>
+              <a:t>APLICAR Y DECIDIR</a:t>
             </a:r>
           </a:p>
         </p:txBody>
@@ -5921,7 +6927,7 @@
               </a:defRPr>
             </a:pPr>
             <a:r>
-              <a:t>Evidencia y comprobación</a:t>
+              <a:t>Actividad central · 2</a:t>
             </a:r>
           </a:p>
         </p:txBody>
@@ -6000,7 +7006,7 @@
               </a:defRPr>
             </a:pPr>
             <a:r>
-              <a:t>MiniJarvis · 1.º DAW · Sesión 215 · H1</a:t>
+              <a:t>MiniJarvis · 1.º DAW · Sesión 215 · H1 — Primer MiniJarvis</a:t>
             </a:r>
           </a:p>
         </p:txBody>
@@ -6013,8 +7019,8 @@
         </p:nvSpPr>
         <p:spPr>
           <a:xfrm>
-            <a:off x="713232" y="1298448"/>
-            <a:ext cx="420624" cy="420624"/>
+            <a:off x="658368" y="1307592"/>
+            <a:ext cx="10835640" cy="2226564"/>
           </a:xfrm>
           <a:prstGeom prst="roundRect">
             <a:avLst/>
@@ -6024,7 +7030,7 @@
           </a:solidFill>
           <a:ln>
             <a:solidFill>
-              <a:srgbClr val="2F5BA8"/>
+              <a:srgbClr val="E5E9EF"/>
             </a:solidFill>
           </a:ln>
         </p:spPr>
@@ -6058,8 +7064,8 @@
         </p:nvSpPr>
         <p:spPr>
           <a:xfrm>
-            <a:off x="1389888" y="1280160"/>
-            <a:ext cx="9829800" cy="960120"/>
+            <a:off x="850392" y="1453895"/>
+            <a:ext cx="685800" cy="384048"/>
           </a:xfrm>
           <a:prstGeom prst="rect">
             <a:avLst/>
@@ -6073,7 +7079,43 @@
           <a:lstStyle/>
           <a:p>
             <a:pPr algn="l">
-              <a:defRPr sz="1900" b="0">
+              <a:defRPr sz="1200" b="1">
+                <a:solidFill>
+                  <a:srgbClr val="2F5BA8"/>
+                </a:solidFill>
+                <a:latin typeface="Aptos"/>
+              </a:defRPr>
+            </a:pPr>
+            <a:r>
+              <a:t>PASO 6</a:t>
+            </a:r>
+          </a:p>
+        </p:txBody>
+      </p:sp>
+      <p:sp>
+        <p:nvSpPr>
+          <p:cNvPr id="10" name="TextBox 9"/>
+          <p:cNvSpPr txBox="1"/>
+          <p:nvPr/>
+        </p:nvSpPr>
+        <p:spPr>
+          <a:xfrm>
+            <a:off x="1664208" y="1417319"/>
+            <a:ext cx="9464040" cy="2007108"/>
+          </a:xfrm>
+          <a:prstGeom prst="rect">
+            <a:avLst/>
+          </a:prstGeom>
+          <a:noFill/>
+        </p:spPr>
+        <p:txBody>
+          <a:bodyPr wrap="square" lIns="45720" rIns="45720" tIns="36576" bIns="36576" anchor="t">
+            <a:spAutoFit/>
+          </a:bodyPr>
+          <a:lstStyle/>
+          <a:p>
+            <a:pPr algn="l">
+              <a:defRPr sz="2000" b="0">
                 <a:solidFill>
                   <a:srgbClr val="1C2330"/>
                 </a:solidFill>
@@ -6081,21 +7123,21 @@
               </a:defRPr>
             </a:pPr>
             <a:r>
-              <a:t>He producido o actualizado: Plantilla de defensa H1 y portfolio individual.</a:t>
-            </a:r>
-          </a:p>
-        </p:txBody>
-      </p:sp>
-      <p:sp>
-        <p:nvSpPr>
-          <p:cNvPr id="10" name="Rounded Rectangle 9"/>
+              <a:t>Registra una sola entrada en el diario individual; no crees un informe paralelo.</a:t>
+            </a:r>
+          </a:p>
+        </p:txBody>
+      </p:sp>
+      <p:sp>
+        <p:nvSpPr>
+          <p:cNvPr id="11" name="Rounded Rectangle 10"/>
           <p:cNvSpPr/>
           <p:nvPr/>
         </p:nvSpPr>
         <p:spPr>
           <a:xfrm>
-            <a:off x="713232" y="2295144"/>
-            <a:ext cx="420624" cy="420624"/>
+            <a:off x="658368" y="3776472"/>
+            <a:ext cx="10835640" cy="2226564"/>
           </a:xfrm>
           <a:prstGeom prst="roundRect">
             <a:avLst/>
@@ -6105,7 +7147,7 @@
           </a:solidFill>
           <a:ln>
             <a:solidFill>
-              <a:srgbClr val="2F5BA8"/>
+              <a:srgbClr val="E5E9EF"/>
             </a:solidFill>
           </a:ln>
         </p:spPr>
@@ -6133,14 +7175,14 @@
       </p:sp>
       <p:sp>
         <p:nvSpPr>
-          <p:cNvPr id="11" name="TextBox 10"/>
+          <p:cNvPr id="12" name="TextBox 11"/>
           <p:cNvSpPr txBox="1"/>
           <p:nvPr/>
         </p:nvSpPr>
         <p:spPr>
           <a:xfrm>
-            <a:off x="1389888" y="2276856"/>
-            <a:ext cx="9829800" cy="960120"/>
+            <a:off x="850392" y="3922776"/>
+            <a:ext cx="685800" cy="384048"/>
           </a:xfrm>
           <a:prstGeom prst="rect">
             <a:avLst/>
@@ -6154,7 +7196,43 @@
           <a:lstStyle/>
           <a:p>
             <a:pPr algn="l">
-              <a:defRPr sz="1900" b="0">
+              <a:defRPr sz="1200" b="1">
+                <a:solidFill>
+                  <a:srgbClr val="2F5BA8"/>
+                </a:solidFill>
+                <a:latin typeface="Aptos"/>
+              </a:defRPr>
+            </a:pPr>
+            <a:r>
+              <a:t>PASO 7</a:t>
+            </a:r>
+          </a:p>
+        </p:txBody>
+      </p:sp>
+      <p:sp>
+        <p:nvSpPr>
+          <p:cNvPr id="13" name="TextBox 12"/>
+          <p:cNvSpPr txBox="1"/>
+          <p:nvPr/>
+        </p:nvSpPr>
+        <p:spPr>
+          <a:xfrm>
+            <a:off x="1664208" y="3886200"/>
+            <a:ext cx="9464040" cy="2007108"/>
+          </a:xfrm>
+          <a:prstGeom prst="rect">
+            <a:avLst/>
+          </a:prstGeom>
+          <a:noFill/>
+        </p:spPr>
+        <p:txBody>
+          <a:bodyPr wrap="square" lIns="45720" rIns="45720" tIns="36576" bIns="36576" anchor="t">
+            <a:spAutoFit/>
+          </a:bodyPr>
+          <a:lstStyle/>
+          <a:p>
+            <a:pPr algn="l">
+              <a:defRPr sz="2000" b="0">
                 <a:solidFill>
                   <a:srgbClr val="1C2330"/>
                 </a:solidFill>
@@ -6162,250 +7240,7 @@
               </a:defRPr>
             </a:pPr>
             <a:r>
-              <a:t>Puedo señalar dónde está.</a:t>
-            </a:r>
-          </a:p>
-        </p:txBody>
-      </p:sp>
-      <p:sp>
-        <p:nvSpPr>
-          <p:cNvPr id="12" name="Rounded Rectangle 11"/>
-          <p:cNvSpPr/>
-          <p:nvPr/>
-        </p:nvSpPr>
-        <p:spPr>
-          <a:xfrm>
-            <a:off x="713232" y="3291839"/>
-            <a:ext cx="420624" cy="420624"/>
-          </a:xfrm>
-          <a:prstGeom prst="roundRect">
-            <a:avLst/>
-          </a:prstGeom>
-          <a:solidFill>
-            <a:srgbClr val="FFFFFF"/>
-          </a:solidFill>
-          <a:ln>
-            <a:solidFill>
-              <a:srgbClr val="2F5BA8"/>
-            </a:solidFill>
-          </a:ln>
-        </p:spPr>
-        <p:style>
-          <a:lnRef idx="1">
-            <a:schemeClr val="accent1"/>
-          </a:lnRef>
-          <a:fillRef idx="3">
-            <a:schemeClr val="accent1"/>
-          </a:fillRef>
-          <a:effectRef idx="2">
-            <a:schemeClr val="accent1"/>
-          </a:effectRef>
-          <a:fontRef idx="minor">
-            <a:schemeClr val="lt1"/>
-          </a:fontRef>
-        </p:style>
-        <p:txBody>
-          <a:bodyPr rtlCol="0" anchor="ctr"/>
-          <a:lstStyle/>
-          <a:p>
-            <a:pPr algn="ctr"/>
-          </a:p>
-        </p:txBody>
-      </p:sp>
-      <p:sp>
-        <p:nvSpPr>
-          <p:cNvPr id="13" name="TextBox 12"/>
-          <p:cNvSpPr txBox="1"/>
-          <p:nvPr/>
-        </p:nvSpPr>
-        <p:spPr>
-          <a:xfrm>
-            <a:off x="1389888" y="3273551"/>
-            <a:ext cx="9829800" cy="960120"/>
-          </a:xfrm>
-          <a:prstGeom prst="rect">
-            <a:avLst/>
-          </a:prstGeom>
-          <a:noFill/>
-        </p:spPr>
-        <p:txBody>
-          <a:bodyPr wrap="square" lIns="45720" rIns="45720" tIns="36576" bIns="36576" anchor="t">
-            <a:spAutoFit/>
-          </a:bodyPr>
-          <a:lstStyle/>
-          <a:p>
-            <a:pPr algn="l">
-              <a:defRPr sz="1900" b="0">
-                <a:solidFill>
-                  <a:srgbClr val="1C2330"/>
-                </a:solidFill>
-                <a:latin typeface="Aptos"/>
-              </a:defRPr>
-            </a:pPr>
-            <a:r>
-              <a:t>Puedo explicar una decisión tomada.</a:t>
-            </a:r>
-          </a:p>
-        </p:txBody>
-      </p:sp>
-      <p:sp>
-        <p:nvSpPr>
-          <p:cNvPr id="14" name="Rounded Rectangle 13"/>
-          <p:cNvSpPr/>
-          <p:nvPr/>
-        </p:nvSpPr>
-        <p:spPr>
-          <a:xfrm>
-            <a:off x="713232" y="4288536"/>
-            <a:ext cx="420624" cy="420624"/>
-          </a:xfrm>
-          <a:prstGeom prst="roundRect">
-            <a:avLst/>
-          </a:prstGeom>
-          <a:solidFill>
-            <a:srgbClr val="FFFFFF"/>
-          </a:solidFill>
-          <a:ln>
-            <a:solidFill>
-              <a:srgbClr val="2F5BA8"/>
-            </a:solidFill>
-          </a:ln>
-        </p:spPr>
-        <p:style>
-          <a:lnRef idx="1">
-            <a:schemeClr val="accent1"/>
-          </a:lnRef>
-          <a:fillRef idx="3">
-            <a:schemeClr val="accent1"/>
-          </a:fillRef>
-          <a:effectRef idx="2">
-            <a:schemeClr val="accent1"/>
-          </a:effectRef>
-          <a:fontRef idx="minor">
-            <a:schemeClr val="lt1"/>
-          </a:fontRef>
-        </p:style>
-        <p:txBody>
-          <a:bodyPr rtlCol="0" anchor="ctr"/>
-          <a:lstStyle/>
-          <a:p>
-            <a:pPr algn="ctr"/>
-          </a:p>
-        </p:txBody>
-      </p:sp>
-      <p:sp>
-        <p:nvSpPr>
-          <p:cNvPr id="15" name="TextBox 14"/>
-          <p:cNvSpPr txBox="1"/>
-          <p:nvPr/>
-        </p:nvSpPr>
-        <p:spPr>
-          <a:xfrm>
-            <a:off x="1389888" y="4270248"/>
-            <a:ext cx="9829800" cy="960120"/>
-          </a:xfrm>
-          <a:prstGeom prst="rect">
-            <a:avLst/>
-          </a:prstGeom>
-          <a:noFill/>
-        </p:spPr>
-        <p:txBody>
-          <a:bodyPr wrap="square" lIns="45720" rIns="45720" tIns="36576" bIns="36576" anchor="t">
-            <a:spAutoFit/>
-          </a:bodyPr>
-          <a:lstStyle/>
-          <a:p>
-            <a:pPr algn="l">
-              <a:defRPr sz="1900" b="0">
-                <a:solidFill>
-                  <a:srgbClr val="1C2330"/>
-                </a:solidFill>
-                <a:latin typeface="Aptos"/>
-              </a:defRPr>
-            </a:pPr>
-            <a:r>
-              <a:t>Puedo mostrar una prueba o comprobación.</a:t>
-            </a:r>
-          </a:p>
-        </p:txBody>
-      </p:sp>
-      <p:sp>
-        <p:nvSpPr>
-          <p:cNvPr id="16" name="Rounded Rectangle 15"/>
-          <p:cNvSpPr/>
-          <p:nvPr/>
-        </p:nvSpPr>
-        <p:spPr>
-          <a:xfrm>
-            <a:off x="713232" y="5285231"/>
-            <a:ext cx="420624" cy="420624"/>
-          </a:xfrm>
-          <a:prstGeom prst="roundRect">
-            <a:avLst/>
-          </a:prstGeom>
-          <a:solidFill>
-            <a:srgbClr val="FFFFFF"/>
-          </a:solidFill>
-          <a:ln>
-            <a:solidFill>
-              <a:srgbClr val="2F5BA8"/>
-            </a:solidFill>
-          </a:ln>
-        </p:spPr>
-        <p:style>
-          <a:lnRef idx="1">
-            <a:schemeClr val="accent1"/>
-          </a:lnRef>
-          <a:fillRef idx="3">
-            <a:schemeClr val="accent1"/>
-          </a:fillRef>
-          <a:effectRef idx="2">
-            <a:schemeClr val="accent1"/>
-          </a:effectRef>
-          <a:fontRef idx="minor">
-            <a:schemeClr val="lt1"/>
-          </a:fontRef>
-        </p:style>
-        <p:txBody>
-          <a:bodyPr rtlCol="0" anchor="ctr"/>
-          <a:lstStyle/>
-          <a:p>
-            <a:pPr algn="ctr"/>
-          </a:p>
-        </p:txBody>
-      </p:sp>
-      <p:sp>
-        <p:nvSpPr>
-          <p:cNvPr id="17" name="TextBox 16"/>
-          <p:cNvSpPr txBox="1"/>
-          <p:nvPr/>
-        </p:nvSpPr>
-        <p:spPr>
-          <a:xfrm>
-            <a:off x="1389888" y="5266944"/>
-            <a:ext cx="9829800" cy="960120"/>
-          </a:xfrm>
-          <a:prstGeom prst="rect">
-            <a:avLst/>
-          </a:prstGeom>
-          <a:noFill/>
-        </p:spPr>
-        <p:txBody>
-          <a:bodyPr wrap="square" lIns="45720" rIns="45720" tIns="36576" bIns="36576" anchor="t">
-            <a:spAutoFit/>
-          </a:bodyPr>
-          <a:lstStyle/>
-          <a:p>
-            <a:pPr algn="l">
-              <a:defRPr sz="1900" b="0">
-                <a:solidFill>
-                  <a:srgbClr val="1C2330"/>
-                </a:solidFill>
-                <a:latin typeface="Aptos"/>
-              </a:defRPr>
-            </a:pPr>
-            <a:r>
-              <a:t>He registrado mi aportación individual si el trabajo era de equipo.</a:t>
+              <a:t>¿Qué puedes señalar, explicar y probar al terminar este checkpoint?</a:t>
             </a:r>
           </a:p>
         </p:txBody>
@@ -6545,7 +7380,7 @@
               </a:defRPr>
             </a:pPr>
             <a:r>
-              <a:t>LÍMITES QUE PROTEGEN EL APRENDIZAJE</a:t>
+              <a:t>COMPROBAR</a:t>
             </a:r>
           </a:p>
         </p:txBody>
@@ -6581,7 +7416,7 @@
               </a:defRPr>
             </a:pPr>
             <a:r>
-              <a:t>Seguridad y uso responsable</a:t>
+              <a:t>Evidencia y comprobación</a:t>
             </a:r>
           </a:p>
         </p:txBody>
@@ -6660,7 +7495,7 @@
               </a:defRPr>
             </a:pPr>
             <a:r>
-              <a:t>MiniJarvis · 1.º DAW · Sesión 215 · H1</a:t>
+              <a:t>MiniJarvis · 1.º DAW · Sesión 215 · H1 — Primer MiniJarvis</a:t>
             </a:r>
           </a:p>
         </p:txBody>
@@ -6673,8 +7508,8 @@
         </p:nvSpPr>
         <p:spPr>
           <a:xfrm>
-            <a:off x="621792" y="1298448"/>
-            <a:ext cx="5230368" cy="2176272"/>
+            <a:off x="713232" y="1298448"/>
+            <a:ext cx="420624" cy="420624"/>
           </a:xfrm>
           <a:prstGeom prst="roundRect">
             <a:avLst/>
@@ -6684,7 +7519,7 @@
           </a:solidFill>
           <a:ln>
             <a:solidFill>
-              <a:srgbClr val="E5E9EF"/>
+              <a:srgbClr val="2F5BA8"/>
             </a:solidFill>
           </a:ln>
         </p:spPr>
@@ -6712,57 +7547,14 @@
       </p:sp>
       <p:sp>
         <p:nvSpPr>
-          <p:cNvPr id="9" name="Rounded Rectangle 8"/>
-          <p:cNvSpPr/>
-          <p:nvPr/>
-        </p:nvSpPr>
-        <p:spPr>
-          <a:xfrm>
-            <a:off x="841248" y="1527048"/>
-            <a:ext cx="237744" cy="1719072"/>
-          </a:xfrm>
-          <a:prstGeom prst="roundRect">
-            <a:avLst/>
-          </a:prstGeom>
-          <a:solidFill>
-            <a:srgbClr val="247E5C"/>
-          </a:solidFill>
-          <a:ln>
-            <a:noFill/>
-          </a:ln>
-        </p:spPr>
-        <p:style>
-          <a:lnRef idx="1">
-            <a:schemeClr val="accent1"/>
-          </a:lnRef>
-          <a:fillRef idx="3">
-            <a:schemeClr val="accent1"/>
-          </a:fillRef>
-          <a:effectRef idx="2">
-            <a:schemeClr val="accent1"/>
-          </a:effectRef>
-          <a:fontRef idx="minor">
-            <a:schemeClr val="lt1"/>
-          </a:fontRef>
-        </p:style>
-        <p:txBody>
-          <a:bodyPr rtlCol="0" anchor="ctr"/>
-          <a:lstStyle/>
-          <a:p>
-            <a:pPr algn="ctr"/>
-          </a:p>
-        </p:txBody>
-      </p:sp>
-      <p:sp>
-        <p:nvSpPr>
-          <p:cNvPr id="10" name="TextBox 9"/>
+          <p:cNvPr id="9" name="TextBox 8"/>
           <p:cNvSpPr txBox="1"/>
           <p:nvPr/>
         </p:nvSpPr>
         <p:spPr>
           <a:xfrm>
-            <a:off x="1280160" y="1527048"/>
-            <a:ext cx="4224528" cy="1783080"/>
+            <a:off x="1389888" y="1280160"/>
+            <a:ext cx="9829800" cy="1624584"/>
           </a:xfrm>
           <a:prstGeom prst="rect">
             <a:avLst/>
@@ -6784,21 +7576,21 @@
               </a:defRPr>
             </a:pPr>
             <a:r>
-              <a:t>Trabaja únicamente con datos ficticios.</a:t>
-            </a:r>
-          </a:p>
-        </p:txBody>
-      </p:sp>
-      <p:sp>
-        <p:nvSpPr>
-          <p:cNvPr id="11" name="Rounded Rectangle 10"/>
+              <a:t>conserva el código o la prueba en el lugar indicado por la sesión;</a:t>
+            </a:r>
+          </a:p>
+        </p:txBody>
+      </p:sp>
+      <p:sp>
+        <p:nvSpPr>
+          <p:cNvPr id="10" name="Rounded Rectangle 9"/>
           <p:cNvSpPr/>
           <p:nvPr/>
         </p:nvSpPr>
         <p:spPr>
           <a:xfrm>
-            <a:off x="6126479" y="1298448"/>
-            <a:ext cx="5230368" cy="2176272"/>
+            <a:off x="713232" y="2959607"/>
+            <a:ext cx="420624" cy="420624"/>
           </a:xfrm>
           <a:prstGeom prst="roundRect">
             <a:avLst/>
@@ -6808,7 +7600,7 @@
           </a:solidFill>
           <a:ln>
             <a:solidFill>
-              <a:srgbClr val="E5E9EF"/>
+              <a:srgbClr val="2F5BA8"/>
             </a:solidFill>
           </a:ln>
         </p:spPr>
@@ -6836,57 +7628,14 @@
       </p:sp>
       <p:sp>
         <p:nvSpPr>
-          <p:cNvPr id="12" name="Rounded Rectangle 11"/>
-          <p:cNvSpPr/>
-          <p:nvPr/>
-        </p:nvSpPr>
-        <p:spPr>
-          <a:xfrm>
-            <a:off x="6345936" y="1527048"/>
-            <a:ext cx="237744" cy="1719072"/>
-          </a:xfrm>
-          <a:prstGeom prst="roundRect">
-            <a:avLst/>
-          </a:prstGeom>
-          <a:solidFill>
-            <a:srgbClr val="C07020"/>
-          </a:solidFill>
-          <a:ln>
-            <a:noFill/>
-          </a:ln>
-        </p:spPr>
-        <p:style>
-          <a:lnRef idx="1">
-            <a:schemeClr val="accent1"/>
-          </a:lnRef>
-          <a:fillRef idx="3">
-            <a:schemeClr val="accent1"/>
-          </a:fillRef>
-          <a:effectRef idx="2">
-            <a:schemeClr val="accent1"/>
-          </a:effectRef>
-          <a:fontRef idx="minor">
-            <a:schemeClr val="lt1"/>
-          </a:fontRef>
-        </p:style>
-        <p:txBody>
-          <a:bodyPr rtlCol="0" anchor="ctr"/>
-          <a:lstStyle/>
-          <a:p>
-            <a:pPr algn="ctr"/>
-          </a:p>
-        </p:txBody>
-      </p:sp>
-      <p:sp>
-        <p:nvSpPr>
-          <p:cNvPr id="13" name="TextBox 12"/>
+          <p:cNvPr id="11" name="TextBox 10"/>
           <p:cNvSpPr txBox="1"/>
           <p:nvPr/>
         </p:nvSpPr>
         <p:spPr>
           <a:xfrm>
-            <a:off x="6784847" y="1527048"/>
-            <a:ext cx="4224528" cy="1783080"/>
+            <a:off x="1389888" y="2941319"/>
+            <a:ext cx="9829800" cy="1624584"/>
           </a:xfrm>
           <a:prstGeom prst="rect">
             <a:avLst/>
@@ -6908,21 +7657,21 @@
               </a:defRPr>
             </a:pPr>
             <a:r>
-              <a:t>No escribas contraseñas, tokens, claves API ni datos personales.</a:t>
-            </a:r>
-          </a:p>
-        </p:txBody>
-      </p:sp>
-      <p:sp>
-        <p:nvSpPr>
-          <p:cNvPr id="14" name="Rounded Rectangle 13"/>
+              <a:t>añade una sola entrada al diario individual con prueba, bloqueo y siguiente paso;</a:t>
+            </a:r>
+          </a:p>
+        </p:txBody>
+      </p:sp>
+      <p:sp>
+        <p:nvSpPr>
+          <p:cNvPr id="12" name="Rounded Rectangle 11"/>
           <p:cNvSpPr/>
           <p:nvPr/>
         </p:nvSpPr>
         <p:spPr>
           <a:xfrm>
-            <a:off x="621792" y="3675887"/>
-            <a:ext cx="5230368" cy="2176272"/>
+            <a:off x="713232" y="4620767"/>
+            <a:ext cx="420624" cy="420624"/>
           </a:xfrm>
           <a:prstGeom prst="roundRect">
             <a:avLst/>
@@ -6932,7 +7681,7 @@
           </a:solidFill>
           <a:ln>
             <a:solidFill>
-              <a:srgbClr val="E5E9EF"/>
+              <a:srgbClr val="2F5BA8"/>
             </a:solidFill>
           </a:ln>
         </p:spPr>
@@ -6960,57 +7709,14 @@
       </p:sp>
       <p:sp>
         <p:nvSpPr>
-          <p:cNvPr id="15" name="Rounded Rectangle 14"/>
-          <p:cNvSpPr/>
-          <p:nvPr/>
-        </p:nvSpPr>
-        <p:spPr>
-          <a:xfrm>
-            <a:off x="841248" y="3904487"/>
-            <a:ext cx="237744" cy="1719072"/>
-          </a:xfrm>
-          <a:prstGeom prst="roundRect">
-            <a:avLst/>
-          </a:prstGeom>
-          <a:solidFill>
-            <a:srgbClr val="B13A3A"/>
-          </a:solidFill>
-          <a:ln>
-            <a:noFill/>
-          </a:ln>
-        </p:spPr>
-        <p:style>
-          <a:lnRef idx="1">
-            <a:schemeClr val="accent1"/>
-          </a:lnRef>
-          <a:fillRef idx="3">
-            <a:schemeClr val="accent1"/>
-          </a:fillRef>
-          <a:effectRef idx="2">
-            <a:schemeClr val="accent1"/>
-          </a:effectRef>
-          <a:fontRef idx="minor">
-            <a:schemeClr val="lt1"/>
-          </a:fontRef>
-        </p:style>
-        <p:txBody>
-          <a:bodyPr rtlCol="0" anchor="ctr"/>
-          <a:lstStyle/>
-          <a:p>
-            <a:pPr algn="ctr"/>
-          </a:p>
-        </p:txBody>
-      </p:sp>
-      <p:sp>
-        <p:nvSpPr>
-          <p:cNvPr id="16" name="TextBox 15"/>
+          <p:cNvPr id="13" name="TextBox 12"/>
           <p:cNvSpPr txBox="1"/>
           <p:nvPr/>
         </p:nvSpPr>
         <p:spPr>
           <a:xfrm>
-            <a:off x="1280160" y="3904487"/>
-            <a:ext cx="4224528" cy="1783080"/>
+            <a:off x="1389888" y="4602480"/>
+            <a:ext cx="9829800" cy="1624584"/>
           </a:xfrm>
           <a:prstGeom prst="rect">
             <a:avLst/>
@@ -7032,131 +7738,7 @@
               </a:defRPr>
             </a:pPr>
             <a:r>
-              <a:t>Si utilizas IA en un uso permitido, registra qué pediste, qué recibiste, qué cambiaste y cómo lo comprobaste.</a:t>
-            </a:r>
-          </a:p>
-        </p:txBody>
-      </p:sp>
-      <p:sp>
-        <p:nvSpPr>
-          <p:cNvPr id="17" name="Rounded Rectangle 16"/>
-          <p:cNvSpPr/>
-          <p:nvPr/>
-        </p:nvSpPr>
-        <p:spPr>
-          <a:xfrm>
-            <a:off x="6126479" y="3675887"/>
-            <a:ext cx="5230368" cy="2176272"/>
-          </a:xfrm>
-          <a:prstGeom prst="roundRect">
-            <a:avLst/>
-          </a:prstGeom>
-          <a:solidFill>
-            <a:srgbClr val="FFFFFF"/>
-          </a:solidFill>
-          <a:ln>
-            <a:solidFill>
-              <a:srgbClr val="E5E9EF"/>
-            </a:solidFill>
-          </a:ln>
-        </p:spPr>
-        <p:style>
-          <a:lnRef idx="1">
-            <a:schemeClr val="accent1"/>
-          </a:lnRef>
-          <a:fillRef idx="3">
-            <a:schemeClr val="accent1"/>
-          </a:fillRef>
-          <a:effectRef idx="2">
-            <a:schemeClr val="accent1"/>
-          </a:effectRef>
-          <a:fontRef idx="minor">
-            <a:schemeClr val="lt1"/>
-          </a:fontRef>
-        </p:style>
-        <p:txBody>
-          <a:bodyPr rtlCol="0" anchor="ctr"/>
-          <a:lstStyle/>
-          <a:p>
-            <a:pPr algn="ctr"/>
-          </a:p>
-        </p:txBody>
-      </p:sp>
-      <p:sp>
-        <p:nvSpPr>
-          <p:cNvPr id="18" name="Rounded Rectangle 17"/>
-          <p:cNvSpPr/>
-          <p:nvPr/>
-        </p:nvSpPr>
-        <p:spPr>
-          <a:xfrm>
-            <a:off x="6345936" y="3904487"/>
-            <a:ext cx="237744" cy="1719072"/>
-          </a:xfrm>
-          <a:prstGeom prst="roundRect">
-            <a:avLst/>
-          </a:prstGeom>
-          <a:solidFill>
-            <a:srgbClr val="2F5BA8"/>
-          </a:solidFill>
-          <a:ln>
-            <a:noFill/>
-          </a:ln>
-        </p:spPr>
-        <p:style>
-          <a:lnRef idx="1">
-            <a:schemeClr val="accent1"/>
-          </a:lnRef>
-          <a:fillRef idx="3">
-            <a:schemeClr val="accent1"/>
-          </a:fillRef>
-          <a:effectRef idx="2">
-            <a:schemeClr val="accent1"/>
-          </a:effectRef>
-          <a:fontRef idx="minor">
-            <a:schemeClr val="lt1"/>
-          </a:fontRef>
-        </p:style>
-        <p:txBody>
-          <a:bodyPr rtlCol="0" anchor="ctr"/>
-          <a:lstStyle/>
-          <a:p>
-            <a:pPr algn="ctr"/>
-          </a:p>
-        </p:txBody>
-      </p:sp>
-      <p:sp>
-        <p:nvSpPr>
-          <p:cNvPr id="19" name="TextBox 18"/>
-          <p:cNvSpPr txBox="1"/>
-          <p:nvPr/>
-        </p:nvSpPr>
-        <p:spPr>
-          <a:xfrm>
-            <a:off x="6784847" y="3904487"/>
-            <a:ext cx="4224528" cy="1783080"/>
-          </a:xfrm>
-          <a:prstGeom prst="rect">
-            <a:avLst/>
-          </a:prstGeom>
-          <a:noFill/>
-        </p:spPr>
-        <p:txBody>
-          <a:bodyPr wrap="square" lIns="45720" rIns="45720" tIns="36576" bIns="36576" anchor="t">
-            <a:spAutoFit/>
-          </a:bodyPr>
-          <a:lstStyle/>
-          <a:p>
-            <a:pPr algn="l">
-              <a:defRPr sz="1900" b="0">
-                <a:solidFill>
-                  <a:srgbClr val="1C2330"/>
-                </a:solidFill>
-                <a:latin typeface="Aptos"/>
-              </a:defRPr>
-            </a:pPr>
-            <a:r>
-              <a:t>Los ejemplos de Laura solo se consultan después del intento propio.</a:t>
+              <a:t>no copies la misma reflexión en otro documento; el Site personal seleccionará evidencias al cerrar H1.</a:t>
             </a:r>
           </a:p>
         </p:txBody>
@@ -7296,7 +7878,7 @@
               </a:defRPr>
             </a:pPr>
             <a:r>
-              <a:t>EXPLICAR Y DEFENDER</a:t>
+              <a:t>LÍMITES QUE PROTEGEN EL APRENDIZAJE</a:t>
             </a:r>
           </a:p>
         </p:txBody>
@@ -7332,7 +7914,7 @@
               </a:defRPr>
             </a:pPr>
             <a:r>
-              <a:t>Cierre y defensa</a:t>
+              <a:t>Seguridad y uso responsable</a:t>
             </a:r>
           </a:p>
         </p:txBody>
@@ -7411,7 +7993,510 @@
               </a:defRPr>
             </a:pPr>
             <a:r>
-              <a:t>MiniJarvis · 1.º DAW · Sesión 215 · H1</a:t>
+              <a:t>MiniJarvis · 1.º DAW · Sesión 215 · H1 — Primer MiniJarvis</a:t>
+            </a:r>
+          </a:p>
+        </p:txBody>
+      </p:sp>
+      <p:sp>
+        <p:nvSpPr>
+          <p:cNvPr id="8" name="Rounded Rectangle 7"/>
+          <p:cNvSpPr/>
+          <p:nvPr/>
+        </p:nvSpPr>
+        <p:spPr>
+          <a:xfrm>
+            <a:off x="621792" y="1298448"/>
+            <a:ext cx="5230368" cy="4553712"/>
+          </a:xfrm>
+          <a:prstGeom prst="roundRect">
+            <a:avLst/>
+          </a:prstGeom>
+          <a:solidFill>
+            <a:srgbClr val="FFFFFF"/>
+          </a:solidFill>
+          <a:ln>
+            <a:solidFill>
+              <a:srgbClr val="E5E9EF"/>
+            </a:solidFill>
+          </a:ln>
+        </p:spPr>
+        <p:style>
+          <a:lnRef idx="1">
+            <a:schemeClr val="accent1"/>
+          </a:lnRef>
+          <a:fillRef idx="3">
+            <a:schemeClr val="accent1"/>
+          </a:fillRef>
+          <a:effectRef idx="2">
+            <a:schemeClr val="accent1"/>
+          </a:effectRef>
+          <a:fontRef idx="minor">
+            <a:schemeClr val="lt1"/>
+          </a:fontRef>
+        </p:style>
+        <p:txBody>
+          <a:bodyPr rtlCol="0" anchor="ctr"/>
+          <a:lstStyle/>
+          <a:p>
+            <a:pPr algn="ctr"/>
+          </a:p>
+        </p:txBody>
+      </p:sp>
+      <p:sp>
+        <p:nvSpPr>
+          <p:cNvPr id="9" name="Rounded Rectangle 8"/>
+          <p:cNvSpPr/>
+          <p:nvPr/>
+        </p:nvSpPr>
+        <p:spPr>
+          <a:xfrm>
+            <a:off x="841248" y="1527048"/>
+            <a:ext cx="237744" cy="4096512"/>
+          </a:xfrm>
+          <a:prstGeom prst="roundRect">
+            <a:avLst/>
+          </a:prstGeom>
+          <a:solidFill>
+            <a:srgbClr val="247E5C"/>
+          </a:solidFill>
+          <a:ln>
+            <a:noFill/>
+          </a:ln>
+        </p:spPr>
+        <p:style>
+          <a:lnRef idx="1">
+            <a:schemeClr val="accent1"/>
+          </a:lnRef>
+          <a:fillRef idx="3">
+            <a:schemeClr val="accent1"/>
+          </a:fillRef>
+          <a:effectRef idx="2">
+            <a:schemeClr val="accent1"/>
+          </a:effectRef>
+          <a:fontRef idx="minor">
+            <a:schemeClr val="lt1"/>
+          </a:fontRef>
+        </p:style>
+        <p:txBody>
+          <a:bodyPr rtlCol="0" anchor="ctr"/>
+          <a:lstStyle/>
+          <a:p>
+            <a:pPr algn="ctr"/>
+          </a:p>
+        </p:txBody>
+      </p:sp>
+      <p:sp>
+        <p:nvSpPr>
+          <p:cNvPr id="10" name="TextBox 9"/>
+          <p:cNvSpPr txBox="1"/>
+          <p:nvPr/>
+        </p:nvSpPr>
+        <p:spPr>
+          <a:xfrm>
+            <a:off x="1280160" y="1527048"/>
+            <a:ext cx="4224528" cy="4160520"/>
+          </a:xfrm>
+          <a:prstGeom prst="rect">
+            <a:avLst/>
+          </a:prstGeom>
+          <a:noFill/>
+        </p:spPr>
+        <p:txBody>
+          <a:bodyPr wrap="square" lIns="45720" rIns="45720" tIns="36576" bIns="36576" anchor="t">
+            <a:spAutoFit/>
+          </a:bodyPr>
+          <a:lstStyle/>
+          <a:p>
+            <a:pPr algn="l">
+              <a:defRPr sz="1900" b="0">
+                <a:solidFill>
+                  <a:srgbClr val="1C2330"/>
+                </a:solidFill>
+                <a:latin typeface="Aptos"/>
+              </a:defRPr>
+            </a:pPr>
+            <a:r>
+              <a:t>Usa datos ficticios y no publiques credenciales ni información personal.</a:t>
+            </a:r>
+          </a:p>
+        </p:txBody>
+      </p:sp>
+      <p:sp>
+        <p:nvSpPr>
+          <p:cNvPr id="11" name="Rounded Rectangle 10"/>
+          <p:cNvSpPr/>
+          <p:nvPr/>
+        </p:nvSpPr>
+        <p:spPr>
+          <a:xfrm>
+            <a:off x="6126479" y="1298448"/>
+            <a:ext cx="5230368" cy="4553712"/>
+          </a:xfrm>
+          <a:prstGeom prst="roundRect">
+            <a:avLst/>
+          </a:prstGeom>
+          <a:solidFill>
+            <a:srgbClr val="FFFFFF"/>
+          </a:solidFill>
+          <a:ln>
+            <a:solidFill>
+              <a:srgbClr val="E5E9EF"/>
+            </a:solidFill>
+          </a:ln>
+        </p:spPr>
+        <p:style>
+          <a:lnRef idx="1">
+            <a:schemeClr val="accent1"/>
+          </a:lnRef>
+          <a:fillRef idx="3">
+            <a:schemeClr val="accent1"/>
+          </a:fillRef>
+          <a:effectRef idx="2">
+            <a:schemeClr val="accent1"/>
+          </a:effectRef>
+          <a:fontRef idx="minor">
+            <a:schemeClr val="lt1"/>
+          </a:fontRef>
+        </p:style>
+        <p:txBody>
+          <a:bodyPr rtlCol="0" anchor="ctr"/>
+          <a:lstStyle/>
+          <a:p>
+            <a:pPr algn="ctr"/>
+          </a:p>
+        </p:txBody>
+      </p:sp>
+      <p:sp>
+        <p:nvSpPr>
+          <p:cNvPr id="12" name="Rounded Rectangle 11"/>
+          <p:cNvSpPr/>
+          <p:nvPr/>
+        </p:nvSpPr>
+        <p:spPr>
+          <a:xfrm>
+            <a:off x="6345936" y="1527048"/>
+            <a:ext cx="237744" cy="4096512"/>
+          </a:xfrm>
+          <a:prstGeom prst="roundRect">
+            <a:avLst/>
+          </a:prstGeom>
+          <a:solidFill>
+            <a:srgbClr val="C07020"/>
+          </a:solidFill>
+          <a:ln>
+            <a:noFill/>
+          </a:ln>
+        </p:spPr>
+        <p:style>
+          <a:lnRef idx="1">
+            <a:schemeClr val="accent1"/>
+          </a:lnRef>
+          <a:fillRef idx="3">
+            <a:schemeClr val="accent1"/>
+          </a:fillRef>
+          <a:effectRef idx="2">
+            <a:schemeClr val="accent1"/>
+          </a:effectRef>
+          <a:fontRef idx="minor">
+            <a:schemeClr val="lt1"/>
+          </a:fontRef>
+        </p:style>
+        <p:txBody>
+          <a:bodyPr rtlCol="0" anchor="ctr"/>
+          <a:lstStyle/>
+          <a:p>
+            <a:pPr algn="ctr"/>
+          </a:p>
+        </p:txBody>
+      </p:sp>
+      <p:sp>
+        <p:nvSpPr>
+          <p:cNvPr id="13" name="TextBox 12"/>
+          <p:cNvSpPr txBox="1"/>
+          <p:nvPr/>
+        </p:nvSpPr>
+        <p:spPr>
+          <a:xfrm>
+            <a:off x="6784847" y="1527048"/>
+            <a:ext cx="4224528" cy="4160520"/>
+          </a:xfrm>
+          <a:prstGeom prst="rect">
+            <a:avLst/>
+          </a:prstGeom>
+          <a:noFill/>
+        </p:spPr>
+        <p:txBody>
+          <a:bodyPr wrap="square" lIns="45720" rIns="45720" tIns="36576" bIns="36576" anchor="t">
+            <a:spAutoFit/>
+          </a:bodyPr>
+          <a:lstStyle/>
+          <a:p>
+            <a:pPr algn="l">
+              <a:defRPr sz="1900" b="0">
+                <a:solidFill>
+                  <a:srgbClr val="1C2330"/>
+                </a:solidFill>
+                <a:latin typeface="Aptos"/>
+              </a:defRPr>
+            </a:pPr>
+            <a:r>
+              <a:t>Si utilizas IA de forma sustantiva, registra propósito, propuesta, cambios propios y validación en el registro de IA del hito.</a:t>
+            </a:r>
+          </a:p>
+        </p:txBody>
+      </p:sp>
+    </p:spTree>
+  </p:cSld>
+  <p:clrMapOvr>
+    <a:masterClrMapping/>
+  </p:clrMapOvr>
+</p:sld>
+</file>
+
+<file path=ppt/slides/slide9.xml><?xml version="1.0" encoding="utf-8"?>
+<p:sld xmlns:a="http://schemas.openxmlformats.org/drawingml/2006/main" xmlns:p="http://schemas.openxmlformats.org/presentationml/2006/main" xmlns:r="http://schemas.openxmlformats.org/officeDocument/2006/relationships">
+  <p:cSld>
+    <p:spTree>
+      <p:nvGrpSpPr>
+        <p:cNvPr id="1" name=""/>
+        <p:cNvGrpSpPr/>
+        <p:nvPr/>
+      </p:nvGrpSpPr>
+      <p:grpSpPr/>
+      <p:sp>
+        <p:nvSpPr>
+          <p:cNvPr id="2" name="Rectangle 1"/>
+          <p:cNvSpPr/>
+          <p:nvPr/>
+        </p:nvSpPr>
+        <p:spPr>
+          <a:xfrm>
+            <a:off x="0" y="0"/>
+            <a:ext cx="12191695" cy="6858000"/>
+          </a:xfrm>
+          <a:prstGeom prst="rect">
+            <a:avLst/>
+          </a:prstGeom>
+          <a:solidFill>
+            <a:srgbClr val="F9F7F2"/>
+          </a:solidFill>
+          <a:ln>
+            <a:noFill/>
+          </a:ln>
+        </p:spPr>
+        <p:style>
+          <a:lnRef idx="1">
+            <a:schemeClr val="accent1"/>
+          </a:lnRef>
+          <a:fillRef idx="3">
+            <a:schemeClr val="accent1"/>
+          </a:fillRef>
+          <a:effectRef idx="2">
+            <a:schemeClr val="accent1"/>
+          </a:effectRef>
+          <a:fontRef idx="minor">
+            <a:schemeClr val="lt1"/>
+          </a:fontRef>
+        </p:style>
+        <p:txBody>
+          <a:bodyPr rtlCol="0" anchor="ctr"/>
+          <a:lstStyle/>
+          <a:p>
+            <a:pPr algn="ctr"/>
+          </a:p>
+        </p:txBody>
+      </p:sp>
+      <p:sp>
+        <p:nvSpPr>
+          <p:cNvPr id="3" name="Rectangle 2"/>
+          <p:cNvSpPr/>
+          <p:nvPr/>
+        </p:nvSpPr>
+        <p:spPr>
+          <a:xfrm>
+            <a:off x="0" y="0"/>
+            <a:ext cx="164592" cy="6858000"/>
+          </a:xfrm>
+          <a:prstGeom prst="rect">
+            <a:avLst/>
+          </a:prstGeom>
+          <a:solidFill>
+            <a:srgbClr val="2F5BA8"/>
+          </a:solidFill>
+          <a:ln>
+            <a:noFill/>
+          </a:ln>
+        </p:spPr>
+        <p:style>
+          <a:lnRef idx="1">
+            <a:schemeClr val="accent1"/>
+          </a:lnRef>
+          <a:fillRef idx="3">
+            <a:schemeClr val="accent1"/>
+          </a:fillRef>
+          <a:effectRef idx="2">
+            <a:schemeClr val="accent1"/>
+          </a:effectRef>
+          <a:fontRef idx="minor">
+            <a:schemeClr val="lt1"/>
+          </a:fontRef>
+        </p:style>
+        <p:txBody>
+          <a:bodyPr rtlCol="0" anchor="ctr"/>
+          <a:lstStyle/>
+          <a:p>
+            <a:pPr algn="ctr"/>
+          </a:p>
+        </p:txBody>
+      </p:sp>
+      <p:sp>
+        <p:nvSpPr>
+          <p:cNvPr id="4" name="TextBox 3"/>
+          <p:cNvSpPr txBox="1"/>
+          <p:nvPr/>
+        </p:nvSpPr>
+        <p:spPr>
+          <a:xfrm>
+            <a:off x="502920" y="274320"/>
+            <a:ext cx="5486400" cy="256032"/>
+          </a:xfrm>
+          <a:prstGeom prst="rect">
+            <a:avLst/>
+          </a:prstGeom>
+          <a:noFill/>
+        </p:spPr>
+        <p:txBody>
+          <a:bodyPr wrap="square" lIns="45720" rIns="45720" tIns="36576" bIns="36576" anchor="t">
+            <a:spAutoFit/>
+          </a:bodyPr>
+          <a:lstStyle/>
+          <a:p>
+            <a:pPr algn="l">
+              <a:defRPr sz="1000" b="1">
+                <a:solidFill>
+                  <a:srgbClr val="2F5BA8"/>
+                </a:solidFill>
+                <a:latin typeface="Aptos"/>
+              </a:defRPr>
+            </a:pPr>
+            <a:r>
+              <a:t>EXPLICAR Y DEFENDER</a:t>
+            </a:r>
+          </a:p>
+        </p:txBody>
+      </p:sp>
+      <p:sp>
+        <p:nvSpPr>
+          <p:cNvPr id="5" name="TextBox 4"/>
+          <p:cNvSpPr txBox="1"/>
+          <p:nvPr/>
+        </p:nvSpPr>
+        <p:spPr>
+          <a:xfrm>
+            <a:off x="502920" y="603504"/>
+            <a:ext cx="11064240" cy="530352"/>
+          </a:xfrm>
+          <a:prstGeom prst="rect">
+            <a:avLst/>
+          </a:prstGeom>
+          <a:noFill/>
+        </p:spPr>
+        <p:txBody>
+          <a:bodyPr wrap="square" lIns="45720" rIns="45720" tIns="36576" bIns="36576" anchor="t">
+            <a:spAutoFit/>
+          </a:bodyPr>
+          <a:lstStyle/>
+          <a:p>
+            <a:pPr algn="l">
+              <a:defRPr sz="2800" b="1">
+                <a:solidFill>
+                  <a:srgbClr val="1C2330"/>
+                </a:solidFill>
+                <a:latin typeface="Aptos"/>
+              </a:defRPr>
+            </a:pPr>
+            <a:r>
+              <a:t>Cierre y defensa</a:t>
+            </a:r>
+          </a:p>
+        </p:txBody>
+      </p:sp>
+      <p:sp>
+        <p:nvSpPr>
+          <p:cNvPr id="6" name="Rectangle 5"/>
+          <p:cNvSpPr/>
+          <p:nvPr/>
+        </p:nvSpPr>
+        <p:spPr>
+          <a:xfrm>
+            <a:off x="0" y="6601968"/>
+            <a:ext cx="12191695" cy="256032"/>
+          </a:xfrm>
+          <a:prstGeom prst="rect">
+            <a:avLst/>
+          </a:prstGeom>
+          <a:solidFill>
+            <a:srgbClr val="2F5BA8"/>
+          </a:solidFill>
+          <a:ln>
+            <a:noFill/>
+          </a:ln>
+        </p:spPr>
+        <p:style>
+          <a:lnRef idx="1">
+            <a:schemeClr val="accent1"/>
+          </a:lnRef>
+          <a:fillRef idx="3">
+            <a:schemeClr val="accent1"/>
+          </a:fillRef>
+          <a:effectRef idx="2">
+            <a:schemeClr val="accent1"/>
+          </a:effectRef>
+          <a:fontRef idx="minor">
+            <a:schemeClr val="lt1"/>
+          </a:fontRef>
+        </p:style>
+        <p:txBody>
+          <a:bodyPr rtlCol="0" anchor="ctr"/>
+          <a:lstStyle/>
+          <a:p>
+            <a:pPr algn="ctr"/>
+          </a:p>
+        </p:txBody>
+      </p:sp>
+      <p:sp>
+        <p:nvSpPr>
+          <p:cNvPr id="7" name="TextBox 6"/>
+          <p:cNvSpPr txBox="1"/>
+          <p:nvPr/>
+        </p:nvSpPr>
+        <p:spPr>
+          <a:xfrm>
+            <a:off x="411480" y="6629400"/>
+            <a:ext cx="11247120" cy="164592"/>
+          </a:xfrm>
+          <a:prstGeom prst="rect">
+            <a:avLst/>
+          </a:prstGeom>
+          <a:noFill/>
+        </p:spPr>
+        <p:txBody>
+          <a:bodyPr wrap="square" lIns="45720" rIns="45720" tIns="36576" bIns="36576" anchor="t">
+            <a:spAutoFit/>
+          </a:bodyPr>
+          <a:lstStyle/>
+          <a:p>
+            <a:pPr algn="l">
+              <a:defRPr sz="900" b="0">
+                <a:solidFill>
+                  <a:srgbClr val="FFFFFF"/>
+                </a:solidFill>
+                <a:latin typeface="Aptos"/>
+              </a:defRPr>
+            </a:pPr>
+            <a:r>
+              <a:t>MiniJarvis · 1.º DAW · Sesión 215 · H1 — Primer MiniJarvis</a:t>
             </a:r>
           </a:p>
         </p:txBody>
@@ -7528,7 +8613,7 @@
               </a:defRPr>
             </a:pPr>
             <a:r>
-              <a:t>Decidir qué debe mejorar cada alumno antes de H2.</a:t>
+              <a:t>¿Qué puedes señalar, explicar y probar al terminar este checkpoint?</a:t>
             </a:r>
           </a:p>
         </p:txBody>
@@ -7895,4 +8980,324 @@
   </a:objectDefaults>
   <a:extraClrSchemeLst/>
 </a:theme>
+</file>
+
+<file path=ppt/theme/theme2.xml><?xml version="1.0" encoding="utf-8"?>
+<a:theme xmlns:a="http://schemas.openxmlformats.org/drawingml/2006/main" name="Office Theme">
+  <a:themeElements>
+    <a:clrScheme name="Office">
+      <a:dk1>
+        <a:sysClr val="windowText" lastClr="000000"/>
+      </a:dk1>
+      <a:lt1>
+        <a:sysClr val="window" lastClr="FFFFFF"/>
+      </a:lt1>
+      <a:dk2>
+        <a:srgbClr val="1F497D"/>
+      </a:dk2>
+      <a:lt2>
+        <a:srgbClr val="EEECE1"/>
+      </a:lt2>
+      <a:accent1>
+        <a:srgbClr val="4F81BD"/>
+      </a:accent1>
+      <a:accent2>
+        <a:srgbClr val="C0504D"/>
+      </a:accent2>
+      <a:accent3>
+        <a:srgbClr val="9BBB59"/>
+      </a:accent3>
+      <a:accent4>
+        <a:srgbClr val="8064A2"/>
+      </a:accent4>
+      <a:accent5>
+        <a:srgbClr val="4BACC6"/>
+      </a:accent5>
+      <a:accent6>
+        <a:srgbClr val="F79646"/>
+      </a:accent6>
+      <a:hlink>
+        <a:srgbClr val="0000FF"/>
+      </a:hlink>
+      <a:folHlink>
+        <a:srgbClr val="800080"/>
+      </a:folHlink>
+    </a:clrScheme>
+    <a:fontScheme name="Office">
+      <a:majorFont>
+        <a:latin typeface="Calibri"/>
+        <a:ea typeface=""/>
+        <a:cs typeface=""/>
+        <a:font script="Jpan" typeface="ＭＳ Ｐゴシック"/>
+        <a:font script="Hang" typeface="맑은 고딕"/>
+        <a:font script="Hans" typeface="宋体"/>
+        <a:font script="Hant" typeface="新細明體"/>
+        <a:font script="Arab" typeface="Times New Roman"/>
+        <a:font script="Hebr" typeface="Times New Roman"/>
+        <a:font script="Thai" typeface="Angsana New"/>
+        <a:font script="Ethi" typeface="Nyala"/>
+        <a:font script="Beng" typeface="Vrinda"/>
+        <a:font script="Gujr" typeface="Shruti"/>
+        <a:font script="Khmr" typeface="MoolBoran"/>
+        <a:font script="Knda" typeface="Tunga"/>
+        <a:font script="Guru" typeface="Raavi"/>
+        <a:font script="Cans" typeface="Euphemia"/>
+        <a:font script="Cher" typeface="Plantagenet Cherokee"/>
+        <a:font script="Yiii" typeface="Microsoft Yi Baiti"/>
+        <a:font script="Tibt" typeface="Microsoft Himalaya"/>
+        <a:font script="Thaa" typeface="MV Boli"/>
+        <a:font script="Deva" typeface="Mangal"/>
+        <a:font script="Telu" typeface="Gautami"/>
+        <a:font script="Taml" typeface="Latha"/>
+        <a:font script="Syrc" typeface="Estrangelo Edessa"/>
+        <a:font script="Orya" typeface="Kalinga"/>
+        <a:font script="Mlym" typeface="Kartika"/>
+        <a:font script="Laoo" typeface="DokChampa"/>
+        <a:font script="Sinh" typeface="Iskoola Pota"/>
+        <a:font script="Mong" typeface="Mongolian Baiti"/>
+        <a:font script="Viet" typeface="Times New Roman"/>
+        <a:font script="Uigh" typeface="Microsoft Uighur"/>
+        <a:font script="Geor" typeface="Sylfaen"/>
+      </a:majorFont>
+      <a:minorFont>
+        <a:latin typeface="Calibri"/>
+        <a:ea typeface=""/>
+        <a:cs typeface=""/>
+        <a:font script="Jpan" typeface="ＭＳ Ｐゴシック"/>
+        <a:font script="Hang" typeface="맑은 고딕"/>
+        <a:font script="Hans" typeface="宋体"/>
+        <a:font script="Hant" typeface="新細明體"/>
+        <a:font script="Arab" typeface="Arial"/>
+        <a:font script="Hebr" typeface="Arial"/>
+        <a:font script="Thai" typeface="Cordia New"/>
+        <a:font script="Ethi" typeface="Nyala"/>
+        <a:font script="Beng" typeface="Vrinda"/>
+        <a:font script="Gujr" typeface="Shruti"/>
+        <a:font script="Khmr" typeface="DaunPenh"/>
+        <a:font script="Knda" typeface="Tunga"/>
+        <a:font script="Guru" typeface="Raavi"/>
+        <a:font script="Cans" typeface="Euphemia"/>
+        <a:font script="Cher" typeface="Plantagenet Cherokee"/>
+        <a:font script="Yiii" typeface="Microsoft Yi Baiti"/>
+        <a:font script="Tibt" typeface="Microsoft Himalaya"/>
+        <a:font script="Thaa" typeface="MV Boli"/>
+        <a:font script="Deva" typeface="Mangal"/>
+        <a:font script="Telu" typeface="Gautami"/>
+        <a:font script="Taml" typeface="Latha"/>
+        <a:font script="Syrc" typeface="Estrangelo Edessa"/>
+        <a:font script="Orya" typeface="Kalinga"/>
+        <a:font script="Mlym" typeface="Kartika"/>
+        <a:font script="Laoo" typeface="DokChampa"/>
+        <a:font script="Sinh" typeface="Iskoola Pota"/>
+        <a:font script="Mong" typeface="Mongolian Baiti"/>
+        <a:font script="Viet" typeface="Arial"/>
+        <a:font script="Uigh" typeface="Microsoft Uighur"/>
+        <a:font script="Geor" typeface="Sylfaen"/>
+      </a:minorFont>
+    </a:fontScheme>
+    <a:fmtScheme name="Office">
+      <a:fillStyleLst>
+        <a:solidFill>
+          <a:schemeClr val="phClr"/>
+        </a:solidFill>
+        <a:gradFill rotWithShape="1">
+          <a:gsLst>
+            <a:gs pos="0">
+              <a:schemeClr val="phClr">
+                <a:tint val="50000"/>
+                <a:satMod val="300000"/>
+              </a:schemeClr>
+            </a:gs>
+            <a:gs pos="35000">
+              <a:schemeClr val="phClr">
+                <a:tint val="37000"/>
+                <a:satMod val="300000"/>
+              </a:schemeClr>
+            </a:gs>
+            <a:gs pos="100000">
+              <a:schemeClr val="phClr">
+                <a:tint val="15000"/>
+                <a:satMod val="350000"/>
+              </a:schemeClr>
+            </a:gs>
+          </a:gsLst>
+          <a:lin ang="16200000" scaled="1"/>
+        </a:gradFill>
+        <a:gradFill rotWithShape="1">
+          <a:gsLst>
+            <a:gs pos="0">
+              <a:schemeClr val="phClr">
+                <a:tint val="100000"/>
+                <a:shade val="100000"/>
+                <a:satMod val="130000"/>
+              </a:schemeClr>
+            </a:gs>
+            <a:gs pos="100000">
+              <a:schemeClr val="phClr">
+                <a:tint val="50000"/>
+                <a:shade val="100000"/>
+                <a:satMod val="350000"/>
+              </a:schemeClr>
+            </a:gs>
+          </a:gsLst>
+          <a:lin ang="16200000" scaled="0"/>
+        </a:gradFill>
+      </a:fillStyleLst>
+      <a:lnStyleLst>
+        <a:ln w="9525" cap="flat" cmpd="sng" algn="ctr">
+          <a:solidFill>
+            <a:schemeClr val="phClr">
+              <a:shade val="95000"/>
+              <a:satMod val="105000"/>
+            </a:schemeClr>
+          </a:solidFill>
+          <a:prstDash val="solid"/>
+        </a:ln>
+        <a:ln w="25400" cap="flat" cmpd="sng" algn="ctr">
+          <a:solidFill>
+            <a:schemeClr val="phClr"/>
+          </a:solidFill>
+          <a:prstDash val="solid"/>
+        </a:ln>
+        <a:ln w="38100" cap="flat" cmpd="sng" algn="ctr">
+          <a:solidFill>
+            <a:schemeClr val="phClr"/>
+          </a:solidFill>
+          <a:prstDash val="solid"/>
+        </a:ln>
+      </a:lnStyleLst>
+      <a:effectStyleLst>
+        <a:effectStyle>
+          <a:effectLst>
+            <a:outerShdw blurRad="40000" dist="20000" dir="5400000" rotWithShape="0">
+              <a:srgbClr val="000000">
+                <a:alpha val="38000"/>
+              </a:srgbClr>
+            </a:outerShdw>
+          </a:effectLst>
+        </a:effectStyle>
+        <a:effectStyle>
+          <a:effectLst>
+            <a:outerShdw blurRad="40000" dist="23000" dir="5400000" rotWithShape="0">
+              <a:srgbClr val="000000">
+                <a:alpha val="35000"/>
+              </a:srgbClr>
+            </a:outerShdw>
+          </a:effectLst>
+        </a:effectStyle>
+        <a:effectStyle>
+          <a:effectLst>
+            <a:outerShdw blurRad="40000" dist="23000" dir="5400000" rotWithShape="0">
+              <a:srgbClr val="000000">
+                <a:alpha val="35000"/>
+              </a:srgbClr>
+            </a:outerShdw>
+          </a:effectLst>
+          <a:scene3d>
+            <a:camera prst="orthographicFront">
+              <a:rot lat="0" lon="0" rev="0"/>
+            </a:camera>
+            <a:lightRig rig="threePt" dir="t">
+              <a:rot lat="0" lon="0" rev="1200000"/>
+            </a:lightRig>
+          </a:scene3d>
+          <a:sp3d>
+            <a:bevelT w="63500" h="25400"/>
+          </a:sp3d>
+        </a:effectStyle>
+      </a:effectStyleLst>
+      <a:bgFillStyleLst>
+        <a:solidFill>
+          <a:schemeClr val="phClr"/>
+        </a:solidFill>
+        <a:gradFill rotWithShape="1">
+          <a:gsLst>
+            <a:gs pos="0">
+              <a:schemeClr val="phClr">
+                <a:tint val="40000"/>
+                <a:satMod val="350000"/>
+              </a:schemeClr>
+            </a:gs>
+            <a:gs pos="40000">
+              <a:schemeClr val="phClr">
+                <a:tint val="45000"/>
+                <a:shade val="99000"/>
+                <a:satMod val="350000"/>
+              </a:schemeClr>
+            </a:gs>
+            <a:gs pos="100000">
+              <a:schemeClr val="phClr">
+                <a:shade val="20000"/>
+                <a:satMod val="255000"/>
+              </a:schemeClr>
+            </a:gs>
+          </a:gsLst>
+          <a:path path="circle">
+            <a:fillToRect l="50000" t="-80000" r="50000" b="180000"/>
+          </a:path>
+        </a:gradFill>
+        <a:gradFill rotWithShape="1">
+          <a:gsLst>
+            <a:gs pos="0">
+              <a:schemeClr val="phClr">
+                <a:tint val="80000"/>
+                <a:satMod val="300000"/>
+              </a:schemeClr>
+            </a:gs>
+            <a:gs pos="100000">
+              <a:schemeClr val="phClr">
+                <a:shade val="30000"/>
+                <a:satMod val="200000"/>
+              </a:schemeClr>
+            </a:gs>
+          </a:gsLst>
+          <a:path path="circle">
+            <a:fillToRect l="50000" t="50000" r="50000" b="50000"/>
+          </a:path>
+        </a:gradFill>
+      </a:bgFillStyleLst>
+    </a:fmtScheme>
+  </a:themeElements>
+  <a:objectDefaults>
+    <a:spDef>
+      <a:spPr/>
+      <a:bodyPr/>
+      <a:lstStyle/>
+      <a:style>
+        <a:lnRef idx="1">
+          <a:schemeClr val="accent1"/>
+        </a:lnRef>
+        <a:fillRef idx="3">
+          <a:schemeClr val="accent1"/>
+        </a:fillRef>
+        <a:effectRef idx="2">
+          <a:schemeClr val="accent1"/>
+        </a:effectRef>
+        <a:fontRef idx="minor">
+          <a:schemeClr val="lt1"/>
+        </a:fontRef>
+      </a:style>
+    </a:spDef>
+    <a:lnDef>
+      <a:spPr/>
+      <a:bodyPr/>
+      <a:lstStyle/>
+      <a:style>
+        <a:lnRef idx="2">
+          <a:schemeClr val="accent1"/>
+        </a:lnRef>
+        <a:fillRef idx="0">
+          <a:schemeClr val="accent1"/>
+        </a:fillRef>
+        <a:effectRef idx="1">
+          <a:schemeClr val="accent1"/>
+        </a:effectRef>
+        <a:fontRef idx="minor">
+          <a:schemeClr val="tx1"/>
+        </a:fontRef>
+      </a:style>
+    </a:lnDef>
+  </a:objectDefaults>
+  <a:extraClrSchemeLst/>
+</a:theme>
 </file>
--- a/02-PROFESORADO/03-PRESENTACIONES/POR-SESION/h1/S215-defensa-y-cierre-h1-presentacion.pptx
+++ b/02-PROFESORADO/03-PRESENTACIONES/POR-SESION/h1/S215-defensa-y-cierre-h1-presentacion.pptx
@@ -14,6 +14,7 @@
     <p:sldId id="262" r:id="rId14"/>
     <p:sldId id="263" r:id="rId15"/>
     <p:sldId id="264" r:id="rId16"/>
+    <p:sldId id="265" r:id="rId17"/>
   </p:sldIdLst>
   <p:sldSz cx="12191695" cy="6858000" type="screen4x3"/>
   <p:notesSz cx="6858000" cy="9144000"/>
@@ -515,7 +516,7 @@
           </a:p>
           <a:p>
             <a:r>
-              <a:t>Diapositiva 1 de 9: Defensa y cierre del hito</a:t>
+              <a:t>Diapositiva 1 de 10: Defensa y cierre del hito</a:t>
             </a:r>
           </a:p>
           <a:p>
@@ -571,6 +572,111 @@
           <a:p>
             <a:r>
               <a:t>- Enmarca defensa y cierre del hito con un ejemplo observable y una comprobación.</a:t>
+            </a:r>
+          </a:p>
+          <a:p>
+            <a:r>
+              <a:t>Fuente docente: /mnt/compartido/Programación-26-27/Minijarvis/02-PROFESORADO/02-SESIONES/h1/S215-defensa-y-cierre-h1-docente.md</a:t>
+            </a:r>
+          </a:p>
+        </p:txBody>
+      </p:sp>
+      <p:sp>
+        <p:nvSpPr>
+          <p:cNvPr id="4" name="Slide Number Placeholder 3"/>
+          <p:cNvSpPr>
+            <a:spLocks noGrp="1"/>
+          </p:cNvSpPr>
+          <p:nvPr>
+            <p:ph type="sldNum" idx="5" sz="quarter"/>
+          </p:nvPr>
+        </p:nvSpPr>
+        <p:spPr/>
+      </p:sp>
+    </p:spTree>
+  </p:cSld>
+  <p:clrMapOvr>
+    <a:masterClrMapping/>
+  </p:clrMapOvr>
+</p:notes>
+</file>
+
+<file path=ppt/notesSlides/notesSlide10.xml><?xml version="1.0" encoding="utf-8"?>
+<p:notes xmlns:a="http://schemas.openxmlformats.org/drawingml/2006/main" xmlns:p="http://schemas.openxmlformats.org/presentationml/2006/main" xmlns:r="http://schemas.openxmlformats.org/officeDocument/2006/relationships">
+  <p:cSld>
+    <p:spTree>
+      <p:nvGrpSpPr>
+        <p:cNvPr id="1" name=""/>
+        <p:cNvGrpSpPr/>
+        <p:nvPr/>
+      </p:nvGrpSpPr>
+      <p:grpSpPr>
+        <a:xfrm>
+          <a:off x="0" y="0"/>
+          <a:ext cx="0" cy="0"/>
+          <a:chOff x="0" y="0"/>
+          <a:chExt cx="0" cy="0"/>
+        </a:xfrm>
+      </p:grpSpPr>
+      <p:sp>
+        <p:nvSpPr>
+          <p:cNvPr id="2" name="Slide Image Placeholder 1"/>
+          <p:cNvSpPr>
+            <a:spLocks noGrp="1"/>
+          </p:cNvSpPr>
+          <p:nvPr>
+            <p:ph type="sldImg" idx="2"/>
+          </p:nvPr>
+        </p:nvSpPr>
+        <p:spPr/>
+      </p:sp>
+      <p:sp>
+        <p:nvSpPr>
+          <p:cNvPr id="3" name="Notes Placeholder 2"/>
+          <p:cNvSpPr>
+            <a:spLocks noGrp="1"/>
+          </p:cNvSpPr>
+          <p:nvPr>
+            <p:ph type="body" idx="3" sz="quarter"/>
+          </p:nvPr>
+        </p:nvSpPr>
+        <p:spPr/>
+        <p:txBody>
+          <a:bodyPr/>
+          <a:lstStyle/>
+          <a:p>
+            <a:r>
+              <a:t>Objetivo docente: Demostrar comprensión individual, modificar algo pequeño y cerrar el ciclo HEXA con reflexión y mejora.</a:t>
+            </a:r>
+          </a:p>
+          <a:p>
+            <a:r>
+              <a:t>Diapositiva 10 de 10: Fuentes utilizadas</a:t>
+            </a:r>
+          </a:p>
+          <a:p>
+            <a:r>
+              <a:t>Fase HEXA: Comunicar — evaluar y reflexionar</a:t>
+            </a:r>
+          </a:p>
+          <a:p>
+            <a:r>
+              <a:t>Indica al alumnado dónde ampliar el contenido y qué fragmentos se han adaptado.</a:t>
+            </a:r>
+          </a:p>
+          <a:p>
+            <a:r>
+              <a:t>- Libro: capítulos 01-02 · Defensa y cierre de H1</a:t>
+            </a:r>
+          </a:p>
+          <a:p>
+            <a:r>
+              <a:t>- Fichas S206-S215 y píldoras H1</a:t>
+            </a:r>
+          </a:p>
+          <a:p>
+            <a:r>
+              <a:t>- Ejemplos revisados y adaptados a MiniJarvis; no se copian errores ni capturas antiguas del PDF.</a:t>
             </a:r>
           </a:p>
           <a:p>
@@ -650,7 +756,7 @@
           </a:p>
           <a:p>
             <a:r>
-              <a:t>Diapositiva 2 de 9: Qué debe conseguirse</a:t>
+              <a:t>Diapositiva 2 de 10: Qué aprenderás y cómo lo demostrarás</a:t>
             </a:r>
           </a:p>
           <a:p>
@@ -665,7 +771,7 @@
           </a:p>
           <a:p>
             <a:r>
-              <a:t>- Al terminar: señala la evidencia, explica qué demuestra y reproduce la prueba.</a:t>
+              <a:t>- Comprobación: Quede siguiente paso claro.</a:t>
             </a:r>
           </a:p>
           <a:p>
@@ -745,7 +851,7 @@
           </a:p>
           <a:p>
             <a:r>
-              <a:t>Diapositiva 3 de 9: Ejemplo o demostración · 1</a:t>
+              <a:t>Diapositiva 3 de 10: Una defensa demuestra comprensión</a:t>
             </a:r>
           </a:p>
           <a:p>
@@ -755,32 +861,37 @@
           </a:p>
           <a:p>
             <a:r>
-              <a:t>Modela el ejemplo sin resolver la actividad completa; pide una predicción antes de ejecutar.</a:t>
-            </a:r>
-          </a:p>
-          <a:p>
-            <a:r>
-              <a:t>- D1 · La defensa no es recitar — Vas a señalar, explicar, ejecutar y modificar una parte pequeña de tu propio H1.</a:t>
-            </a:r>
-          </a:p>
-          <a:p>
-            <a:r>
-              <a:t>- D2 · Así es una respuesta defendible SEÑALA: “Esta línea lee el nombre” / “Esta variable guarda la edad” \| EXPLICA: tipo, decisión y efecto \| DEMUESTRA:</a:t>
-            </a:r>
-          </a:p>
-          <a:p>
-            <a:r>
-              <a:t>- ejecuta con una entrada y predice la salida</a:t>
-            </a:r>
-          </a:p>
-          <a:p>
-            <a:r>
-              <a:t>- D3 · Ronda de defensa + ensayo por parejas — Mientras una persona defiende, el resto:</a:t>
-            </a:r>
-          </a:p>
-          <a:p>
-            <a:r>
-              <a:t>- • ensaya preguntas</a:t>
+              <a:t>Explica con predicción y ejemplo mínimo; comprueba comprensión antes de continuar.</a:t>
+            </a:r>
+          </a:p>
+          <a:p>
+            <a:r>
+              <a:t>- señala</a:t>
+            </a:r>
+          </a:p>
+          <a:p>
+            <a:r>
+              <a:t>- explica</a:t>
+            </a:r>
+          </a:p>
+          <a:p>
+            <a:r>
+              <a:t>- predice</a:t>
+            </a:r>
+          </a:p>
+          <a:p>
+            <a:r>
+              <a:t>- ejecuta</a:t>
+            </a:r>
+          </a:p>
+          <a:p>
+            <a:r>
+              <a:t>- modifica</a:t>
+            </a:r>
+          </a:p>
+          <a:p>
+            <a:r>
+              <a:t>- vuelve a probar</a:t>
             </a:r>
           </a:p>
           <a:p>
@@ -860,7 +971,7 @@
           </a:p>
           <a:p>
             <a:r>
-              <a:t>Diapositiva 4 de 9: Ejemplo o demostración · 2</a:t>
+              <a:t>Diapositiva 4 de 10: Respuesta defendible o respuesta vaga</a:t>
             </a:r>
           </a:p>
           <a:p>
@@ -870,27 +981,22 @@
           </a:p>
           <a:p>
             <a:r>
-              <a:t>Modela el ejemplo sin resolver la actividad completa; pide una predicción antes de ejecutar.</a:t>
-            </a:r>
-          </a:p>
-          <a:p>
-            <a:r>
-              <a:t>- • revisa el diario y la selección de evidencias del Site</a:t>
-            </a:r>
-          </a:p>
-          <a:p>
-            <a:r>
-              <a:t>- • comprueba enlaces</a:t>
-            </a:r>
-          </a:p>
-          <a:p>
-            <a:r>
-              <a:t>- • prepara una modificación pequeña</a:t>
-            </a:r>
-          </a:p>
-          <a:p>
-            <a:r>
-              <a:t>- D4 · Si aparece una laguna, se recupera la evidencia concreta — No hace falta repetir todo H1.</a:t>
+              <a:t>Explica con predicción y ejemplo mínimo; comprueba comprensión antes de continuar.</a:t>
+            </a:r>
+          </a:p>
+          <a:p>
+            <a:r>
+              <a:t>- VAGA · Lo hice así porque funcionaba.</a:t>
+            </a:r>
+          </a:p>
+          <a:p>
+            <a:r>
+              <a:t>- DEFENDIBLE · Esta línea lee un String, lo guarda en userName y por eso Laura aparece en la salida.</a:t>
+            </a:r>
+          </a:p>
+          <a:p>
+            <a:r>
+              <a:t>- La defensa conecta una afirmación con código, ejecución y evidencia propia.</a:t>
             </a:r>
           </a:p>
           <a:p>
@@ -970,7 +1076,7 @@
           </a:p>
           <a:p>
             <a:r>
-              <a:t>Diapositiva 5 de 9: Actividad central · 1</a:t>
+              <a:t>Diapositiva 5 de 10: Hilo conceptual de H1</a:t>
             </a:r>
           </a:p>
           <a:p>
@@ -980,27 +1086,32 @@
           </a:p>
           <a:p>
             <a:r>
-              <a:t>Entrega la consigna, observa decisiones y pide una prueba reproducible.</a:t>
-            </a:r>
-          </a:p>
-          <a:p>
-            <a:r>
-              <a:t>- Predice antes de ejecutar cuando haya código.</a:t>
-            </a:r>
-          </a:p>
-          <a:p>
-            <a:r>
-              <a:t>- Realiza la micropráctica o modificación prevista.</a:t>
-            </a:r>
-          </a:p>
-          <a:p>
-            <a:r>
-              <a:t>- Prueba el caso normal y, cuando exista una decisión o conversión, también el caso alternativo o erróneo.</a:t>
-            </a:r>
-          </a:p>
-          <a:p>
-            <a:r>
-              <a:t>- Conserva el código o resultado en el repositorio o espacio indicado.</a:t>
+              <a:t>Explica con predicción y ejemplo mínimo; comprueba comprensión antes de continuar.</a:t>
+            </a:r>
+          </a:p>
+          <a:p>
+            <a:r>
+              <a:t>- dato → variable o constante</a:t>
+            </a:r>
+          </a:p>
+          <a:p>
+            <a:r>
+              <a:t>- operación o comparación → resultado</a:t>
+            </a:r>
+          </a:p>
+          <a:p>
+            <a:r>
+              <a:t>- boolean → decisión</a:t>
+            </a:r>
+          </a:p>
+          <a:p>
+            <a:r>
+              <a:t>- salida → prueba observable</a:t>
+            </a:r>
+          </a:p>
+          <a:p>
+            <a:r>
+              <a:t>- requisito → código → ejecución → evidencia</a:t>
             </a:r>
           </a:p>
           <a:p>
@@ -1080,7 +1191,7 @@
           </a:p>
           <a:p>
             <a:r>
-              <a:t>Diapositiva 6 de 9: Actividad central · 2</a:t>
+              <a:t>Diapositiva 6 de 10: Ronda individual</a:t>
             </a:r>
           </a:p>
           <a:p>
@@ -1095,12 +1206,22 @@
           </a:p>
           <a:p>
             <a:r>
-              <a:t>- Registra una sola entrada en el diario individual; no crees un informe paralelo.</a:t>
-            </a:r>
-          </a:p>
-          <a:p>
-            <a:r>
-              <a:t>- ¿Qué puedes señalar, explicar y probar al terminar este checkpoint?</a:t>
+              <a:t>- Señala una línea y explica su función.</a:t>
+            </a:r>
+          </a:p>
+          <a:p>
+            <a:r>
+              <a:t>- Predice la salida para una entrada concreta y ejecútala.</a:t>
+            </a:r>
+          </a:p>
+          <a:p>
+            <a:r>
+              <a:t>- Haz una modificación pequeña y predice su efecto.</a:t>
+            </a:r>
+          </a:p>
+          <a:p>
+            <a:r>
+              <a:t>- Localiza la evidencia que demuestra el resultado.</a:t>
             </a:r>
           </a:p>
           <a:p>
@@ -1180,7 +1301,7 @@
           </a:p>
           <a:p>
             <a:r>
-              <a:t>Diapositiva 7 de 9: Evidencia y comprobación</a:t>
+              <a:t>Diapositiva 7 de 10: Si aparece una laguna</a:t>
             </a:r>
           </a:p>
           <a:p>
@@ -1190,22 +1311,32 @@
           </a:p>
           <a:p>
             <a:r>
-              <a:t>Comprueba la evidencia en su fuente canónica: Quede siguiente paso claro.</a:t>
-            </a:r>
-          </a:p>
-          <a:p>
-            <a:r>
-              <a:t>- conserva el código o la prueba en el lugar indicado por la sesión;</a:t>
-            </a:r>
-          </a:p>
-          <a:p>
-            <a:r>
-              <a:t>- añade una sola entrada al diario individual con prueba, bloqueo y siguiente paso;</a:t>
-            </a:r>
-          </a:p>
-          <a:p>
-            <a:r>
-              <a:t>- no copies la misma reflexión en otro documento; el Site personal seleccionará evidencias al cerrar H1.</a:t>
+              <a:t>Explica con predicción y ejemplo mínimo; comprueba comprensión antes de continuar.</a:t>
+            </a:r>
+          </a:p>
+          <a:p>
+            <a:r>
+              <a:t>- identifica</a:t>
+            </a:r>
+          </a:p>
+          <a:p>
+            <a:r>
+              <a:t>- investiga</a:t>
+            </a:r>
+          </a:p>
+          <a:p>
+            <a:r>
+              <a:t>- corrige</a:t>
+            </a:r>
+          </a:p>
+          <a:p>
+            <a:r>
+              <a:t>- prueba</a:t>
+            </a:r>
+          </a:p>
+          <a:p>
+            <a:r>
+              <a:t>- vuelve a explicar</a:t>
             </a:r>
           </a:p>
           <a:p>
@@ -1285,7 +1416,7 @@
           </a:p>
           <a:p>
             <a:r>
-              <a:t>Diapositiva 8 de 9: Seguridad y uso responsable</a:t>
+              <a:t>Diapositiva 8 de 10: Retrospectiva con evidencia</a:t>
             </a:r>
           </a:p>
           <a:p>
@@ -1295,17 +1426,27 @@
           </a:p>
           <a:p>
             <a:r>
-              <a:t>Recuerda estos límites antes de que el alumnado comparta o publique:</a:t>
-            </a:r>
-          </a:p>
-          <a:p>
-            <a:r>
-              <a:t>- Usa datos ficticios y no publiques credenciales ni información personal.</a:t>
-            </a:r>
-          </a:p>
-          <a:p>
-            <a:r>
-              <a:t>- Si utilizas IA de forma sustantiva, registra propósito, propuesta, cambios propios y validación en el registro de IA del hito.</a:t>
+              <a:t>Comprueba la evidencia en su fuente canónica: Quede siguiente paso claro.</a:t>
+            </a:r>
+          </a:p>
+          <a:p>
+            <a:r>
+              <a:t>- Una capacidad que ya realizo sin ayuda.</a:t>
+            </a:r>
+          </a:p>
+          <a:p>
+            <a:r>
+              <a:t>- Una capacidad para la que todavía necesito apoyo.</a:t>
+            </a:r>
+          </a:p>
+          <a:p>
+            <a:r>
+              <a:t>- Un hábito de trabajo que conservaré.</a:t>
+            </a:r>
+          </a:p>
+          <a:p>
+            <a:r>
+              <a:t>- Una mejora concreta que aplicaré en H2.</a:t>
             </a:r>
           </a:p>
           <a:p>
@@ -1385,7 +1526,7 @@
           </a:p>
           <a:p>
             <a:r>
-              <a:t>Diapositiva 9 de 9: Cierre y defensa</a:t>
+              <a:t>Diapositiva 9 de 10: Cierre de H1</a:t>
             </a:r>
           </a:p>
           <a:p>
@@ -1400,7 +1541,7 @@
           </a:p>
           <a:p>
             <a:r>
-              <a:t>- ¿Qué puedes señalar, explicar y probar al terminar este checkpoint?</a:t>
+              <a:t>- ¿Qué puedes señalar, predecir, ejecutar y modificar para demostrar que comprendes tu propio MiniJarvis?</a:t>
             </a:r>
           </a:p>
           <a:p>
@@ -4645,7 +4786,7 @@
               </a:defRPr>
             </a:pPr>
             <a:r>
-              <a:t>H1 — Primer MiniJarvis · Fase HEXA: Comunicar — evaluar y reflexionar</a:t>
+              <a:t>H1 — Primer MiniJarvis</a:t>
             </a:r>
           </a:p>
         </p:txBody>
@@ -4754,6 +4895,404 @@
             </a:pPr>
             <a:r>
               <a:t>MINIJARVIS · PROGRAMACIÓN</a:t>
+            </a:r>
+          </a:p>
+        </p:txBody>
+      </p:sp>
+    </p:spTree>
+  </p:cSld>
+  <p:clrMapOvr>
+    <a:masterClrMapping/>
+  </p:clrMapOvr>
+</p:sld>
+</file>
+
+<file path=ppt/slides/slide10.xml><?xml version="1.0" encoding="utf-8"?>
+<p:sld xmlns:a="http://schemas.openxmlformats.org/drawingml/2006/main" xmlns:p="http://schemas.openxmlformats.org/presentationml/2006/main" xmlns:r="http://schemas.openxmlformats.org/officeDocument/2006/relationships">
+  <p:cSld>
+    <p:spTree>
+      <p:nvGrpSpPr>
+        <p:cNvPr id="1" name=""/>
+        <p:cNvGrpSpPr/>
+        <p:nvPr/>
+      </p:nvGrpSpPr>
+      <p:grpSpPr/>
+      <p:sp>
+        <p:nvSpPr>
+          <p:cNvPr id="2" name="Rectangle 1"/>
+          <p:cNvSpPr/>
+          <p:nvPr/>
+        </p:nvSpPr>
+        <p:spPr>
+          <a:xfrm>
+            <a:off x="0" y="0"/>
+            <a:ext cx="12191695" cy="6858000"/>
+          </a:xfrm>
+          <a:prstGeom prst="rect">
+            <a:avLst/>
+          </a:prstGeom>
+          <a:solidFill>
+            <a:srgbClr val="F9F7F2"/>
+          </a:solidFill>
+          <a:ln>
+            <a:noFill/>
+          </a:ln>
+        </p:spPr>
+        <p:style>
+          <a:lnRef idx="1">
+            <a:schemeClr val="accent1"/>
+          </a:lnRef>
+          <a:fillRef idx="3">
+            <a:schemeClr val="accent1"/>
+          </a:fillRef>
+          <a:effectRef idx="2">
+            <a:schemeClr val="accent1"/>
+          </a:effectRef>
+          <a:fontRef idx="minor">
+            <a:schemeClr val="lt1"/>
+          </a:fontRef>
+        </p:style>
+        <p:txBody>
+          <a:bodyPr rtlCol="0" anchor="ctr"/>
+          <a:lstStyle/>
+          <a:p>
+            <a:pPr algn="ctr"/>
+          </a:p>
+        </p:txBody>
+      </p:sp>
+      <p:sp>
+        <p:nvSpPr>
+          <p:cNvPr id="3" name="Rectangle 2"/>
+          <p:cNvSpPr/>
+          <p:nvPr/>
+        </p:nvSpPr>
+        <p:spPr>
+          <a:xfrm>
+            <a:off x="0" y="0"/>
+            <a:ext cx="164592" cy="6858000"/>
+          </a:xfrm>
+          <a:prstGeom prst="rect">
+            <a:avLst/>
+          </a:prstGeom>
+          <a:solidFill>
+            <a:srgbClr val="2F5BA8"/>
+          </a:solidFill>
+          <a:ln>
+            <a:noFill/>
+          </a:ln>
+        </p:spPr>
+        <p:style>
+          <a:lnRef idx="1">
+            <a:schemeClr val="accent1"/>
+          </a:lnRef>
+          <a:fillRef idx="3">
+            <a:schemeClr val="accent1"/>
+          </a:fillRef>
+          <a:effectRef idx="2">
+            <a:schemeClr val="accent1"/>
+          </a:effectRef>
+          <a:fontRef idx="minor">
+            <a:schemeClr val="lt1"/>
+          </a:fontRef>
+        </p:style>
+        <p:txBody>
+          <a:bodyPr rtlCol="0" anchor="ctr"/>
+          <a:lstStyle/>
+          <a:p>
+            <a:pPr algn="ctr"/>
+          </a:p>
+        </p:txBody>
+      </p:sp>
+      <p:sp>
+        <p:nvSpPr>
+          <p:cNvPr id="4" name="TextBox 3"/>
+          <p:cNvSpPr txBox="1"/>
+          <p:nvPr/>
+        </p:nvSpPr>
+        <p:spPr>
+          <a:xfrm>
+            <a:off x="502920" y="274320"/>
+            <a:ext cx="5486400" cy="256032"/>
+          </a:xfrm>
+          <a:prstGeom prst="rect">
+            <a:avLst/>
+          </a:prstGeom>
+          <a:noFill/>
+        </p:spPr>
+        <p:txBody>
+          <a:bodyPr wrap="square" lIns="45720" rIns="45720" tIns="36576" bIns="36576" anchor="t">
+            <a:spAutoFit/>
+          </a:bodyPr>
+          <a:lstStyle/>
+          <a:p>
+            <a:pPr algn="l">
+              <a:defRPr sz="1000" b="1">
+                <a:solidFill>
+                  <a:srgbClr val="2F5BA8"/>
+                </a:solidFill>
+                <a:latin typeface="Aptos"/>
+              </a:defRPr>
+            </a:pPr>
+            <a:r>
+              <a:t>TRAZABILIDAD DEL CONTENIDO</a:t>
+            </a:r>
+          </a:p>
+        </p:txBody>
+      </p:sp>
+      <p:sp>
+        <p:nvSpPr>
+          <p:cNvPr id="5" name="TextBox 4"/>
+          <p:cNvSpPr txBox="1"/>
+          <p:nvPr/>
+        </p:nvSpPr>
+        <p:spPr>
+          <a:xfrm>
+            <a:off x="502920" y="603504"/>
+            <a:ext cx="11064240" cy="530352"/>
+          </a:xfrm>
+          <a:prstGeom prst="rect">
+            <a:avLst/>
+          </a:prstGeom>
+          <a:noFill/>
+        </p:spPr>
+        <p:txBody>
+          <a:bodyPr wrap="square" lIns="45720" rIns="45720" tIns="36576" bIns="36576" anchor="t">
+            <a:spAutoFit/>
+          </a:bodyPr>
+          <a:lstStyle/>
+          <a:p>
+            <a:pPr algn="l">
+              <a:defRPr sz="2800" b="1">
+                <a:solidFill>
+                  <a:srgbClr val="1C2330"/>
+                </a:solidFill>
+                <a:latin typeface="Aptos"/>
+              </a:defRPr>
+            </a:pPr>
+            <a:r>
+              <a:t>Fuentes utilizadas</a:t>
+            </a:r>
+          </a:p>
+        </p:txBody>
+      </p:sp>
+      <p:sp>
+        <p:nvSpPr>
+          <p:cNvPr id="6" name="Rectangle 5"/>
+          <p:cNvSpPr/>
+          <p:nvPr/>
+        </p:nvSpPr>
+        <p:spPr>
+          <a:xfrm>
+            <a:off x="0" y="6601968"/>
+            <a:ext cx="12191695" cy="256032"/>
+          </a:xfrm>
+          <a:prstGeom prst="rect">
+            <a:avLst/>
+          </a:prstGeom>
+          <a:solidFill>
+            <a:srgbClr val="2F5BA8"/>
+          </a:solidFill>
+          <a:ln>
+            <a:noFill/>
+          </a:ln>
+        </p:spPr>
+        <p:style>
+          <a:lnRef idx="1">
+            <a:schemeClr val="accent1"/>
+          </a:lnRef>
+          <a:fillRef idx="3">
+            <a:schemeClr val="accent1"/>
+          </a:fillRef>
+          <a:effectRef idx="2">
+            <a:schemeClr val="accent1"/>
+          </a:effectRef>
+          <a:fontRef idx="minor">
+            <a:schemeClr val="lt1"/>
+          </a:fontRef>
+        </p:style>
+        <p:txBody>
+          <a:bodyPr rtlCol="0" anchor="ctr"/>
+          <a:lstStyle/>
+          <a:p>
+            <a:pPr algn="ctr"/>
+          </a:p>
+        </p:txBody>
+      </p:sp>
+      <p:sp>
+        <p:nvSpPr>
+          <p:cNvPr id="7" name="TextBox 6"/>
+          <p:cNvSpPr txBox="1"/>
+          <p:nvPr/>
+        </p:nvSpPr>
+        <p:spPr>
+          <a:xfrm>
+            <a:off x="411480" y="6629400"/>
+            <a:ext cx="11247120" cy="164592"/>
+          </a:xfrm>
+          <a:prstGeom prst="rect">
+            <a:avLst/>
+          </a:prstGeom>
+          <a:noFill/>
+        </p:spPr>
+        <p:txBody>
+          <a:bodyPr wrap="square" lIns="45720" rIns="45720" tIns="36576" bIns="36576" anchor="t">
+            <a:spAutoFit/>
+          </a:bodyPr>
+          <a:lstStyle/>
+          <a:p>
+            <a:pPr algn="l">
+              <a:defRPr sz="900" b="0">
+                <a:solidFill>
+                  <a:srgbClr val="FFFFFF"/>
+                </a:solidFill>
+                <a:latin typeface="Aptos"/>
+              </a:defRPr>
+            </a:pPr>
+            <a:r>
+              <a:t>MiniJarvis · 1.º DAW · Sesión 215 · H1 — Primer MiniJarvis</a:t>
+            </a:r>
+          </a:p>
+        </p:txBody>
+      </p:sp>
+      <p:sp>
+        <p:nvSpPr>
+          <p:cNvPr id="8" name="TextBox 7"/>
+          <p:cNvSpPr txBox="1"/>
+          <p:nvPr/>
+        </p:nvSpPr>
+        <p:spPr>
+          <a:xfrm>
+            <a:off x="777240" y="1417320"/>
+            <a:ext cx="10515600" cy="658368"/>
+          </a:xfrm>
+          <a:prstGeom prst="rect">
+            <a:avLst/>
+          </a:prstGeom>
+          <a:noFill/>
+        </p:spPr>
+        <p:txBody>
+          <a:bodyPr wrap="square" lIns="45720" rIns="45720" tIns="36576" bIns="36576" anchor="t">
+            <a:spAutoFit/>
+          </a:bodyPr>
+          <a:lstStyle/>
+          <a:p>
+            <a:pPr algn="ctr">
+              <a:defRPr sz="2300" b="1">
+                <a:solidFill>
+                  <a:srgbClr val="1C2330"/>
+                </a:solidFill>
+                <a:latin typeface="Aptos"/>
+              </a:defRPr>
+            </a:pPr>
+            <a:r>
+              <a:t>Esta presentación selecciona y adapta contenido; no sustituye al libro ni copia el PDF completo.</a:t>
+            </a:r>
+          </a:p>
+        </p:txBody>
+      </p:sp>
+      <p:sp>
+        <p:nvSpPr>
+          <p:cNvPr id="9" name="TextBox 8"/>
+          <p:cNvSpPr txBox="1"/>
+          <p:nvPr/>
+        </p:nvSpPr>
+        <p:spPr>
+          <a:xfrm>
+            <a:off x="1005840" y="2468880"/>
+            <a:ext cx="10058400" cy="2331720"/>
+          </a:xfrm>
+          <a:prstGeom prst="rect">
+            <a:avLst/>
+          </a:prstGeom>
+          <a:noFill/>
+        </p:spPr>
+        <p:txBody>
+          <a:bodyPr wrap="square" lIns="73152" rIns="45720" tIns="36576">
+            <a:spAutoFit/>
+          </a:bodyPr>
+          <a:lstStyle/>
+          <a:p>
+            <a:pPr>
+              <a:spcAft>
+                <a:spcPts val="900"/>
+              </a:spcAft>
+              <a:defRPr sz="2000">
+                <a:solidFill>
+                  <a:srgbClr val="1C2330"/>
+                </a:solidFill>
+                <a:latin typeface="Aptos"/>
+              </a:defRPr>
+            </a:pPr>
+            <a:r>
+              <a:t>•  Libro: capítulos 01-02 · Defensa y cierre de H1</a:t>
+            </a:r>
+          </a:p>
+          <a:p>
+            <a:pPr>
+              <a:spcAft>
+                <a:spcPts val="900"/>
+              </a:spcAft>
+              <a:defRPr sz="2000">
+                <a:solidFill>
+                  <a:srgbClr val="1C2330"/>
+                </a:solidFill>
+                <a:latin typeface="Aptos"/>
+              </a:defRPr>
+            </a:pPr>
+            <a:r>
+              <a:t>•  Fichas S206-S215 y píldoras H1</a:t>
+            </a:r>
+          </a:p>
+          <a:p>
+            <a:pPr>
+              <a:spcAft>
+                <a:spcPts val="900"/>
+              </a:spcAft>
+              <a:defRPr sz="2000">
+                <a:solidFill>
+                  <a:srgbClr val="1C2330"/>
+                </a:solidFill>
+                <a:latin typeface="Aptos"/>
+              </a:defRPr>
+            </a:pPr>
+            <a:r>
+              <a:t>•  Ejemplos revisados y adaptados a MiniJarvis; no se copian errores ni capturas antiguas del PDF.</a:t>
+            </a:r>
+          </a:p>
+        </p:txBody>
+      </p:sp>
+      <p:sp>
+        <p:nvSpPr>
+          <p:cNvPr id="10" name="TextBox 9"/>
+          <p:cNvSpPr txBox="1"/>
+          <p:nvPr/>
+        </p:nvSpPr>
+        <p:spPr>
+          <a:xfrm>
+            <a:off x="960120" y="5257800"/>
+            <a:ext cx="10241280" cy="411480"/>
+          </a:xfrm>
+          <a:prstGeom prst="rect">
+            <a:avLst/>
+          </a:prstGeom>
+          <a:noFill/>
+        </p:spPr>
+        <p:txBody>
+          <a:bodyPr wrap="square" lIns="45720" rIns="45720" tIns="36576" bIns="36576" anchor="t">
+            <a:spAutoFit/>
+          </a:bodyPr>
+          <a:lstStyle/>
+          <a:p>
+            <a:pPr algn="ctr">
+              <a:defRPr sz="1800" b="1">
+                <a:solidFill>
+                  <a:srgbClr val="2F5BA8"/>
+                </a:solidFill>
+                <a:latin typeface="Aptos"/>
+              </a:defRPr>
+            </a:pPr>
+            <a:r>
+              <a:t>Consulta el libro para ampliar, practicar y repasar errores frecuentes.</a:t>
             </a:r>
           </a:p>
         </p:txBody>
@@ -4929,7 +5468,7 @@
               </a:defRPr>
             </a:pPr>
             <a:r>
-              <a:t>Qué debe conseguirse</a:t>
+              <a:t>Qué aprenderás y cómo lo demostrarás</a:t>
             </a:r>
           </a:p>
         </p:txBody>
@@ -5170,7 +5709,7 @@
               </a:defRPr>
             </a:pPr>
             <a:r>
-              <a:t>Al terminar: señala la evidencia, explica qué demuestra y reproduce la prueba.</a:t>
+              <a:t>Comprobación: Quede siguiente paso claro.</a:t>
             </a:r>
           </a:p>
         </p:txBody>
@@ -5310,7 +5849,7 @@
               </a:defRPr>
             </a:pPr>
             <a:r>
-              <a:t>OBSERVAR ANTES DE ACTUAR</a:t>
+              <a:t>PROCESO</a:t>
             </a:r>
           </a:p>
         </p:txBody>
@@ -5346,7 +5885,7 @@
               </a:defRPr>
             </a:pPr>
             <a:r>
-              <a:t>Ejemplo o demostración · 1</a:t>
+              <a:t>Una defensa demuestra comprensión</a:t>
             </a:r>
           </a:p>
         </p:txBody>
@@ -5438,17 +5977,19 @@
         </p:nvSpPr>
         <p:spPr>
           <a:xfrm>
-            <a:off x="621792" y="1353312"/>
-            <a:ext cx="10927080" cy="4526280"/>
+            <a:off x="713232" y="2240280"/>
+            <a:ext cx="1760220" cy="1874519"/>
           </a:xfrm>
           <a:prstGeom prst="roundRect">
             <a:avLst/>
           </a:prstGeom>
           <a:solidFill>
-            <a:srgbClr val="121824"/>
+            <a:srgbClr val="FFFFFF"/>
           </a:solidFill>
           <a:ln>
-            <a:noFill/>
+            <a:solidFill>
+              <a:srgbClr val="2F5BA8"/>
+            </a:solidFill>
           </a:ln>
         </p:spPr>
         <p:style>
@@ -5481,8 +6022,8 @@
         </p:nvSpPr>
         <p:spPr>
           <a:xfrm>
-            <a:off x="932688" y="1627632"/>
-            <a:ext cx="2057400" cy="411480"/>
+            <a:off x="850392" y="2487168"/>
+            <a:ext cx="1485900" cy="320040"/>
           </a:xfrm>
           <a:prstGeom prst="rect">
             <a:avLst/>
@@ -5495,8 +6036,8 @@
           </a:bodyPr>
           <a:lstStyle/>
           <a:p>
-            <a:pPr algn="l">
-              <a:defRPr sz="1300" b="1">
+            <a:pPr algn="ctr">
+              <a:defRPr sz="1400" b="1">
                 <a:solidFill>
                   <a:srgbClr val="2F5BA8"/>
                 </a:solidFill>
@@ -5504,7 +6045,7 @@
               </a:defRPr>
             </a:pPr>
             <a:r>
-              <a:t>DEMOSTRACIÓN</a:t>
+              <a:t>01</a:t>
             </a:r>
           </a:p>
         </p:txBody>
@@ -5517,8 +6058,8 @@
         </p:nvSpPr>
         <p:spPr>
           <a:xfrm>
-            <a:off x="932688" y="2212848"/>
-            <a:ext cx="9966960" cy="3246120"/>
+            <a:off x="850392" y="2971800"/>
+            <a:ext cx="1485900" cy="658368"/>
           </a:xfrm>
           <a:prstGeom prst="rect">
             <a:avLst/>
@@ -5526,16 +6067,777 @@
           <a:noFill/>
         </p:spPr>
         <p:txBody>
-          <a:bodyPr wrap="square" lIns="73152" rIns="45720" tIns="36576">
+          <a:bodyPr wrap="square" lIns="45720" rIns="45720" tIns="36576" bIns="36576" anchor="ctr">
             <a:spAutoFit/>
           </a:bodyPr>
           <a:lstStyle/>
           <a:p>
-            <a:pPr>
-              <a:spcAft>
-                <a:spcPts val="900"/>
-              </a:spcAft>
-              <a:defRPr sz="1900">
+            <a:pPr algn="ctr">
+              <a:defRPr sz="1700" b="1">
+                <a:solidFill>
+                  <a:srgbClr val="1C2330"/>
+                </a:solidFill>
+                <a:latin typeface="Aptos"/>
+              </a:defRPr>
+            </a:pPr>
+            <a:r>
+              <a:t>señala</a:t>
+            </a:r>
+          </a:p>
+        </p:txBody>
+      </p:sp>
+      <p:sp>
+        <p:nvSpPr>
+          <p:cNvPr id="11" name="Right Arrow 10"/>
+          <p:cNvSpPr/>
+          <p:nvPr/>
+        </p:nvSpPr>
+        <p:spPr>
+          <a:xfrm>
+            <a:off x="2519172" y="2907792"/>
+            <a:ext cx="228600" cy="411480"/>
+          </a:xfrm>
+          <a:prstGeom prst="rightArrow">
+            <a:avLst/>
+          </a:prstGeom>
+          <a:solidFill>
+            <a:srgbClr val="586270"/>
+          </a:solidFill>
+          <a:ln>
+            <a:noFill/>
+          </a:ln>
+        </p:spPr>
+        <p:style>
+          <a:lnRef idx="1">
+            <a:schemeClr val="accent1"/>
+          </a:lnRef>
+          <a:fillRef idx="3">
+            <a:schemeClr val="accent1"/>
+          </a:fillRef>
+          <a:effectRef idx="2">
+            <a:schemeClr val="accent1"/>
+          </a:effectRef>
+          <a:fontRef idx="minor">
+            <a:schemeClr val="lt1"/>
+          </a:fontRef>
+        </p:style>
+        <p:txBody>
+          <a:bodyPr rtlCol="0" anchor="ctr"/>
+          <a:lstStyle/>
+          <a:p>
+            <a:pPr algn="ctr"/>
+          </a:p>
+        </p:txBody>
+      </p:sp>
+      <p:sp>
+        <p:nvSpPr>
+          <p:cNvPr id="12" name="Rounded Rectangle 11"/>
+          <p:cNvSpPr/>
+          <p:nvPr/>
+        </p:nvSpPr>
+        <p:spPr>
+          <a:xfrm>
+            <a:off x="2510028" y="2240280"/>
+            <a:ext cx="1760220" cy="1874519"/>
+          </a:xfrm>
+          <a:prstGeom prst="roundRect">
+            <a:avLst/>
+          </a:prstGeom>
+          <a:solidFill>
+            <a:srgbClr val="FFFFFF"/>
+          </a:solidFill>
+          <a:ln>
+            <a:solidFill>
+              <a:srgbClr val="2F5BA8"/>
+            </a:solidFill>
+          </a:ln>
+        </p:spPr>
+        <p:style>
+          <a:lnRef idx="1">
+            <a:schemeClr val="accent1"/>
+          </a:lnRef>
+          <a:fillRef idx="3">
+            <a:schemeClr val="accent1"/>
+          </a:fillRef>
+          <a:effectRef idx="2">
+            <a:schemeClr val="accent1"/>
+          </a:effectRef>
+          <a:fontRef idx="minor">
+            <a:schemeClr val="lt1"/>
+          </a:fontRef>
+        </p:style>
+        <p:txBody>
+          <a:bodyPr rtlCol="0" anchor="ctr"/>
+          <a:lstStyle/>
+          <a:p>
+            <a:pPr algn="ctr"/>
+          </a:p>
+        </p:txBody>
+      </p:sp>
+      <p:sp>
+        <p:nvSpPr>
+          <p:cNvPr id="13" name="TextBox 12"/>
+          <p:cNvSpPr txBox="1"/>
+          <p:nvPr/>
+        </p:nvSpPr>
+        <p:spPr>
+          <a:xfrm>
+            <a:off x="2647188" y="2487168"/>
+            <a:ext cx="1485900" cy="320040"/>
+          </a:xfrm>
+          <a:prstGeom prst="rect">
+            <a:avLst/>
+          </a:prstGeom>
+          <a:noFill/>
+        </p:spPr>
+        <p:txBody>
+          <a:bodyPr wrap="square" lIns="45720" rIns="45720" tIns="36576" bIns="36576" anchor="t">
+            <a:spAutoFit/>
+          </a:bodyPr>
+          <a:lstStyle/>
+          <a:p>
+            <a:pPr algn="ctr">
+              <a:defRPr sz="1400" b="1">
+                <a:solidFill>
+                  <a:srgbClr val="2F5BA8"/>
+                </a:solidFill>
+                <a:latin typeface="Aptos"/>
+              </a:defRPr>
+            </a:pPr>
+            <a:r>
+              <a:t>02</a:t>
+            </a:r>
+          </a:p>
+        </p:txBody>
+      </p:sp>
+      <p:sp>
+        <p:nvSpPr>
+          <p:cNvPr id="14" name="TextBox 13"/>
+          <p:cNvSpPr txBox="1"/>
+          <p:nvPr/>
+        </p:nvSpPr>
+        <p:spPr>
+          <a:xfrm>
+            <a:off x="2647188" y="2971800"/>
+            <a:ext cx="1485900" cy="658368"/>
+          </a:xfrm>
+          <a:prstGeom prst="rect">
+            <a:avLst/>
+          </a:prstGeom>
+          <a:noFill/>
+        </p:spPr>
+        <p:txBody>
+          <a:bodyPr wrap="square" lIns="45720" rIns="45720" tIns="36576" bIns="36576" anchor="ctr">
+            <a:spAutoFit/>
+          </a:bodyPr>
+          <a:lstStyle/>
+          <a:p>
+            <a:pPr algn="ctr">
+              <a:defRPr sz="1700" b="1">
+                <a:solidFill>
+                  <a:srgbClr val="1C2330"/>
+                </a:solidFill>
+                <a:latin typeface="Aptos"/>
+              </a:defRPr>
+            </a:pPr>
+            <a:r>
+              <a:t>explica</a:t>
+            </a:r>
+          </a:p>
+        </p:txBody>
+      </p:sp>
+      <p:sp>
+        <p:nvSpPr>
+          <p:cNvPr id="15" name="Right Arrow 14"/>
+          <p:cNvSpPr/>
+          <p:nvPr/>
+        </p:nvSpPr>
+        <p:spPr>
+          <a:xfrm>
+            <a:off x="4315968" y="2907792"/>
+            <a:ext cx="228600" cy="411480"/>
+          </a:xfrm>
+          <a:prstGeom prst="rightArrow">
+            <a:avLst/>
+          </a:prstGeom>
+          <a:solidFill>
+            <a:srgbClr val="586270"/>
+          </a:solidFill>
+          <a:ln>
+            <a:noFill/>
+          </a:ln>
+        </p:spPr>
+        <p:style>
+          <a:lnRef idx="1">
+            <a:schemeClr val="accent1"/>
+          </a:lnRef>
+          <a:fillRef idx="3">
+            <a:schemeClr val="accent1"/>
+          </a:fillRef>
+          <a:effectRef idx="2">
+            <a:schemeClr val="accent1"/>
+          </a:effectRef>
+          <a:fontRef idx="minor">
+            <a:schemeClr val="lt1"/>
+          </a:fontRef>
+        </p:style>
+        <p:txBody>
+          <a:bodyPr rtlCol="0" anchor="ctr"/>
+          <a:lstStyle/>
+          <a:p>
+            <a:pPr algn="ctr"/>
+          </a:p>
+        </p:txBody>
+      </p:sp>
+      <p:sp>
+        <p:nvSpPr>
+          <p:cNvPr id="16" name="Rounded Rectangle 15"/>
+          <p:cNvSpPr/>
+          <p:nvPr/>
+        </p:nvSpPr>
+        <p:spPr>
+          <a:xfrm>
+            <a:off x="4306824" y="2240280"/>
+            <a:ext cx="1760220" cy="1874519"/>
+          </a:xfrm>
+          <a:prstGeom prst="roundRect">
+            <a:avLst/>
+          </a:prstGeom>
+          <a:solidFill>
+            <a:srgbClr val="FFFFFF"/>
+          </a:solidFill>
+          <a:ln>
+            <a:solidFill>
+              <a:srgbClr val="2F5BA8"/>
+            </a:solidFill>
+          </a:ln>
+        </p:spPr>
+        <p:style>
+          <a:lnRef idx="1">
+            <a:schemeClr val="accent1"/>
+          </a:lnRef>
+          <a:fillRef idx="3">
+            <a:schemeClr val="accent1"/>
+          </a:fillRef>
+          <a:effectRef idx="2">
+            <a:schemeClr val="accent1"/>
+          </a:effectRef>
+          <a:fontRef idx="minor">
+            <a:schemeClr val="lt1"/>
+          </a:fontRef>
+        </p:style>
+        <p:txBody>
+          <a:bodyPr rtlCol="0" anchor="ctr"/>
+          <a:lstStyle/>
+          <a:p>
+            <a:pPr algn="ctr"/>
+          </a:p>
+        </p:txBody>
+      </p:sp>
+      <p:sp>
+        <p:nvSpPr>
+          <p:cNvPr id="17" name="TextBox 16"/>
+          <p:cNvSpPr txBox="1"/>
+          <p:nvPr/>
+        </p:nvSpPr>
+        <p:spPr>
+          <a:xfrm>
+            <a:off x="4443984" y="2487168"/>
+            <a:ext cx="1485900" cy="320040"/>
+          </a:xfrm>
+          <a:prstGeom prst="rect">
+            <a:avLst/>
+          </a:prstGeom>
+          <a:noFill/>
+        </p:spPr>
+        <p:txBody>
+          <a:bodyPr wrap="square" lIns="45720" rIns="45720" tIns="36576" bIns="36576" anchor="t">
+            <a:spAutoFit/>
+          </a:bodyPr>
+          <a:lstStyle/>
+          <a:p>
+            <a:pPr algn="ctr">
+              <a:defRPr sz="1400" b="1">
+                <a:solidFill>
+                  <a:srgbClr val="2F5BA8"/>
+                </a:solidFill>
+                <a:latin typeface="Aptos"/>
+              </a:defRPr>
+            </a:pPr>
+            <a:r>
+              <a:t>03</a:t>
+            </a:r>
+          </a:p>
+        </p:txBody>
+      </p:sp>
+      <p:sp>
+        <p:nvSpPr>
+          <p:cNvPr id="18" name="TextBox 17"/>
+          <p:cNvSpPr txBox="1"/>
+          <p:nvPr/>
+        </p:nvSpPr>
+        <p:spPr>
+          <a:xfrm>
+            <a:off x="4443984" y="2971800"/>
+            <a:ext cx="1485900" cy="658368"/>
+          </a:xfrm>
+          <a:prstGeom prst="rect">
+            <a:avLst/>
+          </a:prstGeom>
+          <a:noFill/>
+        </p:spPr>
+        <p:txBody>
+          <a:bodyPr wrap="square" lIns="45720" rIns="45720" tIns="36576" bIns="36576" anchor="ctr">
+            <a:spAutoFit/>
+          </a:bodyPr>
+          <a:lstStyle/>
+          <a:p>
+            <a:pPr algn="ctr">
+              <a:defRPr sz="1700" b="1">
+                <a:solidFill>
+                  <a:srgbClr val="1C2330"/>
+                </a:solidFill>
+                <a:latin typeface="Aptos"/>
+              </a:defRPr>
+            </a:pPr>
+            <a:r>
+              <a:t>predice</a:t>
+            </a:r>
+          </a:p>
+        </p:txBody>
+      </p:sp>
+      <p:sp>
+        <p:nvSpPr>
+          <p:cNvPr id="19" name="Right Arrow 18"/>
+          <p:cNvSpPr/>
+          <p:nvPr/>
+        </p:nvSpPr>
+        <p:spPr>
+          <a:xfrm>
+            <a:off x="6112764" y="2907792"/>
+            <a:ext cx="228600" cy="411480"/>
+          </a:xfrm>
+          <a:prstGeom prst="rightArrow">
+            <a:avLst/>
+          </a:prstGeom>
+          <a:solidFill>
+            <a:srgbClr val="586270"/>
+          </a:solidFill>
+          <a:ln>
+            <a:noFill/>
+          </a:ln>
+        </p:spPr>
+        <p:style>
+          <a:lnRef idx="1">
+            <a:schemeClr val="accent1"/>
+          </a:lnRef>
+          <a:fillRef idx="3">
+            <a:schemeClr val="accent1"/>
+          </a:fillRef>
+          <a:effectRef idx="2">
+            <a:schemeClr val="accent1"/>
+          </a:effectRef>
+          <a:fontRef idx="minor">
+            <a:schemeClr val="lt1"/>
+          </a:fontRef>
+        </p:style>
+        <p:txBody>
+          <a:bodyPr rtlCol="0" anchor="ctr"/>
+          <a:lstStyle/>
+          <a:p>
+            <a:pPr algn="ctr"/>
+          </a:p>
+        </p:txBody>
+      </p:sp>
+      <p:sp>
+        <p:nvSpPr>
+          <p:cNvPr id="20" name="Rounded Rectangle 19"/>
+          <p:cNvSpPr/>
+          <p:nvPr/>
+        </p:nvSpPr>
+        <p:spPr>
+          <a:xfrm>
+            <a:off x="6103620" y="2240280"/>
+            <a:ext cx="1760220" cy="1874519"/>
+          </a:xfrm>
+          <a:prstGeom prst="roundRect">
+            <a:avLst/>
+          </a:prstGeom>
+          <a:solidFill>
+            <a:srgbClr val="FFFFFF"/>
+          </a:solidFill>
+          <a:ln>
+            <a:solidFill>
+              <a:srgbClr val="2F5BA8"/>
+            </a:solidFill>
+          </a:ln>
+        </p:spPr>
+        <p:style>
+          <a:lnRef idx="1">
+            <a:schemeClr val="accent1"/>
+          </a:lnRef>
+          <a:fillRef idx="3">
+            <a:schemeClr val="accent1"/>
+          </a:fillRef>
+          <a:effectRef idx="2">
+            <a:schemeClr val="accent1"/>
+          </a:effectRef>
+          <a:fontRef idx="minor">
+            <a:schemeClr val="lt1"/>
+          </a:fontRef>
+        </p:style>
+        <p:txBody>
+          <a:bodyPr rtlCol="0" anchor="ctr"/>
+          <a:lstStyle/>
+          <a:p>
+            <a:pPr algn="ctr"/>
+          </a:p>
+        </p:txBody>
+      </p:sp>
+      <p:sp>
+        <p:nvSpPr>
+          <p:cNvPr id="21" name="TextBox 20"/>
+          <p:cNvSpPr txBox="1"/>
+          <p:nvPr/>
+        </p:nvSpPr>
+        <p:spPr>
+          <a:xfrm>
+            <a:off x="6240780" y="2487168"/>
+            <a:ext cx="1485900" cy="320040"/>
+          </a:xfrm>
+          <a:prstGeom prst="rect">
+            <a:avLst/>
+          </a:prstGeom>
+          <a:noFill/>
+        </p:spPr>
+        <p:txBody>
+          <a:bodyPr wrap="square" lIns="45720" rIns="45720" tIns="36576" bIns="36576" anchor="t">
+            <a:spAutoFit/>
+          </a:bodyPr>
+          <a:lstStyle/>
+          <a:p>
+            <a:pPr algn="ctr">
+              <a:defRPr sz="1400" b="1">
+                <a:solidFill>
+                  <a:srgbClr val="2F5BA8"/>
+                </a:solidFill>
+                <a:latin typeface="Aptos"/>
+              </a:defRPr>
+            </a:pPr>
+            <a:r>
+              <a:t>04</a:t>
+            </a:r>
+          </a:p>
+        </p:txBody>
+      </p:sp>
+      <p:sp>
+        <p:nvSpPr>
+          <p:cNvPr id="22" name="TextBox 21"/>
+          <p:cNvSpPr txBox="1"/>
+          <p:nvPr/>
+        </p:nvSpPr>
+        <p:spPr>
+          <a:xfrm>
+            <a:off x="6240780" y="2971800"/>
+            <a:ext cx="1485900" cy="658368"/>
+          </a:xfrm>
+          <a:prstGeom prst="rect">
+            <a:avLst/>
+          </a:prstGeom>
+          <a:noFill/>
+        </p:spPr>
+        <p:txBody>
+          <a:bodyPr wrap="square" lIns="45720" rIns="45720" tIns="36576" bIns="36576" anchor="ctr">
+            <a:spAutoFit/>
+          </a:bodyPr>
+          <a:lstStyle/>
+          <a:p>
+            <a:pPr algn="ctr">
+              <a:defRPr sz="1700" b="1">
+                <a:solidFill>
+                  <a:srgbClr val="1C2330"/>
+                </a:solidFill>
+                <a:latin typeface="Aptos"/>
+              </a:defRPr>
+            </a:pPr>
+            <a:r>
+              <a:t>ejecuta</a:t>
+            </a:r>
+          </a:p>
+        </p:txBody>
+      </p:sp>
+      <p:sp>
+        <p:nvSpPr>
+          <p:cNvPr id="23" name="Right Arrow 22"/>
+          <p:cNvSpPr/>
+          <p:nvPr/>
+        </p:nvSpPr>
+        <p:spPr>
+          <a:xfrm>
+            <a:off x="7909560" y="2907792"/>
+            <a:ext cx="228600" cy="411480"/>
+          </a:xfrm>
+          <a:prstGeom prst="rightArrow">
+            <a:avLst/>
+          </a:prstGeom>
+          <a:solidFill>
+            <a:srgbClr val="586270"/>
+          </a:solidFill>
+          <a:ln>
+            <a:noFill/>
+          </a:ln>
+        </p:spPr>
+        <p:style>
+          <a:lnRef idx="1">
+            <a:schemeClr val="accent1"/>
+          </a:lnRef>
+          <a:fillRef idx="3">
+            <a:schemeClr val="accent1"/>
+          </a:fillRef>
+          <a:effectRef idx="2">
+            <a:schemeClr val="accent1"/>
+          </a:effectRef>
+          <a:fontRef idx="minor">
+            <a:schemeClr val="lt1"/>
+          </a:fontRef>
+        </p:style>
+        <p:txBody>
+          <a:bodyPr rtlCol="0" anchor="ctr"/>
+          <a:lstStyle/>
+          <a:p>
+            <a:pPr algn="ctr"/>
+          </a:p>
+        </p:txBody>
+      </p:sp>
+      <p:sp>
+        <p:nvSpPr>
+          <p:cNvPr id="24" name="Rounded Rectangle 23"/>
+          <p:cNvSpPr/>
+          <p:nvPr/>
+        </p:nvSpPr>
+        <p:spPr>
+          <a:xfrm>
+            <a:off x="7900416" y="2240280"/>
+            <a:ext cx="1760220" cy="1874519"/>
+          </a:xfrm>
+          <a:prstGeom prst="roundRect">
+            <a:avLst/>
+          </a:prstGeom>
+          <a:solidFill>
+            <a:srgbClr val="FFFFFF"/>
+          </a:solidFill>
+          <a:ln>
+            <a:solidFill>
+              <a:srgbClr val="2F5BA8"/>
+            </a:solidFill>
+          </a:ln>
+        </p:spPr>
+        <p:style>
+          <a:lnRef idx="1">
+            <a:schemeClr val="accent1"/>
+          </a:lnRef>
+          <a:fillRef idx="3">
+            <a:schemeClr val="accent1"/>
+          </a:fillRef>
+          <a:effectRef idx="2">
+            <a:schemeClr val="accent1"/>
+          </a:effectRef>
+          <a:fontRef idx="minor">
+            <a:schemeClr val="lt1"/>
+          </a:fontRef>
+        </p:style>
+        <p:txBody>
+          <a:bodyPr rtlCol="0" anchor="ctr"/>
+          <a:lstStyle/>
+          <a:p>
+            <a:pPr algn="ctr"/>
+          </a:p>
+        </p:txBody>
+      </p:sp>
+      <p:sp>
+        <p:nvSpPr>
+          <p:cNvPr id="25" name="TextBox 24"/>
+          <p:cNvSpPr txBox="1"/>
+          <p:nvPr/>
+        </p:nvSpPr>
+        <p:spPr>
+          <a:xfrm>
+            <a:off x="8037576" y="2487168"/>
+            <a:ext cx="1485900" cy="320040"/>
+          </a:xfrm>
+          <a:prstGeom prst="rect">
+            <a:avLst/>
+          </a:prstGeom>
+          <a:noFill/>
+        </p:spPr>
+        <p:txBody>
+          <a:bodyPr wrap="square" lIns="45720" rIns="45720" tIns="36576" bIns="36576" anchor="t">
+            <a:spAutoFit/>
+          </a:bodyPr>
+          <a:lstStyle/>
+          <a:p>
+            <a:pPr algn="ctr">
+              <a:defRPr sz="1400" b="1">
+                <a:solidFill>
+                  <a:srgbClr val="2F5BA8"/>
+                </a:solidFill>
+                <a:latin typeface="Aptos"/>
+              </a:defRPr>
+            </a:pPr>
+            <a:r>
+              <a:t>05</a:t>
+            </a:r>
+          </a:p>
+        </p:txBody>
+      </p:sp>
+      <p:sp>
+        <p:nvSpPr>
+          <p:cNvPr id="26" name="TextBox 25"/>
+          <p:cNvSpPr txBox="1"/>
+          <p:nvPr/>
+        </p:nvSpPr>
+        <p:spPr>
+          <a:xfrm>
+            <a:off x="8037576" y="2971800"/>
+            <a:ext cx="1485900" cy="658368"/>
+          </a:xfrm>
+          <a:prstGeom prst="rect">
+            <a:avLst/>
+          </a:prstGeom>
+          <a:noFill/>
+        </p:spPr>
+        <p:txBody>
+          <a:bodyPr wrap="square" lIns="45720" rIns="45720" tIns="36576" bIns="36576" anchor="ctr">
+            <a:spAutoFit/>
+          </a:bodyPr>
+          <a:lstStyle/>
+          <a:p>
+            <a:pPr algn="ctr">
+              <a:defRPr sz="1700" b="1">
+                <a:solidFill>
+                  <a:srgbClr val="1C2330"/>
+                </a:solidFill>
+                <a:latin typeface="Aptos"/>
+              </a:defRPr>
+            </a:pPr>
+            <a:r>
+              <a:t>modifica</a:t>
+            </a:r>
+          </a:p>
+        </p:txBody>
+      </p:sp>
+      <p:sp>
+        <p:nvSpPr>
+          <p:cNvPr id="27" name="Right Arrow 26"/>
+          <p:cNvSpPr/>
+          <p:nvPr/>
+        </p:nvSpPr>
+        <p:spPr>
+          <a:xfrm>
+            <a:off x="9706356" y="2907792"/>
+            <a:ext cx="228600" cy="411480"/>
+          </a:xfrm>
+          <a:prstGeom prst="rightArrow">
+            <a:avLst/>
+          </a:prstGeom>
+          <a:solidFill>
+            <a:srgbClr val="586270"/>
+          </a:solidFill>
+          <a:ln>
+            <a:noFill/>
+          </a:ln>
+        </p:spPr>
+        <p:style>
+          <a:lnRef idx="1">
+            <a:schemeClr val="accent1"/>
+          </a:lnRef>
+          <a:fillRef idx="3">
+            <a:schemeClr val="accent1"/>
+          </a:fillRef>
+          <a:effectRef idx="2">
+            <a:schemeClr val="accent1"/>
+          </a:effectRef>
+          <a:fontRef idx="minor">
+            <a:schemeClr val="lt1"/>
+          </a:fontRef>
+        </p:style>
+        <p:txBody>
+          <a:bodyPr rtlCol="0" anchor="ctr"/>
+          <a:lstStyle/>
+          <a:p>
+            <a:pPr algn="ctr"/>
+          </a:p>
+        </p:txBody>
+      </p:sp>
+      <p:sp>
+        <p:nvSpPr>
+          <p:cNvPr id="28" name="Rounded Rectangle 27"/>
+          <p:cNvSpPr/>
+          <p:nvPr/>
+        </p:nvSpPr>
+        <p:spPr>
+          <a:xfrm>
+            <a:off x="9697212" y="2240280"/>
+            <a:ext cx="1760220" cy="1874519"/>
+          </a:xfrm>
+          <a:prstGeom prst="roundRect">
+            <a:avLst/>
+          </a:prstGeom>
+          <a:solidFill>
+            <a:srgbClr val="2F5BA8"/>
+          </a:solidFill>
+          <a:ln>
+            <a:solidFill>
+              <a:srgbClr val="2F5BA8"/>
+            </a:solidFill>
+          </a:ln>
+        </p:spPr>
+        <p:style>
+          <a:lnRef idx="1">
+            <a:schemeClr val="accent1"/>
+          </a:lnRef>
+          <a:fillRef idx="3">
+            <a:schemeClr val="accent1"/>
+          </a:fillRef>
+          <a:effectRef idx="2">
+            <a:schemeClr val="accent1"/>
+          </a:effectRef>
+          <a:fontRef idx="minor">
+            <a:schemeClr val="lt1"/>
+          </a:fontRef>
+        </p:style>
+        <p:txBody>
+          <a:bodyPr rtlCol="0" anchor="ctr"/>
+          <a:lstStyle/>
+          <a:p>
+            <a:pPr algn="ctr"/>
+          </a:p>
+        </p:txBody>
+      </p:sp>
+      <p:sp>
+        <p:nvSpPr>
+          <p:cNvPr id="29" name="TextBox 28"/>
+          <p:cNvSpPr txBox="1"/>
+          <p:nvPr/>
+        </p:nvSpPr>
+        <p:spPr>
+          <a:xfrm>
+            <a:off x="9834372" y="2487168"/>
+            <a:ext cx="1485900" cy="320040"/>
+          </a:xfrm>
+          <a:prstGeom prst="rect">
+            <a:avLst/>
+          </a:prstGeom>
+          <a:noFill/>
+        </p:spPr>
+        <p:txBody>
+          <a:bodyPr wrap="square" lIns="45720" rIns="45720" tIns="36576" bIns="36576" anchor="t">
+            <a:spAutoFit/>
+          </a:bodyPr>
+          <a:lstStyle/>
+          <a:p>
+            <a:pPr algn="ctr">
+              <a:defRPr sz="1400" b="1">
                 <a:solidFill>
                   <a:srgbClr val="FFFFFF"/>
                 </a:solidFill>
@@ -5543,15 +6845,35 @@
               </a:defRPr>
             </a:pPr>
             <a:r>
-              <a:t>•  D1 · La defensa no es recitar — Vas a señalar, explicar, ejecutar y modificar una parte pequeña de tu propio H1.</a:t>
-            </a:r>
-          </a:p>
-          <a:p>
-            <a:pPr>
-              <a:spcAft>
-                <a:spcPts val="900"/>
-              </a:spcAft>
-              <a:defRPr sz="1900">
+              <a:t>06</a:t>
+            </a:r>
+          </a:p>
+        </p:txBody>
+      </p:sp>
+      <p:sp>
+        <p:nvSpPr>
+          <p:cNvPr id="30" name="TextBox 29"/>
+          <p:cNvSpPr txBox="1"/>
+          <p:nvPr/>
+        </p:nvSpPr>
+        <p:spPr>
+          <a:xfrm>
+            <a:off x="9834372" y="2971800"/>
+            <a:ext cx="1485900" cy="658368"/>
+          </a:xfrm>
+          <a:prstGeom prst="rect">
+            <a:avLst/>
+          </a:prstGeom>
+          <a:noFill/>
+        </p:spPr>
+        <p:txBody>
+          <a:bodyPr wrap="square" lIns="45720" rIns="45720" tIns="36576" bIns="36576" anchor="ctr">
+            <a:spAutoFit/>
+          </a:bodyPr>
+          <a:lstStyle/>
+          <a:p>
+            <a:pPr algn="ctr">
+              <a:defRPr sz="1700" b="1">
                 <a:solidFill>
                   <a:srgbClr val="FFFFFF"/>
                 </a:solidFill>
@@ -5559,55 +6881,7 @@
               </a:defRPr>
             </a:pPr>
             <a:r>
-              <a:t>•  D2 · Así es una respuesta defendible SEÑALA: “Esta línea lee el nombre” / “Esta variable guarda la edad” \| EXPLICA: tipo, decisión y efecto \| DEMUESTRA:</a:t>
-            </a:r>
-          </a:p>
-          <a:p>
-            <a:pPr>
-              <a:spcAft>
-                <a:spcPts val="900"/>
-              </a:spcAft>
-              <a:defRPr sz="1900">
-                <a:solidFill>
-                  <a:srgbClr val="FFFFFF"/>
-                </a:solidFill>
-                <a:latin typeface="Aptos"/>
-              </a:defRPr>
-            </a:pPr>
-            <a:r>
-              <a:t>•  ejecuta con una entrada y predice la salida</a:t>
-            </a:r>
-          </a:p>
-          <a:p>
-            <a:pPr>
-              <a:spcAft>
-                <a:spcPts val="900"/>
-              </a:spcAft>
-              <a:defRPr sz="1900">
-                <a:solidFill>
-                  <a:srgbClr val="FFFFFF"/>
-                </a:solidFill>
-                <a:latin typeface="Aptos"/>
-              </a:defRPr>
-            </a:pPr>
-            <a:r>
-              <a:t>•  D3 · Ronda de defensa + ensayo por parejas — Mientras una persona defiende, el resto:</a:t>
-            </a:r>
-          </a:p>
-          <a:p>
-            <a:pPr>
-              <a:spcAft>
-                <a:spcPts val="900"/>
-              </a:spcAft>
-              <a:defRPr sz="1900">
-                <a:solidFill>
-                  <a:srgbClr val="FFFFFF"/>
-                </a:solidFill>
-                <a:latin typeface="Aptos"/>
-              </a:defRPr>
-            </a:pPr>
-            <a:r>
-              <a:t>•  • ensaya preguntas</a:t>
+              <a:t>vuelve a probar</a:t>
             </a:r>
           </a:p>
         </p:txBody>
@@ -5747,7 +7021,7 @@
               </a:defRPr>
             </a:pPr>
             <a:r>
-              <a:t>OBSERVAR ANTES DE ACTUAR</a:t>
+              <a:t>CONTRASTAR PARA DECIDIR</a:t>
             </a:r>
           </a:p>
         </p:txBody>
@@ -5783,7 +7057,7 @@
               </a:defRPr>
             </a:pPr>
             <a:r>
-              <a:t>Ejemplo o demostración · 2</a:t>
+              <a:t>Respuesta defendible o respuesta vaga</a:t>
             </a:r>
           </a:p>
         </p:txBody>
@@ -5875,17 +7149,19 @@
         </p:nvSpPr>
         <p:spPr>
           <a:xfrm>
-            <a:off x="621792" y="1353312"/>
-            <a:ext cx="10927080" cy="4526280"/>
+            <a:off x="621792" y="1325880"/>
+            <a:ext cx="5230368" cy="3401568"/>
           </a:xfrm>
           <a:prstGeom prst="roundRect">
             <a:avLst/>
           </a:prstGeom>
           <a:solidFill>
-            <a:srgbClr val="121824"/>
+            <a:srgbClr val="FFFFFF"/>
           </a:solidFill>
           <a:ln>
-            <a:noFill/>
+            <a:solidFill>
+              <a:srgbClr val="445B80"/>
+            </a:solidFill>
           </a:ln>
         </p:spPr>
         <p:style>
@@ -5912,14 +7188,59 @@
       </p:sp>
       <p:sp>
         <p:nvSpPr>
-          <p:cNvPr id="9" name="TextBox 8"/>
+          <p:cNvPr id="9" name="Rounded Rectangle 8"/>
+          <p:cNvSpPr/>
+          <p:nvPr/>
+        </p:nvSpPr>
+        <p:spPr>
+          <a:xfrm>
+            <a:off x="850392" y="1572768"/>
+            <a:ext cx="566928" cy="475488"/>
+          </a:xfrm>
+          <a:prstGeom prst="roundRect">
+            <a:avLst/>
+          </a:prstGeom>
+          <a:solidFill>
+            <a:srgbClr val="445B80"/>
+          </a:solidFill>
+          <a:ln>
+            <a:solidFill>
+              <a:srgbClr val="445B80"/>
+            </a:solidFill>
+          </a:ln>
+        </p:spPr>
+        <p:style>
+          <a:lnRef idx="1">
+            <a:schemeClr val="accent1"/>
+          </a:lnRef>
+          <a:fillRef idx="3">
+            <a:schemeClr val="accent1"/>
+          </a:fillRef>
+          <a:effectRef idx="2">
+            <a:schemeClr val="accent1"/>
+          </a:effectRef>
+          <a:fontRef idx="minor">
+            <a:schemeClr val="lt1"/>
+          </a:fontRef>
+        </p:style>
+        <p:txBody>
+          <a:bodyPr rtlCol="0" anchor="ctr"/>
+          <a:lstStyle/>
+          <a:p>
+            <a:pPr algn="ctr"/>
+          </a:p>
+        </p:txBody>
+      </p:sp>
+      <p:sp>
+        <p:nvSpPr>
+          <p:cNvPr id="10" name="TextBox 9"/>
           <p:cNvSpPr txBox="1"/>
           <p:nvPr/>
         </p:nvSpPr>
         <p:spPr>
           <a:xfrm>
-            <a:off x="932688" y="1627632"/>
-            <a:ext cx="2057400" cy="411480"/>
+            <a:off x="850392" y="1682496"/>
+            <a:ext cx="566928" cy="182880"/>
           </a:xfrm>
           <a:prstGeom prst="rect">
             <a:avLst/>
@@ -5932,47 +7253,8 @@
           </a:bodyPr>
           <a:lstStyle/>
           <a:p>
-            <a:pPr algn="l">
+            <a:pPr algn="ctr">
               <a:defRPr sz="1300" b="1">
-                <a:solidFill>
-                  <a:srgbClr val="2F5BA8"/>
-                </a:solidFill>
-                <a:latin typeface="Aptos"/>
-              </a:defRPr>
-            </a:pPr>
-            <a:r>
-              <a:t>DEMOSTRACIÓN</a:t>
-            </a:r>
-          </a:p>
-        </p:txBody>
-      </p:sp>
-      <p:sp>
-        <p:nvSpPr>
-          <p:cNvPr id="10" name="TextBox 9"/>
-          <p:cNvSpPr txBox="1"/>
-          <p:nvPr/>
-        </p:nvSpPr>
-        <p:spPr>
-          <a:xfrm>
-            <a:off x="932688" y="2212848"/>
-            <a:ext cx="9966960" cy="3246120"/>
-          </a:xfrm>
-          <a:prstGeom prst="rect">
-            <a:avLst/>
-          </a:prstGeom>
-          <a:noFill/>
-        </p:spPr>
-        <p:txBody>
-          <a:bodyPr wrap="square" lIns="73152" rIns="45720" tIns="36576">
-            <a:spAutoFit/>
-          </a:bodyPr>
-          <a:lstStyle/>
-          <a:p>
-            <a:pPr>
-              <a:spcAft>
-                <a:spcPts val="900"/>
-              </a:spcAft>
-              <a:defRPr sz="2200">
                 <a:solidFill>
                   <a:srgbClr val="FFFFFF"/>
                 </a:solidFill>
@@ -5980,15 +7262,161 @@
               </a:defRPr>
             </a:pPr>
             <a:r>
-              <a:t>•  • revisa el diario y la selección de evidencias del Site</a:t>
-            </a:r>
-          </a:p>
-          <a:p>
-            <a:pPr>
-              <a:spcAft>
-                <a:spcPts val="900"/>
-              </a:spcAft>
-              <a:defRPr sz="2200">
+              <a:t>A</a:t>
+            </a:r>
+          </a:p>
+        </p:txBody>
+      </p:sp>
+      <p:sp>
+        <p:nvSpPr>
+          <p:cNvPr id="11" name="TextBox 10"/>
+          <p:cNvSpPr txBox="1"/>
+          <p:nvPr/>
+        </p:nvSpPr>
+        <p:spPr>
+          <a:xfrm>
+            <a:off x="896112" y="2267712"/>
+            <a:ext cx="4663440" cy="2057400"/>
+          </a:xfrm>
+          <a:prstGeom prst="rect">
+            <a:avLst/>
+          </a:prstGeom>
+          <a:noFill/>
+        </p:spPr>
+        <p:txBody>
+          <a:bodyPr wrap="square" lIns="45720" rIns="45720" tIns="36576" bIns="36576" anchor="t">
+            <a:spAutoFit/>
+          </a:bodyPr>
+          <a:lstStyle/>
+          <a:p>
+            <a:pPr algn="l">
+              <a:defRPr sz="2100" b="1">
+                <a:solidFill>
+                  <a:srgbClr val="1C2330"/>
+                </a:solidFill>
+                <a:latin typeface="Aptos"/>
+              </a:defRPr>
+            </a:pPr>
+            <a:r>
+              <a:t>VAGA · Lo hice así porque funcionaba.</a:t>
+            </a:r>
+          </a:p>
+        </p:txBody>
+      </p:sp>
+      <p:sp>
+        <p:nvSpPr>
+          <p:cNvPr id="12" name="Rounded Rectangle 11"/>
+          <p:cNvSpPr/>
+          <p:nvPr/>
+        </p:nvSpPr>
+        <p:spPr>
+          <a:xfrm>
+            <a:off x="6153912" y="1325880"/>
+            <a:ext cx="5230368" cy="3401568"/>
+          </a:xfrm>
+          <a:prstGeom prst="roundRect">
+            <a:avLst/>
+          </a:prstGeom>
+          <a:solidFill>
+            <a:srgbClr val="FFFFFF"/>
+          </a:solidFill>
+          <a:ln>
+            <a:solidFill>
+              <a:srgbClr val="2F5BA8"/>
+            </a:solidFill>
+          </a:ln>
+        </p:spPr>
+        <p:style>
+          <a:lnRef idx="1">
+            <a:schemeClr val="accent1"/>
+          </a:lnRef>
+          <a:fillRef idx="3">
+            <a:schemeClr val="accent1"/>
+          </a:fillRef>
+          <a:effectRef idx="2">
+            <a:schemeClr val="accent1"/>
+          </a:effectRef>
+          <a:fontRef idx="minor">
+            <a:schemeClr val="lt1"/>
+          </a:fontRef>
+        </p:style>
+        <p:txBody>
+          <a:bodyPr rtlCol="0" anchor="ctr"/>
+          <a:lstStyle/>
+          <a:p>
+            <a:pPr algn="ctr"/>
+          </a:p>
+        </p:txBody>
+      </p:sp>
+      <p:sp>
+        <p:nvSpPr>
+          <p:cNvPr id="13" name="Rounded Rectangle 12"/>
+          <p:cNvSpPr/>
+          <p:nvPr/>
+        </p:nvSpPr>
+        <p:spPr>
+          <a:xfrm>
+            <a:off x="6382512" y="1572768"/>
+            <a:ext cx="566928" cy="475488"/>
+          </a:xfrm>
+          <a:prstGeom prst="roundRect">
+            <a:avLst/>
+          </a:prstGeom>
+          <a:solidFill>
+            <a:srgbClr val="2F5BA8"/>
+          </a:solidFill>
+          <a:ln>
+            <a:solidFill>
+              <a:srgbClr val="2F5BA8"/>
+            </a:solidFill>
+          </a:ln>
+        </p:spPr>
+        <p:style>
+          <a:lnRef idx="1">
+            <a:schemeClr val="accent1"/>
+          </a:lnRef>
+          <a:fillRef idx="3">
+            <a:schemeClr val="accent1"/>
+          </a:fillRef>
+          <a:effectRef idx="2">
+            <a:schemeClr val="accent1"/>
+          </a:effectRef>
+          <a:fontRef idx="minor">
+            <a:schemeClr val="lt1"/>
+          </a:fontRef>
+        </p:style>
+        <p:txBody>
+          <a:bodyPr rtlCol="0" anchor="ctr"/>
+          <a:lstStyle/>
+          <a:p>
+            <a:pPr algn="ctr"/>
+          </a:p>
+        </p:txBody>
+      </p:sp>
+      <p:sp>
+        <p:nvSpPr>
+          <p:cNvPr id="14" name="TextBox 13"/>
+          <p:cNvSpPr txBox="1"/>
+          <p:nvPr/>
+        </p:nvSpPr>
+        <p:spPr>
+          <a:xfrm>
+            <a:off x="6382512" y="1682496"/>
+            <a:ext cx="566928" cy="182880"/>
+          </a:xfrm>
+          <a:prstGeom prst="rect">
+            <a:avLst/>
+          </a:prstGeom>
+          <a:noFill/>
+        </p:spPr>
+        <p:txBody>
+          <a:bodyPr wrap="square" lIns="45720" rIns="45720" tIns="36576" bIns="36576" anchor="t">
+            <a:spAutoFit/>
+          </a:bodyPr>
+          <a:lstStyle/>
+          <a:p>
+            <a:pPr algn="ctr">
+              <a:defRPr sz="1300" b="1">
                 <a:solidFill>
                   <a:srgbClr val="FFFFFF"/>
                 </a:solidFill>
@@ -5996,15 +7424,116 @@
               </a:defRPr>
             </a:pPr>
             <a:r>
-              <a:t>•  • comprueba enlaces</a:t>
-            </a:r>
-          </a:p>
-          <a:p>
-            <a:pPr>
-              <a:spcAft>
-                <a:spcPts val="900"/>
-              </a:spcAft>
-              <a:defRPr sz="2200">
+              <a:t>B</a:t>
+            </a:r>
+          </a:p>
+        </p:txBody>
+      </p:sp>
+      <p:sp>
+        <p:nvSpPr>
+          <p:cNvPr id="15" name="TextBox 14"/>
+          <p:cNvSpPr txBox="1"/>
+          <p:nvPr/>
+        </p:nvSpPr>
+        <p:spPr>
+          <a:xfrm>
+            <a:off x="6428232" y="2267712"/>
+            <a:ext cx="4663440" cy="2057400"/>
+          </a:xfrm>
+          <a:prstGeom prst="rect">
+            <a:avLst/>
+          </a:prstGeom>
+          <a:noFill/>
+        </p:spPr>
+        <p:txBody>
+          <a:bodyPr wrap="square" lIns="45720" rIns="45720" tIns="36576" bIns="36576" anchor="t">
+            <a:spAutoFit/>
+          </a:bodyPr>
+          <a:lstStyle/>
+          <a:p>
+            <a:pPr algn="l">
+              <a:defRPr sz="2100" b="1">
+                <a:solidFill>
+                  <a:srgbClr val="1C2330"/>
+                </a:solidFill>
+                <a:latin typeface="Aptos"/>
+              </a:defRPr>
+            </a:pPr>
+            <a:r>
+              <a:t>DEFENDIBLE · Esta línea lee un String, lo guarda en userName y por eso Laura aparece en la salida.</a:t>
+            </a:r>
+          </a:p>
+        </p:txBody>
+      </p:sp>
+      <p:sp>
+        <p:nvSpPr>
+          <p:cNvPr id="16" name="Rounded Rectangle 15"/>
+          <p:cNvSpPr/>
+          <p:nvPr/>
+        </p:nvSpPr>
+        <p:spPr>
+          <a:xfrm>
+            <a:off x="621792" y="5010912"/>
+            <a:ext cx="10762488" cy="932688"/>
+          </a:xfrm>
+          <a:prstGeom prst="roundRect">
+            <a:avLst/>
+          </a:prstGeom>
+          <a:solidFill>
+            <a:srgbClr val="121824"/>
+          </a:solidFill>
+          <a:ln>
+            <a:solidFill>
+              <a:srgbClr val="121824"/>
+            </a:solidFill>
+          </a:ln>
+        </p:spPr>
+        <p:style>
+          <a:lnRef idx="1">
+            <a:schemeClr val="accent1"/>
+          </a:lnRef>
+          <a:fillRef idx="3">
+            <a:schemeClr val="accent1"/>
+          </a:fillRef>
+          <a:effectRef idx="2">
+            <a:schemeClr val="accent1"/>
+          </a:effectRef>
+          <a:fontRef idx="minor">
+            <a:schemeClr val="lt1"/>
+          </a:fontRef>
+        </p:style>
+        <p:txBody>
+          <a:bodyPr rtlCol="0" anchor="ctr"/>
+          <a:lstStyle/>
+          <a:p>
+            <a:pPr algn="ctr"/>
+          </a:p>
+        </p:txBody>
+      </p:sp>
+      <p:sp>
+        <p:nvSpPr>
+          <p:cNvPr id="17" name="TextBox 16"/>
+          <p:cNvSpPr txBox="1"/>
+          <p:nvPr/>
+        </p:nvSpPr>
+        <p:spPr>
+          <a:xfrm>
+            <a:off x="896112" y="5230368"/>
+            <a:ext cx="10204704" cy="475488"/>
+          </a:xfrm>
+          <a:prstGeom prst="rect">
+            <a:avLst/>
+          </a:prstGeom>
+          <a:noFill/>
+        </p:spPr>
+        <p:txBody>
+          <a:bodyPr wrap="square" lIns="45720" rIns="45720" tIns="36576" bIns="36576" anchor="t">
+            <a:spAutoFit/>
+          </a:bodyPr>
+          <a:lstStyle/>
+          <a:p>
+            <a:pPr algn="ctr">
+              <a:defRPr sz="1700" b="1">
                 <a:solidFill>
                   <a:srgbClr val="FFFFFF"/>
                 </a:solidFill>
@@ -6012,23 +7541,7 @@
               </a:defRPr>
             </a:pPr>
             <a:r>
-              <a:t>•  • prepara una modificación pequeña</a:t>
-            </a:r>
-          </a:p>
-          <a:p>
-            <a:pPr>
-              <a:spcAft>
-                <a:spcPts val="900"/>
-              </a:spcAft>
-              <a:defRPr sz="2200">
-                <a:solidFill>
-                  <a:srgbClr val="FFFFFF"/>
-                </a:solidFill>
-                <a:latin typeface="Aptos"/>
-              </a:defRPr>
-            </a:pPr>
-            <a:r>
-              <a:t>•  D4 · Si aparece una laguna, se recupera la evidencia concreta — No hace falta repetir todo H1.</a:t>
+              <a:t>La defensa conecta una afirmación con código, ejecución y evidencia propia.</a:t>
             </a:r>
           </a:p>
         </p:txBody>
@@ -6168,7 +7681,7 @@
               </a:defRPr>
             </a:pPr>
             <a:r>
-              <a:t>APLICAR Y DECIDIR</a:t>
+              <a:t>COMPRENDER</a:t>
             </a:r>
           </a:p>
         </p:txBody>
@@ -6204,7 +7717,7 @@
               </a:defRPr>
             </a:pPr>
             <a:r>
-              <a:t>Actividad central · 1</a:t>
+              <a:t>Hilo conceptual de H1</a:t>
             </a:r>
           </a:p>
         </p:txBody>
@@ -6296,8 +7809,8 @@
         </p:nvSpPr>
         <p:spPr>
           <a:xfrm>
-            <a:off x="658368" y="1307592"/>
-            <a:ext cx="10835640" cy="1049274"/>
+            <a:off x="566928" y="1261872"/>
+            <a:ext cx="3398520" cy="2199132"/>
           </a:xfrm>
           <a:prstGeom prst="roundRect">
             <a:avLst/>
@@ -6341,8 +7854,8 @@
         </p:nvSpPr>
         <p:spPr>
           <a:xfrm>
-            <a:off x="850392" y="1453895"/>
-            <a:ext cx="685800" cy="384048"/>
+            <a:off x="768096" y="1426463"/>
+            <a:ext cx="384048" cy="347472"/>
           </a:xfrm>
           <a:prstGeom prst="rect">
             <a:avLst/>
@@ -6356,7 +7869,7 @@
           <a:lstStyle/>
           <a:p>
             <a:pPr algn="l">
-              <a:defRPr sz="1200" b="1">
+              <a:defRPr sz="1500" b="1">
                 <a:solidFill>
                   <a:srgbClr val="2F5BA8"/>
                 </a:solidFill>
@@ -6364,7 +7877,7 @@
               </a:defRPr>
             </a:pPr>
             <a:r>
-              <a:t>PASO 1</a:t>
+              <a:t>01</a:t>
             </a:r>
           </a:p>
         </p:txBody>
@@ -6377,8 +7890,8 @@
         </p:nvSpPr>
         <p:spPr>
           <a:xfrm>
-            <a:off x="1664208" y="1417319"/>
-            <a:ext cx="9464040" cy="829818"/>
+            <a:off x="1225295" y="1426463"/>
+            <a:ext cx="2621280" cy="1961388"/>
           </a:xfrm>
           <a:prstGeom prst="rect">
             <a:avLst/>
@@ -6392,7 +7905,7 @@
           <a:lstStyle/>
           <a:p>
             <a:pPr algn="l">
-              <a:defRPr sz="2000" b="0">
+              <a:defRPr sz="1800" b="0">
                 <a:solidFill>
                   <a:srgbClr val="1C2330"/>
                 </a:solidFill>
@@ -6400,7 +7913,7 @@
               </a:defRPr>
             </a:pPr>
             <a:r>
-              <a:t>Predice antes de ejecutar cuando haya código.</a:t>
+              <a:t>dato → variable o constante</a:t>
             </a:r>
           </a:p>
         </p:txBody>
@@ -6413,8 +7926,8 @@
         </p:nvSpPr>
         <p:spPr>
           <a:xfrm>
-            <a:off x="658368" y="2542032"/>
-            <a:ext cx="10835640" cy="1049274"/>
+            <a:off x="4194048" y="1261872"/>
+            <a:ext cx="3398520" cy="2199132"/>
           </a:xfrm>
           <a:prstGeom prst="roundRect">
             <a:avLst/>
@@ -6458,8 +7971,8 @@
         </p:nvSpPr>
         <p:spPr>
           <a:xfrm>
-            <a:off x="850392" y="2688336"/>
-            <a:ext cx="685800" cy="384048"/>
+            <a:off x="4395216" y="1426463"/>
+            <a:ext cx="384048" cy="347472"/>
           </a:xfrm>
           <a:prstGeom prst="rect">
             <a:avLst/>
@@ -6473,7 +7986,7 @@
           <a:lstStyle/>
           <a:p>
             <a:pPr algn="l">
-              <a:defRPr sz="1200" b="1">
+              <a:defRPr sz="1500" b="1">
                 <a:solidFill>
                   <a:srgbClr val="2F5BA8"/>
                 </a:solidFill>
@@ -6481,7 +7994,7 @@
               </a:defRPr>
             </a:pPr>
             <a:r>
-              <a:t>PASO 2</a:t>
+              <a:t>02</a:t>
             </a:r>
           </a:p>
         </p:txBody>
@@ -6494,8 +8007,8 @@
         </p:nvSpPr>
         <p:spPr>
           <a:xfrm>
-            <a:off x="1664208" y="2651760"/>
-            <a:ext cx="9464040" cy="829818"/>
+            <a:off x="4852416" y="1426463"/>
+            <a:ext cx="2621280" cy="1961388"/>
           </a:xfrm>
           <a:prstGeom prst="rect">
             <a:avLst/>
@@ -6509,7 +8022,7 @@
           <a:lstStyle/>
           <a:p>
             <a:pPr algn="l">
-              <a:defRPr sz="2000" b="0">
+              <a:defRPr sz="1800" b="0">
                 <a:solidFill>
                   <a:srgbClr val="1C2330"/>
                 </a:solidFill>
@@ -6517,7 +8030,7 @@
               </a:defRPr>
             </a:pPr>
             <a:r>
-              <a:t>Realiza la micropráctica o modificación prevista.</a:t>
+              <a:t>operación o comparación → resultado</a:t>
             </a:r>
           </a:p>
         </p:txBody>
@@ -6530,8 +8043,8 @@
         </p:nvSpPr>
         <p:spPr>
           <a:xfrm>
-            <a:off x="658368" y="3776472"/>
-            <a:ext cx="10835640" cy="1049274"/>
+            <a:off x="7821167" y="1261872"/>
+            <a:ext cx="3398520" cy="2199132"/>
           </a:xfrm>
           <a:prstGeom prst="roundRect">
             <a:avLst/>
@@ -6575,8 +8088,8 @@
         </p:nvSpPr>
         <p:spPr>
           <a:xfrm>
-            <a:off x="850392" y="3922776"/>
-            <a:ext cx="685800" cy="384048"/>
+            <a:off x="8022336" y="1426463"/>
+            <a:ext cx="384048" cy="347472"/>
           </a:xfrm>
           <a:prstGeom prst="rect">
             <a:avLst/>
@@ -6590,7 +8103,7 @@
           <a:lstStyle/>
           <a:p>
             <a:pPr algn="l">
-              <a:defRPr sz="1200" b="1">
+              <a:defRPr sz="1500" b="1">
                 <a:solidFill>
                   <a:srgbClr val="2F5BA8"/>
                 </a:solidFill>
@@ -6598,7 +8111,7 @@
               </a:defRPr>
             </a:pPr>
             <a:r>
-              <a:t>PASO 3</a:t>
+              <a:t>03</a:t>
             </a:r>
           </a:p>
         </p:txBody>
@@ -6611,8 +8124,8 @@
         </p:nvSpPr>
         <p:spPr>
           <a:xfrm>
-            <a:off x="1664208" y="3886200"/>
-            <a:ext cx="9464040" cy="829818"/>
+            <a:off x="8479536" y="1426463"/>
+            <a:ext cx="2621280" cy="1961388"/>
           </a:xfrm>
           <a:prstGeom prst="rect">
             <a:avLst/>
@@ -6626,7 +8139,7 @@
           <a:lstStyle/>
           <a:p>
             <a:pPr algn="l">
-              <a:defRPr sz="2000" b="0">
+              <a:defRPr sz="1800" b="0">
                 <a:solidFill>
                   <a:srgbClr val="1C2330"/>
                 </a:solidFill>
@@ -6634,7 +8147,7 @@
               </a:defRPr>
             </a:pPr>
             <a:r>
-              <a:t>Prueba el caso normal y, cuando exista una decisión o conversión, también el caso alternativo o erróneo.</a:t>
+              <a:t>boolean → decisión</a:t>
             </a:r>
           </a:p>
         </p:txBody>
@@ -6647,8 +8160,8 @@
         </p:nvSpPr>
         <p:spPr>
           <a:xfrm>
-            <a:off x="658368" y="5010912"/>
-            <a:ext cx="10835640" cy="1049274"/>
+            <a:off x="566928" y="3662172"/>
+            <a:ext cx="3398520" cy="2199132"/>
           </a:xfrm>
           <a:prstGeom prst="roundRect">
             <a:avLst/>
@@ -6692,8 +8205,8 @@
         </p:nvSpPr>
         <p:spPr>
           <a:xfrm>
-            <a:off x="850392" y="5157216"/>
-            <a:ext cx="685800" cy="384048"/>
+            <a:off x="768096" y="3826763"/>
+            <a:ext cx="384048" cy="347472"/>
           </a:xfrm>
           <a:prstGeom prst="rect">
             <a:avLst/>
@@ -6707,7 +8220,7 @@
           <a:lstStyle/>
           <a:p>
             <a:pPr algn="l">
-              <a:defRPr sz="1200" b="1">
+              <a:defRPr sz="1500" b="1">
                 <a:solidFill>
                   <a:srgbClr val="2F5BA8"/>
                 </a:solidFill>
@@ -6715,7 +8228,7 @@
               </a:defRPr>
             </a:pPr>
             <a:r>
-              <a:t>PASO 4</a:t>
+              <a:t>04</a:t>
             </a:r>
           </a:p>
         </p:txBody>
@@ -6728,8 +8241,8 @@
         </p:nvSpPr>
         <p:spPr>
           <a:xfrm>
-            <a:off x="1664208" y="5120640"/>
-            <a:ext cx="9464040" cy="829818"/>
+            <a:off x="1225295" y="3826763"/>
+            <a:ext cx="2621280" cy="1961388"/>
           </a:xfrm>
           <a:prstGeom prst="rect">
             <a:avLst/>
@@ -6743,7 +8256,7 @@
           <a:lstStyle/>
           <a:p>
             <a:pPr algn="l">
-              <a:defRPr sz="2000" b="0">
+              <a:defRPr sz="1800" b="0">
                 <a:solidFill>
                   <a:srgbClr val="1C2330"/>
                 </a:solidFill>
@@ -6751,7 +8264,124 @@
               </a:defRPr>
             </a:pPr>
             <a:r>
-              <a:t>Conserva el código o resultado en el repositorio o espacio indicado.</a:t>
+              <a:t>salida → prueba observable</a:t>
+            </a:r>
+          </a:p>
+        </p:txBody>
+      </p:sp>
+      <p:sp>
+        <p:nvSpPr>
+          <p:cNvPr id="20" name="Rounded Rectangle 19"/>
+          <p:cNvSpPr/>
+          <p:nvPr/>
+        </p:nvSpPr>
+        <p:spPr>
+          <a:xfrm>
+            <a:off x="4194048" y="3662172"/>
+            <a:ext cx="3398520" cy="2199132"/>
+          </a:xfrm>
+          <a:prstGeom prst="roundRect">
+            <a:avLst/>
+          </a:prstGeom>
+          <a:solidFill>
+            <a:srgbClr val="FFFFFF"/>
+          </a:solidFill>
+          <a:ln>
+            <a:solidFill>
+              <a:srgbClr val="E5E9EF"/>
+            </a:solidFill>
+          </a:ln>
+        </p:spPr>
+        <p:style>
+          <a:lnRef idx="1">
+            <a:schemeClr val="accent1"/>
+          </a:lnRef>
+          <a:fillRef idx="3">
+            <a:schemeClr val="accent1"/>
+          </a:fillRef>
+          <a:effectRef idx="2">
+            <a:schemeClr val="accent1"/>
+          </a:effectRef>
+          <a:fontRef idx="minor">
+            <a:schemeClr val="lt1"/>
+          </a:fontRef>
+        </p:style>
+        <p:txBody>
+          <a:bodyPr rtlCol="0" anchor="ctr"/>
+          <a:lstStyle/>
+          <a:p>
+            <a:pPr algn="ctr"/>
+          </a:p>
+        </p:txBody>
+      </p:sp>
+      <p:sp>
+        <p:nvSpPr>
+          <p:cNvPr id="21" name="TextBox 20"/>
+          <p:cNvSpPr txBox="1"/>
+          <p:nvPr/>
+        </p:nvSpPr>
+        <p:spPr>
+          <a:xfrm>
+            <a:off x="4395216" y="3826763"/>
+            <a:ext cx="384048" cy="347472"/>
+          </a:xfrm>
+          <a:prstGeom prst="rect">
+            <a:avLst/>
+          </a:prstGeom>
+          <a:noFill/>
+        </p:spPr>
+        <p:txBody>
+          <a:bodyPr wrap="square" lIns="45720" rIns="45720" tIns="36576" bIns="36576" anchor="t">
+            <a:spAutoFit/>
+          </a:bodyPr>
+          <a:lstStyle/>
+          <a:p>
+            <a:pPr algn="l">
+              <a:defRPr sz="1500" b="1">
+                <a:solidFill>
+                  <a:srgbClr val="2F5BA8"/>
+                </a:solidFill>
+                <a:latin typeface="Aptos"/>
+              </a:defRPr>
+            </a:pPr>
+            <a:r>
+              <a:t>05</a:t>
+            </a:r>
+          </a:p>
+        </p:txBody>
+      </p:sp>
+      <p:sp>
+        <p:nvSpPr>
+          <p:cNvPr id="22" name="TextBox 21"/>
+          <p:cNvSpPr txBox="1"/>
+          <p:nvPr/>
+        </p:nvSpPr>
+        <p:spPr>
+          <a:xfrm>
+            <a:off x="4852416" y="3826763"/>
+            <a:ext cx="2621280" cy="1961388"/>
+          </a:xfrm>
+          <a:prstGeom prst="rect">
+            <a:avLst/>
+          </a:prstGeom>
+          <a:noFill/>
+        </p:spPr>
+        <p:txBody>
+          <a:bodyPr wrap="square" lIns="45720" rIns="45720" tIns="36576" bIns="36576" anchor="t">
+            <a:spAutoFit/>
+          </a:bodyPr>
+          <a:lstStyle/>
+          <a:p>
+            <a:pPr algn="l">
+              <a:defRPr sz="1800" b="0">
+                <a:solidFill>
+                  <a:srgbClr val="1C2330"/>
+                </a:solidFill>
+                <a:latin typeface="Aptos"/>
+              </a:defRPr>
+            </a:pPr>
+            <a:r>
+              <a:t>requisito → código → ejecución → evidencia</a:t>
             </a:r>
           </a:p>
         </p:txBody>
@@ -6927,7 +8557,7 @@
               </a:defRPr>
             </a:pPr>
             <a:r>
-              <a:t>Actividad central · 2</a:t>
+              <a:t>Ronda individual</a:t>
             </a:r>
           </a:p>
         </p:txBody>
@@ -7020,7 +8650,7 @@
         <p:spPr>
           <a:xfrm>
             <a:off x="658368" y="1307592"/>
-            <a:ext cx="10835640" cy="2226564"/>
+            <a:ext cx="10835640" cy="1049274"/>
           </a:xfrm>
           <a:prstGeom prst="roundRect">
             <a:avLst/>
@@ -7087,7 +8717,7 @@
               </a:defRPr>
             </a:pPr>
             <a:r>
-              <a:t>PASO 6</a:t>
+              <a:t>PASO 1</a:t>
             </a:r>
           </a:p>
         </p:txBody>
@@ -7101,7 +8731,7 @@
         <p:spPr>
           <a:xfrm>
             <a:off x="1664208" y="1417319"/>
-            <a:ext cx="9464040" cy="2007108"/>
+            <a:ext cx="9464040" cy="829818"/>
           </a:xfrm>
           <a:prstGeom prst="rect">
             <a:avLst/>
@@ -7123,7 +8753,7 @@
               </a:defRPr>
             </a:pPr>
             <a:r>
-              <a:t>Registra una sola entrada en el diario individual; no crees un informe paralelo.</a:t>
+              <a:t>Señala una línea y explica su función.</a:t>
             </a:r>
           </a:p>
         </p:txBody>
@@ -7136,8 +8766,8 @@
         </p:nvSpPr>
         <p:spPr>
           <a:xfrm>
-            <a:off x="658368" y="3776472"/>
-            <a:ext cx="10835640" cy="2226564"/>
+            <a:off x="658368" y="2542032"/>
+            <a:ext cx="10835640" cy="1049274"/>
           </a:xfrm>
           <a:prstGeom prst="roundRect">
             <a:avLst/>
@@ -7181,7 +8811,7 @@
         </p:nvSpPr>
         <p:spPr>
           <a:xfrm>
-            <a:off x="850392" y="3922776"/>
+            <a:off x="850392" y="2688336"/>
             <a:ext cx="685800" cy="384048"/>
           </a:xfrm>
           <a:prstGeom prst="rect">
@@ -7204,7 +8834,7 @@
               </a:defRPr>
             </a:pPr>
             <a:r>
-              <a:t>PASO 7</a:t>
+              <a:t>PASO 2</a:t>
             </a:r>
           </a:p>
         </p:txBody>
@@ -7217,8 +8847,8 @@
         </p:nvSpPr>
         <p:spPr>
           <a:xfrm>
-            <a:off x="1664208" y="3886200"/>
-            <a:ext cx="9464040" cy="2007108"/>
+            <a:off x="1664208" y="2651760"/>
+            <a:ext cx="9464040" cy="829818"/>
           </a:xfrm>
           <a:prstGeom prst="rect">
             <a:avLst/>
@@ -7240,7 +8870,241 @@
               </a:defRPr>
             </a:pPr>
             <a:r>
-              <a:t>¿Qué puedes señalar, explicar y probar al terminar este checkpoint?</a:t>
+              <a:t>Predice la salida para una entrada concreta y ejecútala.</a:t>
+            </a:r>
+          </a:p>
+        </p:txBody>
+      </p:sp>
+      <p:sp>
+        <p:nvSpPr>
+          <p:cNvPr id="14" name="Rounded Rectangle 13"/>
+          <p:cNvSpPr/>
+          <p:nvPr/>
+        </p:nvSpPr>
+        <p:spPr>
+          <a:xfrm>
+            <a:off x="658368" y="3776472"/>
+            <a:ext cx="10835640" cy="1049274"/>
+          </a:xfrm>
+          <a:prstGeom prst="roundRect">
+            <a:avLst/>
+          </a:prstGeom>
+          <a:solidFill>
+            <a:srgbClr val="FFFFFF"/>
+          </a:solidFill>
+          <a:ln>
+            <a:solidFill>
+              <a:srgbClr val="E5E9EF"/>
+            </a:solidFill>
+          </a:ln>
+        </p:spPr>
+        <p:style>
+          <a:lnRef idx="1">
+            <a:schemeClr val="accent1"/>
+          </a:lnRef>
+          <a:fillRef idx="3">
+            <a:schemeClr val="accent1"/>
+          </a:fillRef>
+          <a:effectRef idx="2">
+            <a:schemeClr val="accent1"/>
+          </a:effectRef>
+          <a:fontRef idx="minor">
+            <a:schemeClr val="lt1"/>
+          </a:fontRef>
+        </p:style>
+        <p:txBody>
+          <a:bodyPr rtlCol="0" anchor="ctr"/>
+          <a:lstStyle/>
+          <a:p>
+            <a:pPr algn="ctr"/>
+          </a:p>
+        </p:txBody>
+      </p:sp>
+      <p:sp>
+        <p:nvSpPr>
+          <p:cNvPr id="15" name="TextBox 14"/>
+          <p:cNvSpPr txBox="1"/>
+          <p:nvPr/>
+        </p:nvSpPr>
+        <p:spPr>
+          <a:xfrm>
+            <a:off x="850392" y="3922776"/>
+            <a:ext cx="685800" cy="384048"/>
+          </a:xfrm>
+          <a:prstGeom prst="rect">
+            <a:avLst/>
+          </a:prstGeom>
+          <a:noFill/>
+        </p:spPr>
+        <p:txBody>
+          <a:bodyPr wrap="square" lIns="45720" rIns="45720" tIns="36576" bIns="36576" anchor="t">
+            <a:spAutoFit/>
+          </a:bodyPr>
+          <a:lstStyle/>
+          <a:p>
+            <a:pPr algn="l">
+              <a:defRPr sz="1200" b="1">
+                <a:solidFill>
+                  <a:srgbClr val="2F5BA8"/>
+                </a:solidFill>
+                <a:latin typeface="Aptos"/>
+              </a:defRPr>
+            </a:pPr>
+            <a:r>
+              <a:t>PASO 3</a:t>
+            </a:r>
+          </a:p>
+        </p:txBody>
+      </p:sp>
+      <p:sp>
+        <p:nvSpPr>
+          <p:cNvPr id="16" name="TextBox 15"/>
+          <p:cNvSpPr txBox="1"/>
+          <p:nvPr/>
+        </p:nvSpPr>
+        <p:spPr>
+          <a:xfrm>
+            <a:off x="1664208" y="3886200"/>
+            <a:ext cx="9464040" cy="829818"/>
+          </a:xfrm>
+          <a:prstGeom prst="rect">
+            <a:avLst/>
+          </a:prstGeom>
+          <a:noFill/>
+        </p:spPr>
+        <p:txBody>
+          <a:bodyPr wrap="square" lIns="45720" rIns="45720" tIns="36576" bIns="36576" anchor="t">
+            <a:spAutoFit/>
+          </a:bodyPr>
+          <a:lstStyle/>
+          <a:p>
+            <a:pPr algn="l">
+              <a:defRPr sz="2000" b="0">
+                <a:solidFill>
+                  <a:srgbClr val="1C2330"/>
+                </a:solidFill>
+                <a:latin typeface="Aptos"/>
+              </a:defRPr>
+            </a:pPr>
+            <a:r>
+              <a:t>Haz una modificación pequeña y predice su efecto.</a:t>
+            </a:r>
+          </a:p>
+        </p:txBody>
+      </p:sp>
+      <p:sp>
+        <p:nvSpPr>
+          <p:cNvPr id="17" name="Rounded Rectangle 16"/>
+          <p:cNvSpPr/>
+          <p:nvPr/>
+        </p:nvSpPr>
+        <p:spPr>
+          <a:xfrm>
+            <a:off x="658368" y="5010912"/>
+            <a:ext cx="10835640" cy="1049274"/>
+          </a:xfrm>
+          <a:prstGeom prst="roundRect">
+            <a:avLst/>
+          </a:prstGeom>
+          <a:solidFill>
+            <a:srgbClr val="FFFFFF"/>
+          </a:solidFill>
+          <a:ln>
+            <a:solidFill>
+              <a:srgbClr val="E5E9EF"/>
+            </a:solidFill>
+          </a:ln>
+        </p:spPr>
+        <p:style>
+          <a:lnRef idx="1">
+            <a:schemeClr val="accent1"/>
+          </a:lnRef>
+          <a:fillRef idx="3">
+            <a:schemeClr val="accent1"/>
+          </a:fillRef>
+          <a:effectRef idx="2">
+            <a:schemeClr val="accent1"/>
+          </a:effectRef>
+          <a:fontRef idx="minor">
+            <a:schemeClr val="lt1"/>
+          </a:fontRef>
+        </p:style>
+        <p:txBody>
+          <a:bodyPr rtlCol="0" anchor="ctr"/>
+          <a:lstStyle/>
+          <a:p>
+            <a:pPr algn="ctr"/>
+          </a:p>
+        </p:txBody>
+      </p:sp>
+      <p:sp>
+        <p:nvSpPr>
+          <p:cNvPr id="18" name="TextBox 17"/>
+          <p:cNvSpPr txBox="1"/>
+          <p:nvPr/>
+        </p:nvSpPr>
+        <p:spPr>
+          <a:xfrm>
+            <a:off x="850392" y="5157216"/>
+            <a:ext cx="685800" cy="384048"/>
+          </a:xfrm>
+          <a:prstGeom prst="rect">
+            <a:avLst/>
+          </a:prstGeom>
+          <a:noFill/>
+        </p:spPr>
+        <p:txBody>
+          <a:bodyPr wrap="square" lIns="45720" rIns="45720" tIns="36576" bIns="36576" anchor="t">
+            <a:spAutoFit/>
+          </a:bodyPr>
+          <a:lstStyle/>
+          <a:p>
+            <a:pPr algn="l">
+              <a:defRPr sz="1200" b="1">
+                <a:solidFill>
+                  <a:srgbClr val="2F5BA8"/>
+                </a:solidFill>
+                <a:latin typeface="Aptos"/>
+              </a:defRPr>
+            </a:pPr>
+            <a:r>
+              <a:t>PASO 4</a:t>
+            </a:r>
+          </a:p>
+        </p:txBody>
+      </p:sp>
+      <p:sp>
+        <p:nvSpPr>
+          <p:cNvPr id="19" name="TextBox 18"/>
+          <p:cNvSpPr txBox="1"/>
+          <p:nvPr/>
+        </p:nvSpPr>
+        <p:spPr>
+          <a:xfrm>
+            <a:off x="1664208" y="5120640"/>
+            <a:ext cx="9464040" cy="829818"/>
+          </a:xfrm>
+          <a:prstGeom prst="rect">
+            <a:avLst/>
+          </a:prstGeom>
+          <a:noFill/>
+        </p:spPr>
+        <p:txBody>
+          <a:bodyPr wrap="square" lIns="45720" rIns="45720" tIns="36576" bIns="36576" anchor="t">
+            <a:spAutoFit/>
+          </a:bodyPr>
+          <a:lstStyle/>
+          <a:p>
+            <a:pPr algn="l">
+              <a:defRPr sz="2000" b="0">
+                <a:solidFill>
+                  <a:srgbClr val="1C2330"/>
+                </a:solidFill>
+                <a:latin typeface="Aptos"/>
+              </a:defRPr>
+            </a:pPr>
+            <a:r>
+              <a:t>Localiza la evidencia que demuestra el resultado.</a:t>
             </a:r>
           </a:p>
         </p:txBody>
@@ -7380,7 +9244,7 @@
               </a:defRPr>
             </a:pPr>
             <a:r>
-              <a:t>COMPROBAR</a:t>
+              <a:t>PROCESO</a:t>
             </a:r>
           </a:p>
         </p:txBody>
@@ -7416,7 +9280,7 @@
               </a:defRPr>
             </a:pPr>
             <a:r>
-              <a:t>Evidencia y comprobación</a:t>
+              <a:t>Si aparece una laguna</a:t>
             </a:r>
           </a:p>
         </p:txBody>
@@ -7508,8 +9372,8 @@
         </p:nvSpPr>
         <p:spPr>
           <a:xfrm>
-            <a:off x="713232" y="1298448"/>
-            <a:ext cx="420624" cy="420624"/>
+            <a:off x="713232" y="2240280"/>
+            <a:ext cx="1993392" cy="1874519"/>
           </a:xfrm>
           <a:prstGeom prst="roundRect">
             <a:avLst/>
@@ -7553,8 +9417,8 @@
         </p:nvSpPr>
         <p:spPr>
           <a:xfrm>
-            <a:off x="1389888" y="1280160"/>
-            <a:ext cx="9829800" cy="1624584"/>
+            <a:off x="850392" y="2487168"/>
+            <a:ext cx="1719072" cy="320040"/>
           </a:xfrm>
           <a:prstGeom prst="rect">
             <a:avLst/>
@@ -7567,8 +9431,44 @@
           </a:bodyPr>
           <a:lstStyle/>
           <a:p>
-            <a:pPr algn="l">
-              <a:defRPr sz="1900" b="0">
+            <a:pPr algn="ctr">
+              <a:defRPr sz="1400" b="1">
+                <a:solidFill>
+                  <a:srgbClr val="2F5BA8"/>
+                </a:solidFill>
+                <a:latin typeface="Aptos"/>
+              </a:defRPr>
+            </a:pPr>
+            <a:r>
+              <a:t>01</a:t>
+            </a:r>
+          </a:p>
+        </p:txBody>
+      </p:sp>
+      <p:sp>
+        <p:nvSpPr>
+          <p:cNvPr id="10" name="TextBox 9"/>
+          <p:cNvSpPr txBox="1"/>
+          <p:nvPr/>
+        </p:nvSpPr>
+        <p:spPr>
+          <a:xfrm>
+            <a:off x="850392" y="2971800"/>
+            <a:ext cx="1719072" cy="658368"/>
+          </a:xfrm>
+          <a:prstGeom prst="rect">
+            <a:avLst/>
+          </a:prstGeom>
+          <a:noFill/>
+        </p:spPr>
+        <p:txBody>
+          <a:bodyPr wrap="square" lIns="45720" rIns="45720" tIns="36576" bIns="36576" anchor="ctr">
+            <a:spAutoFit/>
+          </a:bodyPr>
+          <a:lstStyle/>
+          <a:p>
+            <a:pPr algn="ctr">
+              <a:defRPr sz="1700" b="1">
                 <a:solidFill>
                   <a:srgbClr val="1C2330"/>
                 </a:solidFill>
@@ -7576,21 +9476,64 @@
               </a:defRPr>
             </a:pPr>
             <a:r>
-              <a:t>conserva el código o la prueba en el lugar indicado por la sesión;</a:t>
-            </a:r>
-          </a:p>
-        </p:txBody>
-      </p:sp>
-      <p:sp>
-        <p:nvSpPr>
-          <p:cNvPr id="10" name="Rounded Rectangle 9"/>
+              <a:t>identifica</a:t>
+            </a:r>
+          </a:p>
+        </p:txBody>
+      </p:sp>
+      <p:sp>
+        <p:nvSpPr>
+          <p:cNvPr id="11" name="Right Arrow 10"/>
           <p:cNvSpPr/>
           <p:nvPr/>
         </p:nvSpPr>
         <p:spPr>
           <a:xfrm>
-            <a:off x="713232" y="2959607"/>
-            <a:ext cx="420624" cy="420624"/>
+            <a:off x="2771394" y="2907792"/>
+            <a:ext cx="228600" cy="411480"/>
+          </a:xfrm>
+          <a:prstGeom prst="rightArrow">
+            <a:avLst/>
+          </a:prstGeom>
+          <a:solidFill>
+            <a:srgbClr val="586270"/>
+          </a:solidFill>
+          <a:ln>
+            <a:noFill/>
+          </a:ln>
+        </p:spPr>
+        <p:style>
+          <a:lnRef idx="1">
+            <a:schemeClr val="accent1"/>
+          </a:lnRef>
+          <a:fillRef idx="3">
+            <a:schemeClr val="accent1"/>
+          </a:fillRef>
+          <a:effectRef idx="2">
+            <a:schemeClr val="accent1"/>
+          </a:effectRef>
+          <a:fontRef idx="minor">
+            <a:schemeClr val="lt1"/>
+          </a:fontRef>
+        </p:style>
+        <p:txBody>
+          <a:bodyPr rtlCol="0" anchor="ctr"/>
+          <a:lstStyle/>
+          <a:p>
+            <a:pPr algn="ctr"/>
+          </a:p>
+        </p:txBody>
+      </p:sp>
+      <p:sp>
+        <p:nvSpPr>
+          <p:cNvPr id="12" name="Rounded Rectangle 11"/>
+          <p:cNvSpPr/>
+          <p:nvPr/>
+        </p:nvSpPr>
+        <p:spPr>
+          <a:xfrm>
+            <a:off x="2900934" y="2240280"/>
+            <a:ext cx="1993392" cy="1874519"/>
           </a:xfrm>
           <a:prstGeom prst="roundRect">
             <a:avLst/>
@@ -7628,14 +9571,14 @@
       </p:sp>
       <p:sp>
         <p:nvSpPr>
-          <p:cNvPr id="11" name="TextBox 10"/>
+          <p:cNvPr id="13" name="TextBox 12"/>
           <p:cNvSpPr txBox="1"/>
           <p:nvPr/>
         </p:nvSpPr>
         <p:spPr>
           <a:xfrm>
-            <a:off x="1389888" y="2941319"/>
-            <a:ext cx="9829800" cy="1624584"/>
+            <a:off x="3038094" y="2487168"/>
+            <a:ext cx="1719072" cy="320040"/>
           </a:xfrm>
           <a:prstGeom prst="rect">
             <a:avLst/>
@@ -7648,8 +9591,44 @@
           </a:bodyPr>
           <a:lstStyle/>
           <a:p>
-            <a:pPr algn="l">
-              <a:defRPr sz="1900" b="0">
+            <a:pPr algn="ctr">
+              <a:defRPr sz="1400" b="1">
+                <a:solidFill>
+                  <a:srgbClr val="2F5BA8"/>
+                </a:solidFill>
+                <a:latin typeface="Aptos"/>
+              </a:defRPr>
+            </a:pPr>
+            <a:r>
+              <a:t>02</a:t>
+            </a:r>
+          </a:p>
+        </p:txBody>
+      </p:sp>
+      <p:sp>
+        <p:nvSpPr>
+          <p:cNvPr id="14" name="TextBox 13"/>
+          <p:cNvSpPr txBox="1"/>
+          <p:nvPr/>
+        </p:nvSpPr>
+        <p:spPr>
+          <a:xfrm>
+            <a:off x="3038094" y="2971800"/>
+            <a:ext cx="1719072" cy="658368"/>
+          </a:xfrm>
+          <a:prstGeom prst="rect">
+            <a:avLst/>
+          </a:prstGeom>
+          <a:noFill/>
+        </p:spPr>
+        <p:txBody>
+          <a:bodyPr wrap="square" lIns="45720" rIns="45720" tIns="36576" bIns="36576" anchor="ctr">
+            <a:spAutoFit/>
+          </a:bodyPr>
+          <a:lstStyle/>
+          <a:p>
+            <a:pPr algn="ctr">
+              <a:defRPr sz="1700" b="1">
                 <a:solidFill>
                   <a:srgbClr val="1C2330"/>
                 </a:solidFill>
@@ -7657,21 +9636,64 @@
               </a:defRPr>
             </a:pPr>
             <a:r>
-              <a:t>añade una sola entrada al diario individual con prueba, bloqueo y siguiente paso;</a:t>
-            </a:r>
-          </a:p>
-        </p:txBody>
-      </p:sp>
-      <p:sp>
-        <p:nvSpPr>
-          <p:cNvPr id="12" name="Rounded Rectangle 11"/>
+              <a:t>investiga</a:t>
+            </a:r>
+          </a:p>
+        </p:txBody>
+      </p:sp>
+      <p:sp>
+        <p:nvSpPr>
+          <p:cNvPr id="15" name="Right Arrow 14"/>
           <p:cNvSpPr/>
           <p:nvPr/>
         </p:nvSpPr>
         <p:spPr>
           <a:xfrm>
-            <a:off x="713232" y="4620767"/>
-            <a:ext cx="420624" cy="420624"/>
+            <a:off x="4959096" y="2907792"/>
+            <a:ext cx="228600" cy="411480"/>
+          </a:xfrm>
+          <a:prstGeom prst="rightArrow">
+            <a:avLst/>
+          </a:prstGeom>
+          <a:solidFill>
+            <a:srgbClr val="586270"/>
+          </a:solidFill>
+          <a:ln>
+            <a:noFill/>
+          </a:ln>
+        </p:spPr>
+        <p:style>
+          <a:lnRef idx="1">
+            <a:schemeClr val="accent1"/>
+          </a:lnRef>
+          <a:fillRef idx="3">
+            <a:schemeClr val="accent1"/>
+          </a:fillRef>
+          <a:effectRef idx="2">
+            <a:schemeClr val="accent1"/>
+          </a:effectRef>
+          <a:fontRef idx="minor">
+            <a:schemeClr val="lt1"/>
+          </a:fontRef>
+        </p:style>
+        <p:txBody>
+          <a:bodyPr rtlCol="0" anchor="ctr"/>
+          <a:lstStyle/>
+          <a:p>
+            <a:pPr algn="ctr"/>
+          </a:p>
+        </p:txBody>
+      </p:sp>
+      <p:sp>
+        <p:nvSpPr>
+          <p:cNvPr id="16" name="Rounded Rectangle 15"/>
+          <p:cNvSpPr/>
+          <p:nvPr/>
+        </p:nvSpPr>
+        <p:spPr>
+          <a:xfrm>
+            <a:off x="5088636" y="2240280"/>
+            <a:ext cx="1993392" cy="1874519"/>
           </a:xfrm>
           <a:prstGeom prst="roundRect">
             <a:avLst/>
@@ -7709,14 +9731,14 @@
       </p:sp>
       <p:sp>
         <p:nvSpPr>
-          <p:cNvPr id="13" name="TextBox 12"/>
+          <p:cNvPr id="17" name="TextBox 16"/>
           <p:cNvSpPr txBox="1"/>
           <p:nvPr/>
         </p:nvSpPr>
         <p:spPr>
           <a:xfrm>
-            <a:off x="1389888" y="4602480"/>
-            <a:ext cx="9829800" cy="1624584"/>
+            <a:off x="5225796" y="2487168"/>
+            <a:ext cx="1719072" cy="320040"/>
           </a:xfrm>
           <a:prstGeom prst="rect">
             <a:avLst/>
@@ -7729,8 +9751,44 @@
           </a:bodyPr>
           <a:lstStyle/>
           <a:p>
-            <a:pPr algn="l">
-              <a:defRPr sz="1900" b="0">
+            <a:pPr algn="ctr">
+              <a:defRPr sz="1400" b="1">
+                <a:solidFill>
+                  <a:srgbClr val="2F5BA8"/>
+                </a:solidFill>
+                <a:latin typeface="Aptos"/>
+              </a:defRPr>
+            </a:pPr>
+            <a:r>
+              <a:t>03</a:t>
+            </a:r>
+          </a:p>
+        </p:txBody>
+      </p:sp>
+      <p:sp>
+        <p:nvSpPr>
+          <p:cNvPr id="18" name="TextBox 17"/>
+          <p:cNvSpPr txBox="1"/>
+          <p:nvPr/>
+        </p:nvSpPr>
+        <p:spPr>
+          <a:xfrm>
+            <a:off x="5225796" y="2971800"/>
+            <a:ext cx="1719072" cy="658368"/>
+          </a:xfrm>
+          <a:prstGeom prst="rect">
+            <a:avLst/>
+          </a:prstGeom>
+          <a:noFill/>
+        </p:spPr>
+        <p:txBody>
+          <a:bodyPr wrap="square" lIns="45720" rIns="45720" tIns="36576" bIns="36576" anchor="ctr">
+            <a:spAutoFit/>
+          </a:bodyPr>
+          <a:lstStyle/>
+          <a:p>
+            <a:pPr algn="ctr">
+              <a:defRPr sz="1700" b="1">
                 <a:solidFill>
                   <a:srgbClr val="1C2330"/>
                 </a:solidFill>
@@ -7738,7 +9796,327 @@
               </a:defRPr>
             </a:pPr>
             <a:r>
-              <a:t>no copies la misma reflexión en otro documento; el Site personal seleccionará evidencias al cerrar H1.</a:t>
+              <a:t>corrige</a:t>
+            </a:r>
+          </a:p>
+        </p:txBody>
+      </p:sp>
+      <p:sp>
+        <p:nvSpPr>
+          <p:cNvPr id="19" name="Right Arrow 18"/>
+          <p:cNvSpPr/>
+          <p:nvPr/>
+        </p:nvSpPr>
+        <p:spPr>
+          <a:xfrm>
+            <a:off x="7146798" y="2907792"/>
+            <a:ext cx="228600" cy="411480"/>
+          </a:xfrm>
+          <a:prstGeom prst="rightArrow">
+            <a:avLst/>
+          </a:prstGeom>
+          <a:solidFill>
+            <a:srgbClr val="586270"/>
+          </a:solidFill>
+          <a:ln>
+            <a:noFill/>
+          </a:ln>
+        </p:spPr>
+        <p:style>
+          <a:lnRef idx="1">
+            <a:schemeClr val="accent1"/>
+          </a:lnRef>
+          <a:fillRef idx="3">
+            <a:schemeClr val="accent1"/>
+          </a:fillRef>
+          <a:effectRef idx="2">
+            <a:schemeClr val="accent1"/>
+          </a:effectRef>
+          <a:fontRef idx="minor">
+            <a:schemeClr val="lt1"/>
+          </a:fontRef>
+        </p:style>
+        <p:txBody>
+          <a:bodyPr rtlCol="0" anchor="ctr"/>
+          <a:lstStyle/>
+          <a:p>
+            <a:pPr algn="ctr"/>
+          </a:p>
+        </p:txBody>
+      </p:sp>
+      <p:sp>
+        <p:nvSpPr>
+          <p:cNvPr id="20" name="Rounded Rectangle 19"/>
+          <p:cNvSpPr/>
+          <p:nvPr/>
+        </p:nvSpPr>
+        <p:spPr>
+          <a:xfrm>
+            <a:off x="7276338" y="2240280"/>
+            <a:ext cx="1993392" cy="1874519"/>
+          </a:xfrm>
+          <a:prstGeom prst="roundRect">
+            <a:avLst/>
+          </a:prstGeom>
+          <a:solidFill>
+            <a:srgbClr val="FFFFFF"/>
+          </a:solidFill>
+          <a:ln>
+            <a:solidFill>
+              <a:srgbClr val="2F5BA8"/>
+            </a:solidFill>
+          </a:ln>
+        </p:spPr>
+        <p:style>
+          <a:lnRef idx="1">
+            <a:schemeClr val="accent1"/>
+          </a:lnRef>
+          <a:fillRef idx="3">
+            <a:schemeClr val="accent1"/>
+          </a:fillRef>
+          <a:effectRef idx="2">
+            <a:schemeClr val="accent1"/>
+          </a:effectRef>
+          <a:fontRef idx="minor">
+            <a:schemeClr val="lt1"/>
+          </a:fontRef>
+        </p:style>
+        <p:txBody>
+          <a:bodyPr rtlCol="0" anchor="ctr"/>
+          <a:lstStyle/>
+          <a:p>
+            <a:pPr algn="ctr"/>
+          </a:p>
+        </p:txBody>
+      </p:sp>
+      <p:sp>
+        <p:nvSpPr>
+          <p:cNvPr id="21" name="TextBox 20"/>
+          <p:cNvSpPr txBox="1"/>
+          <p:nvPr/>
+        </p:nvSpPr>
+        <p:spPr>
+          <a:xfrm>
+            <a:off x="7413498" y="2487168"/>
+            <a:ext cx="1719072" cy="320040"/>
+          </a:xfrm>
+          <a:prstGeom prst="rect">
+            <a:avLst/>
+          </a:prstGeom>
+          <a:noFill/>
+        </p:spPr>
+        <p:txBody>
+          <a:bodyPr wrap="square" lIns="45720" rIns="45720" tIns="36576" bIns="36576" anchor="t">
+            <a:spAutoFit/>
+          </a:bodyPr>
+          <a:lstStyle/>
+          <a:p>
+            <a:pPr algn="ctr">
+              <a:defRPr sz="1400" b="1">
+                <a:solidFill>
+                  <a:srgbClr val="2F5BA8"/>
+                </a:solidFill>
+                <a:latin typeface="Aptos"/>
+              </a:defRPr>
+            </a:pPr>
+            <a:r>
+              <a:t>04</a:t>
+            </a:r>
+          </a:p>
+        </p:txBody>
+      </p:sp>
+      <p:sp>
+        <p:nvSpPr>
+          <p:cNvPr id="22" name="TextBox 21"/>
+          <p:cNvSpPr txBox="1"/>
+          <p:nvPr/>
+        </p:nvSpPr>
+        <p:spPr>
+          <a:xfrm>
+            <a:off x="7413498" y="2971800"/>
+            <a:ext cx="1719072" cy="658368"/>
+          </a:xfrm>
+          <a:prstGeom prst="rect">
+            <a:avLst/>
+          </a:prstGeom>
+          <a:noFill/>
+        </p:spPr>
+        <p:txBody>
+          <a:bodyPr wrap="square" lIns="45720" rIns="45720" tIns="36576" bIns="36576" anchor="ctr">
+            <a:spAutoFit/>
+          </a:bodyPr>
+          <a:lstStyle/>
+          <a:p>
+            <a:pPr algn="ctr">
+              <a:defRPr sz="1700" b="1">
+                <a:solidFill>
+                  <a:srgbClr val="1C2330"/>
+                </a:solidFill>
+                <a:latin typeface="Aptos"/>
+              </a:defRPr>
+            </a:pPr>
+            <a:r>
+              <a:t>prueba</a:t>
+            </a:r>
+          </a:p>
+        </p:txBody>
+      </p:sp>
+      <p:sp>
+        <p:nvSpPr>
+          <p:cNvPr id="23" name="Right Arrow 22"/>
+          <p:cNvSpPr/>
+          <p:nvPr/>
+        </p:nvSpPr>
+        <p:spPr>
+          <a:xfrm>
+            <a:off x="9334500" y="2907792"/>
+            <a:ext cx="228600" cy="411480"/>
+          </a:xfrm>
+          <a:prstGeom prst="rightArrow">
+            <a:avLst/>
+          </a:prstGeom>
+          <a:solidFill>
+            <a:srgbClr val="586270"/>
+          </a:solidFill>
+          <a:ln>
+            <a:noFill/>
+          </a:ln>
+        </p:spPr>
+        <p:style>
+          <a:lnRef idx="1">
+            <a:schemeClr val="accent1"/>
+          </a:lnRef>
+          <a:fillRef idx="3">
+            <a:schemeClr val="accent1"/>
+          </a:fillRef>
+          <a:effectRef idx="2">
+            <a:schemeClr val="accent1"/>
+          </a:effectRef>
+          <a:fontRef idx="minor">
+            <a:schemeClr val="lt1"/>
+          </a:fontRef>
+        </p:style>
+        <p:txBody>
+          <a:bodyPr rtlCol="0" anchor="ctr"/>
+          <a:lstStyle/>
+          <a:p>
+            <a:pPr algn="ctr"/>
+          </a:p>
+        </p:txBody>
+      </p:sp>
+      <p:sp>
+        <p:nvSpPr>
+          <p:cNvPr id="24" name="Rounded Rectangle 23"/>
+          <p:cNvSpPr/>
+          <p:nvPr/>
+        </p:nvSpPr>
+        <p:spPr>
+          <a:xfrm>
+            <a:off x="9464040" y="2240280"/>
+            <a:ext cx="1993392" cy="1874519"/>
+          </a:xfrm>
+          <a:prstGeom prst="roundRect">
+            <a:avLst/>
+          </a:prstGeom>
+          <a:solidFill>
+            <a:srgbClr val="2F5BA8"/>
+          </a:solidFill>
+          <a:ln>
+            <a:solidFill>
+              <a:srgbClr val="2F5BA8"/>
+            </a:solidFill>
+          </a:ln>
+        </p:spPr>
+        <p:style>
+          <a:lnRef idx="1">
+            <a:schemeClr val="accent1"/>
+          </a:lnRef>
+          <a:fillRef idx="3">
+            <a:schemeClr val="accent1"/>
+          </a:fillRef>
+          <a:effectRef idx="2">
+            <a:schemeClr val="accent1"/>
+          </a:effectRef>
+          <a:fontRef idx="minor">
+            <a:schemeClr val="lt1"/>
+          </a:fontRef>
+        </p:style>
+        <p:txBody>
+          <a:bodyPr rtlCol="0" anchor="ctr"/>
+          <a:lstStyle/>
+          <a:p>
+            <a:pPr algn="ctr"/>
+          </a:p>
+        </p:txBody>
+      </p:sp>
+      <p:sp>
+        <p:nvSpPr>
+          <p:cNvPr id="25" name="TextBox 24"/>
+          <p:cNvSpPr txBox="1"/>
+          <p:nvPr/>
+        </p:nvSpPr>
+        <p:spPr>
+          <a:xfrm>
+            <a:off x="9601200" y="2487168"/>
+            <a:ext cx="1719072" cy="320040"/>
+          </a:xfrm>
+          <a:prstGeom prst="rect">
+            <a:avLst/>
+          </a:prstGeom>
+          <a:noFill/>
+        </p:spPr>
+        <p:txBody>
+          <a:bodyPr wrap="square" lIns="45720" rIns="45720" tIns="36576" bIns="36576" anchor="t">
+            <a:spAutoFit/>
+          </a:bodyPr>
+          <a:lstStyle/>
+          <a:p>
+            <a:pPr algn="ctr">
+              <a:defRPr sz="1400" b="1">
+                <a:solidFill>
+                  <a:srgbClr val="FFFFFF"/>
+                </a:solidFill>
+                <a:latin typeface="Aptos"/>
+              </a:defRPr>
+            </a:pPr>
+            <a:r>
+              <a:t>05</a:t>
+            </a:r>
+          </a:p>
+        </p:txBody>
+      </p:sp>
+      <p:sp>
+        <p:nvSpPr>
+          <p:cNvPr id="26" name="TextBox 25"/>
+          <p:cNvSpPr txBox="1"/>
+          <p:nvPr/>
+        </p:nvSpPr>
+        <p:spPr>
+          <a:xfrm>
+            <a:off x="9601200" y="2971800"/>
+            <a:ext cx="1719072" cy="658368"/>
+          </a:xfrm>
+          <a:prstGeom prst="rect">
+            <a:avLst/>
+          </a:prstGeom>
+          <a:noFill/>
+        </p:spPr>
+        <p:txBody>
+          <a:bodyPr wrap="square" lIns="45720" rIns="45720" tIns="36576" bIns="36576" anchor="ctr">
+            <a:spAutoFit/>
+          </a:bodyPr>
+          <a:lstStyle/>
+          <a:p>
+            <a:pPr algn="ctr">
+              <a:defRPr sz="1700" b="1">
+                <a:solidFill>
+                  <a:srgbClr val="FFFFFF"/>
+                </a:solidFill>
+                <a:latin typeface="Aptos"/>
+              </a:defRPr>
+            </a:pPr>
+            <a:r>
+              <a:t>vuelve a explicar</a:t>
             </a:r>
           </a:p>
         </p:txBody>
@@ -7878,7 +10256,7 @@
               </a:defRPr>
             </a:pPr>
             <a:r>
-              <a:t>LÍMITES QUE PROTEGEN EL APRENDIZAJE</a:t>
+              <a:t>COMPROBAR</a:t>
             </a:r>
           </a:p>
         </p:txBody>
@@ -7914,7 +10292,7 @@
               </a:defRPr>
             </a:pPr>
             <a:r>
-              <a:t>Seguridad y uso responsable</a:t>
+              <a:t>Retrospectiva con evidencia</a:t>
             </a:r>
           </a:p>
         </p:txBody>
@@ -8006,8 +10384,8 @@
         </p:nvSpPr>
         <p:spPr>
           <a:xfrm>
-            <a:off x="621792" y="1298448"/>
-            <a:ext cx="5230368" cy="4553712"/>
+            <a:off x="713232" y="1298448"/>
+            <a:ext cx="420624" cy="420624"/>
           </a:xfrm>
           <a:prstGeom prst="roundRect">
             <a:avLst/>
@@ -8017,7 +10395,7 @@
           </a:solidFill>
           <a:ln>
             <a:solidFill>
-              <a:srgbClr val="E5E9EF"/>
+              <a:srgbClr val="2F5BA8"/>
             </a:solidFill>
           </a:ln>
         </p:spPr>
@@ -8045,57 +10423,14 @@
       </p:sp>
       <p:sp>
         <p:nvSpPr>
-          <p:cNvPr id="9" name="Rounded Rectangle 8"/>
-          <p:cNvSpPr/>
-          <p:nvPr/>
-        </p:nvSpPr>
-        <p:spPr>
-          <a:xfrm>
-            <a:off x="841248" y="1527048"/>
-            <a:ext cx="237744" cy="4096512"/>
-          </a:xfrm>
-          <a:prstGeom prst="roundRect">
-            <a:avLst/>
-          </a:prstGeom>
-          <a:solidFill>
-            <a:srgbClr val="247E5C"/>
-          </a:solidFill>
-          <a:ln>
-            <a:noFill/>
-          </a:ln>
-        </p:spPr>
-        <p:style>
-          <a:lnRef idx="1">
-            <a:schemeClr val="accent1"/>
-          </a:lnRef>
-          <a:fillRef idx="3">
-            <a:schemeClr val="accent1"/>
-          </a:fillRef>
-          <a:effectRef idx="2">
-            <a:schemeClr val="accent1"/>
-          </a:effectRef>
-          <a:fontRef idx="minor">
-            <a:schemeClr val="lt1"/>
-          </a:fontRef>
-        </p:style>
-        <p:txBody>
-          <a:bodyPr rtlCol="0" anchor="ctr"/>
-          <a:lstStyle/>
-          <a:p>
-            <a:pPr algn="ctr"/>
-          </a:p>
-        </p:txBody>
-      </p:sp>
-      <p:sp>
-        <p:nvSpPr>
-          <p:cNvPr id="10" name="TextBox 9"/>
+          <p:cNvPr id="9" name="TextBox 8"/>
           <p:cNvSpPr txBox="1"/>
           <p:nvPr/>
         </p:nvSpPr>
         <p:spPr>
           <a:xfrm>
-            <a:off x="1280160" y="1527048"/>
-            <a:ext cx="4224528" cy="4160520"/>
+            <a:off x="1389888" y="1280160"/>
+            <a:ext cx="9829800" cy="1209294"/>
           </a:xfrm>
           <a:prstGeom prst="rect">
             <a:avLst/>
@@ -8117,21 +10452,21 @@
               </a:defRPr>
             </a:pPr>
             <a:r>
-              <a:t>Usa datos ficticios y no publiques credenciales ni información personal.</a:t>
-            </a:r>
-          </a:p>
-        </p:txBody>
-      </p:sp>
-      <p:sp>
-        <p:nvSpPr>
-          <p:cNvPr id="11" name="Rounded Rectangle 10"/>
+              <a:t>Una capacidad que ya realizo sin ayuda.</a:t>
+            </a:r>
+          </a:p>
+        </p:txBody>
+      </p:sp>
+      <p:sp>
+        <p:nvSpPr>
+          <p:cNvPr id="10" name="Rounded Rectangle 9"/>
           <p:cNvSpPr/>
           <p:nvPr/>
         </p:nvSpPr>
         <p:spPr>
           <a:xfrm>
-            <a:off x="6126479" y="1298448"/>
-            <a:ext cx="5230368" cy="4553712"/>
+            <a:off x="713232" y="2544318"/>
+            <a:ext cx="420624" cy="420624"/>
           </a:xfrm>
           <a:prstGeom prst="roundRect">
             <a:avLst/>
@@ -8141,7 +10476,7 @@
           </a:solidFill>
           <a:ln>
             <a:solidFill>
-              <a:srgbClr val="E5E9EF"/>
+              <a:srgbClr val="2F5BA8"/>
             </a:solidFill>
           </a:ln>
         </p:spPr>
@@ -8169,57 +10504,14 @@
       </p:sp>
       <p:sp>
         <p:nvSpPr>
-          <p:cNvPr id="12" name="Rounded Rectangle 11"/>
-          <p:cNvSpPr/>
-          <p:nvPr/>
-        </p:nvSpPr>
-        <p:spPr>
-          <a:xfrm>
-            <a:off x="6345936" y="1527048"/>
-            <a:ext cx="237744" cy="4096512"/>
-          </a:xfrm>
-          <a:prstGeom prst="roundRect">
-            <a:avLst/>
-          </a:prstGeom>
-          <a:solidFill>
-            <a:srgbClr val="C07020"/>
-          </a:solidFill>
-          <a:ln>
-            <a:noFill/>
-          </a:ln>
-        </p:spPr>
-        <p:style>
-          <a:lnRef idx="1">
-            <a:schemeClr val="accent1"/>
-          </a:lnRef>
-          <a:fillRef idx="3">
-            <a:schemeClr val="accent1"/>
-          </a:fillRef>
-          <a:effectRef idx="2">
-            <a:schemeClr val="accent1"/>
-          </a:effectRef>
-          <a:fontRef idx="minor">
-            <a:schemeClr val="lt1"/>
-          </a:fontRef>
-        </p:style>
-        <p:txBody>
-          <a:bodyPr rtlCol="0" anchor="ctr"/>
-          <a:lstStyle/>
-          <a:p>
-            <a:pPr algn="ctr"/>
-          </a:p>
-        </p:txBody>
-      </p:sp>
-      <p:sp>
-        <p:nvSpPr>
-          <p:cNvPr id="13" name="TextBox 12"/>
+          <p:cNvPr id="11" name="TextBox 10"/>
           <p:cNvSpPr txBox="1"/>
           <p:nvPr/>
         </p:nvSpPr>
         <p:spPr>
           <a:xfrm>
-            <a:off x="6784847" y="1527048"/>
-            <a:ext cx="4224528" cy="4160520"/>
+            <a:off x="1389888" y="2526029"/>
+            <a:ext cx="9829800" cy="1209294"/>
           </a:xfrm>
           <a:prstGeom prst="rect">
             <a:avLst/>
@@ -8241,7 +10533,169 @@
               </a:defRPr>
             </a:pPr>
             <a:r>
-              <a:t>Si utilizas IA de forma sustantiva, registra propósito, propuesta, cambios propios y validación en el registro de IA del hito.</a:t>
+              <a:t>Una capacidad para la que todavía necesito apoyo.</a:t>
+            </a:r>
+          </a:p>
+        </p:txBody>
+      </p:sp>
+      <p:sp>
+        <p:nvSpPr>
+          <p:cNvPr id="12" name="Rounded Rectangle 11"/>
+          <p:cNvSpPr/>
+          <p:nvPr/>
+        </p:nvSpPr>
+        <p:spPr>
+          <a:xfrm>
+            <a:off x="713232" y="3790187"/>
+            <a:ext cx="420624" cy="420624"/>
+          </a:xfrm>
+          <a:prstGeom prst="roundRect">
+            <a:avLst/>
+          </a:prstGeom>
+          <a:solidFill>
+            <a:srgbClr val="FFFFFF"/>
+          </a:solidFill>
+          <a:ln>
+            <a:solidFill>
+              <a:srgbClr val="2F5BA8"/>
+            </a:solidFill>
+          </a:ln>
+        </p:spPr>
+        <p:style>
+          <a:lnRef idx="1">
+            <a:schemeClr val="accent1"/>
+          </a:lnRef>
+          <a:fillRef idx="3">
+            <a:schemeClr val="accent1"/>
+          </a:fillRef>
+          <a:effectRef idx="2">
+            <a:schemeClr val="accent1"/>
+          </a:effectRef>
+          <a:fontRef idx="minor">
+            <a:schemeClr val="lt1"/>
+          </a:fontRef>
+        </p:style>
+        <p:txBody>
+          <a:bodyPr rtlCol="0" anchor="ctr"/>
+          <a:lstStyle/>
+          <a:p>
+            <a:pPr algn="ctr"/>
+          </a:p>
+        </p:txBody>
+      </p:sp>
+      <p:sp>
+        <p:nvSpPr>
+          <p:cNvPr id="13" name="TextBox 12"/>
+          <p:cNvSpPr txBox="1"/>
+          <p:nvPr/>
+        </p:nvSpPr>
+        <p:spPr>
+          <a:xfrm>
+            <a:off x="1389888" y="3771900"/>
+            <a:ext cx="9829800" cy="1209294"/>
+          </a:xfrm>
+          <a:prstGeom prst="rect">
+            <a:avLst/>
+          </a:prstGeom>
+          <a:noFill/>
+        </p:spPr>
+        <p:txBody>
+          <a:bodyPr wrap="square" lIns="45720" rIns="45720" tIns="36576" bIns="36576" anchor="t">
+            <a:spAutoFit/>
+          </a:bodyPr>
+          <a:lstStyle/>
+          <a:p>
+            <a:pPr algn="l">
+              <a:defRPr sz="1900" b="0">
+                <a:solidFill>
+                  <a:srgbClr val="1C2330"/>
+                </a:solidFill>
+                <a:latin typeface="Aptos"/>
+              </a:defRPr>
+            </a:pPr>
+            <a:r>
+              <a:t>Un hábito de trabajo que conservaré.</a:t>
+            </a:r>
+          </a:p>
+        </p:txBody>
+      </p:sp>
+      <p:sp>
+        <p:nvSpPr>
+          <p:cNvPr id="14" name="Rounded Rectangle 13"/>
+          <p:cNvSpPr/>
+          <p:nvPr/>
+        </p:nvSpPr>
+        <p:spPr>
+          <a:xfrm>
+            <a:off x="713232" y="5036057"/>
+            <a:ext cx="420624" cy="420624"/>
+          </a:xfrm>
+          <a:prstGeom prst="roundRect">
+            <a:avLst/>
+          </a:prstGeom>
+          <a:solidFill>
+            <a:srgbClr val="FFFFFF"/>
+          </a:solidFill>
+          <a:ln>
+            <a:solidFill>
+              <a:srgbClr val="2F5BA8"/>
+            </a:solidFill>
+          </a:ln>
+        </p:spPr>
+        <p:style>
+          <a:lnRef idx="1">
+            <a:schemeClr val="accent1"/>
+          </a:lnRef>
+          <a:fillRef idx="3">
+            <a:schemeClr val="accent1"/>
+          </a:fillRef>
+          <a:effectRef idx="2">
+            <a:schemeClr val="accent1"/>
+          </a:effectRef>
+          <a:fontRef idx="minor">
+            <a:schemeClr val="lt1"/>
+          </a:fontRef>
+        </p:style>
+        <p:txBody>
+          <a:bodyPr rtlCol="0" anchor="ctr"/>
+          <a:lstStyle/>
+          <a:p>
+            <a:pPr algn="ctr"/>
+          </a:p>
+        </p:txBody>
+      </p:sp>
+      <p:sp>
+        <p:nvSpPr>
+          <p:cNvPr id="15" name="TextBox 14"/>
+          <p:cNvSpPr txBox="1"/>
+          <p:nvPr/>
+        </p:nvSpPr>
+        <p:spPr>
+          <a:xfrm>
+            <a:off x="1389888" y="5017770"/>
+            <a:ext cx="9829800" cy="1209294"/>
+          </a:xfrm>
+          <a:prstGeom prst="rect">
+            <a:avLst/>
+          </a:prstGeom>
+          <a:noFill/>
+        </p:spPr>
+        <p:txBody>
+          <a:bodyPr wrap="square" lIns="45720" rIns="45720" tIns="36576" bIns="36576" anchor="t">
+            <a:spAutoFit/>
+          </a:bodyPr>
+          <a:lstStyle/>
+          <a:p>
+            <a:pPr algn="l">
+              <a:defRPr sz="1900" b="0">
+                <a:solidFill>
+                  <a:srgbClr val="1C2330"/>
+                </a:solidFill>
+                <a:latin typeface="Aptos"/>
+              </a:defRPr>
+            </a:pPr>
+            <a:r>
+              <a:t>Una mejora concreta que aplicaré en H2.</a:t>
             </a:r>
           </a:p>
         </p:txBody>
@@ -8417,7 +10871,7 @@
               </a:defRPr>
             </a:pPr>
             <a:r>
-              <a:t>Cierre y defensa</a:t>
+              <a:t>Cierre de H1</a:t>
             </a:r>
           </a:p>
         </p:txBody>
@@ -8613,7 +11067,7 @@
               </a:defRPr>
             </a:pPr>
             <a:r>
-              <a:t>¿Qué puedes señalar, explicar y probar al terminar este checkpoint?</a:t>
+              <a:t>¿Qué puedes señalar, predecir, ejecutar y modificar para demostrar que comprendes tu propio MiniJarvis?</a:t>
             </a:r>
           </a:p>
         </p:txBody>

--- a/02-PROFESORADO/03-PRESENTACIONES/POR-SESION/h1/S215-defensa-y-cierre-h1-presentacion.pptx
+++ b/02-PROFESORADO/03-PRESENTACIONES/POR-SESION/h1/S215-defensa-y-cierre-h1-presentacion.pptx
@@ -15,6 +15,7 @@
     <p:sldId id="263" r:id="rId15"/>
     <p:sldId id="264" r:id="rId16"/>
     <p:sldId id="265" r:id="rId17"/>
+    <p:sldId id="266" r:id="rId18"/>
   </p:sldIdLst>
   <p:sldSz cx="12191695" cy="6858000" type="screen4x3"/>
   <p:notesSz cx="6858000" cy="9144000"/>
@@ -511,12 +512,12 @@
           <a:lstStyle/>
           <a:p>
             <a:r>
-              <a:t>Objetivo docente: Demostrar comprensión individual, modificar algo pequeño y cerrar el ciclo HEXA con reflexión y mejora.</a:t>
-            </a:r>
-          </a:p>
-          <a:p>
-            <a:r>
-              <a:t>Diapositiva 1 de 10: Defensa y cierre del hito</a:t>
+              <a:t>Objetivo docente: Al terminar, debes defender individualmente, cerrar retrospectiva y realizar la entrega final en Moodle.</a:t>
+            </a:r>
+          </a:p>
+          <a:p>
+            <a:r>
+              <a:t>Diapositiva 1 de 11: Qué vas a aprender</a:t>
             </a:r>
           </a:p>
           <a:p>
@@ -526,7 +527,7 @@
           </a:p>
           <a:p>
             <a:r>
-              <a:t>Presenta el producto y anticipa la evidencia: Quede siguiente paso claro.</a:t>
+              <a:t>Presenta el producto y anticipa la evidencia: Ahora sí, preparad y realizad la entrega oficial de H1 en Moodle. Recordad: si no está en Moodle, no está entregado oficialmente.</a:t>
             </a:r>
           </a:p>
           <a:p>
@@ -536,32 +537,7 @@
           </a:p>
           <a:p>
             <a:r>
-              <a:t>- 00:00–00:05 / D1: COMUNICAR: Explica formato y reduce incertidumbre.</a:t>
-            </a:r>
-          </a:p>
-          <a:p>
-            <a:r>
-              <a:t>- 00:05–00:10 / D2: MODELO DOCENTE: Haz una mini-defensa modelo con código neutro. Muestra respuesta suficiente y vaga.</a:t>
-            </a:r>
-          </a:p>
-          <a:p>
-            <a:r>
-              <a:t>- 00:10–00:30 / D3: DEFENSAS: Realiza defensas rotativas y pide modificación/predicción.</a:t>
-            </a:r>
-          </a:p>
-          <a:p>
-            <a:r>
-              <a:t>- 00:30–00:36 / D4: MEJORA: Da oportunidad de corrección inmediata de una carencia pequeña.</a:t>
-            </a:r>
-          </a:p>
-          <a:p>
-            <a:r>
-              <a:t>- 00:36–00:40 / D5: CIERRE CONCEPTUAL: Pide reconstrucción colectiva y conecta con lo aprendido.</a:t>
-            </a:r>
-          </a:p>
-          <a:p>
-            <a:r>
-              <a:t>- 00:40–00:45 / D6: RETROSPECTIVA: Cierra el ciclo HEXA y pide registro individual.</a:t>
+              <a:t>- 45 minutos: Ahora sí, preparad y realizad la entrega oficial de H1 en Moodle. Recordad: si no está en Moodle, no está entregado oficialmente.</a:t>
             </a:r>
           </a:p>
           <a:p>
@@ -571,7 +547,32 @@
           </a:p>
           <a:p>
             <a:r>
-              <a:t>- Enmarca defensa y cierre del hito con un ejemplo observable y una comprobación.</a:t>
+              <a:t>- Una respuesta defendible tiene cuatro partes: señalo, explico, ejecuto y compruebo. Por ejemplo: Esta línea lee el nombre, esta variable guarda el dato, si escribo Laura espero este saludo, lo ejecuto y compruebo que coincide.</a:t>
+            </a:r>
+          </a:p>
+          <a:p>
+            <a:r>
+              <a:t>- Preguntas posibles: Señala dónde empieza la ejecución, Señala una variable y explica tipo, nombre y valor, Señala una constante y explica por qué es constante, Ejecuta con una entrada ficticia y predice la salida, Explica una conversión, Provoca o explica un error de conversión.</a:t>
+            </a:r>
+          </a:p>
+          <a:p>
+            <a:r>
+              <a:t>- Señala una comparación.</a:t>
+            </a:r>
+          </a:p>
+          <a:p>
+            <a:r>
+              <a:t>- Ejecuta un caso true y un caso false.</a:t>
+            </a:r>
+          </a:p>
+          <a:p>
+            <a:r>
+              <a:t>- Explica qué queda fuera de H1 y por qué.</a:t>
+            </a:r>
+          </a:p>
+          <a:p>
+            <a:r>
+              <a:t>- Cambia un mensaje o valor pequeño y predice el efecto.</a:t>
             </a:r>
           </a:p>
           <a:p>
@@ -646,12 +647,12 @@
           <a:lstStyle/>
           <a:p>
             <a:r>
-              <a:t>Objetivo docente: Demostrar comprensión individual, modificar algo pequeño y cerrar el ciclo HEXA con reflexión y mejora.</a:t>
-            </a:r>
-          </a:p>
-          <a:p>
-            <a:r>
-              <a:t>Diapositiva 10 de 10: Fuentes utilizadas</a:t>
+              <a:t>Objetivo docente: Al terminar, debes defender individualmente, cerrar retrospectiva y realizar la entrega final en Moodle.</a:t>
+            </a:r>
+          </a:p>
+          <a:p>
+            <a:r>
+              <a:t>Diapositiva 10 de 11: Cierre de H1</a:t>
             </a:r>
           </a:p>
           <a:p>
@@ -661,22 +662,117 @@
           </a:p>
           <a:p>
             <a:r>
+              <a:t>Cierra con explicación individual, prueba observable y siguiente paso concreto.</a:t>
+            </a:r>
+          </a:p>
+          <a:p>
+            <a:r>
+              <a:t>- ¿Qué puedes señalar, predecir, ejecutar y modificar para demostrar que comprendes tu propio MiniJarvis?</a:t>
+            </a:r>
+          </a:p>
+          <a:p>
+            <a:r>
+              <a:t>Fuente docente: /mnt/compartido/Programación-26-27/Minijarvis/02-PROFESORADO/02-SESIONES/h1/S215-defensa-y-cierre-h1-docente.md</a:t>
+            </a:r>
+          </a:p>
+        </p:txBody>
+      </p:sp>
+      <p:sp>
+        <p:nvSpPr>
+          <p:cNvPr id="4" name="Slide Number Placeholder 3"/>
+          <p:cNvSpPr>
+            <a:spLocks noGrp="1"/>
+          </p:cNvSpPr>
+          <p:nvPr>
+            <p:ph type="sldNum" idx="5" sz="quarter"/>
+          </p:nvPr>
+        </p:nvSpPr>
+        <p:spPr/>
+      </p:sp>
+    </p:spTree>
+  </p:cSld>
+  <p:clrMapOvr>
+    <a:masterClrMapping/>
+  </p:clrMapOvr>
+</p:notes>
+</file>
+
+<file path=ppt/notesSlides/notesSlide11.xml><?xml version="1.0" encoding="utf-8"?>
+<p:notes xmlns:a="http://schemas.openxmlformats.org/drawingml/2006/main" xmlns:p="http://schemas.openxmlformats.org/presentationml/2006/main" xmlns:r="http://schemas.openxmlformats.org/officeDocument/2006/relationships">
+  <p:cSld>
+    <p:spTree>
+      <p:nvGrpSpPr>
+        <p:cNvPr id="1" name=""/>
+        <p:cNvGrpSpPr/>
+        <p:nvPr/>
+      </p:nvGrpSpPr>
+      <p:grpSpPr>
+        <a:xfrm>
+          <a:off x="0" y="0"/>
+          <a:ext cx="0" cy="0"/>
+          <a:chOff x="0" y="0"/>
+          <a:chExt cx="0" cy="0"/>
+        </a:xfrm>
+      </p:grpSpPr>
+      <p:sp>
+        <p:nvSpPr>
+          <p:cNvPr id="2" name="Slide Image Placeholder 1"/>
+          <p:cNvSpPr>
+            <a:spLocks noGrp="1"/>
+          </p:cNvSpPr>
+          <p:nvPr>
+            <p:ph type="sldImg" idx="2"/>
+          </p:nvPr>
+        </p:nvSpPr>
+        <p:spPr/>
+      </p:sp>
+      <p:sp>
+        <p:nvSpPr>
+          <p:cNvPr id="3" name="Notes Placeholder 2"/>
+          <p:cNvSpPr>
+            <a:spLocks noGrp="1"/>
+          </p:cNvSpPr>
+          <p:nvPr>
+            <p:ph type="body" idx="3" sz="quarter"/>
+          </p:nvPr>
+        </p:nvSpPr>
+        <p:spPr/>
+        <p:txBody>
+          <a:bodyPr/>
+          <a:lstStyle/>
+          <a:p>
+            <a:r>
+              <a:t>Objetivo docente: Al terminar, debes defender individualmente, cerrar retrospectiva y realizar la entrega final en Moodle.</a:t>
+            </a:r>
+          </a:p>
+          <a:p>
+            <a:r>
+              <a:t>Diapositiva 11 de 11: Fuentes diferenciadas</a:t>
+            </a:r>
+          </a:p>
+          <a:p>
+            <a:r>
+              <a:t>Fase HEXA: Comunicar — evaluar y reflexionar</a:t>
+            </a:r>
+          </a:p>
+          <a:p>
+            <a:r>
               <a:t>Indica al alumnado dónde ampliar el contenido y qué fragmentos se han adaptado.</a:t>
             </a:r>
           </a:p>
           <a:p>
             <a:r>
-              <a:t>- Libro: capítulos 01-02 · Defensa y cierre de H1</a:t>
-            </a:r>
-          </a:p>
-          <a:p>
-            <a:r>
-              <a:t>- Fichas S206-S215 y píldoras H1</a:t>
-            </a:r>
-          </a:p>
-          <a:p>
-            <a:r>
-              <a:t>- Ejemplos revisados y adaptados a MiniJarvis; no se copian errores ni capturas antiguas del PDF.</a:t>
+              <a:t>- Libro por hitos · Capítulos 00-02: repaso y defensa</a:t>
+            </a:r>
+          </a:p>
+          <a:p>
+            <a:r>
+              <a:t>- PDF Tema 1 · repaso técnico de §§2-7; no define la defensa</a:t>
+            </a:r>
+          </a:p>
+          <a:p>
+            <a:r>
+              <a:t>- Proyecto MiniJarvis · fichas S206-S215, píldoras H1 y criterios de evidencia</a:t>
             </a:r>
           </a:p>
           <a:p>
@@ -751,12 +847,12 @@
           <a:lstStyle/>
           <a:p>
             <a:r>
-              <a:t>Objetivo docente: Demostrar comprensión individual, modificar algo pequeño y cerrar el ciclo HEXA con reflexión y mejora.</a:t>
-            </a:r>
-          </a:p>
-          <a:p>
-            <a:r>
-              <a:t>Diapositiva 2 de 10: Qué aprenderás y cómo lo demostrarás</a:t>
+              <a:t>Objetivo docente: Al terminar, debes defender individualmente, cerrar retrospectiva y realizar la entrega final en Moodle.</a:t>
+            </a:r>
+          </a:p>
+          <a:p>
+            <a:r>
+              <a:t>Diapositiva 2 de 11: Qué aprenderás y cómo lo demostrarás</a:t>
             </a:r>
           </a:p>
           <a:p>
@@ -766,12 +862,12 @@
           </a:p>
           <a:p>
             <a:r>
-              <a:t>- Objetivo: Demostrar comprensión individual, modificar algo pequeño y cerrar el ciclo HEXA con reflexión y mejora.</a:t>
-            </a:r>
-          </a:p>
-          <a:p>
-            <a:r>
-              <a:t>- Comprobación: Quede siguiente paso claro.</a:t>
+              <a:t>- Objetivo: Al terminar, debes defender individualmente, cerrar retrospectiva y realizar la entrega final en Moodle.</a:t>
+            </a:r>
+          </a:p>
+          <a:p>
+            <a:r>
+              <a:t>- Comprobación: Ahora sí, preparad y realizad la entrega oficial de H1 en Moodle. Recordad: si no está en Moodle, no está entregado oficialmente.</a:t>
             </a:r>
           </a:p>
           <a:p>
@@ -846,12 +942,12 @@
           <a:lstStyle/>
           <a:p>
             <a:r>
-              <a:t>Objetivo docente: Demostrar comprensión individual, modificar algo pequeño y cerrar el ciclo HEXA con reflexión y mejora.</a:t>
-            </a:r>
-          </a:p>
-          <a:p>
-            <a:r>
-              <a:t>Diapositiva 3 de 10: Una defensa demuestra comprensión</a:t>
+              <a:t>Objetivo docente: Al terminar, debes defender individualmente, cerrar retrospectiva y realizar la entrega final en Moodle.</a:t>
+            </a:r>
+          </a:p>
+          <a:p>
+            <a:r>
+              <a:t>Diapositiva 3 de 11: Una defensa demuestra comprensión</a:t>
             </a:r>
           </a:p>
           <a:p>
@@ -966,12 +1062,12 @@
           <a:lstStyle/>
           <a:p>
             <a:r>
-              <a:t>Objetivo docente: Demostrar comprensión individual, modificar algo pequeño y cerrar el ciclo HEXA con reflexión y mejora.</a:t>
-            </a:r>
-          </a:p>
-          <a:p>
-            <a:r>
-              <a:t>Diapositiva 4 de 10: Respuesta defendible o respuesta vaga</a:t>
+              <a:t>Objetivo docente: Al terminar, debes defender individualmente, cerrar retrospectiva y realizar la entrega final en Moodle.</a:t>
+            </a:r>
+          </a:p>
+          <a:p>
+            <a:r>
+              <a:t>Diapositiva 4 de 11: Rúbrica de la defensa</a:t>
             </a:r>
           </a:p>
           <a:p>
@@ -986,17 +1082,22 @@
           </a:p>
           <a:p>
             <a:r>
-              <a:t>- VAGA · Lo hice así porque funcionaba.</a:t>
-            </a:r>
-          </a:p>
-          <a:p>
-            <a:r>
-              <a:t>- DEFENDIBLE · Esta línea lee un String, lo guarda en userName y por eso Laura aparece en la salida.</a:t>
-            </a:r>
-          </a:p>
-          <a:p>
-            <a:r>
-              <a:t>- La defensa conecta una afirmación con código, ejecución y evidencia propia.</a:t>
+              <a:t>- Señala: localiza la línea o evidencia solicitada.</a:t>
+            </a:r>
+          </a:p>
+          <a:p>
+            <a:r>
+              <a:t>- Explica: relaciona dato, operación o condición con el resultado.</a:t>
+            </a:r>
+          </a:p>
+          <a:p>
+            <a:r>
+              <a:t>- Modifica: predice un cambio pequeño y lo implementa.</a:t>
+            </a:r>
+          </a:p>
+          <a:p>
+            <a:r>
+              <a:t>- Verifica: ejecuta de nuevo y reconoce una limitación real de H1.</a:t>
             </a:r>
           </a:p>
           <a:p>
@@ -1071,12 +1172,12 @@
           <a:lstStyle/>
           <a:p>
             <a:r>
-              <a:t>Objetivo docente: Demostrar comprensión individual, modificar algo pequeño y cerrar el ciclo HEXA con reflexión y mejora.</a:t>
-            </a:r>
-          </a:p>
-          <a:p>
-            <a:r>
-              <a:t>Diapositiva 5 de 10: Hilo conceptual de H1</a:t>
+              <a:t>Objetivo docente: Al terminar, debes defender individualmente, cerrar retrospectiva y realizar la entrega final en Moodle.</a:t>
+            </a:r>
+          </a:p>
+          <a:p>
+            <a:r>
+              <a:t>Diapositiva 5 de 11: Respuesta defendible o respuesta vaga</a:t>
             </a:r>
           </a:p>
           <a:p>
@@ -1091,27 +1192,17 @@
           </a:p>
           <a:p>
             <a:r>
-              <a:t>- dato → variable o constante</a:t>
-            </a:r>
-          </a:p>
-          <a:p>
-            <a:r>
-              <a:t>- operación o comparación → resultado</a:t>
-            </a:r>
-          </a:p>
-          <a:p>
-            <a:r>
-              <a:t>- boolean → decisión</a:t>
-            </a:r>
-          </a:p>
-          <a:p>
-            <a:r>
-              <a:t>- salida → prueba observable</a:t>
-            </a:r>
-          </a:p>
-          <a:p>
-            <a:r>
-              <a:t>- requisito → código → ejecución → evidencia</a:t>
+              <a:t>- VAGA · Lo hice así porque funcionaba.</a:t>
+            </a:r>
+          </a:p>
+          <a:p>
+            <a:r>
+              <a:t>- DEFENDIBLE · Esta línea lee un String, lo guarda en userName y por eso Laura aparece en la salida.</a:t>
+            </a:r>
+          </a:p>
+          <a:p>
+            <a:r>
+              <a:t>- La defensa conecta una afirmación con código, ejecución y evidencia propia.</a:t>
             </a:r>
           </a:p>
           <a:p>
@@ -1186,12 +1277,12 @@
           <a:lstStyle/>
           <a:p>
             <a:r>
-              <a:t>Objetivo docente: Demostrar comprensión individual, modificar algo pequeño y cerrar el ciclo HEXA con reflexión y mejora.</a:t>
-            </a:r>
-          </a:p>
-          <a:p>
-            <a:r>
-              <a:t>Diapositiva 6 de 10: Ronda individual</a:t>
+              <a:t>Objetivo docente: Al terminar, debes defender individualmente, cerrar retrospectiva y realizar la entrega final en Moodle.</a:t>
+            </a:r>
+          </a:p>
+          <a:p>
+            <a:r>
+              <a:t>Diapositiva 6 de 11: Hilo conceptual de H1</a:t>
             </a:r>
           </a:p>
           <a:p>
@@ -1201,27 +1292,32 @@
           </a:p>
           <a:p>
             <a:r>
-              <a:t>Entrega la consigna, observa decisiones y pide una prueba reproducible.</a:t>
-            </a:r>
-          </a:p>
-          <a:p>
-            <a:r>
-              <a:t>- Señala una línea y explica su función.</a:t>
-            </a:r>
-          </a:p>
-          <a:p>
-            <a:r>
-              <a:t>- Predice la salida para una entrada concreta y ejecútala.</a:t>
-            </a:r>
-          </a:p>
-          <a:p>
-            <a:r>
-              <a:t>- Haz una modificación pequeña y predice su efecto.</a:t>
-            </a:r>
-          </a:p>
-          <a:p>
-            <a:r>
-              <a:t>- Localiza la evidencia que demuestra el resultado.</a:t>
+              <a:t>Explica con predicción y ejemplo mínimo; comprueba comprensión antes de continuar.</a:t>
+            </a:r>
+          </a:p>
+          <a:p>
+            <a:r>
+              <a:t>- dato → variable o constante</a:t>
+            </a:r>
+          </a:p>
+          <a:p>
+            <a:r>
+              <a:t>- operación o comparación → resultado</a:t>
+            </a:r>
+          </a:p>
+          <a:p>
+            <a:r>
+              <a:t>- boolean → decisión</a:t>
+            </a:r>
+          </a:p>
+          <a:p>
+            <a:r>
+              <a:t>- salida → prueba observable</a:t>
+            </a:r>
+          </a:p>
+          <a:p>
+            <a:r>
+              <a:t>- requisito → código → ejecución → evidencia</a:t>
             </a:r>
           </a:p>
           <a:p>
@@ -1296,12 +1392,12 @@
           <a:lstStyle/>
           <a:p>
             <a:r>
-              <a:t>Objetivo docente: Demostrar comprensión individual, modificar algo pequeño y cerrar el ciclo HEXA con reflexión y mejora.</a:t>
-            </a:r>
-          </a:p>
-          <a:p>
-            <a:r>
-              <a:t>Diapositiva 7 de 10: Si aparece una laguna</a:t>
+              <a:t>Objetivo docente: Al terminar, debes defender individualmente, cerrar retrospectiva y realizar la entrega final en Moodle.</a:t>
+            </a:r>
+          </a:p>
+          <a:p>
+            <a:r>
+              <a:t>Diapositiva 7 de 11: Ronda individual</a:t>
             </a:r>
           </a:p>
           <a:p>
@@ -1311,32 +1407,27 @@
           </a:p>
           <a:p>
             <a:r>
-              <a:t>Explica con predicción y ejemplo mínimo; comprueba comprensión antes de continuar.</a:t>
-            </a:r>
-          </a:p>
-          <a:p>
-            <a:r>
-              <a:t>- identifica</a:t>
-            </a:r>
-          </a:p>
-          <a:p>
-            <a:r>
-              <a:t>- investiga</a:t>
-            </a:r>
-          </a:p>
-          <a:p>
-            <a:r>
-              <a:t>- corrige</a:t>
-            </a:r>
-          </a:p>
-          <a:p>
-            <a:r>
-              <a:t>- prueba</a:t>
-            </a:r>
-          </a:p>
-          <a:p>
-            <a:r>
-              <a:t>- vuelve a explicar</a:t>
+              <a:t>Entrega la consigna, observa decisiones y pide una prueba reproducible.</a:t>
+            </a:r>
+          </a:p>
+          <a:p>
+            <a:r>
+              <a:t>- Explica una variable o constante y una operación.</a:t>
+            </a:r>
+          </a:p>
+          <a:p>
+            <a:r>
+              <a:t>- Predice la salida para una entrada concreta y ejecútala.</a:t>
+            </a:r>
+          </a:p>
+          <a:p>
+            <a:r>
+              <a:t>- Explica la condición y prueba las dos ramas del if/else.</a:t>
+            </a:r>
+          </a:p>
+          <a:p>
+            <a:r>
+              <a:t>- Modifica un dato, operación o condición; vuelve a verificar y localiza la evidencia.</a:t>
             </a:r>
           </a:p>
           <a:p>
@@ -1411,12 +1502,12 @@
           <a:lstStyle/>
           <a:p>
             <a:r>
-              <a:t>Objetivo docente: Demostrar comprensión individual, modificar algo pequeño y cerrar el ciclo HEXA con reflexión y mejora.</a:t>
-            </a:r>
-          </a:p>
-          <a:p>
-            <a:r>
-              <a:t>Diapositiva 8 de 10: Retrospectiva con evidencia</a:t>
+              <a:t>Objetivo docente: Al terminar, debes defender individualmente, cerrar retrospectiva y realizar la entrega final en Moodle.</a:t>
+            </a:r>
+          </a:p>
+          <a:p>
+            <a:r>
+              <a:t>Diapositiva 8 de 11: Si aparece una laguna</a:t>
             </a:r>
           </a:p>
           <a:p>
@@ -1426,27 +1517,32 @@
           </a:p>
           <a:p>
             <a:r>
-              <a:t>Comprueba la evidencia en su fuente canónica: Quede siguiente paso claro.</a:t>
-            </a:r>
-          </a:p>
-          <a:p>
-            <a:r>
-              <a:t>- Una capacidad que ya realizo sin ayuda.</a:t>
-            </a:r>
-          </a:p>
-          <a:p>
-            <a:r>
-              <a:t>- Una capacidad para la que todavía necesito apoyo.</a:t>
-            </a:r>
-          </a:p>
-          <a:p>
-            <a:r>
-              <a:t>- Un hábito de trabajo que conservaré.</a:t>
-            </a:r>
-          </a:p>
-          <a:p>
-            <a:r>
-              <a:t>- Una mejora concreta que aplicaré en H2.</a:t>
+              <a:t>Explica con predicción y ejemplo mínimo; comprueba comprensión antes de continuar.</a:t>
+            </a:r>
+          </a:p>
+          <a:p>
+            <a:r>
+              <a:t>- identifica</a:t>
+            </a:r>
+          </a:p>
+          <a:p>
+            <a:r>
+              <a:t>- investiga</a:t>
+            </a:r>
+          </a:p>
+          <a:p>
+            <a:r>
+              <a:t>- corrige</a:t>
+            </a:r>
+          </a:p>
+          <a:p>
+            <a:r>
+              <a:t>- prueba</a:t>
+            </a:r>
+          </a:p>
+          <a:p>
+            <a:r>
+              <a:t>- vuelve a explicar</a:t>
             </a:r>
           </a:p>
           <a:p>
@@ -1521,12 +1617,12 @@
           <a:lstStyle/>
           <a:p>
             <a:r>
-              <a:t>Objetivo docente: Demostrar comprensión individual, modificar algo pequeño y cerrar el ciclo HEXA con reflexión y mejora.</a:t>
-            </a:r>
-          </a:p>
-          <a:p>
-            <a:r>
-              <a:t>Diapositiva 9 de 10: Cierre de H1</a:t>
+              <a:t>Objetivo docente: Al terminar, debes defender individualmente, cerrar retrospectiva y realizar la entrega final en Moodle.</a:t>
+            </a:r>
+          </a:p>
+          <a:p>
+            <a:r>
+              <a:t>Diapositiva 9 de 11: Retrospectiva con evidencia</a:t>
             </a:r>
           </a:p>
           <a:p>
@@ -1536,12 +1632,27 @@
           </a:p>
           <a:p>
             <a:r>
-              <a:t>Cierra con explicación individual, prueba observable y siguiente paso concreto.</a:t>
-            </a:r>
-          </a:p>
-          <a:p>
-            <a:r>
-              <a:t>- ¿Qué puedes señalar, predecir, ejecutar y modificar para demostrar que comprendes tu propio MiniJarvis?</a:t>
+              <a:t>Comprueba la evidencia en su fuente canónica: Ahora sí, preparad y realizad la entrega oficial de H1 en Moodle. Recordad: si no está en Moodle, no está entregado oficialmente.</a:t>
+            </a:r>
+          </a:p>
+          <a:p>
+            <a:r>
+              <a:t>- Una capacidad que ya realizo sin ayuda.</a:t>
+            </a:r>
+          </a:p>
+          <a:p>
+            <a:r>
+              <a:t>- Una capacidad para la que todavía necesito apoyo.</a:t>
+            </a:r>
+          </a:p>
+          <a:p>
+            <a:r>
+              <a:t>- Un hábito de trabajo que conservaré.</a:t>
+            </a:r>
+          </a:p>
+          <a:p>
+            <a:r>
+              <a:t>- Una mejora concreta que aplicaré en H2.</a:t>
             </a:r>
           </a:p>
           <a:p>
@@ -4750,7 +4861,7 @@
               </a:defRPr>
             </a:pPr>
             <a:r>
-              <a:t>Defensa y cierre del hito</a:t>
+              <a:t>Qué vas a aprender</a:t>
             </a:r>
           </a:p>
         </p:txBody>
@@ -4786,7 +4897,7 @@
               </a:defRPr>
             </a:pPr>
             <a:r>
-              <a:t>H1 — Primer MiniJarvis</a:t>
+              <a:t>H1 — Primer asistente ejecutable</a:t>
             </a:r>
           </a:p>
         </p:txBody>
@@ -4830,42 +4941,6 @@
       <p:sp>
         <p:nvSpPr>
           <p:cNvPr id="9" name="TextBox 8"/>
-          <p:cNvSpPr txBox="1"/>
-          <p:nvPr/>
-        </p:nvSpPr>
-        <p:spPr>
-          <a:xfrm>
-            <a:off x="713232" y="4965192"/>
-            <a:ext cx="10241280" cy="594360"/>
-          </a:xfrm>
-          <a:prstGeom prst="rect">
-            <a:avLst/>
-          </a:prstGeom>
-          <a:noFill/>
-        </p:spPr>
-        <p:txBody>
-          <a:bodyPr wrap="square" lIns="45720" rIns="45720" tIns="36576" bIns="36576" anchor="t">
-            <a:spAutoFit/>
-          </a:bodyPr>
-          <a:lstStyle/>
-          <a:p>
-            <a:pPr algn="l">
-              <a:defRPr sz="1700" b="0">
-                <a:solidFill>
-                  <a:srgbClr val="D2D9E4"/>
-                </a:solidFill>
-                <a:latin typeface="Aptos"/>
-              </a:defRPr>
-            </a:pPr>
-            <a:r>
-              <a:t>Individual con contraste por parejas o equipo cuando la práctica lo requiera</a:t>
-            </a:r>
-          </a:p>
-        </p:txBody>
-      </p:sp>
-      <p:sp>
-        <p:nvSpPr>
-          <p:cNvPr id="10" name="TextBox 9"/>
           <p:cNvSpPr txBox="1"/>
           <p:nvPr/>
         </p:nvSpPr>
@@ -5034,7 +5109,7 @@
               </a:defRPr>
             </a:pPr>
             <a:r>
-              <a:t>TRAZABILIDAD DEL CONTENIDO</a:t>
+              <a:t>EXPLICAR Y DEFENDER</a:t>
             </a:r>
           </a:p>
         </p:txBody>
@@ -5070,7 +5145,7 @@
               </a:defRPr>
             </a:pPr>
             <a:r>
-              <a:t>Fuentes utilizadas</a:t>
+              <a:t>Cierre de H1</a:t>
             </a:r>
           </a:p>
         </p:txBody>
@@ -5149,7 +5224,415 @@
               </a:defRPr>
             </a:pPr>
             <a:r>
-              <a:t>MiniJarvis · 1.º DAW · Sesión 215 · H1 — Primer MiniJarvis</a:t>
+              <a:t>MiniJarvis · 1.º DAW · Sesión 215 · H1 — Primer asistente ejecutable</a:t>
+            </a:r>
+          </a:p>
+        </p:txBody>
+      </p:sp>
+      <p:sp>
+        <p:nvSpPr>
+          <p:cNvPr id="8" name="Rounded Rectangle 7"/>
+          <p:cNvSpPr/>
+          <p:nvPr/>
+        </p:nvSpPr>
+        <p:spPr>
+          <a:xfrm>
+            <a:off x="621792" y="1298448"/>
+            <a:ext cx="10927080" cy="1828800"/>
+          </a:xfrm>
+          <a:prstGeom prst="roundRect">
+            <a:avLst/>
+          </a:prstGeom>
+          <a:solidFill>
+            <a:srgbClr val="2F5BA8"/>
+          </a:solidFill>
+          <a:ln>
+            <a:solidFill>
+              <a:srgbClr val="2F5BA8"/>
+            </a:solidFill>
+          </a:ln>
+        </p:spPr>
+        <p:style>
+          <a:lnRef idx="1">
+            <a:schemeClr val="accent1"/>
+          </a:lnRef>
+          <a:fillRef idx="3">
+            <a:schemeClr val="accent1"/>
+          </a:fillRef>
+          <a:effectRef idx="2">
+            <a:schemeClr val="accent1"/>
+          </a:effectRef>
+          <a:fontRef idx="minor">
+            <a:schemeClr val="lt1"/>
+          </a:fontRef>
+        </p:style>
+        <p:txBody>
+          <a:bodyPr rtlCol="0" anchor="ctr"/>
+          <a:lstStyle/>
+          <a:p>
+            <a:pPr algn="ctr"/>
+          </a:p>
+        </p:txBody>
+      </p:sp>
+      <p:sp>
+        <p:nvSpPr>
+          <p:cNvPr id="9" name="TextBox 8"/>
+          <p:cNvSpPr txBox="1"/>
+          <p:nvPr/>
+        </p:nvSpPr>
+        <p:spPr>
+          <a:xfrm>
+            <a:off x="932688" y="1591056"/>
+            <a:ext cx="10241280" cy="256032"/>
+          </a:xfrm>
+          <a:prstGeom prst="rect">
+            <a:avLst/>
+          </a:prstGeom>
+          <a:noFill/>
+        </p:spPr>
+        <p:txBody>
+          <a:bodyPr wrap="square" lIns="45720" rIns="45720" tIns="36576" bIns="36576" anchor="t">
+            <a:spAutoFit/>
+          </a:bodyPr>
+          <a:lstStyle/>
+          <a:p>
+            <a:pPr algn="l">
+              <a:defRPr sz="1300" b="1">
+                <a:solidFill>
+                  <a:srgbClr val="FFFFFF"/>
+                </a:solidFill>
+                <a:latin typeface="Aptos"/>
+              </a:defRPr>
+            </a:pPr>
+            <a:r>
+              <a:t>PREGUNTA O DECISIÓN DE SALIDA</a:t>
+            </a:r>
+          </a:p>
+        </p:txBody>
+      </p:sp>
+      <p:sp>
+        <p:nvSpPr>
+          <p:cNvPr id="10" name="TextBox 9"/>
+          <p:cNvSpPr txBox="1"/>
+          <p:nvPr/>
+        </p:nvSpPr>
+        <p:spPr>
+          <a:xfrm>
+            <a:off x="932688" y="1975104"/>
+            <a:ext cx="10058400" cy="822960"/>
+          </a:xfrm>
+          <a:prstGeom prst="rect">
+            <a:avLst/>
+          </a:prstGeom>
+          <a:noFill/>
+        </p:spPr>
+        <p:txBody>
+          <a:bodyPr wrap="square" lIns="45720" rIns="45720" tIns="36576" bIns="36576" anchor="t">
+            <a:spAutoFit/>
+          </a:bodyPr>
+          <a:lstStyle/>
+          <a:p>
+            <a:pPr algn="l">
+              <a:defRPr sz="2500" b="1">
+                <a:solidFill>
+                  <a:srgbClr val="FFFFFF"/>
+                </a:solidFill>
+                <a:latin typeface="Aptos"/>
+              </a:defRPr>
+            </a:pPr>
+            <a:r>
+              <a:t>¿Qué puedes señalar, predecir, ejecutar y modificar para demostrar que comprendes tu propio MiniJarvis?</a:t>
+            </a:r>
+          </a:p>
+        </p:txBody>
+      </p:sp>
+      <p:sp>
+        <p:nvSpPr>
+          <p:cNvPr id="11" name="TextBox 10"/>
+          <p:cNvSpPr txBox="1"/>
+          <p:nvPr/>
+        </p:nvSpPr>
+        <p:spPr>
+          <a:xfrm>
+            <a:off x="749808" y="3886200"/>
+            <a:ext cx="10607040" cy="1280160"/>
+          </a:xfrm>
+          <a:prstGeom prst="rect">
+            <a:avLst/>
+          </a:prstGeom>
+          <a:noFill/>
+        </p:spPr>
+        <p:txBody>
+          <a:bodyPr wrap="square" lIns="45720" rIns="45720" tIns="36576" bIns="36576" anchor="ctr">
+            <a:spAutoFit/>
+          </a:bodyPr>
+          <a:lstStyle/>
+          <a:p>
+            <a:pPr algn="ctr">
+              <a:defRPr sz="2300" b="1">
+                <a:solidFill>
+                  <a:srgbClr val="247E5C"/>
+                </a:solidFill>
+                <a:latin typeface="Aptos"/>
+              </a:defRPr>
+            </a:pPr>
+            <a:r>
+              <a:t>La sesión termina cuando la evidencia existe, está comprobada y puede defenderse.</a:t>
+            </a:r>
+          </a:p>
+        </p:txBody>
+      </p:sp>
+    </p:spTree>
+  </p:cSld>
+  <p:clrMapOvr>
+    <a:masterClrMapping/>
+  </p:clrMapOvr>
+</p:sld>
+</file>
+
+<file path=ppt/slides/slide11.xml><?xml version="1.0" encoding="utf-8"?>
+<p:sld xmlns:a="http://schemas.openxmlformats.org/drawingml/2006/main" xmlns:p="http://schemas.openxmlformats.org/presentationml/2006/main" xmlns:r="http://schemas.openxmlformats.org/officeDocument/2006/relationships">
+  <p:cSld>
+    <p:spTree>
+      <p:nvGrpSpPr>
+        <p:cNvPr id="1" name=""/>
+        <p:cNvGrpSpPr/>
+        <p:nvPr/>
+      </p:nvGrpSpPr>
+      <p:grpSpPr/>
+      <p:sp>
+        <p:nvSpPr>
+          <p:cNvPr id="2" name="Rectangle 1"/>
+          <p:cNvSpPr/>
+          <p:nvPr/>
+        </p:nvSpPr>
+        <p:spPr>
+          <a:xfrm>
+            <a:off x="0" y="0"/>
+            <a:ext cx="12191695" cy="6858000"/>
+          </a:xfrm>
+          <a:prstGeom prst="rect">
+            <a:avLst/>
+          </a:prstGeom>
+          <a:solidFill>
+            <a:srgbClr val="F9F7F2"/>
+          </a:solidFill>
+          <a:ln>
+            <a:noFill/>
+          </a:ln>
+        </p:spPr>
+        <p:style>
+          <a:lnRef idx="1">
+            <a:schemeClr val="accent1"/>
+          </a:lnRef>
+          <a:fillRef idx="3">
+            <a:schemeClr val="accent1"/>
+          </a:fillRef>
+          <a:effectRef idx="2">
+            <a:schemeClr val="accent1"/>
+          </a:effectRef>
+          <a:fontRef idx="minor">
+            <a:schemeClr val="lt1"/>
+          </a:fontRef>
+        </p:style>
+        <p:txBody>
+          <a:bodyPr rtlCol="0" anchor="ctr"/>
+          <a:lstStyle/>
+          <a:p>
+            <a:pPr algn="ctr"/>
+          </a:p>
+        </p:txBody>
+      </p:sp>
+      <p:sp>
+        <p:nvSpPr>
+          <p:cNvPr id="3" name="Rectangle 2"/>
+          <p:cNvSpPr/>
+          <p:nvPr/>
+        </p:nvSpPr>
+        <p:spPr>
+          <a:xfrm>
+            <a:off x="0" y="0"/>
+            <a:ext cx="164592" cy="6858000"/>
+          </a:xfrm>
+          <a:prstGeom prst="rect">
+            <a:avLst/>
+          </a:prstGeom>
+          <a:solidFill>
+            <a:srgbClr val="2F5BA8"/>
+          </a:solidFill>
+          <a:ln>
+            <a:noFill/>
+          </a:ln>
+        </p:spPr>
+        <p:style>
+          <a:lnRef idx="1">
+            <a:schemeClr val="accent1"/>
+          </a:lnRef>
+          <a:fillRef idx="3">
+            <a:schemeClr val="accent1"/>
+          </a:fillRef>
+          <a:effectRef idx="2">
+            <a:schemeClr val="accent1"/>
+          </a:effectRef>
+          <a:fontRef idx="minor">
+            <a:schemeClr val="lt1"/>
+          </a:fontRef>
+        </p:style>
+        <p:txBody>
+          <a:bodyPr rtlCol="0" anchor="ctr"/>
+          <a:lstStyle/>
+          <a:p>
+            <a:pPr algn="ctr"/>
+          </a:p>
+        </p:txBody>
+      </p:sp>
+      <p:sp>
+        <p:nvSpPr>
+          <p:cNvPr id="4" name="TextBox 3"/>
+          <p:cNvSpPr txBox="1"/>
+          <p:nvPr/>
+        </p:nvSpPr>
+        <p:spPr>
+          <a:xfrm>
+            <a:off x="502920" y="274320"/>
+            <a:ext cx="5486400" cy="256032"/>
+          </a:xfrm>
+          <a:prstGeom prst="rect">
+            <a:avLst/>
+          </a:prstGeom>
+          <a:noFill/>
+        </p:spPr>
+        <p:txBody>
+          <a:bodyPr wrap="square" lIns="45720" rIns="45720" tIns="36576" bIns="36576" anchor="t">
+            <a:spAutoFit/>
+          </a:bodyPr>
+          <a:lstStyle/>
+          <a:p>
+            <a:pPr algn="l">
+              <a:defRPr sz="1000" b="1">
+                <a:solidFill>
+                  <a:srgbClr val="2F5BA8"/>
+                </a:solidFill>
+                <a:latin typeface="Aptos"/>
+              </a:defRPr>
+            </a:pPr>
+            <a:r>
+              <a:t>TRAZABILIDAD DEL CONTENIDO</a:t>
+            </a:r>
+          </a:p>
+        </p:txBody>
+      </p:sp>
+      <p:sp>
+        <p:nvSpPr>
+          <p:cNvPr id="5" name="TextBox 4"/>
+          <p:cNvSpPr txBox="1"/>
+          <p:nvPr/>
+        </p:nvSpPr>
+        <p:spPr>
+          <a:xfrm>
+            <a:off x="502920" y="603504"/>
+            <a:ext cx="11064240" cy="530352"/>
+          </a:xfrm>
+          <a:prstGeom prst="rect">
+            <a:avLst/>
+          </a:prstGeom>
+          <a:noFill/>
+        </p:spPr>
+        <p:txBody>
+          <a:bodyPr wrap="square" lIns="45720" rIns="45720" tIns="36576" bIns="36576" anchor="t">
+            <a:spAutoFit/>
+          </a:bodyPr>
+          <a:lstStyle/>
+          <a:p>
+            <a:pPr algn="l">
+              <a:defRPr sz="2800" b="1">
+                <a:solidFill>
+                  <a:srgbClr val="1C2330"/>
+                </a:solidFill>
+                <a:latin typeface="Aptos"/>
+              </a:defRPr>
+            </a:pPr>
+            <a:r>
+              <a:t>Fuentes diferenciadas</a:t>
+            </a:r>
+          </a:p>
+        </p:txBody>
+      </p:sp>
+      <p:sp>
+        <p:nvSpPr>
+          <p:cNvPr id="6" name="Rectangle 5"/>
+          <p:cNvSpPr/>
+          <p:nvPr/>
+        </p:nvSpPr>
+        <p:spPr>
+          <a:xfrm>
+            <a:off x="0" y="6601968"/>
+            <a:ext cx="12191695" cy="256032"/>
+          </a:xfrm>
+          <a:prstGeom prst="rect">
+            <a:avLst/>
+          </a:prstGeom>
+          <a:solidFill>
+            <a:srgbClr val="2F5BA8"/>
+          </a:solidFill>
+          <a:ln>
+            <a:noFill/>
+          </a:ln>
+        </p:spPr>
+        <p:style>
+          <a:lnRef idx="1">
+            <a:schemeClr val="accent1"/>
+          </a:lnRef>
+          <a:fillRef idx="3">
+            <a:schemeClr val="accent1"/>
+          </a:fillRef>
+          <a:effectRef idx="2">
+            <a:schemeClr val="accent1"/>
+          </a:effectRef>
+          <a:fontRef idx="minor">
+            <a:schemeClr val="lt1"/>
+          </a:fontRef>
+        </p:style>
+        <p:txBody>
+          <a:bodyPr rtlCol="0" anchor="ctr"/>
+          <a:lstStyle/>
+          <a:p>
+            <a:pPr algn="ctr"/>
+          </a:p>
+        </p:txBody>
+      </p:sp>
+      <p:sp>
+        <p:nvSpPr>
+          <p:cNvPr id="7" name="TextBox 6"/>
+          <p:cNvSpPr txBox="1"/>
+          <p:nvPr/>
+        </p:nvSpPr>
+        <p:spPr>
+          <a:xfrm>
+            <a:off x="411480" y="6629400"/>
+            <a:ext cx="11247120" cy="164592"/>
+          </a:xfrm>
+          <a:prstGeom prst="rect">
+            <a:avLst/>
+          </a:prstGeom>
+          <a:noFill/>
+        </p:spPr>
+        <p:txBody>
+          <a:bodyPr wrap="square" lIns="45720" rIns="45720" tIns="36576" bIns="36576" anchor="t">
+            <a:spAutoFit/>
+          </a:bodyPr>
+          <a:lstStyle/>
+          <a:p>
+            <a:pPr algn="l">
+              <a:defRPr sz="900" b="0">
+                <a:solidFill>
+                  <a:srgbClr val="FFFFFF"/>
+                </a:solidFill>
+                <a:latin typeface="Aptos"/>
+              </a:defRPr>
+            </a:pPr>
+            <a:r>
+              <a:t>MiniJarvis · 1.º DAW · Sesión 215 · H1 — Primer asistente ejecutable</a:t>
             </a:r>
           </a:p>
         </p:txBody>
@@ -5224,7 +5707,7 @@
               </a:defRPr>
             </a:pPr>
             <a:r>
-              <a:t>•  Libro: capítulos 01-02 · Defensa y cierre de H1</a:t>
+              <a:t>•  Libro por hitos · Capítulos 00-02: repaso y defensa</a:t>
             </a:r>
           </a:p>
           <a:p>
@@ -5240,7 +5723,7 @@
               </a:defRPr>
             </a:pPr>
             <a:r>
-              <a:t>•  Fichas S206-S215 y píldoras H1</a:t>
+              <a:t>•  PDF Tema 1 · repaso técnico de §§2-7; no define la defensa</a:t>
             </a:r>
           </a:p>
           <a:p>
@@ -5256,7 +5739,7 @@
               </a:defRPr>
             </a:pPr>
             <a:r>
-              <a:t>•  Ejemplos revisados y adaptados a MiniJarvis; no se copian errores ni capturas antiguas del PDF.</a:t>
+              <a:t>•  Proyecto MiniJarvis · fichas S206-S215, píldoras H1 y criterios de evidencia</a:t>
             </a:r>
           </a:p>
         </p:txBody>
@@ -5547,7 +6030,7 @@
               </a:defRPr>
             </a:pPr>
             <a:r>
-              <a:t>MiniJarvis · 1.º DAW · Sesión 215 · H1 — Primer MiniJarvis</a:t>
+              <a:t>MiniJarvis · 1.º DAW · Sesión 215 · H1 — Primer asistente ejecutable</a:t>
             </a:r>
           </a:p>
         </p:txBody>
@@ -5628,7 +6111,7 @@
               </a:defRPr>
             </a:pPr>
             <a:r>
-              <a:t>Objetivo: Demostrar comprensión individual, modificar algo pequeño y cerrar el ciclo HEXA con reflexión y mejora.</a:t>
+              <a:t>Objetivo: Al terminar, debes defender individualmente, cerrar retrospectiva y realizar la entrega final en Moodle.</a:t>
             </a:r>
           </a:p>
         </p:txBody>
@@ -5709,7 +6192,7 @@
               </a:defRPr>
             </a:pPr>
             <a:r>
-              <a:t>Comprobación: Quede siguiente paso claro.</a:t>
+              <a:t>Comprobación: Ahora sí, preparad y realizad la entrega oficial de H1 en Moodle. Recordad: si no está en Moodle, no está entregado oficialmente.</a:t>
             </a:r>
           </a:p>
         </p:txBody>
@@ -5964,7 +6447,7 @@
               </a:defRPr>
             </a:pPr>
             <a:r>
-              <a:t>MiniJarvis · 1.º DAW · Sesión 215 · H1 — Primer MiniJarvis</a:t>
+              <a:t>MiniJarvis · 1.º DAW · Sesión 215 · H1 — Primer asistente ejecutable</a:t>
             </a:r>
           </a:p>
         </p:txBody>
@@ -7021,7 +7504,7 @@
               </a:defRPr>
             </a:pPr>
             <a:r>
-              <a:t>CONTRASTAR PARA DECIDIR</a:t>
+              <a:t>COMPRENDER</a:t>
             </a:r>
           </a:p>
         </p:txBody>
@@ -7057,7 +7540,7 @@
               </a:defRPr>
             </a:pPr>
             <a:r>
-              <a:t>Respuesta defendible o respuesta vaga</a:t>
+              <a:t>Rúbrica de la defensa</a:t>
             </a:r>
           </a:p>
         </p:txBody>
@@ -7136,7 +7619,7 @@
               </a:defRPr>
             </a:pPr>
             <a:r>
-              <a:t>MiniJarvis · 1.º DAW · Sesión 215 · H1 — Primer MiniJarvis</a:t>
+              <a:t>MiniJarvis · 1.º DAW · Sesión 215 · H1 — Primer asistente ejecutable</a:t>
             </a:r>
           </a:p>
         </p:txBody>
@@ -7149,8 +7632,8 @@
         </p:nvSpPr>
         <p:spPr>
           <a:xfrm>
-            <a:off x="621792" y="1325880"/>
-            <a:ext cx="5230368" cy="3401568"/>
+            <a:off x="566928" y="1261872"/>
+            <a:ext cx="5212080" cy="2199132"/>
           </a:xfrm>
           <a:prstGeom prst="roundRect">
             <a:avLst/>
@@ -7160,7 +7643,7 @@
           </a:solidFill>
           <a:ln>
             <a:solidFill>
-              <a:srgbClr val="445B80"/>
+              <a:srgbClr val="E5E9EF"/>
             </a:solidFill>
           </a:ln>
         </p:spPr>
@@ -7188,59 +7671,14 @@
       </p:sp>
       <p:sp>
         <p:nvSpPr>
-          <p:cNvPr id="9" name="Rounded Rectangle 8"/>
-          <p:cNvSpPr/>
-          <p:nvPr/>
-        </p:nvSpPr>
-        <p:spPr>
-          <a:xfrm>
-            <a:off x="850392" y="1572768"/>
-            <a:ext cx="566928" cy="475488"/>
-          </a:xfrm>
-          <a:prstGeom prst="roundRect">
-            <a:avLst/>
-          </a:prstGeom>
-          <a:solidFill>
-            <a:srgbClr val="445B80"/>
-          </a:solidFill>
-          <a:ln>
-            <a:solidFill>
-              <a:srgbClr val="445B80"/>
-            </a:solidFill>
-          </a:ln>
-        </p:spPr>
-        <p:style>
-          <a:lnRef idx="1">
-            <a:schemeClr val="accent1"/>
-          </a:lnRef>
-          <a:fillRef idx="3">
-            <a:schemeClr val="accent1"/>
-          </a:fillRef>
-          <a:effectRef idx="2">
-            <a:schemeClr val="accent1"/>
-          </a:effectRef>
-          <a:fontRef idx="minor">
-            <a:schemeClr val="lt1"/>
-          </a:fontRef>
-        </p:style>
-        <p:txBody>
-          <a:bodyPr rtlCol="0" anchor="ctr"/>
-          <a:lstStyle/>
-          <a:p>
-            <a:pPr algn="ctr"/>
-          </a:p>
-        </p:txBody>
-      </p:sp>
-      <p:sp>
-        <p:nvSpPr>
-          <p:cNvPr id="10" name="TextBox 9"/>
+          <p:cNvPr id="9" name="TextBox 8"/>
           <p:cNvSpPr txBox="1"/>
           <p:nvPr/>
         </p:nvSpPr>
         <p:spPr>
           <a:xfrm>
-            <a:off x="850392" y="1682496"/>
-            <a:ext cx="566928" cy="182880"/>
+            <a:off x="768096" y="1426463"/>
+            <a:ext cx="384048" cy="347472"/>
           </a:xfrm>
           <a:prstGeom prst="rect">
             <a:avLst/>
@@ -7253,30 +7691,30 @@
           </a:bodyPr>
           <a:lstStyle/>
           <a:p>
-            <a:pPr algn="ctr">
-              <a:defRPr sz="1300" b="1">
+            <a:pPr algn="l">
+              <a:defRPr sz="1500" b="1">
                 <a:solidFill>
-                  <a:srgbClr val="FFFFFF"/>
+                  <a:srgbClr val="2F5BA8"/>
                 </a:solidFill>
                 <a:latin typeface="Aptos"/>
               </a:defRPr>
             </a:pPr>
             <a:r>
-              <a:t>A</a:t>
-            </a:r>
-          </a:p>
-        </p:txBody>
-      </p:sp>
-      <p:sp>
-        <p:nvSpPr>
-          <p:cNvPr id="11" name="TextBox 10"/>
+              <a:t>01</a:t>
+            </a:r>
+          </a:p>
+        </p:txBody>
+      </p:sp>
+      <p:sp>
+        <p:nvSpPr>
+          <p:cNvPr id="10" name="TextBox 9"/>
           <p:cNvSpPr txBox="1"/>
           <p:nvPr/>
         </p:nvSpPr>
         <p:spPr>
           <a:xfrm>
-            <a:off x="896112" y="2267712"/>
-            <a:ext cx="4663440" cy="2057400"/>
+            <a:off x="1225295" y="1426463"/>
+            <a:ext cx="4434840" cy="1961388"/>
           </a:xfrm>
           <a:prstGeom prst="rect">
             <a:avLst/>
@@ -7290,7 +7728,7 @@
           <a:lstStyle/>
           <a:p>
             <a:pPr algn="l">
-              <a:defRPr sz="2100" b="1">
+              <a:defRPr sz="1800" b="0">
                 <a:solidFill>
                   <a:srgbClr val="1C2330"/>
                 </a:solidFill>
@@ -7298,21 +7736,21 @@
               </a:defRPr>
             </a:pPr>
             <a:r>
-              <a:t>VAGA · Lo hice así porque funcionaba.</a:t>
-            </a:r>
-          </a:p>
-        </p:txBody>
-      </p:sp>
-      <p:sp>
-        <p:nvSpPr>
-          <p:cNvPr id="12" name="Rounded Rectangle 11"/>
+              <a:t>Señala: localiza la línea o evidencia solicitada.</a:t>
+            </a:r>
+          </a:p>
+        </p:txBody>
+      </p:sp>
+      <p:sp>
+        <p:nvSpPr>
+          <p:cNvPr id="11" name="Rounded Rectangle 10"/>
           <p:cNvSpPr/>
           <p:nvPr/>
         </p:nvSpPr>
         <p:spPr>
           <a:xfrm>
-            <a:off x="6153912" y="1325880"/>
-            <a:ext cx="5230368" cy="3401568"/>
+            <a:off x="6007608" y="1261872"/>
+            <a:ext cx="5212080" cy="2199132"/>
           </a:xfrm>
           <a:prstGeom prst="roundRect">
             <a:avLst/>
@@ -7322,7 +7760,7 @@
           </a:solidFill>
           <a:ln>
             <a:solidFill>
-              <a:srgbClr val="2F5BA8"/>
+              <a:srgbClr val="E5E9EF"/>
             </a:solidFill>
           </a:ln>
         </p:spPr>
@@ -7350,59 +7788,14 @@
       </p:sp>
       <p:sp>
         <p:nvSpPr>
-          <p:cNvPr id="13" name="Rounded Rectangle 12"/>
-          <p:cNvSpPr/>
-          <p:nvPr/>
-        </p:nvSpPr>
-        <p:spPr>
-          <a:xfrm>
-            <a:off x="6382512" y="1572768"/>
-            <a:ext cx="566928" cy="475488"/>
-          </a:xfrm>
-          <a:prstGeom prst="roundRect">
-            <a:avLst/>
-          </a:prstGeom>
-          <a:solidFill>
-            <a:srgbClr val="2F5BA8"/>
-          </a:solidFill>
-          <a:ln>
-            <a:solidFill>
-              <a:srgbClr val="2F5BA8"/>
-            </a:solidFill>
-          </a:ln>
-        </p:spPr>
-        <p:style>
-          <a:lnRef idx="1">
-            <a:schemeClr val="accent1"/>
-          </a:lnRef>
-          <a:fillRef idx="3">
-            <a:schemeClr val="accent1"/>
-          </a:fillRef>
-          <a:effectRef idx="2">
-            <a:schemeClr val="accent1"/>
-          </a:effectRef>
-          <a:fontRef idx="minor">
-            <a:schemeClr val="lt1"/>
-          </a:fontRef>
-        </p:style>
-        <p:txBody>
-          <a:bodyPr rtlCol="0" anchor="ctr"/>
-          <a:lstStyle/>
-          <a:p>
-            <a:pPr algn="ctr"/>
-          </a:p>
-        </p:txBody>
-      </p:sp>
-      <p:sp>
-        <p:nvSpPr>
-          <p:cNvPr id="14" name="TextBox 13"/>
+          <p:cNvPr id="12" name="TextBox 11"/>
           <p:cNvSpPr txBox="1"/>
           <p:nvPr/>
         </p:nvSpPr>
         <p:spPr>
           <a:xfrm>
-            <a:off x="6382512" y="1682496"/>
-            <a:ext cx="566928" cy="182880"/>
+            <a:off x="6208776" y="1426463"/>
+            <a:ext cx="384048" cy="347472"/>
           </a:xfrm>
           <a:prstGeom prst="rect">
             <a:avLst/>
@@ -7415,30 +7808,30 @@
           </a:bodyPr>
           <a:lstStyle/>
           <a:p>
-            <a:pPr algn="ctr">
-              <a:defRPr sz="1300" b="1">
+            <a:pPr algn="l">
+              <a:defRPr sz="1500" b="1">
                 <a:solidFill>
-                  <a:srgbClr val="FFFFFF"/>
+                  <a:srgbClr val="2F5BA8"/>
                 </a:solidFill>
                 <a:latin typeface="Aptos"/>
               </a:defRPr>
             </a:pPr>
             <a:r>
-              <a:t>B</a:t>
-            </a:r>
-          </a:p>
-        </p:txBody>
-      </p:sp>
-      <p:sp>
-        <p:nvSpPr>
-          <p:cNvPr id="15" name="TextBox 14"/>
+              <a:t>02</a:t>
+            </a:r>
+          </a:p>
+        </p:txBody>
+      </p:sp>
+      <p:sp>
+        <p:nvSpPr>
+          <p:cNvPr id="13" name="TextBox 12"/>
           <p:cNvSpPr txBox="1"/>
           <p:nvPr/>
         </p:nvSpPr>
         <p:spPr>
           <a:xfrm>
-            <a:off x="6428232" y="2267712"/>
-            <a:ext cx="4663440" cy="2057400"/>
+            <a:off x="6665976" y="1426463"/>
+            <a:ext cx="4434840" cy="1961388"/>
           </a:xfrm>
           <a:prstGeom prst="rect">
             <a:avLst/>
@@ -7452,7 +7845,7 @@
           <a:lstStyle/>
           <a:p>
             <a:pPr algn="l">
-              <a:defRPr sz="2100" b="1">
+              <a:defRPr sz="1800" b="0">
                 <a:solidFill>
                   <a:srgbClr val="1C2330"/>
                 </a:solidFill>
@@ -7460,31 +7853,31 @@
               </a:defRPr>
             </a:pPr>
             <a:r>
-              <a:t>DEFENDIBLE · Esta línea lee un String, lo guarda en userName y por eso Laura aparece en la salida.</a:t>
-            </a:r>
-          </a:p>
-        </p:txBody>
-      </p:sp>
-      <p:sp>
-        <p:nvSpPr>
-          <p:cNvPr id="16" name="Rounded Rectangle 15"/>
+              <a:t>Explica: relaciona dato, operación o condición con el resultado.</a:t>
+            </a:r>
+          </a:p>
+        </p:txBody>
+      </p:sp>
+      <p:sp>
+        <p:nvSpPr>
+          <p:cNvPr id="14" name="Rounded Rectangle 13"/>
           <p:cNvSpPr/>
           <p:nvPr/>
         </p:nvSpPr>
         <p:spPr>
           <a:xfrm>
-            <a:off x="621792" y="5010912"/>
-            <a:ext cx="10762488" cy="932688"/>
+            <a:off x="566928" y="3662172"/>
+            <a:ext cx="5212080" cy="2199132"/>
           </a:xfrm>
           <a:prstGeom prst="roundRect">
             <a:avLst/>
           </a:prstGeom>
           <a:solidFill>
-            <a:srgbClr val="121824"/>
+            <a:srgbClr val="FFFFFF"/>
           </a:solidFill>
           <a:ln>
             <a:solidFill>
-              <a:srgbClr val="121824"/>
+              <a:srgbClr val="E5E9EF"/>
             </a:solidFill>
           </a:ln>
         </p:spPr>
@@ -7512,14 +7905,14 @@
       </p:sp>
       <p:sp>
         <p:nvSpPr>
-          <p:cNvPr id="17" name="TextBox 16"/>
+          <p:cNvPr id="15" name="TextBox 14"/>
           <p:cNvSpPr txBox="1"/>
           <p:nvPr/>
         </p:nvSpPr>
         <p:spPr>
           <a:xfrm>
-            <a:off x="896112" y="5230368"/>
-            <a:ext cx="10204704" cy="475488"/>
+            <a:off x="768096" y="3826763"/>
+            <a:ext cx="384048" cy="347472"/>
           </a:xfrm>
           <a:prstGeom prst="rect">
             <a:avLst/>
@@ -7532,16 +7925,169 @@
           </a:bodyPr>
           <a:lstStyle/>
           <a:p>
-            <a:pPr algn="ctr">
-              <a:defRPr sz="1700" b="1">
+            <a:pPr algn="l">
+              <a:defRPr sz="1500" b="1">
                 <a:solidFill>
-                  <a:srgbClr val="FFFFFF"/>
+                  <a:srgbClr val="2F5BA8"/>
                 </a:solidFill>
                 <a:latin typeface="Aptos"/>
               </a:defRPr>
             </a:pPr>
             <a:r>
-              <a:t>La defensa conecta una afirmación con código, ejecución y evidencia propia.</a:t>
+              <a:t>03</a:t>
+            </a:r>
+          </a:p>
+        </p:txBody>
+      </p:sp>
+      <p:sp>
+        <p:nvSpPr>
+          <p:cNvPr id="16" name="TextBox 15"/>
+          <p:cNvSpPr txBox="1"/>
+          <p:nvPr/>
+        </p:nvSpPr>
+        <p:spPr>
+          <a:xfrm>
+            <a:off x="1225295" y="3826763"/>
+            <a:ext cx="4434840" cy="1961388"/>
+          </a:xfrm>
+          <a:prstGeom prst="rect">
+            <a:avLst/>
+          </a:prstGeom>
+          <a:noFill/>
+        </p:spPr>
+        <p:txBody>
+          <a:bodyPr wrap="square" lIns="45720" rIns="45720" tIns="36576" bIns="36576" anchor="t">
+            <a:spAutoFit/>
+          </a:bodyPr>
+          <a:lstStyle/>
+          <a:p>
+            <a:pPr algn="l">
+              <a:defRPr sz="1800" b="0">
+                <a:solidFill>
+                  <a:srgbClr val="1C2330"/>
+                </a:solidFill>
+                <a:latin typeface="Aptos"/>
+              </a:defRPr>
+            </a:pPr>
+            <a:r>
+              <a:t>Modifica: predice un cambio pequeño y lo implementa.</a:t>
+            </a:r>
+          </a:p>
+        </p:txBody>
+      </p:sp>
+      <p:sp>
+        <p:nvSpPr>
+          <p:cNvPr id="17" name="Rounded Rectangle 16"/>
+          <p:cNvSpPr/>
+          <p:nvPr/>
+        </p:nvSpPr>
+        <p:spPr>
+          <a:xfrm>
+            <a:off x="6007608" y="3662172"/>
+            <a:ext cx="5212080" cy="2199132"/>
+          </a:xfrm>
+          <a:prstGeom prst="roundRect">
+            <a:avLst/>
+          </a:prstGeom>
+          <a:solidFill>
+            <a:srgbClr val="FFFFFF"/>
+          </a:solidFill>
+          <a:ln>
+            <a:solidFill>
+              <a:srgbClr val="E5E9EF"/>
+            </a:solidFill>
+          </a:ln>
+        </p:spPr>
+        <p:style>
+          <a:lnRef idx="1">
+            <a:schemeClr val="accent1"/>
+          </a:lnRef>
+          <a:fillRef idx="3">
+            <a:schemeClr val="accent1"/>
+          </a:fillRef>
+          <a:effectRef idx="2">
+            <a:schemeClr val="accent1"/>
+          </a:effectRef>
+          <a:fontRef idx="minor">
+            <a:schemeClr val="lt1"/>
+          </a:fontRef>
+        </p:style>
+        <p:txBody>
+          <a:bodyPr rtlCol="0" anchor="ctr"/>
+          <a:lstStyle/>
+          <a:p>
+            <a:pPr algn="ctr"/>
+          </a:p>
+        </p:txBody>
+      </p:sp>
+      <p:sp>
+        <p:nvSpPr>
+          <p:cNvPr id="18" name="TextBox 17"/>
+          <p:cNvSpPr txBox="1"/>
+          <p:nvPr/>
+        </p:nvSpPr>
+        <p:spPr>
+          <a:xfrm>
+            <a:off x="6208776" y="3826763"/>
+            <a:ext cx="384048" cy="347472"/>
+          </a:xfrm>
+          <a:prstGeom prst="rect">
+            <a:avLst/>
+          </a:prstGeom>
+          <a:noFill/>
+        </p:spPr>
+        <p:txBody>
+          <a:bodyPr wrap="square" lIns="45720" rIns="45720" tIns="36576" bIns="36576" anchor="t">
+            <a:spAutoFit/>
+          </a:bodyPr>
+          <a:lstStyle/>
+          <a:p>
+            <a:pPr algn="l">
+              <a:defRPr sz="1500" b="1">
+                <a:solidFill>
+                  <a:srgbClr val="2F5BA8"/>
+                </a:solidFill>
+                <a:latin typeface="Aptos"/>
+              </a:defRPr>
+            </a:pPr>
+            <a:r>
+              <a:t>04</a:t>
+            </a:r>
+          </a:p>
+        </p:txBody>
+      </p:sp>
+      <p:sp>
+        <p:nvSpPr>
+          <p:cNvPr id="19" name="TextBox 18"/>
+          <p:cNvSpPr txBox="1"/>
+          <p:nvPr/>
+        </p:nvSpPr>
+        <p:spPr>
+          <a:xfrm>
+            <a:off x="6665976" y="3826763"/>
+            <a:ext cx="4434840" cy="1961388"/>
+          </a:xfrm>
+          <a:prstGeom prst="rect">
+            <a:avLst/>
+          </a:prstGeom>
+          <a:noFill/>
+        </p:spPr>
+        <p:txBody>
+          <a:bodyPr wrap="square" lIns="45720" rIns="45720" tIns="36576" bIns="36576" anchor="t">
+            <a:spAutoFit/>
+          </a:bodyPr>
+          <a:lstStyle/>
+          <a:p>
+            <a:pPr algn="l">
+              <a:defRPr sz="1800" b="0">
+                <a:solidFill>
+                  <a:srgbClr val="1C2330"/>
+                </a:solidFill>
+                <a:latin typeface="Aptos"/>
+              </a:defRPr>
+            </a:pPr>
+            <a:r>
+              <a:t>Verifica: ejecuta de nuevo y reconoce una limitación real de H1.</a:t>
             </a:r>
           </a:p>
         </p:txBody>
@@ -7681,7 +8227,7 @@
               </a:defRPr>
             </a:pPr>
             <a:r>
-              <a:t>COMPRENDER</a:t>
+              <a:t>CONTRASTAR PARA DECIDIR</a:t>
             </a:r>
           </a:p>
         </p:txBody>
@@ -7717,7 +8263,7 @@
               </a:defRPr>
             </a:pPr>
             <a:r>
-              <a:t>Hilo conceptual de H1</a:t>
+              <a:t>Respuesta defendible o respuesta vaga</a:t>
             </a:r>
           </a:p>
         </p:txBody>
@@ -7796,7 +8342,7 @@
               </a:defRPr>
             </a:pPr>
             <a:r>
-              <a:t>MiniJarvis · 1.º DAW · Sesión 215 · H1 — Primer MiniJarvis</a:t>
+              <a:t>MiniJarvis · 1.º DAW · Sesión 215 · H1 — Primer asistente ejecutable</a:t>
             </a:r>
           </a:p>
         </p:txBody>
@@ -7809,8 +8355,8 @@
         </p:nvSpPr>
         <p:spPr>
           <a:xfrm>
-            <a:off x="566928" y="1261872"/>
-            <a:ext cx="3398520" cy="2199132"/>
+            <a:off x="621792" y="1325880"/>
+            <a:ext cx="5230368" cy="3401568"/>
           </a:xfrm>
           <a:prstGeom prst="roundRect">
             <a:avLst/>
@@ -7820,7 +8366,7 @@
           </a:solidFill>
           <a:ln>
             <a:solidFill>
-              <a:srgbClr val="E5E9EF"/>
+              <a:srgbClr val="445B80"/>
             </a:solidFill>
           </a:ln>
         </p:spPr>
@@ -7848,14 +8394,59 @@
       </p:sp>
       <p:sp>
         <p:nvSpPr>
-          <p:cNvPr id="9" name="TextBox 8"/>
+          <p:cNvPr id="9" name="Rounded Rectangle 8"/>
+          <p:cNvSpPr/>
+          <p:nvPr/>
+        </p:nvSpPr>
+        <p:spPr>
+          <a:xfrm>
+            <a:off x="850392" y="1572768"/>
+            <a:ext cx="566928" cy="475488"/>
+          </a:xfrm>
+          <a:prstGeom prst="roundRect">
+            <a:avLst/>
+          </a:prstGeom>
+          <a:solidFill>
+            <a:srgbClr val="445B80"/>
+          </a:solidFill>
+          <a:ln>
+            <a:solidFill>
+              <a:srgbClr val="445B80"/>
+            </a:solidFill>
+          </a:ln>
+        </p:spPr>
+        <p:style>
+          <a:lnRef idx="1">
+            <a:schemeClr val="accent1"/>
+          </a:lnRef>
+          <a:fillRef idx="3">
+            <a:schemeClr val="accent1"/>
+          </a:fillRef>
+          <a:effectRef idx="2">
+            <a:schemeClr val="accent1"/>
+          </a:effectRef>
+          <a:fontRef idx="minor">
+            <a:schemeClr val="lt1"/>
+          </a:fontRef>
+        </p:style>
+        <p:txBody>
+          <a:bodyPr rtlCol="0" anchor="ctr"/>
+          <a:lstStyle/>
+          <a:p>
+            <a:pPr algn="ctr"/>
+          </a:p>
+        </p:txBody>
+      </p:sp>
+      <p:sp>
+        <p:nvSpPr>
+          <p:cNvPr id="10" name="TextBox 9"/>
           <p:cNvSpPr txBox="1"/>
           <p:nvPr/>
         </p:nvSpPr>
         <p:spPr>
           <a:xfrm>
-            <a:off x="768096" y="1426463"/>
-            <a:ext cx="384048" cy="347472"/>
+            <a:off x="850392" y="1682496"/>
+            <a:ext cx="566928" cy="182880"/>
           </a:xfrm>
           <a:prstGeom prst="rect">
             <a:avLst/>
@@ -7868,30 +8459,30 @@
           </a:bodyPr>
           <a:lstStyle/>
           <a:p>
-            <a:pPr algn="l">
-              <a:defRPr sz="1500" b="1">
+            <a:pPr algn="ctr">
+              <a:defRPr sz="1300" b="1">
                 <a:solidFill>
-                  <a:srgbClr val="2F5BA8"/>
+                  <a:srgbClr val="FFFFFF"/>
                 </a:solidFill>
                 <a:latin typeface="Aptos"/>
               </a:defRPr>
             </a:pPr>
             <a:r>
-              <a:t>01</a:t>
-            </a:r>
-          </a:p>
-        </p:txBody>
-      </p:sp>
-      <p:sp>
-        <p:nvSpPr>
-          <p:cNvPr id="10" name="TextBox 9"/>
+              <a:t>A</a:t>
+            </a:r>
+          </a:p>
+        </p:txBody>
+      </p:sp>
+      <p:sp>
+        <p:nvSpPr>
+          <p:cNvPr id="11" name="TextBox 10"/>
           <p:cNvSpPr txBox="1"/>
           <p:nvPr/>
         </p:nvSpPr>
         <p:spPr>
           <a:xfrm>
-            <a:off x="1225295" y="1426463"/>
-            <a:ext cx="2621280" cy="1961388"/>
+            <a:off x="896112" y="2267712"/>
+            <a:ext cx="4663440" cy="2057400"/>
           </a:xfrm>
           <a:prstGeom prst="rect">
             <a:avLst/>
@@ -7905,7 +8496,7 @@
           <a:lstStyle/>
           <a:p>
             <a:pPr algn="l">
-              <a:defRPr sz="1800" b="0">
+              <a:defRPr sz="2100" b="1">
                 <a:solidFill>
                   <a:srgbClr val="1C2330"/>
                 </a:solidFill>
@@ -7913,21 +8504,21 @@
               </a:defRPr>
             </a:pPr>
             <a:r>
-              <a:t>dato → variable o constante</a:t>
-            </a:r>
-          </a:p>
-        </p:txBody>
-      </p:sp>
-      <p:sp>
-        <p:nvSpPr>
-          <p:cNvPr id="11" name="Rounded Rectangle 10"/>
+              <a:t>VAGA · Lo hice así porque funcionaba.</a:t>
+            </a:r>
+          </a:p>
+        </p:txBody>
+      </p:sp>
+      <p:sp>
+        <p:nvSpPr>
+          <p:cNvPr id="12" name="Rounded Rectangle 11"/>
           <p:cNvSpPr/>
           <p:nvPr/>
         </p:nvSpPr>
         <p:spPr>
           <a:xfrm>
-            <a:off x="4194048" y="1261872"/>
-            <a:ext cx="3398520" cy="2199132"/>
+            <a:off x="6153912" y="1325880"/>
+            <a:ext cx="5230368" cy="3401568"/>
           </a:xfrm>
           <a:prstGeom prst="roundRect">
             <a:avLst/>
@@ -7937,7 +8528,7 @@
           </a:solidFill>
           <a:ln>
             <a:solidFill>
-              <a:srgbClr val="E5E9EF"/>
+              <a:srgbClr val="2F5BA8"/>
             </a:solidFill>
           </a:ln>
         </p:spPr>
@@ -7965,14 +8556,59 @@
       </p:sp>
       <p:sp>
         <p:nvSpPr>
-          <p:cNvPr id="12" name="TextBox 11"/>
+          <p:cNvPr id="13" name="Rounded Rectangle 12"/>
+          <p:cNvSpPr/>
+          <p:nvPr/>
+        </p:nvSpPr>
+        <p:spPr>
+          <a:xfrm>
+            <a:off x="6382512" y="1572768"/>
+            <a:ext cx="566928" cy="475488"/>
+          </a:xfrm>
+          <a:prstGeom prst="roundRect">
+            <a:avLst/>
+          </a:prstGeom>
+          <a:solidFill>
+            <a:srgbClr val="2F5BA8"/>
+          </a:solidFill>
+          <a:ln>
+            <a:solidFill>
+              <a:srgbClr val="2F5BA8"/>
+            </a:solidFill>
+          </a:ln>
+        </p:spPr>
+        <p:style>
+          <a:lnRef idx="1">
+            <a:schemeClr val="accent1"/>
+          </a:lnRef>
+          <a:fillRef idx="3">
+            <a:schemeClr val="accent1"/>
+          </a:fillRef>
+          <a:effectRef idx="2">
+            <a:schemeClr val="accent1"/>
+          </a:effectRef>
+          <a:fontRef idx="minor">
+            <a:schemeClr val="lt1"/>
+          </a:fontRef>
+        </p:style>
+        <p:txBody>
+          <a:bodyPr rtlCol="0" anchor="ctr"/>
+          <a:lstStyle/>
+          <a:p>
+            <a:pPr algn="ctr"/>
+          </a:p>
+        </p:txBody>
+      </p:sp>
+      <p:sp>
+        <p:nvSpPr>
+          <p:cNvPr id="14" name="TextBox 13"/>
           <p:cNvSpPr txBox="1"/>
           <p:nvPr/>
         </p:nvSpPr>
         <p:spPr>
           <a:xfrm>
-            <a:off x="4395216" y="1426463"/>
-            <a:ext cx="384048" cy="347472"/>
+            <a:off x="6382512" y="1682496"/>
+            <a:ext cx="566928" cy="182880"/>
           </a:xfrm>
           <a:prstGeom prst="rect">
             <a:avLst/>
@@ -7985,30 +8621,30 @@
           </a:bodyPr>
           <a:lstStyle/>
           <a:p>
-            <a:pPr algn="l">
-              <a:defRPr sz="1500" b="1">
+            <a:pPr algn="ctr">
+              <a:defRPr sz="1300" b="1">
                 <a:solidFill>
-                  <a:srgbClr val="2F5BA8"/>
+                  <a:srgbClr val="FFFFFF"/>
                 </a:solidFill>
                 <a:latin typeface="Aptos"/>
               </a:defRPr>
             </a:pPr>
             <a:r>
-              <a:t>02</a:t>
-            </a:r>
-          </a:p>
-        </p:txBody>
-      </p:sp>
-      <p:sp>
-        <p:nvSpPr>
-          <p:cNvPr id="13" name="TextBox 12"/>
+              <a:t>B</a:t>
+            </a:r>
+          </a:p>
+        </p:txBody>
+      </p:sp>
+      <p:sp>
+        <p:nvSpPr>
+          <p:cNvPr id="15" name="TextBox 14"/>
           <p:cNvSpPr txBox="1"/>
           <p:nvPr/>
         </p:nvSpPr>
         <p:spPr>
           <a:xfrm>
-            <a:off x="4852416" y="1426463"/>
-            <a:ext cx="2621280" cy="1961388"/>
+            <a:off x="6428232" y="2267712"/>
+            <a:ext cx="4663440" cy="2057400"/>
           </a:xfrm>
           <a:prstGeom prst="rect">
             <a:avLst/>
@@ -8022,7 +8658,7 @@
           <a:lstStyle/>
           <a:p>
             <a:pPr algn="l">
-              <a:defRPr sz="1800" b="0">
+              <a:defRPr sz="2100" b="1">
                 <a:solidFill>
                   <a:srgbClr val="1C2330"/>
                 </a:solidFill>
@@ -8030,31 +8666,31 @@
               </a:defRPr>
             </a:pPr>
             <a:r>
-              <a:t>operación o comparación → resultado</a:t>
-            </a:r>
-          </a:p>
-        </p:txBody>
-      </p:sp>
-      <p:sp>
-        <p:nvSpPr>
-          <p:cNvPr id="14" name="Rounded Rectangle 13"/>
+              <a:t>DEFENDIBLE · Esta línea lee un String, lo guarda en userName y por eso Laura aparece en la salida.</a:t>
+            </a:r>
+          </a:p>
+        </p:txBody>
+      </p:sp>
+      <p:sp>
+        <p:nvSpPr>
+          <p:cNvPr id="16" name="Rounded Rectangle 15"/>
           <p:cNvSpPr/>
           <p:nvPr/>
         </p:nvSpPr>
         <p:spPr>
           <a:xfrm>
-            <a:off x="7821167" y="1261872"/>
-            <a:ext cx="3398520" cy="2199132"/>
+            <a:off x="621792" y="5010912"/>
+            <a:ext cx="10762488" cy="932688"/>
           </a:xfrm>
           <a:prstGeom prst="roundRect">
             <a:avLst/>
           </a:prstGeom>
           <a:solidFill>
-            <a:srgbClr val="FFFFFF"/>
+            <a:srgbClr val="121824"/>
           </a:solidFill>
           <a:ln>
             <a:solidFill>
-              <a:srgbClr val="E5E9EF"/>
+              <a:srgbClr val="121824"/>
             </a:solidFill>
           </a:ln>
         </p:spPr>
@@ -8082,14 +8718,14 @@
       </p:sp>
       <p:sp>
         <p:nvSpPr>
-          <p:cNvPr id="15" name="TextBox 14"/>
+          <p:cNvPr id="17" name="TextBox 16"/>
           <p:cNvSpPr txBox="1"/>
           <p:nvPr/>
         </p:nvSpPr>
         <p:spPr>
           <a:xfrm>
-            <a:off x="8022336" y="1426463"/>
-            <a:ext cx="384048" cy="347472"/>
+            <a:off x="896112" y="5230368"/>
+            <a:ext cx="10204704" cy="475488"/>
           </a:xfrm>
           <a:prstGeom prst="rect">
             <a:avLst/>
@@ -8102,286 +8738,16 @@
           </a:bodyPr>
           <a:lstStyle/>
           <a:p>
-            <a:pPr algn="l">
-              <a:defRPr sz="1500" b="1">
+            <a:pPr algn="ctr">
+              <a:defRPr sz="1700" b="1">
                 <a:solidFill>
-                  <a:srgbClr val="2F5BA8"/>
+                  <a:srgbClr val="FFFFFF"/>
                 </a:solidFill>
                 <a:latin typeface="Aptos"/>
               </a:defRPr>
             </a:pPr>
             <a:r>
-              <a:t>03</a:t>
-            </a:r>
-          </a:p>
-        </p:txBody>
-      </p:sp>
-      <p:sp>
-        <p:nvSpPr>
-          <p:cNvPr id="16" name="TextBox 15"/>
-          <p:cNvSpPr txBox="1"/>
-          <p:nvPr/>
-        </p:nvSpPr>
-        <p:spPr>
-          <a:xfrm>
-            <a:off x="8479536" y="1426463"/>
-            <a:ext cx="2621280" cy="1961388"/>
-          </a:xfrm>
-          <a:prstGeom prst="rect">
-            <a:avLst/>
-          </a:prstGeom>
-          <a:noFill/>
-        </p:spPr>
-        <p:txBody>
-          <a:bodyPr wrap="square" lIns="45720" rIns="45720" tIns="36576" bIns="36576" anchor="t">
-            <a:spAutoFit/>
-          </a:bodyPr>
-          <a:lstStyle/>
-          <a:p>
-            <a:pPr algn="l">
-              <a:defRPr sz="1800" b="0">
-                <a:solidFill>
-                  <a:srgbClr val="1C2330"/>
-                </a:solidFill>
-                <a:latin typeface="Aptos"/>
-              </a:defRPr>
-            </a:pPr>
-            <a:r>
-              <a:t>boolean → decisión</a:t>
-            </a:r>
-          </a:p>
-        </p:txBody>
-      </p:sp>
-      <p:sp>
-        <p:nvSpPr>
-          <p:cNvPr id="17" name="Rounded Rectangle 16"/>
-          <p:cNvSpPr/>
-          <p:nvPr/>
-        </p:nvSpPr>
-        <p:spPr>
-          <a:xfrm>
-            <a:off x="566928" y="3662172"/>
-            <a:ext cx="3398520" cy="2199132"/>
-          </a:xfrm>
-          <a:prstGeom prst="roundRect">
-            <a:avLst/>
-          </a:prstGeom>
-          <a:solidFill>
-            <a:srgbClr val="FFFFFF"/>
-          </a:solidFill>
-          <a:ln>
-            <a:solidFill>
-              <a:srgbClr val="E5E9EF"/>
-            </a:solidFill>
-          </a:ln>
-        </p:spPr>
-        <p:style>
-          <a:lnRef idx="1">
-            <a:schemeClr val="accent1"/>
-          </a:lnRef>
-          <a:fillRef idx="3">
-            <a:schemeClr val="accent1"/>
-          </a:fillRef>
-          <a:effectRef idx="2">
-            <a:schemeClr val="accent1"/>
-          </a:effectRef>
-          <a:fontRef idx="minor">
-            <a:schemeClr val="lt1"/>
-          </a:fontRef>
-        </p:style>
-        <p:txBody>
-          <a:bodyPr rtlCol="0" anchor="ctr"/>
-          <a:lstStyle/>
-          <a:p>
-            <a:pPr algn="ctr"/>
-          </a:p>
-        </p:txBody>
-      </p:sp>
-      <p:sp>
-        <p:nvSpPr>
-          <p:cNvPr id="18" name="TextBox 17"/>
-          <p:cNvSpPr txBox="1"/>
-          <p:nvPr/>
-        </p:nvSpPr>
-        <p:spPr>
-          <a:xfrm>
-            <a:off x="768096" y="3826763"/>
-            <a:ext cx="384048" cy="347472"/>
-          </a:xfrm>
-          <a:prstGeom prst="rect">
-            <a:avLst/>
-          </a:prstGeom>
-          <a:noFill/>
-        </p:spPr>
-        <p:txBody>
-          <a:bodyPr wrap="square" lIns="45720" rIns="45720" tIns="36576" bIns="36576" anchor="t">
-            <a:spAutoFit/>
-          </a:bodyPr>
-          <a:lstStyle/>
-          <a:p>
-            <a:pPr algn="l">
-              <a:defRPr sz="1500" b="1">
-                <a:solidFill>
-                  <a:srgbClr val="2F5BA8"/>
-                </a:solidFill>
-                <a:latin typeface="Aptos"/>
-              </a:defRPr>
-            </a:pPr>
-            <a:r>
-              <a:t>04</a:t>
-            </a:r>
-          </a:p>
-        </p:txBody>
-      </p:sp>
-      <p:sp>
-        <p:nvSpPr>
-          <p:cNvPr id="19" name="TextBox 18"/>
-          <p:cNvSpPr txBox="1"/>
-          <p:nvPr/>
-        </p:nvSpPr>
-        <p:spPr>
-          <a:xfrm>
-            <a:off x="1225295" y="3826763"/>
-            <a:ext cx="2621280" cy="1961388"/>
-          </a:xfrm>
-          <a:prstGeom prst="rect">
-            <a:avLst/>
-          </a:prstGeom>
-          <a:noFill/>
-        </p:spPr>
-        <p:txBody>
-          <a:bodyPr wrap="square" lIns="45720" rIns="45720" tIns="36576" bIns="36576" anchor="t">
-            <a:spAutoFit/>
-          </a:bodyPr>
-          <a:lstStyle/>
-          <a:p>
-            <a:pPr algn="l">
-              <a:defRPr sz="1800" b="0">
-                <a:solidFill>
-                  <a:srgbClr val="1C2330"/>
-                </a:solidFill>
-                <a:latin typeface="Aptos"/>
-              </a:defRPr>
-            </a:pPr>
-            <a:r>
-              <a:t>salida → prueba observable</a:t>
-            </a:r>
-          </a:p>
-        </p:txBody>
-      </p:sp>
-      <p:sp>
-        <p:nvSpPr>
-          <p:cNvPr id="20" name="Rounded Rectangle 19"/>
-          <p:cNvSpPr/>
-          <p:nvPr/>
-        </p:nvSpPr>
-        <p:spPr>
-          <a:xfrm>
-            <a:off x="4194048" y="3662172"/>
-            <a:ext cx="3398520" cy="2199132"/>
-          </a:xfrm>
-          <a:prstGeom prst="roundRect">
-            <a:avLst/>
-          </a:prstGeom>
-          <a:solidFill>
-            <a:srgbClr val="FFFFFF"/>
-          </a:solidFill>
-          <a:ln>
-            <a:solidFill>
-              <a:srgbClr val="E5E9EF"/>
-            </a:solidFill>
-          </a:ln>
-        </p:spPr>
-        <p:style>
-          <a:lnRef idx="1">
-            <a:schemeClr val="accent1"/>
-          </a:lnRef>
-          <a:fillRef idx="3">
-            <a:schemeClr val="accent1"/>
-          </a:fillRef>
-          <a:effectRef idx="2">
-            <a:schemeClr val="accent1"/>
-          </a:effectRef>
-          <a:fontRef idx="minor">
-            <a:schemeClr val="lt1"/>
-          </a:fontRef>
-        </p:style>
-        <p:txBody>
-          <a:bodyPr rtlCol="0" anchor="ctr"/>
-          <a:lstStyle/>
-          <a:p>
-            <a:pPr algn="ctr"/>
-          </a:p>
-        </p:txBody>
-      </p:sp>
-      <p:sp>
-        <p:nvSpPr>
-          <p:cNvPr id="21" name="TextBox 20"/>
-          <p:cNvSpPr txBox="1"/>
-          <p:nvPr/>
-        </p:nvSpPr>
-        <p:spPr>
-          <a:xfrm>
-            <a:off x="4395216" y="3826763"/>
-            <a:ext cx="384048" cy="347472"/>
-          </a:xfrm>
-          <a:prstGeom prst="rect">
-            <a:avLst/>
-          </a:prstGeom>
-          <a:noFill/>
-        </p:spPr>
-        <p:txBody>
-          <a:bodyPr wrap="square" lIns="45720" rIns="45720" tIns="36576" bIns="36576" anchor="t">
-            <a:spAutoFit/>
-          </a:bodyPr>
-          <a:lstStyle/>
-          <a:p>
-            <a:pPr algn="l">
-              <a:defRPr sz="1500" b="1">
-                <a:solidFill>
-                  <a:srgbClr val="2F5BA8"/>
-                </a:solidFill>
-                <a:latin typeface="Aptos"/>
-              </a:defRPr>
-            </a:pPr>
-            <a:r>
-              <a:t>05</a:t>
-            </a:r>
-          </a:p>
-        </p:txBody>
-      </p:sp>
-      <p:sp>
-        <p:nvSpPr>
-          <p:cNvPr id="22" name="TextBox 21"/>
-          <p:cNvSpPr txBox="1"/>
-          <p:nvPr/>
-        </p:nvSpPr>
-        <p:spPr>
-          <a:xfrm>
-            <a:off x="4852416" y="3826763"/>
-            <a:ext cx="2621280" cy="1961388"/>
-          </a:xfrm>
-          <a:prstGeom prst="rect">
-            <a:avLst/>
-          </a:prstGeom>
-          <a:noFill/>
-        </p:spPr>
-        <p:txBody>
-          <a:bodyPr wrap="square" lIns="45720" rIns="45720" tIns="36576" bIns="36576" anchor="t">
-            <a:spAutoFit/>
-          </a:bodyPr>
-          <a:lstStyle/>
-          <a:p>
-            <a:pPr algn="l">
-              <a:defRPr sz="1800" b="0">
-                <a:solidFill>
-                  <a:srgbClr val="1C2330"/>
-                </a:solidFill>
-                <a:latin typeface="Aptos"/>
-              </a:defRPr>
-            </a:pPr>
-            <a:r>
-              <a:t>requisito → código → ejecución → evidencia</a:t>
+              <a:t>La defensa conecta una afirmación con código, ejecución y evidencia propia.</a:t>
             </a:r>
           </a:p>
         </p:txBody>
@@ -8521,7 +8887,7 @@
               </a:defRPr>
             </a:pPr>
             <a:r>
-              <a:t>APLICAR Y DECIDIR</a:t>
+              <a:t>COMPRENDER</a:t>
             </a:r>
           </a:p>
         </p:txBody>
@@ -8557,7 +8923,7 @@
               </a:defRPr>
             </a:pPr>
             <a:r>
-              <a:t>Ronda individual</a:t>
+              <a:t>Hilo conceptual de H1</a:t>
             </a:r>
           </a:p>
         </p:txBody>
@@ -8636,7 +9002,7 @@
               </a:defRPr>
             </a:pPr>
             <a:r>
-              <a:t>MiniJarvis · 1.º DAW · Sesión 215 · H1 — Primer MiniJarvis</a:t>
+              <a:t>MiniJarvis · 1.º DAW · Sesión 215 · H1 — Primer asistente ejecutable</a:t>
             </a:r>
           </a:p>
         </p:txBody>
@@ -8649,8 +9015,8 @@
         </p:nvSpPr>
         <p:spPr>
           <a:xfrm>
-            <a:off x="658368" y="1307592"/>
-            <a:ext cx="10835640" cy="1049274"/>
+            <a:off x="566928" y="1261872"/>
+            <a:ext cx="3398520" cy="2199132"/>
           </a:xfrm>
           <a:prstGeom prst="roundRect">
             <a:avLst/>
@@ -8694,8 +9060,8 @@
         </p:nvSpPr>
         <p:spPr>
           <a:xfrm>
-            <a:off x="850392" y="1453895"/>
-            <a:ext cx="685800" cy="384048"/>
+            <a:off x="768096" y="1426463"/>
+            <a:ext cx="384048" cy="347472"/>
           </a:xfrm>
           <a:prstGeom prst="rect">
             <a:avLst/>
@@ -8709,7 +9075,7 @@
           <a:lstStyle/>
           <a:p>
             <a:pPr algn="l">
-              <a:defRPr sz="1200" b="1">
+              <a:defRPr sz="1500" b="1">
                 <a:solidFill>
                   <a:srgbClr val="2F5BA8"/>
                 </a:solidFill>
@@ -8717,7 +9083,7 @@
               </a:defRPr>
             </a:pPr>
             <a:r>
-              <a:t>PASO 1</a:t>
+              <a:t>01</a:t>
             </a:r>
           </a:p>
         </p:txBody>
@@ -8730,8 +9096,8 @@
         </p:nvSpPr>
         <p:spPr>
           <a:xfrm>
-            <a:off x="1664208" y="1417319"/>
-            <a:ext cx="9464040" cy="829818"/>
+            <a:off x="1225295" y="1426463"/>
+            <a:ext cx="2621280" cy="1961388"/>
           </a:xfrm>
           <a:prstGeom prst="rect">
             <a:avLst/>
@@ -8745,7 +9111,7 @@
           <a:lstStyle/>
           <a:p>
             <a:pPr algn="l">
-              <a:defRPr sz="2000" b="0">
+              <a:defRPr sz="1800" b="0">
                 <a:solidFill>
                   <a:srgbClr val="1C2330"/>
                 </a:solidFill>
@@ -8753,7 +9119,7 @@
               </a:defRPr>
             </a:pPr>
             <a:r>
-              <a:t>Señala una línea y explica su función.</a:t>
+              <a:t>dato → variable o constante</a:t>
             </a:r>
           </a:p>
         </p:txBody>
@@ -8766,8 +9132,8 @@
         </p:nvSpPr>
         <p:spPr>
           <a:xfrm>
-            <a:off x="658368" y="2542032"/>
-            <a:ext cx="10835640" cy="1049274"/>
+            <a:off x="4194048" y="1261872"/>
+            <a:ext cx="3398520" cy="2199132"/>
           </a:xfrm>
           <a:prstGeom prst="roundRect">
             <a:avLst/>
@@ -8811,8 +9177,8 @@
         </p:nvSpPr>
         <p:spPr>
           <a:xfrm>
-            <a:off x="850392" y="2688336"/>
-            <a:ext cx="685800" cy="384048"/>
+            <a:off x="4395216" y="1426463"/>
+            <a:ext cx="384048" cy="347472"/>
           </a:xfrm>
           <a:prstGeom prst="rect">
             <a:avLst/>
@@ -8826,7 +9192,7 @@
           <a:lstStyle/>
           <a:p>
             <a:pPr algn="l">
-              <a:defRPr sz="1200" b="1">
+              <a:defRPr sz="1500" b="1">
                 <a:solidFill>
                   <a:srgbClr val="2F5BA8"/>
                 </a:solidFill>
@@ -8834,7 +9200,7 @@
               </a:defRPr>
             </a:pPr>
             <a:r>
-              <a:t>PASO 2</a:t>
+              <a:t>02</a:t>
             </a:r>
           </a:p>
         </p:txBody>
@@ -8847,8 +9213,8 @@
         </p:nvSpPr>
         <p:spPr>
           <a:xfrm>
-            <a:off x="1664208" y="2651760"/>
-            <a:ext cx="9464040" cy="829818"/>
+            <a:off x="4852416" y="1426463"/>
+            <a:ext cx="2621280" cy="1961388"/>
           </a:xfrm>
           <a:prstGeom prst="rect">
             <a:avLst/>
@@ -8862,7 +9228,7 @@
           <a:lstStyle/>
           <a:p>
             <a:pPr algn="l">
-              <a:defRPr sz="2000" b="0">
+              <a:defRPr sz="1800" b="0">
                 <a:solidFill>
                   <a:srgbClr val="1C2330"/>
                 </a:solidFill>
@@ -8870,7 +9236,7 @@
               </a:defRPr>
             </a:pPr>
             <a:r>
-              <a:t>Predice la salida para una entrada concreta y ejecútala.</a:t>
+              <a:t>operación o comparación → resultado</a:t>
             </a:r>
           </a:p>
         </p:txBody>
@@ -8883,8 +9249,8 @@
         </p:nvSpPr>
         <p:spPr>
           <a:xfrm>
-            <a:off x="658368" y="3776472"/>
-            <a:ext cx="10835640" cy="1049274"/>
+            <a:off x="7821167" y="1261872"/>
+            <a:ext cx="3398520" cy="2199132"/>
           </a:xfrm>
           <a:prstGeom prst="roundRect">
             <a:avLst/>
@@ -8928,8 +9294,8 @@
         </p:nvSpPr>
         <p:spPr>
           <a:xfrm>
-            <a:off x="850392" y="3922776"/>
-            <a:ext cx="685800" cy="384048"/>
+            <a:off x="8022336" y="1426463"/>
+            <a:ext cx="384048" cy="347472"/>
           </a:xfrm>
           <a:prstGeom prst="rect">
             <a:avLst/>
@@ -8943,7 +9309,7 @@
           <a:lstStyle/>
           <a:p>
             <a:pPr algn="l">
-              <a:defRPr sz="1200" b="1">
+              <a:defRPr sz="1500" b="1">
                 <a:solidFill>
                   <a:srgbClr val="2F5BA8"/>
                 </a:solidFill>
@@ -8951,7 +9317,7 @@
               </a:defRPr>
             </a:pPr>
             <a:r>
-              <a:t>PASO 3</a:t>
+              <a:t>03</a:t>
             </a:r>
           </a:p>
         </p:txBody>
@@ -8964,8 +9330,8 @@
         </p:nvSpPr>
         <p:spPr>
           <a:xfrm>
-            <a:off x="1664208" y="3886200"/>
-            <a:ext cx="9464040" cy="829818"/>
+            <a:off x="8479536" y="1426463"/>
+            <a:ext cx="2621280" cy="1961388"/>
           </a:xfrm>
           <a:prstGeom prst="rect">
             <a:avLst/>
@@ -8979,7 +9345,7 @@
           <a:lstStyle/>
           <a:p>
             <a:pPr algn="l">
-              <a:defRPr sz="2000" b="0">
+              <a:defRPr sz="1800" b="0">
                 <a:solidFill>
                   <a:srgbClr val="1C2330"/>
                 </a:solidFill>
@@ -8987,7 +9353,7 @@
               </a:defRPr>
             </a:pPr>
             <a:r>
-              <a:t>Haz una modificación pequeña y predice su efecto.</a:t>
+              <a:t>boolean → decisión</a:t>
             </a:r>
           </a:p>
         </p:txBody>
@@ -9000,8 +9366,8 @@
         </p:nvSpPr>
         <p:spPr>
           <a:xfrm>
-            <a:off x="658368" y="5010912"/>
-            <a:ext cx="10835640" cy="1049274"/>
+            <a:off x="566928" y="3662172"/>
+            <a:ext cx="3398520" cy="2199132"/>
           </a:xfrm>
           <a:prstGeom prst="roundRect">
             <a:avLst/>
@@ -9045,8 +9411,8 @@
         </p:nvSpPr>
         <p:spPr>
           <a:xfrm>
-            <a:off x="850392" y="5157216"/>
-            <a:ext cx="685800" cy="384048"/>
+            <a:off x="768096" y="3826763"/>
+            <a:ext cx="384048" cy="347472"/>
           </a:xfrm>
           <a:prstGeom prst="rect">
             <a:avLst/>
@@ -9060,7 +9426,7 @@
           <a:lstStyle/>
           <a:p>
             <a:pPr algn="l">
-              <a:defRPr sz="1200" b="1">
+              <a:defRPr sz="1500" b="1">
                 <a:solidFill>
                   <a:srgbClr val="2F5BA8"/>
                 </a:solidFill>
@@ -9068,7 +9434,7 @@
               </a:defRPr>
             </a:pPr>
             <a:r>
-              <a:t>PASO 4</a:t>
+              <a:t>04</a:t>
             </a:r>
           </a:p>
         </p:txBody>
@@ -9081,8 +9447,8 @@
         </p:nvSpPr>
         <p:spPr>
           <a:xfrm>
-            <a:off x="1664208" y="5120640"/>
-            <a:ext cx="9464040" cy="829818"/>
+            <a:off x="1225295" y="3826763"/>
+            <a:ext cx="2621280" cy="1961388"/>
           </a:xfrm>
           <a:prstGeom prst="rect">
             <a:avLst/>
@@ -9096,7 +9462,7 @@
           <a:lstStyle/>
           <a:p>
             <a:pPr algn="l">
-              <a:defRPr sz="2000" b="0">
+              <a:defRPr sz="1800" b="0">
                 <a:solidFill>
                   <a:srgbClr val="1C2330"/>
                 </a:solidFill>
@@ -9104,7 +9470,124 @@
               </a:defRPr>
             </a:pPr>
             <a:r>
-              <a:t>Localiza la evidencia que demuestra el resultado.</a:t>
+              <a:t>salida → prueba observable</a:t>
+            </a:r>
+          </a:p>
+        </p:txBody>
+      </p:sp>
+      <p:sp>
+        <p:nvSpPr>
+          <p:cNvPr id="20" name="Rounded Rectangle 19"/>
+          <p:cNvSpPr/>
+          <p:nvPr/>
+        </p:nvSpPr>
+        <p:spPr>
+          <a:xfrm>
+            <a:off x="4194048" y="3662172"/>
+            <a:ext cx="3398520" cy="2199132"/>
+          </a:xfrm>
+          <a:prstGeom prst="roundRect">
+            <a:avLst/>
+          </a:prstGeom>
+          <a:solidFill>
+            <a:srgbClr val="FFFFFF"/>
+          </a:solidFill>
+          <a:ln>
+            <a:solidFill>
+              <a:srgbClr val="E5E9EF"/>
+            </a:solidFill>
+          </a:ln>
+        </p:spPr>
+        <p:style>
+          <a:lnRef idx="1">
+            <a:schemeClr val="accent1"/>
+          </a:lnRef>
+          <a:fillRef idx="3">
+            <a:schemeClr val="accent1"/>
+          </a:fillRef>
+          <a:effectRef idx="2">
+            <a:schemeClr val="accent1"/>
+          </a:effectRef>
+          <a:fontRef idx="minor">
+            <a:schemeClr val="lt1"/>
+          </a:fontRef>
+        </p:style>
+        <p:txBody>
+          <a:bodyPr rtlCol="0" anchor="ctr"/>
+          <a:lstStyle/>
+          <a:p>
+            <a:pPr algn="ctr"/>
+          </a:p>
+        </p:txBody>
+      </p:sp>
+      <p:sp>
+        <p:nvSpPr>
+          <p:cNvPr id="21" name="TextBox 20"/>
+          <p:cNvSpPr txBox="1"/>
+          <p:nvPr/>
+        </p:nvSpPr>
+        <p:spPr>
+          <a:xfrm>
+            <a:off x="4395216" y="3826763"/>
+            <a:ext cx="384048" cy="347472"/>
+          </a:xfrm>
+          <a:prstGeom prst="rect">
+            <a:avLst/>
+          </a:prstGeom>
+          <a:noFill/>
+        </p:spPr>
+        <p:txBody>
+          <a:bodyPr wrap="square" lIns="45720" rIns="45720" tIns="36576" bIns="36576" anchor="t">
+            <a:spAutoFit/>
+          </a:bodyPr>
+          <a:lstStyle/>
+          <a:p>
+            <a:pPr algn="l">
+              <a:defRPr sz="1500" b="1">
+                <a:solidFill>
+                  <a:srgbClr val="2F5BA8"/>
+                </a:solidFill>
+                <a:latin typeface="Aptos"/>
+              </a:defRPr>
+            </a:pPr>
+            <a:r>
+              <a:t>05</a:t>
+            </a:r>
+          </a:p>
+        </p:txBody>
+      </p:sp>
+      <p:sp>
+        <p:nvSpPr>
+          <p:cNvPr id="22" name="TextBox 21"/>
+          <p:cNvSpPr txBox="1"/>
+          <p:nvPr/>
+        </p:nvSpPr>
+        <p:spPr>
+          <a:xfrm>
+            <a:off x="4852416" y="3826763"/>
+            <a:ext cx="2621280" cy="1961388"/>
+          </a:xfrm>
+          <a:prstGeom prst="rect">
+            <a:avLst/>
+          </a:prstGeom>
+          <a:noFill/>
+        </p:spPr>
+        <p:txBody>
+          <a:bodyPr wrap="square" lIns="45720" rIns="45720" tIns="36576" bIns="36576" anchor="t">
+            <a:spAutoFit/>
+          </a:bodyPr>
+          <a:lstStyle/>
+          <a:p>
+            <a:pPr algn="l">
+              <a:defRPr sz="1800" b="0">
+                <a:solidFill>
+                  <a:srgbClr val="1C2330"/>
+                </a:solidFill>
+                <a:latin typeface="Aptos"/>
+              </a:defRPr>
+            </a:pPr>
+            <a:r>
+              <a:t>requisito → código → ejecución → evidencia</a:t>
             </a:r>
           </a:p>
         </p:txBody>
@@ -9244,7 +9727,7 @@
               </a:defRPr>
             </a:pPr>
             <a:r>
-              <a:t>PROCESO</a:t>
+              <a:t>APLICAR Y DECIDIR</a:t>
             </a:r>
           </a:p>
         </p:txBody>
@@ -9280,7 +9763,7 @@
               </a:defRPr>
             </a:pPr>
             <a:r>
-              <a:t>Si aparece una laguna</a:t>
+              <a:t>Ronda individual</a:t>
             </a:r>
           </a:p>
         </p:txBody>
@@ -9359,7 +9842,7 @@
               </a:defRPr>
             </a:pPr>
             <a:r>
-              <a:t>MiniJarvis · 1.º DAW · Sesión 215 · H1 — Primer MiniJarvis</a:t>
+              <a:t>MiniJarvis · 1.º DAW · Sesión 215 · H1 — Primer asistente ejecutable</a:t>
             </a:r>
           </a:p>
         </p:txBody>
@@ -9372,8 +9855,8 @@
         </p:nvSpPr>
         <p:spPr>
           <a:xfrm>
-            <a:off x="713232" y="2240280"/>
-            <a:ext cx="1993392" cy="1874519"/>
+            <a:off x="658368" y="1307592"/>
+            <a:ext cx="10835640" cy="1049274"/>
           </a:xfrm>
           <a:prstGeom prst="roundRect">
             <a:avLst/>
@@ -9383,7 +9866,7 @@
           </a:solidFill>
           <a:ln>
             <a:solidFill>
-              <a:srgbClr val="2F5BA8"/>
+              <a:srgbClr val="E5E9EF"/>
             </a:solidFill>
           </a:ln>
         </p:spPr>
@@ -9417,8 +9900,8 @@
         </p:nvSpPr>
         <p:spPr>
           <a:xfrm>
-            <a:off x="850392" y="2487168"/>
-            <a:ext cx="1719072" cy="320040"/>
+            <a:off x="850392" y="1453895"/>
+            <a:ext cx="685800" cy="384048"/>
           </a:xfrm>
           <a:prstGeom prst="rect">
             <a:avLst/>
@@ -9431,8 +9914,8 @@
           </a:bodyPr>
           <a:lstStyle/>
           <a:p>
-            <a:pPr algn="ctr">
-              <a:defRPr sz="1400" b="1">
+            <a:pPr algn="l">
+              <a:defRPr sz="1200" b="1">
                 <a:solidFill>
                   <a:srgbClr val="2F5BA8"/>
                 </a:solidFill>
@@ -9440,7 +9923,7 @@
               </a:defRPr>
             </a:pPr>
             <a:r>
-              <a:t>01</a:t>
+              <a:t>PASO 1</a:t>
             </a:r>
           </a:p>
         </p:txBody>
@@ -9453,8 +9936,8 @@
         </p:nvSpPr>
         <p:spPr>
           <a:xfrm>
-            <a:off x="850392" y="2971800"/>
-            <a:ext cx="1719072" cy="658368"/>
+            <a:off x="1664208" y="1417319"/>
+            <a:ext cx="9464040" cy="829818"/>
           </a:xfrm>
           <a:prstGeom prst="rect">
             <a:avLst/>
@@ -9462,13 +9945,13 @@
           <a:noFill/>
         </p:spPr>
         <p:txBody>
-          <a:bodyPr wrap="square" lIns="45720" rIns="45720" tIns="36576" bIns="36576" anchor="ctr">
+          <a:bodyPr wrap="square" lIns="45720" rIns="45720" tIns="36576" bIns="36576" anchor="t">
             <a:spAutoFit/>
           </a:bodyPr>
           <a:lstStyle/>
           <a:p>
-            <a:pPr algn="ctr">
-              <a:defRPr sz="1700" b="1">
+            <a:pPr algn="l">
+              <a:defRPr sz="2000" b="0">
                 <a:solidFill>
                   <a:srgbClr val="1C2330"/>
                 </a:solidFill>
@@ -9476,30 +9959,32 @@
               </a:defRPr>
             </a:pPr>
             <a:r>
-              <a:t>identifica</a:t>
-            </a:r>
-          </a:p>
-        </p:txBody>
-      </p:sp>
-      <p:sp>
-        <p:nvSpPr>
-          <p:cNvPr id="11" name="Right Arrow 10"/>
+              <a:t>Explica una variable o constante y una operación.</a:t>
+            </a:r>
+          </a:p>
+        </p:txBody>
+      </p:sp>
+      <p:sp>
+        <p:nvSpPr>
+          <p:cNvPr id="11" name="Rounded Rectangle 10"/>
           <p:cNvSpPr/>
           <p:nvPr/>
         </p:nvSpPr>
         <p:spPr>
           <a:xfrm>
-            <a:off x="2771394" y="2907792"/>
-            <a:ext cx="228600" cy="411480"/>
-          </a:xfrm>
-          <a:prstGeom prst="rightArrow">
+            <a:off x="658368" y="2542032"/>
+            <a:ext cx="10835640" cy="1049274"/>
+          </a:xfrm>
+          <a:prstGeom prst="roundRect">
             <a:avLst/>
           </a:prstGeom>
           <a:solidFill>
-            <a:srgbClr val="586270"/>
+            <a:srgbClr val="FFFFFF"/>
           </a:solidFill>
           <a:ln>
-            <a:noFill/>
+            <a:solidFill>
+              <a:srgbClr val="E5E9EF"/>
+            </a:solidFill>
           </a:ln>
         </p:spPr>
         <p:style>
@@ -9526,59 +10011,14 @@
       </p:sp>
       <p:sp>
         <p:nvSpPr>
-          <p:cNvPr id="12" name="Rounded Rectangle 11"/>
-          <p:cNvSpPr/>
-          <p:nvPr/>
-        </p:nvSpPr>
-        <p:spPr>
-          <a:xfrm>
-            <a:off x="2900934" y="2240280"/>
-            <a:ext cx="1993392" cy="1874519"/>
-          </a:xfrm>
-          <a:prstGeom prst="roundRect">
-            <a:avLst/>
-          </a:prstGeom>
-          <a:solidFill>
-            <a:srgbClr val="FFFFFF"/>
-          </a:solidFill>
-          <a:ln>
-            <a:solidFill>
-              <a:srgbClr val="2F5BA8"/>
-            </a:solidFill>
-          </a:ln>
-        </p:spPr>
-        <p:style>
-          <a:lnRef idx="1">
-            <a:schemeClr val="accent1"/>
-          </a:lnRef>
-          <a:fillRef idx="3">
-            <a:schemeClr val="accent1"/>
-          </a:fillRef>
-          <a:effectRef idx="2">
-            <a:schemeClr val="accent1"/>
-          </a:effectRef>
-          <a:fontRef idx="minor">
-            <a:schemeClr val="lt1"/>
-          </a:fontRef>
-        </p:style>
-        <p:txBody>
-          <a:bodyPr rtlCol="0" anchor="ctr"/>
-          <a:lstStyle/>
-          <a:p>
-            <a:pPr algn="ctr"/>
-          </a:p>
-        </p:txBody>
-      </p:sp>
-      <p:sp>
-        <p:nvSpPr>
-          <p:cNvPr id="13" name="TextBox 12"/>
+          <p:cNvPr id="12" name="TextBox 11"/>
           <p:cNvSpPr txBox="1"/>
           <p:nvPr/>
         </p:nvSpPr>
         <p:spPr>
           <a:xfrm>
-            <a:off x="3038094" y="2487168"/>
-            <a:ext cx="1719072" cy="320040"/>
+            <a:off x="850392" y="2688336"/>
+            <a:ext cx="685800" cy="384048"/>
           </a:xfrm>
           <a:prstGeom prst="rect">
             <a:avLst/>
@@ -9591,8 +10031,8 @@
           </a:bodyPr>
           <a:lstStyle/>
           <a:p>
-            <a:pPr algn="ctr">
-              <a:defRPr sz="1400" b="1">
+            <a:pPr algn="l">
+              <a:defRPr sz="1200" b="1">
                 <a:solidFill>
                   <a:srgbClr val="2F5BA8"/>
                 </a:solidFill>
@@ -9600,21 +10040,21 @@
               </a:defRPr>
             </a:pPr>
             <a:r>
-              <a:t>02</a:t>
-            </a:r>
-          </a:p>
-        </p:txBody>
-      </p:sp>
-      <p:sp>
-        <p:nvSpPr>
-          <p:cNvPr id="14" name="TextBox 13"/>
+              <a:t>PASO 2</a:t>
+            </a:r>
+          </a:p>
+        </p:txBody>
+      </p:sp>
+      <p:sp>
+        <p:nvSpPr>
+          <p:cNvPr id="13" name="TextBox 12"/>
           <p:cNvSpPr txBox="1"/>
           <p:nvPr/>
         </p:nvSpPr>
         <p:spPr>
           <a:xfrm>
-            <a:off x="3038094" y="2971800"/>
-            <a:ext cx="1719072" cy="658368"/>
+            <a:off x="1664208" y="2651760"/>
+            <a:ext cx="9464040" cy="829818"/>
           </a:xfrm>
           <a:prstGeom prst="rect">
             <a:avLst/>
@@ -9622,13 +10062,13 @@
           <a:noFill/>
         </p:spPr>
         <p:txBody>
-          <a:bodyPr wrap="square" lIns="45720" rIns="45720" tIns="36576" bIns="36576" anchor="ctr">
+          <a:bodyPr wrap="square" lIns="45720" rIns="45720" tIns="36576" bIns="36576" anchor="t">
             <a:spAutoFit/>
           </a:bodyPr>
           <a:lstStyle/>
           <a:p>
-            <a:pPr algn="ctr">
-              <a:defRPr sz="1700" b="1">
+            <a:pPr algn="l">
+              <a:defRPr sz="2000" b="0">
                 <a:solidFill>
                   <a:srgbClr val="1C2330"/>
                 </a:solidFill>
@@ -9636,30 +10076,32 @@
               </a:defRPr>
             </a:pPr>
             <a:r>
-              <a:t>investiga</a:t>
-            </a:r>
-          </a:p>
-        </p:txBody>
-      </p:sp>
-      <p:sp>
-        <p:nvSpPr>
-          <p:cNvPr id="15" name="Right Arrow 14"/>
+              <a:t>Predice la salida para una entrada concreta y ejecútala.</a:t>
+            </a:r>
+          </a:p>
+        </p:txBody>
+      </p:sp>
+      <p:sp>
+        <p:nvSpPr>
+          <p:cNvPr id="14" name="Rounded Rectangle 13"/>
           <p:cNvSpPr/>
           <p:nvPr/>
         </p:nvSpPr>
         <p:spPr>
           <a:xfrm>
-            <a:off x="4959096" y="2907792"/>
-            <a:ext cx="228600" cy="411480"/>
-          </a:xfrm>
-          <a:prstGeom prst="rightArrow">
+            <a:off x="658368" y="3776472"/>
+            <a:ext cx="10835640" cy="1049274"/>
+          </a:xfrm>
+          <a:prstGeom prst="roundRect">
             <a:avLst/>
           </a:prstGeom>
           <a:solidFill>
-            <a:srgbClr val="586270"/>
+            <a:srgbClr val="FFFFFF"/>
           </a:solidFill>
           <a:ln>
-            <a:noFill/>
+            <a:solidFill>
+              <a:srgbClr val="E5E9EF"/>
+            </a:solidFill>
           </a:ln>
         </p:spPr>
         <p:style>
@@ -9686,59 +10128,14 @@
       </p:sp>
       <p:sp>
         <p:nvSpPr>
-          <p:cNvPr id="16" name="Rounded Rectangle 15"/>
-          <p:cNvSpPr/>
-          <p:nvPr/>
-        </p:nvSpPr>
-        <p:spPr>
-          <a:xfrm>
-            <a:off x="5088636" y="2240280"/>
-            <a:ext cx="1993392" cy="1874519"/>
-          </a:xfrm>
-          <a:prstGeom prst="roundRect">
-            <a:avLst/>
-          </a:prstGeom>
-          <a:solidFill>
-            <a:srgbClr val="FFFFFF"/>
-          </a:solidFill>
-          <a:ln>
-            <a:solidFill>
-              <a:srgbClr val="2F5BA8"/>
-            </a:solidFill>
-          </a:ln>
-        </p:spPr>
-        <p:style>
-          <a:lnRef idx="1">
-            <a:schemeClr val="accent1"/>
-          </a:lnRef>
-          <a:fillRef idx="3">
-            <a:schemeClr val="accent1"/>
-          </a:fillRef>
-          <a:effectRef idx="2">
-            <a:schemeClr val="accent1"/>
-          </a:effectRef>
-          <a:fontRef idx="minor">
-            <a:schemeClr val="lt1"/>
-          </a:fontRef>
-        </p:style>
-        <p:txBody>
-          <a:bodyPr rtlCol="0" anchor="ctr"/>
-          <a:lstStyle/>
-          <a:p>
-            <a:pPr algn="ctr"/>
-          </a:p>
-        </p:txBody>
-      </p:sp>
-      <p:sp>
-        <p:nvSpPr>
-          <p:cNvPr id="17" name="TextBox 16"/>
+          <p:cNvPr id="15" name="TextBox 14"/>
           <p:cNvSpPr txBox="1"/>
           <p:nvPr/>
         </p:nvSpPr>
         <p:spPr>
           <a:xfrm>
-            <a:off x="5225796" y="2487168"/>
-            <a:ext cx="1719072" cy="320040"/>
+            <a:off x="850392" y="3922776"/>
+            <a:ext cx="685800" cy="384048"/>
           </a:xfrm>
           <a:prstGeom prst="rect">
             <a:avLst/>
@@ -9751,8 +10148,8 @@
           </a:bodyPr>
           <a:lstStyle/>
           <a:p>
-            <a:pPr algn="ctr">
-              <a:defRPr sz="1400" b="1">
+            <a:pPr algn="l">
+              <a:defRPr sz="1200" b="1">
                 <a:solidFill>
                   <a:srgbClr val="2F5BA8"/>
                 </a:solidFill>
@@ -9760,21 +10157,21 @@
               </a:defRPr>
             </a:pPr>
             <a:r>
-              <a:t>03</a:t>
-            </a:r>
-          </a:p>
-        </p:txBody>
-      </p:sp>
-      <p:sp>
-        <p:nvSpPr>
-          <p:cNvPr id="18" name="TextBox 17"/>
+              <a:t>PASO 3</a:t>
+            </a:r>
+          </a:p>
+        </p:txBody>
+      </p:sp>
+      <p:sp>
+        <p:nvSpPr>
+          <p:cNvPr id="16" name="TextBox 15"/>
           <p:cNvSpPr txBox="1"/>
           <p:nvPr/>
         </p:nvSpPr>
         <p:spPr>
           <a:xfrm>
-            <a:off x="5225796" y="2971800"/>
-            <a:ext cx="1719072" cy="658368"/>
+            <a:off x="1664208" y="3886200"/>
+            <a:ext cx="9464040" cy="829818"/>
           </a:xfrm>
           <a:prstGeom prst="rect">
             <a:avLst/>
@@ -9782,13 +10179,13 @@
           <a:noFill/>
         </p:spPr>
         <p:txBody>
-          <a:bodyPr wrap="square" lIns="45720" rIns="45720" tIns="36576" bIns="36576" anchor="ctr">
+          <a:bodyPr wrap="square" lIns="45720" rIns="45720" tIns="36576" bIns="36576" anchor="t">
             <a:spAutoFit/>
           </a:bodyPr>
           <a:lstStyle/>
           <a:p>
-            <a:pPr algn="ctr">
-              <a:defRPr sz="1700" b="1">
+            <a:pPr algn="l">
+              <a:defRPr sz="2000" b="0">
                 <a:solidFill>
                   <a:srgbClr val="1C2330"/>
                 </a:solidFill>
@@ -9796,30 +10193,32 @@
               </a:defRPr>
             </a:pPr>
             <a:r>
-              <a:t>corrige</a:t>
-            </a:r>
-          </a:p>
-        </p:txBody>
-      </p:sp>
-      <p:sp>
-        <p:nvSpPr>
-          <p:cNvPr id="19" name="Right Arrow 18"/>
+              <a:t>Explica la condición y prueba las dos ramas del if/else.</a:t>
+            </a:r>
+          </a:p>
+        </p:txBody>
+      </p:sp>
+      <p:sp>
+        <p:nvSpPr>
+          <p:cNvPr id="17" name="Rounded Rectangle 16"/>
           <p:cNvSpPr/>
           <p:nvPr/>
         </p:nvSpPr>
         <p:spPr>
           <a:xfrm>
-            <a:off x="7146798" y="2907792"/>
-            <a:ext cx="228600" cy="411480"/>
-          </a:xfrm>
-          <a:prstGeom prst="rightArrow">
+            <a:off x="658368" y="5010912"/>
+            <a:ext cx="10835640" cy="1049274"/>
+          </a:xfrm>
+          <a:prstGeom prst="roundRect">
             <a:avLst/>
           </a:prstGeom>
           <a:solidFill>
-            <a:srgbClr val="586270"/>
+            <a:srgbClr val="FFFFFF"/>
           </a:solidFill>
           <a:ln>
-            <a:noFill/>
+            <a:solidFill>
+              <a:srgbClr val="E5E9EF"/>
+            </a:solidFill>
           </a:ln>
         </p:spPr>
         <p:style>
@@ -9846,59 +10245,14 @@
       </p:sp>
       <p:sp>
         <p:nvSpPr>
-          <p:cNvPr id="20" name="Rounded Rectangle 19"/>
-          <p:cNvSpPr/>
-          <p:nvPr/>
-        </p:nvSpPr>
-        <p:spPr>
-          <a:xfrm>
-            <a:off x="7276338" y="2240280"/>
-            <a:ext cx="1993392" cy="1874519"/>
-          </a:xfrm>
-          <a:prstGeom prst="roundRect">
-            <a:avLst/>
-          </a:prstGeom>
-          <a:solidFill>
-            <a:srgbClr val="FFFFFF"/>
-          </a:solidFill>
-          <a:ln>
-            <a:solidFill>
-              <a:srgbClr val="2F5BA8"/>
-            </a:solidFill>
-          </a:ln>
-        </p:spPr>
-        <p:style>
-          <a:lnRef idx="1">
-            <a:schemeClr val="accent1"/>
-          </a:lnRef>
-          <a:fillRef idx="3">
-            <a:schemeClr val="accent1"/>
-          </a:fillRef>
-          <a:effectRef idx="2">
-            <a:schemeClr val="accent1"/>
-          </a:effectRef>
-          <a:fontRef idx="minor">
-            <a:schemeClr val="lt1"/>
-          </a:fontRef>
-        </p:style>
-        <p:txBody>
-          <a:bodyPr rtlCol="0" anchor="ctr"/>
-          <a:lstStyle/>
-          <a:p>
-            <a:pPr algn="ctr"/>
-          </a:p>
-        </p:txBody>
-      </p:sp>
-      <p:sp>
-        <p:nvSpPr>
-          <p:cNvPr id="21" name="TextBox 20"/>
+          <p:cNvPr id="18" name="TextBox 17"/>
           <p:cNvSpPr txBox="1"/>
           <p:nvPr/>
         </p:nvSpPr>
         <p:spPr>
           <a:xfrm>
-            <a:off x="7413498" y="2487168"/>
-            <a:ext cx="1719072" cy="320040"/>
+            <a:off x="850392" y="5157216"/>
+            <a:ext cx="685800" cy="384048"/>
           </a:xfrm>
           <a:prstGeom prst="rect">
             <a:avLst/>
@@ -9911,8 +10265,8 @@
           </a:bodyPr>
           <a:lstStyle/>
           <a:p>
-            <a:pPr algn="ctr">
-              <a:defRPr sz="1400" b="1">
+            <a:pPr algn="l">
+              <a:defRPr sz="1200" b="1">
                 <a:solidFill>
                   <a:srgbClr val="2F5BA8"/>
                 </a:solidFill>
@@ -9920,21 +10274,21 @@
               </a:defRPr>
             </a:pPr>
             <a:r>
-              <a:t>04</a:t>
-            </a:r>
-          </a:p>
-        </p:txBody>
-      </p:sp>
-      <p:sp>
-        <p:nvSpPr>
-          <p:cNvPr id="22" name="TextBox 21"/>
+              <a:t>PASO 4</a:t>
+            </a:r>
+          </a:p>
+        </p:txBody>
+      </p:sp>
+      <p:sp>
+        <p:nvSpPr>
+          <p:cNvPr id="19" name="TextBox 18"/>
           <p:cNvSpPr txBox="1"/>
           <p:nvPr/>
         </p:nvSpPr>
         <p:spPr>
           <a:xfrm>
-            <a:off x="7413498" y="2971800"/>
-            <a:ext cx="1719072" cy="658368"/>
+            <a:off x="1664208" y="5120640"/>
+            <a:ext cx="9464040" cy="829818"/>
           </a:xfrm>
           <a:prstGeom prst="rect">
             <a:avLst/>
@@ -9942,13 +10296,13 @@
           <a:noFill/>
         </p:spPr>
         <p:txBody>
-          <a:bodyPr wrap="square" lIns="45720" rIns="45720" tIns="36576" bIns="36576" anchor="ctr">
+          <a:bodyPr wrap="square" lIns="45720" rIns="45720" tIns="36576" bIns="36576" anchor="t">
             <a:spAutoFit/>
           </a:bodyPr>
           <a:lstStyle/>
           <a:p>
-            <a:pPr algn="ctr">
-              <a:defRPr sz="1700" b="1">
+            <a:pPr algn="l">
+              <a:defRPr sz="2000" b="0">
                 <a:solidFill>
                   <a:srgbClr val="1C2330"/>
                 </a:solidFill>
@@ -9956,167 +10310,7 @@
               </a:defRPr>
             </a:pPr>
             <a:r>
-              <a:t>prueba</a:t>
-            </a:r>
-          </a:p>
-        </p:txBody>
-      </p:sp>
-      <p:sp>
-        <p:nvSpPr>
-          <p:cNvPr id="23" name="Right Arrow 22"/>
-          <p:cNvSpPr/>
-          <p:nvPr/>
-        </p:nvSpPr>
-        <p:spPr>
-          <a:xfrm>
-            <a:off x="9334500" y="2907792"/>
-            <a:ext cx="228600" cy="411480"/>
-          </a:xfrm>
-          <a:prstGeom prst="rightArrow">
-            <a:avLst/>
-          </a:prstGeom>
-          <a:solidFill>
-            <a:srgbClr val="586270"/>
-          </a:solidFill>
-          <a:ln>
-            <a:noFill/>
-          </a:ln>
-        </p:spPr>
-        <p:style>
-          <a:lnRef idx="1">
-            <a:schemeClr val="accent1"/>
-          </a:lnRef>
-          <a:fillRef idx="3">
-            <a:schemeClr val="accent1"/>
-          </a:fillRef>
-          <a:effectRef idx="2">
-            <a:schemeClr val="accent1"/>
-          </a:effectRef>
-          <a:fontRef idx="minor">
-            <a:schemeClr val="lt1"/>
-          </a:fontRef>
-        </p:style>
-        <p:txBody>
-          <a:bodyPr rtlCol="0" anchor="ctr"/>
-          <a:lstStyle/>
-          <a:p>
-            <a:pPr algn="ctr"/>
-          </a:p>
-        </p:txBody>
-      </p:sp>
-      <p:sp>
-        <p:nvSpPr>
-          <p:cNvPr id="24" name="Rounded Rectangle 23"/>
-          <p:cNvSpPr/>
-          <p:nvPr/>
-        </p:nvSpPr>
-        <p:spPr>
-          <a:xfrm>
-            <a:off x="9464040" y="2240280"/>
-            <a:ext cx="1993392" cy="1874519"/>
-          </a:xfrm>
-          <a:prstGeom prst="roundRect">
-            <a:avLst/>
-          </a:prstGeom>
-          <a:solidFill>
-            <a:srgbClr val="2F5BA8"/>
-          </a:solidFill>
-          <a:ln>
-            <a:solidFill>
-              <a:srgbClr val="2F5BA8"/>
-            </a:solidFill>
-          </a:ln>
-        </p:spPr>
-        <p:style>
-          <a:lnRef idx="1">
-            <a:schemeClr val="accent1"/>
-          </a:lnRef>
-          <a:fillRef idx="3">
-            <a:schemeClr val="accent1"/>
-          </a:fillRef>
-          <a:effectRef idx="2">
-            <a:schemeClr val="accent1"/>
-          </a:effectRef>
-          <a:fontRef idx="minor">
-            <a:schemeClr val="lt1"/>
-          </a:fontRef>
-        </p:style>
-        <p:txBody>
-          <a:bodyPr rtlCol="0" anchor="ctr"/>
-          <a:lstStyle/>
-          <a:p>
-            <a:pPr algn="ctr"/>
-          </a:p>
-        </p:txBody>
-      </p:sp>
-      <p:sp>
-        <p:nvSpPr>
-          <p:cNvPr id="25" name="TextBox 24"/>
-          <p:cNvSpPr txBox="1"/>
-          <p:nvPr/>
-        </p:nvSpPr>
-        <p:spPr>
-          <a:xfrm>
-            <a:off x="9601200" y="2487168"/>
-            <a:ext cx="1719072" cy="320040"/>
-          </a:xfrm>
-          <a:prstGeom prst="rect">
-            <a:avLst/>
-          </a:prstGeom>
-          <a:noFill/>
-        </p:spPr>
-        <p:txBody>
-          <a:bodyPr wrap="square" lIns="45720" rIns="45720" tIns="36576" bIns="36576" anchor="t">
-            <a:spAutoFit/>
-          </a:bodyPr>
-          <a:lstStyle/>
-          <a:p>
-            <a:pPr algn="ctr">
-              <a:defRPr sz="1400" b="1">
-                <a:solidFill>
-                  <a:srgbClr val="FFFFFF"/>
-                </a:solidFill>
-                <a:latin typeface="Aptos"/>
-              </a:defRPr>
-            </a:pPr>
-            <a:r>
-              <a:t>05</a:t>
-            </a:r>
-          </a:p>
-        </p:txBody>
-      </p:sp>
-      <p:sp>
-        <p:nvSpPr>
-          <p:cNvPr id="26" name="TextBox 25"/>
-          <p:cNvSpPr txBox="1"/>
-          <p:nvPr/>
-        </p:nvSpPr>
-        <p:spPr>
-          <a:xfrm>
-            <a:off x="9601200" y="2971800"/>
-            <a:ext cx="1719072" cy="658368"/>
-          </a:xfrm>
-          <a:prstGeom prst="rect">
-            <a:avLst/>
-          </a:prstGeom>
-          <a:noFill/>
-        </p:spPr>
-        <p:txBody>
-          <a:bodyPr wrap="square" lIns="45720" rIns="45720" tIns="36576" bIns="36576" anchor="ctr">
-            <a:spAutoFit/>
-          </a:bodyPr>
-          <a:lstStyle/>
-          <a:p>
-            <a:pPr algn="ctr">
-              <a:defRPr sz="1700" b="1">
-                <a:solidFill>
-                  <a:srgbClr val="FFFFFF"/>
-                </a:solidFill>
-                <a:latin typeface="Aptos"/>
-              </a:defRPr>
-            </a:pPr>
-            <a:r>
-              <a:t>vuelve a explicar</a:t>
+              <a:t>Modifica un dato, operación o condición; vuelve a verificar y localiza la evidencia.</a:t>
             </a:r>
           </a:p>
         </p:txBody>
@@ -10256,7 +10450,7 @@
               </a:defRPr>
             </a:pPr>
             <a:r>
-              <a:t>COMPROBAR</a:t>
+              <a:t>PROCESO</a:t>
             </a:r>
           </a:p>
         </p:txBody>
@@ -10292,7 +10486,7 @@
               </a:defRPr>
             </a:pPr>
             <a:r>
-              <a:t>Retrospectiva con evidencia</a:t>
+              <a:t>Si aparece una laguna</a:t>
             </a:r>
           </a:p>
         </p:txBody>
@@ -10371,7 +10565,7 @@
               </a:defRPr>
             </a:pPr>
             <a:r>
-              <a:t>MiniJarvis · 1.º DAW · Sesión 215 · H1 — Primer MiniJarvis</a:t>
+              <a:t>MiniJarvis · 1.º DAW · Sesión 215 · H1 — Primer asistente ejecutable</a:t>
             </a:r>
           </a:p>
         </p:txBody>
@@ -10384,8 +10578,8 @@
         </p:nvSpPr>
         <p:spPr>
           <a:xfrm>
-            <a:off x="713232" y="1298448"/>
-            <a:ext cx="420624" cy="420624"/>
+            <a:off x="713232" y="2240280"/>
+            <a:ext cx="1993392" cy="1874519"/>
           </a:xfrm>
           <a:prstGeom prst="roundRect">
             <a:avLst/>
@@ -10429,8 +10623,8 @@
         </p:nvSpPr>
         <p:spPr>
           <a:xfrm>
-            <a:off x="1389888" y="1280160"/>
-            <a:ext cx="9829800" cy="1209294"/>
+            <a:off x="850392" y="2487168"/>
+            <a:ext cx="1719072" cy="320040"/>
           </a:xfrm>
           <a:prstGeom prst="rect">
             <a:avLst/>
@@ -10443,8 +10637,44 @@
           </a:bodyPr>
           <a:lstStyle/>
           <a:p>
-            <a:pPr algn="l">
-              <a:defRPr sz="1900" b="0">
+            <a:pPr algn="ctr">
+              <a:defRPr sz="1400" b="1">
+                <a:solidFill>
+                  <a:srgbClr val="2F5BA8"/>
+                </a:solidFill>
+                <a:latin typeface="Aptos"/>
+              </a:defRPr>
+            </a:pPr>
+            <a:r>
+              <a:t>01</a:t>
+            </a:r>
+          </a:p>
+        </p:txBody>
+      </p:sp>
+      <p:sp>
+        <p:nvSpPr>
+          <p:cNvPr id="10" name="TextBox 9"/>
+          <p:cNvSpPr txBox="1"/>
+          <p:nvPr/>
+        </p:nvSpPr>
+        <p:spPr>
+          <a:xfrm>
+            <a:off x="850392" y="2971800"/>
+            <a:ext cx="1719072" cy="658368"/>
+          </a:xfrm>
+          <a:prstGeom prst="rect">
+            <a:avLst/>
+          </a:prstGeom>
+          <a:noFill/>
+        </p:spPr>
+        <p:txBody>
+          <a:bodyPr wrap="square" lIns="45720" rIns="45720" tIns="36576" bIns="36576" anchor="ctr">
+            <a:spAutoFit/>
+          </a:bodyPr>
+          <a:lstStyle/>
+          <a:p>
+            <a:pPr algn="ctr">
+              <a:defRPr sz="1700" b="1">
                 <a:solidFill>
                   <a:srgbClr val="1C2330"/>
                 </a:solidFill>
@@ -10452,21 +10682,64 @@
               </a:defRPr>
             </a:pPr>
             <a:r>
-              <a:t>Una capacidad que ya realizo sin ayuda.</a:t>
-            </a:r>
-          </a:p>
-        </p:txBody>
-      </p:sp>
-      <p:sp>
-        <p:nvSpPr>
-          <p:cNvPr id="10" name="Rounded Rectangle 9"/>
+              <a:t>identifica</a:t>
+            </a:r>
+          </a:p>
+        </p:txBody>
+      </p:sp>
+      <p:sp>
+        <p:nvSpPr>
+          <p:cNvPr id="11" name="Right Arrow 10"/>
           <p:cNvSpPr/>
           <p:nvPr/>
         </p:nvSpPr>
         <p:spPr>
           <a:xfrm>
-            <a:off x="713232" y="2544318"/>
-            <a:ext cx="420624" cy="420624"/>
+            <a:off x="2771394" y="2907792"/>
+            <a:ext cx="228600" cy="411480"/>
+          </a:xfrm>
+          <a:prstGeom prst="rightArrow">
+            <a:avLst/>
+          </a:prstGeom>
+          <a:solidFill>
+            <a:srgbClr val="586270"/>
+          </a:solidFill>
+          <a:ln>
+            <a:noFill/>
+          </a:ln>
+        </p:spPr>
+        <p:style>
+          <a:lnRef idx="1">
+            <a:schemeClr val="accent1"/>
+          </a:lnRef>
+          <a:fillRef idx="3">
+            <a:schemeClr val="accent1"/>
+          </a:fillRef>
+          <a:effectRef idx="2">
+            <a:schemeClr val="accent1"/>
+          </a:effectRef>
+          <a:fontRef idx="minor">
+            <a:schemeClr val="lt1"/>
+          </a:fontRef>
+        </p:style>
+        <p:txBody>
+          <a:bodyPr rtlCol="0" anchor="ctr"/>
+          <a:lstStyle/>
+          <a:p>
+            <a:pPr algn="ctr"/>
+          </a:p>
+        </p:txBody>
+      </p:sp>
+      <p:sp>
+        <p:nvSpPr>
+          <p:cNvPr id="12" name="Rounded Rectangle 11"/>
+          <p:cNvSpPr/>
+          <p:nvPr/>
+        </p:nvSpPr>
+        <p:spPr>
+          <a:xfrm>
+            <a:off x="2900934" y="2240280"/>
+            <a:ext cx="1993392" cy="1874519"/>
           </a:xfrm>
           <a:prstGeom prst="roundRect">
             <a:avLst/>
@@ -10504,14 +10777,14 @@
       </p:sp>
       <p:sp>
         <p:nvSpPr>
-          <p:cNvPr id="11" name="TextBox 10"/>
+          <p:cNvPr id="13" name="TextBox 12"/>
           <p:cNvSpPr txBox="1"/>
           <p:nvPr/>
         </p:nvSpPr>
         <p:spPr>
           <a:xfrm>
-            <a:off x="1389888" y="2526029"/>
-            <a:ext cx="9829800" cy="1209294"/>
+            <a:off x="3038094" y="2487168"/>
+            <a:ext cx="1719072" cy="320040"/>
           </a:xfrm>
           <a:prstGeom prst="rect">
             <a:avLst/>
@@ -10524,8 +10797,44 @@
           </a:bodyPr>
           <a:lstStyle/>
           <a:p>
-            <a:pPr algn="l">
-              <a:defRPr sz="1900" b="0">
+            <a:pPr algn="ctr">
+              <a:defRPr sz="1400" b="1">
+                <a:solidFill>
+                  <a:srgbClr val="2F5BA8"/>
+                </a:solidFill>
+                <a:latin typeface="Aptos"/>
+              </a:defRPr>
+            </a:pPr>
+            <a:r>
+              <a:t>02</a:t>
+            </a:r>
+          </a:p>
+        </p:txBody>
+      </p:sp>
+      <p:sp>
+        <p:nvSpPr>
+          <p:cNvPr id="14" name="TextBox 13"/>
+          <p:cNvSpPr txBox="1"/>
+          <p:nvPr/>
+        </p:nvSpPr>
+        <p:spPr>
+          <a:xfrm>
+            <a:off x="3038094" y="2971800"/>
+            <a:ext cx="1719072" cy="658368"/>
+          </a:xfrm>
+          <a:prstGeom prst="rect">
+            <a:avLst/>
+          </a:prstGeom>
+          <a:noFill/>
+        </p:spPr>
+        <p:txBody>
+          <a:bodyPr wrap="square" lIns="45720" rIns="45720" tIns="36576" bIns="36576" anchor="ctr">
+            <a:spAutoFit/>
+          </a:bodyPr>
+          <a:lstStyle/>
+          <a:p>
+            <a:pPr algn="ctr">
+              <a:defRPr sz="1700" b="1">
                 <a:solidFill>
                   <a:srgbClr val="1C2330"/>
                 </a:solidFill>
@@ -10533,21 +10842,64 @@
               </a:defRPr>
             </a:pPr>
             <a:r>
-              <a:t>Una capacidad para la que todavía necesito apoyo.</a:t>
-            </a:r>
-          </a:p>
-        </p:txBody>
-      </p:sp>
-      <p:sp>
-        <p:nvSpPr>
-          <p:cNvPr id="12" name="Rounded Rectangle 11"/>
+              <a:t>investiga</a:t>
+            </a:r>
+          </a:p>
+        </p:txBody>
+      </p:sp>
+      <p:sp>
+        <p:nvSpPr>
+          <p:cNvPr id="15" name="Right Arrow 14"/>
           <p:cNvSpPr/>
           <p:nvPr/>
         </p:nvSpPr>
         <p:spPr>
           <a:xfrm>
-            <a:off x="713232" y="3790187"/>
-            <a:ext cx="420624" cy="420624"/>
+            <a:off x="4959096" y="2907792"/>
+            <a:ext cx="228600" cy="411480"/>
+          </a:xfrm>
+          <a:prstGeom prst="rightArrow">
+            <a:avLst/>
+          </a:prstGeom>
+          <a:solidFill>
+            <a:srgbClr val="586270"/>
+          </a:solidFill>
+          <a:ln>
+            <a:noFill/>
+          </a:ln>
+        </p:spPr>
+        <p:style>
+          <a:lnRef idx="1">
+            <a:schemeClr val="accent1"/>
+          </a:lnRef>
+          <a:fillRef idx="3">
+            <a:schemeClr val="accent1"/>
+          </a:fillRef>
+          <a:effectRef idx="2">
+            <a:schemeClr val="accent1"/>
+          </a:effectRef>
+          <a:fontRef idx="minor">
+            <a:schemeClr val="lt1"/>
+          </a:fontRef>
+        </p:style>
+        <p:txBody>
+          <a:bodyPr rtlCol="0" anchor="ctr"/>
+          <a:lstStyle/>
+          <a:p>
+            <a:pPr algn="ctr"/>
+          </a:p>
+        </p:txBody>
+      </p:sp>
+      <p:sp>
+        <p:nvSpPr>
+          <p:cNvPr id="16" name="Rounded Rectangle 15"/>
+          <p:cNvSpPr/>
+          <p:nvPr/>
+        </p:nvSpPr>
+        <p:spPr>
+          <a:xfrm>
+            <a:off x="5088636" y="2240280"/>
+            <a:ext cx="1993392" cy="1874519"/>
           </a:xfrm>
           <a:prstGeom prst="roundRect">
             <a:avLst/>
@@ -10585,14 +10937,14 @@
       </p:sp>
       <p:sp>
         <p:nvSpPr>
-          <p:cNvPr id="13" name="TextBox 12"/>
+          <p:cNvPr id="17" name="TextBox 16"/>
           <p:cNvSpPr txBox="1"/>
           <p:nvPr/>
         </p:nvSpPr>
         <p:spPr>
           <a:xfrm>
-            <a:off x="1389888" y="3771900"/>
-            <a:ext cx="9829800" cy="1209294"/>
+            <a:off x="5225796" y="2487168"/>
+            <a:ext cx="1719072" cy="320040"/>
           </a:xfrm>
           <a:prstGeom prst="rect">
             <a:avLst/>
@@ -10605,8 +10957,44 @@
           </a:bodyPr>
           <a:lstStyle/>
           <a:p>
-            <a:pPr algn="l">
-              <a:defRPr sz="1900" b="0">
+            <a:pPr algn="ctr">
+              <a:defRPr sz="1400" b="1">
+                <a:solidFill>
+                  <a:srgbClr val="2F5BA8"/>
+                </a:solidFill>
+                <a:latin typeface="Aptos"/>
+              </a:defRPr>
+            </a:pPr>
+            <a:r>
+              <a:t>03</a:t>
+            </a:r>
+          </a:p>
+        </p:txBody>
+      </p:sp>
+      <p:sp>
+        <p:nvSpPr>
+          <p:cNvPr id="18" name="TextBox 17"/>
+          <p:cNvSpPr txBox="1"/>
+          <p:nvPr/>
+        </p:nvSpPr>
+        <p:spPr>
+          <a:xfrm>
+            <a:off x="5225796" y="2971800"/>
+            <a:ext cx="1719072" cy="658368"/>
+          </a:xfrm>
+          <a:prstGeom prst="rect">
+            <a:avLst/>
+          </a:prstGeom>
+          <a:noFill/>
+        </p:spPr>
+        <p:txBody>
+          <a:bodyPr wrap="square" lIns="45720" rIns="45720" tIns="36576" bIns="36576" anchor="ctr">
+            <a:spAutoFit/>
+          </a:bodyPr>
+          <a:lstStyle/>
+          <a:p>
+            <a:pPr algn="ctr">
+              <a:defRPr sz="1700" b="1">
                 <a:solidFill>
                   <a:srgbClr val="1C2330"/>
                 </a:solidFill>
@@ -10614,21 +11002,64 @@
               </a:defRPr>
             </a:pPr>
             <a:r>
-              <a:t>Un hábito de trabajo que conservaré.</a:t>
-            </a:r>
-          </a:p>
-        </p:txBody>
-      </p:sp>
-      <p:sp>
-        <p:nvSpPr>
-          <p:cNvPr id="14" name="Rounded Rectangle 13"/>
+              <a:t>corrige</a:t>
+            </a:r>
+          </a:p>
+        </p:txBody>
+      </p:sp>
+      <p:sp>
+        <p:nvSpPr>
+          <p:cNvPr id="19" name="Right Arrow 18"/>
           <p:cNvSpPr/>
           <p:nvPr/>
         </p:nvSpPr>
         <p:spPr>
           <a:xfrm>
-            <a:off x="713232" y="5036057"/>
-            <a:ext cx="420624" cy="420624"/>
+            <a:off x="7146798" y="2907792"/>
+            <a:ext cx="228600" cy="411480"/>
+          </a:xfrm>
+          <a:prstGeom prst="rightArrow">
+            <a:avLst/>
+          </a:prstGeom>
+          <a:solidFill>
+            <a:srgbClr val="586270"/>
+          </a:solidFill>
+          <a:ln>
+            <a:noFill/>
+          </a:ln>
+        </p:spPr>
+        <p:style>
+          <a:lnRef idx="1">
+            <a:schemeClr val="accent1"/>
+          </a:lnRef>
+          <a:fillRef idx="3">
+            <a:schemeClr val="accent1"/>
+          </a:fillRef>
+          <a:effectRef idx="2">
+            <a:schemeClr val="accent1"/>
+          </a:effectRef>
+          <a:fontRef idx="minor">
+            <a:schemeClr val="lt1"/>
+          </a:fontRef>
+        </p:style>
+        <p:txBody>
+          <a:bodyPr rtlCol="0" anchor="ctr"/>
+          <a:lstStyle/>
+          <a:p>
+            <a:pPr algn="ctr"/>
+          </a:p>
+        </p:txBody>
+      </p:sp>
+      <p:sp>
+        <p:nvSpPr>
+          <p:cNvPr id="20" name="Rounded Rectangle 19"/>
+          <p:cNvSpPr/>
+          <p:nvPr/>
+        </p:nvSpPr>
+        <p:spPr>
+          <a:xfrm>
+            <a:off x="7276338" y="2240280"/>
+            <a:ext cx="1993392" cy="1874519"/>
           </a:xfrm>
           <a:prstGeom prst="roundRect">
             <a:avLst/>
@@ -10666,14 +11097,14 @@
       </p:sp>
       <p:sp>
         <p:nvSpPr>
-          <p:cNvPr id="15" name="TextBox 14"/>
+          <p:cNvPr id="21" name="TextBox 20"/>
           <p:cNvSpPr txBox="1"/>
           <p:nvPr/>
         </p:nvSpPr>
         <p:spPr>
           <a:xfrm>
-            <a:off x="1389888" y="5017770"/>
-            <a:ext cx="9829800" cy="1209294"/>
+            <a:off x="7413498" y="2487168"/>
+            <a:ext cx="1719072" cy="320040"/>
           </a:xfrm>
           <a:prstGeom prst="rect">
             <a:avLst/>
@@ -10686,8 +11117,44 @@
           </a:bodyPr>
           <a:lstStyle/>
           <a:p>
-            <a:pPr algn="l">
-              <a:defRPr sz="1900" b="0">
+            <a:pPr algn="ctr">
+              <a:defRPr sz="1400" b="1">
+                <a:solidFill>
+                  <a:srgbClr val="2F5BA8"/>
+                </a:solidFill>
+                <a:latin typeface="Aptos"/>
+              </a:defRPr>
+            </a:pPr>
+            <a:r>
+              <a:t>04</a:t>
+            </a:r>
+          </a:p>
+        </p:txBody>
+      </p:sp>
+      <p:sp>
+        <p:nvSpPr>
+          <p:cNvPr id="22" name="TextBox 21"/>
+          <p:cNvSpPr txBox="1"/>
+          <p:nvPr/>
+        </p:nvSpPr>
+        <p:spPr>
+          <a:xfrm>
+            <a:off x="7413498" y="2971800"/>
+            <a:ext cx="1719072" cy="658368"/>
+          </a:xfrm>
+          <a:prstGeom prst="rect">
+            <a:avLst/>
+          </a:prstGeom>
+          <a:noFill/>
+        </p:spPr>
+        <p:txBody>
+          <a:bodyPr wrap="square" lIns="45720" rIns="45720" tIns="36576" bIns="36576" anchor="ctr">
+            <a:spAutoFit/>
+          </a:bodyPr>
+          <a:lstStyle/>
+          <a:p>
+            <a:pPr algn="ctr">
+              <a:defRPr sz="1700" b="1">
                 <a:solidFill>
                   <a:srgbClr val="1C2330"/>
                 </a:solidFill>
@@ -10695,7 +11162,167 @@
               </a:defRPr>
             </a:pPr>
             <a:r>
-              <a:t>Una mejora concreta que aplicaré en H2.</a:t>
+              <a:t>prueba</a:t>
+            </a:r>
+          </a:p>
+        </p:txBody>
+      </p:sp>
+      <p:sp>
+        <p:nvSpPr>
+          <p:cNvPr id="23" name="Right Arrow 22"/>
+          <p:cNvSpPr/>
+          <p:nvPr/>
+        </p:nvSpPr>
+        <p:spPr>
+          <a:xfrm>
+            <a:off x="9334500" y="2907792"/>
+            <a:ext cx="228600" cy="411480"/>
+          </a:xfrm>
+          <a:prstGeom prst="rightArrow">
+            <a:avLst/>
+          </a:prstGeom>
+          <a:solidFill>
+            <a:srgbClr val="586270"/>
+          </a:solidFill>
+          <a:ln>
+            <a:noFill/>
+          </a:ln>
+        </p:spPr>
+        <p:style>
+          <a:lnRef idx="1">
+            <a:schemeClr val="accent1"/>
+          </a:lnRef>
+          <a:fillRef idx="3">
+            <a:schemeClr val="accent1"/>
+          </a:fillRef>
+          <a:effectRef idx="2">
+            <a:schemeClr val="accent1"/>
+          </a:effectRef>
+          <a:fontRef idx="minor">
+            <a:schemeClr val="lt1"/>
+          </a:fontRef>
+        </p:style>
+        <p:txBody>
+          <a:bodyPr rtlCol="0" anchor="ctr"/>
+          <a:lstStyle/>
+          <a:p>
+            <a:pPr algn="ctr"/>
+          </a:p>
+        </p:txBody>
+      </p:sp>
+      <p:sp>
+        <p:nvSpPr>
+          <p:cNvPr id="24" name="Rounded Rectangle 23"/>
+          <p:cNvSpPr/>
+          <p:nvPr/>
+        </p:nvSpPr>
+        <p:spPr>
+          <a:xfrm>
+            <a:off x="9464040" y="2240280"/>
+            <a:ext cx="1993392" cy="1874519"/>
+          </a:xfrm>
+          <a:prstGeom prst="roundRect">
+            <a:avLst/>
+          </a:prstGeom>
+          <a:solidFill>
+            <a:srgbClr val="2F5BA8"/>
+          </a:solidFill>
+          <a:ln>
+            <a:solidFill>
+              <a:srgbClr val="2F5BA8"/>
+            </a:solidFill>
+          </a:ln>
+        </p:spPr>
+        <p:style>
+          <a:lnRef idx="1">
+            <a:schemeClr val="accent1"/>
+          </a:lnRef>
+          <a:fillRef idx="3">
+            <a:schemeClr val="accent1"/>
+          </a:fillRef>
+          <a:effectRef idx="2">
+            <a:schemeClr val="accent1"/>
+          </a:effectRef>
+          <a:fontRef idx="minor">
+            <a:schemeClr val="lt1"/>
+          </a:fontRef>
+        </p:style>
+        <p:txBody>
+          <a:bodyPr rtlCol="0" anchor="ctr"/>
+          <a:lstStyle/>
+          <a:p>
+            <a:pPr algn="ctr"/>
+          </a:p>
+        </p:txBody>
+      </p:sp>
+      <p:sp>
+        <p:nvSpPr>
+          <p:cNvPr id="25" name="TextBox 24"/>
+          <p:cNvSpPr txBox="1"/>
+          <p:nvPr/>
+        </p:nvSpPr>
+        <p:spPr>
+          <a:xfrm>
+            <a:off x="9601200" y="2487168"/>
+            <a:ext cx="1719072" cy="320040"/>
+          </a:xfrm>
+          <a:prstGeom prst="rect">
+            <a:avLst/>
+          </a:prstGeom>
+          <a:noFill/>
+        </p:spPr>
+        <p:txBody>
+          <a:bodyPr wrap="square" lIns="45720" rIns="45720" tIns="36576" bIns="36576" anchor="t">
+            <a:spAutoFit/>
+          </a:bodyPr>
+          <a:lstStyle/>
+          <a:p>
+            <a:pPr algn="ctr">
+              <a:defRPr sz="1400" b="1">
+                <a:solidFill>
+                  <a:srgbClr val="FFFFFF"/>
+                </a:solidFill>
+                <a:latin typeface="Aptos"/>
+              </a:defRPr>
+            </a:pPr>
+            <a:r>
+              <a:t>05</a:t>
+            </a:r>
+          </a:p>
+        </p:txBody>
+      </p:sp>
+      <p:sp>
+        <p:nvSpPr>
+          <p:cNvPr id="26" name="TextBox 25"/>
+          <p:cNvSpPr txBox="1"/>
+          <p:nvPr/>
+        </p:nvSpPr>
+        <p:spPr>
+          <a:xfrm>
+            <a:off x="9601200" y="2971800"/>
+            <a:ext cx="1719072" cy="658368"/>
+          </a:xfrm>
+          <a:prstGeom prst="rect">
+            <a:avLst/>
+          </a:prstGeom>
+          <a:noFill/>
+        </p:spPr>
+        <p:txBody>
+          <a:bodyPr wrap="square" lIns="45720" rIns="45720" tIns="36576" bIns="36576" anchor="ctr">
+            <a:spAutoFit/>
+          </a:bodyPr>
+          <a:lstStyle/>
+          <a:p>
+            <a:pPr algn="ctr">
+              <a:defRPr sz="1700" b="1">
+                <a:solidFill>
+                  <a:srgbClr val="FFFFFF"/>
+                </a:solidFill>
+                <a:latin typeface="Aptos"/>
+              </a:defRPr>
+            </a:pPr>
+            <a:r>
+              <a:t>vuelve a explicar</a:t>
             </a:r>
           </a:p>
         </p:txBody>
@@ -10835,7 +11462,7 @@
               </a:defRPr>
             </a:pPr>
             <a:r>
-              <a:t>EXPLICAR Y DEFENDER</a:t>
+              <a:t>COMPROBAR</a:t>
             </a:r>
           </a:p>
         </p:txBody>
@@ -10871,7 +11498,7 @@
               </a:defRPr>
             </a:pPr>
             <a:r>
-              <a:t>Cierre de H1</a:t>
+              <a:t>Retrospectiva con evidencia</a:t>
             </a:r>
           </a:p>
         </p:txBody>
@@ -10950,7 +11577,7 @@
               </a:defRPr>
             </a:pPr>
             <a:r>
-              <a:t>MiniJarvis · 1.º DAW · Sesión 215 · H1 — Primer MiniJarvis</a:t>
+              <a:t>MiniJarvis · 1.º DAW · Sesión 215 · H1 — Primer asistente ejecutable</a:t>
             </a:r>
           </a:p>
         </p:txBody>
@@ -10963,14 +11590,14 @@
         </p:nvSpPr>
         <p:spPr>
           <a:xfrm>
-            <a:off x="621792" y="1298448"/>
-            <a:ext cx="10927080" cy="1828800"/>
+            <a:off x="713232" y="1298448"/>
+            <a:ext cx="420624" cy="420624"/>
           </a:xfrm>
           <a:prstGeom prst="roundRect">
             <a:avLst/>
           </a:prstGeom>
           <a:solidFill>
-            <a:srgbClr val="2F5BA8"/>
+            <a:srgbClr val="FFFFFF"/>
           </a:solidFill>
           <a:ln>
             <a:solidFill>
@@ -11008,8 +11635,8 @@
         </p:nvSpPr>
         <p:spPr>
           <a:xfrm>
-            <a:off x="932688" y="1591056"/>
-            <a:ext cx="10241280" cy="256032"/>
+            <a:off x="1389888" y="1280160"/>
+            <a:ext cx="9829800" cy="1209294"/>
           </a:xfrm>
           <a:prstGeom prst="rect">
             <a:avLst/>
@@ -11023,29 +11650,74 @@
           <a:lstStyle/>
           <a:p>
             <a:pPr algn="l">
-              <a:defRPr sz="1300" b="1">
+              <a:defRPr sz="1900" b="0">
                 <a:solidFill>
-                  <a:srgbClr val="FFFFFF"/>
+                  <a:srgbClr val="1C2330"/>
                 </a:solidFill>
                 <a:latin typeface="Aptos"/>
               </a:defRPr>
             </a:pPr>
             <a:r>
-              <a:t>PREGUNTA O DECISIÓN DE SALIDA</a:t>
-            </a:r>
-          </a:p>
-        </p:txBody>
-      </p:sp>
-      <p:sp>
-        <p:nvSpPr>
-          <p:cNvPr id="10" name="TextBox 9"/>
+              <a:t>Una capacidad que ya realizo sin ayuda.</a:t>
+            </a:r>
+          </a:p>
+        </p:txBody>
+      </p:sp>
+      <p:sp>
+        <p:nvSpPr>
+          <p:cNvPr id="10" name="Rounded Rectangle 9"/>
+          <p:cNvSpPr/>
+          <p:nvPr/>
+        </p:nvSpPr>
+        <p:spPr>
+          <a:xfrm>
+            <a:off x="713232" y="2544318"/>
+            <a:ext cx="420624" cy="420624"/>
+          </a:xfrm>
+          <a:prstGeom prst="roundRect">
+            <a:avLst/>
+          </a:prstGeom>
+          <a:solidFill>
+            <a:srgbClr val="FFFFFF"/>
+          </a:solidFill>
+          <a:ln>
+            <a:solidFill>
+              <a:srgbClr val="2F5BA8"/>
+            </a:solidFill>
+          </a:ln>
+        </p:spPr>
+        <p:style>
+          <a:lnRef idx="1">
+            <a:schemeClr val="accent1"/>
+          </a:lnRef>
+          <a:fillRef idx="3">
+            <a:schemeClr val="accent1"/>
+          </a:fillRef>
+          <a:effectRef idx="2">
+            <a:schemeClr val="accent1"/>
+          </a:effectRef>
+          <a:fontRef idx="minor">
+            <a:schemeClr val="lt1"/>
+          </a:fontRef>
+        </p:style>
+        <p:txBody>
+          <a:bodyPr rtlCol="0" anchor="ctr"/>
+          <a:lstStyle/>
+          <a:p>
+            <a:pPr algn="ctr"/>
+          </a:p>
+        </p:txBody>
+      </p:sp>
+      <p:sp>
+        <p:nvSpPr>
+          <p:cNvPr id="11" name="TextBox 10"/>
           <p:cNvSpPr txBox="1"/>
           <p:nvPr/>
         </p:nvSpPr>
         <p:spPr>
           <a:xfrm>
-            <a:off x="932688" y="1975104"/>
-            <a:ext cx="10058400" cy="822960"/>
+            <a:off x="1389888" y="2526029"/>
+            <a:ext cx="9829800" cy="1209294"/>
           </a:xfrm>
           <a:prstGeom prst="rect">
             <a:avLst/>
@@ -11059,29 +11731,74 @@
           <a:lstStyle/>
           <a:p>
             <a:pPr algn="l">
-              <a:defRPr sz="2500" b="1">
+              <a:defRPr sz="1900" b="0">
                 <a:solidFill>
-                  <a:srgbClr val="FFFFFF"/>
+                  <a:srgbClr val="1C2330"/>
                 </a:solidFill>
                 <a:latin typeface="Aptos"/>
               </a:defRPr>
             </a:pPr>
             <a:r>
-              <a:t>¿Qué puedes señalar, predecir, ejecutar y modificar para demostrar que comprendes tu propio MiniJarvis?</a:t>
-            </a:r>
-          </a:p>
-        </p:txBody>
-      </p:sp>
-      <p:sp>
-        <p:nvSpPr>
-          <p:cNvPr id="11" name="TextBox 10"/>
+              <a:t>Una capacidad para la que todavía necesito apoyo.</a:t>
+            </a:r>
+          </a:p>
+        </p:txBody>
+      </p:sp>
+      <p:sp>
+        <p:nvSpPr>
+          <p:cNvPr id="12" name="Rounded Rectangle 11"/>
+          <p:cNvSpPr/>
+          <p:nvPr/>
+        </p:nvSpPr>
+        <p:spPr>
+          <a:xfrm>
+            <a:off x="713232" y="3790187"/>
+            <a:ext cx="420624" cy="420624"/>
+          </a:xfrm>
+          <a:prstGeom prst="roundRect">
+            <a:avLst/>
+          </a:prstGeom>
+          <a:solidFill>
+            <a:srgbClr val="FFFFFF"/>
+          </a:solidFill>
+          <a:ln>
+            <a:solidFill>
+              <a:srgbClr val="2F5BA8"/>
+            </a:solidFill>
+          </a:ln>
+        </p:spPr>
+        <p:style>
+          <a:lnRef idx="1">
+            <a:schemeClr val="accent1"/>
+          </a:lnRef>
+          <a:fillRef idx="3">
+            <a:schemeClr val="accent1"/>
+          </a:fillRef>
+          <a:effectRef idx="2">
+            <a:schemeClr val="accent1"/>
+          </a:effectRef>
+          <a:fontRef idx="minor">
+            <a:schemeClr val="lt1"/>
+          </a:fontRef>
+        </p:style>
+        <p:txBody>
+          <a:bodyPr rtlCol="0" anchor="ctr"/>
+          <a:lstStyle/>
+          <a:p>
+            <a:pPr algn="ctr"/>
+          </a:p>
+        </p:txBody>
+      </p:sp>
+      <p:sp>
+        <p:nvSpPr>
+          <p:cNvPr id="13" name="TextBox 12"/>
           <p:cNvSpPr txBox="1"/>
           <p:nvPr/>
         </p:nvSpPr>
         <p:spPr>
           <a:xfrm>
-            <a:off x="749808" y="3886200"/>
-            <a:ext cx="10607040" cy="1280160"/>
+            <a:off x="1389888" y="3771900"/>
+            <a:ext cx="9829800" cy="1209294"/>
           </a:xfrm>
           <a:prstGeom prst="rect">
             <a:avLst/>
@@ -11089,21 +11806,102 @@
           <a:noFill/>
         </p:spPr>
         <p:txBody>
-          <a:bodyPr wrap="square" lIns="45720" rIns="45720" tIns="36576" bIns="36576" anchor="ctr">
+          <a:bodyPr wrap="square" lIns="45720" rIns="45720" tIns="36576" bIns="36576" anchor="t">
             <a:spAutoFit/>
           </a:bodyPr>
           <a:lstStyle/>
           <a:p>
-            <a:pPr algn="ctr">
-              <a:defRPr sz="2300" b="1">
+            <a:pPr algn="l">
+              <a:defRPr sz="1900" b="0">
                 <a:solidFill>
-                  <a:srgbClr val="247E5C"/>
+                  <a:srgbClr val="1C2330"/>
                 </a:solidFill>
                 <a:latin typeface="Aptos"/>
               </a:defRPr>
             </a:pPr>
             <a:r>
-              <a:t>La sesión termina cuando la evidencia existe, está comprobada y puede defenderse.</a:t>
+              <a:t>Un hábito de trabajo que conservaré.</a:t>
+            </a:r>
+          </a:p>
+        </p:txBody>
+      </p:sp>
+      <p:sp>
+        <p:nvSpPr>
+          <p:cNvPr id="14" name="Rounded Rectangle 13"/>
+          <p:cNvSpPr/>
+          <p:nvPr/>
+        </p:nvSpPr>
+        <p:spPr>
+          <a:xfrm>
+            <a:off x="713232" y="5036057"/>
+            <a:ext cx="420624" cy="420624"/>
+          </a:xfrm>
+          <a:prstGeom prst="roundRect">
+            <a:avLst/>
+          </a:prstGeom>
+          <a:solidFill>
+            <a:srgbClr val="FFFFFF"/>
+          </a:solidFill>
+          <a:ln>
+            <a:solidFill>
+              <a:srgbClr val="2F5BA8"/>
+            </a:solidFill>
+          </a:ln>
+        </p:spPr>
+        <p:style>
+          <a:lnRef idx="1">
+            <a:schemeClr val="accent1"/>
+          </a:lnRef>
+          <a:fillRef idx="3">
+            <a:schemeClr val="accent1"/>
+          </a:fillRef>
+          <a:effectRef idx="2">
+            <a:schemeClr val="accent1"/>
+          </a:effectRef>
+          <a:fontRef idx="minor">
+            <a:schemeClr val="lt1"/>
+          </a:fontRef>
+        </p:style>
+        <p:txBody>
+          <a:bodyPr rtlCol="0" anchor="ctr"/>
+          <a:lstStyle/>
+          <a:p>
+            <a:pPr algn="ctr"/>
+          </a:p>
+        </p:txBody>
+      </p:sp>
+      <p:sp>
+        <p:nvSpPr>
+          <p:cNvPr id="15" name="TextBox 14"/>
+          <p:cNvSpPr txBox="1"/>
+          <p:nvPr/>
+        </p:nvSpPr>
+        <p:spPr>
+          <a:xfrm>
+            <a:off x="1389888" y="5017770"/>
+            <a:ext cx="9829800" cy="1209294"/>
+          </a:xfrm>
+          <a:prstGeom prst="rect">
+            <a:avLst/>
+          </a:prstGeom>
+          <a:noFill/>
+        </p:spPr>
+        <p:txBody>
+          <a:bodyPr wrap="square" lIns="45720" rIns="45720" tIns="36576" bIns="36576" anchor="t">
+            <a:spAutoFit/>
+          </a:bodyPr>
+          <a:lstStyle/>
+          <a:p>
+            <a:pPr algn="l">
+              <a:defRPr sz="1900" b="0">
+                <a:solidFill>
+                  <a:srgbClr val="1C2330"/>
+                </a:solidFill>
+                <a:latin typeface="Aptos"/>
+              </a:defRPr>
+            </a:pPr>
+            <a:r>
+              <a:t>Una mejora concreta que aplicaré en H2.</a:t>
             </a:r>
           </a:p>
         </p:txBody>

--- a/02-PROFESORADO/03-PRESENTACIONES/POR-SESION/h1/S215-defensa-y-cierre-h1-presentacion.pptx
+++ b/02-PROFESORADO/03-PRESENTACIONES/POR-SESION/h1/S215-defensa-y-cierre-h1-presentacion.pptx
@@ -6081,7 +6081,7 @@
               </a:defRPr>
             </a:pPr>
             <a:r>
-              <a:t>He producido o actualizado: Plantilla de defensa H1 y portfolio individual.</a:t>
+              <a:t>Pueden explicar qué están intentando conseguir.</a:t>
             </a:r>
           </a:p>
         </p:txBody>
@@ -6162,7 +6162,7 @@
               </a:defRPr>
             </a:pPr>
             <a:r>
-              <a:t>Puedo señalar dónde está.</a:t>
+              <a:t>Registran una decisión, prueba o bloqueo; no muestran solo el resultado final.</a:t>
             </a:r>
           </a:p>
         </p:txBody>
@@ -6243,7 +6243,7 @@
               </a:defRPr>
             </a:pPr>
             <a:r>
-              <a:t>Puedo explicar una decisión tomada.</a:t>
+              <a:t>Todas las personas pueden describir su aportación.</a:t>
             </a:r>
           </a:p>
         </p:txBody>
@@ -6324,7 +6324,7 @@
               </a:defRPr>
             </a:pPr>
             <a:r>
-              <a:t>Puedo mostrar una prueba o comprobación.</a:t>
+              <a:t>Comprueban el producto con un criterio observable.</a:t>
             </a:r>
           </a:p>
         </p:txBody>
@@ -6405,7 +6405,7 @@
               </a:defRPr>
             </a:pPr>
             <a:r>
-              <a:t>He registrado mi aportación individual si el trabajo era de equipo.</a:t>
+              <a:t>No usan datos personales, credenciales ni respuestas de ejemplo antes del intento propio.</a:t>
             </a:r>
           </a:p>
         </p:txBody>

--- a/02-PROFESORADO/03-PRESENTACIONES/POR-SESION/h1/S215-defensa-y-cierre-h1-presentacion.pptx
+++ b/02-PROFESORADO/03-PRESENTACIONES/POR-SESION/h1/S215-defensa-y-cierre-h1-presentacion.pptx
@@ -3378,8 +3378,8 @@
         </p:nvSpPr>
         <p:spPr>
           <a:xfrm>
-            <a:off x="713232" y="6272784"/>
-            <a:ext cx="10607040" cy="201168"/>
+            <a:off x="713232" y="4965192"/>
+            <a:ext cx="10241280" cy="594360"/>
           </a:xfrm>
           <a:prstGeom prst="rect">
             <a:avLst/>
@@ -3393,6 +3393,42 @@
           <a:lstStyle/>
           <a:p>
             <a:pPr algn="l">
+              <a:defRPr sz="1700" b="0">
+                <a:solidFill>
+                  <a:srgbClr val="D2D9E4"/>
+                </a:solidFill>
+                <a:latin typeface="Aptos"/>
+              </a:defRPr>
+            </a:pPr>
+            <a:r>
+              <a:t>Equipo → comprobación individual</a:t>
+            </a:r>
+          </a:p>
+        </p:txBody>
+      </p:sp>
+      <p:sp>
+        <p:nvSpPr>
+          <p:cNvPr id="10" name="TextBox 9"/>
+          <p:cNvSpPr txBox="1"/>
+          <p:nvPr/>
+        </p:nvSpPr>
+        <p:spPr>
+          <a:xfrm>
+            <a:off x="713232" y="6272784"/>
+            <a:ext cx="10607040" cy="201168"/>
+          </a:xfrm>
+          <a:prstGeom prst="rect">
+            <a:avLst/>
+          </a:prstGeom>
+          <a:noFill/>
+        </p:spPr>
+        <p:txBody>
+          <a:bodyPr wrap="square" lIns="45720" rIns="45720" tIns="36576" bIns="36576" anchor="t">
+            <a:spAutoFit/>
+          </a:bodyPr>
+          <a:lstStyle/>
+          <a:p>
+            <a:pPr algn="l">
               <a:defRPr sz="1000" b="1">
                 <a:solidFill>
                   <a:srgbClr val="A0AAB9"/>
@@ -3401,7 +3437,7 @@
               </a:defRPr>
             </a:pPr>
             <a:r>
-              <a:t>MINIJARVIS · PROGRAMACIÓN + ENTORNOS DE DESARROLLO</a:t>
+              <a:t>MINIJARVIS · PROGRAMACIÓN</a:t>
             </a:r>
           </a:p>
         </p:txBody>
@@ -3818,7 +3854,7 @@
               </a:defRPr>
             </a:pPr>
             <a:r>
-              <a:t>Evidencia: Plantilla de defensa H1 y portfolio individual.</a:t>
+              <a:t>Evidencia: Versión h1-entrega defendida y siguiente mejora individual identificada.</a:t>
             </a:r>
           </a:p>
         </p:txBody>
@@ -5745,7 +5781,7 @@
               </a:defRPr>
             </a:pPr>
             <a:r>
-              <a:t>Comprueba y registra la evidencia: Plantilla de defensa H1 y portfolio individual.</a:t>
+              <a:t>Comprueba y registra la evidencia: Versión h1-entrega defendida y siguiente mejora individual identificada.</a:t>
             </a:r>
           </a:p>
         </p:txBody>

--- a/02-PROFESORADO/03-PRESENTACIONES/POR-SESION/h1/S215-defensa-y-cierre-h1-presentacion.pptx
+++ b/02-PROFESORADO/03-PRESENTACIONES/POR-SESION/h1/S215-defensa-y-cierre-h1-presentacion.pptx
@@ -624,7 +624,7 @@
           </a:p>
           <a:p>
             <a:r>
-              <a:t>- que explica valores, tipos, operaciones o condiciones con precisión suficiente;</a:t>
+              <a:t>- que explica valores, tipos, operaciones y la comparación booleana con precisión suficiente;</a:t>
             </a:r>
           </a:p>
           <a:p>
@@ -1200,7 +1200,7 @@
           </a:p>
           <a:p>
             <a:r>
-              <a:t>Reloj fuente 28–38 min: duración compartida 600 segundos. Trabajo: Continuar defensas o una segunda comprobación breve cuando haga falta. Función del soporte: entrega. Soporte concurrente del mismo reloj fuente: no son turnos de defensa ni una secuencia adicional. Trabajo paralelo: Preparar la entrega Moodle, revisar enlaces profundos y probar permisos. Reloj fuente 38–43 min: duración compartida 300 segundos. Trabajo: Resolver defensas pendientes sin convertirlas en exposiciones. Función del soporte: entrega. Soporte concurrente del mismo reloj fuente: no son turnos de defensa ni una secuencia adicional. Trabajo paralelo: Un integrante realiza la entrega; el equipo verifica que abre correctamente.</a:t>
+              <a:t>Reloj fuente 38–43 min: duración compartida 300 segundos. Trabajo: Resolver defensas pendientes sin convertirlas en exposiciones. Función del soporte: entrega. Soporte concurrente del mismo reloj fuente: no son turnos de defensa ni una secuencia adicional. Trabajo paralelo: Un integrante realiza la entrega; el equipo verifica que abre correctamente.</a:t>
             </a:r>
           </a:p>
           <a:p/>
@@ -1283,7 +1283,7 @@
           </a:p>
           <a:p>
             <a:r>
-              <a:t>Reloj fuente 28–38 min: duración compartida 600 segundos. Trabajo: Continuar defensas o una segunda comprobación breve cuando haga falta. Función del soporte: entrega. Soporte concurrente del mismo reloj fuente: no son turnos de defensa ni una secuencia adicional. Trabajo paralelo: Preparar la entrega Moodle, revisar enlaces profundos y probar permisos. Reloj fuente 38–43 min: duración compartida 300 segundos. Trabajo: Resolver defensas pendientes sin convertirlas en exposiciones. Función del soporte: entrega. Soporte concurrente del mismo reloj fuente: no son turnos de defensa ni una secuencia adicional. Trabajo paralelo: Un integrante realiza la entrega; el equipo verifica que abre correctamente.</a:t>
+              <a:t>Reloj fuente 38–43 min: duración compartida 300 segundos. Trabajo: Resolver defensas pendientes sin convertirlas en exposiciones. Función del soporte: entrega. Soporte concurrente del mismo reloj fuente: no son turnos de defensa ni una secuencia adicional. Trabajo paralelo: Un integrante realiza la entrega; el equipo verifica que abre correctamente.</a:t>
             </a:r>
           </a:p>
           <a:p/>
@@ -1366,7 +1366,7 @@
           </a:p>
           <a:p>
             <a:r>
-              <a:t>Reloj fuente 28–38 min: duración compartida 600 segundos. Trabajo: Continuar defensas o una segunda comprobación breve cuando haga falta. Función del soporte: entrega. Soporte concurrente del mismo reloj fuente: no son turnos de defensa ni una secuencia adicional. Trabajo paralelo: Preparar la entrega Moodle, revisar enlaces profundos y probar permisos. Reloj fuente 38–43 min: duración compartida 300 segundos. Trabajo: Resolver defensas pendientes sin convertirlas en exposiciones. Función del soporte: entrega. Soporte concurrente del mismo reloj fuente: no son turnos de defensa ni una secuencia adicional. Trabajo paralelo: Un integrante realiza la entrega; el equipo verifica que abre correctamente.</a:t>
+              <a:t>Reloj fuente 38–43 min: duración compartida 300 segundos. Trabajo: Resolver defensas pendientes sin convertirlas en exposiciones. Función del soporte: entrega. Soporte concurrente del mismo reloj fuente: no son turnos de defensa ni una secuencia adicional. Trabajo paralelo: Un integrante realiza la entrega; el equipo verifica que abre correctamente.</a:t>
             </a:r>
           </a:p>
           <a:p/>
@@ -1449,7 +1449,7 @@
           </a:p>
           <a:p>
             <a:r>
-              <a:t>Reloj fuente 28–38 min: duración compartida 600 segundos. Trabajo: Continuar defensas o una segunda comprobación breve cuando haga falta. Función del soporte: explicación. Soporte concurrente del mismo reloj fuente: no son turnos de defensa ni una secuencia adicional. Trabajo paralelo: Preparar la entrega Moodle, revisar enlaces profundos y probar permisos.</a:t>
+              <a:t>Reloj fuente 38–43 min: duración compartida 300 segundos. Trabajo: Resolver defensas pendientes sin convertirlas en exposiciones. Función del soporte: entrega. Soporte concurrente del mismo reloj fuente: no son turnos de defensa ni una secuencia adicional. Trabajo paralelo: Un integrante realiza la entrega; el equipo verifica que abre correctamente.</a:t>
             </a:r>
           </a:p>
           <a:p/>
@@ -1773,7 +1773,7 @@
           </a:p>
           <a:p>
             <a:r>
-              <a:t>Reloj fuente 28–38 min: duración compartida 600 segundos. Trabajo: Continuar defensas o una segunda comprobación breve cuando haga falta. Función del soporte: apoyo al trabajo. Soporte concurrente del mismo reloj fuente: no son turnos de defensa ni una secuencia adicional. Trabajo paralelo: Preparar la entrega Moodle, revisar enlaces profundos y probar permisos. Reloj fuente 38–43 min: duración compartida 300 segundos. Trabajo: Resolver defensas pendientes sin convertirlas en exposiciones. Función del soporte: apoyo al trabajo. Soporte concurrente del mismo reloj fuente: no son turnos de defensa ni una secuencia adicional. Trabajo paralelo: Un integrante realiza la entrega; el equipo verifica que abre correctamente.</a:t>
+              <a:t>Reloj fuente 28–38 min: duración compartida 600 segundos. Trabajo: Continuar defensas o una segunda comprobación breve cuando haga falta. Función del soporte: explicación. Soporte concurrente del mismo reloj fuente: no son turnos de defensa ni una secuencia adicional. Trabajo paralelo: Preparar la entrega Moodle, revisar enlaces profundos y probar permisos.</a:t>
             </a:r>
           </a:p>
           <a:p/>
@@ -2111,7 +2111,7 @@
           </a:p>
           <a:p>
             <a:r>
-              <a:t>- **No entiende una decisión:** prueba un valor para cada rama y pide anticipar el recorrido.</a:t>
+              <a:t>- **No entiende la comparación:** aísla operandos y operador, prueba un valor que produzca `true` y otro que produzca `false`, y recuerda que H1 no abre ramas.</a:t>
             </a:r>
           </a:p>
           <a:p>
@@ -2571,7 +2571,7 @@
           <a:p/>
           <a:p>
             <a:r>
-              <a:t>Banco de preguntas · Comparaciones y decisiones</a:t>
+              <a:t>Banco de preguntas · Comparación booleana sin bifurcación</a:t>
             </a:r>
           </a:p>
           <a:p>
@@ -2581,17 +2581,22 @@
           </a:p>
           <a:p>
             <a:r>
-              <a:t>- Señala la condición de una decisión.</a:t>
-            </a:r>
-          </a:p>
-          <a:p>
-            <a:r>
-              <a:t>- Ejecuta o explica un caso que recorra la rama `true` y otro que recorra la rama `false`.</a:t>
-            </a:r>
-          </a:p>
-          <a:p>
-            <a:r>
-              <a:t>- Cambia un valor sencillo, predice qué rama se recorrerá y compruébalo.</a:t>
+              <a:t>- Explica qué significan `true` y `false` en esa comparación.</a:t>
+            </a:r>
+          </a:p>
+          <a:p>
+            <a:r>
+              <a:t>- Ejecuta o explica dos valores que produzcan resultados booleanos distintos, sin ramas.</a:t>
+            </a:r>
+          </a:p>
+          <a:p>
+            <a:r>
+              <a:t>- Cambia un valor sencillo, predice qué `boolean` se mostrará y compruébalo.</a:t>
+            </a:r>
+          </a:p>
+          <a:p>
+            <a:r>
+              <a:t>- Explica por qué el resultado no decide qué instrucciones se ejecutan en H1.</a:t>
             </a:r>
           </a:p>
           <a:p/>
@@ -2808,7 +2813,7 @@
           <a:p/>
           <a:p>
             <a:r>
-              <a:t>Banco de preguntas · Comparaciones y decisiones</a:t>
+              <a:t>Banco de preguntas · Comparación booleana sin bifurcación</a:t>
             </a:r>
           </a:p>
           <a:p>
@@ -2818,17 +2823,22 @@
           </a:p>
           <a:p>
             <a:r>
-              <a:t>- Señala la condición de una decisión.</a:t>
-            </a:r>
-          </a:p>
-          <a:p>
-            <a:r>
-              <a:t>- Ejecuta o explica un caso que recorra la rama `true` y otro que recorra la rama `false`.</a:t>
-            </a:r>
-          </a:p>
-          <a:p>
-            <a:r>
-              <a:t>- Cambia un valor sencillo, predice qué rama se recorrerá y compruébalo.</a:t>
+              <a:t>- Explica qué significan `true` y `false` en esa comparación.</a:t>
+            </a:r>
+          </a:p>
+          <a:p>
+            <a:r>
+              <a:t>- Ejecuta o explica dos valores que produzcan resultados booleanos distintos, sin ramas.</a:t>
+            </a:r>
+          </a:p>
+          <a:p>
+            <a:r>
+              <a:t>- Cambia un valor sencillo, predice qué `boolean` se mostrará y compruébalo.</a:t>
+            </a:r>
+          </a:p>
+          <a:p>
+            <a:r>
+              <a:t>- Explica por qué el resultado no decide qué instrucciones se ejecutan en H1.</a:t>
             </a:r>
           </a:p>
           <a:p/>
@@ -6160,7 +6170,7 @@
               </a:defRPr>
             </a:pPr>
             <a:r>
-              <a:t>Modalidad publicada: Equipo → comprobación individual</a:t>
+              <a:t>Modalidad publicada: Equipo → defensa individual</a:t>
             </a:r>
           </a:p>
         </p:txBody>
@@ -6214,7 +6224,7 @@
   </p:clrMapOvr>
   <p:extLst>
     <p:ext uri="urn:minijarvis:semantic-render:v1">
-      <ns0:renderMetadata xmlns:ns0="urn:minijarvis:semantic-render:v1">{"session": "215", "source_files": {"teacher": "/mnt/compartido/Programación-26-27/Minijarvis/02-PROFESORADO/02-SESIONES/h1/S215-defensa-y-cierre-h1-docente.md", "student_fallback": "/mnt/compartido/Programación-26-27/Minijarvis/01-ALUMNADO/03-SESIONES/h1/S215-defensa-y-cierre-h1-alumnado.md"}, "layout": "title", "plan_index": 0, "recognition": false, "unit_ids": ["unit-0", "unit-1", "unit-2", "unit-3", "unit-21", "unit-26", "unit-27", "unit-28", "unit-29", "unit-30", "unit-31"], "roles": {"unit-0": "core", "unit-1": "core", "unit-2": "core", "unit-3": "core", "unit-21": "core", "unit-26": "core", "unit-27": "core", "unit-28": "core", "unit-29": "core", "unit-30": "core", "unit-31": "core"}, "source_refs": [{"source": "teacher", "heading": "Finalidad del cierre", "block_index": 0, "fragment": 0}, {"source": "teacher", "heading": "Antes de entrar en clase", "block_index": 1, "fragment": 0}, {"source": "teacher", "heading": "Apertura docente", "block_index": 2, "fragment": 0}, {"source": "teacher", "heading": "Organización simultánea de los 45 minutos", "block_index": 3, "fragment": 0}, {"source": "teacher", "heading": "Observación docente", "block_index": 21, "fragment": 0}, {"source": "teacher", "heading": "Organización simultánea de los 45 minutos", "block_index": 3, "fragment": 0}, {"source": "teacher", "heading": "Organización simultánea de los 45 minutos", "block_index": 3, "fragment": 0}, {"source": "teacher", "heading": "Organización simultánea de los 45 minutos", "block_index": 3, "fragment": 0}, {"source": "teacher", "heading": "Organización simultánea de los 45 minutos", "block_index": 3, "fragment": 0}, {"source": "teacher", "heading": "Organización simultánea de los 45 minutos", "block_index": 3, "fragment": 0}, {"source": "teacher", "heading": "Organización simultánea de los 45 minutos", "block_index": 3, "fragment": 0}], "visible_sources": [], "notes_sources": [{"function": "preparation", "heading": "Antes de entrar en clase", "sha256": "d28cf9f792a99362ce7a304f8eab8e173c24706335536310a0ae64569f4acfe1"}, {"function": "explanations", "heading": "Apertura docente", "sha256": "ca102ddbb1f96db1728dfe3a313268cfd85542ed79fd70e670d43aef2fea5812"}, {"function": "explanations", "heading": "Apertura docente", "sha256": "961a36ac1093894fee007ef1fca1e4742fada4cd15b2c78a5cc5f7df8caa61e0"}, {"function": "timeline_context", "heading": "Organización simultánea de los 45 minutos", "sha256": "bce22abb6462e38ed580c0aa06d494bb0b28bdb6299a537e607def598264c0ae"}, {"function": "timeline_context", "heading": "Organización simultánea de los 45 minutos", "sha256": "211c7fdace3e439c5f959232f460b2b3095ddbaf2999d6914d85c4f602d81d98"}, {"function": "observation", "heading": "Observación docente", "sha256": "1bd4deb087487cf44ee5f56c33d6eba97d447f573d632a82b49d73ec92278896"}, {"function": "observation", "heading": "Observación docente", "sha256": "4877cba25bcc7ebaa37249368abd00c90907ffad90aa4d847dd5bb1fa24a5138"}], "relations": {"source_supports_enriched": true}, "timeline_refs": [0], "composition": {"origin_slides": [1]}, "timing": {"seconds": 0, "allocations": [{"source_index": 0, "seconds": 0, "decision": "Intervalo compartido íntegro; propietario contable seleccionado por función de actividad y referencia timeline de unidad (identidad semántica en empates). Soporte, sin duplicación contable. Portada limitada a la apertura inicial: las referencias timeline presenter-only no convierten la portada en soporte de todos los tramos. Soporte concurrente del mismo reloj fuente: no son turnos de defensa ni una secuencia adicional. Trabajo paralelo: Abrir código, README, Scrum y enlaces de entrega.", "source_time": "0–5 min", "source_seconds": 300, "is_owner": false, "function": "explanations"}], "clock_intervals": [0], "presenter_notes": "Reloj fuente 0–5 min: duración compartida 300 segundos. Trabajo: Explicar el protocolo y confirmar el orden. Función del soporte: apoyo al trabajo. Soporte concurrente del mismo reloj fuente: no son turnos de defensa ni una secuencia adicional. Trabajo paralelo: Abrir código, README, Scrum y enlaces de entrega.", "shared_intervals": [{"source_index": 0, "source_time": "0–5 min", "seconds": 300, "is_owner": false, "function": "explanations", "action": "Explicar el protocolo y confirmar el orden.", "concurrent": true, "parallel_work": "Abrir código, README, Scrum y enlaces de entrega."}]}, "code_blocks": [], "representation_needs": []}</ns0:renderMetadata>
+      <ns0:renderMetadata xmlns:ns0="urn:minijarvis:semantic-render:v1">{"session": "215", "source_files": {"teacher": "/mnt/compartido/Programación-26-27/Minijarvis/02-PROFESORADO/02-SESIONES/h1/S215-defensa-y-cierre-h1-docente.md", "student_fallback": "/mnt/compartido/Programación-26-27/Minijarvis/01-ALUMNADO/03-SESIONES/h1/S215-defensa-y-cierre-h1-alumnado.md"}, "layout": "title", "plan_index": 0, "recognition": false, "unit_ids": ["unit-0", "unit-1", "unit-2", "unit-3", "unit-21", "unit-25", "unit-26", "unit-27", "unit-28", "unit-29", "unit-30"], "roles": {"unit-0": "core", "unit-1": "core", "unit-2": "core", "unit-3": "core", "unit-21": "core", "unit-25": "core", "unit-26": "core", "unit-27": "core", "unit-28": "core", "unit-29": "core", "unit-30": "core"}, "source_refs": [{"source": "teacher", "heading": "Finalidad del cierre", "block_index": 0, "fragment": 0}, {"source": "teacher", "heading": "Antes de entrar en clase", "block_index": 1, "fragment": 0}, {"source": "teacher", "heading": "Apertura docente", "block_index": 2, "fragment": 0}, {"source": "teacher", "heading": "Organización simultánea de los 45 minutos", "block_index": 3, "fragment": 0}, {"source": "teacher", "heading": "Observación docente", "block_index": 21, "fragment": 0}, {"source": "teacher", "heading": "Organización simultánea de los 45 minutos", "block_index": 3, "fragment": 0}, {"source": "teacher", "heading": "Organización simultánea de los 45 minutos", "block_index": 3, "fragment": 0}, {"source": "teacher", "heading": "Organización simultánea de los 45 minutos", "block_index": 3, "fragment": 0}, {"source": "teacher", "heading": "Organización simultánea de los 45 minutos", "block_index": 3, "fragment": 0}, {"source": "teacher", "heading": "Organización simultánea de los 45 minutos", "block_index": 3, "fragment": 0}, {"source": "teacher", "heading": "Organización simultánea de los 45 minutos", "block_index": 3, "fragment": 0}], "visible_sources": [], "notes_sources": [{"function": "preparation", "heading": "Antes de entrar en clase", "sha256": "d28cf9f792a99362ce7a304f8eab8e173c24706335536310a0ae64569f4acfe1"}, {"function": "explanations", "heading": "Apertura docente", "sha256": "ca102ddbb1f96db1728dfe3a313268cfd85542ed79fd70e670d43aef2fea5812"}, {"function": "explanations", "heading": "Apertura docente", "sha256": "961a36ac1093894fee007ef1fca1e4742fada4cd15b2c78a5cc5f7df8caa61e0"}, {"function": "timeline_context", "heading": "Organización simultánea de los 45 minutos", "sha256": "bce22abb6462e38ed580c0aa06d494bb0b28bdb6299a537e607def598264c0ae"}, {"function": "timeline_context", "heading": "Organización simultánea de los 45 minutos", "sha256": "211c7fdace3e439c5f959232f460b2b3095ddbaf2999d6914d85c4f602d81d98"}, {"function": "observation", "heading": "Observación docente", "sha256": "1bd4deb087487cf44ee5f56c33d6eba97d447f573d632a82b49d73ec92278896"}, {"function": "observation", "heading": "Observación docente", "sha256": "7bf865830174d8099178676547de0a3df5600bce690f3b66a606989d1eb430cb"}], "relations": {"source_supports_enriched": true}, "timeline_refs": [0], "composition": {"origin_slides": [1]}, "timing": {"seconds": 0, "allocations": [{"source_index": 0, "seconds": 0, "decision": "Intervalo compartido íntegro; propietario contable seleccionado por función de actividad y referencia timeline de unidad (identidad semántica en empates). Soporte, sin duplicación contable. Portada limitada a la apertura inicial: las referencias timeline presenter-only no convierten la portada en soporte de todos los tramos. Soporte concurrente del mismo reloj fuente: no son turnos de defensa ni una secuencia adicional. Trabajo paralelo: Abrir código, README, Scrum y enlaces de entrega.", "source_time": "0–5 min", "source_seconds": 300, "is_owner": false, "function": "explanations"}], "clock_intervals": [0], "presenter_notes": "Reloj fuente 0–5 min: duración compartida 300 segundos. Trabajo: Explicar el protocolo y confirmar el orden. Función del soporte: apoyo al trabajo. Soporte concurrente del mismo reloj fuente: no son turnos de defensa ni una secuencia adicional. Trabajo paralelo: Abrir código, README, Scrum y enlaces de entrega.", "shared_intervals": [{"source_index": 0, "source_time": "0–5 min", "seconds": 300, "is_owner": false, "function": "explanations", "action": "Explicar el protocolo y confirmar el orden.", "concurrent": true, "parallel_work": "Abrir código, README, Scrum y enlaces de entrega."}]}, "code_blocks": [], "representation_needs": []}</ns0:renderMetadata>
     </p:ext>
   </p:extLst>
 </p:sld>
@@ -8559,14 +8569,56 @@
       </p:sp>
       <p:sp>
         <p:nvSpPr>
-          <p:cNvPr id="5" name="Código editable" descr="Código editable"/>
-          <p:cNvSpPr txBox="1"/>
-          <p:nvPr/>
-        </p:nvSpPr>
-        <p:spPr>
-          <a:xfrm>
-            <a:off x="640080" y="1417320"/>
-            <a:ext cx="10881360" cy="2218182"/>
+          <p:cNvPr id="5" name="Acción" descr="Acción"/>
+          <p:cNvSpPr txBox="1"/>
+          <p:nvPr/>
+        </p:nvSpPr>
+        <p:spPr>
+          <a:xfrm>
+            <a:off x="640080" y="1406652"/>
+            <a:ext cx="10881360" cy="443992"/>
+          </a:xfrm>
+          <a:prstGeom prst="rect">
+            <a:avLst/>
+          </a:prstGeom>
+          <a:noFill/>
+        </p:spPr>
+        <p:txBody>
+          <a:bodyPr wrap="square" lIns="109728" rIns="109728" tIns="73152" bIns="73152">
+            <a:noAutofit/>
+          </a:bodyPr>
+          <a:lstStyle/>
+          <a:p>
+            <a:pPr>
+              <a:lnSpc>
+                <a:spcPts val="2200"/>
+              </a:lnSpc>
+              <a:spcAft>
+                <a:spcPts val="0"/>
+              </a:spcAft>
+              <a:defRPr sz="2000" b="1">
+                <a:solidFill>
+                  <a:srgbClr val="2F5BA8"/>
+                </a:solidFill>
+                <a:latin typeface="Liberation Sans"/>
+              </a:defRPr>
+            </a:pPr>
+            <a:r>
+              <a:t>QUÉ HACER</a:t>
+            </a:r>
+          </a:p>
+        </p:txBody>
+      </p:sp>
+      <p:sp>
+        <p:nvSpPr>
+          <p:cNvPr id="6" name="Acción o criterio 0" descr="Acción o criterio 0"/>
+          <p:cNvSpPr txBox="1"/>
+          <p:nvPr/>
+        </p:nvSpPr>
+        <p:spPr>
+          <a:xfrm>
+            <a:off x="640080" y="1987804"/>
+            <a:ext cx="3444240" cy="2511552"/>
           </a:xfrm>
           <a:prstGeom prst="rect">
             <a:avLst/>
@@ -8574,157 +8626,48 @@
           <a:solidFill>
             <a:srgbClr val="FFFFFF"/>
           </a:solidFill>
-        </p:spPr>
-        <p:txBody>
-          <a:bodyPr wrap="square" lIns="109728" rIns="109728" tIns="73152" bIns="73152">
-            <a:noAutofit/>
-          </a:bodyPr>
-          <a:lstStyle/>
-          <a:p>
-            <a:pPr marL="335280" indent="-335280">
-              <a:lnSpc>
-                <a:spcPts val="2310"/>
-              </a:lnSpc>
-              <a:spcAft>
-                <a:spcPts val="0"/>
-              </a:spcAft>
-              <a:defRPr sz="2200" b="0">
+          <a:ln>
+            <a:solidFill>
+              <a:srgbClr val="2F5BA8"/>
+            </a:solidFill>
+          </a:ln>
+        </p:spPr>
+        <p:txBody>
+          <a:bodyPr wrap="square" lIns="109728" rIns="109728" tIns="73152" bIns="73152">
+            <a:noAutofit/>
+          </a:bodyPr>
+          <a:lstStyle/>
+          <a:p>
+            <a:pPr>
+              <a:lnSpc>
+                <a:spcPts val="2640"/>
+              </a:lnSpc>
+              <a:spcAft>
+                <a:spcPts val="0"/>
+              </a:spcAft>
+              <a:defRPr sz="2400" b="0">
                 <a:solidFill>
                   <a:srgbClr val="1C2330"/>
                 </a:solidFill>
-                <a:latin typeface="Liberation Mono"/>
-              </a:defRPr>
-            </a:pPr>
-            <a:r>
-              <a:t>Equipo:</a:t>
-            </a:r>
-          </a:p>
-          <a:p>
-            <a:pPr marL="335280" indent="-335280">
-              <a:lnSpc>
-                <a:spcPts val="2310"/>
-              </a:lnSpc>
-              <a:spcAft>
-                <a:spcPts val="0"/>
-              </a:spcAft>
-              <a:defRPr sz="2200" b="0">
-                <a:solidFill>
-                  <a:srgbClr val="1C2330"/>
-                </a:solidFill>
-                <a:latin typeface="Liberation Mono"/>
-              </a:defRPr>
-            </a:pPr>
-            <a:r>
-              <a:t>Integrantes:</a:t>
-            </a:r>
-          </a:p>
-          <a:p>
-            <a:pPr marL="335280" indent="-335280">
-              <a:lnSpc>
-                <a:spcPts val="2310"/>
-              </a:lnSpc>
-              <a:spcAft>
-                <a:spcPts val="0"/>
-              </a:spcAft>
-              <a:defRPr sz="2200" b="0">
-                <a:solidFill>
-                  <a:srgbClr val="1C2330"/>
-                </a:solidFill>
-                <a:latin typeface="Liberation Mono"/>
-              </a:defRPr>
-            </a:pPr>
-            <a:r>
-              <a:t>Repositorio GitHub:</a:t>
-            </a:r>
-          </a:p>
-          <a:p>
-            <a:pPr marL="335280" indent="-335280">
-              <a:lnSpc>
-                <a:spcPts val="2310"/>
-              </a:lnSpc>
-              <a:spcAft>
-                <a:spcPts val="0"/>
-              </a:spcAft>
-              <a:defRPr sz="2200" b="0">
-                <a:solidFill>
-                  <a:srgbClr val="1C2330"/>
-                </a:solidFill>
-                <a:latin typeface="Liberation Mono"/>
-              </a:defRPr>
-            </a:pPr>
-            <a:r>
-              <a:t>README H1:</a:t>
-            </a:r>
-          </a:p>
-          <a:p>
-            <a:pPr marL="335280" indent="-335280">
-              <a:lnSpc>
-                <a:spcPts val="2310"/>
-              </a:lnSpc>
-              <a:spcAft>
-                <a:spcPts val="0"/>
-              </a:spcAft>
-              <a:defRPr sz="2200" b="0">
-                <a:solidFill>
-                  <a:srgbClr val="1C2330"/>
-                </a:solidFill>
-                <a:latin typeface="Liberation Mono"/>
-              </a:defRPr>
-            </a:pPr>
-            <a:r>
-              <a:t>Scrum equipo H1, si corresponde:</a:t>
-            </a:r>
-          </a:p>
-          <a:p>
-            <a:pPr marL="335280" indent="-335280">
-              <a:lnSpc>
-                <a:spcPts val="2310"/>
-              </a:lnSpc>
-              <a:spcAft>
-                <a:spcPts val="0"/>
-              </a:spcAft>
-              <a:defRPr sz="2200" b="0">
-                <a:solidFill>
-                  <a:srgbClr val="1C2330"/>
-                </a:solidFill>
-                <a:latin typeface="Liberation Mono"/>
-              </a:defRPr>
-            </a:pPr>
-            <a:r>
-              <a:t>Permisos comprobados: sí/no</a:t>
-            </a:r>
-          </a:p>
-          <a:p>
-            <a:pPr marL="335280" indent="-335280">
-              <a:lnSpc>
-                <a:spcPts val="2310"/>
-              </a:lnSpc>
-              <a:spcAft>
-                <a:spcPts val="0"/>
-              </a:spcAft>
-              <a:defRPr sz="2200" b="0">
-                <a:solidFill>
-                  <a:srgbClr val="1C2330"/>
-                </a:solidFill>
-                <a:latin typeface="Liberation Mono"/>
-              </a:defRPr>
-            </a:pPr>
-            <a:r>
-              <a:t>Observaciones o bloqueo pendiente:</a:t>
-            </a:r>
-          </a:p>
-        </p:txBody>
-      </p:sp>
-      <p:sp>
-        <p:nvSpPr>
-          <p:cNvPr id="6" name="Código editable" descr="Código editable"/>
-          <p:cNvSpPr txBox="1"/>
-          <p:nvPr/>
-        </p:nvSpPr>
-        <p:spPr>
-          <a:xfrm>
-            <a:off x="640080" y="3726942"/>
-            <a:ext cx="10881360" cy="751332"/>
+                <a:latin typeface="Liberation Sans"/>
+              </a:defRPr>
+            </a:pPr>
+            <a:r>
+              <a:t>el tag h1-entrega o un commit estable de la versión evaluada;</a:t>
+            </a:r>
+          </a:p>
+        </p:txBody>
+      </p:sp>
+      <p:sp>
+        <p:nvSpPr>
+          <p:cNvPr id="7" name="Acción o criterio 1" descr="Acción o criterio 1"/>
+          <p:cNvSpPr txBox="1"/>
+          <p:nvPr/>
+        </p:nvSpPr>
+        <p:spPr>
+          <a:xfrm>
+            <a:off x="4267200" y="1987804"/>
+            <a:ext cx="3444240" cy="2511552"/>
           </a:xfrm>
           <a:prstGeom prst="rect">
             <a:avLst/>
@@ -8732,29 +8675,125 @@
           <a:solidFill>
             <a:srgbClr val="FFFFFF"/>
           </a:solidFill>
-        </p:spPr>
-        <p:txBody>
-          <a:bodyPr wrap="square" lIns="109728" rIns="109728" tIns="73152" bIns="73152">
-            <a:noAutofit/>
-          </a:bodyPr>
-          <a:lstStyle/>
-          <a:p>
-            <a:pPr marL="335280" indent="-335280">
-              <a:lnSpc>
-                <a:spcPts val="2310"/>
-              </a:lnSpc>
-              <a:spcAft>
-                <a:spcPts val="0"/>
-              </a:spcAft>
-              <a:defRPr sz="2200" b="0">
+          <a:ln>
+            <a:solidFill>
+              <a:srgbClr val="2F5BA8"/>
+            </a:solidFill>
+          </a:ln>
+        </p:spPr>
+        <p:txBody>
+          <a:bodyPr wrap="square" lIns="109728" rIns="109728" tIns="73152" bIns="73152">
+            <a:noAutofit/>
+          </a:bodyPr>
+          <a:lstStyle/>
+          <a:p>
+            <a:pPr>
+              <a:lnSpc>
+                <a:spcPts val="2640"/>
+              </a:lnSpc>
+              <a:spcAft>
+                <a:spcPts val="0"/>
+              </a:spcAft>
+              <a:defRPr sz="2400" b="0">
                 <a:solidFill>
                   <a:srgbClr val="1C2330"/>
                 </a:solidFill>
-                <a:latin typeface="Liberation Mono"/>
-              </a:defRPr>
-            </a:pPr>
-            <a:r>
-              <a:t>Confirmo que los enlaces llevan a evidencias concretas de H1 y que he comprobado los permisos de acceso.</a:t>
+                <a:latin typeface="Liberation Sans"/>
+              </a:defRPr>
+            </a:pPr>
+            <a:r>
+              <a:t>la confirmación de que diario y Scrum están actualizados en los enlaces estables ya registrados;</a:t>
+            </a:r>
+          </a:p>
+        </p:txBody>
+      </p:sp>
+      <p:sp>
+        <p:nvSpPr>
+          <p:cNvPr id="8" name="Acción o criterio 2" descr="Acción o criterio 2"/>
+          <p:cNvSpPr txBox="1"/>
+          <p:nvPr/>
+        </p:nvSpPr>
+        <p:spPr>
+          <a:xfrm>
+            <a:off x="7894320" y="1987804"/>
+            <a:ext cx="3444240" cy="2511552"/>
+          </a:xfrm>
+          <a:prstGeom prst="rect">
+            <a:avLst/>
+          </a:prstGeom>
+          <a:solidFill>
+            <a:srgbClr val="FFFFFF"/>
+          </a:solidFill>
+          <a:ln>
+            <a:solidFill>
+              <a:srgbClr val="2F5BA8"/>
+            </a:solidFill>
+          </a:ln>
+        </p:spPr>
+        <p:txBody>
+          <a:bodyPr wrap="square" lIns="109728" rIns="109728" tIns="73152" bIns="73152">
+            <a:noAutofit/>
+          </a:bodyPr>
+          <a:lstStyle/>
+          <a:p>
+            <a:pPr>
+              <a:lnSpc>
+                <a:spcPts val="2640"/>
+              </a:lnSpc>
+              <a:spcAft>
+                <a:spcPts val="0"/>
+              </a:spcAft>
+              <a:defRPr sz="2400" b="0">
+                <a:solidFill>
+                  <a:srgbClr val="1C2330"/>
+                </a:solidFill>
+                <a:latin typeface="Liberation Sans"/>
+              </a:defRPr>
+            </a:pPr>
+            <a:r>
+              <a:t>una evidencia no-code excepcional, solo si existe.</a:t>
+            </a:r>
+          </a:p>
+        </p:txBody>
+      </p:sp>
+      <p:sp>
+        <p:nvSpPr>
+          <p:cNvPr id="9" name="Contenido" descr="Contenido"/>
+          <p:cNvSpPr txBox="1"/>
+          <p:nvPr/>
+        </p:nvSpPr>
+        <p:spPr>
+          <a:xfrm>
+            <a:off x="640080" y="4590796"/>
+            <a:ext cx="10881360" cy="1338072"/>
+          </a:xfrm>
+          <a:prstGeom prst="rect">
+            <a:avLst/>
+          </a:prstGeom>
+          <a:noFill/>
+        </p:spPr>
+        <p:txBody>
+          <a:bodyPr wrap="square" lIns="109728" rIns="109728" tIns="73152" bIns="73152">
+            <a:noAutofit/>
+          </a:bodyPr>
+          <a:lstStyle/>
+          <a:p>
+            <a:pPr>
+              <a:lnSpc>
+                <a:spcPts val="3080"/>
+              </a:lnSpc>
+              <a:spcAft>
+                <a:spcPts val="0"/>
+              </a:spcAft>
+              <a:defRPr sz="2800" b="0">
+                <a:solidFill>
+                  <a:srgbClr val="1C2330"/>
+                </a:solidFill>
+                <a:latin typeface="Liberation Sans"/>
+              </a:defRPr>
+            </a:pPr>
+            <a:r>
+              <a:t>No volver a copiar URLs estables ni adjuntar README, capturas, registro IA o PDF/XLSX rutinarios.</a:t>
             </a:r>
           </a:p>
         </p:txBody>
@@ -8766,7 +8805,7 @@
   </p:clrMapOvr>
   <p:extLst>
     <p:ext uri="urn:minijarvis:semantic-render:v1">
-      <ns0:renderMetadata xmlns:ns0="urn:minijarvis:semantic-render:v1">{"session": "215", "source_files": {"teacher": "/mnt/compartido/Programación-26-27/Minijarvis/02-PROFESORADO/02-SESIONES/h1/S215-defensa-y-cierre-h1-docente.md", "student_fallback": "/mnt/compartido/Programación-26-27/Minijarvis/01-ALUMNADO/03-SESIONES/h1/S215-defensa-y-cierre-h1-alumnado.md"}, "layout": "code", "plan_index": 6, "recognition": false, "unit_ids": ["unit-19"], "roles": {"unit-19": "core"}, "source_refs": [{"source": "teacher", "heading": "Contenido de la entrega", "block_index": 19, "fragment": 0}, {"source": "teacher", "heading": "Entrega oficial Moodle y evidencias que permanecen", "block_index": 18, "fragment": 0}], "visible_sources": [{"index": 2, "sha256": "1c0ae1dac5619a76f9721422ec8c8dfd8e6fa5cb4fc8d8f95d8105d14021d7cf"}, {"index": 4, "sha256": "0b8966e9fe12c48db456711ebbd2339bdce20103cd69e03e3ddf139ab90a9c77"}], "notes_sources": [{"function": "facilitation", "heading": "Contenido de la entrega", "sha256": "a4e48419d03c0bd0c51938eba485efc01fde69e573d38cd0df3663bdf093cf3c"}, {"function": "facilitation", "heading": "Contenido de la entrega", "sha256": "da0b0eb0fcee35b4672096a802f80b79498b1b2b6589cf99d5d32bca6fbaeb83"}], "relations": {"unit_relations": {"unit-19": {}}, "schedule": "concurrent_support", "source_supports_enriched": true}, "timeline_refs": [3, 4], "composition": {"origin_slides": [16, 17, 18]}, "timing": {"seconds": 0, "allocations": [{"source_index": 3, "seconds": 0, "decision": "Intervalo compartido íntegro; propietario contable seleccionado por función de actividad y referencia timeline de unidad (identidad semántica en empates). Soporte, sin duplicación contable.  Soporte concurrente del mismo reloj fuente: no son turnos de defensa ni una secuencia adicional. Trabajo paralelo: Preparar la entrega Moodle, revisar enlaces profundos y probar permisos.", "source_time": "28–38 min", "source_seconds": 600, "is_owner": false, "function": "moodle_delivery"}, {"source_index": 4, "seconds": 0, "decision": "Intervalo compartido íntegro; propietario contable seleccionado por función de actividad y referencia timeline de unidad (identidad semántica en empates). Soporte, sin duplicación contable.  Soporte concurrente del mismo reloj fuente: no son turnos de defensa ni una secuencia adicional. Trabajo paralelo: Un integrante realiza la entrega; el equipo verifica que abre correctamente.", "source_time": "38–43 min", "source_seconds": 300, "is_owner": false, "function": "moodle_delivery"}], "clock_intervals": [3, 4], "presenter_notes": "Reloj fuente 28–38 min: duración compartida 600 segundos. Trabajo: Continuar defensas o una segunda comprobación breve cuando haga falta. Función del soporte: entrega. Soporte concurrente del mismo reloj fuente: no son turnos de defensa ni una secuencia adicional. Trabajo paralelo: Preparar la entrega Moodle, revisar enlaces profundos y probar permisos. Reloj fuente 38–43 min: duración compartida 300 segundos. Trabajo: Resolver defensas pendientes sin convertirlas en exposiciones. Función del soporte: entrega. Soporte concurrente del mismo reloj fuente: no son turnos de defensa ni una secuencia adicional. Trabajo paralelo: Un integrante realiza la entrega; el equipo verifica que abre correctamente.", "shared_intervals": [{"source_index": 3, "source_time": "28–38 min", "seconds": 600, "is_owner": false, "function": "moodle_delivery", "action": "Continuar defensas o una segunda comprobación breve cuando haga falta.", "concurrent": true, "parallel_work": "Preparar la entrega Moodle, revisar enlaces profundos y probar permisos."}, {"source_index": 4, "source_time": "38–43 min", "seconds": 300, "is_owner": false, "function": "moodle_delivery", "action": "Resolver defensas pendientes sin convertirlas en exposiciones.", "concurrent": true, "parallel_work": "Un integrante realiza la entrega; el equipo verifica que abre correctamente."}]}, "code_blocks": [], "representation_needs": []}</ns0:renderMetadata>
+      <ns0:renderMetadata xmlns:ns0="urn:minijarvis:semantic-render:v1">{"session": "215", "source_files": {"teacher": "/mnt/compartido/Programación-26-27/Minijarvis/02-PROFESORADO/02-SESIONES/h1/S215-defensa-y-cierre-h1-docente.md", "student_fallback": "/mnt/compartido/Programación-26-27/Minijarvis/01-ALUMNADO/03-SESIONES/h1/S215-defensa-y-cierre-h1-alumnado.md"}, "layout": "activity", "plan_index": 6, "recognition": false, "unit_ids": ["unit-19"], "roles": {"unit-19": "core"}, "source_refs": [{"source": "teacher", "heading": "Contenido de la entrega", "block_index": 19, "fragment": 0}, {"source": "teacher", "heading": "Entrega oficial Moodle y evidencias que permanecen", "block_index": 18, "fragment": 0}], "visible_sources": [{"index": 2, "sha256": "be0b1a558b8d05518c69493bb69e884f2a3eba2204b07bec61f207e62e6b6d23"}, {"index": 3, "sha256": "7ed390eede9950b824b14b7419a0687bb8f4defa8ff0f2e2892f9fc862013a8d"}], "notes_sources": [{"function": "facilitation", "heading": "Contenido de la entrega", "sha256": "229acb6cc62a3d5ce12c5a411ad9bd4c3456b64cc32e3e5b5c2ed304f06168bb"}], "relations": {"unit_relations": {"unit-19": {}}, "schedule": "concurrent_support", "source_supports_enriched": true}, "timeline_refs": [4], "composition": {"origin_slides": [16, 17, 18]}, "timing": {"seconds": 0, "allocations": [{"source_index": 4, "seconds": 0, "decision": "Intervalo compartido íntegro; propietario contable seleccionado por función de actividad y referencia timeline de unidad (identidad semántica en empates). Soporte, sin duplicación contable.  Soporte concurrente del mismo reloj fuente: no son turnos de defensa ni una secuencia adicional. Trabajo paralelo: Un integrante realiza la entrega; el equipo verifica que abre correctamente.", "source_time": "38–43 min", "source_seconds": 300, "is_owner": false, "function": "moodle_delivery"}], "clock_intervals": [4], "presenter_notes": "Reloj fuente 38–43 min: duración compartida 300 segundos. Trabajo: Resolver defensas pendientes sin convertirlas en exposiciones. Función del soporte: entrega. Soporte concurrente del mismo reloj fuente: no son turnos de defensa ni una secuencia adicional. Trabajo paralelo: Un integrante realiza la entrega; el equipo verifica que abre correctamente.", "shared_intervals": [{"source_index": 4, "source_time": "38–43 min", "seconds": 300, "is_owner": false, "function": "moodle_delivery", "action": "Resolver defensas pendientes sin convertirlas en exposiciones.", "concurrent": true, "parallel_work": "Un integrante realiza la entrega; el equipo verifica que abre correctamente."}]}, "code_blocks": [], "representation_needs": []}</ns0:renderMetadata>
     </p:ext>
   </p:extLst>
 </p:sld>
@@ -8915,13 +8954,55 @@
       </p:sp>
       <p:sp>
         <p:nvSpPr>
-          <p:cNvPr id="5" name="Acción o criterio 0" descr="Acción o criterio 0"/>
-          <p:cNvSpPr txBox="1"/>
-          <p:nvPr/>
-        </p:nvSpPr>
-        <p:spPr>
-          <a:xfrm>
-            <a:off x="640080" y="1417320"/>
+          <p:cNvPr id="5" name="Acción" descr="Acción"/>
+          <p:cNvSpPr txBox="1"/>
+          <p:nvPr/>
+        </p:nvSpPr>
+        <p:spPr>
+          <a:xfrm>
+            <a:off x="640080" y="1406652"/>
+            <a:ext cx="10881360" cy="443992"/>
+          </a:xfrm>
+          <a:prstGeom prst="rect">
+            <a:avLst/>
+          </a:prstGeom>
+          <a:noFill/>
+        </p:spPr>
+        <p:txBody>
+          <a:bodyPr wrap="square" lIns="109728" rIns="109728" tIns="73152" bIns="73152">
+            <a:noAutofit/>
+          </a:bodyPr>
+          <a:lstStyle/>
+          <a:p>
+            <a:pPr>
+              <a:lnSpc>
+                <a:spcPts val="2200"/>
+              </a:lnSpc>
+              <a:spcAft>
+                <a:spcPts val="0"/>
+              </a:spcAft>
+              <a:defRPr sz="2000" b="1">
+                <a:solidFill>
+                  <a:srgbClr val="2F5BA8"/>
+                </a:solidFill>
+                <a:latin typeface="Liberation Sans"/>
+              </a:defRPr>
+            </a:pPr>
+            <a:r>
+              <a:t>QUÉ HACER</a:t>
+            </a:r>
+          </a:p>
+        </p:txBody>
+      </p:sp>
+      <p:sp>
+        <p:nvSpPr>
+          <p:cNvPr id="6" name="Acción o criterio 0" descr="Acción o criterio 0"/>
+          <p:cNvSpPr txBox="1"/>
+          <p:nvPr/>
+        </p:nvSpPr>
+        <p:spPr>
+          <a:xfrm>
+            <a:off x="640080" y="1987804"/>
             <a:ext cx="3444240" cy="3182112"/>
           </a:xfrm>
           <a:prstGeom prst="rect">
@@ -8964,13 +9045,13 @@
       </p:sp>
       <p:sp>
         <p:nvSpPr>
-          <p:cNvPr id="6" name="Acción o criterio 1" descr="Acción o criterio 1"/>
-          <p:cNvSpPr txBox="1"/>
-          <p:nvPr/>
-        </p:nvSpPr>
-        <p:spPr>
-          <a:xfrm>
-            <a:off x="4267200" y="1417320"/>
+          <p:cNvPr id="7" name="Acción o criterio 1" descr="Acción o criterio 1"/>
+          <p:cNvSpPr txBox="1"/>
+          <p:nvPr/>
+        </p:nvSpPr>
+        <p:spPr>
+          <a:xfrm>
+            <a:off x="4267200" y="1987804"/>
             <a:ext cx="3444240" cy="3182112"/>
           </a:xfrm>
           <a:prstGeom prst="rect">
@@ -9013,13 +9094,13 @@
       </p:sp>
       <p:sp>
         <p:nvSpPr>
-          <p:cNvPr id="7" name="Acción o criterio 2" descr="Acción o criterio 2"/>
-          <p:cNvSpPr txBox="1"/>
-          <p:nvPr/>
-        </p:nvSpPr>
-        <p:spPr>
-          <a:xfrm>
-            <a:off x="7894320" y="1417320"/>
+          <p:cNvPr id="8" name="Acción o criterio 2" descr="Acción o criterio 2"/>
+          <p:cNvSpPr txBox="1"/>
+          <p:nvPr/>
+        </p:nvSpPr>
+        <p:spPr>
+          <a:xfrm>
+            <a:off x="7894320" y="1987804"/>
             <a:ext cx="3444240" cy="3182112"/>
           </a:xfrm>
           <a:prstGeom prst="rect">
@@ -9067,7 +9148,7 @@
   </p:clrMapOvr>
   <p:extLst>
     <p:ext uri="urn:minijarvis:semantic-render:v1">
-      <ns0:renderMetadata xmlns:ns0="urn:minijarvis:semantic-render:v1">{"session": "215", "source_files": {"teacher": "/mnt/compartido/Programación-26-27/Minijarvis/02-PROFESORADO/02-SESIONES/h1/S215-defensa-y-cierre-h1-docente.md", "student_fallback": "/mnt/compartido/Programación-26-27/Minijarvis/01-ALUMNADO/03-SESIONES/h1/S215-defensa-y-cierre-h1-alumnado.md"}, "layout": "code", "plan_index": 6, "recognition": false, "unit_ids": ["unit-19"], "roles": {"unit-19": "core"}, "source_refs": [{"source": "teacher", "heading": "Contenido de la entrega", "block_index": 19, "fragment": 0}, {"source": "teacher", "heading": "Entrega oficial Moodle y evidencias que permanecen", "block_index": 18, "fragment": 0}], "visible_sources": [{"index": 5, "sha256": "a85db33fc66cebd4f264783f342d2538660243160eaed8e9f02084dbdf955895"}], "notes_sources": [{"function": "facilitation", "heading": "Contenido de la entrega", "sha256": "a4e48419d03c0bd0c51938eba485efc01fde69e573d38cd0df3663bdf093cf3c"}, {"function": "facilitation", "heading": "Contenido de la entrega", "sha256": "da0b0eb0fcee35b4672096a802f80b79498b1b2b6589cf99d5d32bca6fbaeb83"}], "relations": {"unit_relations": {"unit-19": {}}, "schedule": "concurrent_support", "source_supports_enriched": true}, "timeline_refs": [3, 4], "composition": {"origin_slides": [16, 17, 18]}, "timing": {"seconds": 0, "allocations": [{"source_index": 3, "seconds": 0, "decision": "Intervalo compartido íntegro; propietario contable seleccionado por función de actividad y referencia timeline de unidad (identidad semántica en empates). Soporte, sin duplicación contable.  Soporte concurrente del mismo reloj fuente: no son turnos de defensa ni una secuencia adicional. Trabajo paralelo: Preparar la entrega Moodle, revisar enlaces profundos y probar permisos.", "source_time": "28–38 min", "source_seconds": 600, "is_owner": false, "function": "moodle_delivery"}, {"source_index": 4, "seconds": 0, "decision": "Intervalo compartido íntegro; propietario contable seleccionado por función de actividad y referencia timeline de unidad (identidad semántica en empates). Soporte, sin duplicación contable.  Soporte concurrente del mismo reloj fuente: no son turnos de defensa ni una secuencia adicional. Trabajo paralelo: Un integrante realiza la entrega; el equipo verifica que abre correctamente.", "source_time": "38–43 min", "source_seconds": 300, "is_owner": false, "function": "moodle_delivery"}], "clock_intervals": [3, 4], "presenter_notes": "Reloj fuente 28–38 min: duración compartida 600 segundos. Trabajo: Continuar defensas o una segunda comprobación breve cuando haga falta. Función del soporte: entrega. Soporte concurrente del mismo reloj fuente: no son turnos de defensa ni una secuencia adicional. Trabajo paralelo: Preparar la entrega Moodle, revisar enlaces profundos y probar permisos. Reloj fuente 38–43 min: duración compartida 300 segundos. Trabajo: Resolver defensas pendientes sin convertirlas en exposiciones. Función del soporte: entrega. Soporte concurrente del mismo reloj fuente: no son turnos de defensa ni una secuencia adicional. Trabajo paralelo: Un integrante realiza la entrega; el equipo verifica que abre correctamente.", "shared_intervals": [{"source_index": 3, "source_time": "28–38 min", "seconds": 600, "is_owner": false, "function": "moodle_delivery", "action": "Continuar defensas o una segunda comprobación breve cuando haga falta.", "concurrent": true, "parallel_work": "Preparar la entrega Moodle, revisar enlaces profundos y probar permisos."}, {"source_index": 4, "source_time": "38–43 min", "seconds": 300, "is_owner": false, "function": "moodle_delivery", "action": "Resolver defensas pendientes sin convertirlas en exposiciones.", "concurrent": true, "parallel_work": "Un integrante realiza la entrega; el equipo verifica que abre correctamente."}]}, "code_blocks": [], "representation_needs": []}</ns0:renderMetadata>
+      <ns0:renderMetadata xmlns:ns0="urn:minijarvis:semantic-render:v1">{"session": "215", "source_files": {"teacher": "/mnt/compartido/Programación-26-27/Minijarvis/02-PROFESORADO/02-SESIONES/h1/S215-defensa-y-cierre-h1-docente.md", "student_fallback": "/mnt/compartido/Programación-26-27/Minijarvis/01-ALUMNADO/03-SESIONES/h1/S215-defensa-y-cierre-h1-alumnado.md"}, "layout": "activity", "plan_index": 6, "recognition": false, "unit_ids": ["unit-19"], "roles": {"unit-19": "core"}, "source_refs": [{"source": "teacher", "heading": "Contenido de la entrega", "block_index": 19, "fragment": 0}, {"source": "teacher", "heading": "Entrega oficial Moodle y evidencias que permanecen", "block_index": 18, "fragment": 0}], "visible_sources": [{"index": 4, "sha256": "b156109651a436e3e00a21efcd498c595d310694627413b20c7ac16004c81b79"}], "notes_sources": [{"function": "facilitation", "heading": "Contenido de la entrega", "sha256": "229acb6cc62a3d5ce12c5a411ad9bd4c3456b64cc32e3e5b5c2ed304f06168bb"}], "relations": {"unit_relations": {"unit-19": {}}, "schedule": "concurrent_support", "source_supports_enriched": true}, "timeline_refs": [4], "composition": {"origin_slides": [16, 17, 18]}, "timing": {"seconds": 0, "allocations": [{"source_index": 4, "seconds": 0, "decision": "Intervalo compartido íntegro; propietario contable seleccionado por función de actividad y referencia timeline de unidad (identidad semántica en empates). Soporte, sin duplicación contable.  Soporte concurrente del mismo reloj fuente: no son turnos de defensa ni una secuencia adicional. Trabajo paralelo: Un integrante realiza la entrega; el equipo verifica que abre correctamente.", "source_time": "38–43 min", "source_seconds": 300, "is_owner": false, "function": "moodle_delivery"}], "clock_intervals": [4], "presenter_notes": "Reloj fuente 38–43 min: duración compartida 300 segundos. Trabajo: Resolver defensas pendientes sin convertirlas en exposiciones. Función del soporte: entrega. Soporte concurrente del mismo reloj fuente: no son turnos de defensa ni una secuencia adicional. Trabajo paralelo: Un integrante realiza la entrega; el equipo verifica que abre correctamente.", "shared_intervals": [{"source_index": 4, "source_time": "38–43 min", "seconds": 300, "is_owner": false, "function": "moodle_delivery", "action": "Resolver defensas pendientes sin convertirlas en exposiciones.", "concurrent": true, "parallel_work": "Un integrante realiza la entrega; el equipo verifica que abre correctamente."}]}, "code_blocks": [], "representation_needs": []}</ns0:renderMetadata>
     </p:ext>
   </p:extLst>
 </p:sld>
@@ -9216,13 +9297,55 @@
       </p:sp>
       <p:sp>
         <p:nvSpPr>
-          <p:cNvPr id="5" name="Acción o criterio 0" descr="Acción o criterio 0"/>
-          <p:cNvSpPr txBox="1"/>
-          <p:nvPr/>
-        </p:nvSpPr>
-        <p:spPr>
-          <a:xfrm>
-            <a:off x="640080" y="1417320"/>
+          <p:cNvPr id="5" name="Acción" descr="Acción"/>
+          <p:cNvSpPr txBox="1"/>
+          <p:nvPr/>
+        </p:nvSpPr>
+        <p:spPr>
+          <a:xfrm>
+            <a:off x="640080" y="1406652"/>
+            <a:ext cx="10881360" cy="443992"/>
+          </a:xfrm>
+          <a:prstGeom prst="rect">
+            <a:avLst/>
+          </a:prstGeom>
+          <a:noFill/>
+        </p:spPr>
+        <p:txBody>
+          <a:bodyPr wrap="square" lIns="109728" rIns="109728" tIns="73152" bIns="73152">
+            <a:noAutofit/>
+          </a:bodyPr>
+          <a:lstStyle/>
+          <a:p>
+            <a:pPr>
+              <a:lnSpc>
+                <a:spcPts val="2200"/>
+              </a:lnSpc>
+              <a:spcAft>
+                <a:spcPts val="0"/>
+              </a:spcAft>
+              <a:defRPr sz="2000" b="1">
+                <a:solidFill>
+                  <a:srgbClr val="2F5BA8"/>
+                </a:solidFill>
+                <a:latin typeface="Liberation Sans"/>
+              </a:defRPr>
+            </a:pPr>
+            <a:r>
+              <a:t>QUÉ HACER</a:t>
+            </a:r>
+          </a:p>
+        </p:txBody>
+      </p:sp>
+      <p:sp>
+        <p:nvSpPr>
+          <p:cNvPr id="6" name="Acción o criterio 0" descr="Acción o criterio 0"/>
+          <p:cNvSpPr txBox="1"/>
+          <p:nvPr/>
+        </p:nvSpPr>
+        <p:spPr>
+          <a:xfrm>
+            <a:off x="640080" y="1987804"/>
             <a:ext cx="3444240" cy="2511552"/>
           </a:xfrm>
           <a:prstGeom prst="rect">
@@ -9258,20 +9381,20 @@
               </a:defRPr>
             </a:pPr>
             <a:r>
-              <a:t>Moodle: contiene la entrega oficial breve con los enlaces canónicos y la confirmación de permisos.</a:t>
-            </a:r>
-          </a:p>
-        </p:txBody>
-      </p:sp>
-      <p:sp>
-        <p:nvSpPr>
-          <p:cNvPr id="6" name="Acción o criterio 1" descr="Acción o criterio 1"/>
-          <p:cNvSpPr txBox="1"/>
-          <p:nvPr/>
-        </p:nvSpPr>
-        <p:spPr>
-          <a:xfrm>
-            <a:off x="4267200" y="1417320"/>
+              <a:t>Moodle: identifica la versión evaluada y confirma las fuentes estables sin volver a copiar sus URLs.</a:t>
+            </a:r>
+          </a:p>
+        </p:txBody>
+      </p:sp>
+      <p:sp>
+        <p:nvSpPr>
+          <p:cNvPr id="7" name="Acción o criterio 1" descr="Acción o criterio 1"/>
+          <p:cNvSpPr txBox="1"/>
+          <p:nvPr/>
+        </p:nvSpPr>
+        <p:spPr>
+          <a:xfrm>
+            <a:off x="4267200" y="1987804"/>
             <a:ext cx="3444240" cy="2511552"/>
           </a:xfrm>
           <a:prstGeom prst="rect">
@@ -9314,13 +9437,13 @@
       </p:sp>
       <p:sp>
         <p:nvSpPr>
-          <p:cNvPr id="7" name="Acción o criterio 2" descr="Acción o criterio 2"/>
-          <p:cNvSpPr txBox="1"/>
-          <p:nvPr/>
-        </p:nvSpPr>
-        <p:spPr>
-          <a:xfrm>
-            <a:off x="7894320" y="1417320"/>
+          <p:cNvPr id="8" name="Acción o criterio 2" descr="Acción o criterio 2"/>
+          <p:cNvSpPr txBox="1"/>
+          <p:nvPr/>
+        </p:nvSpPr>
+        <p:spPr>
+          <a:xfrm>
+            <a:off x="7894320" y="1987804"/>
             <a:ext cx="3444240" cy="2511552"/>
           </a:xfrm>
           <a:prstGeom prst="rect">
@@ -9361,48 +9484,6 @@
           </a:p>
         </p:txBody>
       </p:sp>
-      <p:sp>
-        <p:nvSpPr>
-          <p:cNvPr id="8" name="Contenido" descr="Contenido"/>
-          <p:cNvSpPr txBox="1"/>
-          <p:nvPr/>
-        </p:nvSpPr>
-        <p:spPr>
-          <a:xfrm>
-            <a:off x="640080" y="4020312"/>
-            <a:ext cx="10881360" cy="1729232"/>
-          </a:xfrm>
-          <a:prstGeom prst="rect">
-            <a:avLst/>
-          </a:prstGeom>
-          <a:noFill/>
-        </p:spPr>
-        <p:txBody>
-          <a:bodyPr wrap="square" lIns="109728" rIns="109728" tIns="73152" bIns="73152">
-            <a:noAutofit/>
-          </a:bodyPr>
-          <a:lstStyle/>
-          <a:p>
-            <a:pPr>
-              <a:lnSpc>
-                <a:spcPts val="3080"/>
-              </a:lnSpc>
-              <a:spcAft>
-                <a:spcPts val="0"/>
-              </a:spcAft>
-              <a:defRPr sz="2800" b="0">
-                <a:solidFill>
-                  <a:srgbClr val="1C2330"/>
-                </a:solidFill>
-                <a:latin typeface="Liberation Sans"/>
-              </a:defRPr>
-            </a:pPr>
-            <a:r>
-              <a:t>No se adjuntan capturas, formularios, portfolios, documentos de ejecución ni copias separadas de pruebas cuando GitHub y README ya permiten localizarlas.</a:t>
-            </a:r>
-          </a:p>
-        </p:txBody>
-      </p:sp>
     </p:spTree>
   </p:cSld>
   <p:clrMapOvr>
@@ -9410,7 +9491,7 @@
   </p:clrMapOvr>
   <p:extLst>
     <p:ext uri="urn:minijarvis:semantic-render:v1">
-      <ns0:renderMetadata xmlns:ns0="urn:minijarvis:semantic-render:v1">{"session": "215", "source_files": {"teacher": "/mnt/compartido/Programación-26-27/Minijarvis/02-PROFESORADO/02-SESIONES/h1/S215-defensa-y-cierre-h1-docente.md", "student_fallback": "/mnt/compartido/Programación-26-27/Minijarvis/01-ALUMNADO/03-SESIONES/h1/S215-defensa-y-cierre-h1-alumnado.md"}, "layout": "code", "plan_index": 6, "recognition": false, "unit_ids": ["unit-19"], "roles": {"unit-19": "core"}, "source_refs": [{"source": "teacher", "heading": "Contenido de la entrega", "block_index": 19, "fragment": 0}, {"source": "teacher", "heading": "Entrega oficial Moodle y evidencias que permanecen", "block_index": 18, "fragment": 0}], "visible_sources": [{"index": 5, "sha256": "a85db33fc66cebd4f264783f342d2538660243160eaed8e9f02084dbdf955895"}, {"index": 6, "sha256": "ce896f16b019d19657752fd482af0e5f45509b5e913d95e71c02a2567ab03ede"}], "notes_sources": [{"function": "facilitation", "heading": "Contenido de la entrega", "sha256": "a4e48419d03c0bd0c51938eba485efc01fde69e573d38cd0df3663bdf093cf3c"}, {"function": "facilitation", "heading": "Contenido de la entrega", "sha256": "da0b0eb0fcee35b4672096a802f80b79498b1b2b6589cf99d5d32bca6fbaeb83"}], "relations": {"unit_relations": {"unit-19": {}}, "schedule": "concurrent_support", "source_supports_enriched": true}, "timeline_refs": [3, 4], "composition": {"origin_slides": [16, 17, 18]}, "timing": {"seconds": 0, "allocations": [{"source_index": 3, "seconds": 0, "decision": "Intervalo compartido íntegro; propietario contable seleccionado por función de actividad y referencia timeline de unidad (identidad semántica en empates). Soporte, sin duplicación contable.  Soporte concurrente del mismo reloj fuente: no son turnos de defensa ni una secuencia adicional. Trabajo paralelo: Preparar la entrega Moodle, revisar enlaces profundos y probar permisos.", "source_time": "28–38 min", "source_seconds": 600, "is_owner": false, "function": "moodle_delivery"}, {"source_index": 4, "seconds": 0, "decision": "Intervalo compartido íntegro; propietario contable seleccionado por función de actividad y referencia timeline de unidad (identidad semántica en empates). Soporte, sin duplicación contable.  Soporte concurrente del mismo reloj fuente: no son turnos de defensa ni una secuencia adicional. Trabajo paralelo: Un integrante realiza la entrega; el equipo verifica que abre correctamente.", "source_time": "38–43 min", "source_seconds": 300, "is_owner": false, "function": "moodle_delivery"}], "clock_intervals": [3, 4], "presenter_notes": "Reloj fuente 28–38 min: duración compartida 600 segundos. Trabajo: Continuar defensas o una segunda comprobación breve cuando haga falta. Función del soporte: entrega. Soporte concurrente del mismo reloj fuente: no son turnos de defensa ni una secuencia adicional. Trabajo paralelo: Preparar la entrega Moodle, revisar enlaces profundos y probar permisos. Reloj fuente 38–43 min: duración compartida 300 segundos. Trabajo: Resolver defensas pendientes sin convertirlas en exposiciones. Función del soporte: entrega. Soporte concurrente del mismo reloj fuente: no son turnos de defensa ni una secuencia adicional. Trabajo paralelo: Un integrante realiza la entrega; el equipo verifica que abre correctamente.", "shared_intervals": [{"source_index": 3, "source_time": "28–38 min", "seconds": 600, "is_owner": false, "function": "moodle_delivery", "action": "Continuar defensas o una segunda comprobación breve cuando haga falta.", "concurrent": true, "parallel_work": "Preparar la entrega Moodle, revisar enlaces profundos y probar permisos."}, {"source_index": 4, "source_time": "38–43 min", "seconds": 300, "is_owner": false, "function": "moodle_delivery", "action": "Resolver defensas pendientes sin convertirlas en exposiciones.", "concurrent": true, "parallel_work": "Un integrante realiza la entrega; el equipo verifica que abre correctamente."}]}, "code_blocks": [], "representation_needs": []}</ns0:renderMetadata>
+      <ns0:renderMetadata xmlns:ns0="urn:minijarvis:semantic-render:v1">{"session": "215", "source_files": {"teacher": "/mnt/compartido/Programación-26-27/Minijarvis/02-PROFESORADO/02-SESIONES/h1/S215-defensa-y-cierre-h1-docente.md", "student_fallback": "/mnt/compartido/Programación-26-27/Minijarvis/01-ALUMNADO/03-SESIONES/h1/S215-defensa-y-cierre-h1-alumnado.md"}, "layout": "activity", "plan_index": 6, "recognition": false, "unit_ids": ["unit-19"], "roles": {"unit-19": "core"}, "source_refs": [{"source": "teacher", "heading": "Contenido de la entrega", "block_index": 19, "fragment": 0}, {"source": "teacher", "heading": "Entrega oficial Moodle y evidencias que permanecen", "block_index": 18, "fragment": 0}], "visible_sources": [{"index": 4, "sha256": "b156109651a436e3e00a21efcd498c595d310694627413b20c7ac16004c81b79"}], "notes_sources": [{"function": "facilitation", "heading": "Contenido de la entrega", "sha256": "229acb6cc62a3d5ce12c5a411ad9bd4c3456b64cc32e3e5b5c2ed304f06168bb"}], "relations": {"unit_relations": {"unit-19": {}}, "schedule": "concurrent_support", "source_supports_enriched": true}, "timeline_refs": [4], "composition": {"origin_slides": [16, 17, 18]}, "timing": {"seconds": 0, "allocations": [{"source_index": 4, "seconds": 0, "decision": "Intervalo compartido íntegro; propietario contable seleccionado por función de actividad y referencia timeline de unidad (identidad semántica en empates). Soporte, sin duplicación contable.  Soporte concurrente del mismo reloj fuente: no son turnos de defensa ni una secuencia adicional. Trabajo paralelo: Un integrante realiza la entrega; el equipo verifica que abre correctamente.", "source_time": "38–43 min", "source_seconds": 300, "is_owner": false, "function": "moodle_delivery"}], "clock_intervals": [4], "presenter_notes": "Reloj fuente 38–43 min: duración compartida 300 segundos. Trabajo: Resolver defensas pendientes sin convertirlas en exposiciones. Función del soporte: entrega. Soporte concurrente del mismo reloj fuente: no son turnos de defensa ni una secuencia adicional. Trabajo paralelo: Un integrante realiza la entrega; el equipo verifica que abre correctamente.", "shared_intervals": [{"source_index": 4, "source_time": "38–43 min", "seconds": 300, "is_owner": false, "function": "moodle_delivery", "action": "Resolver defensas pendientes sin convertirlas en exposiciones.", "concurrent": true, "parallel_work": "Un integrante realiza la entrega; el equipo verifica que abre correctamente."}]}, "code_blocks": [], "representation_needs": []}</ns0:renderMetadata>
     </p:ext>
   </p:extLst>
 </p:sld>
@@ -9510,7 +9591,7 @@
               </a:defRPr>
             </a:pPr>
             <a:r>
-              <a:t>Comprobación de enlaces y permisos</a:t>
+              <a:t>Contenido de la entrega</a:t>
             </a:r>
           </a:p>
         </p:txBody>
@@ -9601,41 +9682,34 @@
       </p:sp>
       <p:sp>
         <p:nvSpPr>
-          <p:cNvPr id="6" name="Acción o criterio 0" descr="Acción o criterio 0"/>
+          <p:cNvPr id="6" name="Contenido" descr="Contenido"/>
           <p:cNvSpPr txBox="1"/>
           <p:nvPr/>
         </p:nvSpPr>
         <p:spPr>
           <a:xfrm>
             <a:off x="640080" y="1987804"/>
-            <a:ext cx="5257800" cy="1170432"/>
-          </a:xfrm>
-          <a:prstGeom prst="rect">
-            <a:avLst/>
-          </a:prstGeom>
-          <a:solidFill>
-            <a:srgbClr val="FFFFFF"/>
-          </a:solidFill>
-          <a:ln>
-            <a:solidFill>
-              <a:srgbClr val="2F5BA8"/>
-            </a:solidFill>
-          </a:ln>
-        </p:spPr>
-        <p:txBody>
-          <a:bodyPr wrap="square" lIns="109728" rIns="109728" tIns="73152" bIns="73152">
-            <a:noAutofit/>
-          </a:bodyPr>
-          <a:lstStyle/>
-          <a:p>
-            <a:pPr>
-              <a:lnSpc>
-                <a:spcPts val="2640"/>
-              </a:lnSpc>
-              <a:spcAft>
-                <a:spcPts val="0"/>
-              </a:spcAft>
-              <a:defRPr sz="2400" b="0">
+            <a:ext cx="10881360" cy="1729232"/>
+          </a:xfrm>
+          <a:prstGeom prst="rect">
+            <a:avLst/>
+          </a:prstGeom>
+          <a:noFill/>
+        </p:spPr>
+        <p:txBody>
+          <a:bodyPr wrap="square" lIns="109728" rIns="109728" tIns="73152" bIns="73152">
+            <a:noAutofit/>
+          </a:bodyPr>
+          <a:lstStyle/>
+          <a:p>
+            <a:pPr>
+              <a:lnSpc>
+                <a:spcPts val="3080"/>
+              </a:lnSpc>
+              <a:spcAft>
+                <a:spcPts val="0"/>
+              </a:spcAft>
+              <a:defRPr sz="2800" b="0">
                 <a:solidFill>
                   <a:srgbClr val="1C2330"/>
                 </a:solidFill>
@@ -9643,203 +9717,7 @@
               </a:defRPr>
             </a:pPr>
             <a:r>
-              <a:t>abre cada enlace profundo, no solo la carpeta o página inicial;</a:t>
-            </a:r>
-          </a:p>
-        </p:txBody>
-      </p:sp>
-      <p:sp>
-        <p:nvSpPr>
-          <p:cNvPr id="7" name="Acción o criterio 1" descr="Acción o criterio 1"/>
-          <p:cNvSpPr txBox="1"/>
-          <p:nvPr/>
-        </p:nvSpPr>
-        <p:spPr>
-          <a:xfrm>
-            <a:off x="6080760" y="1987804"/>
-            <a:ext cx="5257800" cy="1170432"/>
-          </a:xfrm>
-          <a:prstGeom prst="rect">
-            <a:avLst/>
-          </a:prstGeom>
-          <a:solidFill>
-            <a:srgbClr val="FFFFFF"/>
-          </a:solidFill>
-          <a:ln>
-            <a:solidFill>
-              <a:srgbClr val="2F5BA8"/>
-            </a:solidFill>
-          </a:ln>
-        </p:spPr>
-        <p:txBody>
-          <a:bodyPr wrap="square" lIns="109728" rIns="109728" tIns="73152" bIns="73152">
-            <a:noAutofit/>
-          </a:bodyPr>
-          <a:lstStyle/>
-          <a:p>
-            <a:pPr>
-              <a:lnSpc>
-                <a:spcPts val="2640"/>
-              </a:lnSpc>
-              <a:spcAft>
-                <a:spcPts val="0"/>
-              </a:spcAft>
-              <a:defRPr sz="2400" b="0">
-                <a:solidFill>
-                  <a:srgbClr val="1C2330"/>
-                </a:solidFill>
-                <a:latin typeface="Liberation Sans"/>
-              </a:defRPr>
-            </a:pPr>
-            <a:r>
-              <a:t>pruébalo en una ventana privada, con otra cuenta o mediante otra persona;</a:t>
-            </a:r>
-          </a:p>
-        </p:txBody>
-      </p:sp>
-      <p:sp>
-        <p:nvSpPr>
-          <p:cNvPr id="8" name="Acción o criterio 2" descr="Acción o criterio 2"/>
-          <p:cNvSpPr txBox="1"/>
-          <p:nvPr/>
-        </p:nvSpPr>
-        <p:spPr>
-          <a:xfrm>
-            <a:off x="640080" y="3249676"/>
-            <a:ext cx="5257800" cy="1170432"/>
-          </a:xfrm>
-          <a:prstGeom prst="rect">
-            <a:avLst/>
-          </a:prstGeom>
-          <a:solidFill>
-            <a:srgbClr val="FFFFFF"/>
-          </a:solidFill>
-          <a:ln>
-            <a:solidFill>
-              <a:srgbClr val="2F5BA8"/>
-            </a:solidFill>
-          </a:ln>
-        </p:spPr>
-        <p:txBody>
-          <a:bodyPr wrap="square" lIns="109728" rIns="109728" tIns="73152" bIns="73152">
-            <a:noAutofit/>
-          </a:bodyPr>
-          <a:lstStyle/>
-          <a:p>
-            <a:pPr>
-              <a:lnSpc>
-                <a:spcPts val="2640"/>
-              </a:lnSpc>
-              <a:spcAft>
-                <a:spcPts val="0"/>
-              </a:spcAft>
-              <a:defRPr sz="2400" b="0">
-                <a:solidFill>
-                  <a:srgbClr val="1C2330"/>
-                </a:solidFill>
-                <a:latin typeface="Liberation Sans"/>
-              </a:defRPr>
-            </a:pPr>
-            <a:r>
-              <a:t>comprueba que el repositorio y el README son accesibles;</a:t>
-            </a:r>
-          </a:p>
-        </p:txBody>
-      </p:sp>
-      <p:sp>
-        <p:nvSpPr>
-          <p:cNvPr id="9" name="Acción o criterio 3" descr="Acción o criterio 3"/>
-          <p:cNvSpPr txBox="1"/>
-          <p:nvPr/>
-        </p:nvSpPr>
-        <p:spPr>
-          <a:xfrm>
-            <a:off x="6080760" y="3249676"/>
-            <a:ext cx="5257800" cy="1170432"/>
-          </a:xfrm>
-          <a:prstGeom prst="rect">
-            <a:avLst/>
-          </a:prstGeom>
-          <a:solidFill>
-            <a:srgbClr val="FFFFFF"/>
-          </a:solidFill>
-          <a:ln>
-            <a:solidFill>
-              <a:srgbClr val="2F5BA8"/>
-            </a:solidFill>
-          </a:ln>
-        </p:spPr>
-        <p:txBody>
-          <a:bodyPr wrap="square" lIns="109728" rIns="109728" tIns="73152" bIns="73152">
-            <a:noAutofit/>
-          </a:bodyPr>
-          <a:lstStyle/>
-          <a:p>
-            <a:pPr>
-              <a:lnSpc>
-                <a:spcPts val="2640"/>
-              </a:lnSpc>
-              <a:spcAft>
-                <a:spcPts val="0"/>
-              </a:spcAft>
-              <a:defRPr sz="2400" b="0">
-                <a:solidFill>
-                  <a:srgbClr val="1C2330"/>
-                </a:solidFill>
-                <a:latin typeface="Liberation Sans"/>
-              </a:defRPr>
-            </a:pPr>
-            <a:r>
-              <a:t>verifica el enlace a Scrum únicamente si se incluye;</a:t>
-            </a:r>
-          </a:p>
-        </p:txBody>
-      </p:sp>
-      <p:sp>
-        <p:nvSpPr>
-          <p:cNvPr id="10" name="Acción o criterio 4" descr="Acción o criterio 4"/>
-          <p:cNvSpPr txBox="1"/>
-          <p:nvPr/>
-        </p:nvSpPr>
-        <p:spPr>
-          <a:xfrm>
-            <a:off x="640080" y="4511548"/>
-            <a:ext cx="5257800" cy="1170432"/>
-          </a:xfrm>
-          <a:prstGeom prst="rect">
-            <a:avLst/>
-          </a:prstGeom>
-          <a:solidFill>
-            <a:srgbClr val="FFFFFF"/>
-          </a:solidFill>
-          <a:ln>
-            <a:solidFill>
-              <a:srgbClr val="2F5BA8"/>
-            </a:solidFill>
-          </a:ln>
-        </p:spPr>
-        <p:txBody>
-          <a:bodyPr wrap="square" lIns="109728" rIns="109728" tIns="73152" bIns="73152">
-            <a:noAutofit/>
-          </a:bodyPr>
-          <a:lstStyle/>
-          <a:p>
-            <a:pPr>
-              <a:lnSpc>
-                <a:spcPts val="2640"/>
-              </a:lnSpc>
-              <a:spcAft>
-                <a:spcPts val="0"/>
-              </a:spcAft>
-              <a:defRPr sz="2400" b="0">
-                <a:solidFill>
-                  <a:srgbClr val="1C2330"/>
-                </a:solidFill>
-                <a:latin typeface="Liberation Sans"/>
-              </a:defRPr>
-            </a:pPr>
-            <a:r>
-              <a:t>marca Permisos comprobados: sí solo después de la prueba.</a:t>
+              <a:t>No se adjuntan capturas, formularios, portfolios, documentos de ejecución ni copias separadas de pruebas cuando GitHub y README ya permiten localizarlas.</a:t>
             </a:r>
           </a:p>
         </p:txBody>
@@ -9851,7 +9729,7 @@
   </p:clrMapOvr>
   <p:extLst>
     <p:ext uri="urn:minijarvis:semantic-render:v1">
-      <ns0:renderMetadata xmlns:ns0="urn:minijarvis:semantic-render:v1">{"session": "215", "source_files": {"teacher": "/mnt/compartido/Programación-26-27/Minijarvis/02-PROFESORADO/02-SESIONES/h1/S215-defensa-y-cierre-h1-docente.md", "student_fallback": "/mnt/compartido/Programación-26-27/Minijarvis/01-ALUMNADO/03-SESIONES/h1/S215-defensa-y-cierre-h1-alumnado.md"}, "layout": "activity", "plan_index": 6, "recognition": false, "unit_ids": ["unit-20"], "roles": {"unit-20": "core"}, "source_refs": [{"source": "teacher", "heading": "Comprobación de enlaces y permisos", "block_index": 20, "fragment": 0}, {"source": "teacher", "heading": "Entrega oficial Moodle y evidencias que permanecen", "block_index": 18, "fragment": 0}], "visible_sources": [{"index": 8, "sha256": "f083514fbc7b6a59b2ada33130dd3644e0beefa4f858ad71882b8a93d369162b"}], "notes_sources": [{"function": "facilitation", "heading": "Comprobación de enlaces y permisos", "sha256": "503dd2b369e2483fbe975e82688bd45870c1fecd49c63f6806c5c9f64cbd4452"}], "relations": {"unit_relations": {"unit-20": {}}, "schedule": "concurrent_support", "source_supports_enriched": true}, "timeline_refs": [3], "composition": {"origin_slides": [19]}, "timing": {"seconds": 0, "allocations": [{"source_index": 3, "seconds": 0, "decision": "Intervalo compartido íntegro; propietario contable seleccionado por función de actividad y referencia timeline de unidad (identidad semántica en empates). Soporte, sin duplicación contable.  Soporte concurrente del mismo reloj fuente: no son turnos de defensa ni una secuencia adicional. Trabajo paralelo: Preparar la entrega Moodle, revisar enlaces profundos y probar permisos.", "source_time": "28–38 min", "source_seconds": 600, "is_owner": false, "function": "concept"}], "clock_intervals": [3], "presenter_notes": "Reloj fuente 28–38 min: duración compartida 600 segundos. Trabajo: Continuar defensas o una segunda comprobación breve cuando haga falta. Función del soporte: explicación. Soporte concurrente del mismo reloj fuente: no son turnos de defensa ni una secuencia adicional. Trabajo paralelo: Preparar la entrega Moodle, revisar enlaces profundos y probar permisos.", "shared_intervals": [{"source_index": 3, "source_time": "28–38 min", "seconds": 600, "is_owner": false, "function": "concept", "action": "Continuar defensas o una segunda comprobación breve cuando haga falta.", "concurrent": true, "parallel_work": "Preparar la entrega Moodle, revisar enlaces profundos y probar permisos."}]}, "code_blocks": [], "representation_needs": []}</ns0:renderMetadata>
+      <ns0:renderMetadata xmlns:ns0="urn:minijarvis:semantic-render:v1">{"session": "215", "source_files": {"teacher": "/mnt/compartido/Programación-26-27/Minijarvis/02-PROFESORADO/02-SESIONES/h1/S215-defensa-y-cierre-h1-docente.md", "student_fallback": "/mnt/compartido/Programación-26-27/Minijarvis/01-ALUMNADO/03-SESIONES/h1/S215-defensa-y-cierre-h1-alumnado.md"}, "layout": "activity", "plan_index": 6, "recognition": false, "unit_ids": ["unit-19"], "roles": {"unit-19": "core"}, "source_refs": [{"source": "teacher", "heading": "Contenido de la entrega", "block_index": 19, "fragment": 0}, {"source": "teacher", "heading": "Entrega oficial Moodle y evidencias que permanecen", "block_index": 18, "fragment": 0}], "visible_sources": [{"index": 5, "sha256": "ce896f16b019d19657752fd482af0e5f45509b5e913d95e71c02a2567ab03ede"}], "notes_sources": [{"function": "facilitation", "heading": "Contenido de la entrega", "sha256": "229acb6cc62a3d5ce12c5a411ad9bd4c3456b64cc32e3e5b5c2ed304f06168bb"}], "relations": {"unit_relations": {"unit-19": {}}, "schedule": "concurrent_support", "source_supports_enriched": true}, "timeline_refs": [4], "composition": {"origin_slides": [16, 17, 18]}, "timing": {"seconds": 0, "allocations": [{"source_index": 4, "seconds": 0, "decision": "Intervalo compartido íntegro; propietario contable seleccionado por función de actividad y referencia timeline de unidad (identidad semántica en empates). Soporte, sin duplicación contable.  Soporte concurrente del mismo reloj fuente: no son turnos de defensa ni una secuencia adicional. Trabajo paralelo: Un integrante realiza la entrega; el equipo verifica que abre correctamente.", "source_time": "38–43 min", "source_seconds": 300, "is_owner": false, "function": "moodle_delivery"}], "clock_intervals": [4], "presenter_notes": "Reloj fuente 38–43 min: duración compartida 300 segundos. Trabajo: Resolver defensas pendientes sin convertirlas en exposiciones. Función del soporte: entrega. Soporte concurrente del mismo reloj fuente: no son turnos de defensa ni una secuencia adicional. Trabajo paralelo: Un integrante realiza la entrega; el equipo verifica que abre correctamente.", "shared_intervals": [{"source_index": 4, "source_time": "38–43 min", "seconds": 300, "is_owner": false, "function": "moodle_delivery", "action": "Resolver defensas pendientes sin convertirlas en exposiciones.", "concurrent": true, "parallel_work": "Un integrante realiza la entrega; el equipo verifica que abre correctamente."}]}, "code_blocks": [], "representation_needs": []}</ns0:renderMetadata>
     </p:ext>
   </p:extLst>
 </p:sld>
@@ -10042,34 +9920,41 @@
       </p:sp>
       <p:sp>
         <p:nvSpPr>
-          <p:cNvPr id="6" name="Contenido" descr="Contenido"/>
+          <p:cNvPr id="6" name="Acción o criterio 0" descr="Acción o criterio 0"/>
           <p:cNvSpPr txBox="1"/>
           <p:nvPr/>
         </p:nvSpPr>
         <p:spPr>
           <a:xfrm>
             <a:off x="640080" y="1987804"/>
-            <a:ext cx="10881360" cy="946912"/>
-          </a:xfrm>
-          <a:prstGeom prst="rect">
-            <a:avLst/>
-          </a:prstGeom>
-          <a:noFill/>
-        </p:spPr>
-        <p:txBody>
-          <a:bodyPr wrap="square" lIns="109728" rIns="109728" tIns="73152" bIns="73152">
-            <a:noAutofit/>
-          </a:bodyPr>
-          <a:lstStyle/>
-          <a:p>
-            <a:pPr>
-              <a:lnSpc>
-                <a:spcPts val="3080"/>
-              </a:lnSpc>
-              <a:spcAft>
-                <a:spcPts val="0"/>
-              </a:spcAft>
-              <a:defRPr sz="2800" b="0">
+            <a:ext cx="5257800" cy="1170432"/>
+          </a:xfrm>
+          <a:prstGeom prst="rect">
+            <a:avLst/>
+          </a:prstGeom>
+          <a:solidFill>
+            <a:srgbClr val="FFFFFF"/>
+          </a:solidFill>
+          <a:ln>
+            <a:solidFill>
+              <a:srgbClr val="2F5BA8"/>
+            </a:solidFill>
+          </a:ln>
+        </p:spPr>
+        <p:txBody>
+          <a:bodyPr wrap="square" lIns="109728" rIns="109728" tIns="73152" bIns="73152">
+            <a:noAutofit/>
+          </a:bodyPr>
+          <a:lstStyle/>
+          <a:p>
+            <a:pPr>
+              <a:lnSpc>
+                <a:spcPts val="2640"/>
+              </a:lnSpc>
+              <a:spcAft>
+                <a:spcPts val="0"/>
+              </a:spcAft>
+              <a:defRPr sz="2400" b="0">
                 <a:solidFill>
                   <a:srgbClr val="1C2330"/>
                 </a:solidFill>
@@ -10077,7 +9962,203 @@
               </a:defRPr>
             </a:pPr>
             <a:r>
-              <a:t>Esta comprobación es una acción, no un documento nuevo.</a:t>
+              <a:t>abre cada enlace profundo, no solo la carpeta o página inicial;</a:t>
+            </a:r>
+          </a:p>
+        </p:txBody>
+      </p:sp>
+      <p:sp>
+        <p:nvSpPr>
+          <p:cNvPr id="7" name="Acción o criterio 1" descr="Acción o criterio 1"/>
+          <p:cNvSpPr txBox="1"/>
+          <p:nvPr/>
+        </p:nvSpPr>
+        <p:spPr>
+          <a:xfrm>
+            <a:off x="6080760" y="1987804"/>
+            <a:ext cx="5257800" cy="1170432"/>
+          </a:xfrm>
+          <a:prstGeom prst="rect">
+            <a:avLst/>
+          </a:prstGeom>
+          <a:solidFill>
+            <a:srgbClr val="FFFFFF"/>
+          </a:solidFill>
+          <a:ln>
+            <a:solidFill>
+              <a:srgbClr val="2F5BA8"/>
+            </a:solidFill>
+          </a:ln>
+        </p:spPr>
+        <p:txBody>
+          <a:bodyPr wrap="square" lIns="109728" rIns="109728" tIns="73152" bIns="73152">
+            <a:noAutofit/>
+          </a:bodyPr>
+          <a:lstStyle/>
+          <a:p>
+            <a:pPr>
+              <a:lnSpc>
+                <a:spcPts val="2640"/>
+              </a:lnSpc>
+              <a:spcAft>
+                <a:spcPts val="0"/>
+              </a:spcAft>
+              <a:defRPr sz="2400" b="0">
+                <a:solidFill>
+                  <a:srgbClr val="1C2330"/>
+                </a:solidFill>
+                <a:latin typeface="Liberation Sans"/>
+              </a:defRPr>
+            </a:pPr>
+            <a:r>
+              <a:t>pruébalo en una ventana privada, con otra cuenta o mediante otra persona;</a:t>
+            </a:r>
+          </a:p>
+        </p:txBody>
+      </p:sp>
+      <p:sp>
+        <p:nvSpPr>
+          <p:cNvPr id="8" name="Acción o criterio 2" descr="Acción o criterio 2"/>
+          <p:cNvSpPr txBox="1"/>
+          <p:nvPr/>
+        </p:nvSpPr>
+        <p:spPr>
+          <a:xfrm>
+            <a:off x="640080" y="3249676"/>
+            <a:ext cx="5257800" cy="1170432"/>
+          </a:xfrm>
+          <a:prstGeom prst="rect">
+            <a:avLst/>
+          </a:prstGeom>
+          <a:solidFill>
+            <a:srgbClr val="FFFFFF"/>
+          </a:solidFill>
+          <a:ln>
+            <a:solidFill>
+              <a:srgbClr val="2F5BA8"/>
+            </a:solidFill>
+          </a:ln>
+        </p:spPr>
+        <p:txBody>
+          <a:bodyPr wrap="square" lIns="109728" rIns="109728" tIns="73152" bIns="73152">
+            <a:noAutofit/>
+          </a:bodyPr>
+          <a:lstStyle/>
+          <a:p>
+            <a:pPr>
+              <a:lnSpc>
+                <a:spcPts val="2640"/>
+              </a:lnSpc>
+              <a:spcAft>
+                <a:spcPts val="0"/>
+              </a:spcAft>
+              <a:defRPr sz="2400" b="0">
+                <a:solidFill>
+                  <a:srgbClr val="1C2330"/>
+                </a:solidFill>
+                <a:latin typeface="Liberation Sans"/>
+              </a:defRPr>
+            </a:pPr>
+            <a:r>
+              <a:t>comprueba que el repositorio y el README son accesibles;</a:t>
+            </a:r>
+          </a:p>
+        </p:txBody>
+      </p:sp>
+      <p:sp>
+        <p:nvSpPr>
+          <p:cNvPr id="9" name="Acción o criterio 3" descr="Acción o criterio 3"/>
+          <p:cNvSpPr txBox="1"/>
+          <p:nvPr/>
+        </p:nvSpPr>
+        <p:spPr>
+          <a:xfrm>
+            <a:off x="6080760" y="3249676"/>
+            <a:ext cx="5257800" cy="1170432"/>
+          </a:xfrm>
+          <a:prstGeom prst="rect">
+            <a:avLst/>
+          </a:prstGeom>
+          <a:solidFill>
+            <a:srgbClr val="FFFFFF"/>
+          </a:solidFill>
+          <a:ln>
+            <a:solidFill>
+              <a:srgbClr val="2F5BA8"/>
+            </a:solidFill>
+          </a:ln>
+        </p:spPr>
+        <p:txBody>
+          <a:bodyPr wrap="square" lIns="109728" rIns="109728" tIns="73152" bIns="73152">
+            <a:noAutofit/>
+          </a:bodyPr>
+          <a:lstStyle/>
+          <a:p>
+            <a:pPr>
+              <a:lnSpc>
+                <a:spcPts val="2640"/>
+              </a:lnSpc>
+              <a:spcAft>
+                <a:spcPts val="0"/>
+              </a:spcAft>
+              <a:defRPr sz="2400" b="0">
+                <a:solidFill>
+                  <a:srgbClr val="1C2330"/>
+                </a:solidFill>
+                <a:latin typeface="Liberation Sans"/>
+              </a:defRPr>
+            </a:pPr>
+            <a:r>
+              <a:t>verifica el enlace a Scrum únicamente si se incluye;</a:t>
+            </a:r>
+          </a:p>
+        </p:txBody>
+      </p:sp>
+      <p:sp>
+        <p:nvSpPr>
+          <p:cNvPr id="10" name="Acción o criterio 4" descr="Acción o criterio 4"/>
+          <p:cNvSpPr txBox="1"/>
+          <p:nvPr/>
+        </p:nvSpPr>
+        <p:spPr>
+          <a:xfrm>
+            <a:off x="640080" y="4511548"/>
+            <a:ext cx="5257800" cy="1170432"/>
+          </a:xfrm>
+          <a:prstGeom prst="rect">
+            <a:avLst/>
+          </a:prstGeom>
+          <a:solidFill>
+            <a:srgbClr val="FFFFFF"/>
+          </a:solidFill>
+          <a:ln>
+            <a:solidFill>
+              <a:srgbClr val="2F5BA8"/>
+            </a:solidFill>
+          </a:ln>
+        </p:spPr>
+        <p:txBody>
+          <a:bodyPr wrap="square" lIns="109728" rIns="109728" tIns="73152" bIns="73152">
+            <a:noAutofit/>
+          </a:bodyPr>
+          <a:lstStyle/>
+          <a:p>
+            <a:pPr>
+              <a:lnSpc>
+                <a:spcPts val="2640"/>
+              </a:lnSpc>
+              <a:spcAft>
+                <a:spcPts val="0"/>
+              </a:spcAft>
+              <a:defRPr sz="2400" b="0">
+                <a:solidFill>
+                  <a:srgbClr val="1C2330"/>
+                </a:solidFill>
+                <a:latin typeface="Liberation Sans"/>
+              </a:defRPr>
+            </a:pPr>
+            <a:r>
+              <a:t>marca Permisos comprobados: sí solo después de la prueba.</a:t>
             </a:r>
           </a:p>
         </p:txBody>
@@ -10089,7 +10170,7 @@
   </p:clrMapOvr>
   <p:extLst>
     <p:ext uri="urn:minijarvis:semantic-render:v1">
-      <ns0:renderMetadata xmlns:ns0="urn:minijarvis:semantic-render:v1">{"session": "215", "source_files": {"teacher": "/mnt/compartido/Programación-26-27/Minijarvis/02-PROFESORADO/02-SESIONES/h1/S215-defensa-y-cierre-h1-docente.md", "student_fallback": "/mnt/compartido/Programación-26-27/Minijarvis/01-ALUMNADO/03-SESIONES/h1/S215-defensa-y-cierre-h1-alumnado.md"}, "layout": "activity", "plan_index": 6, "recognition": false, "unit_ids": ["unit-20"], "roles": {"unit-20": "core"}, "source_refs": [{"source": "teacher", "heading": "Comprobación de enlaces y permisos", "block_index": 20, "fragment": 0}, {"source": "teacher", "heading": "Entrega oficial Moodle y evidencias que permanecen", "block_index": 18, "fragment": 0}], "visible_sources": [{"index": 9, "sha256": "bae75a60bf58ad22cc16194f420bed58d2882c98832540bb7b952ea1c200f2ee"}], "notes_sources": [{"function": "facilitation", "heading": "Comprobación de enlaces y permisos", "sha256": "503dd2b369e2483fbe975e82688bd45870c1fecd49c63f6806c5c9f64cbd4452"}], "relations": {"unit_relations": {"unit-20": {}}, "schedule": "concurrent_support", "source_supports_enriched": true}, "timeline_refs": [3], "composition": {"origin_slides": [19]}, "timing": {"seconds": 0, "allocations": [{"source_index": 3, "seconds": 0, "decision": "Intervalo compartido íntegro; propietario contable seleccionado por función de actividad y referencia timeline de unidad (identidad semántica en empates). Soporte, sin duplicación contable.  Soporte concurrente del mismo reloj fuente: no son turnos de defensa ni una secuencia adicional. Trabajo paralelo: Preparar la entrega Moodle, revisar enlaces profundos y probar permisos.", "source_time": "28–38 min", "source_seconds": 600, "is_owner": false, "function": "concept"}], "clock_intervals": [3], "presenter_notes": "Reloj fuente 28–38 min: duración compartida 600 segundos. Trabajo: Continuar defensas o una segunda comprobación breve cuando haga falta. Función del soporte: explicación. Soporte concurrente del mismo reloj fuente: no son turnos de defensa ni una secuencia adicional. Trabajo paralelo: Preparar la entrega Moodle, revisar enlaces profundos y probar permisos.", "shared_intervals": [{"source_index": 3, "source_time": "28–38 min", "seconds": 600, "is_owner": false, "function": "concept", "action": "Continuar defensas o una segunda comprobación breve cuando haga falta.", "concurrent": true, "parallel_work": "Preparar la entrega Moodle, revisar enlaces profundos y probar permisos."}]}, "code_blocks": [], "representation_needs": []}</ns0:renderMetadata>
+      <ns0:renderMetadata xmlns:ns0="urn:minijarvis:semantic-render:v1">{"session": "215", "source_files": {"teacher": "/mnt/compartido/Programación-26-27/Minijarvis/02-PROFESORADO/02-SESIONES/h1/S215-defensa-y-cierre-h1-docente.md", "student_fallback": "/mnt/compartido/Programación-26-27/Minijarvis/01-ALUMNADO/03-SESIONES/h1/S215-defensa-y-cierre-h1-alumnado.md"}, "layout": "activity", "plan_index": 6, "recognition": false, "unit_ids": ["unit-20"], "roles": {"unit-20": "core"}, "source_refs": [{"source": "teacher", "heading": "Comprobación de enlaces y permisos", "block_index": 20, "fragment": 0}, {"source": "teacher", "heading": "Entrega oficial Moodle y evidencias que permanecen", "block_index": 18, "fragment": 0}], "visible_sources": [{"index": 7, "sha256": "f083514fbc7b6a59b2ada33130dd3644e0beefa4f858ad71882b8a93d369162b"}], "notes_sources": [{"function": "facilitation", "heading": "Comprobación de enlaces y permisos", "sha256": "503dd2b369e2483fbe975e82688bd45870c1fecd49c63f6806c5c9f64cbd4452"}], "relations": {"unit_relations": {"unit-20": {}}, "schedule": "concurrent_support", "source_supports_enriched": true}, "timeline_refs": [3], "composition": {"origin_slides": [19]}, "timing": {"seconds": 0, "allocations": [{"source_index": 3, "seconds": 0, "decision": "Intervalo compartido íntegro; propietario contable seleccionado por función de actividad y referencia timeline de unidad (identidad semántica en empates). Soporte, sin duplicación contable.  Soporte concurrente del mismo reloj fuente: no son turnos de defensa ni una secuencia adicional. Trabajo paralelo: Preparar la entrega Moodle, revisar enlaces profundos y probar permisos.", "source_time": "28–38 min", "source_seconds": 600, "is_owner": false, "function": "concept"}], "clock_intervals": [3], "presenter_notes": "Reloj fuente 28–38 min: duración compartida 600 segundos. Trabajo: Continuar defensas o una segunda comprobación breve cuando haga falta. Función del soporte: explicación. Soporte concurrente del mismo reloj fuente: no son turnos de defensa ni una secuencia adicional. Trabajo paralelo: Preparar la entrega Moodle, revisar enlaces profundos y probar permisos.", "shared_intervals": [{"source_index": 3, "source_time": "28–38 min", "seconds": 600, "is_owner": false, "function": "concept", "action": "Continuar defensas o una segunda comprobación breve cuando haga falta.", "concurrent": true, "parallel_work": "Preparar la entrega Moodle, revisar enlaces profundos y probar permisos."}]}, "code_blocks": [], "representation_needs": []}</ns0:renderMetadata>
     </p:ext>
   </p:extLst>
 </p:sld>
@@ -10663,7 +10744,7 @@
   </p:clrMapOvr>
   <p:extLst>
     <p:ext uri="urn:minijarvis:semantic-render:v1">
-      <ns0:renderMetadata xmlns:ns0="urn:minijarvis:semantic-render:v1">{"session": "215", "source_files": {"teacher": "/mnt/compartido/Programación-26-27/Minijarvis/02-PROFESORADO/02-SESIONES/h1/S215-defensa-y-cierre-h1-docente.md", "student_fallback": "/mnt/compartido/Programación-26-27/Minijarvis/01-ALUMNADO/03-SESIONES/h1/S215-defensa-y-cierre-h1-alumnado.md"}, "layout": "parallel", "plan_index": 0, "recognition": false, "unit_ids": ["unit-26", "unit-27", "unit-28", "unit-29", "unit-30", "unit-31", "unit-4", "unit-14", "unit-15", "unit-16", "unit-19", "unit-18"], "roles": {"unit-26": "core", "unit-27": "core", "unit-28": "core", "unit-29": "core", "unit-30": "core", "unit-31": "core", "unit-4": "core", "unit-14": "core", "unit-15": "core", "unit-16": "core", "unit-19": "core", "unit-18": "core"}, "source_refs": [{"source": "teacher", "heading": "Organización simultánea de los 45 minutos", "block_index": 3, "fragment": 0}, {"source": "teacher", "heading": "Organización simultánea de los 45 minutos", "block_index": 3, "fragment": 0}, {"source": "teacher", "heading": "Organización simultánea de los 45 minutos", "block_index": 3, "fragment": 0}, {"source": "teacher", "heading": "Organización simultánea de los 45 minutos", "block_index": 3, "fragment": 0}, {"source": "teacher", "heading": "Organización simultánea de los 45 minutos", "block_index": 3, "fragment": 0}, {"source": "teacher", "heading": "Organización simultánea de los 45 minutos", "block_index": 3, "fragment": 0}, {"source": "teacher", "heading": "Defensa práctica individual", "block_index": 4, "fragment": 0}, {"source": "teacher", "heading": "Ensayo y revisión por parejas", "block_index": 14, "fragment": 0}, {"source": "teacher", "heading": "Review del incremento H1 — EQUIPO", "block_index": 15, "fragment": 0}, {"source": "teacher", "heading": "Retrospectiva H1 — EQUIPO", "block_index": 16, "fragment": 0}, {"source": "teacher", "heading": "Contenido de la entrega", "block_index": 19, "fragment": 0}, {"source": "teacher", "heading": "Entrega oficial Moodle y evidencias que permanecen", "block_index": 18, "fragment": 0}, {"source": "teacher", "heading": "Entrega oficial Moodle y evidencias que permanecen", "block_index": 18, "fragment": 0}], "visible_sources": [], "notes_sources": [{"function": "timeline", "heading": "Organización simultánea de los 45 minutos", "sha256": "39e52fa32bcc3f052625dd7391653053d7b759d3e18e1ca4a284f9bb950e95b5"}, {"function": "timeline", "heading": "Organización simultánea de los 45 minutos", "sha256": "563b954e4b6ece2d87d19c52a5078bed2eddbde8a2c166676c42e662e920389c"}, {"function": "timeline", "heading": "Organización simultánea de los 45 minutos", "sha256": "8dd252d3b2cb48cc943f0182e99c811765691407b8ce83312c5bb23f0e61b66e"}, {"function": "timeline", "heading": "Organización simultánea de los 45 minutos", "sha256": "01b9607f36eb67e737e9a0ab8cee3281633e8d244ec9701d2d6feb377c79710d"}, {"function": "timeline", "heading": "Organización simultánea de los 45 minutos", "sha256": "533f5226e144d88e3d37cccf05b263b28be4f5ec1b999744be22d532174d1437"}, {"function": "timeline", "heading": "Organización simultánea de los 45 minutos", "sha256": "d60e5c1dbefd851123bb8486af567bc4e7e8f2df55597ce011bb7f805755be6e"}, {"function": "timeline", "heading": "Organización simultánea de los 45 minutos", "sha256": "c452d07b879410ed5e01da8de31e3e38e277216882b1c73f391be725d02417dc"}, {"function": "timeline", "heading": "Organización simultánea de los 45 minutos", "sha256": "253beca4a4e23b9b8a57032a30259defb60c33796132fa304b54c4d61c9a3ef5"}, {"function": "timeline", "heading": "Organización simultánea de los 45 minutos", "sha256": "f44a4997e659fe07a280e23140677d4014cf2721a020d45b1e3e1b3595e0729a"}, {"function": "timeline", "heading": "Organización simultánea de los 45 minutos", "sha256": "eda816dd0250e26436eaee0c42241cb73d1a11d16102f9efab52ae87e299a145"}, {"function": "timeline", "heading": "Organización simultánea de los 45 minutos", "sha256": "71976bb154ff7fe155dd7ad9606e0deac2f771d78676f525357cfa4430d468f0"}, {"function": "timeline", "heading": "Organización simultánea de los 45 minutos", "sha256": "7f48cb66d03231f6d69efa3a28597985ec81d893d42ffe645502ce397f6ddc4e"}], "relations": {"modality": "Defensa INDIVIDUAL; ensayo y revisión por PAREJAS; review, retrospectiva y entrega en EQUIPO", "unit_relations": {"unit-0": {}, "unit-1": {}, "unit-2": {}, "unit-3": {}, "unit-21": {"prediction_cycle": ["prediction", "execution", "contrast"]}, "unit-26": {"simultaneous": ["action", "Trabajo paralelo del alumnado"]}, "unit-27": {"simultaneous": ["action", "Trabajo paralelo del alumnado"]}, "unit-28": {"simultaneous": ["action", "Trabajo paralelo del alumnado"]}, "unit-29": {"simultaneous": ["action", "Trabajo paralelo del alumnado"]}, "unit-30": {"simultaneous": ["action", "Trabajo paralelo del alumnado"]}, "unit-31": {"simultaneous": ["action", "Trabajo paralelo del alumnado"]}}, "roles": {"unit-0": "core", "unit-1": "core", "unit-2": "core", "unit-3": "core", "unit-21": "core", "unit-26": "core", "unit-27": "core", "unit-28": "core", "unit-29": "core", "unit-30": "core", "unit-31": "core"}, "concurrency": {"lanes": {"DOCENTE": ["unit-4", "unit-26", "unit-27", "unit-28", "unit-29", "unit-30", "unit-31"], "PAREJAS": ["unit-14"], "EQUIPO": ["unit-15", "unit-16", "unit-18", "unit-19"]}, "intervals": [{"time": "0–5 min", "teacher": "Explicar el protocolo y confirmar el orden.", "details": {"Trabajo paralelo del alumnado": "Abrir código, README, Scrum y enlaces de entrega."}}, {"time": "5–15 min", "teacher": "Defensas individuales breves.", "details": {"Trabajo paralelo del alumnado": "Ensayo y revisión por parejas: señalar, predecir, modificar y comprobar."}}, {"time": "15–28 min", "teacher": "Continuar defensas y recuperar respuestas vagas sobre el código.", "details": {"Trabajo paralelo del alumnado": "Review del incremento y retrospectiva en equipo."}}, {"time": "28–38 min", "teacher": "Continuar defensas o una segunda comprobación breve cuando haga falta.", "details": {"Trabajo paralelo del alumnado": "Preparar la entrega Moodle, revisar enlaces profundos y probar permisos."}}, {"time": "38–43 min", "teacher": "Resolver defensas pendientes sin convertirlas en exposiciones.", "details": {"Trabajo paralelo del alumnado": "Un integrante realiza la entrega; el equipo verifica que abre correctamente."}}, {"time": "43–45 min", "teacher": "Cierre común y siguiente paso.", "details": {"Trabajo paralelo del alumnado": "Reflexión individual breve y confirmación del cierre de equipo."}}]}, "source_supports_enriched": true}, "timeline_refs": [0], "composition": {"origin_slides": [2]}, "timing": {"seconds": 0, "allocations": [{"source_index": 0, "seconds": 0, "decision": "Intervalo compartido íntegro; propietario contable seleccionado por función de actividad y referencia timeline de unidad (identidad semántica en empates). Soporte, sin duplicación contable.  Soporte concurrente del mismo reloj fuente: no son turnos de defensa ni una secuencia adicional. Trabajo paralelo: Abrir código, README, Scrum y enlaces de entrega.", "source_time": "0–5 min", "source_seconds": 300, "is_owner": false, "function": "timeline"}, {"source_index": 1, "seconds": 0, "decision": "Intervalo compartido íntegro; propietario contable seleccionado por función de actividad y referencia timeline de unidad (identidad semántica en empates). Soporte, sin duplicación contable.  Soporte concurrente del mismo reloj fuente: no son turnos de defensa ni una secuencia adicional. Trabajo paralelo: Ensayo y revisión por parejas: señalar, predecir, modificar y comprobar.", "source_time": "5–15 min", "source_seconds": 600, "is_owner": false, "function": "defense"}, {"source_index": 2, "seconds": 0, "decision": "Intervalo compartido íntegro; propietario contable seleccionado por función de actividad y referencia timeline de unidad (identidad semántica en empates). Soporte, sin duplicación contable.  Soporte concurrente del mismo reloj fuente: no son turnos de defensa ni una secuencia adicional. Trabajo paralelo: Review del incremento y retrospectiva en equipo.", "source_time": "15–28 min", "source_seconds": 780, "is_owner": false, "function": "defense"}, {"source_index": 3, "seconds": 0, "decision": "Intervalo compartido íntegro; propietario contable seleccionado por función de actividad y referencia timeline de unidad (identidad semántica en empates). Soporte, sin duplicación contable.  Soporte concurrente del mismo reloj fuente: no son turnos de defensa ni una secuencia adicional. Trabajo paralelo: Preparar la entrega Moodle, revisar enlaces profundos y probar permisos.", "source_time": "28–38 min", "source_seconds": 600, "is_owner": false, "function": "defense"}, {"source_index": 4, "seconds": 0, "decision": "Intervalo compartido íntegro; propietario contable seleccionado por función de actividad y referencia timeline de unidad (identidad semántica en empates). Soporte, sin duplicación contable.  Soporte concurrente del mismo reloj fuente: no son turnos de defensa ni una secuencia adicional. Trabajo paralelo: Un integrante realiza la entrega; el equipo verifica que abre correctamente.", "source_time": "38–43 min", "source_seconds": 300, "is_owner": false, "function": "defense"}, {"source_index": 5, "seconds": 0, "decision": "Intervalo compartido íntegro; propietario contable seleccionado por función de actividad y referencia timeline de unidad (identidad semántica en empates). Soporte, sin duplicación contable.  Soporte concurrente del mismo reloj fuente: no son turnos de defensa ni una secuencia adicional. Trabajo paralelo: Reflexión individual breve y confirmación del cierre de equipo.", "source_time": "43–45 min", "source_seconds": 120, "is_owner": false, "function": "timeline"}], "clock_intervals": [0, 1, 2, 3, 4, 5], "presenter_notes": "Reloj fuente 0–5 min: duración compartida 300 segundos. Trabajo: Explicar el protocolo y confirmar el orden. Función del soporte: apoyo al trabajo. Soporte concurrente del mismo reloj fuente: no son turnos de defensa ni una secuencia adicional. Trabajo paralelo: Abrir código, README, Scrum y enlaces de entrega. Reloj fuente 5–15 min: duración compartida 600 segundos. Trabajo: Defensas individuales breves. Función del soporte: defensa. Soporte concurrente del mismo reloj fuente: no son turnos de defensa ni una secuencia adicional. Trabajo paralelo: Ensayo y revisión por parejas: señalar, predecir, modificar y comprobar. Reloj fuente 15–28 min: duración compartida 780 segundos. Trabajo: Continuar defensas y recuperar respuestas vagas sobre el código. Función del soporte: defensa. Soporte concurrente del mismo reloj fuente: no son turnos de defensa ni una secuencia adicional. Trabajo paralelo: Review del incremento y retrospectiva en equipo. Reloj fuente 28–38 min: duración compartida 600 segundos. Trabajo: Continuar defensas o una segunda comprobación breve cuando haga falta. Función del soporte: defensa. Soporte concurrente del mismo reloj fuente: no son turnos de defensa ni una secuencia adicional. Trabajo paralelo: Preparar la entrega Moodle, revisar enlaces profundos y probar permisos. Reloj fuente 38–43 min: duración compartida 300 segundos. Trabajo: Resolver defensas pendientes sin convertirlas en exposiciones. Función del soporte: defensa. Soporte concurrente del mismo reloj fuente: no son turnos de defensa ni una secuencia adicional. Trabajo paralelo: Un integrante realiza la entrega; el equipo verifica que abre correctamente. Reloj fuente 43–45 min: duración compartida 120 segundos. Trabajo: Cierre común y siguiente paso. Función del soporte: apoyo al trabajo. Soporte concurrente del mismo reloj fuente: no son turnos de defensa ni una secuencia adicional. Trabajo paralelo: Reflexión individual breve y confirmación del cierre de equipo.", "shared_intervals": [{"source_index": 0, "source_time": "0–5 min", "seconds": 300, "is_owner": false, "function": "timeline", "action": "Explicar el protocolo y confirmar el orden.", "concurrent": true, "parallel_work": "Abrir código, README, Scrum y enlaces de entrega."}, {"source_index": 1, "source_time": "5–15 min", "seconds": 600, "is_owner": false, "function": "defense", "action": "Defensas individuales breves.", "concurrent": true, "parallel_work": "Ensayo y revisión por parejas: señalar, predecir, modificar y comprobar."}, {"source_index": 2, "source_time": "15–28 min", "seconds": 780, "is_owner": false, "function": "defense", "action": "Continuar defensas y recuperar respuestas vagas sobre el código.", "concurrent": true, "parallel_work": "Review del incremento y retrospectiva en equipo."}, {"source_index": 3, "source_time": "28–38 min", "seconds": 600, "is_owner": false, "function": "defense", "action": "Continuar defensas o una segunda comprobación breve cuando haga falta.", "concurrent": true, "parallel_work": "Preparar la entrega Moodle, revisar enlaces profundos y probar permisos."}, {"source_index": 4, "source_time": "38–43 min", "seconds": 300, "is_owner": false, "function": "defense", "action": "Resolver defensas pendientes sin convertirlas en exposiciones.", "concurrent": true, "parallel_work": "Un integrante realiza la entrega; el equipo verifica que abre correctamente."}, {"source_index": 5, "source_time": "43–45 min", "seconds": 120, "is_owner": false, "function": "timeline", "action": "Cierre común y siguiente paso.", "concurrent": true, "parallel_work": "Reflexión individual breve y confirmación del cierre de equipo."}]}, "code_blocks": [], "representation_needs": []}</ns0:renderMetadata>
+      <ns0:renderMetadata xmlns:ns0="urn:minijarvis:semantic-render:v1">{"session": "215", "source_files": {"teacher": "/mnt/compartido/Programación-26-27/Minijarvis/02-PROFESORADO/02-SESIONES/h1/S215-defensa-y-cierre-h1-docente.md", "student_fallback": "/mnt/compartido/Programación-26-27/Minijarvis/01-ALUMNADO/03-SESIONES/h1/S215-defensa-y-cierre-h1-alumnado.md"}, "layout": "parallel", "plan_index": 0, "recognition": false, "unit_ids": ["unit-25", "unit-26", "unit-27", "unit-28", "unit-29", "unit-30", "unit-4", "unit-14", "unit-15", "unit-16", "unit-19", "unit-18"], "roles": {"unit-25": "core", "unit-26": "core", "unit-27": "core", "unit-28": "core", "unit-29": "core", "unit-30": "core", "unit-4": "core", "unit-14": "core", "unit-15": "core", "unit-16": "core", "unit-19": "core", "unit-18": "core"}, "source_refs": [{"source": "teacher", "heading": "Organización simultánea de los 45 minutos", "block_index": 3, "fragment": 0}, {"source": "teacher", "heading": "Organización simultánea de los 45 minutos", "block_index": 3, "fragment": 0}, {"source": "teacher", "heading": "Organización simultánea de los 45 minutos", "block_index": 3, "fragment": 0}, {"source": "teacher", "heading": "Organización simultánea de los 45 minutos", "block_index": 3, "fragment": 0}, {"source": "teacher", "heading": "Organización simultánea de los 45 minutos", "block_index": 3, "fragment": 0}, {"source": "teacher", "heading": "Organización simultánea de los 45 minutos", "block_index": 3, "fragment": 0}, {"source": "teacher", "heading": "Defensa práctica individual", "block_index": 4, "fragment": 0}, {"source": "teacher", "heading": "Ensayo y revisión por parejas", "block_index": 14, "fragment": 0}, {"source": "teacher", "heading": "Review del incremento H1 — EQUIPO", "block_index": 15, "fragment": 0}, {"source": "teacher", "heading": "Retrospectiva H1 — EQUIPO", "block_index": 16, "fragment": 0}, {"source": "teacher", "heading": "Contenido de la entrega", "block_index": 19, "fragment": 0}, {"source": "teacher", "heading": "Entrega oficial Moodle y evidencias que permanecen", "block_index": 18, "fragment": 0}, {"source": "teacher", "heading": "Entrega oficial Moodle y evidencias que permanecen", "block_index": 18, "fragment": 0}], "visible_sources": [], "notes_sources": [{"function": "timeline", "heading": "Organización simultánea de los 45 minutos", "sha256": "39e52fa32bcc3f052625dd7391653053d7b759d3e18e1ca4a284f9bb950e95b5"}, {"function": "timeline", "heading": "Organización simultánea de los 45 minutos", "sha256": "563b954e4b6ece2d87d19c52a5078bed2eddbde8a2c166676c42e662e920389c"}, {"function": "timeline", "heading": "Organización simultánea de los 45 minutos", "sha256": "8dd252d3b2cb48cc943f0182e99c811765691407b8ce83312c5bb23f0e61b66e"}, {"function": "timeline", "heading": "Organización simultánea de los 45 minutos", "sha256": "01b9607f36eb67e737e9a0ab8cee3281633e8d244ec9701d2d6feb377c79710d"}, {"function": "timeline", "heading": "Organización simultánea de los 45 minutos", "sha256": "533f5226e144d88e3d37cccf05b263b28be4f5ec1b999744be22d532174d1437"}, {"function": "timeline", "heading": "Organización simultánea de los 45 minutos", "sha256": "d60e5c1dbefd851123bb8486af567bc4e7e8f2df55597ce011bb7f805755be6e"}, {"function": "timeline", "heading": "Organización simultánea de los 45 minutos", "sha256": "c452d07b879410ed5e01da8de31e3e38e277216882b1c73f391be725d02417dc"}, {"function": "timeline", "heading": "Organización simultánea de los 45 minutos", "sha256": "253beca4a4e23b9b8a57032a30259defb60c33796132fa304b54c4d61c9a3ef5"}, {"function": "timeline", "heading": "Organización simultánea de los 45 minutos", "sha256": "f44a4997e659fe07a280e23140677d4014cf2721a020d45b1e3e1b3595e0729a"}, {"function": "timeline", "heading": "Organización simultánea de los 45 minutos", "sha256": "eda816dd0250e26436eaee0c42241cb73d1a11d16102f9efab52ae87e299a145"}, {"function": "timeline", "heading": "Organización simultánea de los 45 minutos", "sha256": "71976bb154ff7fe155dd7ad9606e0deac2f771d78676f525357cfa4430d468f0"}, {"function": "timeline", "heading": "Organización simultánea de los 45 minutos", "sha256": "7f48cb66d03231f6d69efa3a28597985ec81d893d42ffe645502ce397f6ddc4e"}], "relations": {"modality": "Defensa INDIVIDUAL; ensayo y revisión por PAREJAS; review, retrospectiva y entrega en EQUIPO", "unit_relations": {"unit-0": {}, "unit-1": {}, "unit-2": {}, "unit-3": {}, "unit-21": {"prediction_cycle": ["prediction", "execution", "contrast"]}, "unit-25": {"simultaneous": ["action", "Trabajo paralelo del alumnado"]}, "unit-26": {"simultaneous": ["action", "Trabajo paralelo del alumnado"]}, "unit-27": {"simultaneous": ["action", "Trabajo paralelo del alumnado"]}, "unit-28": {"simultaneous": ["action", "Trabajo paralelo del alumnado"]}, "unit-29": {"simultaneous": ["action", "Trabajo paralelo del alumnado"]}, "unit-30": {"simultaneous": ["action", "Trabajo paralelo del alumnado"]}}, "roles": {"unit-0": "core", "unit-1": "core", "unit-2": "core", "unit-3": "core", "unit-21": "core", "unit-25": "core", "unit-26": "core", "unit-27": "core", "unit-28": "core", "unit-29": "core", "unit-30": "core"}, "concurrency": {"lanes": {"DOCENTE": ["unit-4", "unit-25", "unit-26", "unit-27", "unit-28", "unit-29", "unit-30"], "PAREJAS": ["unit-14"], "EQUIPO": ["unit-15", "unit-16", "unit-18", "unit-19"]}, "intervals": [{"time": "0–5 min", "teacher": "Explicar el protocolo y confirmar el orden.", "details": {"Trabajo paralelo del alumnado": "Abrir código, README, Scrum y enlaces de entrega."}}, {"time": "5–15 min", "teacher": "Defensas individuales breves.", "details": {"Trabajo paralelo del alumnado": "Ensayo y revisión por parejas: señalar, predecir, modificar y comprobar."}}, {"time": "15–28 min", "teacher": "Continuar defensas y recuperar respuestas vagas sobre el código.", "details": {"Trabajo paralelo del alumnado": "Review del incremento y retrospectiva en equipo."}}, {"time": "28–38 min", "teacher": "Continuar defensas o una segunda comprobación breve cuando haga falta.", "details": {"Trabajo paralelo del alumnado": "Preparar la entrega Moodle, revisar enlaces profundos y probar permisos."}}, {"time": "38–43 min", "teacher": "Resolver defensas pendientes sin convertirlas en exposiciones.", "details": {"Trabajo paralelo del alumnado": "Un integrante realiza la entrega; el equipo verifica que abre correctamente."}}, {"time": "43–45 min", "teacher": "Cierre común y siguiente paso.", "details": {"Trabajo paralelo del alumnado": "Reflexión individual breve y confirmación del cierre de equipo."}}]}, "source_supports_enriched": true}, "timeline_refs": [0], "composition": {"origin_slides": [2]}, "timing": {"seconds": 0, "allocations": [{"source_index": 0, "seconds": 0, "decision": "Intervalo compartido íntegro; propietario contable seleccionado por función de actividad y referencia timeline de unidad (identidad semántica en empates). Soporte, sin duplicación contable.  Soporte concurrente del mismo reloj fuente: no son turnos de defensa ni una secuencia adicional. Trabajo paralelo: Abrir código, README, Scrum y enlaces de entrega.", "source_time": "0–5 min", "source_seconds": 300, "is_owner": false, "function": "timeline"}, {"source_index": 1, "seconds": 0, "decision": "Intervalo compartido íntegro; propietario contable seleccionado por función de actividad y referencia timeline de unidad (identidad semántica en empates). Soporte, sin duplicación contable.  Soporte concurrente del mismo reloj fuente: no son turnos de defensa ni una secuencia adicional. Trabajo paralelo: Ensayo y revisión por parejas: señalar, predecir, modificar y comprobar.", "source_time": "5–15 min", "source_seconds": 600, "is_owner": false, "function": "defense"}, {"source_index": 2, "seconds": 0, "decision": "Intervalo compartido íntegro; propietario contable seleccionado por función de actividad y referencia timeline de unidad (identidad semántica en empates). Soporte, sin duplicación contable.  Soporte concurrente del mismo reloj fuente: no son turnos de defensa ni una secuencia adicional. Trabajo paralelo: Review del incremento y retrospectiva en equipo.", "source_time": "15–28 min", "source_seconds": 780, "is_owner": false, "function": "defense"}, {"source_index": 3, "seconds": 0, "decision": "Intervalo compartido íntegro; propietario contable seleccionado por función de actividad y referencia timeline de unidad (identidad semántica en empates). Soporte, sin duplicación contable.  Soporte concurrente del mismo reloj fuente: no son turnos de defensa ni una secuencia adicional. Trabajo paralelo: Preparar la entrega Moodle, revisar enlaces profundos y probar permisos.", "source_time": "28–38 min", "source_seconds": 600, "is_owner": false, "function": "defense"}, {"source_index": 4, "seconds": 0, "decision": "Intervalo compartido íntegro; propietario contable seleccionado por función de actividad y referencia timeline de unidad (identidad semántica en empates). Soporte, sin duplicación contable.  Soporte concurrente del mismo reloj fuente: no son turnos de defensa ni una secuencia adicional. Trabajo paralelo: Un integrante realiza la entrega; el equipo verifica que abre correctamente.", "source_time": "38–43 min", "source_seconds": 300, "is_owner": false, "function": "defense"}, {"source_index": 5, "seconds": 0, "decision": "Intervalo compartido íntegro; propietario contable seleccionado por función de actividad y referencia timeline de unidad (identidad semántica en empates). Soporte, sin duplicación contable.  Soporte concurrente del mismo reloj fuente: no son turnos de defensa ni una secuencia adicional. Trabajo paralelo: Reflexión individual breve y confirmación del cierre de equipo.", "source_time": "43–45 min", "source_seconds": 120, "is_owner": false, "function": "timeline"}], "clock_intervals": [0, 1, 2, 3, 4, 5], "presenter_notes": "Reloj fuente 0–5 min: duración compartida 300 segundos. Trabajo: Explicar el protocolo y confirmar el orden. Función del soporte: apoyo al trabajo. Soporte concurrente del mismo reloj fuente: no son turnos de defensa ni una secuencia adicional. Trabajo paralelo: Abrir código, README, Scrum y enlaces de entrega. Reloj fuente 5–15 min: duración compartida 600 segundos. Trabajo: Defensas individuales breves. Función del soporte: defensa. Soporte concurrente del mismo reloj fuente: no son turnos de defensa ni una secuencia adicional. Trabajo paralelo: Ensayo y revisión por parejas: señalar, predecir, modificar y comprobar. Reloj fuente 15–28 min: duración compartida 780 segundos. Trabajo: Continuar defensas y recuperar respuestas vagas sobre el código. Función del soporte: defensa. Soporte concurrente del mismo reloj fuente: no son turnos de defensa ni una secuencia adicional. Trabajo paralelo: Review del incremento y retrospectiva en equipo. Reloj fuente 28–38 min: duración compartida 600 segundos. Trabajo: Continuar defensas o una segunda comprobación breve cuando haga falta. Función del soporte: defensa. Soporte concurrente del mismo reloj fuente: no son turnos de defensa ni una secuencia adicional. Trabajo paralelo: Preparar la entrega Moodle, revisar enlaces profundos y probar permisos. Reloj fuente 38–43 min: duración compartida 300 segundos. Trabajo: Resolver defensas pendientes sin convertirlas en exposiciones. Función del soporte: defensa. Soporte concurrente del mismo reloj fuente: no son turnos de defensa ni una secuencia adicional. Trabajo paralelo: Un integrante realiza la entrega; el equipo verifica que abre correctamente. Reloj fuente 43–45 min: duración compartida 120 segundos. Trabajo: Cierre común y siguiente paso. Función del soporte: apoyo al trabajo. Soporte concurrente del mismo reloj fuente: no son turnos de defensa ni una secuencia adicional. Trabajo paralelo: Reflexión individual breve y confirmación del cierre de equipo.", "shared_intervals": [{"source_index": 0, "source_time": "0–5 min", "seconds": 300, "is_owner": false, "function": "timeline", "action": "Explicar el protocolo y confirmar el orden.", "concurrent": true, "parallel_work": "Abrir código, README, Scrum y enlaces de entrega."}, {"source_index": 1, "source_time": "5–15 min", "seconds": 600, "is_owner": false, "function": "defense", "action": "Defensas individuales breves.", "concurrent": true, "parallel_work": "Ensayo y revisión por parejas: señalar, predecir, modificar y comprobar."}, {"source_index": 2, "source_time": "15–28 min", "seconds": 780, "is_owner": false, "function": "defense", "action": "Continuar defensas y recuperar respuestas vagas sobre el código.", "concurrent": true, "parallel_work": "Review del incremento y retrospectiva en equipo."}, {"source_index": 3, "source_time": "28–38 min", "seconds": 600, "is_owner": false, "function": "defense", "action": "Continuar defensas o una segunda comprobación breve cuando haga falta.", "concurrent": true, "parallel_work": "Preparar la entrega Moodle, revisar enlaces profundos y probar permisos."}, {"source_index": 4, "source_time": "38–43 min", "seconds": 300, "is_owner": false, "function": "defense", "action": "Resolver defensas pendientes sin convertirlas en exposiciones.", "concurrent": true, "parallel_work": "Un integrante realiza la entrega; el equipo verifica que abre correctamente."}, {"source_index": 5, "source_time": "43–45 min", "seconds": 120, "is_owner": false, "function": "timeline", "action": "Cierre común y siguiente paso.", "concurrent": true, "parallel_work": "Reflexión individual breve y confirmación del cierre de equipo."}]}, "code_blocks": [], "representation_needs": []}</ns0:renderMetadata>
     </p:ext>
   </p:extLst>
 </p:sld>
@@ -10763,7 +10844,7 @@
               </a:defRPr>
             </a:pPr>
             <a:r>
-              <a:t>Seguridad y uso de IA</a:t>
+              <a:t>Comprobación de enlaces y permisos</a:t>
             </a:r>
           </a:p>
         </p:txBody>
@@ -10854,41 +10935,34 @@
       </p:sp>
       <p:sp>
         <p:nvSpPr>
-          <p:cNvPr id="6" name="Acción o criterio 0" descr="Acción o criterio 0"/>
+          <p:cNvPr id="6" name="Contenido" descr="Contenido"/>
           <p:cNvSpPr txBox="1"/>
           <p:nvPr/>
         </p:nvSpPr>
         <p:spPr>
           <a:xfrm>
             <a:off x="640080" y="1987804"/>
-            <a:ext cx="5257800" cy="1170432"/>
-          </a:xfrm>
-          <a:prstGeom prst="rect">
-            <a:avLst/>
-          </a:prstGeom>
-          <a:solidFill>
-            <a:srgbClr val="FFFFFF"/>
-          </a:solidFill>
-          <a:ln>
-            <a:solidFill>
-              <a:srgbClr val="2F5BA8"/>
-            </a:solidFill>
-          </a:ln>
-        </p:spPr>
-        <p:txBody>
-          <a:bodyPr wrap="square" lIns="109728" rIns="109728" tIns="73152" bIns="73152">
-            <a:noAutofit/>
-          </a:bodyPr>
-          <a:lstStyle/>
-          <a:p>
-            <a:pPr>
-              <a:lnSpc>
-                <a:spcPts val="2640"/>
-              </a:lnSpc>
-              <a:spcAft>
-                <a:spcPts val="0"/>
-              </a:spcAft>
-              <a:defRPr sz="2400" b="0">
+            <a:ext cx="10881360" cy="946912"/>
+          </a:xfrm>
+          <a:prstGeom prst="rect">
+            <a:avLst/>
+          </a:prstGeom>
+          <a:noFill/>
+        </p:spPr>
+        <p:txBody>
+          <a:bodyPr wrap="square" lIns="109728" rIns="109728" tIns="73152" bIns="73152">
+            <a:noAutofit/>
+          </a:bodyPr>
+          <a:lstStyle/>
+          <a:p>
+            <a:pPr>
+              <a:lnSpc>
+                <a:spcPts val="3080"/>
+              </a:lnSpc>
+              <a:spcAft>
+                <a:spcPts val="0"/>
+              </a:spcAft>
+              <a:defRPr sz="2800" b="0">
                 <a:solidFill>
                   <a:srgbClr val="1C2330"/>
                 </a:solidFill>
@@ -10896,154 +10970,7 @@
               </a:defRPr>
             </a:pPr>
             <a:r>
-              <a:t>Trabaja únicamente con datos ficticios.</a:t>
-            </a:r>
-          </a:p>
-        </p:txBody>
-      </p:sp>
-      <p:sp>
-        <p:nvSpPr>
-          <p:cNvPr id="7" name="Acción o criterio 1" descr="Acción o criterio 1"/>
-          <p:cNvSpPr txBox="1"/>
-          <p:nvPr/>
-        </p:nvSpPr>
-        <p:spPr>
-          <a:xfrm>
-            <a:off x="6080760" y="1987804"/>
-            <a:ext cx="5257800" cy="1170432"/>
-          </a:xfrm>
-          <a:prstGeom prst="rect">
-            <a:avLst/>
-          </a:prstGeom>
-          <a:solidFill>
-            <a:srgbClr val="FFFFFF"/>
-          </a:solidFill>
-          <a:ln>
-            <a:solidFill>
-              <a:srgbClr val="2F5BA8"/>
-            </a:solidFill>
-          </a:ln>
-        </p:spPr>
-        <p:txBody>
-          <a:bodyPr wrap="square" lIns="109728" rIns="109728" tIns="73152" bIns="73152">
-            <a:noAutofit/>
-          </a:bodyPr>
-          <a:lstStyle/>
-          <a:p>
-            <a:pPr>
-              <a:lnSpc>
-                <a:spcPts val="2640"/>
-              </a:lnSpc>
-              <a:spcAft>
-                <a:spcPts val="0"/>
-              </a:spcAft>
-              <a:defRPr sz="2400" b="0">
-                <a:solidFill>
-                  <a:srgbClr val="1C2330"/>
-                </a:solidFill>
-                <a:latin typeface="Liberation Sans"/>
-              </a:defRPr>
-            </a:pPr>
-            <a:r>
-              <a:t>No escribas contraseñas, tokens, claves API ni datos personales.</a:t>
-            </a:r>
-          </a:p>
-        </p:txBody>
-      </p:sp>
-      <p:sp>
-        <p:nvSpPr>
-          <p:cNvPr id="8" name="Acción o criterio 2" descr="Acción o criterio 2"/>
-          <p:cNvSpPr txBox="1"/>
-          <p:nvPr/>
-        </p:nvSpPr>
-        <p:spPr>
-          <a:xfrm>
-            <a:off x="640080" y="3249676"/>
-            <a:ext cx="5257800" cy="1840991"/>
-          </a:xfrm>
-          <a:prstGeom prst="rect">
-            <a:avLst/>
-          </a:prstGeom>
-          <a:solidFill>
-            <a:srgbClr val="FFFFFF"/>
-          </a:solidFill>
-          <a:ln>
-            <a:solidFill>
-              <a:srgbClr val="2F5BA8"/>
-            </a:solidFill>
-          </a:ln>
-        </p:spPr>
-        <p:txBody>
-          <a:bodyPr wrap="square" lIns="109728" rIns="109728" tIns="73152" bIns="73152">
-            <a:noAutofit/>
-          </a:bodyPr>
-          <a:lstStyle/>
-          <a:p>
-            <a:pPr>
-              <a:lnSpc>
-                <a:spcPts val="2640"/>
-              </a:lnSpc>
-              <a:spcAft>
-                <a:spcPts val="0"/>
-              </a:spcAft>
-              <a:defRPr sz="2400" b="0">
-                <a:solidFill>
-                  <a:srgbClr val="1C2330"/>
-                </a:solidFill>
-                <a:latin typeface="Liberation Sans"/>
-              </a:defRPr>
-            </a:pPr>
-            <a:r>
-              <a:t>Si utilizas IA en un uso permitido, registra qué pediste, qué recibiste, qué cambiaste y cómo lo comprobaste.</a:t>
-            </a:r>
-          </a:p>
-        </p:txBody>
-      </p:sp>
-      <p:sp>
-        <p:nvSpPr>
-          <p:cNvPr id="9" name="Acción o criterio 3" descr="Acción o criterio 3"/>
-          <p:cNvSpPr txBox="1"/>
-          <p:nvPr/>
-        </p:nvSpPr>
-        <p:spPr>
-          <a:xfrm>
-            <a:off x="6080760" y="3249676"/>
-            <a:ext cx="5257800" cy="1840991"/>
-          </a:xfrm>
-          <a:prstGeom prst="rect">
-            <a:avLst/>
-          </a:prstGeom>
-          <a:solidFill>
-            <a:srgbClr val="FFFFFF"/>
-          </a:solidFill>
-          <a:ln>
-            <a:solidFill>
-              <a:srgbClr val="2F5BA8"/>
-            </a:solidFill>
-          </a:ln>
-        </p:spPr>
-        <p:txBody>
-          <a:bodyPr wrap="square" lIns="109728" rIns="109728" tIns="73152" bIns="73152">
-            <a:noAutofit/>
-          </a:bodyPr>
-          <a:lstStyle/>
-          <a:p>
-            <a:pPr>
-              <a:lnSpc>
-                <a:spcPts val="2640"/>
-              </a:lnSpc>
-              <a:spcAft>
-                <a:spcPts val="0"/>
-              </a:spcAft>
-              <a:defRPr sz="2400" b="0">
-                <a:solidFill>
-                  <a:srgbClr val="1C2330"/>
-                </a:solidFill>
-                <a:latin typeface="Liberation Sans"/>
-              </a:defRPr>
-            </a:pPr>
-            <a:r>
-              <a:t>Los ejemplos de Laura solo se consultan después del intento propio.</a:t>
+              <a:t>Esta comprobación es una acción, no un documento nuevo.</a:t>
             </a:r>
           </a:p>
         </p:txBody>
@@ -11055,7 +10982,7 @@
   </p:clrMapOvr>
   <p:extLst>
     <p:ext uri="urn:minijarvis:semantic-render:v1">
-      <ns0:renderMetadata xmlns:ns0="urn:minijarvis:semantic-render:v1">{"session": "215", "source_files": {"teacher": "/mnt/compartido/Programación-26-27/Minijarvis/02-PROFESORADO/02-SESIONES/h1/S215-defensa-y-cierre-h1-docente.md", "student_fallback": "/mnt/compartido/Programación-26-27/Minijarvis/01-ALUMNADO/03-SESIONES/h1/S215-defensa-y-cierre-h1-alumnado.md"}, "layout": "activity", "plan_index": 6, "recognition": false, "unit_ids": ["unit-25"], "roles": {"unit-25": "core"}, "source_refs": [{"source": "student_fallback", "heading": "Seguridad y uso de IA", "block_index": null, "fragment": 0}], "visible_sources": [{"index": 10, "sha256": "61337aa7d62b810fc872b64ccf50a7b9620d423d2be91b3dfff6d304f2bec734"}], "notes_sources": [], "relations": {"unit_relations": {"unit-25": {}}, "schedule": "concurrent_support", "source_supports_enriched": true}, "timeline_refs": [3, 4], "composition": {"origin_slides": [20]}, "timing": {"seconds": 0, "allocations": [{"source_index": 3, "seconds": 0, "decision": "Intervalo compartido íntegro; propietario contable seleccionado por función de actividad y referencia timeline de unidad (identidad semántica en empates). Soporte, sin duplicación contable.  Soporte concurrente del mismo reloj fuente: no son turnos de defensa ni una secuencia adicional. Trabajo paralelo: Preparar la entrega Moodle, revisar enlaces profundos y probar permisos.", "source_time": "28–38 min", "source_seconds": 600, "is_owner": false, "function": "security"}, {"source_index": 4, "seconds": 0, "decision": "Intervalo compartido íntegro; propietario contable seleccionado por función de actividad y referencia timeline de unidad (identidad semántica en empates). Soporte, sin duplicación contable.  Soporte concurrente del mismo reloj fuente: no son turnos de defensa ni una secuencia adicional. Trabajo paralelo: Un integrante realiza la entrega; el equipo verifica que abre correctamente.", "source_time": "38–43 min", "source_seconds": 300, "is_owner": false, "function": "security"}], "clock_intervals": [3, 4], "presenter_notes": "Reloj fuente 28–38 min: duración compartida 600 segundos. Trabajo: Continuar defensas o una segunda comprobación breve cuando haga falta. Función del soporte: apoyo al trabajo. Soporte concurrente del mismo reloj fuente: no son turnos de defensa ni una secuencia adicional. Trabajo paralelo: Preparar la entrega Moodle, revisar enlaces profundos y probar permisos. Reloj fuente 38–43 min: duración compartida 300 segundos. Trabajo: Resolver defensas pendientes sin convertirlas en exposiciones. Función del soporte: apoyo al trabajo. Soporte concurrente del mismo reloj fuente: no son turnos de defensa ni una secuencia adicional. Trabajo paralelo: Un integrante realiza la entrega; el equipo verifica que abre correctamente.", "shared_intervals": [{"source_index": 3, "source_time": "28–38 min", "seconds": 600, "is_owner": false, "function": "security", "action": "Continuar defensas o una segunda comprobación breve cuando haga falta.", "concurrent": true, "parallel_work": "Preparar la entrega Moodle, revisar enlaces profundos y probar permisos."}, {"source_index": 4, "source_time": "38–43 min", "seconds": 300, "is_owner": false, "function": "security", "action": "Resolver defensas pendientes sin convertirlas en exposiciones.", "concurrent": true, "parallel_work": "Un integrante realiza la entrega; el equipo verifica que abre correctamente."}]}, "code_blocks": [], "representation_needs": []}</ns0:renderMetadata>
+      <ns0:renderMetadata xmlns:ns0="urn:minijarvis:semantic-render:v1">{"session": "215", "source_files": {"teacher": "/mnt/compartido/Programación-26-27/Minijarvis/02-PROFESORADO/02-SESIONES/h1/S215-defensa-y-cierre-h1-docente.md", "student_fallback": "/mnt/compartido/Programación-26-27/Minijarvis/01-ALUMNADO/03-SESIONES/h1/S215-defensa-y-cierre-h1-alumnado.md"}, "layout": "activity", "plan_index": 6, "recognition": false, "unit_ids": ["unit-20"], "roles": {"unit-20": "core"}, "source_refs": [{"source": "teacher", "heading": "Comprobación de enlaces y permisos", "block_index": 20, "fragment": 0}, {"source": "teacher", "heading": "Entrega oficial Moodle y evidencias que permanecen", "block_index": 18, "fragment": 0}], "visible_sources": [{"index": 8, "sha256": "bae75a60bf58ad22cc16194f420bed58d2882c98832540bb7b952ea1c200f2ee"}], "notes_sources": [{"function": "facilitation", "heading": "Comprobación de enlaces y permisos", "sha256": "503dd2b369e2483fbe975e82688bd45870c1fecd49c63f6806c5c9f64cbd4452"}], "relations": {"unit_relations": {"unit-20": {}}, "schedule": "concurrent_support", "source_supports_enriched": true}, "timeline_refs": [3], "composition": {"origin_slides": [19]}, "timing": {"seconds": 0, "allocations": [{"source_index": 3, "seconds": 0, "decision": "Intervalo compartido íntegro; propietario contable seleccionado por función de actividad y referencia timeline de unidad (identidad semántica en empates). Soporte, sin duplicación contable.  Soporte concurrente del mismo reloj fuente: no son turnos de defensa ni una secuencia adicional. Trabajo paralelo: Preparar la entrega Moodle, revisar enlaces profundos y probar permisos.", "source_time": "28–38 min", "source_seconds": 600, "is_owner": false, "function": "concept"}], "clock_intervals": [3], "presenter_notes": "Reloj fuente 28–38 min: duración compartida 600 segundos. Trabajo: Continuar defensas o una segunda comprobación breve cuando haga falta. Función del soporte: explicación. Soporte concurrente del mismo reloj fuente: no son turnos de defensa ni una secuencia adicional. Trabajo paralelo: Preparar la entrega Moodle, revisar enlaces profundos y probar permisos.", "shared_intervals": [{"source_index": 3, "source_time": "28–38 min", "seconds": 600, "is_owner": false, "function": "concept", "action": "Continuar defensas o una segunda comprobación breve cuando haga falta.", "concurrent": true, "parallel_work": "Preparar la entrega Moodle, revisar enlaces profundos y probar permisos."}]}, "code_blocks": [], "representation_needs": []}</ns0:renderMetadata>
     </p:ext>
   </p:extLst>
 </p:sld>
@@ -11300,7 +11227,7 @@
   </p:clrMapOvr>
   <p:extLst>
     <p:ext uri="urn:minijarvis:semantic-render:v1">
-      <ns0:renderMetadata xmlns:ns0="urn:minijarvis:semantic-render:v1">{"session": "215", "source_files": {"teacher": "/mnt/compartido/Programación-26-27/Minijarvis/02-PROFESORADO/02-SESIONES/h1/S215-defensa-y-cierre-h1-docente.md", "student_fallback": "/mnt/compartido/Programación-26-27/Minijarvis/01-ALUMNADO/03-SESIONES/h1/S215-defensa-y-cierre-h1-alumnado.md"}, "layout": "closure", "plan_index": 7, "recognition": false, "unit_ids": ["unit-23", "unit-24"], "roles": {"unit-23": "core", "unit-24": "core"}, "source_refs": [{"source": "teacher", "heading": "Cierre de H1", "block_index": 23, "fragment": 0}, {"source": "teacher", "heading": "Al terminar", "block_index": 24, "fragment": 0}], "visible_sources": [{"index": 1, "sha256": "648dfe8f01916388796bf6df4417057f10273f4372262695d1fabccd66cf856e"}, {"index": 2, "sha256": "b9191db1298cdf002ffaaac2eacaf1b80eafef653a58179d53cfe93311feade8"}], "notes_sources": [{"function": "closure", "heading": "Cierre de H1", "sha256": "3df24da5b2cedde43b67d172881c7c2fcc4ed864cdd5b15e37a1b0792ffa0001"}, {"function": "continuity", "heading": "Al terminar", "sha256": "7777b2433d1aacc8b660439cc92b0cd3d65fad46a01f1319169e83d1a0e70d6b"}, {"function": "facilitation", "heading": "Cierre de H1", "sha256": "5ac270c14daf9145b5fa6b3260aaee7fce13571ee2fba5f4f556b6f5b86f5a90"}, {"function": "visible_detail", "heading": "Cierre de H1", "sha256": "648dfe8f01916388796bf6df4417057f10273f4372262695d1fabccd66cf856e"}, {"function": "closure", "heading": "Cierre de H1", "sha256": "b9191db1298cdf002ffaaac2eacaf1b80eafef653a58179d53cfe93311feade8"}, {"function": "closure", "heading": "Cierre de H1", "sha256": "b9191db1298cdf002ffaaac2eacaf1b80eafef653a58179d53cfe93311feade8"}], "relations": {"unit_relations": {"unit-23": {"question_context": ["context", "question"]}}, "schedule": "shared_closure", "source_supports_enriched": true}, "timeline_refs": [5], "composition": {"origin_slides": [21]}, "timing": {"seconds": 120, "allocations": [{"source_index": 5, "seconds": 120, "decision": "Intervalo compartido íntegro; propietario contable seleccionado por función de actividad y referencia timeline de unidad (identidad semántica en empates). Propietario.  Soporte concurrente del mismo reloj fuente: no son turnos de defensa ni una secuencia adicional. Trabajo paralelo: Reflexión individual breve y confirmación del cierre de equipo.", "source_time": "43–45 min", "source_seconds": 120, "is_owner": true, "function": "closure"}], "clock_intervals": [5], "presenter_notes": "Reloj fuente 43–45 min: duración compartida 120 segundos. Trabajo: Cierre común y siguiente paso. Función del soporte: cierre. Soporte concurrente del mismo reloj fuente: no son turnos de defensa ni una secuencia adicional. Trabajo paralelo: Reflexión individual breve y confirmación del cierre de equipo.", "shared_intervals": [{"source_index": 5, "source_time": "43–45 min", "seconds": 120, "is_owner": true, "function": "closure", "action": "Cierre común y siguiente paso.", "concurrent": true, "parallel_work": "Reflexión individual breve y confirmación del cierre de equipo."}]}, "code_blocks": [], "representation_needs": []}</ns0:renderMetadata>
+      <ns0:renderMetadata xmlns:ns0="urn:minijarvis:semantic-render:v1">{"session": "215", "source_files": {"teacher": "/mnt/compartido/Programación-26-27/Minijarvis/02-PROFESORADO/02-SESIONES/h1/S215-defensa-y-cierre-h1-docente.md", "student_fallback": "/mnt/compartido/Programación-26-27/Minijarvis/01-ALUMNADO/03-SESIONES/h1/S215-defensa-y-cierre-h1-alumnado.md"}, "layout": "closure", "plan_index": 7, "recognition": false, "unit_ids": ["unit-23", "unit-24"], "roles": {"unit-23": "core", "unit-24": "core"}, "source_refs": [{"source": "teacher", "heading": "Cierre de H1", "block_index": 23, "fragment": 0}, {"source": "teacher", "heading": "Al terminar", "block_index": 24, "fragment": 0}], "visible_sources": [{"index": 1, "sha256": "648dfe8f01916388796bf6df4417057f10273f4372262695d1fabccd66cf856e"}, {"index": 2, "sha256": "b9191db1298cdf002ffaaac2eacaf1b80eafef653a58179d53cfe93311feade8"}], "notes_sources": [{"function": "closure", "heading": "Cierre de H1", "sha256": "3df24da5b2cedde43b67d172881c7c2fcc4ed864cdd5b15e37a1b0792ffa0001"}, {"function": "continuity", "heading": "Al terminar", "sha256": "7777b2433d1aacc8b660439cc92b0cd3d65fad46a01f1319169e83d1a0e70d6b"}, {"function": "facilitation", "heading": "Cierre de H1", "sha256": "5ac270c14daf9145b5fa6b3260aaee7fce13571ee2fba5f4f556b6f5b86f5a90"}, {"function": "visible_detail", "heading": "Cierre de H1", "sha256": "648dfe8f01916388796bf6df4417057f10273f4372262695d1fabccd66cf856e"}, {"function": "closure", "heading": "Cierre de H1", "sha256": "b9191db1298cdf002ffaaac2eacaf1b80eafef653a58179d53cfe93311feade8"}, {"function": "closure", "heading": "Cierre de H1", "sha256": "b9191db1298cdf002ffaaac2eacaf1b80eafef653a58179d53cfe93311feade8"}], "relations": {"unit_relations": {"unit-23": {"question_context": ["context", "question"]}}, "schedule": "shared_closure", "source_supports_enriched": true}, "timeline_refs": [5], "composition": {"origin_slides": [20]}, "timing": {"seconds": 120, "allocations": [{"source_index": 5, "seconds": 120, "decision": "Intervalo compartido íntegro; propietario contable seleccionado por función de actividad y referencia timeline de unidad (identidad semántica en empates). Propietario.  Soporte concurrente del mismo reloj fuente: no son turnos de defensa ni una secuencia adicional. Trabajo paralelo: Reflexión individual breve y confirmación del cierre de equipo.", "source_time": "43–45 min", "source_seconds": 120, "is_owner": true, "function": "closure"}], "clock_intervals": [5], "presenter_notes": "Reloj fuente 43–45 min: duración compartida 120 segundos. Trabajo: Cierre común y siguiente paso. Función del soporte: cierre. Soporte concurrente del mismo reloj fuente: no son turnos de defensa ni una secuencia adicional. Trabajo paralelo: Reflexión individual breve y confirmación del cierre de equipo.", "shared_intervals": [{"source_index": 5, "source_time": "43–45 min", "seconds": 120, "is_owner": true, "function": "closure", "action": "Cierre común y siguiente paso.", "concurrent": true, "parallel_work": "Reflexión individual breve y confirmación del cierre de equipo."}]}, "code_blocks": [], "representation_needs": []}</ns0:renderMetadata>
     </p:ext>
   </p:extLst>
 </p:sld>
@@ -11741,7 +11668,7 @@
   </p:clrMapOvr>
   <p:extLst>
     <p:ext uri="urn:minijarvis:semantic-render:v1">
-      <ns0:renderMetadata xmlns:ns0="urn:minijarvis:semantic-render:v1">{"session": "215", "source_files": {"teacher": "/mnt/compartido/Programación-26-27/Minijarvis/02-PROFESORADO/02-SESIONES/h1/S215-defensa-y-cierre-h1-docente.md", "student_fallback": "/mnt/compartido/Programación-26-27/Minijarvis/01-ALUMNADO/03-SESIONES/h1/S215-defensa-y-cierre-h1-alumnado.md"}, "layout": "concept", "plan_index": 1, "recognition": false, "unit_ids": ["unit-4", "unit-6", "unit-22"], "roles": {"unit-4": "core", "unit-6": "core", "unit-22": "core"}, "source_refs": [{"source": "teacher", "heading": "Defensa práctica individual", "block_index": 4, "fragment": 0}, {"source": "teacher", "heading": "Banco de preguntas para seleccionar", "block_index": 6, "fragment": 0}, {"source": "teacher", "heading": "Andamiaje durante la defensa", "block_index": 22, "fragment": 0}], "visible_sources": [{"index": 0, "sha256": "581f45615f90de5b0b70429a673a839570314dcc6831a4653ec6fc655dca3111"}], "notes_sources": [{"function": "question_bank", "heading": "Banco de preguntas para seleccionar", "sha256": "175f102823c77d740d62d33c10027c8ccf28aca9ee3e05ddac7d1c35b5662ef7"}, {"function": "scaffolding", "heading": "Andamiaje durante la defensa", "sha256": "f789722e9a5385f13d67d2f5d8df5af2afe889fd4abd65b0551d275f6b9f9b1f"}, {"function": "scaffolding", "heading": "Andamiaje durante la defensa", "sha256": "876ea22548cb7bce86d0dfcbd2ec5e54317c5aac23ef58b3a1ff55302e634578"}, {"function": "visible_detail", "heading": "Defensa práctica individual", "sha256": "581f45615f90de5b0b70429a673a839570314dcc6831a4653ec6fc655dca3111"}], "relations": {"unit_relations": {"unit-4": {}}, "schedule": "concurrent_support", "source_supports_enriched": true}, "timeline_refs": [1, 2, 3, 4], "composition": {"origin_slides": [4]}, "timing": {"seconds": 2280, "allocations": [{"source_index": 1, "seconds": 600, "decision": "Intervalo compartido íntegro; propietario contable seleccionado por función de actividad y referencia timeline de unidad (identidad semántica en empates). Propietario.  Soporte concurrente del mismo reloj fuente: no son turnos de defensa ni una secuencia adicional. Trabajo paralelo: Ensayo y revisión por parejas: señalar, predecir, modificar y comprobar.", "source_time": "5–15 min", "source_seconds": 600, "is_owner": true, "function": "defense"}, {"source_index": 2, "seconds": 780, "decision": "Intervalo compartido íntegro; propietario contable seleccionado por función de actividad y referencia timeline de unidad (identidad semántica en empates). Propietario.  Soporte concurrente del mismo reloj fuente: no son turnos de defensa ni una secuencia adicional. Trabajo paralelo: Review del incremento y retrospectiva en equipo.", "source_time": "15–28 min", "source_seconds": 780, "is_owner": true, "function": "defense"}, {"source_index": 3, "seconds": 600, "decision": "Intervalo compartido íntegro; propietario contable seleccionado por función de actividad y referencia timeline de unidad (identidad semántica en empates). Propietario.  Soporte concurrente del mismo reloj fuente: no son turnos de defensa ni una secuencia adicional. Trabajo paralelo: Preparar la entrega Moodle, revisar enlaces profundos y probar permisos.", "source_time": "28–38 min", "source_seconds": 600, "is_owner": true, "function": "defense"}, {"source_index": 4, "seconds": 300, "decision": "Intervalo compartido íntegro; propietario contable seleccionado por función de actividad y referencia timeline de unidad (identidad semántica en empates). Propietario.  Soporte concurrente del mismo reloj fuente: no son turnos de defensa ni una secuencia adicional. Trabajo paralelo: Un integrante realiza la entrega; el equipo verifica que abre correctamente.", "source_time": "38–43 min", "source_seconds": 300, "is_owner": true, "function": "defense"}], "clock_intervals": [1, 2, 3, 4], "presenter_notes": "Reloj fuente 5–15 min: duración compartida 600 segundos. Trabajo: Defensas individuales breves. Función del soporte: defensa. Soporte concurrente del mismo reloj fuente: no son turnos de defensa ni una secuencia adicional. Trabajo paralelo: Ensayo y revisión por parejas: señalar, predecir, modificar y comprobar. Reloj fuente 15–28 min: duración compartida 780 segundos. Trabajo: Continuar defensas y recuperar respuestas vagas sobre el código. Función del soporte: defensa. Soporte concurrente del mismo reloj fuente: no son turnos de defensa ni una secuencia adicional. Trabajo paralelo: Review del incremento y retrospectiva en equipo. Reloj fuente 28–38 min: duración compartida 600 segundos. Trabajo: Continuar defensas o una segunda comprobación breve cuando haga falta. Función del soporte: defensa. Soporte concurrente del mismo reloj fuente: no son turnos de defensa ni una secuencia adicional. Trabajo paralelo: Preparar la entrega Moodle, revisar enlaces profundos y probar permisos. Reloj fuente 38–43 min: duración compartida 300 segundos. Trabajo: Resolver defensas pendientes sin convertirlas en exposiciones. Función del soporte: defensa. Soporte concurrente del mismo reloj fuente: no son turnos de defensa ni una secuencia adicional. Trabajo paralelo: Un integrante realiza la entrega; el equipo verifica que abre correctamente.", "shared_intervals": [{"source_index": 1, "source_time": "5–15 min", "seconds": 600, "is_owner": true, "function": "defense", "action": "Defensas individuales breves.", "concurrent": true, "parallel_work": "Ensayo y revisión por parejas: señalar, predecir, modificar y comprobar."}, {"source_index": 2, "source_time": "15–28 min", "seconds": 780, "is_owner": true, "function": "defense", "action": "Continuar defensas y recuperar respuestas vagas sobre el código.", "concurrent": true, "parallel_work": "Review del incremento y retrospectiva en equipo."}, {"source_index": 3, "source_time": "28–38 min", "seconds": 600, "is_owner": true, "function": "defense", "action": "Continuar defensas o una segunda comprobación breve cuando haga falta.", "concurrent": true, "parallel_work": "Preparar la entrega Moodle, revisar enlaces profundos y probar permisos."}, {"source_index": 4, "source_time": "38–43 min", "seconds": 300, "is_owner": true, "function": "defense", "action": "Resolver defensas pendientes sin convertirlas en exposiciones.", "concurrent": true, "parallel_work": "Un integrante realiza la entrega; el equipo verifica que abre correctamente."}]}, "code_blocks": [], "representation_needs": []}</ns0:renderMetadata>
+      <ns0:renderMetadata xmlns:ns0="urn:minijarvis:semantic-render:v1">{"session": "215", "source_files": {"teacher": "/mnt/compartido/Programación-26-27/Minijarvis/02-PROFESORADO/02-SESIONES/h1/S215-defensa-y-cierre-h1-docente.md", "student_fallback": "/mnt/compartido/Programación-26-27/Minijarvis/01-ALUMNADO/03-SESIONES/h1/S215-defensa-y-cierre-h1-alumnado.md"}, "layout": "concept", "plan_index": 1, "recognition": false, "unit_ids": ["unit-4", "unit-6", "unit-22"], "roles": {"unit-4": "core", "unit-6": "core", "unit-22": "core"}, "source_refs": [{"source": "teacher", "heading": "Defensa práctica individual", "block_index": 4, "fragment": 0}, {"source": "teacher", "heading": "Banco de preguntas para seleccionar", "block_index": 6, "fragment": 0}, {"source": "teacher", "heading": "Andamiaje durante la defensa", "block_index": 22, "fragment": 0}], "visible_sources": [{"index": 0, "sha256": "581f45615f90de5b0b70429a673a839570314dcc6831a4653ec6fc655dca3111"}], "notes_sources": [{"function": "question_bank", "heading": "Banco de preguntas para seleccionar", "sha256": "175f102823c77d740d62d33c10027c8ccf28aca9ee3e05ddac7d1c35b5662ef7"}, {"function": "scaffolding", "heading": "Andamiaje durante la defensa", "sha256": "f789722e9a5385f13d67d2f5d8df5af2afe889fd4abd65b0551d275f6b9f9b1f"}, {"function": "scaffolding", "heading": "Andamiaje durante la defensa", "sha256": "6b3e6c7f27b9b6eb3e071e344b98dace4cfe8ad5a5028cdb538826e8a080cac6"}, {"function": "visible_detail", "heading": "Defensa práctica individual", "sha256": "581f45615f90de5b0b70429a673a839570314dcc6831a4653ec6fc655dca3111"}], "relations": {"unit_relations": {"unit-4": {}}, "schedule": "concurrent_support", "source_supports_enriched": true}, "timeline_refs": [1, 2, 3, 4], "composition": {"origin_slides": [4]}, "timing": {"seconds": 2280, "allocations": [{"source_index": 1, "seconds": 600, "decision": "Intervalo compartido íntegro; propietario contable seleccionado por función de actividad y referencia timeline de unidad (identidad semántica en empates). Propietario.  Soporte concurrente del mismo reloj fuente: no son turnos de defensa ni una secuencia adicional. Trabajo paralelo: Ensayo y revisión por parejas: señalar, predecir, modificar y comprobar.", "source_time": "5–15 min", "source_seconds": 600, "is_owner": true, "function": "defense"}, {"source_index": 2, "seconds": 780, "decision": "Intervalo compartido íntegro; propietario contable seleccionado por función de actividad y referencia timeline de unidad (identidad semántica en empates). Propietario.  Soporte concurrente del mismo reloj fuente: no son turnos de defensa ni una secuencia adicional. Trabajo paralelo: Review del incremento y retrospectiva en equipo.", "source_time": "15–28 min", "source_seconds": 780, "is_owner": true, "function": "defense"}, {"source_index": 3, "seconds": 600, "decision": "Intervalo compartido íntegro; propietario contable seleccionado por función de actividad y referencia timeline de unidad (identidad semántica en empates). Propietario.  Soporte concurrente del mismo reloj fuente: no son turnos de defensa ni una secuencia adicional. Trabajo paralelo: Preparar la entrega Moodle, revisar enlaces profundos y probar permisos.", "source_time": "28–38 min", "source_seconds": 600, "is_owner": true, "function": "defense"}, {"source_index": 4, "seconds": 300, "decision": "Intervalo compartido íntegro; propietario contable seleccionado por función de actividad y referencia timeline de unidad (identidad semántica en empates). Propietario.  Soporte concurrente del mismo reloj fuente: no son turnos de defensa ni una secuencia adicional. Trabajo paralelo: Un integrante realiza la entrega; el equipo verifica que abre correctamente.", "source_time": "38–43 min", "source_seconds": 300, "is_owner": true, "function": "defense"}], "clock_intervals": [1, 2, 3, 4], "presenter_notes": "Reloj fuente 5–15 min: duración compartida 600 segundos. Trabajo: Defensas individuales breves. Función del soporte: defensa. Soporte concurrente del mismo reloj fuente: no son turnos de defensa ni una secuencia adicional. Trabajo paralelo: Ensayo y revisión por parejas: señalar, predecir, modificar y comprobar. Reloj fuente 15–28 min: duración compartida 780 segundos. Trabajo: Continuar defensas y recuperar respuestas vagas sobre el código. Función del soporte: defensa. Soporte concurrente del mismo reloj fuente: no son turnos de defensa ni una secuencia adicional. Trabajo paralelo: Review del incremento y retrospectiva en equipo. Reloj fuente 28–38 min: duración compartida 600 segundos. Trabajo: Continuar defensas o una segunda comprobación breve cuando haga falta. Función del soporte: defensa. Soporte concurrente del mismo reloj fuente: no son turnos de defensa ni una secuencia adicional. Trabajo paralelo: Preparar la entrega Moodle, revisar enlaces profundos y probar permisos. Reloj fuente 38–43 min: duración compartida 300 segundos. Trabajo: Resolver defensas pendientes sin convertirlas en exposiciones. Función del soporte: defensa. Soporte concurrente del mismo reloj fuente: no son turnos de defensa ni una secuencia adicional. Trabajo paralelo: Un integrante realiza la entrega; el equipo verifica que abre correctamente.", "shared_intervals": [{"source_index": 1, "source_time": "5–15 min", "seconds": 600, "is_owner": true, "function": "defense", "action": "Defensas individuales breves.", "concurrent": true, "parallel_work": "Ensayo y revisión por parejas: señalar, predecir, modificar y comprobar."}, {"source_index": 2, "source_time": "15–28 min", "seconds": 780, "is_owner": true, "function": "defense", "action": "Continuar defensas y recuperar respuestas vagas sobre el código.", "concurrent": true, "parallel_work": "Review del incremento y retrospectiva en equipo."}, {"source_index": 3, "source_time": "28–38 min", "seconds": 600, "is_owner": true, "function": "defense", "action": "Continuar defensas o una segunda comprobación breve cuando haga falta.", "concurrent": true, "parallel_work": "Preparar la entrega Moodle, revisar enlaces profundos y probar permisos."}, {"source_index": 4, "source_time": "38–43 min", "seconds": 300, "is_owner": true, "function": "defense", "action": "Resolver defensas pendientes sin convertirlas en exposiciones.", "concurrent": true, "parallel_work": "Un integrante realiza la entrega; el equipo verifica que abre correctamente."}]}, "code_blocks": [], "representation_needs": []}</ns0:renderMetadata>
     </p:ext>
   </p:extLst>
 </p:sld>
@@ -12789,7 +12716,7 @@
   </p:clrMapOvr>
   <p:extLst>
     <p:ext uri="urn:minijarvis:semantic-render:v1">
-      <ns0:renderMetadata xmlns:ns0="urn:minijarvis:semantic-render:v1">{"session": "215", "source_files": {"teacher": "/mnt/compartido/Programación-26-27/Minijarvis/02-PROFESORADO/02-SESIONES/h1/S215-defensa-y-cierre-h1-docente.md", "student_fallback": "/mnt/compartido/Programación-26-27/Minijarvis/01-ALUMNADO/03-SESIONES/h1/S215-defensa-y-cierre-h1-alumnado.md"}, "layout": "concept", "plan_index": 1, "recognition": false, "unit_ids": ["unit-7", "unit-8", "unit-9", "unit-10", "unit-11", "unit-12"], "roles": {"unit-7": "core", "unit-8": "core", "unit-9": "core", "unit-10": "core", "unit-11": "core", "unit-12": "core"}, "source_refs": [{"source": "teacher", "heading": "Estructura y ejecución", "block_index": 7, "fragment": 0}, {"source": "teacher", "heading": "Banco de preguntas para seleccionar", "block_index": 6, "fragment": 0}, {"source": "teacher", "heading": "Variables, constantes y literales", "block_index": 8, "fragment": 0}, {"source": "teacher", "heading": "Banco de preguntas para seleccionar", "block_index": 6, "fragment": 0}, {"source": "teacher", "heading": "Expresiones, operaciones y actualizaciones", "block_index": 9, "fragment": 0}, {"source": "teacher", "heading": "Banco de preguntas para seleccionar", "block_index": 6, "fragment": 0}, {"source": "teacher", "heading": "Entrada y conversiones", "block_index": 10, "fragment": 0}, {"source": "teacher", "heading": "Banco de preguntas para seleccionar", "block_index": 6, "fragment": 0}, {"source": "teacher", "heading": "Comparaciones y decisiones", "block_index": 11, "fragment": 0}, {"source": "teacher", "heading": "Banco de preguntas para seleccionar", "block_index": 6, "fragment": 0}, {"source": "teacher", "heading": "Alcance de H1", "block_index": 12, "fragment": 0}, {"source": "teacher", "heading": "Banco de preguntas para seleccionar", "block_index": 6, "fragment": 0}], "visible_sources": [{"index": 8, "sha256": "a2aa2cb72110d2e986cd9201284d50fef06e25c04622f02979da3c37bf368596"}, {"index": 9, "sha256": "0cb8327775890ce09d547bdee8b9421218f46e33561dfdc7174ad0e84ee5b687"}, {"index": 10, "sha256": "160d04b455da4956dbec2477ed64c658f211bc0ca0da27304e06ca26d00215ac"}, {"index": 11, "sha256": "f4f929fdca5e28b7e7b361b754bdd568838598234ea0af3b2b693dd447917ae1"}, {"index": 12, "sha256": "c935554cec995f11e85be7ffd02e4db86b2dcab1c8af127513d6f202cd484433"}], "notes_sources": [{"function": "question_bank", "heading": "Estructura y ejecución", "sha256": "62421f1b7bb6e18172b979788547424a3448a3da828fcb0496467cafc861be09"}, {"function": "question_bank", "heading": "Variables, constantes y literales", "sha256": "1707da5d024e7a1e76bfefb6ee930f1fff4625d488d19884086596be0b72ceed"}, {"function": "question_bank", "heading": "Expresiones, operaciones y actualizaciones", "sha256": "146e14b0f71ce43bed0b591bc10fa6ad9629a07de6c0b187c5927028340b06b6"}, {"function": "question_bank", "heading": "Entrada y conversiones", "sha256": "98a5b57d0280b9ab057df979ce951f689de2741a6dc527059249e80c1b8c78eb"}, {"function": "question_bank", "heading": "Comparaciones y decisiones", "sha256": "b6c6add6faf73bf44205a19c6d9103c0c2fdcae2be569cfb074ef6b1833d136f"}, {"function": "question_bank", "heading": "Alcance de H1", "sha256": "a0a083c0ed299c40eb684212bb508b870f75a588a13e3a469bbb7198b7aa1c84"}], "relations": {"unit_relations": {"unit-7": {"question_context": ["context", "question"]}, "unit-8": {}, "unit-9": {"question_context": ["context", "question"]}, "unit-10": {"question_context": ["context", "question"]}, "unit-11": {}, "unit-12": {"question_context": ["context", "question"]}}, "schedule": "concurrent_support", "source_supports_enriched": true}, "timeline_refs": [0, 1, 2, 3, 4], "composition": {"origin_slides": [7, 8]}, "timing": {"seconds": 0, "allocations": [{"source_index": 0, "seconds": 0, "decision": "Intervalo compartido íntegro; propietario contable seleccionado por función de actividad y referencia timeline de unidad (identidad semántica en empates). Soporte, sin duplicación contable.  Soporte concurrente del mismo reloj fuente: no son turnos de defensa ni una secuencia adicional. Trabajo paralelo: Abrir código, README, Scrum y enlaces de entrega.", "source_time": "0–5 min", "source_seconds": 300, "is_owner": false, "function": "question_bank"}, {"source_index": 1, "seconds": 0, "decision": "Intervalo compartido íntegro; propietario contable seleccionado por función de actividad y referencia timeline de unidad (identidad semántica en empates). Soporte, sin duplicación contable.  Soporte concurrente del mismo reloj fuente: no son turnos de defensa ni una secuencia adicional. Trabajo paralelo: Ensayo y revisión por parejas: señalar, predecir, modificar y comprobar.", "source_time": "5–15 min", "source_seconds": 600, "is_owner": false, "function": "question_bank"}, {"source_index": 2, "seconds": 0, "decision": "Intervalo compartido íntegro; propietario contable seleccionado por función de actividad y referencia timeline de unidad (identidad semántica en empates). Soporte, sin duplicación contable.  Soporte concurrente del mismo reloj fuente: no son turnos de defensa ni una secuencia adicional. Trabajo paralelo: Review del incremento y retrospectiva en equipo.", "source_time": "15–28 min", "source_seconds": 780, "is_owner": false, "function": "question_bank"}, {"source_index": 3, "seconds": 0, "decision": "Intervalo compartido íntegro; propietario contable seleccionado por función de actividad y referencia timeline de unidad (identidad semántica en empates). Soporte, sin duplicación contable.  Soporte concurrente del mismo reloj fuente: no son turnos de defensa ni una secuencia adicional. Trabajo paralelo: Preparar la entrega Moodle, revisar enlaces profundos y probar permisos.", "source_time": "28–38 min", "source_seconds": 600, "is_owner": false, "function": "question_bank"}, {"source_index": 4, "seconds": 0, "decision": "Intervalo compartido íntegro; propietario contable seleccionado por función de actividad y referencia timeline de unidad (identidad semántica en empates). Soporte, sin duplicación contable.  Soporte concurrente del mismo reloj fuente: no son turnos de defensa ni una secuencia adicional. Trabajo paralelo: Un integrante realiza la entrega; el equipo verifica que abre correctamente.", "source_time": "38–43 min", "source_seconds": 300, "is_owner": false, "function": "question_bank"}], "clock_intervals": [0, 1, 2, 3, 4], "presenter_notes": "Reloj fuente 0–5 min: duración compartida 300 segundos. Trabajo: Explicar el protocolo y confirmar el orden. Función del soporte: apoyo al trabajo. Soporte concurrente del mismo reloj fuente: no son turnos de defensa ni una secuencia adicional. Trabajo paralelo: Abrir código, README, Scrum y enlaces de entrega. Reloj fuente 5–15 min: duración compartida 600 segundos. Trabajo: Defensas individuales breves. Función del soporte: apoyo al trabajo. Soporte concurrente del mismo reloj fuente: no son turnos de defensa ni una secuencia adicional. Trabajo paralelo: Ensayo y revisión por parejas: señalar, predecir, modificar y comprobar. Reloj fuente 15–28 min: duración compartida 780 segundos. Trabajo: Continuar defensas y recuperar respuestas vagas sobre el código. Función del soporte: apoyo al trabajo. Soporte concurrente del mismo reloj fuente: no son turnos de defensa ni una secuencia adicional. Trabajo paralelo: Review del incremento y retrospectiva en equipo. Reloj fuente 28–38 min: duración compartida 600 segundos. Trabajo: Continuar defensas o una segunda comprobación breve cuando haga falta. Función del soporte: apoyo al trabajo. Soporte concurrente del mismo reloj fuente: no son turnos de defensa ni una secuencia adicional. Trabajo paralelo: Preparar la entrega Moodle, revisar enlaces profundos y probar permisos. Reloj fuente 38–43 min: duración compartida 300 segundos. Trabajo: Resolver defensas pendientes sin convertirlas en exposiciones. Función del soporte: apoyo al trabajo. Soporte concurrente del mismo reloj fuente: no son turnos de defensa ni una secuencia adicional. Trabajo paralelo: Un integrante realiza la entrega; el equipo verifica que abre correctamente.", "shared_intervals": [{"source_index": 0, "source_time": "0–5 min", "seconds": 300, "is_owner": false, "function": "question_bank", "action": "Explicar el protocolo y confirmar el orden.", "concurrent": true, "parallel_work": "Abrir código, README, Scrum y enlaces de entrega."}, {"source_index": 1, "source_time": "5–15 min", "seconds": 600, "is_owner": false, "function": "question_bank", "action": "Defensas individuales breves.", "concurrent": true, "parallel_work": "Ensayo y revisión por parejas: señalar, predecir, modificar y comprobar."}, {"source_index": 2, "source_time": "15–28 min", "seconds": 780, "is_owner": false, "function": "question_bank", "action": "Continuar defensas y recuperar respuestas vagas sobre el código.", "concurrent": true, "parallel_work": "Review del incremento y retrospectiva en equipo."}, {"source_index": 3, "source_time": "28–38 min", "seconds": 600, "is_owner": false, "function": "question_bank", "action": "Continuar defensas o una segunda comprobación breve cuando haga falta.", "concurrent": true, "parallel_work": "Preparar la entrega Moodle, revisar enlaces profundos y probar permisos."}, {"source_index": 4, "source_time": "38–43 min", "seconds": 300, "is_owner": false, "function": "question_bank", "action": "Resolver defensas pendientes sin convertirlas en exposiciones.", "concurrent": true, "parallel_work": "Un integrante realiza la entrega; el equipo verifica que abre correctamente."}]}, "code_blocks": [], "representation_needs": []}</ns0:renderMetadata>
+      <ns0:renderMetadata xmlns:ns0="urn:minijarvis:semantic-render:v1">{"session": "215", "source_files": {"teacher": "/mnt/compartido/Programación-26-27/Minijarvis/02-PROFESORADO/02-SESIONES/h1/S215-defensa-y-cierre-h1-docente.md", "student_fallback": "/mnt/compartido/Programación-26-27/Minijarvis/01-ALUMNADO/03-SESIONES/h1/S215-defensa-y-cierre-h1-alumnado.md"}, "layout": "concept", "plan_index": 1, "recognition": false, "unit_ids": ["unit-7", "unit-8", "unit-9", "unit-10", "unit-11", "unit-12"], "roles": {"unit-7": "core", "unit-8": "core", "unit-9": "core", "unit-10": "core", "unit-11": "core", "unit-12": "core"}, "source_refs": [{"source": "teacher", "heading": "Estructura y ejecución", "block_index": 7, "fragment": 0}, {"source": "teacher", "heading": "Banco de preguntas para seleccionar", "block_index": 6, "fragment": 0}, {"source": "teacher", "heading": "Variables, constantes y literales", "block_index": 8, "fragment": 0}, {"source": "teacher", "heading": "Banco de preguntas para seleccionar", "block_index": 6, "fragment": 0}, {"source": "teacher", "heading": "Expresiones, operaciones y actualizaciones", "block_index": 9, "fragment": 0}, {"source": "teacher", "heading": "Banco de preguntas para seleccionar", "block_index": 6, "fragment": 0}, {"source": "teacher", "heading": "Entrada y conversiones", "block_index": 10, "fragment": 0}, {"source": "teacher", "heading": "Banco de preguntas para seleccionar", "block_index": 6, "fragment": 0}, {"source": "teacher", "heading": "Comparación booleana sin bifurcación", "block_index": 11, "fragment": 0}, {"source": "teacher", "heading": "Banco de preguntas para seleccionar", "block_index": 6, "fragment": 0}, {"source": "teacher", "heading": "Alcance de H1", "block_index": 12, "fragment": 0}, {"source": "teacher", "heading": "Banco de preguntas para seleccionar", "block_index": 6, "fragment": 0}], "visible_sources": [{"index": 8, "sha256": "a2aa2cb72110d2e986cd9201284d50fef06e25c04622f02979da3c37bf368596"}, {"index": 9, "sha256": "0cb8327775890ce09d547bdee8b9421218f46e33561dfdc7174ad0e84ee5b687"}, {"index": 10, "sha256": "160d04b455da4956dbec2477ed64c658f211bc0ca0da27304e06ca26d00215ac"}, {"index": 11, "sha256": "f4f929fdca5e28b7e7b361b754bdd568838598234ea0af3b2b693dd447917ae1"}, {"index": 12, "sha256": "c935554cec995f11e85be7ffd02e4db86b2dcab1c8af127513d6f202cd484433"}], "notes_sources": [{"function": "question_bank", "heading": "Estructura y ejecución", "sha256": "62421f1b7bb6e18172b979788547424a3448a3da828fcb0496467cafc861be09"}, {"function": "question_bank", "heading": "Variables, constantes y literales", "sha256": "1707da5d024e7a1e76bfefb6ee930f1fff4625d488d19884086596be0b72ceed"}, {"function": "question_bank", "heading": "Expresiones, operaciones y actualizaciones", "sha256": "146e14b0f71ce43bed0b591bc10fa6ad9629a07de6c0b187c5927028340b06b6"}, {"function": "question_bank", "heading": "Entrada y conversiones", "sha256": "98a5b57d0280b9ab057df979ce951f689de2741a6dc527059249e80c1b8c78eb"}, {"function": "question_bank", "heading": "Comparación booleana sin bifurcación", "sha256": "6d45baf211e0cabd700bead8f0e8cd20b098fb14179d88675243b25c8e6a84b0"}, {"function": "question_bank", "heading": "Alcance de H1", "sha256": "a0a083c0ed299c40eb684212bb508b870f75a588a13e3a469bbb7198b7aa1c84"}], "relations": {"unit_relations": {"unit-7": {"question_context": ["context", "question"]}, "unit-8": {}, "unit-9": {"question_context": ["context", "question"]}, "unit-10": {"question_context": ["context", "question"]}, "unit-11": {}, "unit-12": {"question_context": ["context", "question"]}}, "schedule": "concurrent_support", "source_supports_enriched": true}, "timeline_refs": [0, 1, 2, 3, 4], "composition": {"origin_slides": [7, 8]}, "timing": {"seconds": 0, "allocations": [{"source_index": 0, "seconds": 0, "decision": "Intervalo compartido íntegro; propietario contable seleccionado por función de actividad y referencia timeline de unidad (identidad semántica en empates). Soporte, sin duplicación contable.  Soporte concurrente del mismo reloj fuente: no son turnos de defensa ni una secuencia adicional. Trabajo paralelo: Abrir código, README, Scrum y enlaces de entrega.", "source_time": "0–5 min", "source_seconds": 300, "is_owner": false, "function": "question_bank"}, {"source_index": 1, "seconds": 0, "decision": "Intervalo compartido íntegro; propietario contable seleccionado por función de actividad y referencia timeline de unidad (identidad semántica en empates). Soporte, sin duplicación contable.  Soporte concurrente del mismo reloj fuente: no son turnos de defensa ni una secuencia adicional. Trabajo paralelo: Ensayo y revisión por parejas: señalar, predecir, modificar y comprobar.", "source_time": "5–15 min", "source_seconds": 600, "is_owner": false, "function": "question_bank"}, {"source_index": 2, "seconds": 0, "decision": "Intervalo compartido íntegro; propietario contable seleccionado por función de actividad y referencia timeline de unidad (identidad semántica en empates). Soporte, sin duplicación contable.  Soporte concurrente del mismo reloj fuente: no son turnos de defensa ni una secuencia adicional. Trabajo paralelo: Review del incremento y retrospectiva en equipo.", "source_time": "15–28 min", "source_seconds": 780, "is_owner": false, "function": "question_bank"}, {"source_index": 3, "seconds": 0, "decision": "Intervalo compartido íntegro; propietario contable seleccionado por función de actividad y referencia timeline de unidad (identidad semántica en empates). Soporte, sin duplicación contable.  Soporte concurrente del mismo reloj fuente: no son turnos de defensa ni una secuencia adicional. Trabajo paralelo: Preparar la entrega Moodle, revisar enlaces profundos y probar permisos.", "source_time": "28–38 min", "source_seconds": 600, "is_owner": false, "function": "question_bank"}, {"source_index": 4, "seconds": 0, "decision": "Intervalo compartido íntegro; propietario contable seleccionado por función de actividad y referencia timeline de unidad (identidad semántica en empates). Soporte, sin duplicación contable.  Soporte concurrente del mismo reloj fuente: no son turnos de defensa ni una secuencia adicional. Trabajo paralelo: Un integrante realiza la entrega; el equipo verifica que abre correctamente.", "source_time": "38–43 min", "source_seconds": 300, "is_owner": false, "function": "question_bank"}], "clock_intervals": [0, 1, 2, 3, 4], "presenter_notes": "Reloj fuente 0–5 min: duración compartida 300 segundos. Trabajo: Explicar el protocolo y confirmar el orden. Función del soporte: apoyo al trabajo. Soporte concurrente del mismo reloj fuente: no son turnos de defensa ni una secuencia adicional. Trabajo paralelo: Abrir código, README, Scrum y enlaces de entrega. Reloj fuente 5–15 min: duración compartida 600 segundos. Trabajo: Defensas individuales breves. Función del soporte: apoyo al trabajo. Soporte concurrente del mismo reloj fuente: no son turnos de defensa ni una secuencia adicional. Trabajo paralelo: Ensayo y revisión por parejas: señalar, predecir, modificar y comprobar. Reloj fuente 15–28 min: duración compartida 780 segundos. Trabajo: Continuar defensas y recuperar respuestas vagas sobre el código. Función del soporte: apoyo al trabajo. Soporte concurrente del mismo reloj fuente: no son turnos de defensa ni una secuencia adicional. Trabajo paralelo: Review del incremento y retrospectiva en equipo. Reloj fuente 28–38 min: duración compartida 600 segundos. Trabajo: Continuar defensas o una segunda comprobación breve cuando haga falta. Función del soporte: apoyo al trabajo. Soporte concurrente del mismo reloj fuente: no son turnos de defensa ni una secuencia adicional. Trabajo paralelo: Preparar la entrega Moodle, revisar enlaces profundos y probar permisos. Reloj fuente 38–43 min: duración compartida 300 segundos. Trabajo: Resolver defensas pendientes sin convertirlas en exposiciones. Función del soporte: apoyo al trabajo. Soporte concurrente del mismo reloj fuente: no son turnos de defensa ni una secuencia adicional. Trabajo paralelo: Un integrante realiza la entrega; el equipo verifica que abre correctamente.", "shared_intervals": [{"source_index": 0, "source_time": "0–5 min", "seconds": 300, "is_owner": false, "function": "question_bank", "action": "Explicar el protocolo y confirmar el orden.", "concurrent": true, "parallel_work": "Abrir código, README, Scrum y enlaces de entrega."}, {"source_index": 1, "source_time": "5–15 min", "seconds": 600, "is_owner": false, "function": "question_bank", "action": "Defensas individuales breves.", "concurrent": true, "parallel_work": "Ensayo y revisión por parejas: señalar, predecir, modificar y comprobar."}, {"source_index": 2, "source_time": "15–28 min", "seconds": 780, "is_owner": false, "function": "question_bank", "action": "Continuar defensas y recuperar respuestas vagas sobre el código.", "concurrent": true, "parallel_work": "Review del incremento y retrospectiva en equipo."}, {"source_index": 3, "source_time": "28–38 min", "seconds": 600, "is_owner": false, "function": "question_bank", "action": "Continuar defensas o una segunda comprobación breve cuando haga falta.", "concurrent": true, "parallel_work": "Preparar la entrega Moodle, revisar enlaces profundos y probar permisos."}, {"source_index": 4, "source_time": "38–43 min", "seconds": 300, "is_owner": false, "function": "question_bank", "action": "Resolver defensas pendientes sin convertirlas en exposiciones.", "concurrent": true, "parallel_work": "Un integrante realiza la entrega; el equipo verifica que abre correctamente."}]}, "code_blocks": [], "representation_needs": []}</ns0:renderMetadata>
     </p:ext>
   </p:extLst>
 </p:sld>
@@ -12987,7 +12914,7 @@
   </p:clrMapOvr>
   <p:extLst>
     <p:ext uri="urn:minijarvis:semantic-render:v1">
-      <ns0:renderMetadata xmlns:ns0="urn:minijarvis:semantic-render:v1">{"session": "215", "source_files": {"teacher": "/mnt/compartido/Programación-26-27/Minijarvis/02-PROFESORADO/02-SESIONES/h1/S215-defensa-y-cierre-h1-docente.md", "student_fallback": "/mnt/compartido/Programación-26-27/Minijarvis/01-ALUMNADO/03-SESIONES/h1/S215-defensa-y-cierre-h1-alumnado.md"}, "layout": "concept", "plan_index": 1, "recognition": false, "unit_ids": ["unit-7", "unit-8", "unit-9", "unit-10", "unit-11", "unit-12"], "roles": {"unit-7": "core", "unit-8": "core", "unit-9": "core", "unit-10": "core", "unit-11": "core", "unit-12": "core"}, "source_refs": [{"source": "teacher", "heading": "Estructura y ejecución", "block_index": 7, "fragment": 0}, {"source": "teacher", "heading": "Banco de preguntas para seleccionar", "block_index": 6, "fragment": 0}, {"source": "teacher", "heading": "Variables, constantes y literales", "block_index": 8, "fragment": 0}, {"source": "teacher", "heading": "Banco de preguntas para seleccionar", "block_index": 6, "fragment": 0}, {"source": "teacher", "heading": "Expresiones, operaciones y actualizaciones", "block_index": 9, "fragment": 0}, {"source": "teacher", "heading": "Banco de preguntas para seleccionar", "block_index": 6, "fragment": 0}, {"source": "teacher", "heading": "Entrada y conversiones", "block_index": 10, "fragment": 0}, {"source": "teacher", "heading": "Banco de preguntas para seleccionar", "block_index": 6, "fragment": 0}, {"source": "teacher", "heading": "Comparaciones y decisiones", "block_index": 11, "fragment": 0}, {"source": "teacher", "heading": "Banco de preguntas para seleccionar", "block_index": 6, "fragment": 0}, {"source": "teacher", "heading": "Alcance de H1", "block_index": 12, "fragment": 0}, {"source": "teacher", "heading": "Banco de preguntas para seleccionar", "block_index": 6, "fragment": 0}], "visible_sources": [{"index": 13, "sha256": "9529b337863bec26ae973e887d521b7e76b49212695b5e1ca08146a300215e04"}], "notes_sources": [{"function": "question_bank", "heading": "Estructura y ejecución", "sha256": "62421f1b7bb6e18172b979788547424a3448a3da828fcb0496467cafc861be09"}, {"function": "question_bank", "heading": "Variables, constantes y literales", "sha256": "1707da5d024e7a1e76bfefb6ee930f1fff4625d488d19884086596be0b72ceed"}, {"function": "question_bank", "heading": "Expresiones, operaciones y actualizaciones", "sha256": "146e14b0f71ce43bed0b591bc10fa6ad9629a07de6c0b187c5927028340b06b6"}, {"function": "question_bank", "heading": "Entrada y conversiones", "sha256": "98a5b57d0280b9ab057df979ce951f689de2741a6dc527059249e80c1b8c78eb"}, {"function": "question_bank", "heading": "Comparaciones y decisiones", "sha256": "b6c6add6faf73bf44205a19c6d9103c0c2fdcae2be569cfb074ef6b1833d136f"}, {"function": "question_bank", "heading": "Alcance de H1", "sha256": "a0a083c0ed299c40eb684212bb508b870f75a588a13e3a469bbb7198b7aa1c84"}], "relations": {"unit_relations": {"unit-7": {"question_context": ["context", "question"]}, "unit-8": {}, "unit-9": {"question_context": ["context", "question"]}, "unit-10": {"question_context": ["context", "question"]}, "unit-11": {}, "unit-12": {"question_context": ["context", "question"]}}, "schedule": "concurrent_support", "source_supports_enriched": true}, "timeline_refs": [0, 1, 2, 3, 4], "composition": {"origin_slides": [7, 8]}, "timing": {"seconds": 0, "allocations": [{"source_index": 0, "seconds": 0, "decision": "Intervalo compartido íntegro; propietario contable seleccionado por función de actividad y referencia timeline de unidad (identidad semántica en empates). Soporte, sin duplicación contable.  Soporte concurrente del mismo reloj fuente: no son turnos de defensa ni una secuencia adicional. Trabajo paralelo: Abrir código, README, Scrum y enlaces de entrega.", "source_time": "0–5 min", "source_seconds": 300, "is_owner": false, "function": "question_bank"}, {"source_index": 1, "seconds": 0, "decision": "Intervalo compartido íntegro; propietario contable seleccionado por función de actividad y referencia timeline de unidad (identidad semántica en empates). Soporte, sin duplicación contable.  Soporte concurrente del mismo reloj fuente: no son turnos de defensa ni una secuencia adicional. Trabajo paralelo: Ensayo y revisión por parejas: señalar, predecir, modificar y comprobar.", "source_time": "5–15 min", "source_seconds": 600, "is_owner": false, "function": "question_bank"}, {"source_index": 2, "seconds": 0, "decision": "Intervalo compartido íntegro; propietario contable seleccionado por función de actividad y referencia timeline de unidad (identidad semántica en empates). Soporte, sin duplicación contable.  Soporte concurrente del mismo reloj fuente: no son turnos de defensa ni una secuencia adicional. Trabajo paralelo: Review del incremento y retrospectiva en equipo.", "source_time": "15–28 min", "source_seconds": 780, "is_owner": false, "function": "question_bank"}, {"source_index": 3, "seconds": 0, "decision": "Intervalo compartido íntegro; propietario contable seleccionado por función de actividad y referencia timeline de unidad (identidad semántica en empates). Soporte, sin duplicación contable.  Soporte concurrente del mismo reloj fuente: no son turnos de defensa ni una secuencia adicional. Trabajo paralelo: Preparar la entrega Moodle, revisar enlaces profundos y probar permisos.", "source_time": "28–38 min", "source_seconds": 600, "is_owner": false, "function": "question_bank"}, {"source_index": 4, "seconds": 0, "decision": "Intervalo compartido íntegro; propietario contable seleccionado por función de actividad y referencia timeline de unidad (identidad semántica en empates). Soporte, sin duplicación contable.  Soporte concurrente del mismo reloj fuente: no son turnos de defensa ni una secuencia adicional. Trabajo paralelo: Un integrante realiza la entrega; el equipo verifica que abre correctamente.", "source_time": "38–43 min", "source_seconds": 300, "is_owner": false, "function": "question_bank"}], "clock_intervals": [0, 1, 2, 3, 4], "presenter_notes": "Reloj fuente 0–5 min: duración compartida 300 segundos. Trabajo: Explicar el protocolo y confirmar el orden. Función del soporte: apoyo al trabajo. Soporte concurrente del mismo reloj fuente: no son turnos de defensa ni una secuencia adicional. Trabajo paralelo: Abrir código, README, Scrum y enlaces de entrega. Reloj fuente 5–15 min: duración compartida 600 segundos. Trabajo: Defensas individuales breves. Función del soporte: apoyo al trabajo. Soporte concurrente del mismo reloj fuente: no son turnos de defensa ni una secuencia adicional. Trabajo paralelo: Ensayo y revisión por parejas: señalar, predecir, modificar y comprobar. Reloj fuente 15–28 min: duración compartida 780 segundos. Trabajo: Continuar defensas y recuperar respuestas vagas sobre el código. Función del soporte: apoyo al trabajo. Soporte concurrente del mismo reloj fuente: no son turnos de defensa ni una secuencia adicional. Trabajo paralelo: Review del incremento y retrospectiva en equipo. Reloj fuente 28–38 min: duración compartida 600 segundos. Trabajo: Continuar defensas o una segunda comprobación breve cuando haga falta. Función del soporte: apoyo al trabajo. Soporte concurrente del mismo reloj fuente: no son turnos de defensa ni una secuencia adicional. Trabajo paralelo: Preparar la entrega Moodle, revisar enlaces profundos y probar permisos. Reloj fuente 38–43 min: duración compartida 300 segundos. Trabajo: Resolver defensas pendientes sin convertirlas en exposiciones. Función del soporte: apoyo al trabajo. Soporte concurrente del mismo reloj fuente: no son turnos de defensa ni una secuencia adicional. Trabajo paralelo: Un integrante realiza la entrega; el equipo verifica que abre correctamente.", "shared_intervals": [{"source_index": 0, "source_time": "0–5 min", "seconds": 300, "is_owner": false, "function": "question_bank", "action": "Explicar el protocolo y confirmar el orden.", "concurrent": true, "parallel_work": "Abrir código, README, Scrum y enlaces de entrega."}, {"source_index": 1, "source_time": "5–15 min", "seconds": 600, "is_owner": false, "function": "question_bank", "action": "Defensas individuales breves.", "concurrent": true, "parallel_work": "Ensayo y revisión por parejas: señalar, predecir, modificar y comprobar."}, {"source_index": 2, "source_time": "15–28 min", "seconds": 780, "is_owner": false, "function": "question_bank", "action": "Continuar defensas y recuperar respuestas vagas sobre el código.", "concurrent": true, "parallel_work": "Review del incremento y retrospectiva en equipo."}, {"source_index": 3, "source_time": "28–38 min", "seconds": 600, "is_owner": false, "function": "question_bank", "action": "Continuar defensas o una segunda comprobación breve cuando haga falta.", "concurrent": true, "parallel_work": "Preparar la entrega Moodle, revisar enlaces profundos y probar permisos."}, {"source_index": 4, "source_time": "38–43 min", "seconds": 300, "is_owner": false, "function": "question_bank", "action": "Resolver defensas pendientes sin convertirlas en exposiciones.", "concurrent": true, "parallel_work": "Un integrante realiza la entrega; el equipo verifica que abre correctamente."}]}, "code_blocks": [], "representation_needs": []}</ns0:renderMetadata>
+      <ns0:renderMetadata xmlns:ns0="urn:minijarvis:semantic-render:v1">{"session": "215", "source_files": {"teacher": "/mnt/compartido/Programación-26-27/Minijarvis/02-PROFESORADO/02-SESIONES/h1/S215-defensa-y-cierre-h1-docente.md", "student_fallback": "/mnt/compartido/Programación-26-27/Minijarvis/01-ALUMNADO/03-SESIONES/h1/S215-defensa-y-cierre-h1-alumnado.md"}, "layout": "concept", "plan_index": 1, "recognition": false, "unit_ids": ["unit-7", "unit-8", "unit-9", "unit-10", "unit-11", "unit-12"], "roles": {"unit-7": "core", "unit-8": "core", "unit-9": "core", "unit-10": "core", "unit-11": "core", "unit-12": "core"}, "source_refs": [{"source": "teacher", "heading": "Estructura y ejecución", "block_index": 7, "fragment": 0}, {"source": "teacher", "heading": "Banco de preguntas para seleccionar", "block_index": 6, "fragment": 0}, {"source": "teacher", "heading": "Variables, constantes y literales", "block_index": 8, "fragment": 0}, {"source": "teacher", "heading": "Banco de preguntas para seleccionar", "block_index": 6, "fragment": 0}, {"source": "teacher", "heading": "Expresiones, operaciones y actualizaciones", "block_index": 9, "fragment": 0}, {"source": "teacher", "heading": "Banco de preguntas para seleccionar", "block_index": 6, "fragment": 0}, {"source": "teacher", "heading": "Entrada y conversiones", "block_index": 10, "fragment": 0}, {"source": "teacher", "heading": "Banco de preguntas para seleccionar", "block_index": 6, "fragment": 0}, {"source": "teacher", "heading": "Comparación booleana sin bifurcación", "block_index": 11, "fragment": 0}, {"source": "teacher", "heading": "Banco de preguntas para seleccionar", "block_index": 6, "fragment": 0}, {"source": "teacher", "heading": "Alcance de H1", "block_index": 12, "fragment": 0}, {"source": "teacher", "heading": "Banco de preguntas para seleccionar", "block_index": 6, "fragment": 0}], "visible_sources": [{"index": 13, "sha256": "9529b337863bec26ae973e887d521b7e76b49212695b5e1ca08146a300215e04"}], "notes_sources": [{"function": "question_bank", "heading": "Estructura y ejecución", "sha256": "62421f1b7bb6e18172b979788547424a3448a3da828fcb0496467cafc861be09"}, {"function": "question_bank", "heading": "Variables, constantes y literales", "sha256": "1707da5d024e7a1e76bfefb6ee930f1fff4625d488d19884086596be0b72ceed"}, {"function": "question_bank", "heading": "Expresiones, operaciones y actualizaciones", "sha256": "146e14b0f71ce43bed0b591bc10fa6ad9629a07de6c0b187c5927028340b06b6"}, {"function": "question_bank", "heading": "Entrada y conversiones", "sha256": "98a5b57d0280b9ab057df979ce951f689de2741a6dc527059249e80c1b8c78eb"}, {"function": "question_bank", "heading": "Comparación booleana sin bifurcación", "sha256": "6d45baf211e0cabd700bead8f0e8cd20b098fb14179d88675243b25c8e6a84b0"}, {"function": "question_bank", "heading": "Alcance de H1", "sha256": "a0a083c0ed299c40eb684212bb508b870f75a588a13e3a469bbb7198b7aa1c84"}], "relations": {"unit_relations": {"unit-7": {"question_context": ["context", "question"]}, "unit-8": {}, "unit-9": {"question_context": ["context", "question"]}, "unit-10": {"question_context": ["context", "question"]}, "unit-11": {}, "unit-12": {"question_context": ["context", "question"]}}, "schedule": "concurrent_support", "source_supports_enriched": true}, "timeline_refs": [0, 1, 2, 3, 4], "composition": {"origin_slides": [7, 8]}, "timing": {"seconds": 0, "allocations": [{"source_index": 0, "seconds": 0, "decision": "Intervalo compartido íntegro; propietario contable seleccionado por función de actividad y referencia timeline de unidad (identidad semántica en empates). Soporte, sin duplicación contable.  Soporte concurrente del mismo reloj fuente: no son turnos de defensa ni una secuencia adicional. Trabajo paralelo: Abrir código, README, Scrum y enlaces de entrega.", "source_time": "0–5 min", "source_seconds": 300, "is_owner": false, "function": "question_bank"}, {"source_index": 1, "seconds": 0, "decision": "Intervalo compartido íntegro; propietario contable seleccionado por función de actividad y referencia timeline de unidad (identidad semántica en empates). Soporte, sin duplicación contable.  Soporte concurrente del mismo reloj fuente: no son turnos de defensa ni una secuencia adicional. Trabajo paralelo: Ensayo y revisión por parejas: señalar, predecir, modificar y comprobar.", "source_time": "5–15 min", "source_seconds": 600, "is_owner": false, "function": "question_bank"}, {"source_index": 2, "seconds": 0, "decision": "Intervalo compartido íntegro; propietario contable seleccionado por función de actividad y referencia timeline de unidad (identidad semántica en empates). Soporte, sin duplicación contable.  Soporte concurrente del mismo reloj fuente: no son turnos de defensa ni una secuencia adicional. Trabajo paralelo: Review del incremento y retrospectiva en equipo.", "source_time": "15–28 min", "source_seconds": 780, "is_owner": false, "function": "question_bank"}, {"source_index": 3, "seconds": 0, "decision": "Intervalo compartido íntegro; propietario contable seleccionado por función de actividad y referencia timeline de unidad (identidad semántica en empates). Soporte, sin duplicación contable.  Soporte concurrente del mismo reloj fuente: no son turnos de defensa ni una secuencia adicional. Trabajo paralelo: Preparar la entrega Moodle, revisar enlaces profundos y probar permisos.", "source_time": "28–38 min", "source_seconds": 600, "is_owner": false, "function": "question_bank"}, {"source_index": 4, "seconds": 0, "decision": "Intervalo compartido íntegro; propietario contable seleccionado por función de actividad y referencia timeline de unidad (identidad semántica en empates). Soporte, sin duplicación contable.  Soporte concurrente del mismo reloj fuente: no son turnos de defensa ni una secuencia adicional. Trabajo paralelo: Un integrante realiza la entrega; el equipo verifica que abre correctamente.", "source_time": "38–43 min", "source_seconds": 300, "is_owner": false, "function": "question_bank"}], "clock_intervals": [0, 1, 2, 3, 4], "presenter_notes": "Reloj fuente 0–5 min: duración compartida 300 segundos. Trabajo: Explicar el protocolo y confirmar el orden. Función del soporte: apoyo al trabajo. Soporte concurrente del mismo reloj fuente: no son turnos de defensa ni una secuencia adicional. Trabajo paralelo: Abrir código, README, Scrum y enlaces de entrega. Reloj fuente 5–15 min: duración compartida 600 segundos. Trabajo: Defensas individuales breves. Función del soporte: apoyo al trabajo. Soporte concurrente del mismo reloj fuente: no son turnos de defensa ni una secuencia adicional. Trabajo paralelo: Ensayo y revisión por parejas: señalar, predecir, modificar y comprobar. Reloj fuente 15–28 min: duración compartida 780 segundos. Trabajo: Continuar defensas y recuperar respuestas vagas sobre el código. Función del soporte: apoyo al trabajo. Soporte concurrente del mismo reloj fuente: no son turnos de defensa ni una secuencia adicional. Trabajo paralelo: Review del incremento y retrospectiva en equipo. Reloj fuente 28–38 min: duración compartida 600 segundos. Trabajo: Continuar defensas o una segunda comprobación breve cuando haga falta. Función del soporte: apoyo al trabajo. Soporte concurrente del mismo reloj fuente: no son turnos de defensa ni una secuencia adicional. Trabajo paralelo: Preparar la entrega Moodle, revisar enlaces profundos y probar permisos. Reloj fuente 38–43 min: duración compartida 300 segundos. Trabajo: Resolver defensas pendientes sin convertirlas en exposiciones. Función del soporte: apoyo al trabajo. Soporte concurrente del mismo reloj fuente: no son turnos de defensa ni una secuencia adicional. Trabajo paralelo: Un integrante realiza la entrega; el equipo verifica que abre correctamente.", "shared_intervals": [{"source_index": 0, "source_time": "0–5 min", "seconds": 300, "is_owner": false, "function": "question_bank", "action": "Explicar el protocolo y confirmar el orden.", "concurrent": true, "parallel_work": "Abrir código, README, Scrum y enlaces de entrega."}, {"source_index": 1, "source_time": "5–15 min", "seconds": 600, "is_owner": false, "function": "question_bank", "action": "Defensas individuales breves.", "concurrent": true, "parallel_work": "Ensayo y revisión por parejas: señalar, predecir, modificar y comprobar."}, {"source_index": 2, "source_time": "15–28 min", "seconds": 780, "is_owner": false, "function": "question_bank", "action": "Continuar defensas y recuperar respuestas vagas sobre el código.", "concurrent": true, "parallel_work": "Review del incremento y retrospectiva en equipo."}, {"source_index": 3, "source_time": "28–38 min", "seconds": 600, "is_owner": false, "function": "question_bank", "action": "Continuar defensas o una segunda comprobación breve cuando haga falta.", "concurrent": true, "parallel_work": "Preparar la entrega Moodle, revisar enlaces profundos y probar permisos."}, {"source_index": 4, "source_time": "38–43 min", "seconds": 300, "is_owner": false, "function": "question_bank", "action": "Resolver defensas pendientes sin convertirlas en exposiciones.", "concurrent": true, "parallel_work": "Un integrante realiza la entrega; el equipo verifica que abre correctamente."}]}, "code_blocks": [], "representation_needs": []}</ns0:renderMetadata>
     </p:ext>
   </p:extLst>
 </p:sld>

--- a/02-PROFESORADO/03-PRESENTACIONES/POR-SESION/h1/S215-defensa-y-cierre-h1-presentacion.pptx
+++ b/02-PROFESORADO/03-PRESENTACIONES/POR-SESION/h1/S215-defensa-y-cierre-h1-presentacion.pptx
@@ -6044,7 +6044,7 @@
               </a:defRPr>
             </a:pPr>
             <a:r>
-              <a:t>S215 · H1 — Primer asistente ejecutable</a:t>
+              <a:t>H1.10 · H1 — Primer asistente ejecutable</a:t>
             </a:r>
           </a:p>
         </p:txBody>
@@ -6369,7 +6369,7 @@
               </a:defRPr>
             </a:pPr>
             <a:r>
-              <a:t>S215 · H1 — Primer asistente ejecutable</a:t>
+              <a:t>H1.10 · H1 — Primer asistente ejecutable</a:t>
             </a:r>
           </a:p>
         </p:txBody>
@@ -6918,7 +6918,7 @@
               </a:defRPr>
             </a:pPr>
             <a:r>
-              <a:t>S215 · H1 — Primer asistente ejecutable</a:t>
+              <a:t>H1.10 · H1 — Primer asistente ejecutable</a:t>
             </a:r>
           </a:p>
         </p:txBody>
@@ -7453,7 +7453,7 @@
               </a:defRPr>
             </a:pPr>
             <a:r>
-              <a:t>S215 · H1 — Primer asistente ejecutable</a:t>
+              <a:t>H1.10 · H1 — Primer asistente ejecutable</a:t>
             </a:r>
           </a:p>
         </p:txBody>
@@ -7890,7 +7890,7 @@
               </a:defRPr>
             </a:pPr>
             <a:r>
-              <a:t>S215 · H1 — Primer asistente ejecutable</a:t>
+              <a:t>H1.10 · H1 — Primer asistente ejecutable</a:t>
             </a:r>
           </a:p>
         </p:txBody>
@@ -8324,7 +8324,7 @@
               </a:defRPr>
             </a:pPr>
             <a:r>
-              <a:t>S215 · H1 — Primer asistente ejecutable</a:t>
+              <a:t>H1.10 · H1 — Primer asistente ejecutable</a:t>
             </a:r>
           </a:p>
         </p:txBody>
@@ -8408,7 +8408,7 @@
               </a:defRPr>
             </a:pPr>
             <a:r>
-              <a:t>S215 contiene la única entrega oficial de H1.</a:t>
+              <a:t>H1.10 contiene la única entrega oficial de H1.</a:t>
             </a:r>
           </a:p>
         </p:txBody>
@@ -8562,7 +8562,7 @@
               </a:defRPr>
             </a:pPr>
             <a:r>
-              <a:t>S215 · H1 — Primer asistente ejecutable</a:t>
+              <a:t>H1.10 · H1 — Primer asistente ejecutable</a:t>
             </a:r>
           </a:p>
         </p:txBody>
@@ -8947,7 +8947,7 @@
               </a:defRPr>
             </a:pPr>
             <a:r>
-              <a:t>S215 · H1 — Primer asistente ejecutable</a:t>
+              <a:t>H1.10 · H1 — Primer asistente ejecutable</a:t>
             </a:r>
           </a:p>
         </p:txBody>
@@ -9290,7 +9290,7 @@
               </a:defRPr>
             </a:pPr>
             <a:r>
-              <a:t>S215 · H1 — Primer asistente ejecutable</a:t>
+              <a:t>H1.10 · H1 — Primer asistente ejecutable</a:t>
             </a:r>
           </a:p>
         </p:txBody>
@@ -9430,7 +9430,7 @@
               </a:defRPr>
             </a:pPr>
             <a:r>
-              <a:t>Site: no se actualiza ni se enlaza en S215; H1 podrá seleccionarse posteriormente durante C1.</a:t>
+              <a:t>Site: no se actualiza ni se enlaza en H1.10; H1 podrá seleccionarse posteriormente durante C1.</a:t>
             </a:r>
           </a:p>
         </p:txBody>
@@ -9633,7 +9633,7 @@
               </a:defRPr>
             </a:pPr>
             <a:r>
-              <a:t>S215 · H1 — Primer asistente ejecutable</a:t>
+              <a:t>H1.10 · H1 — Primer asistente ejecutable</a:t>
             </a:r>
           </a:p>
         </p:txBody>
@@ -9871,7 +9871,7 @@
               </a:defRPr>
             </a:pPr>
             <a:r>
-              <a:t>S215 · H1 — Primer asistente ejecutable</a:t>
+              <a:t>H1.10 · H1 — Primer asistente ejecutable</a:t>
             </a:r>
           </a:p>
         </p:txBody>
@@ -10312,7 +10312,7 @@
               </a:defRPr>
             </a:pPr>
             <a:r>
-              <a:t>S215 · H1 — Primer asistente ejecutable</a:t>
+              <a:t>H1.10 · H1 — Primer asistente ejecutable</a:t>
             </a:r>
           </a:p>
         </p:txBody>
@@ -10886,7 +10886,7 @@
               </a:defRPr>
             </a:pPr>
             <a:r>
-              <a:t>S215 · H1 — Primer asistente ejecutable</a:t>
+              <a:t>H1.10 · H1 — Primer asistente ejecutable</a:t>
             </a:r>
           </a:p>
         </p:txBody>
@@ -11124,7 +11124,7 @@
               </a:defRPr>
             </a:pPr>
             <a:r>
-              <a:t>S215 · H1 — Primer asistente ejecutable</a:t>
+              <a:t>H1.10 · H1 — Primer asistente ejecutable</a:t>
             </a:r>
           </a:p>
         </p:txBody>
@@ -11369,7 +11369,7 @@
               </a:defRPr>
             </a:pPr>
             <a:r>
-              <a:t>S215 · H1 — Primer asistente ejecutable</a:t>
+              <a:t>H1.10 · H1 — Primer asistente ejecutable</a:t>
             </a:r>
           </a:p>
         </p:txBody>
@@ -11612,7 +11612,7 @@
               </a:defRPr>
             </a:pPr>
             <a:r>
-              <a:t>S215 · H1 — Primer asistente ejecutable</a:t>
+              <a:t>H1.10 · H1 — Primer asistente ejecutable</a:t>
             </a:r>
           </a:p>
         </p:txBody>
@@ -11813,7 +11813,7 @@
               </a:defRPr>
             </a:pPr>
             <a:r>
-              <a:t>S215 · H1 — Primer asistente ejecutable</a:t>
+              <a:t>H1.10 · H1 — Primer asistente ejecutable</a:t>
             </a:r>
           </a:p>
         </p:txBody>
@@ -12296,7 +12296,7 @@
               </a:defRPr>
             </a:pPr>
             <a:r>
-              <a:t>S215 · H1 — Primer asistente ejecutable</a:t>
+              <a:t>H1.10 · H1 — Primer asistente ejecutable</a:t>
             </a:r>
           </a:p>
         </p:txBody>
@@ -12492,7 +12492,7 @@
               </a:defRPr>
             </a:pPr>
             <a:r>
-              <a:t>S215 · H1 — Primer asistente ejecutable</a:t>
+              <a:t>H1.10 · H1 — Primer asistente ejecutable</a:t>
             </a:r>
           </a:p>
         </p:txBody>
@@ -12858,7 +12858,7 @@
               </a:defRPr>
             </a:pPr>
             <a:r>
-              <a:t>S215 · H1 — Primer asistente ejecutable</a:t>
+              <a:t>H1.10 · H1 — Primer asistente ejecutable</a:t>
             </a:r>
           </a:p>
         </p:txBody>
@@ -13059,7 +13059,7 @@
               </a:defRPr>
             </a:pPr>
             <a:r>
-              <a:t>S215 · H1 — Primer asistente ejecutable</a:t>
+              <a:t>H1.10 · H1 — Primer asistente ejecutable</a:t>
             </a:r>
           </a:p>
         </p:txBody>
